--- a/2026 WSDS - Wujian Xue.pptx
+++ b/2026 WSDS - Wujian Xue.pptx
@@ -6,6 +6,11 @@
   </p:sldMasterIdLst>
   <p:sldIdLst>
     <p:sldId id="256" r:id="rId2"/>
+    <p:sldId id="257" r:id="rId3"/>
+    <p:sldId id="258" r:id="rId4"/>
+    <p:sldId id="259" r:id="rId5"/>
+    <p:sldId id="260" r:id="rId6"/>
+    <p:sldId id="261" r:id="rId7"/>
   </p:sldIdLst>
   <p:sldSz cx="12192000" cy="6858000"/>
   <p:notesSz cx="6858000" cy="9144000"/>
@@ -104,6 +109,11 @@
       </a:defRPr>
     </a:lvl9pPr>
   </p:defaultTextStyle>
+  <p:extLst>
+    <p:ext uri="{EFAFB233-063F-42B5-8137-9DF3F51BA10A}">
+      <p15:sldGuideLst xmlns:p15="http://schemas.microsoft.com/office/powerpoint/2012/main"/>
+    </p:ext>
+  </p:extLst>
 </p:presentation>
 </file>
 
@@ -254,7 +264,7 @@
           <a:p>
             <a:fld id="{9DFF5FDE-556D-4288-960F-3880543CC0D0}" type="datetimeFigureOut">
               <a:rPr lang="en-US" smtClean="0"/>
-              <a:t>9/27/2026</a:t>
+              <a:t>10/4/2026</a:t>
             </a:fld>
             <a:endParaRPr lang="en-US"/>
           </a:p>
@@ -452,7 +462,7 @@
           <a:p>
             <a:fld id="{9DFF5FDE-556D-4288-960F-3880543CC0D0}" type="datetimeFigureOut">
               <a:rPr lang="en-US" smtClean="0"/>
-              <a:t>9/27/2026</a:t>
+              <a:t>10/4/2026</a:t>
             </a:fld>
             <a:endParaRPr lang="en-US"/>
           </a:p>
@@ -660,7 +670,7 @@
           <a:p>
             <a:fld id="{9DFF5FDE-556D-4288-960F-3880543CC0D0}" type="datetimeFigureOut">
               <a:rPr lang="en-US" smtClean="0"/>
-              <a:t>9/27/2026</a:t>
+              <a:t>10/4/2026</a:t>
             </a:fld>
             <a:endParaRPr lang="en-US"/>
           </a:p>
@@ -858,7 +868,7 @@
           <a:p>
             <a:fld id="{9DFF5FDE-556D-4288-960F-3880543CC0D0}" type="datetimeFigureOut">
               <a:rPr lang="en-US" smtClean="0"/>
-              <a:t>9/27/2026</a:t>
+              <a:t>10/4/2026</a:t>
             </a:fld>
             <a:endParaRPr lang="en-US"/>
           </a:p>
@@ -1133,7 +1143,7 @@
           <a:p>
             <a:fld id="{9DFF5FDE-556D-4288-960F-3880543CC0D0}" type="datetimeFigureOut">
               <a:rPr lang="en-US" smtClean="0"/>
-              <a:t>9/27/2026</a:t>
+              <a:t>10/4/2026</a:t>
             </a:fld>
             <a:endParaRPr lang="en-US"/>
           </a:p>
@@ -1398,7 +1408,7 @@
           <a:p>
             <a:fld id="{9DFF5FDE-556D-4288-960F-3880543CC0D0}" type="datetimeFigureOut">
               <a:rPr lang="en-US" smtClean="0"/>
-              <a:t>9/27/2026</a:t>
+              <a:t>10/4/2026</a:t>
             </a:fld>
             <a:endParaRPr lang="en-US"/>
           </a:p>
@@ -1810,7 +1820,7 @@
           <a:p>
             <a:fld id="{9DFF5FDE-556D-4288-960F-3880543CC0D0}" type="datetimeFigureOut">
               <a:rPr lang="en-US" smtClean="0"/>
-              <a:t>9/27/2026</a:t>
+              <a:t>10/4/2026</a:t>
             </a:fld>
             <a:endParaRPr lang="en-US"/>
           </a:p>
@@ -1951,7 +1961,7 @@
           <a:p>
             <a:fld id="{9DFF5FDE-556D-4288-960F-3880543CC0D0}" type="datetimeFigureOut">
               <a:rPr lang="en-US" smtClean="0"/>
-              <a:t>9/27/2026</a:t>
+              <a:t>10/4/2026</a:t>
             </a:fld>
             <a:endParaRPr lang="en-US"/>
           </a:p>
@@ -2064,7 +2074,7 @@
           <a:p>
             <a:fld id="{9DFF5FDE-556D-4288-960F-3880543CC0D0}" type="datetimeFigureOut">
               <a:rPr lang="en-US" smtClean="0"/>
-              <a:t>9/27/2026</a:t>
+              <a:t>10/4/2026</a:t>
             </a:fld>
             <a:endParaRPr lang="en-US"/>
           </a:p>
@@ -2375,7 +2385,7 @@
           <a:p>
             <a:fld id="{9DFF5FDE-556D-4288-960F-3880543CC0D0}" type="datetimeFigureOut">
               <a:rPr lang="en-US" smtClean="0"/>
-              <a:t>9/27/2026</a:t>
+              <a:t>10/4/2026</a:t>
             </a:fld>
             <a:endParaRPr lang="en-US"/>
           </a:p>
@@ -2663,7 +2673,7 @@
           <a:p>
             <a:fld id="{9DFF5FDE-556D-4288-960F-3880543CC0D0}" type="datetimeFigureOut">
               <a:rPr lang="en-US" smtClean="0"/>
-              <a:t>9/27/2026</a:t>
+              <a:t>10/4/2026</a:t>
             </a:fld>
             <a:endParaRPr lang="en-US"/>
           </a:p>
@@ -2904,7 +2914,7 @@
           <a:p>
             <a:fld id="{9DFF5FDE-556D-4288-960F-3880543CC0D0}" type="datetimeFigureOut">
               <a:rPr lang="en-US" smtClean="0"/>
-              <a:t>9/27/2026</a:t>
+              <a:t>10/4/2026</a:t>
             </a:fld>
             <a:endParaRPr lang="en-US"/>
           </a:p>
@@ -3339,8 +3349,8 @@
         </p:nvSpPr>
         <p:spPr>
           <a:xfrm>
-            <a:off x="487017" y="1122363"/>
-            <a:ext cx="11569148" cy="2387600"/>
+            <a:off x="67917" y="311771"/>
+            <a:ext cx="12056165" cy="2387600"/>
           </a:xfrm>
         </p:spPr>
         <p:txBody>
@@ -3350,10 +3360,35 @@
           <a:lstStyle/>
           <a:p>
             <a:r>
-              <a:rPr lang="en-US" b="1" dirty="0"/>
-              <a:t>From On-Premise to Cloud: Lessons Learned from an Enterprise AWS Migration at Fannie Mae</a:t>
-            </a:r>
-            <a:endParaRPr lang="en-US" dirty="0"/>
+              <a:rPr lang="en-US" sz="8000" b="1" dirty="0">
+                <a:latin typeface="Times New Roman" panose="02020603050405020304" pitchFamily="18" charset="0"/>
+                <a:cs typeface="Times New Roman" panose="02020603050405020304" pitchFamily="18" charset="0"/>
+              </a:rPr>
+              <a:t>From On-Premise to Cloud: </a:t>
+            </a:r>
+            <a:br>
+              <a:rPr lang="en-US" b="1" dirty="0">
+                <a:latin typeface="Times New Roman" panose="02020603050405020304" pitchFamily="18" charset="0"/>
+                <a:cs typeface="Times New Roman" panose="02020603050405020304" pitchFamily="18" charset="0"/>
+              </a:rPr>
+            </a:br>
+            <a:br>
+              <a:rPr lang="en-US" sz="3200" b="1" dirty="0">
+                <a:latin typeface="Times New Roman" panose="02020603050405020304" pitchFamily="18" charset="0"/>
+                <a:cs typeface="Times New Roman" panose="02020603050405020304" pitchFamily="18" charset="0"/>
+              </a:rPr>
+            </a:br>
+            <a:r>
+              <a:rPr lang="en-US" sz="3200" b="1" dirty="0">
+                <a:latin typeface="Times New Roman" panose="02020603050405020304" pitchFamily="18" charset="0"/>
+                <a:cs typeface="Times New Roman" panose="02020603050405020304" pitchFamily="18" charset="0"/>
+              </a:rPr>
+              <a:t>Lessons Learned from an Enterprise AWS Migration at Fannie Mae</a:t>
+            </a:r>
+            <a:endParaRPr lang="en-US" sz="3200" dirty="0">
+              <a:latin typeface="Times New Roman" panose="02020603050405020304" pitchFamily="18" charset="0"/>
+              <a:cs typeface="Times New Roman" panose="02020603050405020304" pitchFamily="18" charset="0"/>
+            </a:endParaRPr>
           </a:p>
         </p:txBody>
       </p:sp>
@@ -3373,19 +3408,30 @@
             <p:ph type="subTitle" idx="1"/>
           </p:nvPr>
         </p:nvSpPr>
-        <p:spPr/>
-        <p:txBody>
-          <a:bodyPr/>
-          <a:lstStyle/>
-          <a:p>
-            <a:r>
-              <a:rPr lang="en-US" altLang="zh-CN" dirty="0"/>
+        <p:spPr>
+          <a:xfrm>
+            <a:off x="1524000" y="4158629"/>
+            <a:ext cx="9144000" cy="1655762"/>
+          </a:xfrm>
+        </p:spPr>
+        <p:txBody>
+          <a:bodyPr/>
+          <a:lstStyle/>
+          <a:p>
+            <a:r>
+              <a:rPr lang="en-US" altLang="zh-CN" dirty="0">
+                <a:latin typeface="Times New Roman" panose="02020603050405020304" pitchFamily="18" charset="0"/>
+                <a:cs typeface="Times New Roman" panose="02020603050405020304" pitchFamily="18" charset="0"/>
+              </a:rPr>
               <a:t>Wujian Xue</a:t>
             </a:r>
           </a:p>
           <a:p>
             <a:r>
-              <a:rPr lang="en-US"/>
+              <a:rPr lang="en-US" dirty="0">
+                <a:latin typeface="Times New Roman" panose="02020603050405020304" pitchFamily="18" charset="0"/>
+                <a:cs typeface="Times New Roman" panose="02020603050405020304" pitchFamily="18" charset="0"/>
+              </a:rPr>
               <a:t>Oct 2026</a:t>
             </a:r>
           </a:p>
@@ -3395,6 +3441,431 @@
     <p:extLst>
       <p:ext uri="{BB962C8B-B14F-4D97-AF65-F5344CB8AC3E}">
         <p14:creationId xmlns:p14="http://schemas.microsoft.com/office/powerpoint/2010/main" val="2572152849"/>
+      </p:ext>
+    </p:extLst>
+  </p:cSld>
+  <p:clrMapOvr>
+    <a:masterClrMapping/>
+  </p:clrMapOvr>
+</p:sld>
+</file>
+
+<file path=ppt/slides/slide2.xml><?xml version="1.0" encoding="utf-8"?>
+<p:sld xmlns:a="http://schemas.openxmlformats.org/drawingml/2006/main" xmlns:r="http://schemas.openxmlformats.org/officeDocument/2006/relationships" xmlns:p="http://schemas.openxmlformats.org/presentationml/2006/main">
+  <p:cSld>
+    <p:spTree>
+      <p:nvGrpSpPr>
+        <p:cNvPr id="1" name=""/>
+        <p:cNvGrpSpPr/>
+        <p:nvPr/>
+      </p:nvGrpSpPr>
+      <p:grpSpPr>
+        <a:xfrm>
+          <a:off x="0" y="0"/>
+          <a:ext cx="0" cy="0"/>
+          <a:chOff x="0" y="0"/>
+          <a:chExt cx="0" cy="0"/>
+        </a:xfrm>
+      </p:grpSpPr>
+      <p:sp>
+        <p:nvSpPr>
+          <p:cNvPr id="2" name="Title 1">
+            <a:extLst>
+              <a:ext uri="{FF2B5EF4-FFF2-40B4-BE49-F238E27FC236}">
+                <a16:creationId xmlns:a16="http://schemas.microsoft.com/office/drawing/2014/main" id="{77E4F433-6378-4049-F2C3-EE92E0049A7B}"/>
+              </a:ext>
+            </a:extLst>
+          </p:cNvPr>
+          <p:cNvSpPr>
+            <a:spLocks noGrp="1"/>
+          </p:cNvSpPr>
+          <p:nvPr>
+            <p:ph type="title"/>
+          </p:nvPr>
+        </p:nvSpPr>
+        <p:spPr/>
+        <p:txBody>
+          <a:bodyPr/>
+          <a:lstStyle/>
+          <a:p>
+            <a:r>
+              <a:rPr lang="en-US" dirty="0"/>
+              <a:t>Background</a:t>
+            </a:r>
+          </a:p>
+        </p:txBody>
+      </p:sp>
+      <p:sp>
+        <p:nvSpPr>
+          <p:cNvPr id="3" name="Content Placeholder 2">
+            <a:extLst>
+              <a:ext uri="{FF2B5EF4-FFF2-40B4-BE49-F238E27FC236}">
+                <a16:creationId xmlns:a16="http://schemas.microsoft.com/office/drawing/2014/main" id="{FF3838B1-29DE-A684-2D91-585BAAF4FB7E}"/>
+              </a:ext>
+            </a:extLst>
+          </p:cNvPr>
+          <p:cNvSpPr>
+            <a:spLocks noGrp="1"/>
+          </p:cNvSpPr>
+          <p:nvPr>
+            <p:ph idx="1"/>
+          </p:nvPr>
+        </p:nvSpPr>
+        <p:spPr/>
+        <p:txBody>
+          <a:bodyPr/>
+          <a:lstStyle/>
+          <a:p>
+            <a:r>
+              <a:rPr lang="en-US" dirty="0"/>
+              <a:t>What is the problem and why</a:t>
+            </a:r>
+          </a:p>
+        </p:txBody>
+      </p:sp>
+    </p:spTree>
+    <p:extLst>
+      <p:ext uri="{BB962C8B-B14F-4D97-AF65-F5344CB8AC3E}">
+        <p14:creationId xmlns:p14="http://schemas.microsoft.com/office/powerpoint/2010/main" val="2985780587"/>
+      </p:ext>
+    </p:extLst>
+  </p:cSld>
+  <p:clrMapOvr>
+    <a:masterClrMapping/>
+  </p:clrMapOvr>
+</p:sld>
+</file>
+
+<file path=ppt/slides/slide3.xml><?xml version="1.0" encoding="utf-8"?>
+<p:sld xmlns:a="http://schemas.openxmlformats.org/drawingml/2006/main" xmlns:r="http://schemas.openxmlformats.org/officeDocument/2006/relationships" xmlns:p="http://schemas.openxmlformats.org/presentationml/2006/main">
+  <p:cSld>
+    <p:spTree>
+      <p:nvGrpSpPr>
+        <p:cNvPr id="1" name=""/>
+        <p:cNvGrpSpPr/>
+        <p:nvPr/>
+      </p:nvGrpSpPr>
+      <p:grpSpPr>
+        <a:xfrm>
+          <a:off x="0" y="0"/>
+          <a:ext cx="0" cy="0"/>
+          <a:chOff x="0" y="0"/>
+          <a:chExt cx="0" cy="0"/>
+        </a:xfrm>
+      </p:grpSpPr>
+      <p:sp>
+        <p:nvSpPr>
+          <p:cNvPr id="2" name="Title 1">
+            <a:extLst>
+              <a:ext uri="{FF2B5EF4-FFF2-40B4-BE49-F238E27FC236}">
+                <a16:creationId xmlns:a16="http://schemas.microsoft.com/office/drawing/2014/main" id="{BA84EECB-BE89-FA10-B559-C2D06E9BFD18}"/>
+              </a:ext>
+            </a:extLst>
+          </p:cNvPr>
+          <p:cNvSpPr>
+            <a:spLocks noGrp="1"/>
+          </p:cNvSpPr>
+          <p:nvPr>
+            <p:ph type="title"/>
+          </p:nvPr>
+        </p:nvSpPr>
+        <p:spPr/>
+        <p:txBody>
+          <a:bodyPr/>
+          <a:lstStyle/>
+          <a:p>
+            <a:endParaRPr lang="en-US"/>
+          </a:p>
+        </p:txBody>
+      </p:sp>
+      <p:sp>
+        <p:nvSpPr>
+          <p:cNvPr id="3" name="Content Placeholder 2">
+            <a:extLst>
+              <a:ext uri="{FF2B5EF4-FFF2-40B4-BE49-F238E27FC236}">
+                <a16:creationId xmlns:a16="http://schemas.microsoft.com/office/drawing/2014/main" id="{D79C73C9-79BC-BE4B-D99B-67D620D66A20}"/>
+              </a:ext>
+            </a:extLst>
+          </p:cNvPr>
+          <p:cNvSpPr>
+            <a:spLocks noGrp="1"/>
+          </p:cNvSpPr>
+          <p:nvPr>
+            <p:ph idx="1"/>
+          </p:nvPr>
+        </p:nvSpPr>
+        <p:spPr/>
+        <p:txBody>
+          <a:bodyPr/>
+          <a:lstStyle/>
+          <a:p>
+            <a:r>
+              <a:rPr lang="en-US" dirty="0"/>
+              <a:t>What has been done about it?</a:t>
+            </a:r>
+          </a:p>
+          <a:p>
+            <a:endParaRPr lang="en-US" dirty="0"/>
+          </a:p>
+        </p:txBody>
+      </p:sp>
+    </p:spTree>
+    <p:extLst>
+      <p:ext uri="{BB962C8B-B14F-4D97-AF65-F5344CB8AC3E}">
+        <p14:creationId xmlns:p14="http://schemas.microsoft.com/office/powerpoint/2010/main" val="3421866799"/>
+      </p:ext>
+    </p:extLst>
+  </p:cSld>
+  <p:clrMapOvr>
+    <a:masterClrMapping/>
+  </p:clrMapOvr>
+</p:sld>
+</file>
+
+<file path=ppt/slides/slide4.xml><?xml version="1.0" encoding="utf-8"?>
+<p:sld xmlns:a="http://schemas.openxmlformats.org/drawingml/2006/main" xmlns:r="http://schemas.openxmlformats.org/officeDocument/2006/relationships" xmlns:p="http://schemas.openxmlformats.org/presentationml/2006/main">
+  <p:cSld>
+    <p:spTree>
+      <p:nvGrpSpPr>
+        <p:cNvPr id="1" name=""/>
+        <p:cNvGrpSpPr/>
+        <p:nvPr/>
+      </p:nvGrpSpPr>
+      <p:grpSpPr>
+        <a:xfrm>
+          <a:off x="0" y="0"/>
+          <a:ext cx="0" cy="0"/>
+          <a:chOff x="0" y="0"/>
+          <a:chExt cx="0" cy="0"/>
+        </a:xfrm>
+      </p:grpSpPr>
+      <p:sp>
+        <p:nvSpPr>
+          <p:cNvPr id="2" name="Title 1">
+            <a:extLst>
+              <a:ext uri="{FF2B5EF4-FFF2-40B4-BE49-F238E27FC236}">
+                <a16:creationId xmlns:a16="http://schemas.microsoft.com/office/drawing/2014/main" id="{8DB06789-BA5D-116A-9606-AAEF943A72D0}"/>
+              </a:ext>
+            </a:extLst>
+          </p:cNvPr>
+          <p:cNvSpPr>
+            <a:spLocks noGrp="1"/>
+          </p:cNvSpPr>
+          <p:nvPr>
+            <p:ph type="title"/>
+          </p:nvPr>
+        </p:nvSpPr>
+        <p:spPr/>
+        <p:txBody>
+          <a:bodyPr/>
+          <a:lstStyle/>
+          <a:p>
+            <a:endParaRPr lang="en-US"/>
+          </a:p>
+        </p:txBody>
+      </p:sp>
+      <p:sp>
+        <p:nvSpPr>
+          <p:cNvPr id="3" name="Content Placeholder 2">
+            <a:extLst>
+              <a:ext uri="{FF2B5EF4-FFF2-40B4-BE49-F238E27FC236}">
+                <a16:creationId xmlns:a16="http://schemas.microsoft.com/office/drawing/2014/main" id="{543B8BDC-C4C6-0905-5F9F-38B1383CEAC1}"/>
+              </a:ext>
+            </a:extLst>
+          </p:cNvPr>
+          <p:cNvSpPr>
+            <a:spLocks noGrp="1"/>
+          </p:cNvSpPr>
+          <p:nvPr>
+            <p:ph idx="1"/>
+          </p:nvPr>
+        </p:nvSpPr>
+        <p:spPr/>
+        <p:txBody>
+          <a:bodyPr/>
+          <a:lstStyle/>
+          <a:p>
+            <a:r>
+              <a:rPr lang="en-US" dirty="0"/>
+              <a:t>What have I done about it?</a:t>
+            </a:r>
+          </a:p>
+        </p:txBody>
+      </p:sp>
+    </p:spTree>
+    <p:extLst>
+      <p:ext uri="{BB962C8B-B14F-4D97-AF65-F5344CB8AC3E}">
+        <p14:creationId xmlns:p14="http://schemas.microsoft.com/office/powerpoint/2010/main" val="3588703417"/>
+      </p:ext>
+    </p:extLst>
+  </p:cSld>
+  <p:clrMapOvr>
+    <a:masterClrMapping/>
+  </p:clrMapOvr>
+</p:sld>
+</file>
+
+<file path=ppt/slides/slide5.xml><?xml version="1.0" encoding="utf-8"?>
+<p:sld xmlns:a="http://schemas.openxmlformats.org/drawingml/2006/main" xmlns:r="http://schemas.openxmlformats.org/officeDocument/2006/relationships" xmlns:p="http://schemas.openxmlformats.org/presentationml/2006/main">
+  <p:cSld>
+    <p:spTree>
+      <p:nvGrpSpPr>
+        <p:cNvPr id="1" name=""/>
+        <p:cNvGrpSpPr/>
+        <p:nvPr/>
+      </p:nvGrpSpPr>
+      <p:grpSpPr>
+        <a:xfrm>
+          <a:off x="0" y="0"/>
+          <a:ext cx="0" cy="0"/>
+          <a:chOff x="0" y="0"/>
+          <a:chExt cx="0" cy="0"/>
+        </a:xfrm>
+      </p:grpSpPr>
+      <p:sp>
+        <p:nvSpPr>
+          <p:cNvPr id="2" name="Title 1">
+            <a:extLst>
+              <a:ext uri="{FF2B5EF4-FFF2-40B4-BE49-F238E27FC236}">
+                <a16:creationId xmlns:a16="http://schemas.microsoft.com/office/drawing/2014/main" id="{B43C6558-4EC7-F455-AEE9-D12FD0A89C62}"/>
+              </a:ext>
+            </a:extLst>
+          </p:cNvPr>
+          <p:cNvSpPr>
+            <a:spLocks noGrp="1"/>
+          </p:cNvSpPr>
+          <p:nvPr>
+            <p:ph type="title"/>
+          </p:nvPr>
+        </p:nvSpPr>
+        <p:spPr/>
+        <p:txBody>
+          <a:bodyPr/>
+          <a:lstStyle/>
+          <a:p>
+            <a:endParaRPr lang="en-US"/>
+          </a:p>
+        </p:txBody>
+      </p:sp>
+      <p:sp>
+        <p:nvSpPr>
+          <p:cNvPr id="3" name="Content Placeholder 2">
+            <a:extLst>
+              <a:ext uri="{FF2B5EF4-FFF2-40B4-BE49-F238E27FC236}">
+                <a16:creationId xmlns:a16="http://schemas.microsoft.com/office/drawing/2014/main" id="{5655E68B-3CB9-4EB7-342D-A9E2A3772252}"/>
+              </a:ext>
+            </a:extLst>
+          </p:cNvPr>
+          <p:cNvSpPr>
+            <a:spLocks noGrp="1"/>
+          </p:cNvSpPr>
+          <p:nvPr>
+            <p:ph idx="1"/>
+          </p:nvPr>
+        </p:nvSpPr>
+        <p:spPr/>
+        <p:txBody>
+          <a:bodyPr/>
+          <a:lstStyle/>
+          <a:p>
+            <a:r>
+              <a:rPr lang="en-US" dirty="0"/>
+              <a:t>What additional value does my approach provide?</a:t>
+            </a:r>
+          </a:p>
+        </p:txBody>
+      </p:sp>
+    </p:spTree>
+    <p:extLst>
+      <p:ext uri="{BB962C8B-B14F-4D97-AF65-F5344CB8AC3E}">
+        <p14:creationId xmlns:p14="http://schemas.microsoft.com/office/powerpoint/2010/main" val="331261954"/>
+      </p:ext>
+    </p:extLst>
+  </p:cSld>
+  <p:clrMapOvr>
+    <a:masterClrMapping/>
+  </p:clrMapOvr>
+</p:sld>
+</file>
+
+<file path=ppt/slides/slide6.xml><?xml version="1.0" encoding="utf-8"?>
+<p:sld xmlns:a="http://schemas.openxmlformats.org/drawingml/2006/main" xmlns:r="http://schemas.openxmlformats.org/officeDocument/2006/relationships" xmlns:p="http://schemas.openxmlformats.org/presentationml/2006/main">
+  <p:cSld>
+    <p:spTree>
+      <p:nvGrpSpPr>
+        <p:cNvPr id="1" name=""/>
+        <p:cNvGrpSpPr/>
+        <p:nvPr/>
+      </p:nvGrpSpPr>
+      <p:grpSpPr>
+        <a:xfrm>
+          <a:off x="0" y="0"/>
+          <a:ext cx="0" cy="0"/>
+          <a:chOff x="0" y="0"/>
+          <a:chExt cx="0" cy="0"/>
+        </a:xfrm>
+      </p:grpSpPr>
+      <p:sp>
+        <p:nvSpPr>
+          <p:cNvPr id="2" name="Title 1">
+            <a:extLst>
+              <a:ext uri="{FF2B5EF4-FFF2-40B4-BE49-F238E27FC236}">
+                <a16:creationId xmlns:a16="http://schemas.microsoft.com/office/drawing/2014/main" id="{9E681912-C0D5-AF85-91B0-7D9532929F7F}"/>
+              </a:ext>
+            </a:extLst>
+          </p:cNvPr>
+          <p:cNvSpPr>
+            <a:spLocks noGrp="1"/>
+          </p:cNvSpPr>
+          <p:nvPr>
+            <p:ph type="title"/>
+          </p:nvPr>
+        </p:nvSpPr>
+        <p:spPr/>
+        <p:txBody>
+          <a:bodyPr/>
+          <a:lstStyle/>
+          <a:p>
+            <a:endParaRPr lang="en-US"/>
+          </a:p>
+        </p:txBody>
+      </p:sp>
+      <p:sp>
+        <p:nvSpPr>
+          <p:cNvPr id="3" name="Content Placeholder 2">
+            <a:extLst>
+              <a:ext uri="{FF2B5EF4-FFF2-40B4-BE49-F238E27FC236}">
+                <a16:creationId xmlns:a16="http://schemas.microsoft.com/office/drawing/2014/main" id="{E48A637E-A23A-F19C-2EC6-9A9B52F8A2BA}"/>
+              </a:ext>
+            </a:extLst>
+          </p:cNvPr>
+          <p:cNvSpPr>
+            <a:spLocks noGrp="1"/>
+          </p:cNvSpPr>
+          <p:nvPr>
+            <p:ph idx="1"/>
+          </p:nvPr>
+        </p:nvSpPr>
+        <p:spPr/>
+        <p:txBody>
+          <a:bodyPr/>
+          <a:lstStyle/>
+          <a:p>
+            <a:r>
+              <a:rPr lang="en-US" dirty="0"/>
+              <a:t>Where do we </a:t>
+            </a:r>
+            <a:r>
+              <a:rPr lang="en-US"/>
+              <a:t>go from there?</a:t>
+            </a:r>
+          </a:p>
+        </p:txBody>
+      </p:sp>
+    </p:spTree>
+    <p:extLst>
+      <p:ext uri="{BB962C8B-B14F-4D97-AF65-F5344CB8AC3E}">
+        <p14:creationId xmlns:p14="http://schemas.microsoft.com/office/powerpoint/2010/main" val="1238321945"/>
       </p:ext>
     </p:extLst>
   </p:cSld>

--- a/2026 WSDS - Wujian Xue.pptx
+++ b/2026 WSDS - Wujian Xue.pptx
@@ -11,6 +11,8 @@
     <p:sldId id="259" r:id="rId5"/>
     <p:sldId id="260" r:id="rId6"/>
     <p:sldId id="261" r:id="rId7"/>
+    <p:sldId id="263" r:id="rId8"/>
+    <p:sldId id="262" r:id="rId9"/>
   </p:sldIdLst>
   <p:sldSz cx="12192000" cy="6858000"/>
   <p:notesSz cx="6858000" cy="9144000"/>
@@ -264,7 +266,7 @@
           <a:p>
             <a:fld id="{9DFF5FDE-556D-4288-960F-3880543CC0D0}" type="datetimeFigureOut">
               <a:rPr lang="en-US" smtClean="0"/>
-              <a:t>10/4/2026</a:t>
+              <a:t>10/5/2026</a:t>
             </a:fld>
             <a:endParaRPr lang="en-US"/>
           </a:p>
@@ -462,7 +464,7 @@
           <a:p>
             <a:fld id="{9DFF5FDE-556D-4288-960F-3880543CC0D0}" type="datetimeFigureOut">
               <a:rPr lang="en-US" smtClean="0"/>
-              <a:t>10/4/2026</a:t>
+              <a:t>10/5/2026</a:t>
             </a:fld>
             <a:endParaRPr lang="en-US"/>
           </a:p>
@@ -670,7 +672,7 @@
           <a:p>
             <a:fld id="{9DFF5FDE-556D-4288-960F-3880543CC0D0}" type="datetimeFigureOut">
               <a:rPr lang="en-US" smtClean="0"/>
-              <a:t>10/4/2026</a:t>
+              <a:t>10/5/2026</a:t>
             </a:fld>
             <a:endParaRPr lang="en-US"/>
           </a:p>
@@ -868,7 +870,7 @@
           <a:p>
             <a:fld id="{9DFF5FDE-556D-4288-960F-3880543CC0D0}" type="datetimeFigureOut">
               <a:rPr lang="en-US" smtClean="0"/>
-              <a:t>10/4/2026</a:t>
+              <a:t>10/5/2026</a:t>
             </a:fld>
             <a:endParaRPr lang="en-US"/>
           </a:p>
@@ -1143,7 +1145,7 @@
           <a:p>
             <a:fld id="{9DFF5FDE-556D-4288-960F-3880543CC0D0}" type="datetimeFigureOut">
               <a:rPr lang="en-US" smtClean="0"/>
-              <a:t>10/4/2026</a:t>
+              <a:t>10/5/2026</a:t>
             </a:fld>
             <a:endParaRPr lang="en-US"/>
           </a:p>
@@ -1408,7 +1410,7 @@
           <a:p>
             <a:fld id="{9DFF5FDE-556D-4288-960F-3880543CC0D0}" type="datetimeFigureOut">
               <a:rPr lang="en-US" smtClean="0"/>
-              <a:t>10/4/2026</a:t>
+              <a:t>10/5/2026</a:t>
             </a:fld>
             <a:endParaRPr lang="en-US"/>
           </a:p>
@@ -1820,7 +1822,7 @@
           <a:p>
             <a:fld id="{9DFF5FDE-556D-4288-960F-3880543CC0D0}" type="datetimeFigureOut">
               <a:rPr lang="en-US" smtClean="0"/>
-              <a:t>10/4/2026</a:t>
+              <a:t>10/5/2026</a:t>
             </a:fld>
             <a:endParaRPr lang="en-US"/>
           </a:p>
@@ -1961,7 +1963,7 @@
           <a:p>
             <a:fld id="{9DFF5FDE-556D-4288-960F-3880543CC0D0}" type="datetimeFigureOut">
               <a:rPr lang="en-US" smtClean="0"/>
-              <a:t>10/4/2026</a:t>
+              <a:t>10/5/2026</a:t>
             </a:fld>
             <a:endParaRPr lang="en-US"/>
           </a:p>
@@ -2074,7 +2076,7 @@
           <a:p>
             <a:fld id="{9DFF5FDE-556D-4288-960F-3880543CC0D0}" type="datetimeFigureOut">
               <a:rPr lang="en-US" smtClean="0"/>
-              <a:t>10/4/2026</a:t>
+              <a:t>10/5/2026</a:t>
             </a:fld>
             <a:endParaRPr lang="en-US"/>
           </a:p>
@@ -2385,7 +2387,7 @@
           <a:p>
             <a:fld id="{9DFF5FDE-556D-4288-960F-3880543CC0D0}" type="datetimeFigureOut">
               <a:rPr lang="en-US" smtClean="0"/>
-              <a:t>10/4/2026</a:t>
+              <a:t>10/5/2026</a:t>
             </a:fld>
             <a:endParaRPr lang="en-US"/>
           </a:p>
@@ -2673,7 +2675,7 @@
           <a:p>
             <a:fld id="{9DFF5FDE-556D-4288-960F-3880543CC0D0}" type="datetimeFigureOut">
               <a:rPr lang="en-US" smtClean="0"/>
-              <a:t>10/4/2026</a:t>
+              <a:t>10/5/2026</a:t>
             </a:fld>
             <a:endParaRPr lang="en-US"/>
           </a:p>
@@ -2914,7 +2916,7 @@
           <a:p>
             <a:fld id="{9DFF5FDE-556D-4288-960F-3880543CC0D0}" type="datetimeFigureOut">
               <a:rPr lang="en-US" smtClean="0"/>
-              <a:t>10/4/2026</a:t>
+              <a:t>10/5/2026</a:t>
             </a:fld>
             <a:endParaRPr lang="en-US"/>
           </a:p>
@@ -3435,6 +3437,15 @@
               <a:t>Oct 2026</a:t>
             </a:r>
           </a:p>
+          <a:p>
+            <a:r>
+              <a:rPr lang="en-US" dirty="0">
+                <a:latin typeface="Times New Roman" panose="02020603050405020304" pitchFamily="18" charset="0"/>
+                <a:cs typeface="Times New Roman" panose="02020603050405020304" pitchFamily="18" charset="0"/>
+              </a:rPr>
+              <a:t>Cincinnati, OH</a:t>
+            </a:r>
+          </a:p>
         </p:txBody>
       </p:sp>
     </p:spTree>
@@ -3511,7 +3522,12 @@
             <p:ph idx="1"/>
           </p:nvPr>
         </p:nvSpPr>
-        <p:spPr/>
+        <p:spPr>
+          <a:xfrm>
+            <a:off x="838200" y="1825625"/>
+            <a:ext cx="10515600" cy="1682888"/>
+          </a:xfrm>
+        </p:spPr>
         <p:txBody>
           <a:bodyPr/>
           <a:lstStyle/>
@@ -3521,8 +3537,167 @@
               <a:t>What is the problem and why</a:t>
             </a:r>
           </a:p>
-        </p:txBody>
-      </p:sp>
+          <a:p>
+            <a:r>
+              <a:rPr lang="en-US" dirty="0"/>
+              <a:t>Fannie Mae</a:t>
+            </a:r>
+          </a:p>
+          <a:p>
+            <a:endParaRPr lang="en-US" dirty="0"/>
+          </a:p>
+        </p:txBody>
+      </p:sp>
+      <p:pic>
+        <p:nvPicPr>
+          <p:cNvPr id="4" name="Picture 3">
+            <a:extLst>
+              <a:ext uri="{FF2B5EF4-FFF2-40B4-BE49-F238E27FC236}">
+                <a16:creationId xmlns:a16="http://schemas.microsoft.com/office/drawing/2014/main" id="{BCDAE49C-C251-F75B-7AAE-63C6E1173405}"/>
+              </a:ext>
+            </a:extLst>
+          </p:cNvPr>
+          <p:cNvPicPr>
+            <a:picLocks noChangeAspect="1"/>
+          </p:cNvPicPr>
+          <p:nvPr/>
+        </p:nvPicPr>
+        <p:blipFill>
+          <a:blip r:embed="rId2"/>
+          <a:stretch>
+            <a:fillRect/>
+          </a:stretch>
+        </p:blipFill>
+        <p:spPr>
+          <a:xfrm>
+            <a:off x="5164190" y="3088827"/>
+            <a:ext cx="2638011" cy="1384610"/>
+          </a:xfrm>
+          <a:prstGeom prst="rect">
+            <a:avLst/>
+          </a:prstGeom>
+        </p:spPr>
+      </p:pic>
+      <p:pic>
+        <p:nvPicPr>
+          <p:cNvPr id="5" name="Picture 4">
+            <a:extLst>
+              <a:ext uri="{FF2B5EF4-FFF2-40B4-BE49-F238E27FC236}">
+                <a16:creationId xmlns:a16="http://schemas.microsoft.com/office/drawing/2014/main" id="{108087BF-A1B2-3CB3-9920-38BE92E30EDC}"/>
+              </a:ext>
+            </a:extLst>
+          </p:cNvPr>
+          <p:cNvPicPr>
+            <a:picLocks noChangeAspect="1"/>
+          </p:cNvPicPr>
+          <p:nvPr/>
+        </p:nvPicPr>
+        <p:blipFill>
+          <a:blip r:embed="rId3"/>
+          <a:stretch>
+            <a:fillRect/>
+          </a:stretch>
+        </p:blipFill>
+        <p:spPr>
+          <a:xfrm>
+            <a:off x="9050144" y="3429000"/>
+            <a:ext cx="1290890" cy="861801"/>
+          </a:xfrm>
+          <a:prstGeom prst="rect">
+            <a:avLst/>
+          </a:prstGeom>
+        </p:spPr>
+      </p:pic>
+      <p:pic>
+        <p:nvPicPr>
+          <p:cNvPr id="6" name="Picture 5">
+            <a:extLst>
+              <a:ext uri="{FF2B5EF4-FFF2-40B4-BE49-F238E27FC236}">
+                <a16:creationId xmlns:a16="http://schemas.microsoft.com/office/drawing/2014/main" id="{3BD6ABAE-7B06-B6A2-3815-5904B9452D4D}"/>
+              </a:ext>
+            </a:extLst>
+          </p:cNvPr>
+          <p:cNvPicPr>
+            <a:picLocks noChangeAspect="1"/>
+          </p:cNvPicPr>
+          <p:nvPr/>
+        </p:nvPicPr>
+        <p:blipFill>
+          <a:blip r:embed="rId4"/>
+          <a:stretch>
+            <a:fillRect/>
+          </a:stretch>
+        </p:blipFill>
+        <p:spPr>
+          <a:xfrm>
+            <a:off x="1512877" y="4626128"/>
+            <a:ext cx="1877291" cy="769689"/>
+          </a:xfrm>
+          <a:prstGeom prst="rect">
+            <a:avLst/>
+          </a:prstGeom>
+        </p:spPr>
+      </p:pic>
+      <p:pic>
+        <p:nvPicPr>
+          <p:cNvPr id="7" name="Picture 6">
+            <a:extLst>
+              <a:ext uri="{FF2B5EF4-FFF2-40B4-BE49-F238E27FC236}">
+                <a16:creationId xmlns:a16="http://schemas.microsoft.com/office/drawing/2014/main" id="{494C9954-0469-668E-7585-18F1E0856937}"/>
+              </a:ext>
+            </a:extLst>
+          </p:cNvPr>
+          <p:cNvPicPr>
+            <a:picLocks noChangeAspect="1"/>
+          </p:cNvPicPr>
+          <p:nvPr/>
+        </p:nvPicPr>
+        <p:blipFill>
+          <a:blip r:embed="rId5"/>
+          <a:stretch>
+            <a:fillRect/>
+          </a:stretch>
+        </p:blipFill>
+        <p:spPr>
+          <a:xfrm>
+            <a:off x="5090944" y="4592661"/>
+            <a:ext cx="2143471" cy="803156"/>
+          </a:xfrm>
+          <a:prstGeom prst="rect">
+            <a:avLst/>
+          </a:prstGeom>
+        </p:spPr>
+      </p:pic>
+      <p:pic>
+        <p:nvPicPr>
+          <p:cNvPr id="8" name="Picture 7">
+            <a:extLst>
+              <a:ext uri="{FF2B5EF4-FFF2-40B4-BE49-F238E27FC236}">
+                <a16:creationId xmlns:a16="http://schemas.microsoft.com/office/drawing/2014/main" id="{C55D0646-7CAB-C11F-17EA-EF7DD14FC55C}"/>
+              </a:ext>
+            </a:extLst>
+          </p:cNvPr>
+          <p:cNvPicPr>
+            <a:picLocks noChangeAspect="1"/>
+          </p:cNvPicPr>
+          <p:nvPr/>
+        </p:nvPicPr>
+        <p:blipFill>
+          <a:blip r:embed="rId6"/>
+          <a:stretch>
+            <a:fillRect/>
+          </a:stretch>
+        </p:blipFill>
+        <p:spPr>
+          <a:xfrm>
+            <a:off x="8631382" y="4628494"/>
+            <a:ext cx="2862262" cy="966787"/>
+          </a:xfrm>
+          <a:prstGeom prst="rect">
+            <a:avLst/>
+          </a:prstGeom>
+        </p:spPr>
+      </p:pic>
     </p:spTree>
     <p:extLst>
       <p:ext uri="{BB962C8B-B14F-4D97-AF65-F5344CB8AC3E}">
@@ -3866,6 +4041,202 @@
     <p:extLst>
       <p:ext uri="{BB962C8B-B14F-4D97-AF65-F5344CB8AC3E}">
         <p14:creationId xmlns:p14="http://schemas.microsoft.com/office/powerpoint/2010/main" val="1238321945"/>
+      </p:ext>
+    </p:extLst>
+  </p:cSld>
+  <p:clrMapOvr>
+    <a:masterClrMapping/>
+  </p:clrMapOvr>
+</p:sld>
+</file>
+
+<file path=ppt/slides/slide7.xml><?xml version="1.0" encoding="utf-8"?>
+<p:sld xmlns:a="http://schemas.openxmlformats.org/drawingml/2006/main" xmlns:r="http://schemas.openxmlformats.org/officeDocument/2006/relationships" xmlns:p="http://schemas.openxmlformats.org/presentationml/2006/main">
+  <p:cSld>
+    <p:spTree>
+      <p:nvGrpSpPr>
+        <p:cNvPr id="1" name=""/>
+        <p:cNvGrpSpPr/>
+        <p:nvPr/>
+      </p:nvGrpSpPr>
+      <p:grpSpPr>
+        <a:xfrm>
+          <a:off x="0" y="0"/>
+          <a:ext cx="0" cy="0"/>
+          <a:chOff x="0" y="0"/>
+          <a:chExt cx="0" cy="0"/>
+        </a:xfrm>
+      </p:grpSpPr>
+      <p:sp>
+        <p:nvSpPr>
+          <p:cNvPr id="2" name="Title 1">
+            <a:extLst>
+              <a:ext uri="{FF2B5EF4-FFF2-40B4-BE49-F238E27FC236}">
+                <a16:creationId xmlns:a16="http://schemas.microsoft.com/office/drawing/2014/main" id="{79765071-DC72-93E5-9B2F-5F473699886E}"/>
+              </a:ext>
+            </a:extLst>
+          </p:cNvPr>
+          <p:cNvSpPr>
+            <a:spLocks noGrp="1"/>
+          </p:cNvSpPr>
+          <p:nvPr>
+            <p:ph type="title"/>
+          </p:nvPr>
+        </p:nvSpPr>
+        <p:spPr/>
+        <p:txBody>
+          <a:bodyPr/>
+          <a:lstStyle/>
+          <a:p>
+            <a:r>
+              <a:rPr lang="en-US" altLang="zh-CN" dirty="0"/>
+              <a:t>Reference:</a:t>
+            </a:r>
+            <a:endParaRPr lang="en-US" dirty="0"/>
+          </a:p>
+        </p:txBody>
+      </p:sp>
+      <p:sp>
+        <p:nvSpPr>
+          <p:cNvPr id="3" name="Content Placeholder 2">
+            <a:extLst>
+              <a:ext uri="{FF2B5EF4-FFF2-40B4-BE49-F238E27FC236}">
+                <a16:creationId xmlns:a16="http://schemas.microsoft.com/office/drawing/2014/main" id="{BA3456FF-E78F-8DA1-FCFF-D93708555E23}"/>
+              </a:ext>
+            </a:extLst>
+          </p:cNvPr>
+          <p:cNvSpPr>
+            <a:spLocks noGrp="1"/>
+          </p:cNvSpPr>
+          <p:nvPr>
+            <p:ph idx="1"/>
+          </p:nvPr>
+        </p:nvSpPr>
+        <p:spPr/>
+        <p:txBody>
+          <a:bodyPr>
+            <a:normAutofit/>
+          </a:bodyPr>
+          <a:lstStyle/>
+          <a:p>
+            <a:r>
+              <a:rPr lang="en-US" sz="2000" dirty="0">
+                <a:hlinkClick r:id="rId2"/>
+              </a:rPr>
+              <a:t>AWS </a:t>
+            </a:r>
+            <a:r>
+              <a:rPr lang="en-US" sz="2000" dirty="0" err="1">
+                <a:hlinkClick r:id="rId2"/>
+              </a:rPr>
+              <a:t>re:Invent</a:t>
+            </a:r>
+            <a:r>
+              <a:rPr lang="en-US" sz="2000" dirty="0">
+                <a:hlinkClick r:id="rId2"/>
+              </a:rPr>
+              <a:t> 2021 - Fannie Mae: Migrating at scale without lifting and shifting</a:t>
+            </a:r>
+            <a:endParaRPr lang="en-US" sz="2000" dirty="0"/>
+          </a:p>
+          <a:p>
+            <a:r>
+              <a:rPr lang="en-US" sz="2000" dirty="0">
+                <a:hlinkClick r:id="rId3"/>
+              </a:rPr>
+              <a:t>Fannie Mae’s Digital Transformation Journey with AWS | Amazon Web Services</a:t>
+            </a:r>
+            <a:endParaRPr lang="en-US" sz="2000" dirty="0"/>
+          </a:p>
+        </p:txBody>
+      </p:sp>
+    </p:spTree>
+    <p:extLst>
+      <p:ext uri="{BB962C8B-B14F-4D97-AF65-F5344CB8AC3E}">
+        <p14:creationId xmlns:p14="http://schemas.microsoft.com/office/powerpoint/2010/main" val="1077489760"/>
+      </p:ext>
+    </p:extLst>
+  </p:cSld>
+  <p:clrMapOvr>
+    <a:masterClrMapping/>
+  </p:clrMapOvr>
+</p:sld>
+</file>
+
+<file path=ppt/slides/slide8.xml><?xml version="1.0" encoding="utf-8"?>
+<p:sld xmlns:a="http://schemas.openxmlformats.org/drawingml/2006/main" xmlns:r="http://schemas.openxmlformats.org/officeDocument/2006/relationships" xmlns:p="http://schemas.openxmlformats.org/presentationml/2006/main">
+  <p:cSld>
+    <p:spTree>
+      <p:nvGrpSpPr>
+        <p:cNvPr id="1" name=""/>
+        <p:cNvGrpSpPr/>
+        <p:nvPr/>
+      </p:nvGrpSpPr>
+      <p:grpSpPr>
+        <a:xfrm>
+          <a:off x="0" y="0"/>
+          <a:ext cx="0" cy="0"/>
+          <a:chOff x="0" y="0"/>
+          <a:chExt cx="0" cy="0"/>
+        </a:xfrm>
+      </p:grpSpPr>
+      <p:sp>
+        <p:nvSpPr>
+          <p:cNvPr id="2" name="Title 1">
+            <a:extLst>
+              <a:ext uri="{FF2B5EF4-FFF2-40B4-BE49-F238E27FC236}">
+                <a16:creationId xmlns:a16="http://schemas.microsoft.com/office/drawing/2014/main" id="{082D5B5A-22EB-F6BE-03B9-DA990AE01051}"/>
+              </a:ext>
+            </a:extLst>
+          </p:cNvPr>
+          <p:cNvSpPr>
+            <a:spLocks noGrp="1"/>
+          </p:cNvSpPr>
+          <p:nvPr>
+            <p:ph type="title"/>
+          </p:nvPr>
+        </p:nvSpPr>
+        <p:spPr/>
+        <p:txBody>
+          <a:bodyPr/>
+          <a:lstStyle/>
+          <a:p>
+            <a:r>
+              <a:rPr lang="en-US" dirty="0"/>
+              <a:t>Q&amp;A</a:t>
+            </a:r>
+          </a:p>
+        </p:txBody>
+      </p:sp>
+      <p:sp>
+        <p:nvSpPr>
+          <p:cNvPr id="3" name="Content Placeholder 2">
+            <a:extLst>
+              <a:ext uri="{FF2B5EF4-FFF2-40B4-BE49-F238E27FC236}">
+                <a16:creationId xmlns:a16="http://schemas.microsoft.com/office/drawing/2014/main" id="{BA79DD26-0915-7E46-B9E9-A23C1002591E}"/>
+              </a:ext>
+            </a:extLst>
+          </p:cNvPr>
+          <p:cNvSpPr>
+            <a:spLocks noGrp="1"/>
+          </p:cNvSpPr>
+          <p:nvPr>
+            <p:ph idx="1"/>
+          </p:nvPr>
+        </p:nvSpPr>
+        <p:spPr/>
+        <p:txBody>
+          <a:bodyPr/>
+          <a:lstStyle/>
+          <a:p>
+            <a:endParaRPr lang="en-US"/>
+          </a:p>
+        </p:txBody>
+      </p:sp>
+    </p:spTree>
+    <p:extLst>
+      <p:ext uri="{BB962C8B-B14F-4D97-AF65-F5344CB8AC3E}">
+        <p14:creationId xmlns:p14="http://schemas.microsoft.com/office/powerpoint/2010/main" val="354203763"/>
       </p:ext>
     </p:extLst>
   </p:cSld>

--- a/2026 WSDS - Wujian Xue.pptx
+++ b/2026 WSDS - Wujian Xue.pptx
@@ -6,13 +6,14 @@
   </p:sldMasterIdLst>
   <p:sldIdLst>
     <p:sldId id="256" r:id="rId2"/>
-    <p:sldId id="257" r:id="rId3"/>
-    <p:sldId id="258" r:id="rId4"/>
-    <p:sldId id="259" r:id="rId5"/>
-    <p:sldId id="260" r:id="rId6"/>
-    <p:sldId id="261" r:id="rId7"/>
-    <p:sldId id="263" r:id="rId8"/>
-    <p:sldId id="262" r:id="rId9"/>
+    <p:sldId id="264" r:id="rId3"/>
+    <p:sldId id="257" r:id="rId4"/>
+    <p:sldId id="258" r:id="rId5"/>
+    <p:sldId id="259" r:id="rId6"/>
+    <p:sldId id="260" r:id="rId7"/>
+    <p:sldId id="261" r:id="rId8"/>
+    <p:sldId id="263" r:id="rId9"/>
+    <p:sldId id="262" r:id="rId10"/>
   </p:sldIdLst>
   <p:sldSz cx="12192000" cy="6858000"/>
   <p:notesSz cx="6858000" cy="9144000"/>
@@ -266,7 +267,7 @@
           <a:p>
             <a:fld id="{9DFF5FDE-556D-4288-960F-3880543CC0D0}" type="datetimeFigureOut">
               <a:rPr lang="en-US" smtClean="0"/>
-              <a:t>10/5/2026</a:t>
+              <a:t>10/6/2026</a:t>
             </a:fld>
             <a:endParaRPr lang="en-US"/>
           </a:p>
@@ -464,7 +465,7 @@
           <a:p>
             <a:fld id="{9DFF5FDE-556D-4288-960F-3880543CC0D0}" type="datetimeFigureOut">
               <a:rPr lang="en-US" smtClean="0"/>
-              <a:t>10/5/2026</a:t>
+              <a:t>10/6/2026</a:t>
             </a:fld>
             <a:endParaRPr lang="en-US"/>
           </a:p>
@@ -672,7 +673,7 @@
           <a:p>
             <a:fld id="{9DFF5FDE-556D-4288-960F-3880543CC0D0}" type="datetimeFigureOut">
               <a:rPr lang="en-US" smtClean="0"/>
-              <a:t>10/5/2026</a:t>
+              <a:t>10/6/2026</a:t>
             </a:fld>
             <a:endParaRPr lang="en-US"/>
           </a:p>
@@ -870,7 +871,7 @@
           <a:p>
             <a:fld id="{9DFF5FDE-556D-4288-960F-3880543CC0D0}" type="datetimeFigureOut">
               <a:rPr lang="en-US" smtClean="0"/>
-              <a:t>10/5/2026</a:t>
+              <a:t>10/6/2026</a:t>
             </a:fld>
             <a:endParaRPr lang="en-US"/>
           </a:p>
@@ -1145,7 +1146,7 @@
           <a:p>
             <a:fld id="{9DFF5FDE-556D-4288-960F-3880543CC0D0}" type="datetimeFigureOut">
               <a:rPr lang="en-US" smtClean="0"/>
-              <a:t>10/5/2026</a:t>
+              <a:t>10/6/2026</a:t>
             </a:fld>
             <a:endParaRPr lang="en-US"/>
           </a:p>
@@ -1410,7 +1411,7 @@
           <a:p>
             <a:fld id="{9DFF5FDE-556D-4288-960F-3880543CC0D0}" type="datetimeFigureOut">
               <a:rPr lang="en-US" smtClean="0"/>
-              <a:t>10/5/2026</a:t>
+              <a:t>10/6/2026</a:t>
             </a:fld>
             <a:endParaRPr lang="en-US"/>
           </a:p>
@@ -1822,7 +1823,7 @@
           <a:p>
             <a:fld id="{9DFF5FDE-556D-4288-960F-3880543CC0D0}" type="datetimeFigureOut">
               <a:rPr lang="en-US" smtClean="0"/>
-              <a:t>10/5/2026</a:t>
+              <a:t>10/6/2026</a:t>
             </a:fld>
             <a:endParaRPr lang="en-US"/>
           </a:p>
@@ -1963,7 +1964,7 @@
           <a:p>
             <a:fld id="{9DFF5FDE-556D-4288-960F-3880543CC0D0}" type="datetimeFigureOut">
               <a:rPr lang="en-US" smtClean="0"/>
-              <a:t>10/5/2026</a:t>
+              <a:t>10/6/2026</a:t>
             </a:fld>
             <a:endParaRPr lang="en-US"/>
           </a:p>
@@ -2076,7 +2077,7 @@
           <a:p>
             <a:fld id="{9DFF5FDE-556D-4288-960F-3880543CC0D0}" type="datetimeFigureOut">
               <a:rPr lang="en-US" smtClean="0"/>
-              <a:t>10/5/2026</a:t>
+              <a:t>10/6/2026</a:t>
             </a:fld>
             <a:endParaRPr lang="en-US"/>
           </a:p>
@@ -2387,7 +2388,7 @@
           <a:p>
             <a:fld id="{9DFF5FDE-556D-4288-960F-3880543CC0D0}" type="datetimeFigureOut">
               <a:rPr lang="en-US" smtClean="0"/>
-              <a:t>10/5/2026</a:t>
+              <a:t>10/6/2026</a:t>
             </a:fld>
             <a:endParaRPr lang="en-US"/>
           </a:p>
@@ -2675,7 +2676,7 @@
           <a:p>
             <a:fld id="{9DFF5FDE-556D-4288-960F-3880543CC0D0}" type="datetimeFigureOut">
               <a:rPr lang="en-US" smtClean="0"/>
-              <a:t>10/5/2026</a:t>
+              <a:t>10/6/2026</a:t>
             </a:fld>
             <a:endParaRPr lang="en-US"/>
           </a:p>
@@ -2916,7 +2917,7 @@
           <a:p>
             <a:fld id="{9DFF5FDE-556D-4288-960F-3880543CC0D0}" type="datetimeFigureOut">
               <a:rPr lang="en-US" smtClean="0"/>
-              <a:t>10/5/2026</a:t>
+              <a:t>10/6/2026</a:t>
             </a:fld>
             <a:endParaRPr lang="en-US"/>
           </a:p>
@@ -3483,6 +3484,95 @@
           <p:cNvPr id="2" name="Title 1">
             <a:extLst>
               <a:ext uri="{FF2B5EF4-FFF2-40B4-BE49-F238E27FC236}">
+                <a16:creationId xmlns:a16="http://schemas.microsoft.com/office/drawing/2014/main" id="{36350338-C315-D975-5D8F-2109AEE0C6F2}"/>
+              </a:ext>
+            </a:extLst>
+          </p:cNvPr>
+          <p:cNvSpPr>
+            <a:spLocks noGrp="1"/>
+          </p:cNvSpPr>
+          <p:nvPr>
+            <p:ph type="title"/>
+          </p:nvPr>
+        </p:nvSpPr>
+        <p:spPr/>
+        <p:txBody>
+          <a:bodyPr/>
+          <a:lstStyle/>
+          <a:p>
+            <a:r>
+              <a:rPr lang="en-US" dirty="0"/>
+              <a:t>Agenda</a:t>
+            </a:r>
+          </a:p>
+        </p:txBody>
+      </p:sp>
+      <p:sp>
+        <p:nvSpPr>
+          <p:cNvPr id="3" name="Content Placeholder 2">
+            <a:extLst>
+              <a:ext uri="{FF2B5EF4-FFF2-40B4-BE49-F238E27FC236}">
+                <a16:creationId xmlns:a16="http://schemas.microsoft.com/office/drawing/2014/main" id="{CC0E6403-ACCF-DA80-E763-D2DE51B20776}"/>
+              </a:ext>
+            </a:extLst>
+          </p:cNvPr>
+          <p:cNvSpPr>
+            <a:spLocks noGrp="1"/>
+          </p:cNvSpPr>
+          <p:nvPr>
+            <p:ph idx="1"/>
+          </p:nvPr>
+        </p:nvSpPr>
+        <p:spPr/>
+        <p:txBody>
+          <a:bodyPr/>
+          <a:lstStyle/>
+          <a:p>
+            <a:r>
+              <a:rPr lang="en-US" dirty="0"/>
+              <a:t>Background</a:t>
+            </a:r>
+          </a:p>
+          <a:p>
+            <a:endParaRPr lang="en-US" dirty="0"/>
+          </a:p>
+        </p:txBody>
+      </p:sp>
+    </p:spTree>
+    <p:extLst>
+      <p:ext uri="{BB962C8B-B14F-4D97-AF65-F5344CB8AC3E}">
+        <p14:creationId xmlns:p14="http://schemas.microsoft.com/office/powerpoint/2010/main" val="4015355743"/>
+      </p:ext>
+    </p:extLst>
+  </p:cSld>
+  <p:clrMapOvr>
+    <a:masterClrMapping/>
+  </p:clrMapOvr>
+</p:sld>
+</file>
+
+<file path=ppt/slides/slide3.xml><?xml version="1.0" encoding="utf-8"?>
+<p:sld xmlns:a="http://schemas.openxmlformats.org/drawingml/2006/main" xmlns:r="http://schemas.openxmlformats.org/officeDocument/2006/relationships" xmlns:p="http://schemas.openxmlformats.org/presentationml/2006/main">
+  <p:cSld>
+    <p:spTree>
+      <p:nvGrpSpPr>
+        <p:cNvPr id="1" name=""/>
+        <p:cNvGrpSpPr/>
+        <p:nvPr/>
+      </p:nvGrpSpPr>
+      <p:grpSpPr>
+        <a:xfrm>
+          <a:off x="0" y="0"/>
+          <a:ext cx="0" cy="0"/>
+          <a:chOff x="0" y="0"/>
+          <a:chExt cx="0" cy="0"/>
+        </a:xfrm>
+      </p:grpSpPr>
+      <p:sp>
+        <p:nvSpPr>
+          <p:cNvPr id="2" name="Title 1">
+            <a:extLst>
+              <a:ext uri="{FF2B5EF4-FFF2-40B4-BE49-F238E27FC236}">
                 <a16:creationId xmlns:a16="http://schemas.microsoft.com/office/drawing/2014/main" id="{77E4F433-6378-4049-F2C3-EE92E0049A7B}"/>
               </a:ext>
             </a:extLst>
@@ -3539,9 +3629,10 @@
           </a:p>
           <a:p>
             <a:r>
-              <a:rPr lang="en-US" dirty="0"/>
-              <a:t>Fannie Mae</a:t>
-            </a:r>
+              <a:rPr lang="en-US" altLang="zh-CN" dirty="0"/>
+              <a:t>Enterprise Modeling and Analytics</a:t>
+            </a:r>
+            <a:endParaRPr lang="en-US" dirty="0"/>
           </a:p>
           <a:p>
             <a:endParaRPr lang="en-US" dirty="0"/>
@@ -3711,92 +3802,6 @@
 </p:sld>
 </file>
 
-<file path=ppt/slides/slide3.xml><?xml version="1.0" encoding="utf-8"?>
-<p:sld xmlns:a="http://schemas.openxmlformats.org/drawingml/2006/main" xmlns:r="http://schemas.openxmlformats.org/officeDocument/2006/relationships" xmlns:p="http://schemas.openxmlformats.org/presentationml/2006/main">
-  <p:cSld>
-    <p:spTree>
-      <p:nvGrpSpPr>
-        <p:cNvPr id="1" name=""/>
-        <p:cNvGrpSpPr/>
-        <p:nvPr/>
-      </p:nvGrpSpPr>
-      <p:grpSpPr>
-        <a:xfrm>
-          <a:off x="0" y="0"/>
-          <a:ext cx="0" cy="0"/>
-          <a:chOff x="0" y="0"/>
-          <a:chExt cx="0" cy="0"/>
-        </a:xfrm>
-      </p:grpSpPr>
-      <p:sp>
-        <p:nvSpPr>
-          <p:cNvPr id="2" name="Title 1">
-            <a:extLst>
-              <a:ext uri="{FF2B5EF4-FFF2-40B4-BE49-F238E27FC236}">
-                <a16:creationId xmlns:a16="http://schemas.microsoft.com/office/drawing/2014/main" id="{BA84EECB-BE89-FA10-B559-C2D06E9BFD18}"/>
-              </a:ext>
-            </a:extLst>
-          </p:cNvPr>
-          <p:cNvSpPr>
-            <a:spLocks noGrp="1"/>
-          </p:cNvSpPr>
-          <p:nvPr>
-            <p:ph type="title"/>
-          </p:nvPr>
-        </p:nvSpPr>
-        <p:spPr/>
-        <p:txBody>
-          <a:bodyPr/>
-          <a:lstStyle/>
-          <a:p>
-            <a:endParaRPr lang="en-US"/>
-          </a:p>
-        </p:txBody>
-      </p:sp>
-      <p:sp>
-        <p:nvSpPr>
-          <p:cNvPr id="3" name="Content Placeholder 2">
-            <a:extLst>
-              <a:ext uri="{FF2B5EF4-FFF2-40B4-BE49-F238E27FC236}">
-                <a16:creationId xmlns:a16="http://schemas.microsoft.com/office/drawing/2014/main" id="{D79C73C9-79BC-BE4B-D99B-67D620D66A20}"/>
-              </a:ext>
-            </a:extLst>
-          </p:cNvPr>
-          <p:cNvSpPr>
-            <a:spLocks noGrp="1"/>
-          </p:cNvSpPr>
-          <p:nvPr>
-            <p:ph idx="1"/>
-          </p:nvPr>
-        </p:nvSpPr>
-        <p:spPr/>
-        <p:txBody>
-          <a:bodyPr/>
-          <a:lstStyle/>
-          <a:p>
-            <a:r>
-              <a:rPr lang="en-US" dirty="0"/>
-              <a:t>What has been done about it?</a:t>
-            </a:r>
-          </a:p>
-          <a:p>
-            <a:endParaRPr lang="en-US" dirty="0"/>
-          </a:p>
-        </p:txBody>
-      </p:sp>
-    </p:spTree>
-    <p:extLst>
-      <p:ext uri="{BB962C8B-B14F-4D97-AF65-F5344CB8AC3E}">
-        <p14:creationId xmlns:p14="http://schemas.microsoft.com/office/powerpoint/2010/main" val="3421866799"/>
-      </p:ext>
-    </p:extLst>
-  </p:cSld>
-  <p:clrMapOvr>
-    <a:masterClrMapping/>
-  </p:clrMapOvr>
-</p:sld>
-</file>
-
 <file path=ppt/slides/slide4.xml><?xml version="1.0" encoding="utf-8"?>
 <p:sld xmlns:a="http://schemas.openxmlformats.org/drawingml/2006/main" xmlns:r="http://schemas.openxmlformats.org/officeDocument/2006/relationships" xmlns:p="http://schemas.openxmlformats.org/presentationml/2006/main">
   <p:cSld>
@@ -3819,7 +3824,7 @@
           <p:cNvPr id="2" name="Title 1">
             <a:extLst>
               <a:ext uri="{FF2B5EF4-FFF2-40B4-BE49-F238E27FC236}">
-                <a16:creationId xmlns:a16="http://schemas.microsoft.com/office/drawing/2014/main" id="{8DB06789-BA5D-116A-9606-AAEF943A72D0}"/>
+                <a16:creationId xmlns:a16="http://schemas.microsoft.com/office/drawing/2014/main" id="{BA84EECB-BE89-FA10-B559-C2D06E9BFD18}"/>
               </a:ext>
             </a:extLst>
           </p:cNvPr>
@@ -3844,7 +3849,7 @@
           <p:cNvPr id="3" name="Content Placeholder 2">
             <a:extLst>
               <a:ext uri="{FF2B5EF4-FFF2-40B4-BE49-F238E27FC236}">
-                <a16:creationId xmlns:a16="http://schemas.microsoft.com/office/drawing/2014/main" id="{543B8BDC-C4C6-0905-5F9F-38B1383CEAC1}"/>
+                <a16:creationId xmlns:a16="http://schemas.microsoft.com/office/drawing/2014/main" id="{D79C73C9-79BC-BE4B-D99B-67D620D66A20}"/>
               </a:ext>
             </a:extLst>
           </p:cNvPr>
@@ -3862,15 +3867,18 @@
           <a:p>
             <a:r>
               <a:rPr lang="en-US" dirty="0"/>
-              <a:t>What have I done about it?</a:t>
-            </a:r>
+              <a:t>What has been done about it?</a:t>
+            </a:r>
+          </a:p>
+          <a:p>
+            <a:endParaRPr lang="en-US" dirty="0"/>
           </a:p>
         </p:txBody>
       </p:sp>
     </p:spTree>
     <p:extLst>
       <p:ext uri="{BB962C8B-B14F-4D97-AF65-F5344CB8AC3E}">
-        <p14:creationId xmlns:p14="http://schemas.microsoft.com/office/powerpoint/2010/main" val="3588703417"/>
+        <p14:creationId xmlns:p14="http://schemas.microsoft.com/office/powerpoint/2010/main" val="3421866799"/>
       </p:ext>
     </p:extLst>
   </p:cSld>
@@ -3902,7 +3910,7 @@
           <p:cNvPr id="2" name="Title 1">
             <a:extLst>
               <a:ext uri="{FF2B5EF4-FFF2-40B4-BE49-F238E27FC236}">
-                <a16:creationId xmlns:a16="http://schemas.microsoft.com/office/drawing/2014/main" id="{B43C6558-4EC7-F455-AEE9-D12FD0A89C62}"/>
+                <a16:creationId xmlns:a16="http://schemas.microsoft.com/office/drawing/2014/main" id="{8DB06789-BA5D-116A-9606-AAEF943A72D0}"/>
               </a:ext>
             </a:extLst>
           </p:cNvPr>
@@ -3927,7 +3935,7 @@
           <p:cNvPr id="3" name="Content Placeholder 2">
             <a:extLst>
               <a:ext uri="{FF2B5EF4-FFF2-40B4-BE49-F238E27FC236}">
-                <a16:creationId xmlns:a16="http://schemas.microsoft.com/office/drawing/2014/main" id="{5655E68B-3CB9-4EB7-342D-A9E2A3772252}"/>
+                <a16:creationId xmlns:a16="http://schemas.microsoft.com/office/drawing/2014/main" id="{543B8BDC-C4C6-0905-5F9F-38B1383CEAC1}"/>
               </a:ext>
             </a:extLst>
           </p:cNvPr>
@@ -3945,7 +3953,7 @@
           <a:p>
             <a:r>
               <a:rPr lang="en-US" dirty="0"/>
-              <a:t>What additional value does my approach provide?</a:t>
+              <a:t>What have I done about it?</a:t>
             </a:r>
           </a:p>
         </p:txBody>
@@ -3953,7 +3961,7 @@
     </p:spTree>
     <p:extLst>
       <p:ext uri="{BB962C8B-B14F-4D97-AF65-F5344CB8AC3E}">
-        <p14:creationId xmlns:p14="http://schemas.microsoft.com/office/powerpoint/2010/main" val="331261954"/>
+        <p14:creationId xmlns:p14="http://schemas.microsoft.com/office/powerpoint/2010/main" val="3588703417"/>
       </p:ext>
     </p:extLst>
   </p:cSld>
@@ -3985,7 +3993,7 @@
           <p:cNvPr id="2" name="Title 1">
             <a:extLst>
               <a:ext uri="{FF2B5EF4-FFF2-40B4-BE49-F238E27FC236}">
-                <a16:creationId xmlns:a16="http://schemas.microsoft.com/office/drawing/2014/main" id="{9E681912-C0D5-AF85-91B0-7D9532929F7F}"/>
+                <a16:creationId xmlns:a16="http://schemas.microsoft.com/office/drawing/2014/main" id="{B43C6558-4EC7-F455-AEE9-D12FD0A89C62}"/>
               </a:ext>
             </a:extLst>
           </p:cNvPr>
@@ -4010,7 +4018,7 @@
           <p:cNvPr id="3" name="Content Placeholder 2">
             <a:extLst>
               <a:ext uri="{FF2B5EF4-FFF2-40B4-BE49-F238E27FC236}">
-                <a16:creationId xmlns:a16="http://schemas.microsoft.com/office/drawing/2014/main" id="{E48A637E-A23A-F19C-2EC6-9A9B52F8A2BA}"/>
+                <a16:creationId xmlns:a16="http://schemas.microsoft.com/office/drawing/2014/main" id="{5655E68B-3CB9-4EB7-342D-A9E2A3772252}"/>
               </a:ext>
             </a:extLst>
           </p:cNvPr>
@@ -4028,11 +4036,7 @@
           <a:p>
             <a:r>
               <a:rPr lang="en-US" dirty="0"/>
-              <a:t>Where do we </a:t>
-            </a:r>
-            <a:r>
-              <a:rPr lang="en-US"/>
-              <a:t>go from there?</a:t>
+              <a:t>What additional value does my approach provide?</a:t>
             </a:r>
           </a:p>
         </p:txBody>
@@ -4040,7 +4044,7 @@
     </p:spTree>
     <p:extLst>
       <p:ext uri="{BB962C8B-B14F-4D97-AF65-F5344CB8AC3E}">
-        <p14:creationId xmlns:p14="http://schemas.microsoft.com/office/powerpoint/2010/main" val="1238321945"/>
+        <p14:creationId xmlns:p14="http://schemas.microsoft.com/office/powerpoint/2010/main" val="331261954"/>
       </p:ext>
     </p:extLst>
   </p:cSld>
@@ -4072,6 +4076,93 @@
           <p:cNvPr id="2" name="Title 1">
             <a:extLst>
               <a:ext uri="{FF2B5EF4-FFF2-40B4-BE49-F238E27FC236}">
+                <a16:creationId xmlns:a16="http://schemas.microsoft.com/office/drawing/2014/main" id="{9E681912-C0D5-AF85-91B0-7D9532929F7F}"/>
+              </a:ext>
+            </a:extLst>
+          </p:cNvPr>
+          <p:cNvSpPr>
+            <a:spLocks noGrp="1"/>
+          </p:cNvSpPr>
+          <p:nvPr>
+            <p:ph type="title"/>
+          </p:nvPr>
+        </p:nvSpPr>
+        <p:spPr/>
+        <p:txBody>
+          <a:bodyPr/>
+          <a:lstStyle/>
+          <a:p>
+            <a:endParaRPr lang="en-US"/>
+          </a:p>
+        </p:txBody>
+      </p:sp>
+      <p:sp>
+        <p:nvSpPr>
+          <p:cNvPr id="3" name="Content Placeholder 2">
+            <a:extLst>
+              <a:ext uri="{FF2B5EF4-FFF2-40B4-BE49-F238E27FC236}">
+                <a16:creationId xmlns:a16="http://schemas.microsoft.com/office/drawing/2014/main" id="{E48A637E-A23A-F19C-2EC6-9A9B52F8A2BA}"/>
+              </a:ext>
+            </a:extLst>
+          </p:cNvPr>
+          <p:cNvSpPr>
+            <a:spLocks noGrp="1"/>
+          </p:cNvSpPr>
+          <p:nvPr>
+            <p:ph idx="1"/>
+          </p:nvPr>
+        </p:nvSpPr>
+        <p:spPr/>
+        <p:txBody>
+          <a:bodyPr/>
+          <a:lstStyle/>
+          <a:p>
+            <a:r>
+              <a:rPr lang="en-US" dirty="0"/>
+              <a:t>Where do we </a:t>
+            </a:r>
+            <a:r>
+              <a:rPr lang="en-US"/>
+              <a:t>go from there?</a:t>
+            </a:r>
+          </a:p>
+        </p:txBody>
+      </p:sp>
+    </p:spTree>
+    <p:extLst>
+      <p:ext uri="{BB962C8B-B14F-4D97-AF65-F5344CB8AC3E}">
+        <p14:creationId xmlns:p14="http://schemas.microsoft.com/office/powerpoint/2010/main" val="1238321945"/>
+      </p:ext>
+    </p:extLst>
+  </p:cSld>
+  <p:clrMapOvr>
+    <a:masterClrMapping/>
+  </p:clrMapOvr>
+</p:sld>
+</file>
+
+<file path=ppt/slides/slide8.xml><?xml version="1.0" encoding="utf-8"?>
+<p:sld xmlns:a="http://schemas.openxmlformats.org/drawingml/2006/main" xmlns:r="http://schemas.openxmlformats.org/officeDocument/2006/relationships" xmlns:p="http://schemas.openxmlformats.org/presentationml/2006/main">
+  <p:cSld>
+    <p:spTree>
+      <p:nvGrpSpPr>
+        <p:cNvPr id="1" name=""/>
+        <p:cNvGrpSpPr/>
+        <p:nvPr/>
+      </p:nvGrpSpPr>
+      <p:grpSpPr>
+        <a:xfrm>
+          <a:off x="0" y="0"/>
+          <a:ext cx="0" cy="0"/>
+          <a:chOff x="0" y="0"/>
+          <a:chExt cx="0" cy="0"/>
+        </a:xfrm>
+      </p:grpSpPr>
+      <p:sp>
+        <p:nvSpPr>
+          <p:cNvPr id="2" name="Title 1">
+            <a:extLst>
+              <a:ext uri="{FF2B5EF4-FFF2-40B4-BE49-F238E27FC236}">
                 <a16:creationId xmlns:a16="http://schemas.microsoft.com/office/drawing/2014/main" id="{79765071-DC72-93E5-9B2F-5F473699886E}"/>
               </a:ext>
             </a:extLst>
@@ -4163,7 +4254,7 @@
 </p:sld>
 </file>
 
-<file path=ppt/slides/slide8.xml><?xml version="1.0" encoding="utf-8"?>
+<file path=ppt/slides/slide9.xml><?xml version="1.0" encoding="utf-8"?>
 <p:sld xmlns:a="http://schemas.openxmlformats.org/drawingml/2006/main" xmlns:r="http://schemas.openxmlformats.org/officeDocument/2006/relationships" xmlns:p="http://schemas.openxmlformats.org/presentationml/2006/main">
   <p:cSld>
     <p:spTree>

--- a/2026 WSDS - Wujian Xue.pptx
+++ b/2026 WSDS - Wujian Xue.pptx
@@ -267,7 +267,7 @@
           <a:p>
             <a:fld id="{9DFF5FDE-556D-4288-960F-3880543CC0D0}" type="datetimeFigureOut">
               <a:rPr lang="en-US" smtClean="0"/>
-              <a:t>10/6/2026</a:t>
+              <a:t>10/7/2026</a:t>
             </a:fld>
             <a:endParaRPr lang="en-US"/>
           </a:p>
@@ -465,7 +465,7 @@
           <a:p>
             <a:fld id="{9DFF5FDE-556D-4288-960F-3880543CC0D0}" type="datetimeFigureOut">
               <a:rPr lang="en-US" smtClean="0"/>
-              <a:t>10/6/2026</a:t>
+              <a:t>10/7/2026</a:t>
             </a:fld>
             <a:endParaRPr lang="en-US"/>
           </a:p>
@@ -673,7 +673,7 @@
           <a:p>
             <a:fld id="{9DFF5FDE-556D-4288-960F-3880543CC0D0}" type="datetimeFigureOut">
               <a:rPr lang="en-US" smtClean="0"/>
-              <a:t>10/6/2026</a:t>
+              <a:t>10/7/2026</a:t>
             </a:fld>
             <a:endParaRPr lang="en-US"/>
           </a:p>
@@ -871,7 +871,7 @@
           <a:p>
             <a:fld id="{9DFF5FDE-556D-4288-960F-3880543CC0D0}" type="datetimeFigureOut">
               <a:rPr lang="en-US" smtClean="0"/>
-              <a:t>10/6/2026</a:t>
+              <a:t>10/7/2026</a:t>
             </a:fld>
             <a:endParaRPr lang="en-US"/>
           </a:p>
@@ -1146,7 +1146,7 @@
           <a:p>
             <a:fld id="{9DFF5FDE-556D-4288-960F-3880543CC0D0}" type="datetimeFigureOut">
               <a:rPr lang="en-US" smtClean="0"/>
-              <a:t>10/6/2026</a:t>
+              <a:t>10/7/2026</a:t>
             </a:fld>
             <a:endParaRPr lang="en-US"/>
           </a:p>
@@ -1411,7 +1411,7 @@
           <a:p>
             <a:fld id="{9DFF5FDE-556D-4288-960F-3880543CC0D0}" type="datetimeFigureOut">
               <a:rPr lang="en-US" smtClean="0"/>
-              <a:t>10/6/2026</a:t>
+              <a:t>10/7/2026</a:t>
             </a:fld>
             <a:endParaRPr lang="en-US"/>
           </a:p>
@@ -1823,7 +1823,7 @@
           <a:p>
             <a:fld id="{9DFF5FDE-556D-4288-960F-3880543CC0D0}" type="datetimeFigureOut">
               <a:rPr lang="en-US" smtClean="0"/>
-              <a:t>10/6/2026</a:t>
+              <a:t>10/7/2026</a:t>
             </a:fld>
             <a:endParaRPr lang="en-US"/>
           </a:p>
@@ -1964,7 +1964,7 @@
           <a:p>
             <a:fld id="{9DFF5FDE-556D-4288-960F-3880543CC0D0}" type="datetimeFigureOut">
               <a:rPr lang="en-US" smtClean="0"/>
-              <a:t>10/6/2026</a:t>
+              <a:t>10/7/2026</a:t>
             </a:fld>
             <a:endParaRPr lang="en-US"/>
           </a:p>
@@ -2077,7 +2077,7 @@
           <a:p>
             <a:fld id="{9DFF5FDE-556D-4288-960F-3880543CC0D0}" type="datetimeFigureOut">
               <a:rPr lang="en-US" smtClean="0"/>
-              <a:t>10/6/2026</a:t>
+              <a:t>10/7/2026</a:t>
             </a:fld>
             <a:endParaRPr lang="en-US"/>
           </a:p>
@@ -2388,7 +2388,7 @@
           <a:p>
             <a:fld id="{9DFF5FDE-556D-4288-960F-3880543CC0D0}" type="datetimeFigureOut">
               <a:rPr lang="en-US" smtClean="0"/>
-              <a:t>10/6/2026</a:t>
+              <a:t>10/7/2026</a:t>
             </a:fld>
             <a:endParaRPr lang="en-US"/>
           </a:p>
@@ -2676,7 +2676,7 @@
           <a:p>
             <a:fld id="{9DFF5FDE-556D-4288-960F-3880543CC0D0}" type="datetimeFigureOut">
               <a:rPr lang="en-US" smtClean="0"/>
-              <a:t>10/6/2026</a:t>
+              <a:t>10/7/2026</a:t>
             </a:fld>
             <a:endParaRPr lang="en-US"/>
           </a:p>
@@ -2917,7 +2917,7 @@
           <a:p>
             <a:fld id="{9DFF5FDE-556D-4288-960F-3880543CC0D0}" type="datetimeFigureOut">
               <a:rPr lang="en-US" smtClean="0"/>
-              <a:t>10/6/2026</a:t>
+              <a:t>10/7/2026</a:t>
             </a:fld>
             <a:endParaRPr lang="en-US"/>
           </a:p>
@@ -3615,7 +3615,7 @@
         <p:spPr>
           <a:xfrm>
             <a:off x="838200" y="1825625"/>
-            <a:ext cx="10515600" cy="1682888"/>
+            <a:ext cx="10515600" cy="585066"/>
           </a:xfrm>
         </p:spPr>
         <p:txBody>
@@ -3626,13 +3626,6 @@
               <a:rPr lang="en-US" dirty="0"/>
               <a:t>What is the problem and why</a:t>
             </a:r>
-          </a:p>
-          <a:p>
-            <a:r>
-              <a:rPr lang="en-US" altLang="zh-CN" dirty="0"/>
-              <a:t>Enterprise Modeling and Analytics</a:t>
-            </a:r>
-            <a:endParaRPr lang="en-US" dirty="0"/>
           </a:p>
           <a:p>
             <a:endParaRPr lang="en-US" dirty="0"/>
@@ -3661,7 +3654,7 @@
         </p:blipFill>
         <p:spPr>
           <a:xfrm>
-            <a:off x="5164190" y="3088827"/>
+            <a:off x="1573092" y="2906191"/>
             <a:ext cx="2638011" cy="1384610"/>
           </a:xfrm>
           <a:prstGeom prst="rect">
@@ -3691,98 +3684,8 @@
         </p:blipFill>
         <p:spPr>
           <a:xfrm>
-            <a:off x="9050144" y="3429000"/>
+            <a:off x="5716740" y="3167595"/>
             <a:ext cx="1290890" cy="861801"/>
-          </a:xfrm>
-          <a:prstGeom prst="rect">
-            <a:avLst/>
-          </a:prstGeom>
-        </p:spPr>
-      </p:pic>
-      <p:pic>
-        <p:nvPicPr>
-          <p:cNvPr id="6" name="Picture 5">
-            <a:extLst>
-              <a:ext uri="{FF2B5EF4-FFF2-40B4-BE49-F238E27FC236}">
-                <a16:creationId xmlns:a16="http://schemas.microsoft.com/office/drawing/2014/main" id="{3BD6ABAE-7B06-B6A2-3815-5904B9452D4D}"/>
-              </a:ext>
-            </a:extLst>
-          </p:cNvPr>
-          <p:cNvPicPr>
-            <a:picLocks noChangeAspect="1"/>
-          </p:cNvPicPr>
-          <p:nvPr/>
-        </p:nvPicPr>
-        <p:blipFill>
-          <a:blip r:embed="rId4"/>
-          <a:stretch>
-            <a:fillRect/>
-          </a:stretch>
-        </p:blipFill>
-        <p:spPr>
-          <a:xfrm>
-            <a:off x="1512877" y="4626128"/>
-            <a:ext cx="1877291" cy="769689"/>
-          </a:xfrm>
-          <a:prstGeom prst="rect">
-            <a:avLst/>
-          </a:prstGeom>
-        </p:spPr>
-      </p:pic>
-      <p:pic>
-        <p:nvPicPr>
-          <p:cNvPr id="7" name="Picture 6">
-            <a:extLst>
-              <a:ext uri="{FF2B5EF4-FFF2-40B4-BE49-F238E27FC236}">
-                <a16:creationId xmlns:a16="http://schemas.microsoft.com/office/drawing/2014/main" id="{494C9954-0469-668E-7585-18F1E0856937}"/>
-              </a:ext>
-            </a:extLst>
-          </p:cNvPr>
-          <p:cNvPicPr>
-            <a:picLocks noChangeAspect="1"/>
-          </p:cNvPicPr>
-          <p:nvPr/>
-        </p:nvPicPr>
-        <p:blipFill>
-          <a:blip r:embed="rId5"/>
-          <a:stretch>
-            <a:fillRect/>
-          </a:stretch>
-        </p:blipFill>
-        <p:spPr>
-          <a:xfrm>
-            <a:off x="5090944" y="4592661"/>
-            <a:ext cx="2143471" cy="803156"/>
-          </a:xfrm>
-          <a:prstGeom prst="rect">
-            <a:avLst/>
-          </a:prstGeom>
-        </p:spPr>
-      </p:pic>
-      <p:pic>
-        <p:nvPicPr>
-          <p:cNvPr id="8" name="Picture 7">
-            <a:extLst>
-              <a:ext uri="{FF2B5EF4-FFF2-40B4-BE49-F238E27FC236}">
-                <a16:creationId xmlns:a16="http://schemas.microsoft.com/office/drawing/2014/main" id="{C55D0646-7CAB-C11F-17EA-EF7DD14FC55C}"/>
-              </a:ext>
-            </a:extLst>
-          </p:cNvPr>
-          <p:cNvPicPr>
-            <a:picLocks noChangeAspect="1"/>
-          </p:cNvPicPr>
-          <p:nvPr/>
-        </p:nvPicPr>
-        <p:blipFill>
-          <a:blip r:embed="rId6"/>
-          <a:stretch>
-            <a:fillRect/>
-          </a:stretch>
-        </p:blipFill>
-        <p:spPr>
-          <a:xfrm>
-            <a:off x="8631382" y="4628494"/>
-            <a:ext cx="2862262" cy="966787"/>
           </a:xfrm>
           <a:prstGeom prst="rect">
             <a:avLst/>
@@ -3946,9 +3849,16 @@
             <p:ph idx="1"/>
           </p:nvPr>
         </p:nvSpPr>
-        <p:spPr/>
-        <p:txBody>
-          <a:bodyPr/>
+        <p:spPr>
+          <a:xfrm>
+            <a:off x="838200" y="1825625"/>
+            <a:ext cx="10515600" cy="2763000"/>
+          </a:xfrm>
+        </p:spPr>
+        <p:txBody>
+          <a:bodyPr>
+            <a:normAutofit fontScale="77500" lnSpcReduction="20000"/>
+          </a:bodyPr>
           <a:lstStyle/>
           <a:p>
             <a:r>
@@ -3956,8 +3866,144 @@
               <a:t>What have I done about it?</a:t>
             </a:r>
           </a:p>
-        </p:txBody>
-      </p:sp>
+          <a:p>
+            <a:r>
+              <a:rPr lang="en-US" altLang="zh-CN" dirty="0"/>
+              <a:t>Enterprise Modeling and Analytics – the Cash Flow model</a:t>
+            </a:r>
+          </a:p>
+          <a:p>
+            <a:r>
+              <a:rPr lang="en-US" dirty="0"/>
+              <a:t>Data</a:t>
+            </a:r>
+          </a:p>
+          <a:p>
+            <a:r>
+              <a:rPr lang="en-US" dirty="0"/>
+              <a:t>variables</a:t>
+            </a:r>
+          </a:p>
+          <a:p>
+            <a:r>
+              <a:rPr lang="en-US" dirty="0"/>
+              <a:t>Models: logistic regression with splines</a:t>
+            </a:r>
+          </a:p>
+          <a:p>
+            <a:pPr lvl="1"/>
+            <a:r>
+              <a:rPr lang="en-US" dirty="0"/>
+              <a:t>Choose number and location of the knots.</a:t>
+            </a:r>
+          </a:p>
+          <a:p>
+            <a:r>
+              <a:rPr lang="en-US" dirty="0"/>
+              <a:t>Macro functions</a:t>
+            </a:r>
+          </a:p>
+          <a:p>
+            <a:r>
+              <a:rPr lang="en-US" dirty="0"/>
+              <a:t>Output</a:t>
+            </a:r>
+          </a:p>
+          <a:p>
+            <a:endParaRPr lang="en-US" dirty="0"/>
+          </a:p>
+        </p:txBody>
+      </p:sp>
+      <p:pic>
+        <p:nvPicPr>
+          <p:cNvPr id="6" name="Picture 5">
+            <a:extLst>
+              <a:ext uri="{FF2B5EF4-FFF2-40B4-BE49-F238E27FC236}">
+                <a16:creationId xmlns:a16="http://schemas.microsoft.com/office/drawing/2014/main" id="{3BD6ABAE-7B06-B6A2-3815-5904B9452D4D}"/>
+              </a:ext>
+            </a:extLst>
+          </p:cNvPr>
+          <p:cNvPicPr>
+            <a:picLocks noChangeAspect="1"/>
+          </p:cNvPicPr>
+          <p:nvPr/>
+        </p:nvPicPr>
+        <p:blipFill>
+          <a:blip r:embed="rId2"/>
+          <a:stretch>
+            <a:fillRect/>
+          </a:stretch>
+        </p:blipFill>
+        <p:spPr>
+          <a:xfrm>
+            <a:off x="1446197" y="5207810"/>
+            <a:ext cx="1877291" cy="769689"/>
+          </a:xfrm>
+          <a:prstGeom prst="rect">
+            <a:avLst/>
+          </a:prstGeom>
+        </p:spPr>
+      </p:pic>
+      <p:pic>
+        <p:nvPicPr>
+          <p:cNvPr id="7" name="Picture 6">
+            <a:extLst>
+              <a:ext uri="{FF2B5EF4-FFF2-40B4-BE49-F238E27FC236}">
+                <a16:creationId xmlns:a16="http://schemas.microsoft.com/office/drawing/2014/main" id="{494C9954-0469-668E-7585-18F1E0856937}"/>
+              </a:ext>
+            </a:extLst>
+          </p:cNvPr>
+          <p:cNvPicPr>
+            <a:picLocks noChangeAspect="1"/>
+          </p:cNvPicPr>
+          <p:nvPr/>
+        </p:nvPicPr>
+        <p:blipFill>
+          <a:blip r:embed="rId3"/>
+          <a:stretch>
+            <a:fillRect/>
+          </a:stretch>
+        </p:blipFill>
+        <p:spPr>
+          <a:xfrm>
+            <a:off x="5024264" y="5174343"/>
+            <a:ext cx="2143471" cy="803156"/>
+          </a:xfrm>
+          <a:prstGeom prst="rect">
+            <a:avLst/>
+          </a:prstGeom>
+        </p:spPr>
+      </p:pic>
+      <p:pic>
+        <p:nvPicPr>
+          <p:cNvPr id="8" name="Picture 7">
+            <a:extLst>
+              <a:ext uri="{FF2B5EF4-FFF2-40B4-BE49-F238E27FC236}">
+                <a16:creationId xmlns:a16="http://schemas.microsoft.com/office/drawing/2014/main" id="{C55D0646-7CAB-C11F-17EA-EF7DD14FC55C}"/>
+              </a:ext>
+            </a:extLst>
+          </p:cNvPr>
+          <p:cNvPicPr>
+            <a:picLocks noChangeAspect="1"/>
+          </p:cNvPicPr>
+          <p:nvPr/>
+        </p:nvPicPr>
+        <p:blipFill>
+          <a:blip r:embed="rId4"/>
+          <a:stretch>
+            <a:fillRect/>
+          </a:stretch>
+        </p:blipFill>
+        <p:spPr>
+          <a:xfrm>
+            <a:off x="8564702" y="5210176"/>
+            <a:ext cx="2862262" cy="966787"/>
+          </a:xfrm>
+          <a:prstGeom prst="rect">
+            <a:avLst/>
+          </a:prstGeom>
+        </p:spPr>
+      </p:pic>
     </p:spTree>
     <p:extLst>
       <p:ext uri="{BB962C8B-B14F-4D97-AF65-F5344CB8AC3E}">

--- a/2026 WSDS - Wujian Xue.pptx
+++ b/2026 WSDS - Wujian Xue.pptx
@@ -10,10 +10,16 @@
     <p:sldId id="257" r:id="rId4"/>
     <p:sldId id="258" r:id="rId5"/>
     <p:sldId id="259" r:id="rId6"/>
-    <p:sldId id="260" r:id="rId7"/>
-    <p:sldId id="261" r:id="rId8"/>
-    <p:sldId id="263" r:id="rId9"/>
-    <p:sldId id="262" r:id="rId10"/>
+    <p:sldId id="271" r:id="rId7"/>
+    <p:sldId id="270" r:id="rId8"/>
+    <p:sldId id="269" r:id="rId9"/>
+    <p:sldId id="265" r:id="rId10"/>
+    <p:sldId id="266" r:id="rId11"/>
+    <p:sldId id="267" r:id="rId12"/>
+    <p:sldId id="260" r:id="rId13"/>
+    <p:sldId id="261" r:id="rId14"/>
+    <p:sldId id="263" r:id="rId15"/>
+    <p:sldId id="262" r:id="rId16"/>
   </p:sldIdLst>
   <p:sldSz cx="12192000" cy="6858000"/>
   <p:notesSz cx="6858000" cy="9144000"/>
@@ -120,6 +126,5888 @@
 </p:presentation>
 </file>
 
+<file path=ppt/diagrams/colors1.xml><?xml version="1.0" encoding="utf-8"?>
+<dgm:colorsDef xmlns:dgm="http://schemas.openxmlformats.org/drawingml/2006/diagram" xmlns:a="http://schemas.openxmlformats.org/drawingml/2006/main" uniqueId="urn:microsoft.com/office/officeart/2005/8/colors/accent1_2">
+  <dgm:title val=""/>
+  <dgm:desc val=""/>
+  <dgm:catLst>
+    <dgm:cat type="accent1" pri="11200"/>
+  </dgm:catLst>
+  <dgm:styleLbl name="node0">
+    <dgm:fillClrLst meth="repeat">
+      <a:schemeClr val="accent1"/>
+    </dgm:fillClrLst>
+    <dgm:linClrLst meth="repeat">
+      <a:schemeClr val="lt1"/>
+    </dgm:linClrLst>
+    <dgm:effectClrLst/>
+    <dgm:txLinClrLst/>
+    <dgm:txFillClrLst/>
+    <dgm:txEffectClrLst/>
+  </dgm:styleLbl>
+  <dgm:styleLbl name="alignNode1">
+    <dgm:fillClrLst meth="repeat">
+      <a:schemeClr val="accent1"/>
+    </dgm:fillClrLst>
+    <dgm:linClrLst meth="repeat">
+      <a:schemeClr val="accent1"/>
+    </dgm:linClrLst>
+    <dgm:effectClrLst/>
+    <dgm:txLinClrLst/>
+    <dgm:txFillClrLst/>
+    <dgm:txEffectClrLst/>
+  </dgm:styleLbl>
+  <dgm:styleLbl name="node1">
+    <dgm:fillClrLst meth="repeat">
+      <a:schemeClr val="accent1"/>
+    </dgm:fillClrLst>
+    <dgm:linClrLst meth="repeat">
+      <a:schemeClr val="lt1"/>
+    </dgm:linClrLst>
+    <dgm:effectClrLst/>
+    <dgm:txLinClrLst/>
+    <dgm:txFillClrLst/>
+    <dgm:txEffectClrLst/>
+  </dgm:styleLbl>
+  <dgm:styleLbl name="lnNode1">
+    <dgm:fillClrLst meth="repeat">
+      <a:schemeClr val="accent1"/>
+    </dgm:fillClrLst>
+    <dgm:linClrLst meth="repeat">
+      <a:schemeClr val="lt1"/>
+    </dgm:linClrLst>
+    <dgm:effectClrLst/>
+    <dgm:txLinClrLst/>
+    <dgm:txFillClrLst/>
+    <dgm:txEffectClrLst/>
+  </dgm:styleLbl>
+  <dgm:styleLbl name="vennNode1">
+    <dgm:fillClrLst meth="repeat">
+      <a:schemeClr val="accent1">
+        <a:alpha val="50000"/>
+      </a:schemeClr>
+    </dgm:fillClrLst>
+    <dgm:linClrLst meth="repeat">
+      <a:schemeClr val="lt1"/>
+    </dgm:linClrLst>
+    <dgm:effectClrLst/>
+    <dgm:txLinClrLst/>
+    <dgm:txFillClrLst/>
+    <dgm:txEffectClrLst/>
+  </dgm:styleLbl>
+  <dgm:styleLbl name="node2">
+    <dgm:fillClrLst meth="repeat">
+      <a:schemeClr val="accent1"/>
+    </dgm:fillClrLst>
+    <dgm:linClrLst meth="repeat">
+      <a:schemeClr val="lt1"/>
+    </dgm:linClrLst>
+    <dgm:effectClrLst/>
+    <dgm:txLinClrLst/>
+    <dgm:txFillClrLst/>
+    <dgm:txEffectClrLst/>
+  </dgm:styleLbl>
+  <dgm:styleLbl name="node3">
+    <dgm:fillClrLst meth="repeat">
+      <a:schemeClr val="accent1"/>
+    </dgm:fillClrLst>
+    <dgm:linClrLst meth="repeat">
+      <a:schemeClr val="lt1"/>
+    </dgm:linClrLst>
+    <dgm:effectClrLst/>
+    <dgm:txLinClrLst/>
+    <dgm:txFillClrLst/>
+    <dgm:txEffectClrLst/>
+  </dgm:styleLbl>
+  <dgm:styleLbl name="node4">
+    <dgm:fillClrLst meth="repeat">
+      <a:schemeClr val="accent1"/>
+    </dgm:fillClrLst>
+    <dgm:linClrLst meth="repeat">
+      <a:schemeClr val="lt1"/>
+    </dgm:linClrLst>
+    <dgm:effectClrLst/>
+    <dgm:txLinClrLst/>
+    <dgm:txFillClrLst/>
+    <dgm:txEffectClrLst/>
+  </dgm:styleLbl>
+  <dgm:styleLbl name="fgImgPlace1">
+    <dgm:fillClrLst meth="repeat">
+      <a:schemeClr val="accent1">
+        <a:tint val="50000"/>
+      </a:schemeClr>
+    </dgm:fillClrLst>
+    <dgm:linClrLst meth="repeat">
+      <a:schemeClr val="lt1"/>
+    </dgm:linClrLst>
+    <dgm:effectClrLst/>
+    <dgm:txLinClrLst/>
+    <dgm:txFillClrLst meth="repeat">
+      <a:schemeClr val="lt1"/>
+    </dgm:txFillClrLst>
+    <dgm:txEffectClrLst/>
+  </dgm:styleLbl>
+  <dgm:styleLbl name="alignImgPlace1">
+    <dgm:fillClrLst meth="repeat">
+      <a:schemeClr val="accent1">
+        <a:tint val="50000"/>
+      </a:schemeClr>
+    </dgm:fillClrLst>
+    <dgm:linClrLst meth="repeat">
+      <a:schemeClr val="lt1"/>
+    </dgm:linClrLst>
+    <dgm:effectClrLst/>
+    <dgm:txLinClrLst/>
+    <dgm:txFillClrLst meth="repeat">
+      <a:schemeClr val="lt1"/>
+    </dgm:txFillClrLst>
+    <dgm:txEffectClrLst/>
+  </dgm:styleLbl>
+  <dgm:styleLbl name="bgImgPlace1">
+    <dgm:fillClrLst meth="repeat">
+      <a:schemeClr val="accent1">
+        <a:tint val="50000"/>
+      </a:schemeClr>
+    </dgm:fillClrLst>
+    <dgm:linClrLst meth="repeat">
+      <a:schemeClr val="lt1"/>
+    </dgm:linClrLst>
+    <dgm:effectClrLst/>
+    <dgm:txLinClrLst/>
+    <dgm:txFillClrLst meth="repeat">
+      <a:schemeClr val="lt1"/>
+    </dgm:txFillClrLst>
+    <dgm:txEffectClrLst/>
+  </dgm:styleLbl>
+  <dgm:styleLbl name="sibTrans2D1">
+    <dgm:fillClrLst meth="repeat">
+      <a:schemeClr val="accent1">
+        <a:tint val="60000"/>
+      </a:schemeClr>
+    </dgm:fillClrLst>
+    <dgm:linClrLst meth="repeat">
+      <a:schemeClr val="accent1">
+        <a:tint val="60000"/>
+      </a:schemeClr>
+    </dgm:linClrLst>
+    <dgm:effectClrLst/>
+    <dgm:txLinClrLst/>
+    <dgm:txFillClrLst/>
+    <dgm:txEffectClrLst/>
+  </dgm:styleLbl>
+  <dgm:styleLbl name="fgSibTrans2D1">
+    <dgm:fillClrLst meth="repeat">
+      <a:schemeClr val="accent1">
+        <a:tint val="60000"/>
+      </a:schemeClr>
+    </dgm:fillClrLst>
+    <dgm:linClrLst meth="repeat">
+      <a:schemeClr val="accent1">
+        <a:tint val="60000"/>
+      </a:schemeClr>
+    </dgm:linClrLst>
+    <dgm:effectClrLst/>
+    <dgm:txLinClrLst/>
+    <dgm:txFillClrLst/>
+    <dgm:txEffectClrLst/>
+  </dgm:styleLbl>
+  <dgm:styleLbl name="bgSibTrans2D1">
+    <dgm:fillClrLst meth="repeat">
+      <a:schemeClr val="accent1">
+        <a:tint val="60000"/>
+      </a:schemeClr>
+    </dgm:fillClrLst>
+    <dgm:linClrLst meth="repeat">
+      <a:schemeClr val="accent1">
+        <a:tint val="60000"/>
+      </a:schemeClr>
+    </dgm:linClrLst>
+    <dgm:effectClrLst/>
+    <dgm:txLinClrLst/>
+    <dgm:txFillClrLst/>
+    <dgm:txEffectClrLst/>
+  </dgm:styleLbl>
+  <dgm:styleLbl name="sibTrans1D1">
+    <dgm:fillClrLst meth="repeat">
+      <a:schemeClr val="accent1"/>
+    </dgm:fillClrLst>
+    <dgm:linClrLst meth="repeat">
+      <a:schemeClr val="accent1"/>
+    </dgm:linClrLst>
+    <dgm:effectClrLst/>
+    <dgm:txLinClrLst/>
+    <dgm:txFillClrLst meth="repeat">
+      <a:schemeClr val="tx1"/>
+    </dgm:txFillClrLst>
+    <dgm:txEffectClrLst/>
+  </dgm:styleLbl>
+  <dgm:styleLbl name="callout">
+    <dgm:fillClrLst meth="repeat">
+      <a:schemeClr val="accent1"/>
+    </dgm:fillClrLst>
+    <dgm:linClrLst meth="repeat">
+      <a:schemeClr val="accent1">
+        <a:tint val="50000"/>
+      </a:schemeClr>
+    </dgm:linClrLst>
+    <dgm:effectClrLst/>
+    <dgm:txLinClrLst/>
+    <dgm:txFillClrLst meth="repeat">
+      <a:schemeClr val="tx1"/>
+    </dgm:txFillClrLst>
+    <dgm:txEffectClrLst/>
+  </dgm:styleLbl>
+  <dgm:styleLbl name="asst0">
+    <dgm:fillClrLst meth="repeat">
+      <a:schemeClr val="accent1"/>
+    </dgm:fillClrLst>
+    <dgm:linClrLst meth="repeat">
+      <a:schemeClr val="lt1"/>
+    </dgm:linClrLst>
+    <dgm:effectClrLst/>
+    <dgm:txLinClrLst/>
+    <dgm:txFillClrLst/>
+    <dgm:txEffectClrLst/>
+  </dgm:styleLbl>
+  <dgm:styleLbl name="asst1">
+    <dgm:fillClrLst meth="repeat">
+      <a:schemeClr val="accent1"/>
+    </dgm:fillClrLst>
+    <dgm:linClrLst meth="repeat">
+      <a:schemeClr val="lt1"/>
+    </dgm:linClrLst>
+    <dgm:effectClrLst/>
+    <dgm:txLinClrLst/>
+    <dgm:txFillClrLst/>
+    <dgm:txEffectClrLst/>
+  </dgm:styleLbl>
+  <dgm:styleLbl name="asst2">
+    <dgm:fillClrLst meth="repeat">
+      <a:schemeClr val="accent1"/>
+    </dgm:fillClrLst>
+    <dgm:linClrLst meth="repeat">
+      <a:schemeClr val="lt1"/>
+    </dgm:linClrLst>
+    <dgm:effectClrLst/>
+    <dgm:txLinClrLst/>
+    <dgm:txFillClrLst/>
+    <dgm:txEffectClrLst/>
+  </dgm:styleLbl>
+  <dgm:styleLbl name="asst3">
+    <dgm:fillClrLst meth="repeat">
+      <a:schemeClr val="accent1"/>
+    </dgm:fillClrLst>
+    <dgm:linClrLst meth="repeat">
+      <a:schemeClr val="lt1"/>
+    </dgm:linClrLst>
+    <dgm:effectClrLst/>
+    <dgm:txLinClrLst/>
+    <dgm:txFillClrLst/>
+    <dgm:txEffectClrLst/>
+  </dgm:styleLbl>
+  <dgm:styleLbl name="asst4">
+    <dgm:fillClrLst meth="repeat">
+      <a:schemeClr val="accent1"/>
+    </dgm:fillClrLst>
+    <dgm:linClrLst meth="repeat">
+      <a:schemeClr val="lt1"/>
+    </dgm:linClrLst>
+    <dgm:effectClrLst/>
+    <dgm:txLinClrLst/>
+    <dgm:txFillClrLst/>
+    <dgm:txEffectClrLst/>
+  </dgm:styleLbl>
+  <dgm:styleLbl name="parChTrans2D1">
+    <dgm:fillClrLst meth="repeat">
+      <a:schemeClr val="accent1">
+        <a:tint val="60000"/>
+      </a:schemeClr>
+    </dgm:fillClrLst>
+    <dgm:linClrLst meth="repeat">
+      <a:schemeClr val="accent1">
+        <a:tint val="60000"/>
+      </a:schemeClr>
+    </dgm:linClrLst>
+    <dgm:effectClrLst/>
+    <dgm:txLinClrLst/>
+    <dgm:txFillClrLst meth="repeat">
+      <a:schemeClr val="lt1"/>
+    </dgm:txFillClrLst>
+    <dgm:txEffectClrLst/>
+  </dgm:styleLbl>
+  <dgm:styleLbl name="parChTrans2D2">
+    <dgm:fillClrLst meth="repeat">
+      <a:schemeClr val="accent1"/>
+    </dgm:fillClrLst>
+    <dgm:linClrLst meth="repeat">
+      <a:schemeClr val="accent1"/>
+    </dgm:linClrLst>
+    <dgm:effectClrLst/>
+    <dgm:txLinClrLst/>
+    <dgm:txFillClrLst meth="repeat">
+      <a:schemeClr val="lt1"/>
+    </dgm:txFillClrLst>
+    <dgm:txEffectClrLst/>
+  </dgm:styleLbl>
+  <dgm:styleLbl name="parChTrans2D3">
+    <dgm:fillClrLst meth="repeat">
+      <a:schemeClr val="accent1"/>
+    </dgm:fillClrLst>
+    <dgm:linClrLst meth="repeat">
+      <a:schemeClr val="accent1"/>
+    </dgm:linClrLst>
+    <dgm:effectClrLst/>
+    <dgm:txLinClrLst/>
+    <dgm:txFillClrLst meth="repeat">
+      <a:schemeClr val="lt1"/>
+    </dgm:txFillClrLst>
+    <dgm:txEffectClrLst/>
+  </dgm:styleLbl>
+  <dgm:styleLbl name="parChTrans2D4">
+    <dgm:fillClrLst meth="repeat">
+      <a:schemeClr val="accent1"/>
+    </dgm:fillClrLst>
+    <dgm:linClrLst meth="repeat">
+      <a:schemeClr val="accent1"/>
+    </dgm:linClrLst>
+    <dgm:effectClrLst/>
+    <dgm:txLinClrLst/>
+    <dgm:txFillClrLst meth="repeat">
+      <a:schemeClr val="lt1"/>
+    </dgm:txFillClrLst>
+    <dgm:txEffectClrLst/>
+  </dgm:styleLbl>
+  <dgm:styleLbl name="parChTrans1D1">
+    <dgm:fillClrLst meth="repeat">
+      <a:schemeClr val="accent1"/>
+    </dgm:fillClrLst>
+    <dgm:linClrLst meth="repeat">
+      <a:schemeClr val="accent1">
+        <a:shade val="60000"/>
+      </a:schemeClr>
+    </dgm:linClrLst>
+    <dgm:effectClrLst/>
+    <dgm:txLinClrLst/>
+    <dgm:txFillClrLst meth="repeat">
+      <a:schemeClr val="tx1"/>
+    </dgm:txFillClrLst>
+    <dgm:txEffectClrLst/>
+  </dgm:styleLbl>
+  <dgm:styleLbl name="parChTrans1D2">
+    <dgm:fillClrLst meth="repeat">
+      <a:schemeClr val="accent1"/>
+    </dgm:fillClrLst>
+    <dgm:linClrLst meth="repeat">
+      <a:schemeClr val="accent1">
+        <a:shade val="60000"/>
+      </a:schemeClr>
+    </dgm:linClrLst>
+    <dgm:effectClrLst/>
+    <dgm:txLinClrLst/>
+    <dgm:txFillClrLst meth="repeat">
+      <a:schemeClr val="tx1"/>
+    </dgm:txFillClrLst>
+    <dgm:txEffectClrLst/>
+  </dgm:styleLbl>
+  <dgm:styleLbl name="parChTrans1D3">
+    <dgm:fillClrLst meth="repeat">
+      <a:schemeClr val="accent1"/>
+    </dgm:fillClrLst>
+    <dgm:linClrLst meth="repeat">
+      <a:schemeClr val="accent1">
+        <a:shade val="80000"/>
+      </a:schemeClr>
+    </dgm:linClrLst>
+    <dgm:effectClrLst/>
+    <dgm:txLinClrLst/>
+    <dgm:txFillClrLst meth="repeat">
+      <a:schemeClr val="tx1"/>
+    </dgm:txFillClrLst>
+    <dgm:txEffectClrLst/>
+  </dgm:styleLbl>
+  <dgm:styleLbl name="parChTrans1D4">
+    <dgm:fillClrLst meth="repeat">
+      <a:schemeClr val="accent1"/>
+    </dgm:fillClrLst>
+    <dgm:linClrLst meth="repeat">
+      <a:schemeClr val="accent1">
+        <a:shade val="80000"/>
+      </a:schemeClr>
+    </dgm:linClrLst>
+    <dgm:effectClrLst/>
+    <dgm:txLinClrLst/>
+    <dgm:txFillClrLst meth="repeat">
+      <a:schemeClr val="tx1"/>
+    </dgm:txFillClrLst>
+    <dgm:txEffectClrLst/>
+  </dgm:styleLbl>
+  <dgm:styleLbl name="fgAcc1">
+    <dgm:fillClrLst meth="repeat">
+      <a:schemeClr val="lt1">
+        <a:alpha val="90000"/>
+      </a:schemeClr>
+    </dgm:fillClrLst>
+    <dgm:linClrLst meth="repeat">
+      <a:schemeClr val="accent1"/>
+    </dgm:linClrLst>
+    <dgm:effectClrLst/>
+    <dgm:txLinClrLst/>
+    <dgm:txFillClrLst meth="repeat">
+      <a:schemeClr val="dk1"/>
+    </dgm:txFillClrLst>
+    <dgm:txEffectClrLst/>
+  </dgm:styleLbl>
+  <dgm:styleLbl name="conFgAcc1">
+    <dgm:fillClrLst meth="repeat">
+      <a:schemeClr val="lt1">
+        <a:alpha val="90000"/>
+      </a:schemeClr>
+    </dgm:fillClrLst>
+    <dgm:linClrLst meth="repeat">
+      <a:schemeClr val="accent1"/>
+    </dgm:linClrLst>
+    <dgm:effectClrLst/>
+    <dgm:txLinClrLst/>
+    <dgm:txFillClrLst meth="repeat">
+      <a:schemeClr val="dk1"/>
+    </dgm:txFillClrLst>
+    <dgm:txEffectClrLst/>
+  </dgm:styleLbl>
+  <dgm:styleLbl name="alignAcc1">
+    <dgm:fillClrLst meth="repeat">
+      <a:schemeClr val="lt1">
+        <a:alpha val="90000"/>
+      </a:schemeClr>
+    </dgm:fillClrLst>
+    <dgm:linClrLst meth="repeat">
+      <a:schemeClr val="accent1"/>
+    </dgm:linClrLst>
+    <dgm:effectClrLst/>
+    <dgm:txLinClrLst/>
+    <dgm:txFillClrLst meth="repeat">
+      <a:schemeClr val="dk1"/>
+    </dgm:txFillClrLst>
+    <dgm:txEffectClrLst/>
+  </dgm:styleLbl>
+  <dgm:styleLbl name="trAlignAcc1">
+    <dgm:fillClrLst meth="repeat">
+      <a:schemeClr val="lt1">
+        <a:alpha val="40000"/>
+      </a:schemeClr>
+    </dgm:fillClrLst>
+    <dgm:linClrLst meth="repeat">
+      <a:schemeClr val="accent1"/>
+    </dgm:linClrLst>
+    <dgm:effectClrLst/>
+    <dgm:txLinClrLst/>
+    <dgm:txFillClrLst meth="repeat">
+      <a:schemeClr val="dk1"/>
+    </dgm:txFillClrLst>
+    <dgm:txEffectClrLst/>
+  </dgm:styleLbl>
+  <dgm:styleLbl name="bgAcc1">
+    <dgm:fillClrLst meth="repeat">
+      <a:schemeClr val="lt1">
+        <a:alpha val="90000"/>
+      </a:schemeClr>
+    </dgm:fillClrLst>
+    <dgm:linClrLst meth="repeat">
+      <a:schemeClr val="accent1"/>
+    </dgm:linClrLst>
+    <dgm:effectClrLst/>
+    <dgm:txLinClrLst/>
+    <dgm:txFillClrLst meth="repeat">
+      <a:schemeClr val="dk1"/>
+    </dgm:txFillClrLst>
+    <dgm:txEffectClrLst/>
+  </dgm:styleLbl>
+  <dgm:styleLbl name="solidFgAcc1">
+    <dgm:fillClrLst meth="repeat">
+      <a:schemeClr val="lt1"/>
+    </dgm:fillClrLst>
+    <dgm:linClrLst meth="repeat">
+      <a:schemeClr val="accent1"/>
+    </dgm:linClrLst>
+    <dgm:effectClrLst/>
+    <dgm:txLinClrLst/>
+    <dgm:txFillClrLst meth="repeat">
+      <a:schemeClr val="dk1"/>
+    </dgm:txFillClrLst>
+    <dgm:txEffectClrLst/>
+  </dgm:styleLbl>
+  <dgm:styleLbl name="solidAlignAcc1">
+    <dgm:fillClrLst meth="repeat">
+      <a:schemeClr val="lt1"/>
+    </dgm:fillClrLst>
+    <dgm:linClrLst meth="repeat">
+      <a:schemeClr val="accent1"/>
+    </dgm:linClrLst>
+    <dgm:effectClrLst/>
+    <dgm:txLinClrLst/>
+    <dgm:txFillClrLst meth="repeat">
+      <a:schemeClr val="dk1"/>
+    </dgm:txFillClrLst>
+    <dgm:txEffectClrLst/>
+  </dgm:styleLbl>
+  <dgm:styleLbl name="solidBgAcc1">
+    <dgm:fillClrLst meth="repeat">
+      <a:schemeClr val="lt1"/>
+    </dgm:fillClrLst>
+    <dgm:linClrLst meth="repeat">
+      <a:schemeClr val="accent1"/>
+    </dgm:linClrLst>
+    <dgm:effectClrLst/>
+    <dgm:txLinClrLst/>
+    <dgm:txFillClrLst meth="repeat">
+      <a:schemeClr val="dk1"/>
+    </dgm:txFillClrLst>
+    <dgm:txEffectClrLst/>
+  </dgm:styleLbl>
+  <dgm:styleLbl name="fgAccFollowNode1">
+    <dgm:fillClrLst meth="repeat">
+      <a:schemeClr val="accent1">
+        <a:alpha val="90000"/>
+        <a:tint val="40000"/>
+      </a:schemeClr>
+    </dgm:fillClrLst>
+    <dgm:linClrLst meth="repeat">
+      <a:schemeClr val="accent1">
+        <a:alpha val="90000"/>
+        <a:tint val="40000"/>
+      </a:schemeClr>
+    </dgm:linClrLst>
+    <dgm:effectClrLst/>
+    <dgm:txLinClrLst/>
+    <dgm:txFillClrLst meth="repeat">
+      <a:schemeClr val="dk1"/>
+    </dgm:txFillClrLst>
+    <dgm:txEffectClrLst/>
+  </dgm:styleLbl>
+  <dgm:styleLbl name="alignAccFollowNode1">
+    <dgm:fillClrLst meth="repeat">
+      <a:schemeClr val="accent1">
+        <a:alpha val="90000"/>
+        <a:tint val="40000"/>
+      </a:schemeClr>
+    </dgm:fillClrLst>
+    <dgm:linClrLst meth="repeat">
+      <a:schemeClr val="accent1">
+        <a:alpha val="90000"/>
+        <a:tint val="40000"/>
+      </a:schemeClr>
+    </dgm:linClrLst>
+    <dgm:effectClrLst/>
+    <dgm:txLinClrLst/>
+    <dgm:txFillClrLst meth="repeat">
+      <a:schemeClr val="dk1"/>
+    </dgm:txFillClrLst>
+    <dgm:txEffectClrLst/>
+  </dgm:styleLbl>
+  <dgm:styleLbl name="bgAccFollowNode1">
+    <dgm:fillClrLst meth="repeat">
+      <a:schemeClr val="accent1">
+        <a:alpha val="90000"/>
+        <a:tint val="40000"/>
+      </a:schemeClr>
+    </dgm:fillClrLst>
+    <dgm:linClrLst meth="repeat">
+      <a:schemeClr val="accent1">
+        <a:alpha val="90000"/>
+        <a:tint val="40000"/>
+      </a:schemeClr>
+    </dgm:linClrLst>
+    <dgm:effectClrLst/>
+    <dgm:txLinClrLst/>
+    <dgm:txFillClrLst meth="repeat">
+      <a:schemeClr val="dk1"/>
+    </dgm:txFillClrLst>
+    <dgm:txEffectClrLst/>
+  </dgm:styleLbl>
+  <dgm:styleLbl name="fgAcc0">
+    <dgm:fillClrLst meth="repeat">
+      <a:schemeClr val="lt1">
+        <a:alpha val="90000"/>
+      </a:schemeClr>
+    </dgm:fillClrLst>
+    <dgm:linClrLst meth="repeat">
+      <a:schemeClr val="accent1"/>
+    </dgm:linClrLst>
+    <dgm:effectClrLst/>
+    <dgm:txLinClrLst/>
+    <dgm:txFillClrLst meth="repeat">
+      <a:schemeClr val="dk1"/>
+    </dgm:txFillClrLst>
+    <dgm:txEffectClrLst/>
+  </dgm:styleLbl>
+  <dgm:styleLbl name="fgAcc2">
+    <dgm:fillClrLst meth="repeat">
+      <a:schemeClr val="lt1">
+        <a:alpha val="90000"/>
+      </a:schemeClr>
+    </dgm:fillClrLst>
+    <dgm:linClrLst meth="repeat">
+      <a:schemeClr val="accent1"/>
+    </dgm:linClrLst>
+    <dgm:effectClrLst/>
+    <dgm:txLinClrLst/>
+    <dgm:txFillClrLst meth="repeat">
+      <a:schemeClr val="dk1"/>
+    </dgm:txFillClrLst>
+    <dgm:txEffectClrLst/>
+  </dgm:styleLbl>
+  <dgm:styleLbl name="fgAcc3">
+    <dgm:fillClrLst meth="repeat">
+      <a:schemeClr val="lt1">
+        <a:alpha val="90000"/>
+      </a:schemeClr>
+    </dgm:fillClrLst>
+    <dgm:linClrLst meth="repeat">
+      <a:schemeClr val="accent1"/>
+    </dgm:linClrLst>
+    <dgm:effectClrLst/>
+    <dgm:txLinClrLst/>
+    <dgm:txFillClrLst meth="repeat">
+      <a:schemeClr val="dk1"/>
+    </dgm:txFillClrLst>
+    <dgm:txEffectClrLst/>
+  </dgm:styleLbl>
+  <dgm:styleLbl name="fgAcc4">
+    <dgm:fillClrLst meth="repeat">
+      <a:schemeClr val="lt1">
+        <a:alpha val="90000"/>
+      </a:schemeClr>
+    </dgm:fillClrLst>
+    <dgm:linClrLst meth="repeat">
+      <a:schemeClr val="accent1"/>
+    </dgm:linClrLst>
+    <dgm:effectClrLst/>
+    <dgm:txLinClrLst/>
+    <dgm:txFillClrLst meth="repeat">
+      <a:schemeClr val="dk1"/>
+    </dgm:txFillClrLst>
+    <dgm:txEffectClrLst/>
+  </dgm:styleLbl>
+  <dgm:styleLbl name="bgShp">
+    <dgm:fillClrLst meth="repeat">
+      <a:schemeClr val="accent1">
+        <a:tint val="40000"/>
+      </a:schemeClr>
+    </dgm:fillClrLst>
+    <dgm:linClrLst meth="repeat">
+      <a:schemeClr val="accent1"/>
+    </dgm:linClrLst>
+    <dgm:effectClrLst/>
+    <dgm:txLinClrLst/>
+    <dgm:txFillClrLst meth="repeat">
+      <a:schemeClr val="dk1"/>
+    </dgm:txFillClrLst>
+    <dgm:txEffectClrLst/>
+  </dgm:styleLbl>
+  <dgm:styleLbl name="dkBgShp">
+    <dgm:fillClrLst meth="repeat">
+      <a:schemeClr val="accent1">
+        <a:shade val="80000"/>
+      </a:schemeClr>
+    </dgm:fillClrLst>
+    <dgm:linClrLst meth="repeat">
+      <a:schemeClr val="accent1"/>
+    </dgm:linClrLst>
+    <dgm:effectClrLst/>
+    <dgm:txLinClrLst/>
+    <dgm:txFillClrLst meth="repeat">
+      <a:schemeClr val="lt1"/>
+    </dgm:txFillClrLst>
+    <dgm:txEffectClrLst/>
+  </dgm:styleLbl>
+  <dgm:styleLbl name="trBgShp">
+    <dgm:fillClrLst meth="repeat">
+      <a:schemeClr val="accent1">
+        <a:tint val="50000"/>
+        <a:alpha val="40000"/>
+      </a:schemeClr>
+    </dgm:fillClrLst>
+    <dgm:linClrLst meth="repeat">
+      <a:schemeClr val="accent1"/>
+    </dgm:linClrLst>
+    <dgm:effectClrLst/>
+    <dgm:txLinClrLst/>
+    <dgm:txFillClrLst meth="repeat">
+      <a:schemeClr val="lt1"/>
+    </dgm:txFillClrLst>
+    <dgm:txEffectClrLst/>
+  </dgm:styleLbl>
+  <dgm:styleLbl name="fgShp">
+    <dgm:fillClrLst meth="repeat">
+      <a:schemeClr val="accent1">
+        <a:tint val="60000"/>
+      </a:schemeClr>
+    </dgm:fillClrLst>
+    <dgm:linClrLst meth="repeat">
+      <a:schemeClr val="lt1"/>
+    </dgm:linClrLst>
+    <dgm:effectClrLst/>
+    <dgm:txLinClrLst/>
+    <dgm:txFillClrLst meth="repeat">
+      <a:schemeClr val="dk1"/>
+    </dgm:txFillClrLst>
+    <dgm:txEffectClrLst/>
+  </dgm:styleLbl>
+  <dgm:styleLbl name="revTx">
+    <dgm:fillClrLst meth="repeat">
+      <a:schemeClr val="lt1">
+        <a:alpha val="0"/>
+      </a:schemeClr>
+    </dgm:fillClrLst>
+    <dgm:linClrLst meth="repeat">
+      <a:schemeClr val="dk1">
+        <a:alpha val="0"/>
+      </a:schemeClr>
+    </dgm:linClrLst>
+    <dgm:effectClrLst/>
+    <dgm:txLinClrLst/>
+    <dgm:txFillClrLst meth="repeat">
+      <a:schemeClr val="tx1"/>
+    </dgm:txFillClrLst>
+    <dgm:txEffectClrLst/>
+  </dgm:styleLbl>
+</dgm:colorsDef>
+</file>
+
+<file path=ppt/diagrams/colors2.xml><?xml version="1.0" encoding="utf-8"?>
+<dgm:colorsDef xmlns:dgm="http://schemas.openxmlformats.org/drawingml/2006/diagram" xmlns:a="http://schemas.openxmlformats.org/drawingml/2006/main" uniqueId="urn:microsoft.com/office/officeart/2005/8/colors/accent1_2">
+  <dgm:title val=""/>
+  <dgm:desc val=""/>
+  <dgm:catLst>
+    <dgm:cat type="accent1" pri="11200"/>
+  </dgm:catLst>
+  <dgm:styleLbl name="node0">
+    <dgm:fillClrLst meth="repeat">
+      <a:schemeClr val="accent1"/>
+    </dgm:fillClrLst>
+    <dgm:linClrLst meth="repeat">
+      <a:schemeClr val="lt1"/>
+    </dgm:linClrLst>
+    <dgm:effectClrLst/>
+    <dgm:txLinClrLst/>
+    <dgm:txFillClrLst/>
+    <dgm:txEffectClrLst/>
+  </dgm:styleLbl>
+  <dgm:styleLbl name="alignNode1">
+    <dgm:fillClrLst meth="repeat">
+      <a:schemeClr val="accent1"/>
+    </dgm:fillClrLst>
+    <dgm:linClrLst meth="repeat">
+      <a:schemeClr val="accent1"/>
+    </dgm:linClrLst>
+    <dgm:effectClrLst/>
+    <dgm:txLinClrLst/>
+    <dgm:txFillClrLst/>
+    <dgm:txEffectClrLst/>
+  </dgm:styleLbl>
+  <dgm:styleLbl name="node1">
+    <dgm:fillClrLst meth="repeat">
+      <a:schemeClr val="accent1"/>
+    </dgm:fillClrLst>
+    <dgm:linClrLst meth="repeat">
+      <a:schemeClr val="lt1"/>
+    </dgm:linClrLst>
+    <dgm:effectClrLst/>
+    <dgm:txLinClrLst/>
+    <dgm:txFillClrLst/>
+    <dgm:txEffectClrLst/>
+  </dgm:styleLbl>
+  <dgm:styleLbl name="lnNode1">
+    <dgm:fillClrLst meth="repeat">
+      <a:schemeClr val="accent1"/>
+    </dgm:fillClrLst>
+    <dgm:linClrLst meth="repeat">
+      <a:schemeClr val="lt1"/>
+    </dgm:linClrLst>
+    <dgm:effectClrLst/>
+    <dgm:txLinClrLst/>
+    <dgm:txFillClrLst/>
+    <dgm:txEffectClrLst/>
+  </dgm:styleLbl>
+  <dgm:styleLbl name="vennNode1">
+    <dgm:fillClrLst meth="repeat">
+      <a:schemeClr val="accent1">
+        <a:alpha val="50000"/>
+      </a:schemeClr>
+    </dgm:fillClrLst>
+    <dgm:linClrLst meth="repeat">
+      <a:schemeClr val="lt1"/>
+    </dgm:linClrLst>
+    <dgm:effectClrLst/>
+    <dgm:txLinClrLst/>
+    <dgm:txFillClrLst/>
+    <dgm:txEffectClrLst/>
+  </dgm:styleLbl>
+  <dgm:styleLbl name="node2">
+    <dgm:fillClrLst meth="repeat">
+      <a:schemeClr val="accent1"/>
+    </dgm:fillClrLst>
+    <dgm:linClrLst meth="repeat">
+      <a:schemeClr val="lt1"/>
+    </dgm:linClrLst>
+    <dgm:effectClrLst/>
+    <dgm:txLinClrLst/>
+    <dgm:txFillClrLst/>
+    <dgm:txEffectClrLst/>
+  </dgm:styleLbl>
+  <dgm:styleLbl name="node3">
+    <dgm:fillClrLst meth="repeat">
+      <a:schemeClr val="accent1"/>
+    </dgm:fillClrLst>
+    <dgm:linClrLst meth="repeat">
+      <a:schemeClr val="lt1"/>
+    </dgm:linClrLst>
+    <dgm:effectClrLst/>
+    <dgm:txLinClrLst/>
+    <dgm:txFillClrLst/>
+    <dgm:txEffectClrLst/>
+  </dgm:styleLbl>
+  <dgm:styleLbl name="node4">
+    <dgm:fillClrLst meth="repeat">
+      <a:schemeClr val="accent1"/>
+    </dgm:fillClrLst>
+    <dgm:linClrLst meth="repeat">
+      <a:schemeClr val="lt1"/>
+    </dgm:linClrLst>
+    <dgm:effectClrLst/>
+    <dgm:txLinClrLst/>
+    <dgm:txFillClrLst/>
+    <dgm:txEffectClrLst/>
+  </dgm:styleLbl>
+  <dgm:styleLbl name="fgImgPlace1">
+    <dgm:fillClrLst meth="repeat">
+      <a:schemeClr val="accent1">
+        <a:tint val="50000"/>
+      </a:schemeClr>
+    </dgm:fillClrLst>
+    <dgm:linClrLst meth="repeat">
+      <a:schemeClr val="lt1"/>
+    </dgm:linClrLst>
+    <dgm:effectClrLst/>
+    <dgm:txLinClrLst/>
+    <dgm:txFillClrLst meth="repeat">
+      <a:schemeClr val="lt1"/>
+    </dgm:txFillClrLst>
+    <dgm:txEffectClrLst/>
+  </dgm:styleLbl>
+  <dgm:styleLbl name="alignImgPlace1">
+    <dgm:fillClrLst meth="repeat">
+      <a:schemeClr val="accent1">
+        <a:tint val="50000"/>
+      </a:schemeClr>
+    </dgm:fillClrLst>
+    <dgm:linClrLst meth="repeat">
+      <a:schemeClr val="lt1"/>
+    </dgm:linClrLst>
+    <dgm:effectClrLst/>
+    <dgm:txLinClrLst/>
+    <dgm:txFillClrLst meth="repeat">
+      <a:schemeClr val="lt1"/>
+    </dgm:txFillClrLst>
+    <dgm:txEffectClrLst/>
+  </dgm:styleLbl>
+  <dgm:styleLbl name="bgImgPlace1">
+    <dgm:fillClrLst meth="repeat">
+      <a:schemeClr val="accent1">
+        <a:tint val="50000"/>
+      </a:schemeClr>
+    </dgm:fillClrLst>
+    <dgm:linClrLst meth="repeat">
+      <a:schemeClr val="lt1"/>
+    </dgm:linClrLst>
+    <dgm:effectClrLst/>
+    <dgm:txLinClrLst/>
+    <dgm:txFillClrLst meth="repeat">
+      <a:schemeClr val="lt1"/>
+    </dgm:txFillClrLst>
+    <dgm:txEffectClrLst/>
+  </dgm:styleLbl>
+  <dgm:styleLbl name="sibTrans2D1">
+    <dgm:fillClrLst meth="repeat">
+      <a:schemeClr val="accent1">
+        <a:tint val="60000"/>
+      </a:schemeClr>
+    </dgm:fillClrLst>
+    <dgm:linClrLst meth="repeat">
+      <a:schemeClr val="accent1">
+        <a:tint val="60000"/>
+      </a:schemeClr>
+    </dgm:linClrLst>
+    <dgm:effectClrLst/>
+    <dgm:txLinClrLst/>
+    <dgm:txFillClrLst/>
+    <dgm:txEffectClrLst/>
+  </dgm:styleLbl>
+  <dgm:styleLbl name="fgSibTrans2D1">
+    <dgm:fillClrLst meth="repeat">
+      <a:schemeClr val="accent1">
+        <a:tint val="60000"/>
+      </a:schemeClr>
+    </dgm:fillClrLst>
+    <dgm:linClrLst meth="repeat">
+      <a:schemeClr val="accent1">
+        <a:tint val="60000"/>
+      </a:schemeClr>
+    </dgm:linClrLst>
+    <dgm:effectClrLst/>
+    <dgm:txLinClrLst/>
+    <dgm:txFillClrLst/>
+    <dgm:txEffectClrLst/>
+  </dgm:styleLbl>
+  <dgm:styleLbl name="bgSibTrans2D1">
+    <dgm:fillClrLst meth="repeat">
+      <a:schemeClr val="accent1">
+        <a:tint val="60000"/>
+      </a:schemeClr>
+    </dgm:fillClrLst>
+    <dgm:linClrLst meth="repeat">
+      <a:schemeClr val="accent1">
+        <a:tint val="60000"/>
+      </a:schemeClr>
+    </dgm:linClrLst>
+    <dgm:effectClrLst/>
+    <dgm:txLinClrLst/>
+    <dgm:txFillClrLst/>
+    <dgm:txEffectClrLst/>
+  </dgm:styleLbl>
+  <dgm:styleLbl name="sibTrans1D1">
+    <dgm:fillClrLst meth="repeat">
+      <a:schemeClr val="accent1"/>
+    </dgm:fillClrLst>
+    <dgm:linClrLst meth="repeat">
+      <a:schemeClr val="accent1"/>
+    </dgm:linClrLst>
+    <dgm:effectClrLst/>
+    <dgm:txLinClrLst/>
+    <dgm:txFillClrLst meth="repeat">
+      <a:schemeClr val="tx1"/>
+    </dgm:txFillClrLst>
+    <dgm:txEffectClrLst/>
+  </dgm:styleLbl>
+  <dgm:styleLbl name="callout">
+    <dgm:fillClrLst meth="repeat">
+      <a:schemeClr val="accent1"/>
+    </dgm:fillClrLst>
+    <dgm:linClrLst meth="repeat">
+      <a:schemeClr val="accent1">
+        <a:tint val="50000"/>
+      </a:schemeClr>
+    </dgm:linClrLst>
+    <dgm:effectClrLst/>
+    <dgm:txLinClrLst/>
+    <dgm:txFillClrLst meth="repeat">
+      <a:schemeClr val="tx1"/>
+    </dgm:txFillClrLst>
+    <dgm:txEffectClrLst/>
+  </dgm:styleLbl>
+  <dgm:styleLbl name="asst0">
+    <dgm:fillClrLst meth="repeat">
+      <a:schemeClr val="accent1"/>
+    </dgm:fillClrLst>
+    <dgm:linClrLst meth="repeat">
+      <a:schemeClr val="lt1"/>
+    </dgm:linClrLst>
+    <dgm:effectClrLst/>
+    <dgm:txLinClrLst/>
+    <dgm:txFillClrLst/>
+    <dgm:txEffectClrLst/>
+  </dgm:styleLbl>
+  <dgm:styleLbl name="asst1">
+    <dgm:fillClrLst meth="repeat">
+      <a:schemeClr val="accent1"/>
+    </dgm:fillClrLst>
+    <dgm:linClrLst meth="repeat">
+      <a:schemeClr val="lt1"/>
+    </dgm:linClrLst>
+    <dgm:effectClrLst/>
+    <dgm:txLinClrLst/>
+    <dgm:txFillClrLst/>
+    <dgm:txEffectClrLst/>
+  </dgm:styleLbl>
+  <dgm:styleLbl name="asst2">
+    <dgm:fillClrLst meth="repeat">
+      <a:schemeClr val="accent1"/>
+    </dgm:fillClrLst>
+    <dgm:linClrLst meth="repeat">
+      <a:schemeClr val="lt1"/>
+    </dgm:linClrLst>
+    <dgm:effectClrLst/>
+    <dgm:txLinClrLst/>
+    <dgm:txFillClrLst/>
+    <dgm:txEffectClrLst/>
+  </dgm:styleLbl>
+  <dgm:styleLbl name="asst3">
+    <dgm:fillClrLst meth="repeat">
+      <a:schemeClr val="accent1"/>
+    </dgm:fillClrLst>
+    <dgm:linClrLst meth="repeat">
+      <a:schemeClr val="lt1"/>
+    </dgm:linClrLst>
+    <dgm:effectClrLst/>
+    <dgm:txLinClrLst/>
+    <dgm:txFillClrLst/>
+    <dgm:txEffectClrLst/>
+  </dgm:styleLbl>
+  <dgm:styleLbl name="asst4">
+    <dgm:fillClrLst meth="repeat">
+      <a:schemeClr val="accent1"/>
+    </dgm:fillClrLst>
+    <dgm:linClrLst meth="repeat">
+      <a:schemeClr val="lt1"/>
+    </dgm:linClrLst>
+    <dgm:effectClrLst/>
+    <dgm:txLinClrLst/>
+    <dgm:txFillClrLst/>
+    <dgm:txEffectClrLst/>
+  </dgm:styleLbl>
+  <dgm:styleLbl name="parChTrans2D1">
+    <dgm:fillClrLst meth="repeat">
+      <a:schemeClr val="accent1">
+        <a:tint val="60000"/>
+      </a:schemeClr>
+    </dgm:fillClrLst>
+    <dgm:linClrLst meth="repeat">
+      <a:schemeClr val="accent1">
+        <a:tint val="60000"/>
+      </a:schemeClr>
+    </dgm:linClrLst>
+    <dgm:effectClrLst/>
+    <dgm:txLinClrLst/>
+    <dgm:txFillClrLst meth="repeat">
+      <a:schemeClr val="lt1"/>
+    </dgm:txFillClrLst>
+    <dgm:txEffectClrLst/>
+  </dgm:styleLbl>
+  <dgm:styleLbl name="parChTrans2D2">
+    <dgm:fillClrLst meth="repeat">
+      <a:schemeClr val="accent1"/>
+    </dgm:fillClrLst>
+    <dgm:linClrLst meth="repeat">
+      <a:schemeClr val="accent1"/>
+    </dgm:linClrLst>
+    <dgm:effectClrLst/>
+    <dgm:txLinClrLst/>
+    <dgm:txFillClrLst meth="repeat">
+      <a:schemeClr val="lt1"/>
+    </dgm:txFillClrLst>
+    <dgm:txEffectClrLst/>
+  </dgm:styleLbl>
+  <dgm:styleLbl name="parChTrans2D3">
+    <dgm:fillClrLst meth="repeat">
+      <a:schemeClr val="accent1"/>
+    </dgm:fillClrLst>
+    <dgm:linClrLst meth="repeat">
+      <a:schemeClr val="accent1"/>
+    </dgm:linClrLst>
+    <dgm:effectClrLst/>
+    <dgm:txLinClrLst/>
+    <dgm:txFillClrLst meth="repeat">
+      <a:schemeClr val="lt1"/>
+    </dgm:txFillClrLst>
+    <dgm:txEffectClrLst/>
+  </dgm:styleLbl>
+  <dgm:styleLbl name="parChTrans2D4">
+    <dgm:fillClrLst meth="repeat">
+      <a:schemeClr val="accent1"/>
+    </dgm:fillClrLst>
+    <dgm:linClrLst meth="repeat">
+      <a:schemeClr val="accent1"/>
+    </dgm:linClrLst>
+    <dgm:effectClrLst/>
+    <dgm:txLinClrLst/>
+    <dgm:txFillClrLst meth="repeat">
+      <a:schemeClr val="lt1"/>
+    </dgm:txFillClrLst>
+    <dgm:txEffectClrLst/>
+  </dgm:styleLbl>
+  <dgm:styleLbl name="parChTrans1D1">
+    <dgm:fillClrLst meth="repeat">
+      <a:schemeClr val="accent1"/>
+    </dgm:fillClrLst>
+    <dgm:linClrLst meth="repeat">
+      <a:schemeClr val="accent1">
+        <a:shade val="60000"/>
+      </a:schemeClr>
+    </dgm:linClrLst>
+    <dgm:effectClrLst/>
+    <dgm:txLinClrLst/>
+    <dgm:txFillClrLst meth="repeat">
+      <a:schemeClr val="tx1"/>
+    </dgm:txFillClrLst>
+    <dgm:txEffectClrLst/>
+  </dgm:styleLbl>
+  <dgm:styleLbl name="parChTrans1D2">
+    <dgm:fillClrLst meth="repeat">
+      <a:schemeClr val="accent1"/>
+    </dgm:fillClrLst>
+    <dgm:linClrLst meth="repeat">
+      <a:schemeClr val="accent1">
+        <a:shade val="60000"/>
+      </a:schemeClr>
+    </dgm:linClrLst>
+    <dgm:effectClrLst/>
+    <dgm:txLinClrLst/>
+    <dgm:txFillClrLst meth="repeat">
+      <a:schemeClr val="tx1"/>
+    </dgm:txFillClrLst>
+    <dgm:txEffectClrLst/>
+  </dgm:styleLbl>
+  <dgm:styleLbl name="parChTrans1D3">
+    <dgm:fillClrLst meth="repeat">
+      <a:schemeClr val="accent1"/>
+    </dgm:fillClrLst>
+    <dgm:linClrLst meth="repeat">
+      <a:schemeClr val="accent1">
+        <a:shade val="80000"/>
+      </a:schemeClr>
+    </dgm:linClrLst>
+    <dgm:effectClrLst/>
+    <dgm:txLinClrLst/>
+    <dgm:txFillClrLst meth="repeat">
+      <a:schemeClr val="tx1"/>
+    </dgm:txFillClrLst>
+    <dgm:txEffectClrLst/>
+  </dgm:styleLbl>
+  <dgm:styleLbl name="parChTrans1D4">
+    <dgm:fillClrLst meth="repeat">
+      <a:schemeClr val="accent1"/>
+    </dgm:fillClrLst>
+    <dgm:linClrLst meth="repeat">
+      <a:schemeClr val="accent1">
+        <a:shade val="80000"/>
+      </a:schemeClr>
+    </dgm:linClrLst>
+    <dgm:effectClrLst/>
+    <dgm:txLinClrLst/>
+    <dgm:txFillClrLst meth="repeat">
+      <a:schemeClr val="tx1"/>
+    </dgm:txFillClrLst>
+    <dgm:txEffectClrLst/>
+  </dgm:styleLbl>
+  <dgm:styleLbl name="fgAcc1">
+    <dgm:fillClrLst meth="repeat">
+      <a:schemeClr val="lt1">
+        <a:alpha val="90000"/>
+      </a:schemeClr>
+    </dgm:fillClrLst>
+    <dgm:linClrLst meth="repeat">
+      <a:schemeClr val="accent1"/>
+    </dgm:linClrLst>
+    <dgm:effectClrLst/>
+    <dgm:txLinClrLst/>
+    <dgm:txFillClrLst meth="repeat">
+      <a:schemeClr val="dk1"/>
+    </dgm:txFillClrLst>
+    <dgm:txEffectClrLst/>
+  </dgm:styleLbl>
+  <dgm:styleLbl name="conFgAcc1">
+    <dgm:fillClrLst meth="repeat">
+      <a:schemeClr val="lt1">
+        <a:alpha val="90000"/>
+      </a:schemeClr>
+    </dgm:fillClrLst>
+    <dgm:linClrLst meth="repeat">
+      <a:schemeClr val="accent1"/>
+    </dgm:linClrLst>
+    <dgm:effectClrLst/>
+    <dgm:txLinClrLst/>
+    <dgm:txFillClrLst meth="repeat">
+      <a:schemeClr val="dk1"/>
+    </dgm:txFillClrLst>
+    <dgm:txEffectClrLst/>
+  </dgm:styleLbl>
+  <dgm:styleLbl name="alignAcc1">
+    <dgm:fillClrLst meth="repeat">
+      <a:schemeClr val="lt1">
+        <a:alpha val="90000"/>
+      </a:schemeClr>
+    </dgm:fillClrLst>
+    <dgm:linClrLst meth="repeat">
+      <a:schemeClr val="accent1"/>
+    </dgm:linClrLst>
+    <dgm:effectClrLst/>
+    <dgm:txLinClrLst/>
+    <dgm:txFillClrLst meth="repeat">
+      <a:schemeClr val="dk1"/>
+    </dgm:txFillClrLst>
+    <dgm:txEffectClrLst/>
+  </dgm:styleLbl>
+  <dgm:styleLbl name="trAlignAcc1">
+    <dgm:fillClrLst meth="repeat">
+      <a:schemeClr val="lt1">
+        <a:alpha val="40000"/>
+      </a:schemeClr>
+    </dgm:fillClrLst>
+    <dgm:linClrLst meth="repeat">
+      <a:schemeClr val="accent1"/>
+    </dgm:linClrLst>
+    <dgm:effectClrLst/>
+    <dgm:txLinClrLst/>
+    <dgm:txFillClrLst meth="repeat">
+      <a:schemeClr val="dk1"/>
+    </dgm:txFillClrLst>
+    <dgm:txEffectClrLst/>
+  </dgm:styleLbl>
+  <dgm:styleLbl name="bgAcc1">
+    <dgm:fillClrLst meth="repeat">
+      <a:schemeClr val="lt1">
+        <a:alpha val="90000"/>
+      </a:schemeClr>
+    </dgm:fillClrLst>
+    <dgm:linClrLst meth="repeat">
+      <a:schemeClr val="accent1"/>
+    </dgm:linClrLst>
+    <dgm:effectClrLst/>
+    <dgm:txLinClrLst/>
+    <dgm:txFillClrLst meth="repeat">
+      <a:schemeClr val="dk1"/>
+    </dgm:txFillClrLst>
+    <dgm:txEffectClrLst/>
+  </dgm:styleLbl>
+  <dgm:styleLbl name="solidFgAcc1">
+    <dgm:fillClrLst meth="repeat">
+      <a:schemeClr val="lt1"/>
+    </dgm:fillClrLst>
+    <dgm:linClrLst meth="repeat">
+      <a:schemeClr val="accent1"/>
+    </dgm:linClrLst>
+    <dgm:effectClrLst/>
+    <dgm:txLinClrLst/>
+    <dgm:txFillClrLst meth="repeat">
+      <a:schemeClr val="dk1"/>
+    </dgm:txFillClrLst>
+    <dgm:txEffectClrLst/>
+  </dgm:styleLbl>
+  <dgm:styleLbl name="solidAlignAcc1">
+    <dgm:fillClrLst meth="repeat">
+      <a:schemeClr val="lt1"/>
+    </dgm:fillClrLst>
+    <dgm:linClrLst meth="repeat">
+      <a:schemeClr val="accent1"/>
+    </dgm:linClrLst>
+    <dgm:effectClrLst/>
+    <dgm:txLinClrLst/>
+    <dgm:txFillClrLst meth="repeat">
+      <a:schemeClr val="dk1"/>
+    </dgm:txFillClrLst>
+    <dgm:txEffectClrLst/>
+  </dgm:styleLbl>
+  <dgm:styleLbl name="solidBgAcc1">
+    <dgm:fillClrLst meth="repeat">
+      <a:schemeClr val="lt1"/>
+    </dgm:fillClrLst>
+    <dgm:linClrLst meth="repeat">
+      <a:schemeClr val="accent1"/>
+    </dgm:linClrLst>
+    <dgm:effectClrLst/>
+    <dgm:txLinClrLst/>
+    <dgm:txFillClrLst meth="repeat">
+      <a:schemeClr val="dk1"/>
+    </dgm:txFillClrLst>
+    <dgm:txEffectClrLst/>
+  </dgm:styleLbl>
+  <dgm:styleLbl name="fgAccFollowNode1">
+    <dgm:fillClrLst meth="repeat">
+      <a:schemeClr val="accent1">
+        <a:alpha val="90000"/>
+        <a:tint val="40000"/>
+      </a:schemeClr>
+    </dgm:fillClrLst>
+    <dgm:linClrLst meth="repeat">
+      <a:schemeClr val="accent1">
+        <a:alpha val="90000"/>
+        <a:tint val="40000"/>
+      </a:schemeClr>
+    </dgm:linClrLst>
+    <dgm:effectClrLst/>
+    <dgm:txLinClrLst/>
+    <dgm:txFillClrLst meth="repeat">
+      <a:schemeClr val="dk1"/>
+    </dgm:txFillClrLst>
+    <dgm:txEffectClrLst/>
+  </dgm:styleLbl>
+  <dgm:styleLbl name="alignAccFollowNode1">
+    <dgm:fillClrLst meth="repeat">
+      <a:schemeClr val="accent1">
+        <a:alpha val="90000"/>
+        <a:tint val="40000"/>
+      </a:schemeClr>
+    </dgm:fillClrLst>
+    <dgm:linClrLst meth="repeat">
+      <a:schemeClr val="accent1">
+        <a:alpha val="90000"/>
+        <a:tint val="40000"/>
+      </a:schemeClr>
+    </dgm:linClrLst>
+    <dgm:effectClrLst/>
+    <dgm:txLinClrLst/>
+    <dgm:txFillClrLst meth="repeat">
+      <a:schemeClr val="dk1"/>
+    </dgm:txFillClrLst>
+    <dgm:txEffectClrLst/>
+  </dgm:styleLbl>
+  <dgm:styleLbl name="bgAccFollowNode1">
+    <dgm:fillClrLst meth="repeat">
+      <a:schemeClr val="accent1">
+        <a:alpha val="90000"/>
+        <a:tint val="40000"/>
+      </a:schemeClr>
+    </dgm:fillClrLst>
+    <dgm:linClrLst meth="repeat">
+      <a:schemeClr val="accent1">
+        <a:alpha val="90000"/>
+        <a:tint val="40000"/>
+      </a:schemeClr>
+    </dgm:linClrLst>
+    <dgm:effectClrLst/>
+    <dgm:txLinClrLst/>
+    <dgm:txFillClrLst meth="repeat">
+      <a:schemeClr val="dk1"/>
+    </dgm:txFillClrLst>
+    <dgm:txEffectClrLst/>
+  </dgm:styleLbl>
+  <dgm:styleLbl name="fgAcc0">
+    <dgm:fillClrLst meth="repeat">
+      <a:schemeClr val="lt1">
+        <a:alpha val="90000"/>
+      </a:schemeClr>
+    </dgm:fillClrLst>
+    <dgm:linClrLst meth="repeat">
+      <a:schemeClr val="accent1"/>
+    </dgm:linClrLst>
+    <dgm:effectClrLst/>
+    <dgm:txLinClrLst/>
+    <dgm:txFillClrLst meth="repeat">
+      <a:schemeClr val="dk1"/>
+    </dgm:txFillClrLst>
+    <dgm:txEffectClrLst/>
+  </dgm:styleLbl>
+  <dgm:styleLbl name="fgAcc2">
+    <dgm:fillClrLst meth="repeat">
+      <a:schemeClr val="lt1">
+        <a:alpha val="90000"/>
+      </a:schemeClr>
+    </dgm:fillClrLst>
+    <dgm:linClrLst meth="repeat">
+      <a:schemeClr val="accent1"/>
+    </dgm:linClrLst>
+    <dgm:effectClrLst/>
+    <dgm:txLinClrLst/>
+    <dgm:txFillClrLst meth="repeat">
+      <a:schemeClr val="dk1"/>
+    </dgm:txFillClrLst>
+    <dgm:txEffectClrLst/>
+  </dgm:styleLbl>
+  <dgm:styleLbl name="fgAcc3">
+    <dgm:fillClrLst meth="repeat">
+      <a:schemeClr val="lt1">
+        <a:alpha val="90000"/>
+      </a:schemeClr>
+    </dgm:fillClrLst>
+    <dgm:linClrLst meth="repeat">
+      <a:schemeClr val="accent1"/>
+    </dgm:linClrLst>
+    <dgm:effectClrLst/>
+    <dgm:txLinClrLst/>
+    <dgm:txFillClrLst meth="repeat">
+      <a:schemeClr val="dk1"/>
+    </dgm:txFillClrLst>
+    <dgm:txEffectClrLst/>
+  </dgm:styleLbl>
+  <dgm:styleLbl name="fgAcc4">
+    <dgm:fillClrLst meth="repeat">
+      <a:schemeClr val="lt1">
+        <a:alpha val="90000"/>
+      </a:schemeClr>
+    </dgm:fillClrLst>
+    <dgm:linClrLst meth="repeat">
+      <a:schemeClr val="accent1"/>
+    </dgm:linClrLst>
+    <dgm:effectClrLst/>
+    <dgm:txLinClrLst/>
+    <dgm:txFillClrLst meth="repeat">
+      <a:schemeClr val="dk1"/>
+    </dgm:txFillClrLst>
+    <dgm:txEffectClrLst/>
+  </dgm:styleLbl>
+  <dgm:styleLbl name="bgShp">
+    <dgm:fillClrLst meth="repeat">
+      <a:schemeClr val="accent1">
+        <a:tint val="40000"/>
+      </a:schemeClr>
+    </dgm:fillClrLst>
+    <dgm:linClrLst meth="repeat">
+      <a:schemeClr val="accent1"/>
+    </dgm:linClrLst>
+    <dgm:effectClrLst/>
+    <dgm:txLinClrLst/>
+    <dgm:txFillClrLst meth="repeat">
+      <a:schemeClr val="dk1"/>
+    </dgm:txFillClrLst>
+    <dgm:txEffectClrLst/>
+  </dgm:styleLbl>
+  <dgm:styleLbl name="dkBgShp">
+    <dgm:fillClrLst meth="repeat">
+      <a:schemeClr val="accent1">
+        <a:shade val="80000"/>
+      </a:schemeClr>
+    </dgm:fillClrLst>
+    <dgm:linClrLst meth="repeat">
+      <a:schemeClr val="accent1"/>
+    </dgm:linClrLst>
+    <dgm:effectClrLst/>
+    <dgm:txLinClrLst/>
+    <dgm:txFillClrLst meth="repeat">
+      <a:schemeClr val="lt1"/>
+    </dgm:txFillClrLst>
+    <dgm:txEffectClrLst/>
+  </dgm:styleLbl>
+  <dgm:styleLbl name="trBgShp">
+    <dgm:fillClrLst meth="repeat">
+      <a:schemeClr val="accent1">
+        <a:tint val="50000"/>
+        <a:alpha val="40000"/>
+      </a:schemeClr>
+    </dgm:fillClrLst>
+    <dgm:linClrLst meth="repeat">
+      <a:schemeClr val="accent1"/>
+    </dgm:linClrLst>
+    <dgm:effectClrLst/>
+    <dgm:txLinClrLst/>
+    <dgm:txFillClrLst meth="repeat">
+      <a:schemeClr val="lt1"/>
+    </dgm:txFillClrLst>
+    <dgm:txEffectClrLst/>
+  </dgm:styleLbl>
+  <dgm:styleLbl name="fgShp">
+    <dgm:fillClrLst meth="repeat">
+      <a:schemeClr val="accent1">
+        <a:tint val="60000"/>
+      </a:schemeClr>
+    </dgm:fillClrLst>
+    <dgm:linClrLst meth="repeat">
+      <a:schemeClr val="lt1"/>
+    </dgm:linClrLst>
+    <dgm:effectClrLst/>
+    <dgm:txLinClrLst/>
+    <dgm:txFillClrLst meth="repeat">
+      <a:schemeClr val="dk1"/>
+    </dgm:txFillClrLst>
+    <dgm:txEffectClrLst/>
+  </dgm:styleLbl>
+  <dgm:styleLbl name="revTx">
+    <dgm:fillClrLst meth="repeat">
+      <a:schemeClr val="lt1">
+        <a:alpha val="0"/>
+      </a:schemeClr>
+    </dgm:fillClrLst>
+    <dgm:linClrLst meth="repeat">
+      <a:schemeClr val="dk1">
+        <a:alpha val="0"/>
+      </a:schemeClr>
+    </dgm:linClrLst>
+    <dgm:effectClrLst/>
+    <dgm:txLinClrLst/>
+    <dgm:txFillClrLst meth="repeat">
+      <a:schemeClr val="tx1"/>
+    </dgm:txFillClrLst>
+    <dgm:txEffectClrLst/>
+  </dgm:styleLbl>
+</dgm:colorsDef>
+</file>
+
+<file path=ppt/diagrams/data1.xml><?xml version="1.0" encoding="utf-8"?>
+<dgm:dataModel xmlns:dgm="http://schemas.openxmlformats.org/drawingml/2006/diagram" xmlns:a="http://schemas.openxmlformats.org/drawingml/2006/main">
+  <dgm:ptLst>
+    <dgm:pt modelId="{CC82EFBF-7107-494A-8AAB-7C60D9A18C52}" type="doc">
+      <dgm:prSet loTypeId="urn:microsoft.com/office/officeart/2005/8/layout/hProcess9" loCatId="process" qsTypeId="urn:microsoft.com/office/officeart/2005/8/quickstyle/simple1" qsCatId="simple" csTypeId="urn:microsoft.com/office/officeart/2005/8/colors/accent1_2" csCatId="accent1" phldr="1"/>
+      <dgm:spPr/>
+      <dgm:t>
+        <a:bodyPr/>
+        <a:lstStyle/>
+        <a:p>
+          <a:endParaRPr lang="en-US"/>
+        </a:p>
+      </dgm:t>
+    </dgm:pt>
+    <dgm:pt modelId="{D5F06DD9-2FFF-4343-814C-B31E3889ACCB}">
+      <dgm:prSet phldrT="[Text]" phldr="0"/>
+      <dgm:spPr/>
+      <dgm:t>
+        <a:bodyPr/>
+        <a:lstStyle/>
+        <a:p>
+          <a:r>
+            <a:rPr lang="en-US" dirty="0"/>
+            <a:t>Data</a:t>
+          </a:r>
+        </a:p>
+      </dgm:t>
+    </dgm:pt>
+    <dgm:pt modelId="{3D5B19E5-87A6-4D3B-9B61-5918DF25FDF0}" type="parTrans" cxnId="{B1D4D4C1-723D-4F84-B522-078EBCE805CC}">
+      <dgm:prSet/>
+      <dgm:spPr/>
+      <dgm:t>
+        <a:bodyPr/>
+        <a:lstStyle/>
+        <a:p>
+          <a:endParaRPr lang="en-US"/>
+        </a:p>
+      </dgm:t>
+    </dgm:pt>
+    <dgm:pt modelId="{D670B910-3613-4ABD-B4EF-F8302081AD61}" type="sibTrans" cxnId="{B1D4D4C1-723D-4F84-B522-078EBCE805CC}">
+      <dgm:prSet/>
+      <dgm:spPr/>
+      <dgm:t>
+        <a:bodyPr/>
+        <a:lstStyle/>
+        <a:p>
+          <a:endParaRPr lang="en-US"/>
+        </a:p>
+      </dgm:t>
+    </dgm:pt>
+    <dgm:pt modelId="{97EF6E1C-BA7C-4636-98C5-BAF25E72A9EA}">
+      <dgm:prSet phldrT="[Text]" phldr="0"/>
+      <dgm:spPr/>
+      <dgm:t>
+        <a:bodyPr/>
+        <a:lstStyle/>
+        <a:p>
+          <a:r>
+            <a:rPr lang="en-US" dirty="0"/>
+            <a:t>model</a:t>
+          </a:r>
+        </a:p>
+      </dgm:t>
+    </dgm:pt>
+    <dgm:pt modelId="{CC6E4465-715C-44B9-8F5A-A614F0AF83EB}" type="parTrans" cxnId="{C83ED522-35C7-4177-8D72-358078CACD54}">
+      <dgm:prSet/>
+      <dgm:spPr/>
+      <dgm:t>
+        <a:bodyPr/>
+        <a:lstStyle/>
+        <a:p>
+          <a:endParaRPr lang="en-US"/>
+        </a:p>
+      </dgm:t>
+    </dgm:pt>
+    <dgm:pt modelId="{9AE711F1-83FF-473B-9D0A-AB57E372EB08}" type="sibTrans" cxnId="{C83ED522-35C7-4177-8D72-358078CACD54}">
+      <dgm:prSet/>
+      <dgm:spPr/>
+      <dgm:t>
+        <a:bodyPr/>
+        <a:lstStyle/>
+        <a:p>
+          <a:endParaRPr lang="en-US"/>
+        </a:p>
+      </dgm:t>
+    </dgm:pt>
+    <dgm:pt modelId="{5A9BC8F0-D7E0-407D-82A5-3EE52FE05DF5}">
+      <dgm:prSet phldrT="[Text]" phldr="0"/>
+      <dgm:spPr/>
+      <dgm:t>
+        <a:bodyPr/>
+        <a:lstStyle/>
+        <a:p>
+          <a:r>
+            <a:rPr lang="en-US" dirty="0"/>
+            <a:t>output</a:t>
+          </a:r>
+        </a:p>
+      </dgm:t>
+    </dgm:pt>
+    <dgm:pt modelId="{B5075FD9-CDA1-4398-AB61-C112EF4FC073}" type="parTrans" cxnId="{32D180CA-215D-4D8E-BC5A-ECBB7F3838EE}">
+      <dgm:prSet/>
+      <dgm:spPr/>
+      <dgm:t>
+        <a:bodyPr/>
+        <a:lstStyle/>
+        <a:p>
+          <a:endParaRPr lang="en-US"/>
+        </a:p>
+      </dgm:t>
+    </dgm:pt>
+    <dgm:pt modelId="{D954C522-4F7C-4CC3-8C16-5B8309720BC8}" type="sibTrans" cxnId="{32D180CA-215D-4D8E-BC5A-ECBB7F3838EE}">
+      <dgm:prSet/>
+      <dgm:spPr/>
+      <dgm:t>
+        <a:bodyPr/>
+        <a:lstStyle/>
+        <a:p>
+          <a:endParaRPr lang="en-US"/>
+        </a:p>
+      </dgm:t>
+    </dgm:pt>
+    <dgm:pt modelId="{544E611A-A92D-47AE-8209-1291FA008FC7}">
+      <dgm:prSet phldrT="[Text]" phldr="0"/>
+      <dgm:spPr/>
+      <dgm:t>
+        <a:bodyPr/>
+        <a:lstStyle/>
+        <a:p>
+          <a:r>
+            <a:rPr lang="en-US"/>
+            <a:t>Data Prep</a:t>
+          </a:r>
+          <a:endParaRPr lang="en-US" dirty="0"/>
+        </a:p>
+      </dgm:t>
+    </dgm:pt>
+    <dgm:pt modelId="{257DBADF-88C0-492E-A62A-4A73B487F3F0}" type="parTrans" cxnId="{437ACB81-26B8-4C36-928C-DE8051A9AA85}">
+      <dgm:prSet/>
+      <dgm:spPr/>
+      <dgm:t>
+        <a:bodyPr/>
+        <a:lstStyle/>
+        <a:p>
+          <a:endParaRPr lang="en-US"/>
+        </a:p>
+      </dgm:t>
+    </dgm:pt>
+    <dgm:pt modelId="{581760DF-0F87-43C8-AF78-7383A1D234FB}" type="sibTrans" cxnId="{437ACB81-26B8-4C36-928C-DE8051A9AA85}">
+      <dgm:prSet/>
+      <dgm:spPr/>
+      <dgm:t>
+        <a:bodyPr/>
+        <a:lstStyle/>
+        <a:p>
+          <a:endParaRPr lang="en-US"/>
+        </a:p>
+      </dgm:t>
+    </dgm:pt>
+    <dgm:pt modelId="{7047978F-7B94-453E-9392-49241B4E3952}" type="pres">
+      <dgm:prSet presAssocID="{CC82EFBF-7107-494A-8AAB-7C60D9A18C52}" presName="CompostProcess" presStyleCnt="0">
+        <dgm:presLayoutVars>
+          <dgm:dir/>
+          <dgm:resizeHandles val="exact"/>
+        </dgm:presLayoutVars>
+      </dgm:prSet>
+      <dgm:spPr/>
+    </dgm:pt>
+    <dgm:pt modelId="{E8E2B53E-EF74-4B45-95E3-9B5C82B1340C}" type="pres">
+      <dgm:prSet presAssocID="{CC82EFBF-7107-494A-8AAB-7C60D9A18C52}" presName="arrow" presStyleLbl="bgShp" presStyleIdx="0" presStyleCnt="1"/>
+      <dgm:spPr/>
+    </dgm:pt>
+    <dgm:pt modelId="{A97DD83C-6A98-4091-B61C-9812DDC6BF82}" type="pres">
+      <dgm:prSet presAssocID="{CC82EFBF-7107-494A-8AAB-7C60D9A18C52}" presName="linearProcess" presStyleCnt="0"/>
+      <dgm:spPr/>
+    </dgm:pt>
+    <dgm:pt modelId="{B5819A44-3F39-4942-91AB-6CD9827FCCA5}" type="pres">
+      <dgm:prSet presAssocID="{D5F06DD9-2FFF-4343-814C-B31E3889ACCB}" presName="textNode" presStyleLbl="node1" presStyleIdx="0" presStyleCnt="4">
+        <dgm:presLayoutVars>
+          <dgm:bulletEnabled val="1"/>
+        </dgm:presLayoutVars>
+      </dgm:prSet>
+      <dgm:spPr/>
+    </dgm:pt>
+    <dgm:pt modelId="{13E00F69-C04D-459C-9C6D-52BAA6ABF799}" type="pres">
+      <dgm:prSet presAssocID="{D670B910-3613-4ABD-B4EF-F8302081AD61}" presName="sibTrans" presStyleCnt="0"/>
+      <dgm:spPr/>
+    </dgm:pt>
+    <dgm:pt modelId="{02C6F657-DC22-4874-B839-ED01F19A363A}" type="pres">
+      <dgm:prSet presAssocID="{544E611A-A92D-47AE-8209-1291FA008FC7}" presName="textNode" presStyleLbl="node1" presStyleIdx="1" presStyleCnt="4">
+        <dgm:presLayoutVars>
+          <dgm:bulletEnabled val="1"/>
+        </dgm:presLayoutVars>
+      </dgm:prSet>
+      <dgm:spPr/>
+    </dgm:pt>
+    <dgm:pt modelId="{8A421316-76C1-42B6-99E9-1E657EFF2B4A}" type="pres">
+      <dgm:prSet presAssocID="{581760DF-0F87-43C8-AF78-7383A1D234FB}" presName="sibTrans" presStyleCnt="0"/>
+      <dgm:spPr/>
+    </dgm:pt>
+    <dgm:pt modelId="{C00E62EC-C631-4907-A6A9-ACFBFA247E6A}" type="pres">
+      <dgm:prSet presAssocID="{97EF6E1C-BA7C-4636-98C5-BAF25E72A9EA}" presName="textNode" presStyleLbl="node1" presStyleIdx="2" presStyleCnt="4">
+        <dgm:presLayoutVars>
+          <dgm:bulletEnabled val="1"/>
+        </dgm:presLayoutVars>
+      </dgm:prSet>
+      <dgm:spPr/>
+    </dgm:pt>
+    <dgm:pt modelId="{990CDBD4-F756-4EED-8B52-90FCFB437DE4}" type="pres">
+      <dgm:prSet presAssocID="{9AE711F1-83FF-473B-9D0A-AB57E372EB08}" presName="sibTrans" presStyleCnt="0"/>
+      <dgm:spPr/>
+    </dgm:pt>
+    <dgm:pt modelId="{2B39B381-C3F6-40EF-9153-96AC0478B650}" type="pres">
+      <dgm:prSet presAssocID="{5A9BC8F0-D7E0-407D-82A5-3EE52FE05DF5}" presName="textNode" presStyleLbl="node1" presStyleIdx="3" presStyleCnt="4">
+        <dgm:presLayoutVars>
+          <dgm:bulletEnabled val="1"/>
+        </dgm:presLayoutVars>
+      </dgm:prSet>
+      <dgm:spPr/>
+    </dgm:pt>
+  </dgm:ptLst>
+  <dgm:cxnLst>
+    <dgm:cxn modelId="{C83ED522-35C7-4177-8D72-358078CACD54}" srcId="{CC82EFBF-7107-494A-8AAB-7C60D9A18C52}" destId="{97EF6E1C-BA7C-4636-98C5-BAF25E72A9EA}" srcOrd="2" destOrd="0" parTransId="{CC6E4465-715C-44B9-8F5A-A614F0AF83EB}" sibTransId="{9AE711F1-83FF-473B-9D0A-AB57E372EB08}"/>
+    <dgm:cxn modelId="{A12B8D56-7091-4E96-B4DA-9B12CBF3D848}" type="presOf" srcId="{544E611A-A92D-47AE-8209-1291FA008FC7}" destId="{02C6F657-DC22-4874-B839-ED01F19A363A}" srcOrd="0" destOrd="0" presId="urn:microsoft.com/office/officeart/2005/8/layout/hProcess9"/>
+    <dgm:cxn modelId="{8BE6B87B-BB74-499A-AA04-C383BD12B3AC}" type="presOf" srcId="{D5F06DD9-2FFF-4343-814C-B31E3889ACCB}" destId="{B5819A44-3F39-4942-91AB-6CD9827FCCA5}" srcOrd="0" destOrd="0" presId="urn:microsoft.com/office/officeart/2005/8/layout/hProcess9"/>
+    <dgm:cxn modelId="{437ACB81-26B8-4C36-928C-DE8051A9AA85}" srcId="{CC82EFBF-7107-494A-8AAB-7C60D9A18C52}" destId="{544E611A-A92D-47AE-8209-1291FA008FC7}" srcOrd="1" destOrd="0" parTransId="{257DBADF-88C0-492E-A62A-4A73B487F3F0}" sibTransId="{581760DF-0F87-43C8-AF78-7383A1D234FB}"/>
+    <dgm:cxn modelId="{F2F10E88-2076-4B33-A6FD-7D9F58D19910}" type="presOf" srcId="{97EF6E1C-BA7C-4636-98C5-BAF25E72A9EA}" destId="{C00E62EC-C631-4907-A6A9-ACFBFA247E6A}" srcOrd="0" destOrd="0" presId="urn:microsoft.com/office/officeart/2005/8/layout/hProcess9"/>
+    <dgm:cxn modelId="{F8063FC1-6BD8-4162-8CB9-8D3139B06914}" type="presOf" srcId="{CC82EFBF-7107-494A-8AAB-7C60D9A18C52}" destId="{7047978F-7B94-453E-9392-49241B4E3952}" srcOrd="0" destOrd="0" presId="urn:microsoft.com/office/officeart/2005/8/layout/hProcess9"/>
+    <dgm:cxn modelId="{B1D4D4C1-723D-4F84-B522-078EBCE805CC}" srcId="{CC82EFBF-7107-494A-8AAB-7C60D9A18C52}" destId="{D5F06DD9-2FFF-4343-814C-B31E3889ACCB}" srcOrd="0" destOrd="0" parTransId="{3D5B19E5-87A6-4D3B-9B61-5918DF25FDF0}" sibTransId="{D670B910-3613-4ABD-B4EF-F8302081AD61}"/>
+    <dgm:cxn modelId="{32D180CA-215D-4D8E-BC5A-ECBB7F3838EE}" srcId="{CC82EFBF-7107-494A-8AAB-7C60D9A18C52}" destId="{5A9BC8F0-D7E0-407D-82A5-3EE52FE05DF5}" srcOrd="3" destOrd="0" parTransId="{B5075FD9-CDA1-4398-AB61-C112EF4FC073}" sibTransId="{D954C522-4F7C-4CC3-8C16-5B8309720BC8}"/>
+    <dgm:cxn modelId="{DFB6F8FE-B388-4003-A03F-230FB289B3D0}" type="presOf" srcId="{5A9BC8F0-D7E0-407D-82A5-3EE52FE05DF5}" destId="{2B39B381-C3F6-40EF-9153-96AC0478B650}" srcOrd="0" destOrd="0" presId="urn:microsoft.com/office/officeart/2005/8/layout/hProcess9"/>
+    <dgm:cxn modelId="{A8BE6ECB-571B-444C-9AED-028DA600BB12}" type="presParOf" srcId="{7047978F-7B94-453E-9392-49241B4E3952}" destId="{E8E2B53E-EF74-4B45-95E3-9B5C82B1340C}" srcOrd="0" destOrd="0" presId="urn:microsoft.com/office/officeart/2005/8/layout/hProcess9"/>
+    <dgm:cxn modelId="{FF50508F-C8D3-41DC-B2DA-A7CB897F377C}" type="presParOf" srcId="{7047978F-7B94-453E-9392-49241B4E3952}" destId="{A97DD83C-6A98-4091-B61C-9812DDC6BF82}" srcOrd="1" destOrd="0" presId="urn:microsoft.com/office/officeart/2005/8/layout/hProcess9"/>
+    <dgm:cxn modelId="{E5C7D865-914A-43F9-A8E5-5D6486FF9CC7}" type="presParOf" srcId="{A97DD83C-6A98-4091-B61C-9812DDC6BF82}" destId="{B5819A44-3F39-4942-91AB-6CD9827FCCA5}" srcOrd="0" destOrd="0" presId="urn:microsoft.com/office/officeart/2005/8/layout/hProcess9"/>
+    <dgm:cxn modelId="{F0ECEBC4-E961-4C18-9E84-E14A33C433CD}" type="presParOf" srcId="{A97DD83C-6A98-4091-B61C-9812DDC6BF82}" destId="{13E00F69-C04D-459C-9C6D-52BAA6ABF799}" srcOrd="1" destOrd="0" presId="urn:microsoft.com/office/officeart/2005/8/layout/hProcess9"/>
+    <dgm:cxn modelId="{5168CB5F-752A-4896-A6CC-0217EAC4E0A5}" type="presParOf" srcId="{A97DD83C-6A98-4091-B61C-9812DDC6BF82}" destId="{02C6F657-DC22-4874-B839-ED01F19A363A}" srcOrd="2" destOrd="0" presId="urn:microsoft.com/office/officeart/2005/8/layout/hProcess9"/>
+    <dgm:cxn modelId="{0A24029F-0FBA-4B53-81C3-8E968BE3D3DE}" type="presParOf" srcId="{A97DD83C-6A98-4091-B61C-9812DDC6BF82}" destId="{8A421316-76C1-42B6-99E9-1E657EFF2B4A}" srcOrd="3" destOrd="0" presId="urn:microsoft.com/office/officeart/2005/8/layout/hProcess9"/>
+    <dgm:cxn modelId="{2E504A25-CAB0-4E1D-9DC9-10476FD2A1EB}" type="presParOf" srcId="{A97DD83C-6A98-4091-B61C-9812DDC6BF82}" destId="{C00E62EC-C631-4907-A6A9-ACFBFA247E6A}" srcOrd="4" destOrd="0" presId="urn:microsoft.com/office/officeart/2005/8/layout/hProcess9"/>
+    <dgm:cxn modelId="{293D8225-2230-46AA-9AD0-D4BDB887B88F}" type="presParOf" srcId="{A97DD83C-6A98-4091-B61C-9812DDC6BF82}" destId="{990CDBD4-F756-4EED-8B52-90FCFB437DE4}" srcOrd="5" destOrd="0" presId="urn:microsoft.com/office/officeart/2005/8/layout/hProcess9"/>
+    <dgm:cxn modelId="{E17C0112-6E1D-4442-982B-6F457DF83C11}" type="presParOf" srcId="{A97DD83C-6A98-4091-B61C-9812DDC6BF82}" destId="{2B39B381-C3F6-40EF-9153-96AC0478B650}" srcOrd="6" destOrd="0" presId="urn:microsoft.com/office/officeart/2005/8/layout/hProcess9"/>
+  </dgm:cxnLst>
+  <dgm:bg/>
+  <dgm:whole/>
+  <dgm:extLst>
+    <a:ext uri="http://schemas.microsoft.com/office/drawing/2008/diagram">
+      <dsp:dataModelExt xmlns:dsp="http://schemas.microsoft.com/office/drawing/2008/diagram" relId="rId6" minVer="http://schemas.openxmlformats.org/drawingml/2006/diagram"/>
+    </a:ext>
+  </dgm:extLst>
+</dgm:dataModel>
+</file>
+
+<file path=ppt/diagrams/data2.xml><?xml version="1.0" encoding="utf-8"?>
+<dgm:dataModel xmlns:dgm="http://schemas.openxmlformats.org/drawingml/2006/diagram" xmlns:a="http://schemas.openxmlformats.org/drawingml/2006/main">
+  <dgm:ptLst>
+    <dgm:pt modelId="{4A2BAD2F-C6BD-42BE-B521-AEF54FC35A84}" type="doc">
+      <dgm:prSet loTypeId="urn:microsoft.com/office/officeart/2005/8/layout/process4" loCatId="process" qsTypeId="urn:microsoft.com/office/officeart/2005/8/quickstyle/simple1" qsCatId="simple" csTypeId="urn:microsoft.com/office/officeart/2005/8/colors/accent1_2" csCatId="accent1" phldr="1"/>
+      <dgm:spPr/>
+      <dgm:t>
+        <a:bodyPr/>
+        <a:lstStyle/>
+        <a:p>
+          <a:endParaRPr lang="en-US"/>
+        </a:p>
+      </dgm:t>
+    </dgm:pt>
+    <dgm:pt modelId="{63BCB48E-6580-4F8C-BE41-3AA9365A60D9}">
+      <dgm:prSet phldrT="[Text]" phldr="0"/>
+      <dgm:spPr/>
+      <dgm:t>
+        <a:bodyPr/>
+        <a:lstStyle/>
+        <a:p>
+          <a:r>
+            <a:rPr lang="en-US" dirty="0"/>
+            <a:t>data</a:t>
+          </a:r>
+        </a:p>
+      </dgm:t>
+    </dgm:pt>
+    <dgm:pt modelId="{B0CACA04-FF4B-4401-8ABA-31A959DBA274}" type="parTrans" cxnId="{5EE3CE6B-1BC3-4914-8195-D031D88D80EA}">
+      <dgm:prSet/>
+      <dgm:spPr/>
+      <dgm:t>
+        <a:bodyPr/>
+        <a:lstStyle/>
+        <a:p>
+          <a:endParaRPr lang="en-US"/>
+        </a:p>
+      </dgm:t>
+    </dgm:pt>
+    <dgm:pt modelId="{FEF831AA-DFBB-444E-A754-ECA5184B54C1}" type="sibTrans" cxnId="{5EE3CE6B-1BC3-4914-8195-D031D88D80EA}">
+      <dgm:prSet/>
+      <dgm:spPr/>
+      <dgm:t>
+        <a:bodyPr/>
+        <a:lstStyle/>
+        <a:p>
+          <a:endParaRPr lang="en-US"/>
+        </a:p>
+      </dgm:t>
+    </dgm:pt>
+    <dgm:pt modelId="{4D5FDF7B-8E5D-49C4-BF8A-4283C1AF15F7}">
+      <dgm:prSet phldrT="[Text]" phldr="1"/>
+      <dgm:spPr/>
+      <dgm:t>
+        <a:bodyPr/>
+        <a:lstStyle/>
+        <a:p>
+          <a:endParaRPr lang="en-US" dirty="0"/>
+        </a:p>
+      </dgm:t>
+    </dgm:pt>
+    <dgm:pt modelId="{70FA3552-5DE9-4E6F-814C-2B2767A67D72}" type="parTrans" cxnId="{0D12DDB1-6A2C-421E-80E3-00AADB916462}">
+      <dgm:prSet/>
+      <dgm:spPr/>
+      <dgm:t>
+        <a:bodyPr/>
+        <a:lstStyle/>
+        <a:p>
+          <a:endParaRPr lang="en-US"/>
+        </a:p>
+      </dgm:t>
+    </dgm:pt>
+    <dgm:pt modelId="{40C368F5-C26D-4CB0-A6E6-F3D4AE19313E}" type="sibTrans" cxnId="{0D12DDB1-6A2C-421E-80E3-00AADB916462}">
+      <dgm:prSet/>
+      <dgm:spPr/>
+      <dgm:t>
+        <a:bodyPr/>
+        <a:lstStyle/>
+        <a:p>
+          <a:endParaRPr lang="en-US"/>
+        </a:p>
+      </dgm:t>
+    </dgm:pt>
+    <dgm:pt modelId="{9BF7C278-0898-4F75-B99B-942AA4A4EF6A}">
+      <dgm:prSet phldrT="[Text]" phldr="1"/>
+      <dgm:spPr/>
+      <dgm:t>
+        <a:bodyPr/>
+        <a:lstStyle/>
+        <a:p>
+          <a:endParaRPr lang="en-US"/>
+        </a:p>
+      </dgm:t>
+    </dgm:pt>
+    <dgm:pt modelId="{81152DB3-B3FA-4DF7-941F-A2DDF2884AC1}" type="parTrans" cxnId="{207A89ED-9122-4A7F-BD2E-5F3EF94A01A3}">
+      <dgm:prSet/>
+      <dgm:spPr/>
+      <dgm:t>
+        <a:bodyPr/>
+        <a:lstStyle/>
+        <a:p>
+          <a:endParaRPr lang="en-US"/>
+        </a:p>
+      </dgm:t>
+    </dgm:pt>
+    <dgm:pt modelId="{BFAF05C8-0DA3-4812-8872-22E4C7282464}" type="sibTrans" cxnId="{207A89ED-9122-4A7F-BD2E-5F3EF94A01A3}">
+      <dgm:prSet/>
+      <dgm:spPr/>
+      <dgm:t>
+        <a:bodyPr/>
+        <a:lstStyle/>
+        <a:p>
+          <a:endParaRPr lang="en-US"/>
+        </a:p>
+      </dgm:t>
+    </dgm:pt>
+    <dgm:pt modelId="{F9669802-F6C7-42E4-9E84-8C855085DAFD}">
+      <dgm:prSet phldrT="[Text]" phldr="0"/>
+      <dgm:spPr/>
+      <dgm:t>
+        <a:bodyPr/>
+        <a:lstStyle/>
+        <a:p>
+          <a:r>
+            <a:rPr lang="en-US" dirty="0"/>
+            <a:t>model</a:t>
+          </a:r>
+        </a:p>
+      </dgm:t>
+    </dgm:pt>
+    <dgm:pt modelId="{5E013583-8383-46B4-AE62-E53F2FD865B9}" type="parTrans" cxnId="{4CFFC550-A101-4408-A8D0-7727C352BC58}">
+      <dgm:prSet/>
+      <dgm:spPr/>
+      <dgm:t>
+        <a:bodyPr/>
+        <a:lstStyle/>
+        <a:p>
+          <a:endParaRPr lang="en-US"/>
+        </a:p>
+      </dgm:t>
+    </dgm:pt>
+    <dgm:pt modelId="{83C51DC6-1228-4932-9BCD-9D4C9B875A74}" type="sibTrans" cxnId="{4CFFC550-A101-4408-A8D0-7727C352BC58}">
+      <dgm:prSet/>
+      <dgm:spPr/>
+      <dgm:t>
+        <a:bodyPr/>
+        <a:lstStyle/>
+        <a:p>
+          <a:endParaRPr lang="en-US"/>
+        </a:p>
+      </dgm:t>
+    </dgm:pt>
+    <dgm:pt modelId="{0D750001-9FA8-4C1E-A34C-D76EACEA1613}">
+      <dgm:prSet phldrT="[Text]" phldr="1"/>
+      <dgm:spPr/>
+      <dgm:t>
+        <a:bodyPr/>
+        <a:lstStyle/>
+        <a:p>
+          <a:endParaRPr lang="en-US"/>
+        </a:p>
+      </dgm:t>
+    </dgm:pt>
+    <dgm:pt modelId="{C475E581-B421-4FF2-ABDC-046722B52890}" type="parTrans" cxnId="{95E8356C-9F4F-43C9-8F35-41A1355D4295}">
+      <dgm:prSet/>
+      <dgm:spPr/>
+      <dgm:t>
+        <a:bodyPr/>
+        <a:lstStyle/>
+        <a:p>
+          <a:endParaRPr lang="en-US"/>
+        </a:p>
+      </dgm:t>
+    </dgm:pt>
+    <dgm:pt modelId="{3681BA6B-9182-4241-9830-57D5101C167B}" type="sibTrans" cxnId="{95E8356C-9F4F-43C9-8F35-41A1355D4295}">
+      <dgm:prSet/>
+      <dgm:spPr/>
+      <dgm:t>
+        <a:bodyPr/>
+        <a:lstStyle/>
+        <a:p>
+          <a:endParaRPr lang="en-US"/>
+        </a:p>
+      </dgm:t>
+    </dgm:pt>
+    <dgm:pt modelId="{6F0EC70C-ECE9-45D9-A0C8-CCAF3C6C95CE}">
+      <dgm:prSet phldrT="[Text]" phldr="1"/>
+      <dgm:spPr/>
+      <dgm:t>
+        <a:bodyPr/>
+        <a:lstStyle/>
+        <a:p>
+          <a:endParaRPr lang="en-US"/>
+        </a:p>
+      </dgm:t>
+    </dgm:pt>
+    <dgm:pt modelId="{7DEA2ADC-C1BB-4666-8E2F-C53381C4827F}" type="parTrans" cxnId="{58AB408D-2DAC-447B-9284-969667146363}">
+      <dgm:prSet/>
+      <dgm:spPr/>
+      <dgm:t>
+        <a:bodyPr/>
+        <a:lstStyle/>
+        <a:p>
+          <a:endParaRPr lang="en-US"/>
+        </a:p>
+      </dgm:t>
+    </dgm:pt>
+    <dgm:pt modelId="{1AEDB370-6AA6-40F5-AE9A-43A42136410E}" type="sibTrans" cxnId="{58AB408D-2DAC-447B-9284-969667146363}">
+      <dgm:prSet/>
+      <dgm:spPr/>
+      <dgm:t>
+        <a:bodyPr/>
+        <a:lstStyle/>
+        <a:p>
+          <a:endParaRPr lang="en-US"/>
+        </a:p>
+      </dgm:t>
+    </dgm:pt>
+    <dgm:pt modelId="{76A53774-2801-4E97-93E7-61F74DECBE9E}">
+      <dgm:prSet phldrT="[Text]" phldr="0"/>
+      <dgm:spPr/>
+      <dgm:t>
+        <a:bodyPr/>
+        <a:lstStyle/>
+        <a:p>
+          <a:r>
+            <a:rPr lang="en-US" dirty="0"/>
+            <a:t>output</a:t>
+          </a:r>
+        </a:p>
+      </dgm:t>
+    </dgm:pt>
+    <dgm:pt modelId="{5F79598C-043A-45A4-BB8D-3C6E249BFA4A}" type="parTrans" cxnId="{5F8AEEFA-8B15-4D68-B5E9-0850468CD818}">
+      <dgm:prSet/>
+      <dgm:spPr/>
+      <dgm:t>
+        <a:bodyPr/>
+        <a:lstStyle/>
+        <a:p>
+          <a:endParaRPr lang="en-US"/>
+        </a:p>
+      </dgm:t>
+    </dgm:pt>
+    <dgm:pt modelId="{BD5A7E9E-CC37-4CC8-B307-A23E9359F469}" type="sibTrans" cxnId="{5F8AEEFA-8B15-4D68-B5E9-0850468CD818}">
+      <dgm:prSet/>
+      <dgm:spPr/>
+      <dgm:t>
+        <a:bodyPr/>
+        <a:lstStyle/>
+        <a:p>
+          <a:endParaRPr lang="en-US"/>
+        </a:p>
+      </dgm:t>
+    </dgm:pt>
+    <dgm:pt modelId="{3FE77D03-5696-4713-8A78-8A718EE78003}">
+      <dgm:prSet phldrT="[Text]" phldr="1"/>
+      <dgm:spPr/>
+      <dgm:t>
+        <a:bodyPr/>
+        <a:lstStyle/>
+        <a:p>
+          <a:endParaRPr lang="en-US"/>
+        </a:p>
+      </dgm:t>
+    </dgm:pt>
+    <dgm:pt modelId="{64B8C078-BE65-442D-8500-18745D376B86}" type="parTrans" cxnId="{F0F6B33A-3043-4BFF-918C-1D86669DD87F}">
+      <dgm:prSet/>
+      <dgm:spPr/>
+      <dgm:t>
+        <a:bodyPr/>
+        <a:lstStyle/>
+        <a:p>
+          <a:endParaRPr lang="en-US"/>
+        </a:p>
+      </dgm:t>
+    </dgm:pt>
+    <dgm:pt modelId="{F334CEE4-7D7D-4CCF-8364-431090DAC753}" type="sibTrans" cxnId="{F0F6B33A-3043-4BFF-918C-1D86669DD87F}">
+      <dgm:prSet/>
+      <dgm:spPr/>
+      <dgm:t>
+        <a:bodyPr/>
+        <a:lstStyle/>
+        <a:p>
+          <a:endParaRPr lang="en-US"/>
+        </a:p>
+      </dgm:t>
+    </dgm:pt>
+    <dgm:pt modelId="{2A01B639-C2A3-4DEC-9117-2CA993083719}">
+      <dgm:prSet phldrT="[Text]" phldr="1"/>
+      <dgm:spPr/>
+      <dgm:t>
+        <a:bodyPr/>
+        <a:lstStyle/>
+        <a:p>
+          <a:endParaRPr lang="en-US"/>
+        </a:p>
+      </dgm:t>
+    </dgm:pt>
+    <dgm:pt modelId="{376E95F4-953F-4F71-A7BB-15E06A0F327A}" type="parTrans" cxnId="{C9E94C94-225A-4291-9179-9EF3517626B9}">
+      <dgm:prSet/>
+      <dgm:spPr/>
+      <dgm:t>
+        <a:bodyPr/>
+        <a:lstStyle/>
+        <a:p>
+          <a:endParaRPr lang="en-US"/>
+        </a:p>
+      </dgm:t>
+    </dgm:pt>
+    <dgm:pt modelId="{D97C45CC-F273-4C6E-8FE4-148875F638C2}" type="sibTrans" cxnId="{C9E94C94-225A-4291-9179-9EF3517626B9}">
+      <dgm:prSet/>
+      <dgm:spPr/>
+      <dgm:t>
+        <a:bodyPr/>
+        <a:lstStyle/>
+        <a:p>
+          <a:endParaRPr lang="en-US"/>
+        </a:p>
+      </dgm:t>
+    </dgm:pt>
+    <dgm:pt modelId="{782FADAD-BC02-407B-B192-AD829DBD0CEE}" type="pres">
+      <dgm:prSet presAssocID="{4A2BAD2F-C6BD-42BE-B521-AEF54FC35A84}" presName="Name0" presStyleCnt="0">
+        <dgm:presLayoutVars>
+          <dgm:dir/>
+          <dgm:animLvl val="lvl"/>
+          <dgm:resizeHandles val="exact"/>
+        </dgm:presLayoutVars>
+      </dgm:prSet>
+      <dgm:spPr/>
+    </dgm:pt>
+    <dgm:pt modelId="{9DAD537D-975C-43B3-95EC-5351EF0B9445}" type="pres">
+      <dgm:prSet presAssocID="{76A53774-2801-4E97-93E7-61F74DECBE9E}" presName="boxAndChildren" presStyleCnt="0"/>
+      <dgm:spPr/>
+    </dgm:pt>
+    <dgm:pt modelId="{DE09E13C-70B7-4F9C-929A-48776F2A2C22}" type="pres">
+      <dgm:prSet presAssocID="{76A53774-2801-4E97-93E7-61F74DECBE9E}" presName="parentTextBox" presStyleLbl="node1" presStyleIdx="0" presStyleCnt="3"/>
+      <dgm:spPr/>
+    </dgm:pt>
+    <dgm:pt modelId="{AEEF2733-1BA1-4F29-B7EC-73CE43B078B7}" type="pres">
+      <dgm:prSet presAssocID="{76A53774-2801-4E97-93E7-61F74DECBE9E}" presName="entireBox" presStyleLbl="node1" presStyleIdx="0" presStyleCnt="3"/>
+      <dgm:spPr/>
+    </dgm:pt>
+    <dgm:pt modelId="{2A89B9C6-649B-497A-AE2E-60877CBA8482}" type="pres">
+      <dgm:prSet presAssocID="{76A53774-2801-4E97-93E7-61F74DECBE9E}" presName="descendantBox" presStyleCnt="0"/>
+      <dgm:spPr/>
+    </dgm:pt>
+    <dgm:pt modelId="{68DD444A-9F84-4A2B-847B-786807B073EF}" type="pres">
+      <dgm:prSet presAssocID="{3FE77D03-5696-4713-8A78-8A718EE78003}" presName="childTextBox" presStyleLbl="fgAccFollowNode1" presStyleIdx="0" presStyleCnt="6">
+        <dgm:presLayoutVars>
+          <dgm:bulletEnabled val="1"/>
+        </dgm:presLayoutVars>
+      </dgm:prSet>
+      <dgm:spPr/>
+    </dgm:pt>
+    <dgm:pt modelId="{F69694CA-D69A-4172-9B19-7262ADC7F9A0}" type="pres">
+      <dgm:prSet presAssocID="{2A01B639-C2A3-4DEC-9117-2CA993083719}" presName="childTextBox" presStyleLbl="fgAccFollowNode1" presStyleIdx="1" presStyleCnt="6">
+        <dgm:presLayoutVars>
+          <dgm:bulletEnabled val="1"/>
+        </dgm:presLayoutVars>
+      </dgm:prSet>
+      <dgm:spPr/>
+    </dgm:pt>
+    <dgm:pt modelId="{F58D45BB-5246-4262-A146-6E70BF6D8F9A}" type="pres">
+      <dgm:prSet presAssocID="{83C51DC6-1228-4932-9BCD-9D4C9B875A74}" presName="sp" presStyleCnt="0"/>
+      <dgm:spPr/>
+    </dgm:pt>
+    <dgm:pt modelId="{291ABDFC-781A-44CB-86FC-F070ADC50E99}" type="pres">
+      <dgm:prSet presAssocID="{F9669802-F6C7-42E4-9E84-8C855085DAFD}" presName="arrowAndChildren" presStyleCnt="0"/>
+      <dgm:spPr/>
+    </dgm:pt>
+    <dgm:pt modelId="{654CBAA6-FEDB-4439-B88F-18FDC37A7512}" type="pres">
+      <dgm:prSet presAssocID="{F9669802-F6C7-42E4-9E84-8C855085DAFD}" presName="parentTextArrow" presStyleLbl="node1" presStyleIdx="0" presStyleCnt="3"/>
+      <dgm:spPr/>
+    </dgm:pt>
+    <dgm:pt modelId="{0180DD5A-4FD6-43F5-9468-4ADD7CE6D895}" type="pres">
+      <dgm:prSet presAssocID="{F9669802-F6C7-42E4-9E84-8C855085DAFD}" presName="arrow" presStyleLbl="node1" presStyleIdx="1" presStyleCnt="3"/>
+      <dgm:spPr/>
+    </dgm:pt>
+    <dgm:pt modelId="{853B62ED-CA8E-40D3-9303-0DB43E1A34A7}" type="pres">
+      <dgm:prSet presAssocID="{F9669802-F6C7-42E4-9E84-8C855085DAFD}" presName="descendantArrow" presStyleCnt="0"/>
+      <dgm:spPr/>
+    </dgm:pt>
+    <dgm:pt modelId="{73351C8A-9DBA-4076-9F44-98FACFDAB796}" type="pres">
+      <dgm:prSet presAssocID="{0D750001-9FA8-4C1E-A34C-D76EACEA1613}" presName="childTextArrow" presStyleLbl="fgAccFollowNode1" presStyleIdx="2" presStyleCnt="6">
+        <dgm:presLayoutVars>
+          <dgm:bulletEnabled val="1"/>
+        </dgm:presLayoutVars>
+      </dgm:prSet>
+      <dgm:spPr/>
+    </dgm:pt>
+    <dgm:pt modelId="{6D8E9151-016C-46F6-A9C0-F85547647CBA}" type="pres">
+      <dgm:prSet presAssocID="{6F0EC70C-ECE9-45D9-A0C8-CCAF3C6C95CE}" presName="childTextArrow" presStyleLbl="fgAccFollowNode1" presStyleIdx="3" presStyleCnt="6">
+        <dgm:presLayoutVars>
+          <dgm:bulletEnabled val="1"/>
+        </dgm:presLayoutVars>
+      </dgm:prSet>
+      <dgm:spPr/>
+    </dgm:pt>
+    <dgm:pt modelId="{3A2057C3-71B2-4C0B-AC69-7E142CFC3AE1}" type="pres">
+      <dgm:prSet presAssocID="{FEF831AA-DFBB-444E-A754-ECA5184B54C1}" presName="sp" presStyleCnt="0"/>
+      <dgm:spPr/>
+    </dgm:pt>
+    <dgm:pt modelId="{D43DBCBF-3F7C-4F49-93CD-7BF3312C47BD}" type="pres">
+      <dgm:prSet presAssocID="{63BCB48E-6580-4F8C-BE41-3AA9365A60D9}" presName="arrowAndChildren" presStyleCnt="0"/>
+      <dgm:spPr/>
+    </dgm:pt>
+    <dgm:pt modelId="{5718F3BE-4297-4ACC-AAF0-C0795AF8F668}" type="pres">
+      <dgm:prSet presAssocID="{63BCB48E-6580-4F8C-BE41-3AA9365A60D9}" presName="parentTextArrow" presStyleLbl="node1" presStyleIdx="1" presStyleCnt="3"/>
+      <dgm:spPr/>
+    </dgm:pt>
+    <dgm:pt modelId="{EFE0E04D-0AEB-4F9D-863C-7C1CE9E4CCE9}" type="pres">
+      <dgm:prSet presAssocID="{63BCB48E-6580-4F8C-BE41-3AA9365A60D9}" presName="arrow" presStyleLbl="node1" presStyleIdx="2" presStyleCnt="3" custLinFactNeighborX="77070" custLinFactNeighborY="-1923"/>
+      <dgm:spPr/>
+    </dgm:pt>
+    <dgm:pt modelId="{4593A8AB-72C0-4BE9-B4D5-EF5468C2AF17}" type="pres">
+      <dgm:prSet presAssocID="{63BCB48E-6580-4F8C-BE41-3AA9365A60D9}" presName="descendantArrow" presStyleCnt="0"/>
+      <dgm:spPr/>
+    </dgm:pt>
+    <dgm:pt modelId="{4F779B3E-278B-43D9-964C-326D68A80CDA}" type="pres">
+      <dgm:prSet presAssocID="{4D5FDF7B-8E5D-49C4-BF8A-4283C1AF15F7}" presName="childTextArrow" presStyleLbl="fgAccFollowNode1" presStyleIdx="4" presStyleCnt="6">
+        <dgm:presLayoutVars>
+          <dgm:bulletEnabled val="1"/>
+        </dgm:presLayoutVars>
+      </dgm:prSet>
+      <dgm:spPr/>
+    </dgm:pt>
+    <dgm:pt modelId="{E0EC5BFA-8429-4091-9DC3-692D36C50327}" type="pres">
+      <dgm:prSet presAssocID="{9BF7C278-0898-4F75-B99B-942AA4A4EF6A}" presName="childTextArrow" presStyleLbl="fgAccFollowNode1" presStyleIdx="5" presStyleCnt="6">
+        <dgm:presLayoutVars>
+          <dgm:bulletEnabled val="1"/>
+        </dgm:presLayoutVars>
+      </dgm:prSet>
+      <dgm:spPr/>
+    </dgm:pt>
+  </dgm:ptLst>
+  <dgm:cxnLst>
+    <dgm:cxn modelId="{1FC9D100-49EC-480F-BFE7-88AF9BD1BD80}" type="presOf" srcId="{6F0EC70C-ECE9-45D9-A0C8-CCAF3C6C95CE}" destId="{6D8E9151-016C-46F6-A9C0-F85547647CBA}" srcOrd="0" destOrd="0" presId="urn:microsoft.com/office/officeart/2005/8/layout/process4"/>
+    <dgm:cxn modelId="{368E440E-E56B-4FFD-9F9E-316C98E7AB92}" type="presOf" srcId="{F9669802-F6C7-42E4-9E84-8C855085DAFD}" destId="{0180DD5A-4FD6-43F5-9468-4ADD7CE6D895}" srcOrd="1" destOrd="0" presId="urn:microsoft.com/office/officeart/2005/8/layout/process4"/>
+    <dgm:cxn modelId="{91D5CB15-FE4C-431F-8DD5-D0EBC2CAC08B}" type="presOf" srcId="{3FE77D03-5696-4713-8A78-8A718EE78003}" destId="{68DD444A-9F84-4A2B-847B-786807B073EF}" srcOrd="0" destOrd="0" presId="urn:microsoft.com/office/officeart/2005/8/layout/process4"/>
+    <dgm:cxn modelId="{AA57272B-30C8-4D06-8AE6-9A3D84F6E1A1}" type="presOf" srcId="{63BCB48E-6580-4F8C-BE41-3AA9365A60D9}" destId="{5718F3BE-4297-4ACC-AAF0-C0795AF8F668}" srcOrd="0" destOrd="0" presId="urn:microsoft.com/office/officeart/2005/8/layout/process4"/>
+    <dgm:cxn modelId="{68AE423A-5027-4B6F-83D9-7EE7586AC6D6}" type="presOf" srcId="{4A2BAD2F-C6BD-42BE-B521-AEF54FC35A84}" destId="{782FADAD-BC02-407B-B192-AD829DBD0CEE}" srcOrd="0" destOrd="0" presId="urn:microsoft.com/office/officeart/2005/8/layout/process4"/>
+    <dgm:cxn modelId="{F0F6B33A-3043-4BFF-918C-1D86669DD87F}" srcId="{76A53774-2801-4E97-93E7-61F74DECBE9E}" destId="{3FE77D03-5696-4713-8A78-8A718EE78003}" srcOrd="0" destOrd="0" parTransId="{64B8C078-BE65-442D-8500-18745D376B86}" sibTransId="{F334CEE4-7D7D-4CCF-8364-431090DAC753}"/>
+    <dgm:cxn modelId="{98335C3F-D745-44CA-AF94-7A897A3392C2}" type="presOf" srcId="{76A53774-2801-4E97-93E7-61F74DECBE9E}" destId="{AEEF2733-1BA1-4F29-B7EC-73CE43B078B7}" srcOrd="1" destOrd="0" presId="urn:microsoft.com/office/officeart/2005/8/layout/process4"/>
+    <dgm:cxn modelId="{F3744F45-F8FB-4A59-9D70-F8B6B160CB4A}" type="presOf" srcId="{63BCB48E-6580-4F8C-BE41-3AA9365A60D9}" destId="{EFE0E04D-0AEB-4F9D-863C-7C1CE9E4CCE9}" srcOrd="1" destOrd="0" presId="urn:microsoft.com/office/officeart/2005/8/layout/process4"/>
+    <dgm:cxn modelId="{C9B25847-2E58-4AA3-B510-EFC0F3BF0415}" type="presOf" srcId="{F9669802-F6C7-42E4-9E84-8C855085DAFD}" destId="{654CBAA6-FEDB-4439-B88F-18FDC37A7512}" srcOrd="0" destOrd="0" presId="urn:microsoft.com/office/officeart/2005/8/layout/process4"/>
+    <dgm:cxn modelId="{5EE3CE6B-1BC3-4914-8195-D031D88D80EA}" srcId="{4A2BAD2F-C6BD-42BE-B521-AEF54FC35A84}" destId="{63BCB48E-6580-4F8C-BE41-3AA9365A60D9}" srcOrd="0" destOrd="0" parTransId="{B0CACA04-FF4B-4401-8ABA-31A959DBA274}" sibTransId="{FEF831AA-DFBB-444E-A754-ECA5184B54C1}"/>
+    <dgm:cxn modelId="{95E8356C-9F4F-43C9-8F35-41A1355D4295}" srcId="{F9669802-F6C7-42E4-9E84-8C855085DAFD}" destId="{0D750001-9FA8-4C1E-A34C-D76EACEA1613}" srcOrd="0" destOrd="0" parTransId="{C475E581-B421-4FF2-ABDC-046722B52890}" sibTransId="{3681BA6B-9182-4241-9830-57D5101C167B}"/>
+    <dgm:cxn modelId="{4CFFC550-A101-4408-A8D0-7727C352BC58}" srcId="{4A2BAD2F-C6BD-42BE-B521-AEF54FC35A84}" destId="{F9669802-F6C7-42E4-9E84-8C855085DAFD}" srcOrd="1" destOrd="0" parTransId="{5E013583-8383-46B4-AE62-E53F2FD865B9}" sibTransId="{83C51DC6-1228-4932-9BCD-9D4C9B875A74}"/>
+    <dgm:cxn modelId="{325ECD54-02EB-43A2-A273-8ADB4B1A74B1}" type="presOf" srcId="{2A01B639-C2A3-4DEC-9117-2CA993083719}" destId="{F69694CA-D69A-4172-9B19-7262ADC7F9A0}" srcOrd="0" destOrd="0" presId="urn:microsoft.com/office/officeart/2005/8/layout/process4"/>
+    <dgm:cxn modelId="{8E190E8B-A77A-4EB6-A5EE-AD2CA830EFA2}" type="presOf" srcId="{4D5FDF7B-8E5D-49C4-BF8A-4283C1AF15F7}" destId="{4F779B3E-278B-43D9-964C-326D68A80CDA}" srcOrd="0" destOrd="0" presId="urn:microsoft.com/office/officeart/2005/8/layout/process4"/>
+    <dgm:cxn modelId="{58AB408D-2DAC-447B-9284-969667146363}" srcId="{F9669802-F6C7-42E4-9E84-8C855085DAFD}" destId="{6F0EC70C-ECE9-45D9-A0C8-CCAF3C6C95CE}" srcOrd="1" destOrd="0" parTransId="{7DEA2ADC-C1BB-4666-8E2F-C53381C4827F}" sibTransId="{1AEDB370-6AA6-40F5-AE9A-43A42136410E}"/>
+    <dgm:cxn modelId="{C9E94C94-225A-4291-9179-9EF3517626B9}" srcId="{76A53774-2801-4E97-93E7-61F74DECBE9E}" destId="{2A01B639-C2A3-4DEC-9117-2CA993083719}" srcOrd="1" destOrd="0" parTransId="{376E95F4-953F-4F71-A7BB-15E06A0F327A}" sibTransId="{D97C45CC-F273-4C6E-8FE4-148875F638C2}"/>
+    <dgm:cxn modelId="{71E292A4-C0C8-4A79-B8FA-D3F2ABBFC01F}" type="presOf" srcId="{76A53774-2801-4E97-93E7-61F74DECBE9E}" destId="{DE09E13C-70B7-4F9C-929A-48776F2A2C22}" srcOrd="0" destOrd="0" presId="urn:microsoft.com/office/officeart/2005/8/layout/process4"/>
+    <dgm:cxn modelId="{0D12DDB1-6A2C-421E-80E3-00AADB916462}" srcId="{63BCB48E-6580-4F8C-BE41-3AA9365A60D9}" destId="{4D5FDF7B-8E5D-49C4-BF8A-4283C1AF15F7}" srcOrd="0" destOrd="0" parTransId="{70FA3552-5DE9-4E6F-814C-2B2767A67D72}" sibTransId="{40C368F5-C26D-4CB0-A6E6-F3D4AE19313E}"/>
+    <dgm:cxn modelId="{70D8BFCC-91A1-4316-B9BE-0781A5896715}" type="presOf" srcId="{9BF7C278-0898-4F75-B99B-942AA4A4EF6A}" destId="{E0EC5BFA-8429-4091-9DC3-692D36C50327}" srcOrd="0" destOrd="0" presId="urn:microsoft.com/office/officeart/2005/8/layout/process4"/>
+    <dgm:cxn modelId="{B60594CF-739F-4EAD-A34E-A583357526DE}" type="presOf" srcId="{0D750001-9FA8-4C1E-A34C-D76EACEA1613}" destId="{73351C8A-9DBA-4076-9F44-98FACFDAB796}" srcOrd="0" destOrd="0" presId="urn:microsoft.com/office/officeart/2005/8/layout/process4"/>
+    <dgm:cxn modelId="{207A89ED-9122-4A7F-BD2E-5F3EF94A01A3}" srcId="{63BCB48E-6580-4F8C-BE41-3AA9365A60D9}" destId="{9BF7C278-0898-4F75-B99B-942AA4A4EF6A}" srcOrd="1" destOrd="0" parTransId="{81152DB3-B3FA-4DF7-941F-A2DDF2884AC1}" sibTransId="{BFAF05C8-0DA3-4812-8872-22E4C7282464}"/>
+    <dgm:cxn modelId="{5F8AEEFA-8B15-4D68-B5E9-0850468CD818}" srcId="{4A2BAD2F-C6BD-42BE-B521-AEF54FC35A84}" destId="{76A53774-2801-4E97-93E7-61F74DECBE9E}" srcOrd="2" destOrd="0" parTransId="{5F79598C-043A-45A4-BB8D-3C6E249BFA4A}" sibTransId="{BD5A7E9E-CC37-4CC8-B307-A23E9359F469}"/>
+    <dgm:cxn modelId="{41723689-7778-4C57-8E8B-CB451C27F2E6}" type="presParOf" srcId="{782FADAD-BC02-407B-B192-AD829DBD0CEE}" destId="{9DAD537D-975C-43B3-95EC-5351EF0B9445}" srcOrd="0" destOrd="0" presId="urn:microsoft.com/office/officeart/2005/8/layout/process4"/>
+    <dgm:cxn modelId="{073201FF-37EE-4F66-9BEB-E36D9CAE80DD}" type="presParOf" srcId="{9DAD537D-975C-43B3-95EC-5351EF0B9445}" destId="{DE09E13C-70B7-4F9C-929A-48776F2A2C22}" srcOrd="0" destOrd="0" presId="urn:microsoft.com/office/officeart/2005/8/layout/process4"/>
+    <dgm:cxn modelId="{E982AF8E-1070-4D11-8B71-92DE73C5F3AA}" type="presParOf" srcId="{9DAD537D-975C-43B3-95EC-5351EF0B9445}" destId="{AEEF2733-1BA1-4F29-B7EC-73CE43B078B7}" srcOrd="1" destOrd="0" presId="urn:microsoft.com/office/officeart/2005/8/layout/process4"/>
+    <dgm:cxn modelId="{7CC8236D-2467-4DBD-86D9-53B7507C1907}" type="presParOf" srcId="{9DAD537D-975C-43B3-95EC-5351EF0B9445}" destId="{2A89B9C6-649B-497A-AE2E-60877CBA8482}" srcOrd="2" destOrd="0" presId="urn:microsoft.com/office/officeart/2005/8/layout/process4"/>
+    <dgm:cxn modelId="{AEC110D4-0C37-4F3C-9385-461EE22138B8}" type="presParOf" srcId="{2A89B9C6-649B-497A-AE2E-60877CBA8482}" destId="{68DD444A-9F84-4A2B-847B-786807B073EF}" srcOrd="0" destOrd="0" presId="urn:microsoft.com/office/officeart/2005/8/layout/process4"/>
+    <dgm:cxn modelId="{6C9AA9F6-80CD-44CE-8056-C96FCABBB8EE}" type="presParOf" srcId="{2A89B9C6-649B-497A-AE2E-60877CBA8482}" destId="{F69694CA-D69A-4172-9B19-7262ADC7F9A0}" srcOrd="1" destOrd="0" presId="urn:microsoft.com/office/officeart/2005/8/layout/process4"/>
+    <dgm:cxn modelId="{EAF3A825-F324-4081-B8A4-9A7D8F466A67}" type="presParOf" srcId="{782FADAD-BC02-407B-B192-AD829DBD0CEE}" destId="{F58D45BB-5246-4262-A146-6E70BF6D8F9A}" srcOrd="1" destOrd="0" presId="urn:microsoft.com/office/officeart/2005/8/layout/process4"/>
+    <dgm:cxn modelId="{2058A1BA-4D0C-4202-A67E-0CB12B309EC4}" type="presParOf" srcId="{782FADAD-BC02-407B-B192-AD829DBD0CEE}" destId="{291ABDFC-781A-44CB-86FC-F070ADC50E99}" srcOrd="2" destOrd="0" presId="urn:microsoft.com/office/officeart/2005/8/layout/process4"/>
+    <dgm:cxn modelId="{1B7A6CC6-4EB0-4C9D-B18C-3491470E6EBD}" type="presParOf" srcId="{291ABDFC-781A-44CB-86FC-F070ADC50E99}" destId="{654CBAA6-FEDB-4439-B88F-18FDC37A7512}" srcOrd="0" destOrd="0" presId="urn:microsoft.com/office/officeart/2005/8/layout/process4"/>
+    <dgm:cxn modelId="{7F65C8F1-8C98-4FEE-B9F4-1F57A565CC1D}" type="presParOf" srcId="{291ABDFC-781A-44CB-86FC-F070ADC50E99}" destId="{0180DD5A-4FD6-43F5-9468-4ADD7CE6D895}" srcOrd="1" destOrd="0" presId="urn:microsoft.com/office/officeart/2005/8/layout/process4"/>
+    <dgm:cxn modelId="{1FE50DE7-0C52-4FE5-82EF-12B5C64A3EE9}" type="presParOf" srcId="{291ABDFC-781A-44CB-86FC-F070ADC50E99}" destId="{853B62ED-CA8E-40D3-9303-0DB43E1A34A7}" srcOrd="2" destOrd="0" presId="urn:microsoft.com/office/officeart/2005/8/layout/process4"/>
+    <dgm:cxn modelId="{8ADE97A4-2A39-4293-BFAD-5D3F8A1C2F98}" type="presParOf" srcId="{853B62ED-CA8E-40D3-9303-0DB43E1A34A7}" destId="{73351C8A-9DBA-4076-9F44-98FACFDAB796}" srcOrd="0" destOrd="0" presId="urn:microsoft.com/office/officeart/2005/8/layout/process4"/>
+    <dgm:cxn modelId="{AB4E6F29-28B0-4CC1-A81F-BB930C124525}" type="presParOf" srcId="{853B62ED-CA8E-40D3-9303-0DB43E1A34A7}" destId="{6D8E9151-016C-46F6-A9C0-F85547647CBA}" srcOrd="1" destOrd="0" presId="urn:microsoft.com/office/officeart/2005/8/layout/process4"/>
+    <dgm:cxn modelId="{081626D5-C8D3-4979-ACC9-E0DDD1130AE1}" type="presParOf" srcId="{782FADAD-BC02-407B-B192-AD829DBD0CEE}" destId="{3A2057C3-71B2-4C0B-AC69-7E142CFC3AE1}" srcOrd="3" destOrd="0" presId="urn:microsoft.com/office/officeart/2005/8/layout/process4"/>
+    <dgm:cxn modelId="{0D6B7EAC-A653-4667-816A-4E6C109A45D0}" type="presParOf" srcId="{782FADAD-BC02-407B-B192-AD829DBD0CEE}" destId="{D43DBCBF-3F7C-4F49-93CD-7BF3312C47BD}" srcOrd="4" destOrd="0" presId="urn:microsoft.com/office/officeart/2005/8/layout/process4"/>
+    <dgm:cxn modelId="{88BCADA6-BFB7-465A-A780-D5A8893A6C51}" type="presParOf" srcId="{D43DBCBF-3F7C-4F49-93CD-7BF3312C47BD}" destId="{5718F3BE-4297-4ACC-AAF0-C0795AF8F668}" srcOrd="0" destOrd="0" presId="urn:microsoft.com/office/officeart/2005/8/layout/process4"/>
+    <dgm:cxn modelId="{5B2846A1-CD6D-4953-A13A-6793C0967BE9}" type="presParOf" srcId="{D43DBCBF-3F7C-4F49-93CD-7BF3312C47BD}" destId="{EFE0E04D-0AEB-4F9D-863C-7C1CE9E4CCE9}" srcOrd="1" destOrd="0" presId="urn:microsoft.com/office/officeart/2005/8/layout/process4"/>
+    <dgm:cxn modelId="{5C1B7865-3124-4338-868F-311DB2D3D509}" type="presParOf" srcId="{D43DBCBF-3F7C-4F49-93CD-7BF3312C47BD}" destId="{4593A8AB-72C0-4BE9-B4D5-EF5468C2AF17}" srcOrd="2" destOrd="0" presId="urn:microsoft.com/office/officeart/2005/8/layout/process4"/>
+    <dgm:cxn modelId="{2AD50421-BC15-4D7A-9FD2-82564C31512D}" type="presParOf" srcId="{4593A8AB-72C0-4BE9-B4D5-EF5468C2AF17}" destId="{4F779B3E-278B-43D9-964C-326D68A80CDA}" srcOrd="0" destOrd="0" presId="urn:microsoft.com/office/officeart/2005/8/layout/process4"/>
+    <dgm:cxn modelId="{11C9DE33-3ED1-4191-81FA-3CF6F21FA6B2}" type="presParOf" srcId="{4593A8AB-72C0-4BE9-B4D5-EF5468C2AF17}" destId="{E0EC5BFA-8429-4091-9DC3-692D36C50327}" srcOrd="1" destOrd="0" presId="urn:microsoft.com/office/officeart/2005/8/layout/process4"/>
+  </dgm:cxnLst>
+  <dgm:bg/>
+  <dgm:whole/>
+  <dgm:extLst>
+    <a:ext uri="http://schemas.microsoft.com/office/drawing/2008/diagram">
+      <dsp:dataModelExt xmlns:dsp="http://schemas.microsoft.com/office/drawing/2008/diagram" relId="rId6" minVer="http://schemas.openxmlformats.org/drawingml/2006/diagram"/>
+    </a:ext>
+  </dgm:extLst>
+</dgm:dataModel>
+</file>
+
+<file path=ppt/diagrams/drawing1.xml><?xml version="1.0" encoding="utf-8"?>
+<dsp:drawing xmlns:dgm="http://schemas.openxmlformats.org/drawingml/2006/diagram" xmlns:dsp="http://schemas.microsoft.com/office/drawing/2008/diagram" xmlns:a="http://schemas.openxmlformats.org/drawingml/2006/main">
+  <dsp:spTree>
+    <dsp:nvGrpSpPr>
+      <dsp:cNvPr id="0" name=""/>
+      <dsp:cNvGrpSpPr/>
+    </dsp:nvGrpSpPr>
+    <dsp:grpSpPr/>
+    <dsp:sp modelId="{E8E2B53E-EF74-4B45-95E3-9B5C82B1340C}">
+      <dsp:nvSpPr>
+        <dsp:cNvPr id="0" name=""/>
+        <dsp:cNvSpPr/>
+      </dsp:nvSpPr>
+      <dsp:spPr>
+        <a:xfrm>
+          <a:off x="758380" y="0"/>
+          <a:ext cx="8594979" cy="1880292"/>
+        </a:xfrm>
+        <a:prstGeom prst="rightArrow">
+          <a:avLst/>
+        </a:prstGeom>
+        <a:solidFill>
+          <a:schemeClr val="accent1">
+            <a:tint val="40000"/>
+            <a:hueOff val="0"/>
+            <a:satOff val="0"/>
+            <a:lumOff val="0"/>
+            <a:alphaOff val="0"/>
+          </a:schemeClr>
+        </a:solidFill>
+        <a:ln>
+          <a:noFill/>
+        </a:ln>
+        <a:effectLst/>
+      </dsp:spPr>
+      <dsp:style>
+        <a:lnRef idx="0">
+          <a:scrgbClr r="0" g="0" b="0"/>
+        </a:lnRef>
+        <a:fillRef idx="1">
+          <a:scrgbClr r="0" g="0" b="0"/>
+        </a:fillRef>
+        <a:effectRef idx="0">
+          <a:scrgbClr r="0" g="0" b="0"/>
+        </a:effectRef>
+        <a:fontRef idx="minor"/>
+      </dsp:style>
+    </dsp:sp>
+    <dsp:sp modelId="{B5819A44-3F39-4942-91AB-6CD9827FCCA5}">
+      <dsp:nvSpPr>
+        <dsp:cNvPr id="0" name=""/>
+        <dsp:cNvSpPr/>
+      </dsp:nvSpPr>
+      <dsp:spPr>
+        <a:xfrm>
+          <a:off x="3456" y="564087"/>
+          <a:ext cx="2245517" cy="752116"/>
+        </a:xfrm>
+        <a:prstGeom prst="roundRect">
+          <a:avLst/>
+        </a:prstGeom>
+        <a:solidFill>
+          <a:schemeClr val="accent1">
+            <a:hueOff val="0"/>
+            <a:satOff val="0"/>
+            <a:lumOff val="0"/>
+            <a:alphaOff val="0"/>
+          </a:schemeClr>
+        </a:solidFill>
+        <a:ln w="12700" cap="flat" cmpd="sng" algn="ctr">
+          <a:solidFill>
+            <a:schemeClr val="lt1">
+              <a:hueOff val="0"/>
+              <a:satOff val="0"/>
+              <a:lumOff val="0"/>
+              <a:alphaOff val="0"/>
+            </a:schemeClr>
+          </a:solidFill>
+          <a:prstDash val="solid"/>
+          <a:miter lim="800000"/>
+        </a:ln>
+        <a:effectLst/>
+      </dsp:spPr>
+      <dsp:style>
+        <a:lnRef idx="2">
+          <a:scrgbClr r="0" g="0" b="0"/>
+        </a:lnRef>
+        <a:fillRef idx="1">
+          <a:scrgbClr r="0" g="0" b="0"/>
+        </a:fillRef>
+        <a:effectRef idx="0">
+          <a:scrgbClr r="0" g="0" b="0"/>
+        </a:effectRef>
+        <a:fontRef idx="minor">
+          <a:schemeClr val="lt1"/>
+        </a:fontRef>
+      </dsp:style>
+      <dsp:txBody>
+        <a:bodyPr spcFirstLastPara="0" vert="horz" wrap="square" lIns="118110" tIns="118110" rIns="118110" bIns="118110" numCol="1" spcCol="1270" anchor="ctr" anchorCtr="0">
+          <a:noAutofit/>
+        </a:bodyPr>
+        <a:lstStyle/>
+        <a:p>
+          <a:pPr marL="0" lvl="0" indent="0" algn="ctr" defTabSz="1377950">
+            <a:lnSpc>
+              <a:spcPct val="90000"/>
+            </a:lnSpc>
+            <a:spcBef>
+              <a:spcPct val="0"/>
+            </a:spcBef>
+            <a:spcAft>
+              <a:spcPct val="35000"/>
+            </a:spcAft>
+            <a:buNone/>
+          </a:pPr>
+          <a:r>
+            <a:rPr lang="en-US" sz="3100" kern="1200" dirty="0"/>
+            <a:t>Data</a:t>
+          </a:r>
+        </a:p>
+      </dsp:txBody>
+      <dsp:txXfrm>
+        <a:off x="40171" y="600802"/>
+        <a:ext cx="2172087" cy="678686"/>
+      </dsp:txXfrm>
+    </dsp:sp>
+    <dsp:sp modelId="{02C6F657-DC22-4874-B839-ED01F19A363A}">
+      <dsp:nvSpPr>
+        <dsp:cNvPr id="0" name=""/>
+        <dsp:cNvSpPr/>
+      </dsp:nvSpPr>
+      <dsp:spPr>
+        <a:xfrm>
+          <a:off x="2623226" y="564087"/>
+          <a:ext cx="2245517" cy="752116"/>
+        </a:xfrm>
+        <a:prstGeom prst="roundRect">
+          <a:avLst/>
+        </a:prstGeom>
+        <a:solidFill>
+          <a:schemeClr val="accent1">
+            <a:hueOff val="0"/>
+            <a:satOff val="0"/>
+            <a:lumOff val="0"/>
+            <a:alphaOff val="0"/>
+          </a:schemeClr>
+        </a:solidFill>
+        <a:ln w="12700" cap="flat" cmpd="sng" algn="ctr">
+          <a:solidFill>
+            <a:schemeClr val="lt1">
+              <a:hueOff val="0"/>
+              <a:satOff val="0"/>
+              <a:lumOff val="0"/>
+              <a:alphaOff val="0"/>
+            </a:schemeClr>
+          </a:solidFill>
+          <a:prstDash val="solid"/>
+          <a:miter lim="800000"/>
+        </a:ln>
+        <a:effectLst/>
+      </dsp:spPr>
+      <dsp:style>
+        <a:lnRef idx="2">
+          <a:scrgbClr r="0" g="0" b="0"/>
+        </a:lnRef>
+        <a:fillRef idx="1">
+          <a:scrgbClr r="0" g="0" b="0"/>
+        </a:fillRef>
+        <a:effectRef idx="0">
+          <a:scrgbClr r="0" g="0" b="0"/>
+        </a:effectRef>
+        <a:fontRef idx="minor">
+          <a:schemeClr val="lt1"/>
+        </a:fontRef>
+      </dsp:style>
+      <dsp:txBody>
+        <a:bodyPr spcFirstLastPara="0" vert="horz" wrap="square" lIns="118110" tIns="118110" rIns="118110" bIns="118110" numCol="1" spcCol="1270" anchor="ctr" anchorCtr="0">
+          <a:noAutofit/>
+        </a:bodyPr>
+        <a:lstStyle/>
+        <a:p>
+          <a:pPr marL="0" lvl="0" indent="0" algn="ctr" defTabSz="1377950">
+            <a:lnSpc>
+              <a:spcPct val="90000"/>
+            </a:lnSpc>
+            <a:spcBef>
+              <a:spcPct val="0"/>
+            </a:spcBef>
+            <a:spcAft>
+              <a:spcPct val="35000"/>
+            </a:spcAft>
+            <a:buNone/>
+          </a:pPr>
+          <a:r>
+            <a:rPr lang="en-US" sz="3100" kern="1200"/>
+            <a:t>Data Prep</a:t>
+          </a:r>
+          <a:endParaRPr lang="en-US" sz="3100" kern="1200" dirty="0"/>
+        </a:p>
+      </dsp:txBody>
+      <dsp:txXfrm>
+        <a:off x="2659941" y="600802"/>
+        <a:ext cx="2172087" cy="678686"/>
+      </dsp:txXfrm>
+    </dsp:sp>
+    <dsp:sp modelId="{C00E62EC-C631-4907-A6A9-ACFBFA247E6A}">
+      <dsp:nvSpPr>
+        <dsp:cNvPr id="0" name=""/>
+        <dsp:cNvSpPr/>
+      </dsp:nvSpPr>
+      <dsp:spPr>
+        <a:xfrm>
+          <a:off x="5242996" y="564087"/>
+          <a:ext cx="2245517" cy="752116"/>
+        </a:xfrm>
+        <a:prstGeom prst="roundRect">
+          <a:avLst/>
+        </a:prstGeom>
+        <a:solidFill>
+          <a:schemeClr val="accent1">
+            <a:hueOff val="0"/>
+            <a:satOff val="0"/>
+            <a:lumOff val="0"/>
+            <a:alphaOff val="0"/>
+          </a:schemeClr>
+        </a:solidFill>
+        <a:ln w="12700" cap="flat" cmpd="sng" algn="ctr">
+          <a:solidFill>
+            <a:schemeClr val="lt1">
+              <a:hueOff val="0"/>
+              <a:satOff val="0"/>
+              <a:lumOff val="0"/>
+              <a:alphaOff val="0"/>
+            </a:schemeClr>
+          </a:solidFill>
+          <a:prstDash val="solid"/>
+          <a:miter lim="800000"/>
+        </a:ln>
+        <a:effectLst/>
+      </dsp:spPr>
+      <dsp:style>
+        <a:lnRef idx="2">
+          <a:scrgbClr r="0" g="0" b="0"/>
+        </a:lnRef>
+        <a:fillRef idx="1">
+          <a:scrgbClr r="0" g="0" b="0"/>
+        </a:fillRef>
+        <a:effectRef idx="0">
+          <a:scrgbClr r="0" g="0" b="0"/>
+        </a:effectRef>
+        <a:fontRef idx="minor">
+          <a:schemeClr val="lt1"/>
+        </a:fontRef>
+      </dsp:style>
+      <dsp:txBody>
+        <a:bodyPr spcFirstLastPara="0" vert="horz" wrap="square" lIns="118110" tIns="118110" rIns="118110" bIns="118110" numCol="1" spcCol="1270" anchor="ctr" anchorCtr="0">
+          <a:noAutofit/>
+        </a:bodyPr>
+        <a:lstStyle/>
+        <a:p>
+          <a:pPr marL="0" lvl="0" indent="0" algn="ctr" defTabSz="1377950">
+            <a:lnSpc>
+              <a:spcPct val="90000"/>
+            </a:lnSpc>
+            <a:spcBef>
+              <a:spcPct val="0"/>
+            </a:spcBef>
+            <a:spcAft>
+              <a:spcPct val="35000"/>
+            </a:spcAft>
+            <a:buNone/>
+          </a:pPr>
+          <a:r>
+            <a:rPr lang="en-US" sz="3100" kern="1200" dirty="0"/>
+            <a:t>model</a:t>
+          </a:r>
+        </a:p>
+      </dsp:txBody>
+      <dsp:txXfrm>
+        <a:off x="5279711" y="600802"/>
+        <a:ext cx="2172087" cy="678686"/>
+      </dsp:txXfrm>
+    </dsp:sp>
+    <dsp:sp modelId="{2B39B381-C3F6-40EF-9153-96AC0478B650}">
+      <dsp:nvSpPr>
+        <dsp:cNvPr id="0" name=""/>
+        <dsp:cNvSpPr/>
+      </dsp:nvSpPr>
+      <dsp:spPr>
+        <a:xfrm>
+          <a:off x="7862766" y="564087"/>
+          <a:ext cx="2245517" cy="752116"/>
+        </a:xfrm>
+        <a:prstGeom prst="roundRect">
+          <a:avLst/>
+        </a:prstGeom>
+        <a:solidFill>
+          <a:schemeClr val="accent1">
+            <a:hueOff val="0"/>
+            <a:satOff val="0"/>
+            <a:lumOff val="0"/>
+            <a:alphaOff val="0"/>
+          </a:schemeClr>
+        </a:solidFill>
+        <a:ln w="12700" cap="flat" cmpd="sng" algn="ctr">
+          <a:solidFill>
+            <a:schemeClr val="lt1">
+              <a:hueOff val="0"/>
+              <a:satOff val="0"/>
+              <a:lumOff val="0"/>
+              <a:alphaOff val="0"/>
+            </a:schemeClr>
+          </a:solidFill>
+          <a:prstDash val="solid"/>
+          <a:miter lim="800000"/>
+        </a:ln>
+        <a:effectLst/>
+      </dsp:spPr>
+      <dsp:style>
+        <a:lnRef idx="2">
+          <a:scrgbClr r="0" g="0" b="0"/>
+        </a:lnRef>
+        <a:fillRef idx="1">
+          <a:scrgbClr r="0" g="0" b="0"/>
+        </a:fillRef>
+        <a:effectRef idx="0">
+          <a:scrgbClr r="0" g="0" b="0"/>
+        </a:effectRef>
+        <a:fontRef idx="minor">
+          <a:schemeClr val="lt1"/>
+        </a:fontRef>
+      </dsp:style>
+      <dsp:txBody>
+        <a:bodyPr spcFirstLastPara="0" vert="horz" wrap="square" lIns="118110" tIns="118110" rIns="118110" bIns="118110" numCol="1" spcCol="1270" anchor="ctr" anchorCtr="0">
+          <a:noAutofit/>
+        </a:bodyPr>
+        <a:lstStyle/>
+        <a:p>
+          <a:pPr marL="0" lvl="0" indent="0" algn="ctr" defTabSz="1377950">
+            <a:lnSpc>
+              <a:spcPct val="90000"/>
+            </a:lnSpc>
+            <a:spcBef>
+              <a:spcPct val="0"/>
+            </a:spcBef>
+            <a:spcAft>
+              <a:spcPct val="35000"/>
+            </a:spcAft>
+            <a:buNone/>
+          </a:pPr>
+          <a:r>
+            <a:rPr lang="en-US" sz="3100" kern="1200" dirty="0"/>
+            <a:t>output</a:t>
+          </a:r>
+        </a:p>
+      </dsp:txBody>
+      <dsp:txXfrm>
+        <a:off x="7899481" y="600802"/>
+        <a:ext cx="2172087" cy="678686"/>
+      </dsp:txXfrm>
+    </dsp:sp>
+  </dsp:spTree>
+</dsp:drawing>
+</file>
+
+<file path=ppt/diagrams/drawing2.xml><?xml version="1.0" encoding="utf-8"?>
+<dsp:drawing xmlns:dgm="http://schemas.openxmlformats.org/drawingml/2006/diagram" xmlns:dsp="http://schemas.microsoft.com/office/drawing/2008/diagram" xmlns:a="http://schemas.openxmlformats.org/drawingml/2006/main">
+  <dsp:spTree>
+    <dsp:nvGrpSpPr>
+      <dsp:cNvPr id="0" name=""/>
+      <dsp:cNvGrpSpPr/>
+    </dsp:nvGrpSpPr>
+    <dsp:grpSpPr/>
+    <dsp:sp modelId="{AEEF2733-1BA1-4F29-B7EC-73CE43B078B7}">
+      <dsp:nvSpPr>
+        <dsp:cNvPr id="0" name=""/>
+        <dsp:cNvSpPr/>
+      </dsp:nvSpPr>
+      <dsp:spPr>
+        <a:xfrm>
+          <a:off x="0" y="4078917"/>
+          <a:ext cx="5062219" cy="1338791"/>
+        </a:xfrm>
+        <a:prstGeom prst="rect">
+          <a:avLst/>
+        </a:prstGeom>
+        <a:solidFill>
+          <a:schemeClr val="accent1">
+            <a:hueOff val="0"/>
+            <a:satOff val="0"/>
+            <a:lumOff val="0"/>
+            <a:alphaOff val="0"/>
+          </a:schemeClr>
+        </a:solidFill>
+        <a:ln w="12700" cap="flat" cmpd="sng" algn="ctr">
+          <a:solidFill>
+            <a:schemeClr val="lt1">
+              <a:hueOff val="0"/>
+              <a:satOff val="0"/>
+              <a:lumOff val="0"/>
+              <a:alphaOff val="0"/>
+            </a:schemeClr>
+          </a:solidFill>
+          <a:prstDash val="solid"/>
+          <a:miter lim="800000"/>
+        </a:ln>
+        <a:effectLst/>
+      </dsp:spPr>
+      <dsp:style>
+        <a:lnRef idx="2">
+          <a:scrgbClr r="0" g="0" b="0"/>
+        </a:lnRef>
+        <a:fillRef idx="1">
+          <a:scrgbClr r="0" g="0" b="0"/>
+        </a:fillRef>
+        <a:effectRef idx="0">
+          <a:scrgbClr r="0" g="0" b="0"/>
+        </a:effectRef>
+        <a:fontRef idx="minor">
+          <a:schemeClr val="lt1"/>
+        </a:fontRef>
+      </dsp:style>
+      <dsp:txBody>
+        <a:bodyPr spcFirstLastPara="0" vert="horz" wrap="square" lIns="177800" tIns="177800" rIns="177800" bIns="177800" numCol="1" spcCol="1270" anchor="ctr" anchorCtr="0">
+          <a:noAutofit/>
+        </a:bodyPr>
+        <a:lstStyle/>
+        <a:p>
+          <a:pPr marL="0" lvl="0" indent="0" algn="ctr" defTabSz="1111250">
+            <a:lnSpc>
+              <a:spcPct val="90000"/>
+            </a:lnSpc>
+            <a:spcBef>
+              <a:spcPct val="0"/>
+            </a:spcBef>
+            <a:spcAft>
+              <a:spcPct val="35000"/>
+            </a:spcAft>
+            <a:buNone/>
+          </a:pPr>
+          <a:r>
+            <a:rPr lang="en-US" sz="2500" kern="1200" dirty="0"/>
+            <a:t>output</a:t>
+          </a:r>
+        </a:p>
+      </dsp:txBody>
+      <dsp:txXfrm>
+        <a:off x="0" y="4078917"/>
+        <a:ext cx="5062219" cy="722947"/>
+      </dsp:txXfrm>
+    </dsp:sp>
+    <dsp:sp modelId="{68DD444A-9F84-4A2B-847B-786807B073EF}">
+      <dsp:nvSpPr>
+        <dsp:cNvPr id="0" name=""/>
+        <dsp:cNvSpPr/>
+      </dsp:nvSpPr>
+      <dsp:spPr>
+        <a:xfrm>
+          <a:off x="0" y="4775089"/>
+          <a:ext cx="2531110" cy="615844"/>
+        </a:xfrm>
+        <a:prstGeom prst="rect">
+          <a:avLst/>
+        </a:prstGeom>
+        <a:solidFill>
+          <a:schemeClr val="accent1">
+            <a:alpha val="90000"/>
+            <a:tint val="40000"/>
+            <a:hueOff val="0"/>
+            <a:satOff val="0"/>
+            <a:lumOff val="0"/>
+            <a:alphaOff val="0"/>
+          </a:schemeClr>
+        </a:solidFill>
+        <a:ln w="12700" cap="flat" cmpd="sng" algn="ctr">
+          <a:solidFill>
+            <a:schemeClr val="accent1">
+              <a:alpha val="90000"/>
+              <a:tint val="40000"/>
+              <a:hueOff val="0"/>
+              <a:satOff val="0"/>
+              <a:lumOff val="0"/>
+              <a:alphaOff val="0"/>
+            </a:schemeClr>
+          </a:solidFill>
+          <a:prstDash val="solid"/>
+          <a:miter lim="800000"/>
+        </a:ln>
+        <a:effectLst/>
+      </dsp:spPr>
+      <dsp:style>
+        <a:lnRef idx="2">
+          <a:scrgbClr r="0" g="0" b="0"/>
+        </a:lnRef>
+        <a:fillRef idx="1">
+          <a:scrgbClr r="0" g="0" b="0"/>
+        </a:fillRef>
+        <a:effectRef idx="0">
+          <a:scrgbClr r="0" g="0" b="0"/>
+        </a:effectRef>
+        <a:fontRef idx="minor"/>
+      </dsp:style>
+      <dsp:txBody>
+        <a:bodyPr spcFirstLastPara="0" vert="horz" wrap="square" lIns="263144" tIns="46990" rIns="263144" bIns="46990" numCol="1" spcCol="1270" anchor="ctr" anchorCtr="0">
+          <a:noAutofit/>
+        </a:bodyPr>
+        <a:lstStyle/>
+        <a:p>
+          <a:pPr marL="0" lvl="0" indent="0" algn="ctr" defTabSz="1644650">
+            <a:lnSpc>
+              <a:spcPct val="90000"/>
+            </a:lnSpc>
+            <a:spcBef>
+              <a:spcPct val="0"/>
+            </a:spcBef>
+            <a:spcAft>
+              <a:spcPct val="35000"/>
+            </a:spcAft>
+            <a:buNone/>
+          </a:pPr>
+          <a:endParaRPr lang="en-US" sz="3700" kern="1200"/>
+        </a:p>
+      </dsp:txBody>
+      <dsp:txXfrm>
+        <a:off x="0" y="4775089"/>
+        <a:ext cx="2531110" cy="615844"/>
+      </dsp:txXfrm>
+    </dsp:sp>
+    <dsp:sp modelId="{F69694CA-D69A-4172-9B19-7262ADC7F9A0}">
+      <dsp:nvSpPr>
+        <dsp:cNvPr id="0" name=""/>
+        <dsp:cNvSpPr/>
+      </dsp:nvSpPr>
+      <dsp:spPr>
+        <a:xfrm>
+          <a:off x="2531110" y="4775089"/>
+          <a:ext cx="2531110" cy="615844"/>
+        </a:xfrm>
+        <a:prstGeom prst="rect">
+          <a:avLst/>
+        </a:prstGeom>
+        <a:solidFill>
+          <a:schemeClr val="accent1">
+            <a:alpha val="90000"/>
+            <a:tint val="40000"/>
+            <a:hueOff val="0"/>
+            <a:satOff val="0"/>
+            <a:lumOff val="0"/>
+            <a:alphaOff val="0"/>
+          </a:schemeClr>
+        </a:solidFill>
+        <a:ln w="12700" cap="flat" cmpd="sng" algn="ctr">
+          <a:solidFill>
+            <a:schemeClr val="accent1">
+              <a:alpha val="90000"/>
+              <a:tint val="40000"/>
+              <a:hueOff val="0"/>
+              <a:satOff val="0"/>
+              <a:lumOff val="0"/>
+              <a:alphaOff val="0"/>
+            </a:schemeClr>
+          </a:solidFill>
+          <a:prstDash val="solid"/>
+          <a:miter lim="800000"/>
+        </a:ln>
+        <a:effectLst/>
+      </dsp:spPr>
+      <dsp:style>
+        <a:lnRef idx="2">
+          <a:scrgbClr r="0" g="0" b="0"/>
+        </a:lnRef>
+        <a:fillRef idx="1">
+          <a:scrgbClr r="0" g="0" b="0"/>
+        </a:fillRef>
+        <a:effectRef idx="0">
+          <a:scrgbClr r="0" g="0" b="0"/>
+        </a:effectRef>
+        <a:fontRef idx="minor"/>
+      </dsp:style>
+      <dsp:txBody>
+        <a:bodyPr spcFirstLastPara="0" vert="horz" wrap="square" lIns="263144" tIns="46990" rIns="263144" bIns="46990" numCol="1" spcCol="1270" anchor="ctr" anchorCtr="0">
+          <a:noAutofit/>
+        </a:bodyPr>
+        <a:lstStyle/>
+        <a:p>
+          <a:pPr marL="0" lvl="0" indent="0" algn="ctr" defTabSz="1644650">
+            <a:lnSpc>
+              <a:spcPct val="90000"/>
+            </a:lnSpc>
+            <a:spcBef>
+              <a:spcPct val="0"/>
+            </a:spcBef>
+            <a:spcAft>
+              <a:spcPct val="35000"/>
+            </a:spcAft>
+            <a:buNone/>
+          </a:pPr>
+          <a:endParaRPr lang="en-US" sz="3700" kern="1200"/>
+        </a:p>
+      </dsp:txBody>
+      <dsp:txXfrm>
+        <a:off x="2531110" y="4775089"/>
+        <a:ext cx="2531110" cy="615844"/>
+      </dsp:txXfrm>
+    </dsp:sp>
+    <dsp:sp modelId="{0180DD5A-4FD6-43F5-9468-4ADD7CE6D895}">
+      <dsp:nvSpPr>
+        <dsp:cNvPr id="0" name=""/>
+        <dsp:cNvSpPr/>
+      </dsp:nvSpPr>
+      <dsp:spPr>
+        <a:xfrm rot="10800000">
+          <a:off x="0" y="2039937"/>
+          <a:ext cx="5062219" cy="2059061"/>
+        </a:xfrm>
+        <a:prstGeom prst="upArrowCallout">
+          <a:avLst/>
+        </a:prstGeom>
+        <a:solidFill>
+          <a:schemeClr val="accent1">
+            <a:hueOff val="0"/>
+            <a:satOff val="0"/>
+            <a:lumOff val="0"/>
+            <a:alphaOff val="0"/>
+          </a:schemeClr>
+        </a:solidFill>
+        <a:ln w="12700" cap="flat" cmpd="sng" algn="ctr">
+          <a:solidFill>
+            <a:schemeClr val="lt1">
+              <a:hueOff val="0"/>
+              <a:satOff val="0"/>
+              <a:lumOff val="0"/>
+              <a:alphaOff val="0"/>
+            </a:schemeClr>
+          </a:solidFill>
+          <a:prstDash val="solid"/>
+          <a:miter lim="800000"/>
+        </a:ln>
+        <a:effectLst/>
+      </dsp:spPr>
+      <dsp:style>
+        <a:lnRef idx="2">
+          <a:scrgbClr r="0" g="0" b="0"/>
+        </a:lnRef>
+        <a:fillRef idx="1">
+          <a:scrgbClr r="0" g="0" b="0"/>
+        </a:fillRef>
+        <a:effectRef idx="0">
+          <a:scrgbClr r="0" g="0" b="0"/>
+        </a:effectRef>
+        <a:fontRef idx="minor">
+          <a:schemeClr val="lt1"/>
+        </a:fontRef>
+      </dsp:style>
+      <dsp:txBody>
+        <a:bodyPr spcFirstLastPara="0" vert="horz" wrap="square" lIns="177800" tIns="177800" rIns="177800" bIns="177800" numCol="1" spcCol="1270" anchor="ctr" anchorCtr="0">
+          <a:noAutofit/>
+        </a:bodyPr>
+        <a:lstStyle/>
+        <a:p>
+          <a:pPr marL="0" lvl="0" indent="0" algn="ctr" defTabSz="1111250">
+            <a:lnSpc>
+              <a:spcPct val="90000"/>
+            </a:lnSpc>
+            <a:spcBef>
+              <a:spcPct val="0"/>
+            </a:spcBef>
+            <a:spcAft>
+              <a:spcPct val="35000"/>
+            </a:spcAft>
+            <a:buNone/>
+          </a:pPr>
+          <a:r>
+            <a:rPr lang="en-US" sz="2500" kern="1200" dirty="0"/>
+            <a:t>model</a:t>
+          </a:r>
+        </a:p>
+      </dsp:txBody>
+      <dsp:txXfrm rot="-10800000">
+        <a:off x="0" y="2039937"/>
+        <a:ext cx="5062219" cy="722730"/>
+      </dsp:txXfrm>
+    </dsp:sp>
+    <dsp:sp modelId="{73351C8A-9DBA-4076-9F44-98FACFDAB796}">
+      <dsp:nvSpPr>
+        <dsp:cNvPr id="0" name=""/>
+        <dsp:cNvSpPr/>
+      </dsp:nvSpPr>
+      <dsp:spPr>
+        <a:xfrm>
+          <a:off x="0" y="2762668"/>
+          <a:ext cx="2531110" cy="615659"/>
+        </a:xfrm>
+        <a:prstGeom prst="rect">
+          <a:avLst/>
+        </a:prstGeom>
+        <a:solidFill>
+          <a:schemeClr val="accent1">
+            <a:alpha val="90000"/>
+            <a:tint val="40000"/>
+            <a:hueOff val="0"/>
+            <a:satOff val="0"/>
+            <a:lumOff val="0"/>
+            <a:alphaOff val="0"/>
+          </a:schemeClr>
+        </a:solidFill>
+        <a:ln w="12700" cap="flat" cmpd="sng" algn="ctr">
+          <a:solidFill>
+            <a:schemeClr val="accent1">
+              <a:alpha val="90000"/>
+              <a:tint val="40000"/>
+              <a:hueOff val="0"/>
+              <a:satOff val="0"/>
+              <a:lumOff val="0"/>
+              <a:alphaOff val="0"/>
+            </a:schemeClr>
+          </a:solidFill>
+          <a:prstDash val="solid"/>
+          <a:miter lim="800000"/>
+        </a:ln>
+        <a:effectLst/>
+      </dsp:spPr>
+      <dsp:style>
+        <a:lnRef idx="2">
+          <a:scrgbClr r="0" g="0" b="0"/>
+        </a:lnRef>
+        <a:fillRef idx="1">
+          <a:scrgbClr r="0" g="0" b="0"/>
+        </a:fillRef>
+        <a:effectRef idx="0">
+          <a:scrgbClr r="0" g="0" b="0"/>
+        </a:effectRef>
+        <a:fontRef idx="minor"/>
+      </dsp:style>
+      <dsp:txBody>
+        <a:bodyPr spcFirstLastPara="0" vert="horz" wrap="square" lIns="263144" tIns="46990" rIns="263144" bIns="46990" numCol="1" spcCol="1270" anchor="ctr" anchorCtr="0">
+          <a:noAutofit/>
+        </a:bodyPr>
+        <a:lstStyle/>
+        <a:p>
+          <a:pPr marL="0" lvl="0" indent="0" algn="ctr" defTabSz="1644650">
+            <a:lnSpc>
+              <a:spcPct val="90000"/>
+            </a:lnSpc>
+            <a:spcBef>
+              <a:spcPct val="0"/>
+            </a:spcBef>
+            <a:spcAft>
+              <a:spcPct val="35000"/>
+            </a:spcAft>
+            <a:buNone/>
+          </a:pPr>
+          <a:endParaRPr lang="en-US" sz="3700" kern="1200"/>
+        </a:p>
+      </dsp:txBody>
+      <dsp:txXfrm>
+        <a:off x="0" y="2762668"/>
+        <a:ext cx="2531110" cy="615659"/>
+      </dsp:txXfrm>
+    </dsp:sp>
+    <dsp:sp modelId="{6D8E9151-016C-46F6-A9C0-F85547647CBA}">
+      <dsp:nvSpPr>
+        <dsp:cNvPr id="0" name=""/>
+        <dsp:cNvSpPr/>
+      </dsp:nvSpPr>
+      <dsp:spPr>
+        <a:xfrm>
+          <a:off x="2531110" y="2762668"/>
+          <a:ext cx="2531110" cy="615659"/>
+        </a:xfrm>
+        <a:prstGeom prst="rect">
+          <a:avLst/>
+        </a:prstGeom>
+        <a:solidFill>
+          <a:schemeClr val="accent1">
+            <a:alpha val="90000"/>
+            <a:tint val="40000"/>
+            <a:hueOff val="0"/>
+            <a:satOff val="0"/>
+            <a:lumOff val="0"/>
+            <a:alphaOff val="0"/>
+          </a:schemeClr>
+        </a:solidFill>
+        <a:ln w="12700" cap="flat" cmpd="sng" algn="ctr">
+          <a:solidFill>
+            <a:schemeClr val="accent1">
+              <a:alpha val="90000"/>
+              <a:tint val="40000"/>
+              <a:hueOff val="0"/>
+              <a:satOff val="0"/>
+              <a:lumOff val="0"/>
+              <a:alphaOff val="0"/>
+            </a:schemeClr>
+          </a:solidFill>
+          <a:prstDash val="solid"/>
+          <a:miter lim="800000"/>
+        </a:ln>
+        <a:effectLst/>
+      </dsp:spPr>
+      <dsp:style>
+        <a:lnRef idx="2">
+          <a:scrgbClr r="0" g="0" b="0"/>
+        </a:lnRef>
+        <a:fillRef idx="1">
+          <a:scrgbClr r="0" g="0" b="0"/>
+        </a:fillRef>
+        <a:effectRef idx="0">
+          <a:scrgbClr r="0" g="0" b="0"/>
+        </a:effectRef>
+        <a:fontRef idx="minor"/>
+      </dsp:style>
+      <dsp:txBody>
+        <a:bodyPr spcFirstLastPara="0" vert="horz" wrap="square" lIns="263144" tIns="46990" rIns="263144" bIns="46990" numCol="1" spcCol="1270" anchor="ctr" anchorCtr="0">
+          <a:noAutofit/>
+        </a:bodyPr>
+        <a:lstStyle/>
+        <a:p>
+          <a:pPr marL="0" lvl="0" indent="0" algn="ctr" defTabSz="1644650">
+            <a:lnSpc>
+              <a:spcPct val="90000"/>
+            </a:lnSpc>
+            <a:spcBef>
+              <a:spcPct val="0"/>
+            </a:spcBef>
+            <a:spcAft>
+              <a:spcPct val="35000"/>
+            </a:spcAft>
+            <a:buNone/>
+          </a:pPr>
+          <a:endParaRPr lang="en-US" sz="3700" kern="1200"/>
+        </a:p>
+      </dsp:txBody>
+      <dsp:txXfrm>
+        <a:off x="2531110" y="2762668"/>
+        <a:ext cx="2531110" cy="615659"/>
+      </dsp:txXfrm>
+    </dsp:sp>
+    <dsp:sp modelId="{EFE0E04D-0AEB-4F9D-863C-7C1CE9E4CCE9}">
+      <dsp:nvSpPr>
+        <dsp:cNvPr id="0" name=""/>
+        <dsp:cNvSpPr/>
+      </dsp:nvSpPr>
+      <dsp:spPr>
+        <a:xfrm rot="10800000">
+          <a:off x="0" y="0"/>
+          <a:ext cx="5062219" cy="2059061"/>
+        </a:xfrm>
+        <a:prstGeom prst="upArrowCallout">
+          <a:avLst/>
+        </a:prstGeom>
+        <a:solidFill>
+          <a:schemeClr val="accent1">
+            <a:hueOff val="0"/>
+            <a:satOff val="0"/>
+            <a:lumOff val="0"/>
+            <a:alphaOff val="0"/>
+          </a:schemeClr>
+        </a:solidFill>
+        <a:ln w="12700" cap="flat" cmpd="sng" algn="ctr">
+          <a:solidFill>
+            <a:schemeClr val="lt1">
+              <a:hueOff val="0"/>
+              <a:satOff val="0"/>
+              <a:lumOff val="0"/>
+              <a:alphaOff val="0"/>
+            </a:schemeClr>
+          </a:solidFill>
+          <a:prstDash val="solid"/>
+          <a:miter lim="800000"/>
+        </a:ln>
+        <a:effectLst/>
+      </dsp:spPr>
+      <dsp:style>
+        <a:lnRef idx="2">
+          <a:scrgbClr r="0" g="0" b="0"/>
+        </a:lnRef>
+        <a:fillRef idx="1">
+          <a:scrgbClr r="0" g="0" b="0"/>
+        </a:fillRef>
+        <a:effectRef idx="0">
+          <a:scrgbClr r="0" g="0" b="0"/>
+        </a:effectRef>
+        <a:fontRef idx="minor">
+          <a:schemeClr val="lt1"/>
+        </a:fontRef>
+      </dsp:style>
+      <dsp:txBody>
+        <a:bodyPr spcFirstLastPara="0" vert="horz" wrap="square" lIns="177800" tIns="177800" rIns="177800" bIns="177800" numCol="1" spcCol="1270" anchor="ctr" anchorCtr="0">
+          <a:noAutofit/>
+        </a:bodyPr>
+        <a:lstStyle/>
+        <a:p>
+          <a:pPr marL="0" lvl="0" indent="0" algn="ctr" defTabSz="1111250">
+            <a:lnSpc>
+              <a:spcPct val="90000"/>
+            </a:lnSpc>
+            <a:spcBef>
+              <a:spcPct val="0"/>
+            </a:spcBef>
+            <a:spcAft>
+              <a:spcPct val="35000"/>
+            </a:spcAft>
+            <a:buNone/>
+          </a:pPr>
+          <a:r>
+            <a:rPr lang="en-US" sz="2500" kern="1200" dirty="0"/>
+            <a:t>data</a:t>
+          </a:r>
+        </a:p>
+      </dsp:txBody>
+      <dsp:txXfrm rot="-10800000">
+        <a:off x="0" y="0"/>
+        <a:ext cx="5062219" cy="722730"/>
+      </dsp:txXfrm>
+    </dsp:sp>
+    <dsp:sp modelId="{4F779B3E-278B-43D9-964C-326D68A80CDA}">
+      <dsp:nvSpPr>
+        <dsp:cNvPr id="0" name=""/>
+        <dsp:cNvSpPr/>
+      </dsp:nvSpPr>
+      <dsp:spPr>
+        <a:xfrm>
+          <a:off x="0" y="723688"/>
+          <a:ext cx="2531110" cy="615659"/>
+        </a:xfrm>
+        <a:prstGeom prst="rect">
+          <a:avLst/>
+        </a:prstGeom>
+        <a:solidFill>
+          <a:schemeClr val="accent1">
+            <a:alpha val="90000"/>
+            <a:tint val="40000"/>
+            <a:hueOff val="0"/>
+            <a:satOff val="0"/>
+            <a:lumOff val="0"/>
+            <a:alphaOff val="0"/>
+          </a:schemeClr>
+        </a:solidFill>
+        <a:ln w="12700" cap="flat" cmpd="sng" algn="ctr">
+          <a:solidFill>
+            <a:schemeClr val="accent1">
+              <a:alpha val="90000"/>
+              <a:tint val="40000"/>
+              <a:hueOff val="0"/>
+              <a:satOff val="0"/>
+              <a:lumOff val="0"/>
+              <a:alphaOff val="0"/>
+            </a:schemeClr>
+          </a:solidFill>
+          <a:prstDash val="solid"/>
+          <a:miter lim="800000"/>
+        </a:ln>
+        <a:effectLst/>
+      </dsp:spPr>
+      <dsp:style>
+        <a:lnRef idx="2">
+          <a:scrgbClr r="0" g="0" b="0"/>
+        </a:lnRef>
+        <a:fillRef idx="1">
+          <a:scrgbClr r="0" g="0" b="0"/>
+        </a:fillRef>
+        <a:effectRef idx="0">
+          <a:scrgbClr r="0" g="0" b="0"/>
+        </a:effectRef>
+        <a:fontRef idx="minor"/>
+      </dsp:style>
+      <dsp:txBody>
+        <a:bodyPr spcFirstLastPara="0" vert="horz" wrap="square" lIns="263144" tIns="46990" rIns="263144" bIns="46990" numCol="1" spcCol="1270" anchor="ctr" anchorCtr="0">
+          <a:noAutofit/>
+        </a:bodyPr>
+        <a:lstStyle/>
+        <a:p>
+          <a:pPr marL="0" lvl="0" indent="0" algn="ctr" defTabSz="1644650">
+            <a:lnSpc>
+              <a:spcPct val="90000"/>
+            </a:lnSpc>
+            <a:spcBef>
+              <a:spcPct val="0"/>
+            </a:spcBef>
+            <a:spcAft>
+              <a:spcPct val="35000"/>
+            </a:spcAft>
+            <a:buNone/>
+          </a:pPr>
+          <a:endParaRPr lang="en-US" sz="3700" kern="1200"/>
+        </a:p>
+      </dsp:txBody>
+      <dsp:txXfrm>
+        <a:off x="0" y="723688"/>
+        <a:ext cx="2531110" cy="615659"/>
+      </dsp:txXfrm>
+    </dsp:sp>
+    <dsp:sp modelId="{E0EC5BFA-8429-4091-9DC3-692D36C50327}">
+      <dsp:nvSpPr>
+        <dsp:cNvPr id="0" name=""/>
+        <dsp:cNvSpPr/>
+      </dsp:nvSpPr>
+      <dsp:spPr>
+        <a:xfrm>
+          <a:off x="2531110" y="723688"/>
+          <a:ext cx="2531110" cy="615659"/>
+        </a:xfrm>
+        <a:prstGeom prst="rect">
+          <a:avLst/>
+        </a:prstGeom>
+        <a:solidFill>
+          <a:schemeClr val="accent1">
+            <a:alpha val="90000"/>
+            <a:tint val="40000"/>
+            <a:hueOff val="0"/>
+            <a:satOff val="0"/>
+            <a:lumOff val="0"/>
+            <a:alphaOff val="0"/>
+          </a:schemeClr>
+        </a:solidFill>
+        <a:ln w="12700" cap="flat" cmpd="sng" algn="ctr">
+          <a:solidFill>
+            <a:schemeClr val="accent1">
+              <a:alpha val="90000"/>
+              <a:tint val="40000"/>
+              <a:hueOff val="0"/>
+              <a:satOff val="0"/>
+              <a:lumOff val="0"/>
+              <a:alphaOff val="0"/>
+            </a:schemeClr>
+          </a:solidFill>
+          <a:prstDash val="solid"/>
+          <a:miter lim="800000"/>
+        </a:ln>
+        <a:effectLst/>
+      </dsp:spPr>
+      <dsp:style>
+        <a:lnRef idx="2">
+          <a:scrgbClr r="0" g="0" b="0"/>
+        </a:lnRef>
+        <a:fillRef idx="1">
+          <a:scrgbClr r="0" g="0" b="0"/>
+        </a:fillRef>
+        <a:effectRef idx="0">
+          <a:scrgbClr r="0" g="0" b="0"/>
+        </a:effectRef>
+        <a:fontRef idx="minor"/>
+      </dsp:style>
+      <dsp:txBody>
+        <a:bodyPr spcFirstLastPara="0" vert="horz" wrap="square" lIns="263144" tIns="46990" rIns="263144" bIns="46990" numCol="1" spcCol="1270" anchor="ctr" anchorCtr="0">
+          <a:noAutofit/>
+        </a:bodyPr>
+        <a:lstStyle/>
+        <a:p>
+          <a:pPr marL="0" lvl="0" indent="0" algn="ctr" defTabSz="1644650">
+            <a:lnSpc>
+              <a:spcPct val="90000"/>
+            </a:lnSpc>
+            <a:spcBef>
+              <a:spcPct val="0"/>
+            </a:spcBef>
+            <a:spcAft>
+              <a:spcPct val="35000"/>
+            </a:spcAft>
+            <a:buNone/>
+          </a:pPr>
+          <a:endParaRPr lang="en-US" sz="3700" kern="1200"/>
+        </a:p>
+      </dsp:txBody>
+      <dsp:txXfrm>
+        <a:off x="2531110" y="723688"/>
+        <a:ext cx="2531110" cy="615659"/>
+      </dsp:txXfrm>
+    </dsp:sp>
+  </dsp:spTree>
+</dsp:drawing>
+</file>
+
+<file path=ppt/diagrams/layout1.xml><?xml version="1.0" encoding="utf-8"?>
+<dgm:layoutDef xmlns:dgm="http://schemas.openxmlformats.org/drawingml/2006/diagram" xmlns:a="http://schemas.openxmlformats.org/drawingml/2006/main" uniqueId="urn:microsoft.com/office/officeart/2005/8/layout/hProcess9">
+  <dgm:title val=""/>
+  <dgm:desc val=""/>
+  <dgm:catLst>
+    <dgm:cat type="process" pri="5000"/>
+    <dgm:cat type="convert" pri="13000"/>
+  </dgm:catLst>
+  <dgm:sampData useDef="1">
+    <dgm:dataModel>
+      <dgm:ptLst/>
+      <dgm:bg/>
+      <dgm:whole/>
+    </dgm:dataModel>
+  </dgm:sampData>
+  <dgm:styleData>
+    <dgm:dataModel>
+      <dgm:ptLst>
+        <dgm:pt modelId="0" type="doc"/>
+        <dgm:pt modelId="1"/>
+        <dgm:pt modelId="2"/>
+      </dgm:ptLst>
+      <dgm:cxnLst>
+        <dgm:cxn modelId="3" srcId="0" destId="1" srcOrd="0" destOrd="0"/>
+        <dgm:cxn modelId="4" srcId="0" destId="2" srcOrd="1" destOrd="0"/>
+      </dgm:cxnLst>
+      <dgm:bg/>
+      <dgm:whole/>
+    </dgm:dataModel>
+  </dgm:styleData>
+  <dgm:clrData>
+    <dgm:dataModel>
+      <dgm:ptLst>
+        <dgm:pt modelId="0" type="doc"/>
+        <dgm:pt modelId="1"/>
+        <dgm:pt modelId="2"/>
+        <dgm:pt modelId="3"/>
+        <dgm:pt modelId="4"/>
+      </dgm:ptLst>
+      <dgm:cxnLst>
+        <dgm:cxn modelId="5" srcId="0" destId="1" srcOrd="0" destOrd="0"/>
+        <dgm:cxn modelId="6" srcId="0" destId="2" srcOrd="1" destOrd="0"/>
+        <dgm:cxn modelId="7" srcId="0" destId="3" srcOrd="2" destOrd="0"/>
+        <dgm:cxn modelId="8" srcId="0" destId="4" srcOrd="3" destOrd="0"/>
+      </dgm:cxnLst>
+      <dgm:bg/>
+      <dgm:whole/>
+    </dgm:dataModel>
+  </dgm:clrData>
+  <dgm:layoutNode name="CompostProcess">
+    <dgm:varLst>
+      <dgm:dir/>
+      <dgm:resizeHandles val="exact"/>
+    </dgm:varLst>
+    <dgm:alg type="composite">
+      <dgm:param type="horzAlign" val="ctr"/>
+      <dgm:param type="vertAlign" val="mid"/>
+    </dgm:alg>
+    <dgm:shape xmlns:r="http://schemas.openxmlformats.org/officeDocument/2006/relationships" r:blip="">
+      <dgm:adjLst/>
+    </dgm:shape>
+    <dgm:presOf/>
+    <dgm:constrLst>
+      <dgm:constr type="w" for="ch" forName="arrow" refType="w" fact="0.85"/>
+      <dgm:constr type="h" for="ch" forName="arrow" refType="h"/>
+      <dgm:constr type="ctrX" for="ch" forName="arrow" refType="w" fact="0.5"/>
+      <dgm:constr type="ctrY" for="ch" forName="arrow" refType="h" fact="0.5"/>
+      <dgm:constr type="w" for="ch" forName="linearProcess" refType="w"/>
+      <dgm:constr type="h" for="ch" forName="linearProcess" refType="h" fact="0.4"/>
+      <dgm:constr type="ctrX" for="ch" forName="linearProcess" refType="w" fact="0.5"/>
+      <dgm:constr type="ctrY" for="ch" forName="linearProcess" refType="h" fact="0.5"/>
+    </dgm:constrLst>
+    <dgm:ruleLst/>
+    <dgm:layoutNode name="arrow" styleLbl="bgShp">
+      <dgm:alg type="sp"/>
+      <dgm:choose name="Name0">
+        <dgm:if name="Name1" func="var" arg="dir" op="equ" val="norm">
+          <dgm:shape xmlns:r="http://schemas.openxmlformats.org/officeDocument/2006/relationships" type="rightArrow" r:blip="">
+            <dgm:adjLst/>
+          </dgm:shape>
+        </dgm:if>
+        <dgm:else name="Name2">
+          <dgm:shape xmlns:r="http://schemas.openxmlformats.org/officeDocument/2006/relationships" type="leftArrow" r:blip="">
+            <dgm:adjLst/>
+          </dgm:shape>
+        </dgm:else>
+      </dgm:choose>
+      <dgm:presOf/>
+      <dgm:constrLst/>
+      <dgm:ruleLst/>
+    </dgm:layoutNode>
+    <dgm:layoutNode name="linearProcess">
+      <dgm:choose name="Name3">
+        <dgm:if name="Name4" func="var" arg="dir" op="equ" val="norm">
+          <dgm:alg type="lin"/>
+        </dgm:if>
+        <dgm:else name="Name5">
+          <dgm:alg type="lin">
+            <dgm:param type="linDir" val="fromR"/>
+          </dgm:alg>
+        </dgm:else>
+      </dgm:choose>
+      <dgm:shape xmlns:r="http://schemas.openxmlformats.org/officeDocument/2006/relationships" r:blip="">
+        <dgm:adjLst/>
+      </dgm:shape>
+      <dgm:presOf/>
+      <dgm:constrLst>
+        <dgm:constr type="userA" for="ch" ptType="node" refType="w"/>
+        <dgm:constr type="h" for="ch" ptType="node" refType="h"/>
+        <dgm:constr type="w" for="ch" ptType="node" op="equ"/>
+        <dgm:constr type="w" for="ch" forName="sibTrans" refType="w" fact="0.05"/>
+        <dgm:constr type="primFontSz" for="ch" ptType="node" op="equ" val="65"/>
+      </dgm:constrLst>
+      <dgm:ruleLst/>
+      <dgm:forEach name="Name6" axis="ch" ptType="node">
+        <dgm:layoutNode name="textNode" styleLbl="node1">
+          <dgm:varLst>
+            <dgm:bulletEnabled val="1"/>
+          </dgm:varLst>
+          <dgm:alg type="tx"/>
+          <dgm:shape xmlns:r="http://schemas.openxmlformats.org/officeDocument/2006/relationships" type="roundRect" r:blip="">
+            <dgm:adjLst/>
+          </dgm:shape>
+          <dgm:presOf axis="desOrSelf" ptType="node"/>
+          <dgm:constrLst>
+            <dgm:constr type="userA"/>
+            <dgm:constr type="w" refType="userA" fact="0.3"/>
+            <dgm:constr type="tMarg" refType="primFontSz" fact="0.3"/>
+            <dgm:constr type="bMarg" refType="primFontSz" fact="0.3"/>
+            <dgm:constr type="lMarg" refType="primFontSz" fact="0.3"/>
+            <dgm:constr type="rMarg" refType="primFontSz" fact="0.3"/>
+          </dgm:constrLst>
+          <dgm:ruleLst>
+            <dgm:rule type="w" val="NaN" fact="1" max="NaN"/>
+            <dgm:rule type="primFontSz" val="5" fact="NaN" max="NaN"/>
+          </dgm:ruleLst>
+        </dgm:layoutNode>
+        <dgm:forEach name="Name7" axis="followSib" ptType="sibTrans" cnt="1">
+          <dgm:layoutNode name="sibTrans">
+            <dgm:alg type="sp"/>
+            <dgm:shape xmlns:r="http://schemas.openxmlformats.org/officeDocument/2006/relationships" r:blip="">
+              <dgm:adjLst/>
+            </dgm:shape>
+            <dgm:presOf/>
+            <dgm:constrLst/>
+            <dgm:ruleLst/>
+          </dgm:layoutNode>
+        </dgm:forEach>
+      </dgm:forEach>
+    </dgm:layoutNode>
+  </dgm:layoutNode>
+</dgm:layoutDef>
+</file>
+
+<file path=ppt/diagrams/layout2.xml><?xml version="1.0" encoding="utf-8"?>
+<dgm:layoutDef xmlns:dgm="http://schemas.openxmlformats.org/drawingml/2006/diagram" xmlns:a="http://schemas.openxmlformats.org/drawingml/2006/main" uniqueId="urn:microsoft.com/office/officeart/2005/8/layout/process4">
+  <dgm:title val=""/>
+  <dgm:desc val=""/>
+  <dgm:catLst>
+    <dgm:cat type="process" pri="16000"/>
+    <dgm:cat type="list" pri="20000"/>
+  </dgm:catLst>
+  <dgm:sampData>
+    <dgm:dataModel>
+      <dgm:ptLst>
+        <dgm:pt modelId="0" type="doc"/>
+        <dgm:pt modelId="1">
+          <dgm:prSet phldr="1"/>
+        </dgm:pt>
+        <dgm:pt modelId="11">
+          <dgm:prSet phldr="1"/>
+        </dgm:pt>
+        <dgm:pt modelId="12">
+          <dgm:prSet phldr="1"/>
+        </dgm:pt>
+        <dgm:pt modelId="2">
+          <dgm:prSet phldr="1"/>
+        </dgm:pt>
+        <dgm:pt modelId="21">
+          <dgm:prSet phldr="1"/>
+        </dgm:pt>
+        <dgm:pt modelId="22">
+          <dgm:prSet phldr="1"/>
+        </dgm:pt>
+        <dgm:pt modelId="3">
+          <dgm:prSet phldr="1"/>
+        </dgm:pt>
+        <dgm:pt modelId="31">
+          <dgm:prSet phldr="1"/>
+        </dgm:pt>
+        <dgm:pt modelId="32">
+          <dgm:prSet phldr="1"/>
+        </dgm:pt>
+      </dgm:ptLst>
+      <dgm:cxnLst>
+        <dgm:cxn modelId="4" srcId="0" destId="1" srcOrd="0" destOrd="0"/>
+        <dgm:cxn modelId="5" srcId="0" destId="2" srcOrd="1" destOrd="0"/>
+        <dgm:cxn modelId="6" srcId="0" destId="3" srcOrd="2" destOrd="0"/>
+        <dgm:cxn modelId="13" srcId="1" destId="11" srcOrd="0" destOrd="0"/>
+        <dgm:cxn modelId="14" srcId="1" destId="12" srcOrd="1" destOrd="0"/>
+        <dgm:cxn modelId="23" srcId="2" destId="21" srcOrd="0" destOrd="0"/>
+        <dgm:cxn modelId="24" srcId="2" destId="22" srcOrd="1" destOrd="0"/>
+        <dgm:cxn modelId="33" srcId="3" destId="31" srcOrd="0" destOrd="0"/>
+        <dgm:cxn modelId="34" srcId="3" destId="32" srcOrd="1" destOrd="0"/>
+      </dgm:cxnLst>
+      <dgm:bg/>
+      <dgm:whole/>
+    </dgm:dataModel>
+  </dgm:sampData>
+  <dgm:styleData>
+    <dgm:dataModel>
+      <dgm:ptLst>
+        <dgm:pt modelId="0" type="doc"/>
+        <dgm:pt modelId="1"/>
+        <dgm:pt modelId="11"/>
+        <dgm:pt modelId="2"/>
+        <dgm:pt modelId="21"/>
+      </dgm:ptLst>
+      <dgm:cxnLst>
+        <dgm:cxn modelId="4" srcId="0" destId="1" srcOrd="0" destOrd="0"/>
+        <dgm:cxn modelId="5" srcId="0" destId="2" srcOrd="1" destOrd="0"/>
+        <dgm:cxn modelId="13" srcId="1" destId="11" srcOrd="0" destOrd="0"/>
+        <dgm:cxn modelId="23" srcId="2" destId="21" srcOrd="0" destOrd="0"/>
+      </dgm:cxnLst>
+      <dgm:bg/>
+      <dgm:whole/>
+    </dgm:dataModel>
+  </dgm:styleData>
+  <dgm:clrData>
+    <dgm:dataModel>
+      <dgm:ptLst>
+        <dgm:pt modelId="0" type="doc"/>
+        <dgm:pt modelId="1"/>
+        <dgm:pt modelId="11"/>
+        <dgm:pt modelId="2"/>
+        <dgm:pt modelId="21"/>
+        <dgm:pt modelId="3"/>
+        <dgm:pt modelId="31"/>
+        <dgm:pt modelId="4"/>
+        <dgm:pt modelId="41"/>
+      </dgm:ptLst>
+      <dgm:cxnLst>
+        <dgm:cxn modelId="5" srcId="0" destId="1" srcOrd="0" destOrd="0"/>
+        <dgm:cxn modelId="6" srcId="0" destId="2" srcOrd="1" destOrd="0"/>
+        <dgm:cxn modelId="7" srcId="0" destId="3" srcOrd="2" destOrd="0"/>
+        <dgm:cxn modelId="8" srcId="0" destId="4" srcOrd="3" destOrd="0"/>
+        <dgm:cxn modelId="13" srcId="1" destId="11" srcOrd="0" destOrd="0"/>
+        <dgm:cxn modelId="23" srcId="2" destId="21" srcOrd="0" destOrd="0"/>
+        <dgm:cxn modelId="33" srcId="3" destId="31" srcOrd="0" destOrd="0"/>
+        <dgm:cxn modelId="43" srcId="4" destId="41" srcOrd="0" destOrd="0"/>
+      </dgm:cxnLst>
+      <dgm:bg/>
+      <dgm:whole/>
+    </dgm:dataModel>
+  </dgm:clrData>
+  <dgm:layoutNode name="Name0">
+    <dgm:varLst>
+      <dgm:dir/>
+      <dgm:animLvl val="lvl"/>
+      <dgm:resizeHandles val="exact"/>
+    </dgm:varLst>
+    <dgm:alg type="lin">
+      <dgm:param type="linDir" val="fromB"/>
+    </dgm:alg>
+    <dgm:shape xmlns:r="http://schemas.openxmlformats.org/officeDocument/2006/relationships" r:blip="">
+      <dgm:adjLst/>
+    </dgm:shape>
+    <dgm:presOf/>
+    <dgm:constrLst>
+      <dgm:constr type="h" for="ch" forName="boxAndChildren" refType="h"/>
+      <dgm:constr type="h" for="ch" forName="arrowAndChildren" refType="h" refFor="ch" refForName="boxAndChildren" op="equ" fact="1.538"/>
+      <dgm:constr type="w" for="ch" forName="arrowAndChildren" refType="w"/>
+      <dgm:constr type="w" for="ch" forName="boxAndChildren" refType="w"/>
+      <dgm:constr type="h" for="ch" forName="sp" refType="h" fact="-0.015"/>
+      <dgm:constr type="primFontSz" for="des" forName="parentTextBox" val="65"/>
+      <dgm:constr type="primFontSz" for="des" forName="parentTextArrow" refType="primFontSz" refFor="des" refForName="parentTextBox" op="equ"/>
+      <dgm:constr type="primFontSz" for="des" forName="childTextArrow" val="65"/>
+      <dgm:constr type="primFontSz" for="des" forName="childTextBox" refType="primFontSz" refFor="des" refForName="childTextArrow" op="equ"/>
+    </dgm:constrLst>
+    <dgm:ruleLst/>
+    <dgm:forEach name="Name1" axis="ch" ptType="node" st="-1" step="-1">
+      <dgm:choose name="Name2">
+        <dgm:if name="Name3" axis="self" ptType="node" func="revPos" op="equ" val="1">
+          <dgm:layoutNode name="boxAndChildren">
+            <dgm:alg type="composite"/>
+            <dgm:shape xmlns:r="http://schemas.openxmlformats.org/officeDocument/2006/relationships" r:blip="">
+              <dgm:adjLst/>
+            </dgm:shape>
+            <dgm:presOf/>
+            <dgm:choose name="Name4">
+              <dgm:if name="Name5" axis="ch" ptType="node" func="cnt" op="gte" val="1">
+                <dgm:constrLst>
+                  <dgm:constr type="w" for="ch" forName="parentTextBox" refType="w"/>
+                  <dgm:constr type="h" for="ch" forName="parentTextBox" refType="h" fact="0.54"/>
+                  <dgm:constr type="t" for="ch" forName="parentTextBox"/>
+                  <dgm:constr type="w" for="ch" forName="entireBox" refType="w"/>
+                  <dgm:constr type="h" for="ch" forName="entireBox" refType="h"/>
+                  <dgm:constr type="w" for="ch" forName="descendantBox" refType="w"/>
+                  <dgm:constr type="b" for="ch" forName="descendantBox" refType="h" fact="0.98"/>
+                  <dgm:constr type="h" for="ch" forName="descendantBox" refType="h" fact="0.46"/>
+                </dgm:constrLst>
+              </dgm:if>
+              <dgm:else name="Name6">
+                <dgm:constrLst>
+                  <dgm:constr type="w" for="ch" forName="parentTextBox" refType="w"/>
+                  <dgm:constr type="h" for="ch" forName="parentTextBox" refType="h"/>
+                </dgm:constrLst>
+              </dgm:else>
+            </dgm:choose>
+            <dgm:ruleLst/>
+            <dgm:layoutNode name="parentTextBox">
+              <dgm:alg type="tx"/>
+              <dgm:choose name="Name7">
+                <dgm:if name="Name8" axis="ch" ptType="node" func="cnt" op="gte" val="1">
+                  <dgm:shape xmlns:r="http://schemas.openxmlformats.org/officeDocument/2006/relationships" type="rect" r:blip="" zOrderOff="1" hideGeom="1">
+                    <dgm:adjLst/>
+                  </dgm:shape>
+                </dgm:if>
+                <dgm:else name="Name9">
+                  <dgm:shape xmlns:r="http://schemas.openxmlformats.org/officeDocument/2006/relationships" type="rect" r:blip="">
+                    <dgm:adjLst/>
+                  </dgm:shape>
+                </dgm:else>
+              </dgm:choose>
+              <dgm:presOf axis="self"/>
+              <dgm:constrLst/>
+              <dgm:ruleLst>
+                <dgm:rule type="primFontSz" val="5" fact="NaN" max="NaN"/>
+              </dgm:ruleLst>
+            </dgm:layoutNode>
+            <dgm:choose name="Name10">
+              <dgm:if name="Name11" axis="ch" ptType="node" func="cnt" op="gte" val="1">
+                <dgm:layoutNode name="entireBox">
+                  <dgm:alg type="sp"/>
+                  <dgm:shape xmlns:r="http://schemas.openxmlformats.org/officeDocument/2006/relationships" type="rect" r:blip="">
+                    <dgm:adjLst/>
+                  </dgm:shape>
+                  <dgm:presOf axis="self"/>
+                  <dgm:constrLst/>
+                  <dgm:ruleLst/>
+                </dgm:layoutNode>
+                <dgm:layoutNode name="descendantBox" styleLbl="fgAccFollowNode1">
+                  <dgm:choose name="Name12">
+                    <dgm:if name="Name13" func="var" arg="dir" op="equ" val="norm">
+                      <dgm:alg type="lin"/>
+                    </dgm:if>
+                    <dgm:else name="Name14">
+                      <dgm:alg type="lin">
+                        <dgm:param type="linDir" val="fromR"/>
+                      </dgm:alg>
+                    </dgm:else>
+                  </dgm:choose>
+                  <dgm:shape xmlns:r="http://schemas.openxmlformats.org/officeDocument/2006/relationships" r:blip="">
+                    <dgm:adjLst/>
+                  </dgm:shape>
+                  <dgm:presOf/>
+                  <dgm:constrLst>
+                    <dgm:constr type="w" for="ch" forName="childTextBox" refType="w"/>
+                    <dgm:constr type="h" for="ch" forName="childTextBox" refType="h"/>
+                  </dgm:constrLst>
+                  <dgm:ruleLst/>
+                  <dgm:forEach name="Name15" axis="ch" ptType="node">
+                    <dgm:layoutNode name="childTextBox" styleLbl="fgAccFollowNode1">
+                      <dgm:varLst>
+                        <dgm:bulletEnabled val="1"/>
+                      </dgm:varLst>
+                      <dgm:alg type="tx"/>
+                      <dgm:shape xmlns:r="http://schemas.openxmlformats.org/officeDocument/2006/relationships" type="rect" r:blip="">
+                        <dgm:adjLst/>
+                      </dgm:shape>
+                      <dgm:presOf axis="desOrSelf" ptType="node"/>
+                      <dgm:constrLst>
+                        <dgm:constr type="tMarg" refType="primFontSz" fact="0.1"/>
+                        <dgm:constr type="bMarg" refType="primFontSz" fact="0.1"/>
+                      </dgm:constrLst>
+                      <dgm:ruleLst>
+                        <dgm:rule type="primFontSz" val="5" fact="NaN" max="NaN"/>
+                      </dgm:ruleLst>
+                    </dgm:layoutNode>
+                  </dgm:forEach>
+                </dgm:layoutNode>
+              </dgm:if>
+              <dgm:else name="Name16"/>
+            </dgm:choose>
+          </dgm:layoutNode>
+        </dgm:if>
+        <dgm:else name="Name17">
+          <dgm:layoutNode name="arrowAndChildren">
+            <dgm:alg type="composite"/>
+            <dgm:shape xmlns:r="http://schemas.openxmlformats.org/officeDocument/2006/relationships" r:blip="">
+              <dgm:adjLst/>
+            </dgm:shape>
+            <dgm:presOf/>
+            <dgm:choose name="Name18">
+              <dgm:if name="Name19" axis="ch" ptType="node" func="cnt" op="gte" val="1">
+                <dgm:constrLst>
+                  <dgm:constr type="w" for="ch" forName="parentTextArrow" refType="w"/>
+                  <dgm:constr type="t" for="ch" forName="parentTextArrow"/>
+                  <dgm:constr type="h" for="ch" forName="parentTextArrow" refType="h" fact="0.351"/>
+                  <dgm:constr type="w" for="ch" forName="arrow" refType="w"/>
+                  <dgm:constr type="h" for="ch" forName="arrow" refType="h"/>
+                  <dgm:constr type="w" for="ch" forName="descendantArrow" refType="w"/>
+                  <dgm:constr type="b" for="ch" forName="descendantArrow" refType="h" fact="0.65"/>
+                  <dgm:constr type="h" for="ch" forName="descendantArrow" refType="h" fact="0.299"/>
+                </dgm:constrLst>
+              </dgm:if>
+              <dgm:else name="Name20">
+                <dgm:constrLst>
+                  <dgm:constr type="w" for="ch" forName="parentTextArrow" refType="w"/>
+                  <dgm:constr type="h" for="ch" forName="parentTextArrow" refType="h"/>
+                </dgm:constrLst>
+              </dgm:else>
+            </dgm:choose>
+            <dgm:ruleLst/>
+            <dgm:layoutNode name="parentTextArrow">
+              <dgm:alg type="tx"/>
+              <dgm:choose name="Name21">
+                <dgm:if name="Name22" axis="ch" ptType="node" func="cnt" op="gte" val="1">
+                  <dgm:shape xmlns:r="http://schemas.openxmlformats.org/officeDocument/2006/relationships" type="rect" r:blip="" zOrderOff="1" hideGeom="1">
+                    <dgm:adjLst/>
+                  </dgm:shape>
+                </dgm:if>
+                <dgm:else name="Name23">
+                  <dgm:shape xmlns:r="http://schemas.openxmlformats.org/officeDocument/2006/relationships" rot="180" type="upArrowCallout" r:blip="">
+                    <dgm:adjLst/>
+                  </dgm:shape>
+                </dgm:else>
+              </dgm:choose>
+              <dgm:presOf axis="self"/>
+              <dgm:constrLst/>
+              <dgm:ruleLst>
+                <dgm:rule type="primFontSz" val="5" fact="NaN" max="NaN"/>
+              </dgm:ruleLst>
+            </dgm:layoutNode>
+            <dgm:choose name="Name24">
+              <dgm:if name="Name25" axis="ch" ptType="node" func="cnt" op="gte" val="1">
+                <dgm:layoutNode name="arrow">
+                  <dgm:alg type="sp"/>
+                  <dgm:shape xmlns:r="http://schemas.openxmlformats.org/officeDocument/2006/relationships" rot="180" type="upArrowCallout" r:blip="">
+                    <dgm:adjLst/>
+                  </dgm:shape>
+                  <dgm:presOf axis="self"/>
+                  <dgm:constrLst/>
+                  <dgm:ruleLst/>
+                </dgm:layoutNode>
+                <dgm:layoutNode name="descendantArrow">
+                  <dgm:choose name="Name26">
+                    <dgm:if name="Name27" func="var" arg="dir" op="equ" val="norm">
+                      <dgm:alg type="lin"/>
+                    </dgm:if>
+                    <dgm:else name="Name28">
+                      <dgm:alg type="lin">
+                        <dgm:param type="linDir" val="fromR"/>
+                      </dgm:alg>
+                    </dgm:else>
+                  </dgm:choose>
+                  <dgm:shape xmlns:r="http://schemas.openxmlformats.org/officeDocument/2006/relationships" r:blip="">
+                    <dgm:adjLst/>
+                  </dgm:shape>
+                  <dgm:presOf/>
+                  <dgm:constrLst>
+                    <dgm:constr type="w" for="ch" forName="childTextArrow" refType="w"/>
+                    <dgm:constr type="h" for="ch" forName="childTextArrow" refType="h"/>
+                  </dgm:constrLst>
+                  <dgm:ruleLst/>
+                  <dgm:forEach name="Name29" axis="ch" ptType="node">
+                    <dgm:layoutNode name="childTextArrow" styleLbl="fgAccFollowNode1">
+                      <dgm:varLst>
+                        <dgm:bulletEnabled val="1"/>
+                      </dgm:varLst>
+                      <dgm:alg type="tx"/>
+                      <dgm:shape xmlns:r="http://schemas.openxmlformats.org/officeDocument/2006/relationships" type="rect" r:blip="">
+                        <dgm:adjLst/>
+                      </dgm:shape>
+                      <dgm:presOf axis="desOrSelf" ptType="node"/>
+                      <dgm:constrLst>
+                        <dgm:constr type="tMarg" refType="primFontSz" fact="0.1"/>
+                        <dgm:constr type="bMarg" refType="primFontSz" fact="0.1"/>
+                      </dgm:constrLst>
+                      <dgm:ruleLst>
+                        <dgm:rule type="primFontSz" val="5" fact="NaN" max="NaN"/>
+                      </dgm:ruleLst>
+                    </dgm:layoutNode>
+                  </dgm:forEach>
+                </dgm:layoutNode>
+              </dgm:if>
+              <dgm:else name="Name30"/>
+            </dgm:choose>
+          </dgm:layoutNode>
+        </dgm:else>
+      </dgm:choose>
+      <dgm:forEach name="Name31" axis="precedSib" ptType="sibTrans" st="-1" cnt="1">
+        <dgm:layoutNode name="sp">
+          <dgm:alg type="sp"/>
+          <dgm:shape xmlns:r="http://schemas.openxmlformats.org/officeDocument/2006/relationships" r:blip="">
+            <dgm:adjLst/>
+          </dgm:shape>
+          <dgm:presOf axis="self"/>
+          <dgm:constrLst/>
+          <dgm:ruleLst/>
+        </dgm:layoutNode>
+      </dgm:forEach>
+    </dgm:forEach>
+  </dgm:layoutNode>
+</dgm:layoutDef>
+</file>
+
+<file path=ppt/diagrams/quickStyle1.xml><?xml version="1.0" encoding="utf-8"?>
+<dgm:styleDef xmlns:dgm="http://schemas.openxmlformats.org/drawingml/2006/diagram" xmlns:a="http://schemas.openxmlformats.org/drawingml/2006/main" uniqueId="urn:microsoft.com/office/officeart/2005/8/quickstyle/simple1">
+  <dgm:title val=""/>
+  <dgm:desc val=""/>
+  <dgm:catLst>
+    <dgm:cat type="simple" pri="10100"/>
+  </dgm:catLst>
+  <dgm:scene3d>
+    <a:camera prst="orthographicFront"/>
+    <a:lightRig rig="threePt" dir="t"/>
+  </dgm:scene3d>
+  <dgm:styleLbl name="node0">
+    <dgm:scene3d>
+      <a:camera prst="orthographicFront"/>
+      <a:lightRig rig="threePt" dir="t"/>
+    </dgm:scene3d>
+    <dgm:sp3d/>
+    <dgm:txPr/>
+    <dgm:style>
+      <a:lnRef idx="2">
+        <a:scrgbClr r="0" g="0" b="0"/>
+      </a:lnRef>
+      <a:fillRef idx="1">
+        <a:scrgbClr r="0" g="0" b="0"/>
+      </a:fillRef>
+      <a:effectRef idx="0">
+        <a:scrgbClr r="0" g="0" b="0"/>
+      </a:effectRef>
+      <a:fontRef idx="minor">
+        <a:schemeClr val="lt1"/>
+      </a:fontRef>
+    </dgm:style>
+  </dgm:styleLbl>
+  <dgm:styleLbl name="lnNode1">
+    <dgm:scene3d>
+      <a:camera prst="orthographicFront"/>
+      <a:lightRig rig="threePt" dir="t"/>
+    </dgm:scene3d>
+    <dgm:sp3d/>
+    <dgm:txPr/>
+    <dgm:style>
+      <a:lnRef idx="2">
+        <a:scrgbClr r="0" g="0" b="0"/>
+      </a:lnRef>
+      <a:fillRef idx="1">
+        <a:scrgbClr r="0" g="0" b="0"/>
+      </a:fillRef>
+      <a:effectRef idx="0">
+        <a:scrgbClr r="0" g="0" b="0"/>
+      </a:effectRef>
+      <a:fontRef idx="minor">
+        <a:schemeClr val="lt1"/>
+      </a:fontRef>
+    </dgm:style>
+  </dgm:styleLbl>
+  <dgm:styleLbl name="vennNode1">
+    <dgm:scene3d>
+      <a:camera prst="orthographicFront"/>
+      <a:lightRig rig="threePt" dir="t"/>
+    </dgm:scene3d>
+    <dgm:sp3d/>
+    <dgm:txPr/>
+    <dgm:style>
+      <a:lnRef idx="2">
+        <a:scrgbClr r="0" g="0" b="0"/>
+      </a:lnRef>
+      <a:fillRef idx="1">
+        <a:scrgbClr r="0" g="0" b="0"/>
+      </a:fillRef>
+      <a:effectRef idx="0">
+        <a:scrgbClr r="0" g="0" b="0"/>
+      </a:effectRef>
+      <a:fontRef idx="minor">
+        <a:schemeClr val="tx1"/>
+      </a:fontRef>
+    </dgm:style>
+  </dgm:styleLbl>
+  <dgm:styleLbl name="alignNode1">
+    <dgm:scene3d>
+      <a:camera prst="orthographicFront"/>
+      <a:lightRig rig="threePt" dir="t"/>
+    </dgm:scene3d>
+    <dgm:sp3d/>
+    <dgm:txPr/>
+    <dgm:style>
+      <a:lnRef idx="2">
+        <a:scrgbClr r="0" g="0" b="0"/>
+      </a:lnRef>
+      <a:fillRef idx="1">
+        <a:scrgbClr r="0" g="0" b="0"/>
+      </a:fillRef>
+      <a:effectRef idx="0">
+        <a:scrgbClr r="0" g="0" b="0"/>
+      </a:effectRef>
+      <a:fontRef idx="minor">
+        <a:schemeClr val="lt1"/>
+      </a:fontRef>
+    </dgm:style>
+  </dgm:styleLbl>
+  <dgm:styleLbl name="node1">
+    <dgm:scene3d>
+      <a:camera prst="orthographicFront"/>
+      <a:lightRig rig="threePt" dir="t"/>
+    </dgm:scene3d>
+    <dgm:sp3d/>
+    <dgm:txPr/>
+    <dgm:style>
+      <a:lnRef idx="2">
+        <a:scrgbClr r="0" g="0" b="0"/>
+      </a:lnRef>
+      <a:fillRef idx="1">
+        <a:scrgbClr r="0" g="0" b="0"/>
+      </a:fillRef>
+      <a:effectRef idx="0">
+        <a:scrgbClr r="0" g="0" b="0"/>
+      </a:effectRef>
+      <a:fontRef idx="minor">
+        <a:schemeClr val="lt1"/>
+      </a:fontRef>
+    </dgm:style>
+  </dgm:styleLbl>
+  <dgm:styleLbl name="node2">
+    <dgm:scene3d>
+      <a:camera prst="orthographicFront"/>
+      <a:lightRig rig="threePt" dir="t"/>
+    </dgm:scene3d>
+    <dgm:sp3d/>
+    <dgm:txPr/>
+    <dgm:style>
+      <a:lnRef idx="2">
+        <a:scrgbClr r="0" g="0" b="0"/>
+      </a:lnRef>
+      <a:fillRef idx="1">
+        <a:scrgbClr r="0" g="0" b="0"/>
+      </a:fillRef>
+      <a:effectRef idx="0">
+        <a:scrgbClr r="0" g="0" b="0"/>
+      </a:effectRef>
+      <a:fontRef idx="minor">
+        <a:schemeClr val="lt1"/>
+      </a:fontRef>
+    </dgm:style>
+  </dgm:styleLbl>
+  <dgm:styleLbl name="node3">
+    <dgm:scene3d>
+      <a:camera prst="orthographicFront"/>
+      <a:lightRig rig="threePt" dir="t"/>
+    </dgm:scene3d>
+    <dgm:sp3d/>
+    <dgm:txPr/>
+    <dgm:style>
+      <a:lnRef idx="2">
+        <a:scrgbClr r="0" g="0" b="0"/>
+      </a:lnRef>
+      <a:fillRef idx="1">
+        <a:scrgbClr r="0" g="0" b="0"/>
+      </a:fillRef>
+      <a:effectRef idx="0">
+        <a:scrgbClr r="0" g="0" b="0"/>
+      </a:effectRef>
+      <a:fontRef idx="minor">
+        <a:schemeClr val="lt1"/>
+      </a:fontRef>
+    </dgm:style>
+  </dgm:styleLbl>
+  <dgm:styleLbl name="node4">
+    <dgm:scene3d>
+      <a:camera prst="orthographicFront"/>
+      <a:lightRig rig="threePt" dir="t"/>
+    </dgm:scene3d>
+    <dgm:sp3d/>
+    <dgm:txPr/>
+    <dgm:style>
+      <a:lnRef idx="2">
+        <a:scrgbClr r="0" g="0" b="0"/>
+      </a:lnRef>
+      <a:fillRef idx="1">
+        <a:scrgbClr r="0" g="0" b="0"/>
+      </a:fillRef>
+      <a:effectRef idx="0">
+        <a:scrgbClr r="0" g="0" b="0"/>
+      </a:effectRef>
+      <a:fontRef idx="minor">
+        <a:schemeClr val="lt1"/>
+      </a:fontRef>
+    </dgm:style>
+  </dgm:styleLbl>
+  <dgm:styleLbl name="fgImgPlace1">
+    <dgm:scene3d>
+      <a:camera prst="orthographicFront"/>
+      <a:lightRig rig="threePt" dir="t"/>
+    </dgm:scene3d>
+    <dgm:sp3d/>
+    <dgm:txPr/>
+    <dgm:style>
+      <a:lnRef idx="2">
+        <a:scrgbClr r="0" g="0" b="0"/>
+      </a:lnRef>
+      <a:fillRef idx="1">
+        <a:scrgbClr r="0" g="0" b="0"/>
+      </a:fillRef>
+      <a:effectRef idx="0">
+        <a:scrgbClr r="0" g="0" b="0"/>
+      </a:effectRef>
+      <a:fontRef idx="minor"/>
+    </dgm:style>
+  </dgm:styleLbl>
+  <dgm:styleLbl name="alignImgPlace1">
+    <dgm:scene3d>
+      <a:camera prst="orthographicFront"/>
+      <a:lightRig rig="threePt" dir="t"/>
+    </dgm:scene3d>
+    <dgm:sp3d/>
+    <dgm:txPr/>
+    <dgm:style>
+      <a:lnRef idx="2">
+        <a:scrgbClr r="0" g="0" b="0"/>
+      </a:lnRef>
+      <a:fillRef idx="1">
+        <a:scrgbClr r="0" g="0" b="0"/>
+      </a:fillRef>
+      <a:effectRef idx="0">
+        <a:scrgbClr r="0" g="0" b="0"/>
+      </a:effectRef>
+      <a:fontRef idx="minor"/>
+    </dgm:style>
+  </dgm:styleLbl>
+  <dgm:styleLbl name="bgImgPlace1">
+    <dgm:scene3d>
+      <a:camera prst="orthographicFront"/>
+      <a:lightRig rig="threePt" dir="t"/>
+    </dgm:scene3d>
+    <dgm:sp3d/>
+    <dgm:txPr/>
+    <dgm:style>
+      <a:lnRef idx="2">
+        <a:scrgbClr r="0" g="0" b="0"/>
+      </a:lnRef>
+      <a:fillRef idx="1">
+        <a:scrgbClr r="0" g="0" b="0"/>
+      </a:fillRef>
+      <a:effectRef idx="0">
+        <a:scrgbClr r="0" g="0" b="0"/>
+      </a:effectRef>
+      <a:fontRef idx="minor"/>
+    </dgm:style>
+  </dgm:styleLbl>
+  <dgm:styleLbl name="sibTrans2D1">
+    <dgm:scene3d>
+      <a:camera prst="orthographicFront"/>
+      <a:lightRig rig="threePt" dir="t"/>
+    </dgm:scene3d>
+    <dgm:sp3d/>
+    <dgm:txPr/>
+    <dgm:style>
+      <a:lnRef idx="0">
+        <a:scrgbClr r="0" g="0" b="0"/>
+      </a:lnRef>
+      <a:fillRef idx="1">
+        <a:scrgbClr r="0" g="0" b="0"/>
+      </a:fillRef>
+      <a:effectRef idx="0">
+        <a:scrgbClr r="0" g="0" b="0"/>
+      </a:effectRef>
+      <a:fontRef idx="minor">
+        <a:schemeClr val="lt1"/>
+      </a:fontRef>
+    </dgm:style>
+  </dgm:styleLbl>
+  <dgm:styleLbl name="fgSibTrans2D1">
+    <dgm:scene3d>
+      <a:camera prst="orthographicFront"/>
+      <a:lightRig rig="threePt" dir="t"/>
+    </dgm:scene3d>
+    <dgm:sp3d/>
+    <dgm:txPr/>
+    <dgm:style>
+      <a:lnRef idx="0">
+        <a:scrgbClr r="0" g="0" b="0"/>
+      </a:lnRef>
+      <a:fillRef idx="1">
+        <a:scrgbClr r="0" g="0" b="0"/>
+      </a:fillRef>
+      <a:effectRef idx="0">
+        <a:scrgbClr r="0" g="0" b="0"/>
+      </a:effectRef>
+      <a:fontRef idx="minor">
+        <a:schemeClr val="lt1"/>
+      </a:fontRef>
+    </dgm:style>
+  </dgm:styleLbl>
+  <dgm:styleLbl name="bgSibTrans2D1">
+    <dgm:scene3d>
+      <a:camera prst="orthographicFront"/>
+      <a:lightRig rig="threePt" dir="t"/>
+    </dgm:scene3d>
+    <dgm:sp3d/>
+    <dgm:txPr/>
+    <dgm:style>
+      <a:lnRef idx="0">
+        <a:scrgbClr r="0" g="0" b="0"/>
+      </a:lnRef>
+      <a:fillRef idx="1">
+        <a:scrgbClr r="0" g="0" b="0"/>
+      </a:fillRef>
+      <a:effectRef idx="0">
+        <a:scrgbClr r="0" g="0" b="0"/>
+      </a:effectRef>
+      <a:fontRef idx="minor">
+        <a:schemeClr val="lt1"/>
+      </a:fontRef>
+    </dgm:style>
+  </dgm:styleLbl>
+  <dgm:styleLbl name="sibTrans1D1">
+    <dgm:scene3d>
+      <a:camera prst="orthographicFront"/>
+      <a:lightRig rig="threePt" dir="t"/>
+    </dgm:scene3d>
+    <dgm:sp3d/>
+    <dgm:txPr/>
+    <dgm:style>
+      <a:lnRef idx="1">
+        <a:scrgbClr r="0" g="0" b="0"/>
+      </a:lnRef>
+      <a:fillRef idx="0">
+        <a:scrgbClr r="0" g="0" b="0"/>
+      </a:fillRef>
+      <a:effectRef idx="0">
+        <a:scrgbClr r="0" g="0" b="0"/>
+      </a:effectRef>
+      <a:fontRef idx="minor"/>
+    </dgm:style>
+  </dgm:styleLbl>
+  <dgm:styleLbl name="callout">
+    <dgm:scene3d>
+      <a:camera prst="orthographicFront"/>
+      <a:lightRig rig="threePt" dir="t"/>
+    </dgm:scene3d>
+    <dgm:sp3d/>
+    <dgm:txPr/>
+    <dgm:style>
+      <a:lnRef idx="2">
+        <a:scrgbClr r="0" g="0" b="0"/>
+      </a:lnRef>
+      <a:fillRef idx="1">
+        <a:scrgbClr r="0" g="0" b="0"/>
+      </a:fillRef>
+      <a:effectRef idx="0">
+        <a:scrgbClr r="0" g="0" b="0"/>
+      </a:effectRef>
+      <a:fontRef idx="minor"/>
+    </dgm:style>
+  </dgm:styleLbl>
+  <dgm:styleLbl name="asst0">
+    <dgm:scene3d>
+      <a:camera prst="orthographicFront"/>
+      <a:lightRig rig="threePt" dir="t"/>
+    </dgm:scene3d>
+    <dgm:sp3d/>
+    <dgm:txPr/>
+    <dgm:style>
+      <a:lnRef idx="2">
+        <a:scrgbClr r="0" g="0" b="0"/>
+      </a:lnRef>
+      <a:fillRef idx="1">
+        <a:scrgbClr r="0" g="0" b="0"/>
+      </a:fillRef>
+      <a:effectRef idx="0">
+        <a:scrgbClr r="0" g="0" b="0"/>
+      </a:effectRef>
+      <a:fontRef idx="minor">
+        <a:schemeClr val="lt1"/>
+      </a:fontRef>
+    </dgm:style>
+  </dgm:styleLbl>
+  <dgm:styleLbl name="asst1">
+    <dgm:scene3d>
+      <a:camera prst="orthographicFront"/>
+      <a:lightRig rig="threePt" dir="t"/>
+    </dgm:scene3d>
+    <dgm:sp3d/>
+    <dgm:txPr/>
+    <dgm:style>
+      <a:lnRef idx="2">
+        <a:scrgbClr r="0" g="0" b="0"/>
+      </a:lnRef>
+      <a:fillRef idx="1">
+        <a:scrgbClr r="0" g="0" b="0"/>
+      </a:fillRef>
+      <a:effectRef idx="0">
+        <a:scrgbClr r="0" g="0" b="0"/>
+      </a:effectRef>
+      <a:fontRef idx="minor">
+        <a:schemeClr val="lt1"/>
+      </a:fontRef>
+    </dgm:style>
+  </dgm:styleLbl>
+  <dgm:styleLbl name="asst2">
+    <dgm:scene3d>
+      <a:camera prst="orthographicFront"/>
+      <a:lightRig rig="threePt" dir="t"/>
+    </dgm:scene3d>
+    <dgm:sp3d/>
+    <dgm:txPr/>
+    <dgm:style>
+      <a:lnRef idx="2">
+        <a:scrgbClr r="0" g="0" b="0"/>
+      </a:lnRef>
+      <a:fillRef idx="1">
+        <a:scrgbClr r="0" g="0" b="0"/>
+      </a:fillRef>
+      <a:effectRef idx="0">
+        <a:scrgbClr r="0" g="0" b="0"/>
+      </a:effectRef>
+      <a:fontRef idx="minor">
+        <a:schemeClr val="lt1"/>
+      </a:fontRef>
+    </dgm:style>
+  </dgm:styleLbl>
+  <dgm:styleLbl name="asst3">
+    <dgm:scene3d>
+      <a:camera prst="orthographicFront"/>
+      <a:lightRig rig="threePt" dir="t"/>
+    </dgm:scene3d>
+    <dgm:sp3d/>
+    <dgm:txPr/>
+    <dgm:style>
+      <a:lnRef idx="2">
+        <a:scrgbClr r="0" g="0" b="0"/>
+      </a:lnRef>
+      <a:fillRef idx="1">
+        <a:scrgbClr r="0" g="0" b="0"/>
+      </a:fillRef>
+      <a:effectRef idx="0">
+        <a:scrgbClr r="0" g="0" b="0"/>
+      </a:effectRef>
+      <a:fontRef idx="minor">
+        <a:schemeClr val="lt1"/>
+      </a:fontRef>
+    </dgm:style>
+  </dgm:styleLbl>
+  <dgm:styleLbl name="asst4">
+    <dgm:scene3d>
+      <a:camera prst="orthographicFront"/>
+      <a:lightRig rig="threePt" dir="t"/>
+    </dgm:scene3d>
+    <dgm:sp3d/>
+    <dgm:txPr/>
+    <dgm:style>
+      <a:lnRef idx="2">
+        <a:scrgbClr r="0" g="0" b="0"/>
+      </a:lnRef>
+      <a:fillRef idx="1">
+        <a:scrgbClr r="0" g="0" b="0"/>
+      </a:fillRef>
+      <a:effectRef idx="0">
+        <a:scrgbClr r="0" g="0" b="0"/>
+      </a:effectRef>
+      <a:fontRef idx="minor">
+        <a:schemeClr val="lt1"/>
+      </a:fontRef>
+    </dgm:style>
+  </dgm:styleLbl>
+  <dgm:styleLbl name="parChTrans2D1">
+    <dgm:scene3d>
+      <a:camera prst="orthographicFront"/>
+      <a:lightRig rig="threePt" dir="t"/>
+    </dgm:scene3d>
+    <dgm:sp3d/>
+    <dgm:txPr/>
+    <dgm:style>
+      <a:lnRef idx="2">
+        <a:scrgbClr r="0" g="0" b="0"/>
+      </a:lnRef>
+      <a:fillRef idx="1">
+        <a:scrgbClr r="0" g="0" b="0"/>
+      </a:fillRef>
+      <a:effectRef idx="0">
+        <a:scrgbClr r="0" g="0" b="0"/>
+      </a:effectRef>
+      <a:fontRef idx="minor">
+        <a:schemeClr val="lt1"/>
+      </a:fontRef>
+    </dgm:style>
+  </dgm:styleLbl>
+  <dgm:styleLbl name="parChTrans2D2">
+    <dgm:scene3d>
+      <a:camera prst="orthographicFront"/>
+      <a:lightRig rig="threePt" dir="t"/>
+    </dgm:scene3d>
+    <dgm:sp3d/>
+    <dgm:txPr/>
+    <dgm:style>
+      <a:lnRef idx="2">
+        <a:scrgbClr r="0" g="0" b="0"/>
+      </a:lnRef>
+      <a:fillRef idx="1">
+        <a:scrgbClr r="0" g="0" b="0"/>
+      </a:fillRef>
+      <a:effectRef idx="0">
+        <a:scrgbClr r="0" g="0" b="0"/>
+      </a:effectRef>
+      <a:fontRef idx="minor">
+        <a:schemeClr val="lt1"/>
+      </a:fontRef>
+    </dgm:style>
+  </dgm:styleLbl>
+  <dgm:styleLbl name="parChTrans2D3">
+    <dgm:scene3d>
+      <a:camera prst="orthographicFront"/>
+      <a:lightRig rig="threePt" dir="t"/>
+    </dgm:scene3d>
+    <dgm:sp3d/>
+    <dgm:txPr/>
+    <dgm:style>
+      <a:lnRef idx="2">
+        <a:scrgbClr r="0" g="0" b="0"/>
+      </a:lnRef>
+      <a:fillRef idx="1">
+        <a:scrgbClr r="0" g="0" b="0"/>
+      </a:fillRef>
+      <a:effectRef idx="0">
+        <a:scrgbClr r="0" g="0" b="0"/>
+      </a:effectRef>
+      <a:fontRef idx="minor">
+        <a:schemeClr val="lt1"/>
+      </a:fontRef>
+    </dgm:style>
+  </dgm:styleLbl>
+  <dgm:styleLbl name="parChTrans2D4">
+    <dgm:scene3d>
+      <a:camera prst="orthographicFront"/>
+      <a:lightRig rig="threePt" dir="t"/>
+    </dgm:scene3d>
+    <dgm:sp3d/>
+    <dgm:txPr/>
+    <dgm:style>
+      <a:lnRef idx="2">
+        <a:scrgbClr r="0" g="0" b="0"/>
+      </a:lnRef>
+      <a:fillRef idx="1">
+        <a:scrgbClr r="0" g="0" b="0"/>
+      </a:fillRef>
+      <a:effectRef idx="0">
+        <a:scrgbClr r="0" g="0" b="0"/>
+      </a:effectRef>
+      <a:fontRef idx="minor">
+        <a:schemeClr val="lt1"/>
+      </a:fontRef>
+    </dgm:style>
+  </dgm:styleLbl>
+  <dgm:styleLbl name="parChTrans1D1">
+    <dgm:scene3d>
+      <a:camera prst="orthographicFront"/>
+      <a:lightRig rig="threePt" dir="t"/>
+    </dgm:scene3d>
+    <dgm:sp3d/>
+    <dgm:txPr/>
+    <dgm:style>
+      <a:lnRef idx="2">
+        <a:scrgbClr r="0" g="0" b="0"/>
+      </a:lnRef>
+      <a:fillRef idx="0">
+        <a:scrgbClr r="0" g="0" b="0"/>
+      </a:fillRef>
+      <a:effectRef idx="0">
+        <a:scrgbClr r="0" g="0" b="0"/>
+      </a:effectRef>
+      <a:fontRef idx="minor"/>
+    </dgm:style>
+  </dgm:styleLbl>
+  <dgm:styleLbl name="parChTrans1D2">
+    <dgm:scene3d>
+      <a:camera prst="orthographicFront"/>
+      <a:lightRig rig="threePt" dir="t"/>
+    </dgm:scene3d>
+    <dgm:sp3d/>
+    <dgm:txPr/>
+    <dgm:style>
+      <a:lnRef idx="2">
+        <a:scrgbClr r="0" g="0" b="0"/>
+      </a:lnRef>
+      <a:fillRef idx="0">
+        <a:scrgbClr r="0" g="0" b="0"/>
+      </a:fillRef>
+      <a:effectRef idx="0">
+        <a:scrgbClr r="0" g="0" b="0"/>
+      </a:effectRef>
+      <a:fontRef idx="minor"/>
+    </dgm:style>
+  </dgm:styleLbl>
+  <dgm:styleLbl name="parChTrans1D3">
+    <dgm:scene3d>
+      <a:camera prst="orthographicFront"/>
+      <a:lightRig rig="threePt" dir="t"/>
+    </dgm:scene3d>
+    <dgm:sp3d/>
+    <dgm:txPr/>
+    <dgm:style>
+      <a:lnRef idx="2">
+        <a:scrgbClr r="0" g="0" b="0"/>
+      </a:lnRef>
+      <a:fillRef idx="0">
+        <a:scrgbClr r="0" g="0" b="0"/>
+      </a:fillRef>
+      <a:effectRef idx="0">
+        <a:scrgbClr r="0" g="0" b="0"/>
+      </a:effectRef>
+      <a:fontRef idx="minor"/>
+    </dgm:style>
+  </dgm:styleLbl>
+  <dgm:styleLbl name="parChTrans1D4">
+    <dgm:scene3d>
+      <a:camera prst="orthographicFront"/>
+      <a:lightRig rig="threePt" dir="t"/>
+    </dgm:scene3d>
+    <dgm:sp3d/>
+    <dgm:txPr/>
+    <dgm:style>
+      <a:lnRef idx="2">
+        <a:scrgbClr r="0" g="0" b="0"/>
+      </a:lnRef>
+      <a:fillRef idx="0">
+        <a:scrgbClr r="0" g="0" b="0"/>
+      </a:fillRef>
+      <a:effectRef idx="0">
+        <a:scrgbClr r="0" g="0" b="0"/>
+      </a:effectRef>
+      <a:fontRef idx="minor"/>
+    </dgm:style>
+  </dgm:styleLbl>
+  <dgm:styleLbl name="fgAcc1">
+    <dgm:scene3d>
+      <a:camera prst="orthographicFront"/>
+      <a:lightRig rig="threePt" dir="t"/>
+    </dgm:scene3d>
+    <dgm:sp3d/>
+    <dgm:txPr/>
+    <dgm:style>
+      <a:lnRef idx="2">
+        <a:scrgbClr r="0" g="0" b="0"/>
+      </a:lnRef>
+      <a:fillRef idx="1">
+        <a:scrgbClr r="0" g="0" b="0"/>
+      </a:fillRef>
+      <a:effectRef idx="0">
+        <a:scrgbClr r="0" g="0" b="0"/>
+      </a:effectRef>
+      <a:fontRef idx="minor"/>
+    </dgm:style>
+  </dgm:styleLbl>
+  <dgm:styleLbl name="conFgAcc1">
+    <dgm:scene3d>
+      <a:camera prst="orthographicFront"/>
+      <a:lightRig rig="threePt" dir="t"/>
+    </dgm:scene3d>
+    <dgm:sp3d/>
+    <dgm:txPr/>
+    <dgm:style>
+      <a:lnRef idx="2">
+        <a:scrgbClr r="0" g="0" b="0"/>
+      </a:lnRef>
+      <a:fillRef idx="1">
+        <a:scrgbClr r="0" g="0" b="0"/>
+      </a:fillRef>
+      <a:effectRef idx="0">
+        <a:scrgbClr r="0" g="0" b="0"/>
+      </a:effectRef>
+      <a:fontRef idx="minor"/>
+    </dgm:style>
+  </dgm:styleLbl>
+  <dgm:styleLbl name="alignAcc1">
+    <dgm:scene3d>
+      <a:camera prst="orthographicFront"/>
+      <a:lightRig rig="threePt" dir="t"/>
+    </dgm:scene3d>
+    <dgm:sp3d/>
+    <dgm:txPr/>
+    <dgm:style>
+      <a:lnRef idx="2">
+        <a:scrgbClr r="0" g="0" b="0"/>
+      </a:lnRef>
+      <a:fillRef idx="1">
+        <a:scrgbClr r="0" g="0" b="0"/>
+      </a:fillRef>
+      <a:effectRef idx="0">
+        <a:scrgbClr r="0" g="0" b="0"/>
+      </a:effectRef>
+      <a:fontRef idx="minor"/>
+    </dgm:style>
+  </dgm:styleLbl>
+  <dgm:styleLbl name="trAlignAcc1">
+    <dgm:scene3d>
+      <a:camera prst="orthographicFront"/>
+      <a:lightRig rig="threePt" dir="t"/>
+    </dgm:scene3d>
+    <dgm:sp3d/>
+    <dgm:txPr/>
+    <dgm:style>
+      <a:lnRef idx="1">
+        <a:scrgbClr r="0" g="0" b="0"/>
+      </a:lnRef>
+      <a:fillRef idx="1">
+        <a:scrgbClr r="0" g="0" b="0"/>
+      </a:fillRef>
+      <a:effectRef idx="0">
+        <a:scrgbClr r="0" g="0" b="0"/>
+      </a:effectRef>
+      <a:fontRef idx="minor"/>
+    </dgm:style>
+  </dgm:styleLbl>
+  <dgm:styleLbl name="bgAcc1">
+    <dgm:scene3d>
+      <a:camera prst="orthographicFront"/>
+      <a:lightRig rig="threePt" dir="t"/>
+    </dgm:scene3d>
+    <dgm:sp3d/>
+    <dgm:txPr/>
+    <dgm:style>
+      <a:lnRef idx="2">
+        <a:scrgbClr r="0" g="0" b="0"/>
+      </a:lnRef>
+      <a:fillRef idx="1">
+        <a:scrgbClr r="0" g="0" b="0"/>
+      </a:fillRef>
+      <a:effectRef idx="0">
+        <a:scrgbClr r="0" g="0" b="0"/>
+      </a:effectRef>
+      <a:fontRef idx="minor"/>
+    </dgm:style>
+  </dgm:styleLbl>
+  <dgm:styleLbl name="solidFgAcc1">
+    <dgm:scene3d>
+      <a:camera prst="orthographicFront"/>
+      <a:lightRig rig="threePt" dir="t"/>
+    </dgm:scene3d>
+    <dgm:sp3d/>
+    <dgm:txPr/>
+    <dgm:style>
+      <a:lnRef idx="2">
+        <a:scrgbClr r="0" g="0" b="0"/>
+      </a:lnRef>
+      <a:fillRef idx="1">
+        <a:scrgbClr r="0" g="0" b="0"/>
+      </a:fillRef>
+      <a:effectRef idx="0">
+        <a:scrgbClr r="0" g="0" b="0"/>
+      </a:effectRef>
+      <a:fontRef idx="minor"/>
+    </dgm:style>
+  </dgm:styleLbl>
+  <dgm:styleLbl name="solidAlignAcc1">
+    <dgm:scene3d>
+      <a:camera prst="orthographicFront"/>
+      <a:lightRig rig="threePt" dir="t"/>
+    </dgm:scene3d>
+    <dgm:sp3d/>
+    <dgm:txPr/>
+    <dgm:style>
+      <a:lnRef idx="2">
+        <a:scrgbClr r="0" g="0" b="0"/>
+      </a:lnRef>
+      <a:fillRef idx="1">
+        <a:scrgbClr r="0" g="0" b="0"/>
+      </a:fillRef>
+      <a:effectRef idx="0">
+        <a:scrgbClr r="0" g="0" b="0"/>
+      </a:effectRef>
+      <a:fontRef idx="minor"/>
+    </dgm:style>
+  </dgm:styleLbl>
+  <dgm:styleLbl name="solidBgAcc1">
+    <dgm:scene3d>
+      <a:camera prst="orthographicFront"/>
+      <a:lightRig rig="threePt" dir="t"/>
+    </dgm:scene3d>
+    <dgm:sp3d/>
+    <dgm:txPr/>
+    <dgm:style>
+      <a:lnRef idx="2">
+        <a:scrgbClr r="0" g="0" b="0"/>
+      </a:lnRef>
+      <a:fillRef idx="1">
+        <a:scrgbClr r="0" g="0" b="0"/>
+      </a:fillRef>
+      <a:effectRef idx="0">
+        <a:scrgbClr r="0" g="0" b="0"/>
+      </a:effectRef>
+      <a:fontRef idx="minor"/>
+    </dgm:style>
+  </dgm:styleLbl>
+  <dgm:styleLbl name="fgAccFollowNode1">
+    <dgm:scene3d>
+      <a:camera prst="orthographicFront"/>
+      <a:lightRig rig="threePt" dir="t"/>
+    </dgm:scene3d>
+    <dgm:sp3d/>
+    <dgm:txPr/>
+    <dgm:style>
+      <a:lnRef idx="2">
+        <a:scrgbClr r="0" g="0" b="0"/>
+      </a:lnRef>
+      <a:fillRef idx="1">
+        <a:scrgbClr r="0" g="0" b="0"/>
+      </a:fillRef>
+      <a:effectRef idx="0">
+        <a:scrgbClr r="0" g="0" b="0"/>
+      </a:effectRef>
+      <a:fontRef idx="minor"/>
+    </dgm:style>
+  </dgm:styleLbl>
+  <dgm:styleLbl name="alignAccFollowNode1">
+    <dgm:scene3d>
+      <a:camera prst="orthographicFront"/>
+      <a:lightRig rig="threePt" dir="t"/>
+    </dgm:scene3d>
+    <dgm:sp3d/>
+    <dgm:txPr/>
+    <dgm:style>
+      <a:lnRef idx="2">
+        <a:scrgbClr r="0" g="0" b="0"/>
+      </a:lnRef>
+      <a:fillRef idx="1">
+        <a:scrgbClr r="0" g="0" b="0"/>
+      </a:fillRef>
+      <a:effectRef idx="0">
+        <a:scrgbClr r="0" g="0" b="0"/>
+      </a:effectRef>
+      <a:fontRef idx="minor"/>
+    </dgm:style>
+  </dgm:styleLbl>
+  <dgm:styleLbl name="bgAccFollowNode1">
+    <dgm:scene3d>
+      <a:camera prst="orthographicFront"/>
+      <a:lightRig rig="threePt" dir="t"/>
+    </dgm:scene3d>
+    <dgm:sp3d/>
+    <dgm:txPr/>
+    <dgm:style>
+      <a:lnRef idx="2">
+        <a:scrgbClr r="0" g="0" b="0"/>
+      </a:lnRef>
+      <a:fillRef idx="1">
+        <a:scrgbClr r="0" g="0" b="0"/>
+      </a:fillRef>
+      <a:effectRef idx="0">
+        <a:scrgbClr r="0" g="0" b="0"/>
+      </a:effectRef>
+      <a:fontRef idx="minor"/>
+    </dgm:style>
+  </dgm:styleLbl>
+  <dgm:styleLbl name="fgAcc0">
+    <dgm:scene3d>
+      <a:camera prst="orthographicFront"/>
+      <a:lightRig rig="threePt" dir="t"/>
+    </dgm:scene3d>
+    <dgm:sp3d/>
+    <dgm:txPr/>
+    <dgm:style>
+      <a:lnRef idx="2">
+        <a:scrgbClr r="0" g="0" b="0"/>
+      </a:lnRef>
+      <a:fillRef idx="1">
+        <a:scrgbClr r="0" g="0" b="0"/>
+      </a:fillRef>
+      <a:effectRef idx="0">
+        <a:scrgbClr r="0" g="0" b="0"/>
+      </a:effectRef>
+      <a:fontRef idx="minor"/>
+    </dgm:style>
+  </dgm:styleLbl>
+  <dgm:styleLbl name="fgAcc2">
+    <dgm:scene3d>
+      <a:camera prst="orthographicFront"/>
+      <a:lightRig rig="threePt" dir="t"/>
+    </dgm:scene3d>
+    <dgm:sp3d/>
+    <dgm:txPr/>
+    <dgm:style>
+      <a:lnRef idx="2">
+        <a:scrgbClr r="0" g="0" b="0"/>
+      </a:lnRef>
+      <a:fillRef idx="1">
+        <a:scrgbClr r="0" g="0" b="0"/>
+      </a:fillRef>
+      <a:effectRef idx="0">
+        <a:scrgbClr r="0" g="0" b="0"/>
+      </a:effectRef>
+      <a:fontRef idx="minor"/>
+    </dgm:style>
+  </dgm:styleLbl>
+  <dgm:styleLbl name="fgAcc3">
+    <dgm:scene3d>
+      <a:camera prst="orthographicFront"/>
+      <a:lightRig rig="threePt" dir="t"/>
+    </dgm:scene3d>
+    <dgm:sp3d/>
+    <dgm:txPr/>
+    <dgm:style>
+      <a:lnRef idx="2">
+        <a:scrgbClr r="0" g="0" b="0"/>
+      </a:lnRef>
+      <a:fillRef idx="1">
+        <a:scrgbClr r="0" g="0" b="0"/>
+      </a:fillRef>
+      <a:effectRef idx="0">
+        <a:scrgbClr r="0" g="0" b="0"/>
+      </a:effectRef>
+      <a:fontRef idx="minor"/>
+    </dgm:style>
+  </dgm:styleLbl>
+  <dgm:styleLbl name="fgAcc4">
+    <dgm:scene3d>
+      <a:camera prst="orthographicFront"/>
+      <a:lightRig rig="threePt" dir="t"/>
+    </dgm:scene3d>
+    <dgm:sp3d/>
+    <dgm:txPr/>
+    <dgm:style>
+      <a:lnRef idx="2">
+        <a:scrgbClr r="0" g="0" b="0"/>
+      </a:lnRef>
+      <a:fillRef idx="1">
+        <a:scrgbClr r="0" g="0" b="0"/>
+      </a:fillRef>
+      <a:effectRef idx="0">
+        <a:scrgbClr r="0" g="0" b="0"/>
+      </a:effectRef>
+      <a:fontRef idx="minor"/>
+    </dgm:style>
+  </dgm:styleLbl>
+  <dgm:styleLbl name="bgShp">
+    <dgm:scene3d>
+      <a:camera prst="orthographicFront"/>
+      <a:lightRig rig="threePt" dir="t"/>
+    </dgm:scene3d>
+    <dgm:sp3d/>
+    <dgm:txPr/>
+    <dgm:style>
+      <a:lnRef idx="0">
+        <a:scrgbClr r="0" g="0" b="0"/>
+      </a:lnRef>
+      <a:fillRef idx="1">
+        <a:scrgbClr r="0" g="0" b="0"/>
+      </a:fillRef>
+      <a:effectRef idx="0">
+        <a:scrgbClr r="0" g="0" b="0"/>
+      </a:effectRef>
+      <a:fontRef idx="minor"/>
+    </dgm:style>
+  </dgm:styleLbl>
+  <dgm:styleLbl name="dkBgShp">
+    <dgm:scene3d>
+      <a:camera prst="orthographicFront"/>
+      <a:lightRig rig="threePt" dir="t"/>
+    </dgm:scene3d>
+    <dgm:sp3d/>
+    <dgm:txPr/>
+    <dgm:style>
+      <a:lnRef idx="0">
+        <a:scrgbClr r="0" g="0" b="0"/>
+      </a:lnRef>
+      <a:fillRef idx="1">
+        <a:scrgbClr r="0" g="0" b="0"/>
+      </a:fillRef>
+      <a:effectRef idx="0">
+        <a:scrgbClr r="0" g="0" b="0"/>
+      </a:effectRef>
+      <a:fontRef idx="minor"/>
+    </dgm:style>
+  </dgm:styleLbl>
+  <dgm:styleLbl name="trBgShp">
+    <dgm:scene3d>
+      <a:camera prst="orthographicFront"/>
+      <a:lightRig rig="threePt" dir="t"/>
+    </dgm:scene3d>
+    <dgm:sp3d/>
+    <dgm:txPr/>
+    <dgm:style>
+      <a:lnRef idx="0">
+        <a:scrgbClr r="0" g="0" b="0"/>
+      </a:lnRef>
+      <a:fillRef idx="1">
+        <a:scrgbClr r="0" g="0" b="0"/>
+      </a:fillRef>
+      <a:effectRef idx="0">
+        <a:scrgbClr r="0" g="0" b="0"/>
+      </a:effectRef>
+      <a:fontRef idx="minor"/>
+    </dgm:style>
+  </dgm:styleLbl>
+  <dgm:styleLbl name="fgShp">
+    <dgm:scene3d>
+      <a:camera prst="orthographicFront"/>
+      <a:lightRig rig="threePt" dir="t"/>
+    </dgm:scene3d>
+    <dgm:sp3d/>
+    <dgm:txPr/>
+    <dgm:style>
+      <a:lnRef idx="2">
+        <a:scrgbClr r="0" g="0" b="0"/>
+      </a:lnRef>
+      <a:fillRef idx="1">
+        <a:scrgbClr r="0" g="0" b="0"/>
+      </a:fillRef>
+      <a:effectRef idx="0">
+        <a:scrgbClr r="0" g="0" b="0"/>
+      </a:effectRef>
+      <a:fontRef idx="minor"/>
+    </dgm:style>
+  </dgm:styleLbl>
+  <dgm:styleLbl name="revTx">
+    <dgm:scene3d>
+      <a:camera prst="orthographicFront"/>
+      <a:lightRig rig="threePt" dir="t"/>
+    </dgm:scene3d>
+    <dgm:sp3d/>
+    <dgm:txPr/>
+    <dgm:style>
+      <a:lnRef idx="0">
+        <a:scrgbClr r="0" g="0" b="0"/>
+      </a:lnRef>
+      <a:fillRef idx="0">
+        <a:scrgbClr r="0" g="0" b="0"/>
+      </a:fillRef>
+      <a:effectRef idx="0">
+        <a:scrgbClr r="0" g="0" b="0"/>
+      </a:effectRef>
+      <a:fontRef idx="minor"/>
+    </dgm:style>
+  </dgm:styleLbl>
+</dgm:styleDef>
+</file>
+
+<file path=ppt/diagrams/quickStyle2.xml><?xml version="1.0" encoding="utf-8"?>
+<dgm:styleDef xmlns:dgm="http://schemas.openxmlformats.org/drawingml/2006/diagram" xmlns:a="http://schemas.openxmlformats.org/drawingml/2006/main" uniqueId="urn:microsoft.com/office/officeart/2005/8/quickstyle/simple1">
+  <dgm:title val=""/>
+  <dgm:desc val=""/>
+  <dgm:catLst>
+    <dgm:cat type="simple" pri="10100"/>
+  </dgm:catLst>
+  <dgm:scene3d>
+    <a:camera prst="orthographicFront"/>
+    <a:lightRig rig="threePt" dir="t"/>
+  </dgm:scene3d>
+  <dgm:styleLbl name="node0">
+    <dgm:scene3d>
+      <a:camera prst="orthographicFront"/>
+      <a:lightRig rig="threePt" dir="t"/>
+    </dgm:scene3d>
+    <dgm:sp3d/>
+    <dgm:txPr/>
+    <dgm:style>
+      <a:lnRef idx="2">
+        <a:scrgbClr r="0" g="0" b="0"/>
+      </a:lnRef>
+      <a:fillRef idx="1">
+        <a:scrgbClr r="0" g="0" b="0"/>
+      </a:fillRef>
+      <a:effectRef idx="0">
+        <a:scrgbClr r="0" g="0" b="0"/>
+      </a:effectRef>
+      <a:fontRef idx="minor">
+        <a:schemeClr val="lt1"/>
+      </a:fontRef>
+    </dgm:style>
+  </dgm:styleLbl>
+  <dgm:styleLbl name="lnNode1">
+    <dgm:scene3d>
+      <a:camera prst="orthographicFront"/>
+      <a:lightRig rig="threePt" dir="t"/>
+    </dgm:scene3d>
+    <dgm:sp3d/>
+    <dgm:txPr/>
+    <dgm:style>
+      <a:lnRef idx="2">
+        <a:scrgbClr r="0" g="0" b="0"/>
+      </a:lnRef>
+      <a:fillRef idx="1">
+        <a:scrgbClr r="0" g="0" b="0"/>
+      </a:fillRef>
+      <a:effectRef idx="0">
+        <a:scrgbClr r="0" g="0" b="0"/>
+      </a:effectRef>
+      <a:fontRef idx="minor">
+        <a:schemeClr val="lt1"/>
+      </a:fontRef>
+    </dgm:style>
+  </dgm:styleLbl>
+  <dgm:styleLbl name="vennNode1">
+    <dgm:scene3d>
+      <a:camera prst="orthographicFront"/>
+      <a:lightRig rig="threePt" dir="t"/>
+    </dgm:scene3d>
+    <dgm:sp3d/>
+    <dgm:txPr/>
+    <dgm:style>
+      <a:lnRef idx="2">
+        <a:scrgbClr r="0" g="0" b="0"/>
+      </a:lnRef>
+      <a:fillRef idx="1">
+        <a:scrgbClr r="0" g="0" b="0"/>
+      </a:fillRef>
+      <a:effectRef idx="0">
+        <a:scrgbClr r="0" g="0" b="0"/>
+      </a:effectRef>
+      <a:fontRef idx="minor">
+        <a:schemeClr val="tx1"/>
+      </a:fontRef>
+    </dgm:style>
+  </dgm:styleLbl>
+  <dgm:styleLbl name="alignNode1">
+    <dgm:scene3d>
+      <a:camera prst="orthographicFront"/>
+      <a:lightRig rig="threePt" dir="t"/>
+    </dgm:scene3d>
+    <dgm:sp3d/>
+    <dgm:txPr/>
+    <dgm:style>
+      <a:lnRef idx="2">
+        <a:scrgbClr r="0" g="0" b="0"/>
+      </a:lnRef>
+      <a:fillRef idx="1">
+        <a:scrgbClr r="0" g="0" b="0"/>
+      </a:fillRef>
+      <a:effectRef idx="0">
+        <a:scrgbClr r="0" g="0" b="0"/>
+      </a:effectRef>
+      <a:fontRef idx="minor">
+        <a:schemeClr val="lt1"/>
+      </a:fontRef>
+    </dgm:style>
+  </dgm:styleLbl>
+  <dgm:styleLbl name="node1">
+    <dgm:scene3d>
+      <a:camera prst="orthographicFront"/>
+      <a:lightRig rig="threePt" dir="t"/>
+    </dgm:scene3d>
+    <dgm:sp3d/>
+    <dgm:txPr/>
+    <dgm:style>
+      <a:lnRef idx="2">
+        <a:scrgbClr r="0" g="0" b="0"/>
+      </a:lnRef>
+      <a:fillRef idx="1">
+        <a:scrgbClr r="0" g="0" b="0"/>
+      </a:fillRef>
+      <a:effectRef idx="0">
+        <a:scrgbClr r="0" g="0" b="0"/>
+      </a:effectRef>
+      <a:fontRef idx="minor">
+        <a:schemeClr val="lt1"/>
+      </a:fontRef>
+    </dgm:style>
+  </dgm:styleLbl>
+  <dgm:styleLbl name="node2">
+    <dgm:scene3d>
+      <a:camera prst="orthographicFront"/>
+      <a:lightRig rig="threePt" dir="t"/>
+    </dgm:scene3d>
+    <dgm:sp3d/>
+    <dgm:txPr/>
+    <dgm:style>
+      <a:lnRef idx="2">
+        <a:scrgbClr r="0" g="0" b="0"/>
+      </a:lnRef>
+      <a:fillRef idx="1">
+        <a:scrgbClr r="0" g="0" b="0"/>
+      </a:fillRef>
+      <a:effectRef idx="0">
+        <a:scrgbClr r="0" g="0" b="0"/>
+      </a:effectRef>
+      <a:fontRef idx="minor">
+        <a:schemeClr val="lt1"/>
+      </a:fontRef>
+    </dgm:style>
+  </dgm:styleLbl>
+  <dgm:styleLbl name="node3">
+    <dgm:scene3d>
+      <a:camera prst="orthographicFront"/>
+      <a:lightRig rig="threePt" dir="t"/>
+    </dgm:scene3d>
+    <dgm:sp3d/>
+    <dgm:txPr/>
+    <dgm:style>
+      <a:lnRef idx="2">
+        <a:scrgbClr r="0" g="0" b="0"/>
+      </a:lnRef>
+      <a:fillRef idx="1">
+        <a:scrgbClr r="0" g="0" b="0"/>
+      </a:fillRef>
+      <a:effectRef idx="0">
+        <a:scrgbClr r="0" g="0" b="0"/>
+      </a:effectRef>
+      <a:fontRef idx="minor">
+        <a:schemeClr val="lt1"/>
+      </a:fontRef>
+    </dgm:style>
+  </dgm:styleLbl>
+  <dgm:styleLbl name="node4">
+    <dgm:scene3d>
+      <a:camera prst="orthographicFront"/>
+      <a:lightRig rig="threePt" dir="t"/>
+    </dgm:scene3d>
+    <dgm:sp3d/>
+    <dgm:txPr/>
+    <dgm:style>
+      <a:lnRef idx="2">
+        <a:scrgbClr r="0" g="0" b="0"/>
+      </a:lnRef>
+      <a:fillRef idx="1">
+        <a:scrgbClr r="0" g="0" b="0"/>
+      </a:fillRef>
+      <a:effectRef idx="0">
+        <a:scrgbClr r="0" g="0" b="0"/>
+      </a:effectRef>
+      <a:fontRef idx="minor">
+        <a:schemeClr val="lt1"/>
+      </a:fontRef>
+    </dgm:style>
+  </dgm:styleLbl>
+  <dgm:styleLbl name="fgImgPlace1">
+    <dgm:scene3d>
+      <a:camera prst="orthographicFront"/>
+      <a:lightRig rig="threePt" dir="t"/>
+    </dgm:scene3d>
+    <dgm:sp3d/>
+    <dgm:txPr/>
+    <dgm:style>
+      <a:lnRef idx="2">
+        <a:scrgbClr r="0" g="0" b="0"/>
+      </a:lnRef>
+      <a:fillRef idx="1">
+        <a:scrgbClr r="0" g="0" b="0"/>
+      </a:fillRef>
+      <a:effectRef idx="0">
+        <a:scrgbClr r="0" g="0" b="0"/>
+      </a:effectRef>
+      <a:fontRef idx="minor"/>
+    </dgm:style>
+  </dgm:styleLbl>
+  <dgm:styleLbl name="alignImgPlace1">
+    <dgm:scene3d>
+      <a:camera prst="orthographicFront"/>
+      <a:lightRig rig="threePt" dir="t"/>
+    </dgm:scene3d>
+    <dgm:sp3d/>
+    <dgm:txPr/>
+    <dgm:style>
+      <a:lnRef idx="2">
+        <a:scrgbClr r="0" g="0" b="0"/>
+      </a:lnRef>
+      <a:fillRef idx="1">
+        <a:scrgbClr r="0" g="0" b="0"/>
+      </a:fillRef>
+      <a:effectRef idx="0">
+        <a:scrgbClr r="0" g="0" b="0"/>
+      </a:effectRef>
+      <a:fontRef idx="minor"/>
+    </dgm:style>
+  </dgm:styleLbl>
+  <dgm:styleLbl name="bgImgPlace1">
+    <dgm:scene3d>
+      <a:camera prst="orthographicFront"/>
+      <a:lightRig rig="threePt" dir="t"/>
+    </dgm:scene3d>
+    <dgm:sp3d/>
+    <dgm:txPr/>
+    <dgm:style>
+      <a:lnRef idx="2">
+        <a:scrgbClr r="0" g="0" b="0"/>
+      </a:lnRef>
+      <a:fillRef idx="1">
+        <a:scrgbClr r="0" g="0" b="0"/>
+      </a:fillRef>
+      <a:effectRef idx="0">
+        <a:scrgbClr r="0" g="0" b="0"/>
+      </a:effectRef>
+      <a:fontRef idx="minor"/>
+    </dgm:style>
+  </dgm:styleLbl>
+  <dgm:styleLbl name="sibTrans2D1">
+    <dgm:scene3d>
+      <a:camera prst="orthographicFront"/>
+      <a:lightRig rig="threePt" dir="t"/>
+    </dgm:scene3d>
+    <dgm:sp3d/>
+    <dgm:txPr/>
+    <dgm:style>
+      <a:lnRef idx="0">
+        <a:scrgbClr r="0" g="0" b="0"/>
+      </a:lnRef>
+      <a:fillRef idx="1">
+        <a:scrgbClr r="0" g="0" b="0"/>
+      </a:fillRef>
+      <a:effectRef idx="0">
+        <a:scrgbClr r="0" g="0" b="0"/>
+      </a:effectRef>
+      <a:fontRef idx="minor">
+        <a:schemeClr val="lt1"/>
+      </a:fontRef>
+    </dgm:style>
+  </dgm:styleLbl>
+  <dgm:styleLbl name="fgSibTrans2D1">
+    <dgm:scene3d>
+      <a:camera prst="orthographicFront"/>
+      <a:lightRig rig="threePt" dir="t"/>
+    </dgm:scene3d>
+    <dgm:sp3d/>
+    <dgm:txPr/>
+    <dgm:style>
+      <a:lnRef idx="0">
+        <a:scrgbClr r="0" g="0" b="0"/>
+      </a:lnRef>
+      <a:fillRef idx="1">
+        <a:scrgbClr r="0" g="0" b="0"/>
+      </a:fillRef>
+      <a:effectRef idx="0">
+        <a:scrgbClr r="0" g="0" b="0"/>
+      </a:effectRef>
+      <a:fontRef idx="minor">
+        <a:schemeClr val="lt1"/>
+      </a:fontRef>
+    </dgm:style>
+  </dgm:styleLbl>
+  <dgm:styleLbl name="bgSibTrans2D1">
+    <dgm:scene3d>
+      <a:camera prst="orthographicFront"/>
+      <a:lightRig rig="threePt" dir="t"/>
+    </dgm:scene3d>
+    <dgm:sp3d/>
+    <dgm:txPr/>
+    <dgm:style>
+      <a:lnRef idx="0">
+        <a:scrgbClr r="0" g="0" b="0"/>
+      </a:lnRef>
+      <a:fillRef idx="1">
+        <a:scrgbClr r="0" g="0" b="0"/>
+      </a:fillRef>
+      <a:effectRef idx="0">
+        <a:scrgbClr r="0" g="0" b="0"/>
+      </a:effectRef>
+      <a:fontRef idx="minor">
+        <a:schemeClr val="lt1"/>
+      </a:fontRef>
+    </dgm:style>
+  </dgm:styleLbl>
+  <dgm:styleLbl name="sibTrans1D1">
+    <dgm:scene3d>
+      <a:camera prst="orthographicFront"/>
+      <a:lightRig rig="threePt" dir="t"/>
+    </dgm:scene3d>
+    <dgm:sp3d/>
+    <dgm:txPr/>
+    <dgm:style>
+      <a:lnRef idx="1">
+        <a:scrgbClr r="0" g="0" b="0"/>
+      </a:lnRef>
+      <a:fillRef idx="0">
+        <a:scrgbClr r="0" g="0" b="0"/>
+      </a:fillRef>
+      <a:effectRef idx="0">
+        <a:scrgbClr r="0" g="0" b="0"/>
+      </a:effectRef>
+      <a:fontRef idx="minor"/>
+    </dgm:style>
+  </dgm:styleLbl>
+  <dgm:styleLbl name="callout">
+    <dgm:scene3d>
+      <a:camera prst="orthographicFront"/>
+      <a:lightRig rig="threePt" dir="t"/>
+    </dgm:scene3d>
+    <dgm:sp3d/>
+    <dgm:txPr/>
+    <dgm:style>
+      <a:lnRef idx="2">
+        <a:scrgbClr r="0" g="0" b="0"/>
+      </a:lnRef>
+      <a:fillRef idx="1">
+        <a:scrgbClr r="0" g="0" b="0"/>
+      </a:fillRef>
+      <a:effectRef idx="0">
+        <a:scrgbClr r="0" g="0" b="0"/>
+      </a:effectRef>
+      <a:fontRef idx="minor"/>
+    </dgm:style>
+  </dgm:styleLbl>
+  <dgm:styleLbl name="asst0">
+    <dgm:scene3d>
+      <a:camera prst="orthographicFront"/>
+      <a:lightRig rig="threePt" dir="t"/>
+    </dgm:scene3d>
+    <dgm:sp3d/>
+    <dgm:txPr/>
+    <dgm:style>
+      <a:lnRef idx="2">
+        <a:scrgbClr r="0" g="0" b="0"/>
+      </a:lnRef>
+      <a:fillRef idx="1">
+        <a:scrgbClr r="0" g="0" b="0"/>
+      </a:fillRef>
+      <a:effectRef idx="0">
+        <a:scrgbClr r="0" g="0" b="0"/>
+      </a:effectRef>
+      <a:fontRef idx="minor">
+        <a:schemeClr val="lt1"/>
+      </a:fontRef>
+    </dgm:style>
+  </dgm:styleLbl>
+  <dgm:styleLbl name="asst1">
+    <dgm:scene3d>
+      <a:camera prst="orthographicFront"/>
+      <a:lightRig rig="threePt" dir="t"/>
+    </dgm:scene3d>
+    <dgm:sp3d/>
+    <dgm:txPr/>
+    <dgm:style>
+      <a:lnRef idx="2">
+        <a:scrgbClr r="0" g="0" b="0"/>
+      </a:lnRef>
+      <a:fillRef idx="1">
+        <a:scrgbClr r="0" g="0" b="0"/>
+      </a:fillRef>
+      <a:effectRef idx="0">
+        <a:scrgbClr r="0" g="0" b="0"/>
+      </a:effectRef>
+      <a:fontRef idx="minor">
+        <a:schemeClr val="lt1"/>
+      </a:fontRef>
+    </dgm:style>
+  </dgm:styleLbl>
+  <dgm:styleLbl name="asst2">
+    <dgm:scene3d>
+      <a:camera prst="orthographicFront"/>
+      <a:lightRig rig="threePt" dir="t"/>
+    </dgm:scene3d>
+    <dgm:sp3d/>
+    <dgm:txPr/>
+    <dgm:style>
+      <a:lnRef idx="2">
+        <a:scrgbClr r="0" g="0" b="0"/>
+      </a:lnRef>
+      <a:fillRef idx="1">
+        <a:scrgbClr r="0" g="0" b="0"/>
+      </a:fillRef>
+      <a:effectRef idx="0">
+        <a:scrgbClr r="0" g="0" b="0"/>
+      </a:effectRef>
+      <a:fontRef idx="minor">
+        <a:schemeClr val="lt1"/>
+      </a:fontRef>
+    </dgm:style>
+  </dgm:styleLbl>
+  <dgm:styleLbl name="asst3">
+    <dgm:scene3d>
+      <a:camera prst="orthographicFront"/>
+      <a:lightRig rig="threePt" dir="t"/>
+    </dgm:scene3d>
+    <dgm:sp3d/>
+    <dgm:txPr/>
+    <dgm:style>
+      <a:lnRef idx="2">
+        <a:scrgbClr r="0" g="0" b="0"/>
+      </a:lnRef>
+      <a:fillRef idx="1">
+        <a:scrgbClr r="0" g="0" b="0"/>
+      </a:fillRef>
+      <a:effectRef idx="0">
+        <a:scrgbClr r="0" g="0" b="0"/>
+      </a:effectRef>
+      <a:fontRef idx="minor">
+        <a:schemeClr val="lt1"/>
+      </a:fontRef>
+    </dgm:style>
+  </dgm:styleLbl>
+  <dgm:styleLbl name="asst4">
+    <dgm:scene3d>
+      <a:camera prst="orthographicFront"/>
+      <a:lightRig rig="threePt" dir="t"/>
+    </dgm:scene3d>
+    <dgm:sp3d/>
+    <dgm:txPr/>
+    <dgm:style>
+      <a:lnRef idx="2">
+        <a:scrgbClr r="0" g="0" b="0"/>
+      </a:lnRef>
+      <a:fillRef idx="1">
+        <a:scrgbClr r="0" g="0" b="0"/>
+      </a:fillRef>
+      <a:effectRef idx="0">
+        <a:scrgbClr r="0" g="0" b="0"/>
+      </a:effectRef>
+      <a:fontRef idx="minor">
+        <a:schemeClr val="lt1"/>
+      </a:fontRef>
+    </dgm:style>
+  </dgm:styleLbl>
+  <dgm:styleLbl name="parChTrans2D1">
+    <dgm:scene3d>
+      <a:camera prst="orthographicFront"/>
+      <a:lightRig rig="threePt" dir="t"/>
+    </dgm:scene3d>
+    <dgm:sp3d/>
+    <dgm:txPr/>
+    <dgm:style>
+      <a:lnRef idx="2">
+        <a:scrgbClr r="0" g="0" b="0"/>
+      </a:lnRef>
+      <a:fillRef idx="1">
+        <a:scrgbClr r="0" g="0" b="0"/>
+      </a:fillRef>
+      <a:effectRef idx="0">
+        <a:scrgbClr r="0" g="0" b="0"/>
+      </a:effectRef>
+      <a:fontRef idx="minor">
+        <a:schemeClr val="lt1"/>
+      </a:fontRef>
+    </dgm:style>
+  </dgm:styleLbl>
+  <dgm:styleLbl name="parChTrans2D2">
+    <dgm:scene3d>
+      <a:camera prst="orthographicFront"/>
+      <a:lightRig rig="threePt" dir="t"/>
+    </dgm:scene3d>
+    <dgm:sp3d/>
+    <dgm:txPr/>
+    <dgm:style>
+      <a:lnRef idx="2">
+        <a:scrgbClr r="0" g="0" b="0"/>
+      </a:lnRef>
+      <a:fillRef idx="1">
+        <a:scrgbClr r="0" g="0" b="0"/>
+      </a:fillRef>
+      <a:effectRef idx="0">
+        <a:scrgbClr r="0" g="0" b="0"/>
+      </a:effectRef>
+      <a:fontRef idx="minor">
+        <a:schemeClr val="lt1"/>
+      </a:fontRef>
+    </dgm:style>
+  </dgm:styleLbl>
+  <dgm:styleLbl name="parChTrans2D3">
+    <dgm:scene3d>
+      <a:camera prst="orthographicFront"/>
+      <a:lightRig rig="threePt" dir="t"/>
+    </dgm:scene3d>
+    <dgm:sp3d/>
+    <dgm:txPr/>
+    <dgm:style>
+      <a:lnRef idx="2">
+        <a:scrgbClr r="0" g="0" b="0"/>
+      </a:lnRef>
+      <a:fillRef idx="1">
+        <a:scrgbClr r="0" g="0" b="0"/>
+      </a:fillRef>
+      <a:effectRef idx="0">
+        <a:scrgbClr r="0" g="0" b="0"/>
+      </a:effectRef>
+      <a:fontRef idx="minor">
+        <a:schemeClr val="lt1"/>
+      </a:fontRef>
+    </dgm:style>
+  </dgm:styleLbl>
+  <dgm:styleLbl name="parChTrans2D4">
+    <dgm:scene3d>
+      <a:camera prst="orthographicFront"/>
+      <a:lightRig rig="threePt" dir="t"/>
+    </dgm:scene3d>
+    <dgm:sp3d/>
+    <dgm:txPr/>
+    <dgm:style>
+      <a:lnRef idx="2">
+        <a:scrgbClr r="0" g="0" b="0"/>
+      </a:lnRef>
+      <a:fillRef idx="1">
+        <a:scrgbClr r="0" g="0" b="0"/>
+      </a:fillRef>
+      <a:effectRef idx="0">
+        <a:scrgbClr r="0" g="0" b="0"/>
+      </a:effectRef>
+      <a:fontRef idx="minor">
+        <a:schemeClr val="lt1"/>
+      </a:fontRef>
+    </dgm:style>
+  </dgm:styleLbl>
+  <dgm:styleLbl name="parChTrans1D1">
+    <dgm:scene3d>
+      <a:camera prst="orthographicFront"/>
+      <a:lightRig rig="threePt" dir="t"/>
+    </dgm:scene3d>
+    <dgm:sp3d/>
+    <dgm:txPr/>
+    <dgm:style>
+      <a:lnRef idx="2">
+        <a:scrgbClr r="0" g="0" b="0"/>
+      </a:lnRef>
+      <a:fillRef idx="0">
+        <a:scrgbClr r="0" g="0" b="0"/>
+      </a:fillRef>
+      <a:effectRef idx="0">
+        <a:scrgbClr r="0" g="0" b="0"/>
+      </a:effectRef>
+      <a:fontRef idx="minor"/>
+    </dgm:style>
+  </dgm:styleLbl>
+  <dgm:styleLbl name="parChTrans1D2">
+    <dgm:scene3d>
+      <a:camera prst="orthographicFront"/>
+      <a:lightRig rig="threePt" dir="t"/>
+    </dgm:scene3d>
+    <dgm:sp3d/>
+    <dgm:txPr/>
+    <dgm:style>
+      <a:lnRef idx="2">
+        <a:scrgbClr r="0" g="0" b="0"/>
+      </a:lnRef>
+      <a:fillRef idx="0">
+        <a:scrgbClr r="0" g="0" b="0"/>
+      </a:fillRef>
+      <a:effectRef idx="0">
+        <a:scrgbClr r="0" g="0" b="0"/>
+      </a:effectRef>
+      <a:fontRef idx="minor"/>
+    </dgm:style>
+  </dgm:styleLbl>
+  <dgm:styleLbl name="parChTrans1D3">
+    <dgm:scene3d>
+      <a:camera prst="orthographicFront"/>
+      <a:lightRig rig="threePt" dir="t"/>
+    </dgm:scene3d>
+    <dgm:sp3d/>
+    <dgm:txPr/>
+    <dgm:style>
+      <a:lnRef idx="2">
+        <a:scrgbClr r="0" g="0" b="0"/>
+      </a:lnRef>
+      <a:fillRef idx="0">
+        <a:scrgbClr r="0" g="0" b="0"/>
+      </a:fillRef>
+      <a:effectRef idx="0">
+        <a:scrgbClr r="0" g="0" b="0"/>
+      </a:effectRef>
+      <a:fontRef idx="minor"/>
+    </dgm:style>
+  </dgm:styleLbl>
+  <dgm:styleLbl name="parChTrans1D4">
+    <dgm:scene3d>
+      <a:camera prst="orthographicFront"/>
+      <a:lightRig rig="threePt" dir="t"/>
+    </dgm:scene3d>
+    <dgm:sp3d/>
+    <dgm:txPr/>
+    <dgm:style>
+      <a:lnRef idx="2">
+        <a:scrgbClr r="0" g="0" b="0"/>
+      </a:lnRef>
+      <a:fillRef idx="0">
+        <a:scrgbClr r="0" g="0" b="0"/>
+      </a:fillRef>
+      <a:effectRef idx="0">
+        <a:scrgbClr r="0" g="0" b="0"/>
+      </a:effectRef>
+      <a:fontRef idx="minor"/>
+    </dgm:style>
+  </dgm:styleLbl>
+  <dgm:styleLbl name="fgAcc1">
+    <dgm:scene3d>
+      <a:camera prst="orthographicFront"/>
+      <a:lightRig rig="threePt" dir="t"/>
+    </dgm:scene3d>
+    <dgm:sp3d/>
+    <dgm:txPr/>
+    <dgm:style>
+      <a:lnRef idx="2">
+        <a:scrgbClr r="0" g="0" b="0"/>
+      </a:lnRef>
+      <a:fillRef idx="1">
+        <a:scrgbClr r="0" g="0" b="0"/>
+      </a:fillRef>
+      <a:effectRef idx="0">
+        <a:scrgbClr r="0" g="0" b="0"/>
+      </a:effectRef>
+      <a:fontRef idx="minor"/>
+    </dgm:style>
+  </dgm:styleLbl>
+  <dgm:styleLbl name="conFgAcc1">
+    <dgm:scene3d>
+      <a:camera prst="orthographicFront"/>
+      <a:lightRig rig="threePt" dir="t"/>
+    </dgm:scene3d>
+    <dgm:sp3d/>
+    <dgm:txPr/>
+    <dgm:style>
+      <a:lnRef idx="2">
+        <a:scrgbClr r="0" g="0" b="0"/>
+      </a:lnRef>
+      <a:fillRef idx="1">
+        <a:scrgbClr r="0" g="0" b="0"/>
+      </a:fillRef>
+      <a:effectRef idx="0">
+        <a:scrgbClr r="0" g="0" b="0"/>
+      </a:effectRef>
+      <a:fontRef idx="minor"/>
+    </dgm:style>
+  </dgm:styleLbl>
+  <dgm:styleLbl name="alignAcc1">
+    <dgm:scene3d>
+      <a:camera prst="orthographicFront"/>
+      <a:lightRig rig="threePt" dir="t"/>
+    </dgm:scene3d>
+    <dgm:sp3d/>
+    <dgm:txPr/>
+    <dgm:style>
+      <a:lnRef idx="2">
+        <a:scrgbClr r="0" g="0" b="0"/>
+      </a:lnRef>
+      <a:fillRef idx="1">
+        <a:scrgbClr r="0" g="0" b="0"/>
+      </a:fillRef>
+      <a:effectRef idx="0">
+        <a:scrgbClr r="0" g="0" b="0"/>
+      </a:effectRef>
+      <a:fontRef idx="minor"/>
+    </dgm:style>
+  </dgm:styleLbl>
+  <dgm:styleLbl name="trAlignAcc1">
+    <dgm:scene3d>
+      <a:camera prst="orthographicFront"/>
+      <a:lightRig rig="threePt" dir="t"/>
+    </dgm:scene3d>
+    <dgm:sp3d/>
+    <dgm:txPr/>
+    <dgm:style>
+      <a:lnRef idx="1">
+        <a:scrgbClr r="0" g="0" b="0"/>
+      </a:lnRef>
+      <a:fillRef idx="1">
+        <a:scrgbClr r="0" g="0" b="0"/>
+      </a:fillRef>
+      <a:effectRef idx="0">
+        <a:scrgbClr r="0" g="0" b="0"/>
+      </a:effectRef>
+      <a:fontRef idx="minor"/>
+    </dgm:style>
+  </dgm:styleLbl>
+  <dgm:styleLbl name="bgAcc1">
+    <dgm:scene3d>
+      <a:camera prst="orthographicFront"/>
+      <a:lightRig rig="threePt" dir="t"/>
+    </dgm:scene3d>
+    <dgm:sp3d/>
+    <dgm:txPr/>
+    <dgm:style>
+      <a:lnRef idx="2">
+        <a:scrgbClr r="0" g="0" b="0"/>
+      </a:lnRef>
+      <a:fillRef idx="1">
+        <a:scrgbClr r="0" g="0" b="0"/>
+      </a:fillRef>
+      <a:effectRef idx="0">
+        <a:scrgbClr r="0" g="0" b="0"/>
+      </a:effectRef>
+      <a:fontRef idx="minor"/>
+    </dgm:style>
+  </dgm:styleLbl>
+  <dgm:styleLbl name="solidFgAcc1">
+    <dgm:scene3d>
+      <a:camera prst="orthographicFront"/>
+      <a:lightRig rig="threePt" dir="t"/>
+    </dgm:scene3d>
+    <dgm:sp3d/>
+    <dgm:txPr/>
+    <dgm:style>
+      <a:lnRef idx="2">
+        <a:scrgbClr r="0" g="0" b="0"/>
+      </a:lnRef>
+      <a:fillRef idx="1">
+        <a:scrgbClr r="0" g="0" b="0"/>
+      </a:fillRef>
+      <a:effectRef idx="0">
+        <a:scrgbClr r="0" g="0" b="0"/>
+      </a:effectRef>
+      <a:fontRef idx="minor"/>
+    </dgm:style>
+  </dgm:styleLbl>
+  <dgm:styleLbl name="solidAlignAcc1">
+    <dgm:scene3d>
+      <a:camera prst="orthographicFront"/>
+      <a:lightRig rig="threePt" dir="t"/>
+    </dgm:scene3d>
+    <dgm:sp3d/>
+    <dgm:txPr/>
+    <dgm:style>
+      <a:lnRef idx="2">
+        <a:scrgbClr r="0" g="0" b="0"/>
+      </a:lnRef>
+      <a:fillRef idx="1">
+        <a:scrgbClr r="0" g="0" b="0"/>
+      </a:fillRef>
+      <a:effectRef idx="0">
+        <a:scrgbClr r="0" g="0" b="0"/>
+      </a:effectRef>
+      <a:fontRef idx="minor"/>
+    </dgm:style>
+  </dgm:styleLbl>
+  <dgm:styleLbl name="solidBgAcc1">
+    <dgm:scene3d>
+      <a:camera prst="orthographicFront"/>
+      <a:lightRig rig="threePt" dir="t"/>
+    </dgm:scene3d>
+    <dgm:sp3d/>
+    <dgm:txPr/>
+    <dgm:style>
+      <a:lnRef idx="2">
+        <a:scrgbClr r="0" g="0" b="0"/>
+      </a:lnRef>
+      <a:fillRef idx="1">
+        <a:scrgbClr r="0" g="0" b="0"/>
+      </a:fillRef>
+      <a:effectRef idx="0">
+        <a:scrgbClr r="0" g="0" b="0"/>
+      </a:effectRef>
+      <a:fontRef idx="minor"/>
+    </dgm:style>
+  </dgm:styleLbl>
+  <dgm:styleLbl name="fgAccFollowNode1">
+    <dgm:scene3d>
+      <a:camera prst="orthographicFront"/>
+      <a:lightRig rig="threePt" dir="t"/>
+    </dgm:scene3d>
+    <dgm:sp3d/>
+    <dgm:txPr/>
+    <dgm:style>
+      <a:lnRef idx="2">
+        <a:scrgbClr r="0" g="0" b="0"/>
+      </a:lnRef>
+      <a:fillRef idx="1">
+        <a:scrgbClr r="0" g="0" b="0"/>
+      </a:fillRef>
+      <a:effectRef idx="0">
+        <a:scrgbClr r="0" g="0" b="0"/>
+      </a:effectRef>
+      <a:fontRef idx="minor"/>
+    </dgm:style>
+  </dgm:styleLbl>
+  <dgm:styleLbl name="alignAccFollowNode1">
+    <dgm:scene3d>
+      <a:camera prst="orthographicFront"/>
+      <a:lightRig rig="threePt" dir="t"/>
+    </dgm:scene3d>
+    <dgm:sp3d/>
+    <dgm:txPr/>
+    <dgm:style>
+      <a:lnRef idx="2">
+        <a:scrgbClr r="0" g="0" b="0"/>
+      </a:lnRef>
+      <a:fillRef idx="1">
+        <a:scrgbClr r="0" g="0" b="0"/>
+      </a:fillRef>
+      <a:effectRef idx="0">
+        <a:scrgbClr r="0" g="0" b="0"/>
+      </a:effectRef>
+      <a:fontRef idx="minor"/>
+    </dgm:style>
+  </dgm:styleLbl>
+  <dgm:styleLbl name="bgAccFollowNode1">
+    <dgm:scene3d>
+      <a:camera prst="orthographicFront"/>
+      <a:lightRig rig="threePt" dir="t"/>
+    </dgm:scene3d>
+    <dgm:sp3d/>
+    <dgm:txPr/>
+    <dgm:style>
+      <a:lnRef idx="2">
+        <a:scrgbClr r="0" g="0" b="0"/>
+      </a:lnRef>
+      <a:fillRef idx="1">
+        <a:scrgbClr r="0" g="0" b="0"/>
+      </a:fillRef>
+      <a:effectRef idx="0">
+        <a:scrgbClr r="0" g="0" b="0"/>
+      </a:effectRef>
+      <a:fontRef idx="minor"/>
+    </dgm:style>
+  </dgm:styleLbl>
+  <dgm:styleLbl name="fgAcc0">
+    <dgm:scene3d>
+      <a:camera prst="orthographicFront"/>
+      <a:lightRig rig="threePt" dir="t"/>
+    </dgm:scene3d>
+    <dgm:sp3d/>
+    <dgm:txPr/>
+    <dgm:style>
+      <a:lnRef idx="2">
+        <a:scrgbClr r="0" g="0" b="0"/>
+      </a:lnRef>
+      <a:fillRef idx="1">
+        <a:scrgbClr r="0" g="0" b="0"/>
+      </a:fillRef>
+      <a:effectRef idx="0">
+        <a:scrgbClr r="0" g="0" b="0"/>
+      </a:effectRef>
+      <a:fontRef idx="minor"/>
+    </dgm:style>
+  </dgm:styleLbl>
+  <dgm:styleLbl name="fgAcc2">
+    <dgm:scene3d>
+      <a:camera prst="orthographicFront"/>
+      <a:lightRig rig="threePt" dir="t"/>
+    </dgm:scene3d>
+    <dgm:sp3d/>
+    <dgm:txPr/>
+    <dgm:style>
+      <a:lnRef idx="2">
+        <a:scrgbClr r="0" g="0" b="0"/>
+      </a:lnRef>
+      <a:fillRef idx="1">
+        <a:scrgbClr r="0" g="0" b="0"/>
+      </a:fillRef>
+      <a:effectRef idx="0">
+        <a:scrgbClr r="0" g="0" b="0"/>
+      </a:effectRef>
+      <a:fontRef idx="minor"/>
+    </dgm:style>
+  </dgm:styleLbl>
+  <dgm:styleLbl name="fgAcc3">
+    <dgm:scene3d>
+      <a:camera prst="orthographicFront"/>
+      <a:lightRig rig="threePt" dir="t"/>
+    </dgm:scene3d>
+    <dgm:sp3d/>
+    <dgm:txPr/>
+    <dgm:style>
+      <a:lnRef idx="2">
+        <a:scrgbClr r="0" g="0" b="0"/>
+      </a:lnRef>
+      <a:fillRef idx="1">
+        <a:scrgbClr r="0" g="0" b="0"/>
+      </a:fillRef>
+      <a:effectRef idx="0">
+        <a:scrgbClr r="0" g="0" b="0"/>
+      </a:effectRef>
+      <a:fontRef idx="minor"/>
+    </dgm:style>
+  </dgm:styleLbl>
+  <dgm:styleLbl name="fgAcc4">
+    <dgm:scene3d>
+      <a:camera prst="orthographicFront"/>
+      <a:lightRig rig="threePt" dir="t"/>
+    </dgm:scene3d>
+    <dgm:sp3d/>
+    <dgm:txPr/>
+    <dgm:style>
+      <a:lnRef idx="2">
+        <a:scrgbClr r="0" g="0" b="0"/>
+      </a:lnRef>
+      <a:fillRef idx="1">
+        <a:scrgbClr r="0" g="0" b="0"/>
+      </a:fillRef>
+      <a:effectRef idx="0">
+        <a:scrgbClr r="0" g="0" b="0"/>
+      </a:effectRef>
+      <a:fontRef idx="minor"/>
+    </dgm:style>
+  </dgm:styleLbl>
+  <dgm:styleLbl name="bgShp">
+    <dgm:scene3d>
+      <a:camera prst="orthographicFront"/>
+      <a:lightRig rig="threePt" dir="t"/>
+    </dgm:scene3d>
+    <dgm:sp3d/>
+    <dgm:txPr/>
+    <dgm:style>
+      <a:lnRef idx="0">
+        <a:scrgbClr r="0" g="0" b="0"/>
+      </a:lnRef>
+      <a:fillRef idx="1">
+        <a:scrgbClr r="0" g="0" b="0"/>
+      </a:fillRef>
+      <a:effectRef idx="0">
+        <a:scrgbClr r="0" g="0" b="0"/>
+      </a:effectRef>
+      <a:fontRef idx="minor"/>
+    </dgm:style>
+  </dgm:styleLbl>
+  <dgm:styleLbl name="dkBgShp">
+    <dgm:scene3d>
+      <a:camera prst="orthographicFront"/>
+      <a:lightRig rig="threePt" dir="t"/>
+    </dgm:scene3d>
+    <dgm:sp3d/>
+    <dgm:txPr/>
+    <dgm:style>
+      <a:lnRef idx="0">
+        <a:scrgbClr r="0" g="0" b="0"/>
+      </a:lnRef>
+      <a:fillRef idx="1">
+        <a:scrgbClr r="0" g="0" b="0"/>
+      </a:fillRef>
+      <a:effectRef idx="0">
+        <a:scrgbClr r="0" g="0" b="0"/>
+      </a:effectRef>
+      <a:fontRef idx="minor"/>
+    </dgm:style>
+  </dgm:styleLbl>
+  <dgm:styleLbl name="trBgShp">
+    <dgm:scene3d>
+      <a:camera prst="orthographicFront"/>
+      <a:lightRig rig="threePt" dir="t"/>
+    </dgm:scene3d>
+    <dgm:sp3d/>
+    <dgm:txPr/>
+    <dgm:style>
+      <a:lnRef idx="0">
+        <a:scrgbClr r="0" g="0" b="0"/>
+      </a:lnRef>
+      <a:fillRef idx="1">
+        <a:scrgbClr r="0" g="0" b="0"/>
+      </a:fillRef>
+      <a:effectRef idx="0">
+        <a:scrgbClr r="0" g="0" b="0"/>
+      </a:effectRef>
+      <a:fontRef idx="minor"/>
+    </dgm:style>
+  </dgm:styleLbl>
+  <dgm:styleLbl name="fgShp">
+    <dgm:scene3d>
+      <a:camera prst="orthographicFront"/>
+      <a:lightRig rig="threePt" dir="t"/>
+    </dgm:scene3d>
+    <dgm:sp3d/>
+    <dgm:txPr/>
+    <dgm:style>
+      <a:lnRef idx="2">
+        <a:scrgbClr r="0" g="0" b="0"/>
+      </a:lnRef>
+      <a:fillRef idx="1">
+        <a:scrgbClr r="0" g="0" b="0"/>
+      </a:fillRef>
+      <a:effectRef idx="0">
+        <a:scrgbClr r="0" g="0" b="0"/>
+      </a:effectRef>
+      <a:fontRef idx="minor"/>
+    </dgm:style>
+  </dgm:styleLbl>
+  <dgm:styleLbl name="revTx">
+    <dgm:scene3d>
+      <a:camera prst="orthographicFront"/>
+      <a:lightRig rig="threePt" dir="t"/>
+    </dgm:scene3d>
+    <dgm:sp3d/>
+    <dgm:txPr/>
+    <dgm:style>
+      <a:lnRef idx="0">
+        <a:scrgbClr r="0" g="0" b="0"/>
+      </a:lnRef>
+      <a:fillRef idx="0">
+        <a:scrgbClr r="0" g="0" b="0"/>
+      </a:fillRef>
+      <a:effectRef idx="0">
+        <a:scrgbClr r="0" g="0" b="0"/>
+      </a:effectRef>
+      <a:fontRef idx="minor"/>
+    </dgm:style>
+  </dgm:styleLbl>
+</dgm:styleDef>
+</file>
+
 <file path=ppt/slideLayouts/slideLayout1.xml><?xml version="1.0" encoding="utf-8"?>
 <p:sldLayout xmlns:a="http://schemas.openxmlformats.org/drawingml/2006/main" xmlns:r="http://schemas.openxmlformats.org/officeDocument/2006/relationships" xmlns:p="http://schemas.openxmlformats.org/presentationml/2006/main" type="title" preserve="1">
   <p:cSld name="Title Slide">
@@ -267,7 +6155,7 @@
           <a:p>
             <a:fld id="{9DFF5FDE-556D-4288-960F-3880543CC0D0}" type="datetimeFigureOut">
               <a:rPr lang="en-US" smtClean="0"/>
-              <a:t>10/7/2026</a:t>
+              <a:t>10/8/2026</a:t>
             </a:fld>
             <a:endParaRPr lang="en-US"/>
           </a:p>
@@ -465,7 +6353,7 @@
           <a:p>
             <a:fld id="{9DFF5FDE-556D-4288-960F-3880543CC0D0}" type="datetimeFigureOut">
               <a:rPr lang="en-US" smtClean="0"/>
-              <a:t>10/7/2026</a:t>
+              <a:t>10/8/2026</a:t>
             </a:fld>
             <a:endParaRPr lang="en-US"/>
           </a:p>
@@ -673,7 +6561,7 @@
           <a:p>
             <a:fld id="{9DFF5FDE-556D-4288-960F-3880543CC0D0}" type="datetimeFigureOut">
               <a:rPr lang="en-US" smtClean="0"/>
-              <a:t>10/7/2026</a:t>
+              <a:t>10/8/2026</a:t>
             </a:fld>
             <a:endParaRPr lang="en-US"/>
           </a:p>
@@ -871,7 +6759,7 @@
           <a:p>
             <a:fld id="{9DFF5FDE-556D-4288-960F-3880543CC0D0}" type="datetimeFigureOut">
               <a:rPr lang="en-US" smtClean="0"/>
-              <a:t>10/7/2026</a:t>
+              <a:t>10/8/2026</a:t>
             </a:fld>
             <a:endParaRPr lang="en-US"/>
           </a:p>
@@ -1146,7 +7034,7 @@
           <a:p>
             <a:fld id="{9DFF5FDE-556D-4288-960F-3880543CC0D0}" type="datetimeFigureOut">
               <a:rPr lang="en-US" smtClean="0"/>
-              <a:t>10/7/2026</a:t>
+              <a:t>10/8/2026</a:t>
             </a:fld>
             <a:endParaRPr lang="en-US"/>
           </a:p>
@@ -1411,7 +7299,7 @@
           <a:p>
             <a:fld id="{9DFF5FDE-556D-4288-960F-3880543CC0D0}" type="datetimeFigureOut">
               <a:rPr lang="en-US" smtClean="0"/>
-              <a:t>10/7/2026</a:t>
+              <a:t>10/8/2026</a:t>
             </a:fld>
             <a:endParaRPr lang="en-US"/>
           </a:p>
@@ -1823,7 +7711,7 @@
           <a:p>
             <a:fld id="{9DFF5FDE-556D-4288-960F-3880543CC0D0}" type="datetimeFigureOut">
               <a:rPr lang="en-US" smtClean="0"/>
-              <a:t>10/7/2026</a:t>
+              <a:t>10/8/2026</a:t>
             </a:fld>
             <a:endParaRPr lang="en-US"/>
           </a:p>
@@ -1964,7 +7852,7 @@
           <a:p>
             <a:fld id="{9DFF5FDE-556D-4288-960F-3880543CC0D0}" type="datetimeFigureOut">
               <a:rPr lang="en-US" smtClean="0"/>
-              <a:t>10/7/2026</a:t>
+              <a:t>10/8/2026</a:t>
             </a:fld>
             <a:endParaRPr lang="en-US"/>
           </a:p>
@@ -2077,7 +7965,7 @@
           <a:p>
             <a:fld id="{9DFF5FDE-556D-4288-960F-3880543CC0D0}" type="datetimeFigureOut">
               <a:rPr lang="en-US" smtClean="0"/>
-              <a:t>10/7/2026</a:t>
+              <a:t>10/8/2026</a:t>
             </a:fld>
             <a:endParaRPr lang="en-US"/>
           </a:p>
@@ -2388,7 +8276,7 @@
           <a:p>
             <a:fld id="{9DFF5FDE-556D-4288-960F-3880543CC0D0}" type="datetimeFigureOut">
               <a:rPr lang="en-US" smtClean="0"/>
-              <a:t>10/7/2026</a:t>
+              <a:t>10/8/2026</a:t>
             </a:fld>
             <a:endParaRPr lang="en-US"/>
           </a:p>
@@ -2676,7 +8564,7 @@
           <a:p>
             <a:fld id="{9DFF5FDE-556D-4288-960F-3880543CC0D0}" type="datetimeFigureOut">
               <a:rPr lang="en-US" smtClean="0"/>
-              <a:t>10/7/2026</a:t>
+              <a:t>10/8/2026</a:t>
             </a:fld>
             <a:endParaRPr lang="en-US"/>
           </a:p>
@@ -2917,7 +8805,7 @@
           <a:p>
             <a:fld id="{9DFF5FDE-556D-4288-960F-3880543CC0D0}" type="datetimeFigureOut">
               <a:rPr lang="en-US" smtClean="0"/>
-              <a:t>10/7/2026</a:t>
+              <a:t>10/8/2026</a:t>
             </a:fld>
             <a:endParaRPr lang="en-US"/>
           </a:p>
@@ -3358,38 +9246,38 @@
         </p:spPr>
         <p:txBody>
           <a:bodyPr>
-            <a:normAutofit fontScale="90000"/>
+            <a:normAutofit/>
           </a:bodyPr>
           <a:lstStyle/>
           <a:p>
             <a:r>
               <a:rPr lang="en-US" sz="8000" b="1" dirty="0">
-                <a:latin typeface="Times New Roman" panose="02020603050405020304" pitchFamily="18" charset="0"/>
+                <a:latin typeface="+mn-lt"/>
                 <a:cs typeface="Times New Roman" panose="02020603050405020304" pitchFamily="18" charset="0"/>
               </a:rPr>
               <a:t>From On-Premise to Cloud: </a:t>
             </a:r>
             <a:br>
               <a:rPr lang="en-US" b="1" dirty="0">
-                <a:latin typeface="Times New Roman" panose="02020603050405020304" pitchFamily="18" charset="0"/>
+                <a:latin typeface="+mn-lt"/>
                 <a:cs typeface="Times New Roman" panose="02020603050405020304" pitchFamily="18" charset="0"/>
               </a:rPr>
             </a:br>
             <a:br>
               <a:rPr lang="en-US" sz="3200" b="1" dirty="0">
-                <a:latin typeface="Times New Roman" panose="02020603050405020304" pitchFamily="18" charset="0"/>
+                <a:latin typeface="+mn-lt"/>
                 <a:cs typeface="Times New Roman" panose="02020603050405020304" pitchFamily="18" charset="0"/>
               </a:rPr>
             </a:br>
             <a:r>
               <a:rPr lang="en-US" sz="3200" b="1" dirty="0">
-                <a:latin typeface="Times New Roman" panose="02020603050405020304" pitchFamily="18" charset="0"/>
+                <a:latin typeface="+mn-lt"/>
                 <a:cs typeface="Times New Roman" panose="02020603050405020304" pitchFamily="18" charset="0"/>
               </a:rPr>
               <a:t>Lessons Learned from an Enterprise AWS Migration at Fannie Mae</a:t>
             </a:r>
             <a:endParaRPr lang="en-US" sz="3200" dirty="0">
-              <a:latin typeface="Times New Roman" panose="02020603050405020304" pitchFamily="18" charset="0"/>
+              <a:latin typeface="+mn-lt"/>
               <a:cs typeface="Times New Roman" panose="02020603050405020304" pitchFamily="18" charset="0"/>
             </a:endParaRPr>
           </a:p>
@@ -3422,8 +9310,7 @@
           <a:lstStyle/>
           <a:p>
             <a:r>
-              <a:rPr lang="en-US" altLang="zh-CN" dirty="0">
-                <a:latin typeface="Times New Roman" panose="02020603050405020304" pitchFamily="18" charset="0"/>
+              <a:rPr lang="en-US" altLang="zh-CN" b="1" dirty="0">
                 <a:cs typeface="Times New Roman" panose="02020603050405020304" pitchFamily="18" charset="0"/>
               </a:rPr>
               <a:t>Wujian Xue</a:t>
@@ -3431,8 +9318,7 @@
           </a:p>
           <a:p>
             <a:r>
-              <a:rPr lang="en-US" dirty="0">
-                <a:latin typeface="Times New Roman" panose="02020603050405020304" pitchFamily="18" charset="0"/>
+              <a:rPr lang="en-US" b="1" dirty="0">
                 <a:cs typeface="Times New Roman" panose="02020603050405020304" pitchFamily="18" charset="0"/>
               </a:rPr>
               <a:t>Oct 2026</a:t>
@@ -3440,8 +9326,7 @@
           </a:p>
           <a:p>
             <a:r>
-              <a:rPr lang="en-US" dirty="0">
-                <a:latin typeface="Times New Roman" panose="02020603050405020304" pitchFamily="18" charset="0"/>
+              <a:rPr lang="en-US" b="1" dirty="0">
                 <a:cs typeface="Times New Roman" panose="02020603050405020304" pitchFamily="18" charset="0"/>
               </a:rPr>
               <a:t>Cincinnati, OH</a:t>
@@ -3453,6 +9338,599 @@
     <p:extLst>
       <p:ext uri="{BB962C8B-B14F-4D97-AF65-F5344CB8AC3E}">
         <p14:creationId xmlns:p14="http://schemas.microsoft.com/office/powerpoint/2010/main" val="2572152849"/>
+      </p:ext>
+    </p:extLst>
+  </p:cSld>
+  <p:clrMapOvr>
+    <a:masterClrMapping/>
+  </p:clrMapOvr>
+</p:sld>
+</file>
+
+<file path=ppt/slides/slide10.xml><?xml version="1.0" encoding="utf-8"?>
+<p:sld xmlns:a="http://schemas.openxmlformats.org/drawingml/2006/main" xmlns:r="http://schemas.openxmlformats.org/officeDocument/2006/relationships" xmlns:p="http://schemas.openxmlformats.org/presentationml/2006/main">
+  <p:cSld>
+    <p:spTree>
+      <p:nvGrpSpPr>
+        <p:cNvPr id="1" name=""/>
+        <p:cNvGrpSpPr/>
+        <p:nvPr/>
+      </p:nvGrpSpPr>
+      <p:grpSpPr>
+        <a:xfrm>
+          <a:off x="0" y="0"/>
+          <a:ext cx="0" cy="0"/>
+          <a:chOff x="0" y="0"/>
+          <a:chExt cx="0" cy="0"/>
+        </a:xfrm>
+      </p:grpSpPr>
+      <p:sp>
+        <p:nvSpPr>
+          <p:cNvPr id="2" name="Title 1">
+            <a:extLst>
+              <a:ext uri="{FF2B5EF4-FFF2-40B4-BE49-F238E27FC236}">
+                <a16:creationId xmlns:a16="http://schemas.microsoft.com/office/drawing/2014/main" id="{BDCA0D58-006F-0ED1-D928-9053639D7AE8}"/>
+              </a:ext>
+            </a:extLst>
+          </p:cNvPr>
+          <p:cNvSpPr>
+            <a:spLocks noGrp="1"/>
+          </p:cNvSpPr>
+          <p:nvPr>
+            <p:ph type="title"/>
+          </p:nvPr>
+        </p:nvSpPr>
+        <p:spPr/>
+        <p:txBody>
+          <a:bodyPr/>
+          <a:lstStyle/>
+          <a:p>
+            <a:r>
+              <a:rPr lang="en-US" dirty="0"/>
+              <a:t>Efficiency</a:t>
+            </a:r>
+          </a:p>
+        </p:txBody>
+      </p:sp>
+      <p:sp>
+        <p:nvSpPr>
+          <p:cNvPr id="3" name="Content Placeholder 2">
+            <a:extLst>
+              <a:ext uri="{FF2B5EF4-FFF2-40B4-BE49-F238E27FC236}">
+                <a16:creationId xmlns:a16="http://schemas.microsoft.com/office/drawing/2014/main" id="{F8DC0A5E-A212-3E5A-61F0-5486D95F0C41}"/>
+              </a:ext>
+            </a:extLst>
+          </p:cNvPr>
+          <p:cNvSpPr>
+            <a:spLocks noGrp="1"/>
+          </p:cNvSpPr>
+          <p:nvPr>
+            <p:ph idx="1"/>
+          </p:nvPr>
+        </p:nvSpPr>
+        <p:spPr/>
+        <p:txBody>
+          <a:bodyPr/>
+          <a:lstStyle/>
+          <a:p>
+            <a:endParaRPr lang="en-US"/>
+          </a:p>
+        </p:txBody>
+      </p:sp>
+    </p:spTree>
+    <p:extLst>
+      <p:ext uri="{BB962C8B-B14F-4D97-AF65-F5344CB8AC3E}">
+        <p14:creationId xmlns:p14="http://schemas.microsoft.com/office/powerpoint/2010/main" val="683459612"/>
+      </p:ext>
+    </p:extLst>
+  </p:cSld>
+  <p:clrMapOvr>
+    <a:masterClrMapping/>
+  </p:clrMapOvr>
+</p:sld>
+</file>
+
+<file path=ppt/slides/slide11.xml><?xml version="1.0" encoding="utf-8"?>
+<p:sld xmlns:a="http://schemas.openxmlformats.org/drawingml/2006/main" xmlns:r="http://schemas.openxmlformats.org/officeDocument/2006/relationships" xmlns:p="http://schemas.openxmlformats.org/presentationml/2006/main">
+  <p:cSld>
+    <p:spTree>
+      <p:nvGrpSpPr>
+        <p:cNvPr id="1" name=""/>
+        <p:cNvGrpSpPr/>
+        <p:nvPr/>
+      </p:nvGrpSpPr>
+      <p:grpSpPr>
+        <a:xfrm>
+          <a:off x="0" y="0"/>
+          <a:ext cx="0" cy="0"/>
+          <a:chOff x="0" y="0"/>
+          <a:chExt cx="0" cy="0"/>
+        </a:xfrm>
+      </p:grpSpPr>
+      <p:sp>
+        <p:nvSpPr>
+          <p:cNvPr id="2" name="Title 1">
+            <a:extLst>
+              <a:ext uri="{FF2B5EF4-FFF2-40B4-BE49-F238E27FC236}">
+                <a16:creationId xmlns:a16="http://schemas.microsoft.com/office/drawing/2014/main" id="{1E601B93-71FC-ED4E-DAD1-2DC88351F539}"/>
+              </a:ext>
+            </a:extLst>
+          </p:cNvPr>
+          <p:cNvSpPr>
+            <a:spLocks noGrp="1"/>
+          </p:cNvSpPr>
+          <p:nvPr>
+            <p:ph type="title"/>
+          </p:nvPr>
+        </p:nvSpPr>
+        <p:spPr/>
+        <p:txBody>
+          <a:bodyPr/>
+          <a:lstStyle/>
+          <a:p>
+            <a:r>
+              <a:rPr lang="en-US" altLang="zh-CN" dirty="0"/>
+              <a:t>Merge Tables</a:t>
+            </a:r>
+            <a:endParaRPr lang="en-US" dirty="0"/>
+          </a:p>
+        </p:txBody>
+      </p:sp>
+      <p:sp>
+        <p:nvSpPr>
+          <p:cNvPr id="3" name="Content Placeholder 2">
+            <a:extLst>
+              <a:ext uri="{FF2B5EF4-FFF2-40B4-BE49-F238E27FC236}">
+                <a16:creationId xmlns:a16="http://schemas.microsoft.com/office/drawing/2014/main" id="{BD0A8754-420C-E67C-1B6E-990DE726033A}"/>
+              </a:ext>
+            </a:extLst>
+          </p:cNvPr>
+          <p:cNvSpPr>
+            <a:spLocks noGrp="1"/>
+          </p:cNvSpPr>
+          <p:nvPr>
+            <p:ph idx="1"/>
+          </p:nvPr>
+        </p:nvSpPr>
+        <p:spPr/>
+        <p:txBody>
+          <a:bodyPr/>
+          <a:lstStyle/>
+          <a:p>
+            <a:r>
+              <a:rPr lang="en-US" dirty="0"/>
+              <a:t>concatenation</a:t>
+            </a:r>
+          </a:p>
+        </p:txBody>
+      </p:sp>
+    </p:spTree>
+    <p:extLst>
+      <p:ext uri="{BB962C8B-B14F-4D97-AF65-F5344CB8AC3E}">
+        <p14:creationId xmlns:p14="http://schemas.microsoft.com/office/powerpoint/2010/main" val="2510015937"/>
+      </p:ext>
+    </p:extLst>
+  </p:cSld>
+  <p:clrMapOvr>
+    <a:masterClrMapping/>
+  </p:clrMapOvr>
+</p:sld>
+</file>
+
+<file path=ppt/slides/slide12.xml><?xml version="1.0" encoding="utf-8"?>
+<p:sld xmlns:a="http://schemas.openxmlformats.org/drawingml/2006/main" xmlns:r="http://schemas.openxmlformats.org/officeDocument/2006/relationships" xmlns:p="http://schemas.openxmlformats.org/presentationml/2006/main">
+  <p:cSld>
+    <p:spTree>
+      <p:nvGrpSpPr>
+        <p:cNvPr id="1" name=""/>
+        <p:cNvGrpSpPr/>
+        <p:nvPr/>
+      </p:nvGrpSpPr>
+      <p:grpSpPr>
+        <a:xfrm>
+          <a:off x="0" y="0"/>
+          <a:ext cx="0" cy="0"/>
+          <a:chOff x="0" y="0"/>
+          <a:chExt cx="0" cy="0"/>
+        </a:xfrm>
+      </p:grpSpPr>
+      <p:sp>
+        <p:nvSpPr>
+          <p:cNvPr id="2" name="Title 1">
+            <a:extLst>
+              <a:ext uri="{FF2B5EF4-FFF2-40B4-BE49-F238E27FC236}">
+                <a16:creationId xmlns:a16="http://schemas.microsoft.com/office/drawing/2014/main" id="{B43C6558-4EC7-F455-AEE9-D12FD0A89C62}"/>
+              </a:ext>
+            </a:extLst>
+          </p:cNvPr>
+          <p:cNvSpPr>
+            <a:spLocks noGrp="1"/>
+          </p:cNvSpPr>
+          <p:nvPr>
+            <p:ph type="title"/>
+          </p:nvPr>
+        </p:nvSpPr>
+        <p:spPr/>
+        <p:txBody>
+          <a:bodyPr/>
+          <a:lstStyle/>
+          <a:p>
+            <a:endParaRPr lang="en-US"/>
+          </a:p>
+        </p:txBody>
+      </p:sp>
+      <p:sp>
+        <p:nvSpPr>
+          <p:cNvPr id="3" name="Content Placeholder 2">
+            <a:extLst>
+              <a:ext uri="{FF2B5EF4-FFF2-40B4-BE49-F238E27FC236}">
+                <a16:creationId xmlns:a16="http://schemas.microsoft.com/office/drawing/2014/main" id="{5655E68B-3CB9-4EB7-342D-A9E2A3772252}"/>
+              </a:ext>
+            </a:extLst>
+          </p:cNvPr>
+          <p:cNvSpPr>
+            <a:spLocks noGrp="1"/>
+          </p:cNvSpPr>
+          <p:nvPr>
+            <p:ph idx="1"/>
+          </p:nvPr>
+        </p:nvSpPr>
+        <p:spPr/>
+        <p:txBody>
+          <a:bodyPr/>
+          <a:lstStyle/>
+          <a:p>
+            <a:r>
+              <a:rPr lang="en-US" dirty="0"/>
+              <a:t>What additional value does my approach provide?</a:t>
+            </a:r>
+          </a:p>
+        </p:txBody>
+      </p:sp>
+    </p:spTree>
+    <p:extLst>
+      <p:ext uri="{BB962C8B-B14F-4D97-AF65-F5344CB8AC3E}">
+        <p14:creationId xmlns:p14="http://schemas.microsoft.com/office/powerpoint/2010/main" val="331261954"/>
+      </p:ext>
+    </p:extLst>
+  </p:cSld>
+  <p:clrMapOvr>
+    <a:masterClrMapping/>
+  </p:clrMapOvr>
+</p:sld>
+</file>
+
+<file path=ppt/slides/slide13.xml><?xml version="1.0" encoding="utf-8"?>
+<p:sld xmlns:a="http://schemas.openxmlformats.org/drawingml/2006/main" xmlns:r="http://schemas.openxmlformats.org/officeDocument/2006/relationships" xmlns:p="http://schemas.openxmlformats.org/presentationml/2006/main">
+  <p:cSld>
+    <p:spTree>
+      <p:nvGrpSpPr>
+        <p:cNvPr id="1" name=""/>
+        <p:cNvGrpSpPr/>
+        <p:nvPr/>
+      </p:nvGrpSpPr>
+      <p:grpSpPr>
+        <a:xfrm>
+          <a:off x="0" y="0"/>
+          <a:ext cx="0" cy="0"/>
+          <a:chOff x="0" y="0"/>
+          <a:chExt cx="0" cy="0"/>
+        </a:xfrm>
+      </p:grpSpPr>
+      <p:sp>
+        <p:nvSpPr>
+          <p:cNvPr id="2" name="Title 1">
+            <a:extLst>
+              <a:ext uri="{FF2B5EF4-FFF2-40B4-BE49-F238E27FC236}">
+                <a16:creationId xmlns:a16="http://schemas.microsoft.com/office/drawing/2014/main" id="{9E681912-C0D5-AF85-91B0-7D9532929F7F}"/>
+              </a:ext>
+            </a:extLst>
+          </p:cNvPr>
+          <p:cNvSpPr>
+            <a:spLocks noGrp="1"/>
+          </p:cNvSpPr>
+          <p:nvPr>
+            <p:ph type="title"/>
+          </p:nvPr>
+        </p:nvSpPr>
+        <p:spPr/>
+        <p:txBody>
+          <a:bodyPr/>
+          <a:lstStyle/>
+          <a:p>
+            <a:endParaRPr lang="en-US"/>
+          </a:p>
+        </p:txBody>
+      </p:sp>
+      <p:sp>
+        <p:nvSpPr>
+          <p:cNvPr id="3" name="Content Placeholder 2">
+            <a:extLst>
+              <a:ext uri="{FF2B5EF4-FFF2-40B4-BE49-F238E27FC236}">
+                <a16:creationId xmlns:a16="http://schemas.microsoft.com/office/drawing/2014/main" id="{E48A637E-A23A-F19C-2EC6-9A9B52F8A2BA}"/>
+              </a:ext>
+            </a:extLst>
+          </p:cNvPr>
+          <p:cNvSpPr>
+            <a:spLocks noGrp="1"/>
+          </p:cNvSpPr>
+          <p:nvPr>
+            <p:ph idx="1"/>
+          </p:nvPr>
+        </p:nvSpPr>
+        <p:spPr/>
+        <p:txBody>
+          <a:bodyPr/>
+          <a:lstStyle/>
+          <a:p>
+            <a:r>
+              <a:rPr lang="en-US" dirty="0"/>
+              <a:t>Where do we </a:t>
+            </a:r>
+            <a:r>
+              <a:rPr lang="en-US"/>
+              <a:t>go from there?</a:t>
+            </a:r>
+          </a:p>
+        </p:txBody>
+      </p:sp>
+    </p:spTree>
+    <p:extLst>
+      <p:ext uri="{BB962C8B-B14F-4D97-AF65-F5344CB8AC3E}">
+        <p14:creationId xmlns:p14="http://schemas.microsoft.com/office/powerpoint/2010/main" val="1238321945"/>
+      </p:ext>
+    </p:extLst>
+  </p:cSld>
+  <p:clrMapOvr>
+    <a:masterClrMapping/>
+  </p:clrMapOvr>
+</p:sld>
+</file>
+
+<file path=ppt/slides/slide14.xml><?xml version="1.0" encoding="utf-8"?>
+<p:sld xmlns:a="http://schemas.openxmlformats.org/drawingml/2006/main" xmlns:r="http://schemas.openxmlformats.org/officeDocument/2006/relationships" xmlns:p="http://schemas.openxmlformats.org/presentationml/2006/main">
+  <p:cSld>
+    <p:spTree>
+      <p:nvGrpSpPr>
+        <p:cNvPr id="1" name=""/>
+        <p:cNvGrpSpPr/>
+        <p:nvPr/>
+      </p:nvGrpSpPr>
+      <p:grpSpPr>
+        <a:xfrm>
+          <a:off x="0" y="0"/>
+          <a:ext cx="0" cy="0"/>
+          <a:chOff x="0" y="0"/>
+          <a:chExt cx="0" cy="0"/>
+        </a:xfrm>
+      </p:grpSpPr>
+      <p:sp>
+        <p:nvSpPr>
+          <p:cNvPr id="2" name="Title 1">
+            <a:extLst>
+              <a:ext uri="{FF2B5EF4-FFF2-40B4-BE49-F238E27FC236}">
+                <a16:creationId xmlns:a16="http://schemas.microsoft.com/office/drawing/2014/main" id="{79765071-DC72-93E5-9B2F-5F473699886E}"/>
+              </a:ext>
+            </a:extLst>
+          </p:cNvPr>
+          <p:cNvSpPr>
+            <a:spLocks noGrp="1"/>
+          </p:cNvSpPr>
+          <p:nvPr>
+            <p:ph type="title"/>
+          </p:nvPr>
+        </p:nvSpPr>
+        <p:spPr/>
+        <p:txBody>
+          <a:bodyPr/>
+          <a:lstStyle/>
+          <a:p>
+            <a:r>
+              <a:rPr lang="en-US" altLang="zh-CN" dirty="0"/>
+              <a:t>Reference:</a:t>
+            </a:r>
+            <a:endParaRPr lang="en-US" dirty="0"/>
+          </a:p>
+        </p:txBody>
+      </p:sp>
+      <p:sp>
+        <p:nvSpPr>
+          <p:cNvPr id="3" name="Content Placeholder 2">
+            <a:extLst>
+              <a:ext uri="{FF2B5EF4-FFF2-40B4-BE49-F238E27FC236}">
+                <a16:creationId xmlns:a16="http://schemas.microsoft.com/office/drawing/2014/main" id="{BA3456FF-E78F-8DA1-FCFF-D93708555E23}"/>
+              </a:ext>
+            </a:extLst>
+          </p:cNvPr>
+          <p:cNvSpPr>
+            <a:spLocks noGrp="1"/>
+          </p:cNvSpPr>
+          <p:nvPr>
+            <p:ph idx="1"/>
+          </p:nvPr>
+        </p:nvSpPr>
+        <p:spPr/>
+        <p:txBody>
+          <a:bodyPr>
+            <a:normAutofit/>
+          </a:bodyPr>
+          <a:lstStyle/>
+          <a:p>
+            <a:r>
+              <a:rPr lang="en-US" sz="2000" dirty="0">
+                <a:hlinkClick r:id="rId2"/>
+              </a:rPr>
+              <a:t>AWS </a:t>
+            </a:r>
+            <a:r>
+              <a:rPr lang="en-US" sz="2000" dirty="0" err="1">
+                <a:hlinkClick r:id="rId2"/>
+              </a:rPr>
+              <a:t>re:Invent</a:t>
+            </a:r>
+            <a:r>
+              <a:rPr lang="en-US" sz="2000" dirty="0">
+                <a:hlinkClick r:id="rId2"/>
+              </a:rPr>
+              <a:t> 2021 - Fannie Mae: Migrating at scale without lifting and shifting</a:t>
+            </a:r>
+            <a:endParaRPr lang="en-US" sz="2000" dirty="0"/>
+          </a:p>
+          <a:p>
+            <a:r>
+              <a:rPr lang="en-US" sz="2000" dirty="0">
+                <a:hlinkClick r:id="rId3"/>
+              </a:rPr>
+              <a:t>Fannie Mae’s Digital Transformation Journey with AWS | Amazon Web Services</a:t>
+            </a:r>
+            <a:endParaRPr lang="en-US" sz="2000" dirty="0"/>
+          </a:p>
+          <a:p>
+            <a:r>
+              <a:rPr lang="en-US" sz="2000" dirty="0">
+                <a:hlinkClick r:id="rId4"/>
+              </a:rPr>
+              <a:t>What is a Cloud Migration Strategy? - Cloud Migration Strategy Explained - AWS</a:t>
+            </a:r>
+            <a:endParaRPr lang="en-US" sz="2000" dirty="0"/>
+          </a:p>
+        </p:txBody>
+      </p:sp>
+    </p:spTree>
+    <p:extLst>
+      <p:ext uri="{BB962C8B-B14F-4D97-AF65-F5344CB8AC3E}">
+        <p14:creationId xmlns:p14="http://schemas.microsoft.com/office/powerpoint/2010/main" val="1077489760"/>
+      </p:ext>
+    </p:extLst>
+  </p:cSld>
+  <p:clrMapOvr>
+    <a:masterClrMapping/>
+  </p:clrMapOvr>
+</p:sld>
+</file>
+
+<file path=ppt/slides/slide15.xml><?xml version="1.0" encoding="utf-8"?>
+<p:sld xmlns:a="http://schemas.openxmlformats.org/drawingml/2006/main" xmlns:r="http://schemas.openxmlformats.org/officeDocument/2006/relationships" xmlns:p="http://schemas.openxmlformats.org/presentationml/2006/main">
+  <p:cSld>
+    <p:spTree>
+      <p:nvGrpSpPr>
+        <p:cNvPr id="1" name=""/>
+        <p:cNvGrpSpPr/>
+        <p:nvPr/>
+      </p:nvGrpSpPr>
+      <p:grpSpPr>
+        <a:xfrm>
+          <a:off x="0" y="0"/>
+          <a:ext cx="0" cy="0"/>
+          <a:chOff x="0" y="0"/>
+          <a:chExt cx="0" cy="0"/>
+        </a:xfrm>
+      </p:grpSpPr>
+      <p:sp>
+        <p:nvSpPr>
+          <p:cNvPr id="2" name="Title 1">
+            <a:extLst>
+              <a:ext uri="{FF2B5EF4-FFF2-40B4-BE49-F238E27FC236}">
+                <a16:creationId xmlns:a16="http://schemas.microsoft.com/office/drawing/2014/main" id="{082D5B5A-22EB-F6BE-03B9-DA990AE01051}"/>
+              </a:ext>
+            </a:extLst>
+          </p:cNvPr>
+          <p:cNvSpPr>
+            <a:spLocks noGrp="1"/>
+          </p:cNvSpPr>
+          <p:nvPr>
+            <p:ph type="title"/>
+          </p:nvPr>
+        </p:nvSpPr>
+        <p:spPr/>
+        <p:txBody>
+          <a:bodyPr/>
+          <a:lstStyle/>
+          <a:p>
+            <a:r>
+              <a:rPr lang="en-US" dirty="0"/>
+              <a:t>Q&amp;A</a:t>
+            </a:r>
+          </a:p>
+        </p:txBody>
+      </p:sp>
+      <p:sp>
+        <p:nvSpPr>
+          <p:cNvPr id="3" name="Content Placeholder 2">
+            <a:extLst>
+              <a:ext uri="{FF2B5EF4-FFF2-40B4-BE49-F238E27FC236}">
+                <a16:creationId xmlns:a16="http://schemas.microsoft.com/office/drawing/2014/main" id="{BA79DD26-0915-7E46-B9E9-A23C1002591E}"/>
+              </a:ext>
+            </a:extLst>
+          </p:cNvPr>
+          <p:cNvSpPr>
+            <a:spLocks noGrp="1"/>
+          </p:cNvSpPr>
+          <p:nvPr>
+            <p:ph idx="1"/>
+          </p:nvPr>
+        </p:nvSpPr>
+        <p:spPr>
+          <a:xfrm>
+            <a:off x="5029200" y="5414009"/>
+            <a:ext cx="1173480" cy="332423"/>
+          </a:xfrm>
+        </p:spPr>
+        <p:txBody>
+          <a:bodyPr>
+            <a:normAutofit fontScale="62500" lnSpcReduction="20000"/>
+          </a:bodyPr>
+          <a:lstStyle/>
+          <a:p>
+            <a:pPr marL="0" indent="0">
+              <a:buNone/>
+            </a:pPr>
+            <a:r>
+              <a:rPr lang="en-US" dirty="0"/>
+              <a:t>My </a:t>
+            </a:r>
+            <a:r>
+              <a:rPr lang="en-US" dirty="0" err="1"/>
+              <a:t>Github</a:t>
+            </a:r>
+            <a:endParaRPr lang="en-US" dirty="0"/>
+          </a:p>
+        </p:txBody>
+      </p:sp>
+      <p:pic>
+        <p:nvPicPr>
+          <p:cNvPr id="5" name="Picture 4">
+            <a:extLst>
+              <a:ext uri="{FF2B5EF4-FFF2-40B4-BE49-F238E27FC236}">
+                <a16:creationId xmlns:a16="http://schemas.microsoft.com/office/drawing/2014/main" id="{EDC50AFE-4C70-3BD6-2457-93F253C69C25}"/>
+              </a:ext>
+            </a:extLst>
+          </p:cNvPr>
+          <p:cNvPicPr>
+            <a:picLocks noChangeAspect="1"/>
+          </p:cNvPicPr>
+          <p:nvPr/>
+        </p:nvPicPr>
+        <p:blipFill>
+          <a:blip r:embed="rId2"/>
+          <a:stretch>
+            <a:fillRect/>
+          </a:stretch>
+        </p:blipFill>
+        <p:spPr>
+          <a:xfrm>
+            <a:off x="4366260" y="2468880"/>
+            <a:ext cx="2499360" cy="2499360"/>
+          </a:xfrm>
+          <a:prstGeom prst="rect">
+            <a:avLst/>
+          </a:prstGeom>
+        </p:spPr>
+      </p:pic>
+    </p:spTree>
+    <p:extLst>
+      <p:ext uri="{BB962C8B-B14F-4D97-AF65-F5344CB8AC3E}">
+        <p14:creationId xmlns:p14="http://schemas.microsoft.com/office/powerpoint/2010/main" val="354203763"/>
       </p:ext>
     </p:extLst>
   </p:cSld>
@@ -3654,7 +10132,7 @@
         </p:blipFill>
         <p:spPr>
           <a:xfrm>
-            <a:off x="1573092" y="2906191"/>
+            <a:off x="1463364" y="2278303"/>
             <a:ext cx="2638011" cy="1384610"/>
           </a:xfrm>
           <a:prstGeom prst="rect">
@@ -3684,7 +10162,7 @@
         </p:blipFill>
         <p:spPr>
           <a:xfrm>
-            <a:off x="5716740" y="3167595"/>
+            <a:off x="1716240" y="4115591"/>
             <a:ext cx="1290890" cy="861801"/>
           </a:xfrm>
           <a:prstGeom prst="rect">
@@ -3692,6 +10170,71 @@
           </a:prstGeom>
         </p:spPr>
       </p:pic>
+      <p:pic>
+        <p:nvPicPr>
+          <p:cNvPr id="6" name="Picture 5">
+            <a:extLst>
+              <a:ext uri="{FF2B5EF4-FFF2-40B4-BE49-F238E27FC236}">
+                <a16:creationId xmlns:a16="http://schemas.microsoft.com/office/drawing/2014/main" id="{8D1A128A-3E1F-2F81-712A-3809EA2ACB2A}"/>
+              </a:ext>
+            </a:extLst>
+          </p:cNvPr>
+          <p:cNvPicPr>
+            <a:picLocks noChangeAspect="1"/>
+          </p:cNvPicPr>
+          <p:nvPr/>
+        </p:nvPicPr>
+        <p:blipFill>
+          <a:blip r:embed="rId4"/>
+          <a:stretch>
+            <a:fillRect/>
+          </a:stretch>
+        </p:blipFill>
+        <p:spPr>
+          <a:xfrm>
+            <a:off x="6969180" y="1690688"/>
+            <a:ext cx="4512420" cy="3736848"/>
+          </a:xfrm>
+          <a:prstGeom prst="rect">
+            <a:avLst/>
+          </a:prstGeom>
+        </p:spPr>
+      </p:pic>
+      <p:sp>
+        <p:nvSpPr>
+          <p:cNvPr id="8" name="TextBox 7">
+            <a:extLst>
+              <a:ext uri="{FF2B5EF4-FFF2-40B4-BE49-F238E27FC236}">
+                <a16:creationId xmlns:a16="http://schemas.microsoft.com/office/drawing/2014/main" id="{1302E16F-7A83-3FFA-BF0B-8B32BA61716B}"/>
+              </a:ext>
+            </a:extLst>
+          </p:cNvPr>
+          <p:cNvSpPr txBox="1"/>
+          <p:nvPr/>
+        </p:nvSpPr>
+        <p:spPr>
+          <a:xfrm>
+            <a:off x="7985760" y="931768"/>
+            <a:ext cx="2950755" cy="369332"/>
+          </a:xfrm>
+          <a:prstGeom prst="rect">
+            <a:avLst/>
+          </a:prstGeom>
+          <a:noFill/>
+        </p:spPr>
+        <p:txBody>
+          <a:bodyPr wrap="square">
+            <a:spAutoFit/>
+          </a:bodyPr>
+          <a:lstStyle/>
+          <a:p>
+            <a:r>
+              <a:rPr lang="en-US" dirty="0"/>
+              <a:t>7 Rs in AWS Cloud Migration</a:t>
+            </a:r>
+          </a:p>
+        </p:txBody>
+      </p:sp>
     </p:spTree>
     <p:extLst>
       <p:ext uri="{BB962C8B-B14F-4D97-AF65-F5344CB8AC3E}">
@@ -3829,16 +10372,575 @@
           <a:bodyPr/>
           <a:lstStyle/>
           <a:p>
-            <a:endParaRPr lang="en-US"/>
+            <a:r>
+              <a:rPr lang="en-US" dirty="0"/>
+              <a:t>Steps for refactoring</a:t>
+            </a:r>
+          </a:p>
+        </p:txBody>
+      </p:sp>
+      <p:graphicFrame>
+        <p:nvGraphicFramePr>
+          <p:cNvPr id="10" name="Content Placeholder 9">
+            <a:extLst>
+              <a:ext uri="{FF2B5EF4-FFF2-40B4-BE49-F238E27FC236}">
+                <a16:creationId xmlns:a16="http://schemas.microsoft.com/office/drawing/2014/main" id="{A65D244A-BC2B-A613-E67C-48CF73C5F636}"/>
+              </a:ext>
+            </a:extLst>
+          </p:cNvPr>
+          <p:cNvGraphicFramePr>
+            <a:graphicFrameLocks noGrp="1"/>
+          </p:cNvGraphicFramePr>
+          <p:nvPr>
+            <p:ph idx="1"/>
+            <p:extLst>
+              <p:ext uri="{D42A27DB-BD31-4B8C-83A1-F6EECF244321}">
+                <p14:modId xmlns:p14="http://schemas.microsoft.com/office/powerpoint/2010/main" val="3365300088"/>
+              </p:ext>
+            </p:extLst>
+          </p:nvPr>
+        </p:nvGraphicFramePr>
+        <p:xfrm>
+          <a:off x="838200" y="1525848"/>
+          <a:ext cx="10111740" cy="1880292"/>
+        </p:xfrm>
+        <a:graphic>
+          <a:graphicData uri="http://schemas.openxmlformats.org/drawingml/2006/diagram">
+            <dgm:relIds xmlns:dgm="http://schemas.openxmlformats.org/drawingml/2006/diagram" xmlns:r="http://schemas.openxmlformats.org/officeDocument/2006/relationships" r:dm="rId2" r:lo="rId3" r:qs="rId4" r:cs="rId5"/>
+          </a:graphicData>
+        </a:graphic>
+      </p:graphicFrame>
+      <p:sp>
+        <p:nvSpPr>
+          <p:cNvPr id="12" name="Content Placeholder 2">
+            <a:extLst>
+              <a:ext uri="{FF2B5EF4-FFF2-40B4-BE49-F238E27FC236}">
+                <a16:creationId xmlns:a16="http://schemas.microsoft.com/office/drawing/2014/main" id="{B6AB3908-57C4-C0B7-4C30-8AC2917A9C16}"/>
+              </a:ext>
+            </a:extLst>
+          </p:cNvPr>
+          <p:cNvSpPr txBox="1">
+            <a:spLocks/>
+          </p:cNvSpPr>
+          <p:nvPr/>
+        </p:nvSpPr>
+        <p:spPr>
+          <a:xfrm>
+            <a:off x="495300" y="3230881"/>
+            <a:ext cx="2578244" cy="1653540"/>
+          </a:xfrm>
+          <a:prstGeom prst="rect">
+            <a:avLst/>
+          </a:prstGeom>
+        </p:spPr>
+        <p:txBody>
+          <a:bodyPr vert="horz" lIns="91440" tIns="45720" rIns="91440" bIns="45720" rtlCol="0">
+            <a:normAutofit fontScale="92500" lnSpcReduction="10000"/>
+          </a:bodyPr>
+          <a:lstStyle>
+            <a:lvl1pPr marL="228600" indent="-228600" algn="l" defTabSz="914400" rtl="0" eaLnBrk="1" latinLnBrk="0" hangingPunct="1">
+              <a:lnSpc>
+                <a:spcPct val="90000"/>
+              </a:lnSpc>
+              <a:spcBef>
+                <a:spcPts val="1000"/>
+              </a:spcBef>
+              <a:buFont typeface="Arial" panose="020B0604020202020204" pitchFamily="34" charset="0"/>
+              <a:buChar char="•"/>
+              <a:defRPr sz="2800" kern="1200">
+                <a:solidFill>
+                  <a:schemeClr val="tx1"/>
+                </a:solidFill>
+                <a:latin typeface="+mn-lt"/>
+                <a:ea typeface="+mn-ea"/>
+                <a:cs typeface="+mn-cs"/>
+              </a:defRPr>
+            </a:lvl1pPr>
+            <a:lvl2pPr marL="685800" indent="-228600" algn="l" defTabSz="914400" rtl="0" eaLnBrk="1" latinLnBrk="0" hangingPunct="1">
+              <a:lnSpc>
+                <a:spcPct val="90000"/>
+              </a:lnSpc>
+              <a:spcBef>
+                <a:spcPts val="500"/>
+              </a:spcBef>
+              <a:buFont typeface="Arial" panose="020B0604020202020204" pitchFamily="34" charset="0"/>
+              <a:buChar char="•"/>
+              <a:defRPr sz="2400" kern="1200">
+                <a:solidFill>
+                  <a:schemeClr val="tx1"/>
+                </a:solidFill>
+                <a:latin typeface="+mn-lt"/>
+                <a:ea typeface="+mn-ea"/>
+                <a:cs typeface="+mn-cs"/>
+              </a:defRPr>
+            </a:lvl2pPr>
+            <a:lvl3pPr marL="1143000" indent="-228600" algn="l" defTabSz="914400" rtl="0" eaLnBrk="1" latinLnBrk="0" hangingPunct="1">
+              <a:lnSpc>
+                <a:spcPct val="90000"/>
+              </a:lnSpc>
+              <a:spcBef>
+                <a:spcPts val="500"/>
+              </a:spcBef>
+              <a:buFont typeface="Arial" panose="020B0604020202020204" pitchFamily="34" charset="0"/>
+              <a:buChar char="•"/>
+              <a:defRPr sz="2000" kern="1200">
+                <a:solidFill>
+                  <a:schemeClr val="tx1"/>
+                </a:solidFill>
+                <a:latin typeface="+mn-lt"/>
+                <a:ea typeface="+mn-ea"/>
+                <a:cs typeface="+mn-cs"/>
+              </a:defRPr>
+            </a:lvl3pPr>
+            <a:lvl4pPr marL="1600200" indent="-228600" algn="l" defTabSz="914400" rtl="0" eaLnBrk="1" latinLnBrk="0" hangingPunct="1">
+              <a:lnSpc>
+                <a:spcPct val="90000"/>
+              </a:lnSpc>
+              <a:spcBef>
+                <a:spcPts val="500"/>
+              </a:spcBef>
+              <a:buFont typeface="Arial" panose="020B0604020202020204" pitchFamily="34" charset="0"/>
+              <a:buChar char="•"/>
+              <a:defRPr sz="1800" kern="1200">
+                <a:solidFill>
+                  <a:schemeClr val="tx1"/>
+                </a:solidFill>
+                <a:latin typeface="+mn-lt"/>
+                <a:ea typeface="+mn-ea"/>
+                <a:cs typeface="+mn-cs"/>
+              </a:defRPr>
+            </a:lvl4pPr>
+            <a:lvl5pPr marL="2057400" indent="-228600" algn="l" defTabSz="914400" rtl="0" eaLnBrk="1" latinLnBrk="0" hangingPunct="1">
+              <a:lnSpc>
+                <a:spcPct val="90000"/>
+              </a:lnSpc>
+              <a:spcBef>
+                <a:spcPts val="500"/>
+              </a:spcBef>
+              <a:buFont typeface="Arial" panose="020B0604020202020204" pitchFamily="34" charset="0"/>
+              <a:buChar char="•"/>
+              <a:defRPr sz="1800" kern="1200">
+                <a:solidFill>
+                  <a:schemeClr val="tx1"/>
+                </a:solidFill>
+                <a:latin typeface="+mn-lt"/>
+                <a:ea typeface="+mn-ea"/>
+                <a:cs typeface="+mn-cs"/>
+              </a:defRPr>
+            </a:lvl5pPr>
+            <a:lvl6pPr marL="2514600" indent="-228600" algn="l" defTabSz="914400" rtl="0" eaLnBrk="1" latinLnBrk="0" hangingPunct="1">
+              <a:lnSpc>
+                <a:spcPct val="90000"/>
+              </a:lnSpc>
+              <a:spcBef>
+                <a:spcPts val="500"/>
+              </a:spcBef>
+              <a:buFont typeface="Arial" panose="020B0604020202020204" pitchFamily="34" charset="0"/>
+              <a:buChar char="•"/>
+              <a:defRPr sz="1800" kern="1200">
+                <a:solidFill>
+                  <a:schemeClr val="tx1"/>
+                </a:solidFill>
+                <a:latin typeface="+mn-lt"/>
+                <a:ea typeface="+mn-ea"/>
+                <a:cs typeface="+mn-cs"/>
+              </a:defRPr>
+            </a:lvl6pPr>
+            <a:lvl7pPr marL="2971800" indent="-228600" algn="l" defTabSz="914400" rtl="0" eaLnBrk="1" latinLnBrk="0" hangingPunct="1">
+              <a:lnSpc>
+                <a:spcPct val="90000"/>
+              </a:lnSpc>
+              <a:spcBef>
+                <a:spcPts val="500"/>
+              </a:spcBef>
+              <a:buFont typeface="Arial" panose="020B0604020202020204" pitchFamily="34" charset="0"/>
+              <a:buChar char="•"/>
+              <a:defRPr sz="1800" kern="1200">
+                <a:solidFill>
+                  <a:schemeClr val="tx1"/>
+                </a:solidFill>
+                <a:latin typeface="+mn-lt"/>
+                <a:ea typeface="+mn-ea"/>
+                <a:cs typeface="+mn-cs"/>
+              </a:defRPr>
+            </a:lvl7pPr>
+            <a:lvl8pPr marL="3429000" indent="-228600" algn="l" defTabSz="914400" rtl="0" eaLnBrk="1" latinLnBrk="0" hangingPunct="1">
+              <a:lnSpc>
+                <a:spcPct val="90000"/>
+              </a:lnSpc>
+              <a:spcBef>
+                <a:spcPts val="500"/>
+              </a:spcBef>
+              <a:buFont typeface="Arial" panose="020B0604020202020204" pitchFamily="34" charset="0"/>
+              <a:buChar char="•"/>
+              <a:defRPr sz="1800" kern="1200">
+                <a:solidFill>
+                  <a:schemeClr val="tx1"/>
+                </a:solidFill>
+                <a:latin typeface="+mn-lt"/>
+                <a:ea typeface="+mn-ea"/>
+                <a:cs typeface="+mn-cs"/>
+              </a:defRPr>
+            </a:lvl8pPr>
+            <a:lvl9pPr marL="3886200" indent="-228600" algn="l" defTabSz="914400" rtl="0" eaLnBrk="1" latinLnBrk="0" hangingPunct="1">
+              <a:lnSpc>
+                <a:spcPct val="90000"/>
+              </a:lnSpc>
+              <a:spcBef>
+                <a:spcPts val="500"/>
+              </a:spcBef>
+              <a:buFont typeface="Arial" panose="020B0604020202020204" pitchFamily="34" charset="0"/>
+              <a:buChar char="•"/>
+              <a:defRPr sz="1800" kern="1200">
+                <a:solidFill>
+                  <a:schemeClr val="tx1"/>
+                </a:solidFill>
+                <a:latin typeface="+mn-lt"/>
+                <a:ea typeface="+mn-ea"/>
+                <a:cs typeface="+mn-cs"/>
+              </a:defRPr>
+            </a:lvl9pPr>
+          </a:lstStyle>
+          <a:p>
+            <a:r>
+              <a:rPr lang="en-US" sz="2600" dirty="0"/>
+              <a:t>date/month/time,</a:t>
+            </a:r>
+          </a:p>
+          <a:p>
+            <a:r>
+              <a:rPr lang="en-US" sz="2600" dirty="0"/>
+              <a:t> missing values, </a:t>
+            </a:r>
+          </a:p>
+          <a:p>
+            <a:r>
+              <a:rPr lang="en-US" sz="2600" dirty="0"/>
+              <a:t>N/A </a:t>
+            </a:r>
+          </a:p>
+          <a:p>
+            <a:endParaRPr lang="en-US" dirty="0"/>
           </a:p>
         </p:txBody>
       </p:sp>
       <p:sp>
         <p:nvSpPr>
-          <p:cNvPr id="3" name="Content Placeholder 2">
+          <p:cNvPr id="13" name="Content Placeholder 2">
             <a:extLst>
               <a:ext uri="{FF2B5EF4-FFF2-40B4-BE49-F238E27FC236}">
-                <a16:creationId xmlns:a16="http://schemas.microsoft.com/office/drawing/2014/main" id="{543B8BDC-C4C6-0905-5F9F-38B1383CEAC1}"/>
+                <a16:creationId xmlns:a16="http://schemas.microsoft.com/office/drawing/2014/main" id="{F1472C4E-723B-DF16-860A-479E2B15B381}"/>
+              </a:ext>
+            </a:extLst>
+          </p:cNvPr>
+          <p:cNvSpPr txBox="1">
+            <a:spLocks/>
+          </p:cNvSpPr>
+          <p:nvPr/>
+        </p:nvSpPr>
+        <p:spPr>
+          <a:xfrm>
+            <a:off x="3356826" y="3079730"/>
+            <a:ext cx="3654916" cy="3413145"/>
+          </a:xfrm>
+          <a:prstGeom prst="rect">
+            <a:avLst/>
+          </a:prstGeom>
+        </p:spPr>
+        <p:txBody>
+          <a:bodyPr vert="horz" lIns="91440" tIns="45720" rIns="91440" bIns="45720" rtlCol="0">
+            <a:normAutofit/>
+          </a:bodyPr>
+          <a:lstStyle>
+            <a:lvl1pPr marL="228600" indent="-228600" algn="l" defTabSz="914400" rtl="0" eaLnBrk="1" latinLnBrk="0" hangingPunct="1">
+              <a:lnSpc>
+                <a:spcPct val="90000"/>
+              </a:lnSpc>
+              <a:spcBef>
+                <a:spcPts val="1000"/>
+              </a:spcBef>
+              <a:buFont typeface="Arial" panose="020B0604020202020204" pitchFamily="34" charset="0"/>
+              <a:buChar char="•"/>
+              <a:defRPr sz="2800" kern="1200">
+                <a:solidFill>
+                  <a:schemeClr val="tx1"/>
+                </a:solidFill>
+                <a:latin typeface="+mn-lt"/>
+                <a:ea typeface="+mn-ea"/>
+                <a:cs typeface="+mn-cs"/>
+              </a:defRPr>
+            </a:lvl1pPr>
+            <a:lvl2pPr marL="685800" indent="-228600" algn="l" defTabSz="914400" rtl="0" eaLnBrk="1" latinLnBrk="0" hangingPunct="1">
+              <a:lnSpc>
+                <a:spcPct val="90000"/>
+              </a:lnSpc>
+              <a:spcBef>
+                <a:spcPts val="500"/>
+              </a:spcBef>
+              <a:buFont typeface="Arial" panose="020B0604020202020204" pitchFamily="34" charset="0"/>
+              <a:buChar char="•"/>
+              <a:defRPr sz="2400" kern="1200">
+                <a:solidFill>
+                  <a:schemeClr val="tx1"/>
+                </a:solidFill>
+                <a:latin typeface="+mn-lt"/>
+                <a:ea typeface="+mn-ea"/>
+                <a:cs typeface="+mn-cs"/>
+              </a:defRPr>
+            </a:lvl2pPr>
+            <a:lvl3pPr marL="1143000" indent="-228600" algn="l" defTabSz="914400" rtl="0" eaLnBrk="1" latinLnBrk="0" hangingPunct="1">
+              <a:lnSpc>
+                <a:spcPct val="90000"/>
+              </a:lnSpc>
+              <a:spcBef>
+                <a:spcPts val="500"/>
+              </a:spcBef>
+              <a:buFont typeface="Arial" panose="020B0604020202020204" pitchFamily="34" charset="0"/>
+              <a:buChar char="•"/>
+              <a:defRPr sz="2000" kern="1200">
+                <a:solidFill>
+                  <a:schemeClr val="tx1"/>
+                </a:solidFill>
+                <a:latin typeface="+mn-lt"/>
+                <a:ea typeface="+mn-ea"/>
+                <a:cs typeface="+mn-cs"/>
+              </a:defRPr>
+            </a:lvl3pPr>
+            <a:lvl4pPr marL="1600200" indent="-228600" algn="l" defTabSz="914400" rtl="0" eaLnBrk="1" latinLnBrk="0" hangingPunct="1">
+              <a:lnSpc>
+                <a:spcPct val="90000"/>
+              </a:lnSpc>
+              <a:spcBef>
+                <a:spcPts val="500"/>
+              </a:spcBef>
+              <a:buFont typeface="Arial" panose="020B0604020202020204" pitchFamily="34" charset="0"/>
+              <a:buChar char="•"/>
+              <a:defRPr sz="1800" kern="1200">
+                <a:solidFill>
+                  <a:schemeClr val="tx1"/>
+                </a:solidFill>
+                <a:latin typeface="+mn-lt"/>
+                <a:ea typeface="+mn-ea"/>
+                <a:cs typeface="+mn-cs"/>
+              </a:defRPr>
+            </a:lvl4pPr>
+            <a:lvl5pPr marL="2057400" indent="-228600" algn="l" defTabSz="914400" rtl="0" eaLnBrk="1" latinLnBrk="0" hangingPunct="1">
+              <a:lnSpc>
+                <a:spcPct val="90000"/>
+              </a:lnSpc>
+              <a:spcBef>
+                <a:spcPts val="500"/>
+              </a:spcBef>
+              <a:buFont typeface="Arial" panose="020B0604020202020204" pitchFamily="34" charset="0"/>
+              <a:buChar char="•"/>
+              <a:defRPr sz="1800" kern="1200">
+                <a:solidFill>
+                  <a:schemeClr val="tx1"/>
+                </a:solidFill>
+                <a:latin typeface="+mn-lt"/>
+                <a:ea typeface="+mn-ea"/>
+                <a:cs typeface="+mn-cs"/>
+              </a:defRPr>
+            </a:lvl5pPr>
+            <a:lvl6pPr marL="2514600" indent="-228600" algn="l" defTabSz="914400" rtl="0" eaLnBrk="1" latinLnBrk="0" hangingPunct="1">
+              <a:lnSpc>
+                <a:spcPct val="90000"/>
+              </a:lnSpc>
+              <a:spcBef>
+                <a:spcPts val="500"/>
+              </a:spcBef>
+              <a:buFont typeface="Arial" panose="020B0604020202020204" pitchFamily="34" charset="0"/>
+              <a:buChar char="•"/>
+              <a:defRPr sz="1800" kern="1200">
+                <a:solidFill>
+                  <a:schemeClr val="tx1"/>
+                </a:solidFill>
+                <a:latin typeface="+mn-lt"/>
+                <a:ea typeface="+mn-ea"/>
+                <a:cs typeface="+mn-cs"/>
+              </a:defRPr>
+            </a:lvl6pPr>
+            <a:lvl7pPr marL="2971800" indent="-228600" algn="l" defTabSz="914400" rtl="0" eaLnBrk="1" latinLnBrk="0" hangingPunct="1">
+              <a:lnSpc>
+                <a:spcPct val="90000"/>
+              </a:lnSpc>
+              <a:spcBef>
+                <a:spcPts val="500"/>
+              </a:spcBef>
+              <a:buFont typeface="Arial" panose="020B0604020202020204" pitchFamily="34" charset="0"/>
+              <a:buChar char="•"/>
+              <a:defRPr sz="1800" kern="1200">
+                <a:solidFill>
+                  <a:schemeClr val="tx1"/>
+                </a:solidFill>
+                <a:latin typeface="+mn-lt"/>
+                <a:ea typeface="+mn-ea"/>
+                <a:cs typeface="+mn-cs"/>
+              </a:defRPr>
+            </a:lvl7pPr>
+            <a:lvl8pPr marL="3429000" indent="-228600" algn="l" defTabSz="914400" rtl="0" eaLnBrk="1" latinLnBrk="0" hangingPunct="1">
+              <a:lnSpc>
+                <a:spcPct val="90000"/>
+              </a:lnSpc>
+              <a:spcBef>
+                <a:spcPts val="500"/>
+              </a:spcBef>
+              <a:buFont typeface="Arial" panose="020B0604020202020204" pitchFamily="34" charset="0"/>
+              <a:buChar char="•"/>
+              <a:defRPr sz="1800" kern="1200">
+                <a:solidFill>
+                  <a:schemeClr val="tx1"/>
+                </a:solidFill>
+                <a:latin typeface="+mn-lt"/>
+                <a:ea typeface="+mn-ea"/>
+                <a:cs typeface="+mn-cs"/>
+              </a:defRPr>
+            </a:lvl8pPr>
+            <a:lvl9pPr marL="3886200" indent="-228600" algn="l" defTabSz="914400" rtl="0" eaLnBrk="1" latinLnBrk="0" hangingPunct="1">
+              <a:lnSpc>
+                <a:spcPct val="90000"/>
+              </a:lnSpc>
+              <a:spcBef>
+                <a:spcPts val="500"/>
+              </a:spcBef>
+              <a:buFont typeface="Arial" panose="020B0604020202020204" pitchFamily="34" charset="0"/>
+              <a:buChar char="•"/>
+              <a:defRPr sz="1800" kern="1200">
+                <a:solidFill>
+                  <a:schemeClr val="tx1"/>
+                </a:solidFill>
+                <a:latin typeface="+mn-lt"/>
+                <a:ea typeface="+mn-ea"/>
+                <a:cs typeface="+mn-cs"/>
+              </a:defRPr>
+            </a:lvl9pPr>
+          </a:lstStyle>
+          <a:p>
+            <a:r>
+              <a:rPr lang="en-US" sz="2400" dirty="0"/>
+              <a:t>Variables: filter data, </a:t>
+            </a:r>
+          </a:p>
+          <a:p>
+            <a:r>
+              <a:rPr lang="en-US" sz="2400" dirty="0"/>
+              <a:t>merge tables</a:t>
+            </a:r>
+          </a:p>
+          <a:p>
+            <a:pPr lvl="1"/>
+            <a:r>
+              <a:rPr lang="en-US" dirty="0"/>
+              <a:t>Concatenate</a:t>
+            </a:r>
+          </a:p>
+          <a:p>
+            <a:pPr lvl="1"/>
+            <a:r>
+              <a:rPr lang="en-US" dirty="0"/>
+              <a:t>match merging (with n= dataset option)</a:t>
+            </a:r>
+          </a:p>
+        </p:txBody>
+      </p:sp>
+    </p:spTree>
+    <p:extLst>
+      <p:ext uri="{BB962C8B-B14F-4D97-AF65-F5344CB8AC3E}">
+        <p14:creationId xmlns:p14="http://schemas.microsoft.com/office/powerpoint/2010/main" val="3588703417"/>
+      </p:ext>
+    </p:extLst>
+  </p:cSld>
+  <p:clrMapOvr>
+    <a:masterClrMapping/>
+  </p:clrMapOvr>
+</p:sld>
+</file>
+
+<file path=ppt/slides/slide6.xml><?xml version="1.0" encoding="utf-8"?>
+<p:sld xmlns:a="http://schemas.openxmlformats.org/drawingml/2006/main" xmlns:r="http://schemas.openxmlformats.org/officeDocument/2006/relationships" xmlns:p="http://schemas.openxmlformats.org/presentationml/2006/main">
+  <p:cSld>
+    <p:spTree>
+      <p:nvGrpSpPr>
+        <p:cNvPr id="1" name="">
+          <a:extLst>
+            <a:ext uri="{FF2B5EF4-FFF2-40B4-BE49-F238E27FC236}">
+              <a16:creationId xmlns:a16="http://schemas.microsoft.com/office/drawing/2014/main" id="{24795404-4793-4153-45B6-147571F0820C}"/>
+            </a:ext>
+          </a:extLst>
+        </p:cNvPr>
+        <p:cNvGrpSpPr/>
+        <p:nvPr/>
+      </p:nvGrpSpPr>
+      <p:grpSpPr>
+        <a:xfrm>
+          <a:off x="0" y="0"/>
+          <a:ext cx="0" cy="0"/>
+          <a:chOff x="0" y="0"/>
+          <a:chExt cx="0" cy="0"/>
+        </a:xfrm>
+      </p:grpSpPr>
+      <p:sp>
+        <p:nvSpPr>
+          <p:cNvPr id="2" name="Title 1">
+            <a:extLst>
+              <a:ext uri="{FF2B5EF4-FFF2-40B4-BE49-F238E27FC236}">
+                <a16:creationId xmlns:a16="http://schemas.microsoft.com/office/drawing/2014/main" id="{A1D02713-65CC-0B2F-4169-1F342A167AE8}"/>
+              </a:ext>
+            </a:extLst>
+          </p:cNvPr>
+          <p:cNvSpPr>
+            <a:spLocks noGrp="1"/>
+          </p:cNvSpPr>
+          <p:nvPr>
+            <p:ph type="title"/>
+          </p:nvPr>
+        </p:nvSpPr>
+        <p:spPr/>
+        <p:txBody>
+          <a:bodyPr/>
+          <a:lstStyle/>
+          <a:p>
+            <a:r>
+              <a:rPr lang="en-US" dirty="0"/>
+              <a:t>Steps for refactoring</a:t>
+            </a:r>
+          </a:p>
+        </p:txBody>
+      </p:sp>
+      <p:graphicFrame>
+        <p:nvGraphicFramePr>
+          <p:cNvPr id="11" name="Diagram 10">
+            <a:extLst>
+              <a:ext uri="{FF2B5EF4-FFF2-40B4-BE49-F238E27FC236}">
+                <a16:creationId xmlns:a16="http://schemas.microsoft.com/office/drawing/2014/main" id="{D55503A3-8723-DC89-CF48-254E03E680D5}"/>
+              </a:ext>
+            </a:extLst>
+          </p:cNvPr>
+          <p:cNvGraphicFramePr/>
+          <p:nvPr>
+            <p:extLst>
+              <p:ext uri="{D42A27DB-BD31-4B8C-83A1-F6EECF244321}">
+                <p14:modId xmlns:p14="http://schemas.microsoft.com/office/powerpoint/2010/main" val="223565139"/>
+              </p:ext>
+            </p:extLst>
+          </p:nvPr>
+        </p:nvGraphicFramePr>
+        <p:xfrm>
+          <a:off x="6096000" y="365125"/>
+          <a:ext cx="5062220" cy="5418667"/>
+        </p:xfrm>
+        <a:graphic>
+          <a:graphicData uri="http://schemas.openxmlformats.org/drawingml/2006/diagram">
+            <dgm:relIds xmlns:dgm="http://schemas.openxmlformats.org/drawingml/2006/diagram" xmlns:r="http://schemas.openxmlformats.org/officeDocument/2006/relationships" r:dm="rId2" r:lo="rId3" r:qs="rId4" r:cs="rId5"/>
+          </a:graphicData>
+        </a:graphic>
+      </p:graphicFrame>
+      <p:sp>
+        <p:nvSpPr>
+          <p:cNvPr id="4" name="Content Placeholder 3">
+            <a:extLst>
+              <a:ext uri="{FF2B5EF4-FFF2-40B4-BE49-F238E27FC236}">
+                <a16:creationId xmlns:a16="http://schemas.microsoft.com/office/drawing/2014/main" id="{B225A04A-A19E-03F6-5A6F-E66D9D66BD3C}"/>
               </a:ext>
             </a:extLst>
           </p:cNvPr>
@@ -3852,65 +10954,78 @@
         <p:spPr>
           <a:xfrm>
             <a:off x="838200" y="1825625"/>
-            <a:ext cx="10515600" cy="2763000"/>
+            <a:ext cx="1074420" cy="4351338"/>
           </a:xfrm>
         </p:spPr>
         <p:txBody>
-          <a:bodyPr>
-            <a:normAutofit fontScale="77500" lnSpcReduction="20000"/>
-          </a:bodyPr>
+          <a:bodyPr/>
+          <a:lstStyle/>
+          <a:p>
+            <a:endParaRPr lang="en-US" dirty="0"/>
+          </a:p>
+        </p:txBody>
+      </p:sp>
+    </p:spTree>
+    <p:extLst>
+      <p:ext uri="{BB962C8B-B14F-4D97-AF65-F5344CB8AC3E}">
+        <p14:creationId xmlns:p14="http://schemas.microsoft.com/office/powerpoint/2010/main" val="310505272"/>
+      </p:ext>
+    </p:extLst>
+  </p:cSld>
+  <p:clrMapOvr>
+    <a:masterClrMapping/>
+  </p:clrMapOvr>
+</p:sld>
+</file>
+
+<file path=ppt/slides/slide7.xml><?xml version="1.0" encoding="utf-8"?>
+<p:sld xmlns:a="http://schemas.openxmlformats.org/drawingml/2006/main" xmlns:r="http://schemas.openxmlformats.org/officeDocument/2006/relationships" xmlns:p="http://schemas.openxmlformats.org/presentationml/2006/main">
+  <p:cSld>
+    <p:spTree>
+      <p:nvGrpSpPr>
+        <p:cNvPr id="1" name="">
+          <a:extLst>
+            <a:ext uri="{FF2B5EF4-FFF2-40B4-BE49-F238E27FC236}">
+              <a16:creationId xmlns:a16="http://schemas.microsoft.com/office/drawing/2014/main" id="{B2BCD0B7-14BF-9591-2491-51EC0B8A6CEB}"/>
+            </a:ext>
+          </a:extLst>
+        </p:cNvPr>
+        <p:cNvGrpSpPr/>
+        <p:nvPr/>
+      </p:nvGrpSpPr>
+      <p:grpSpPr>
+        <a:xfrm>
+          <a:off x="0" y="0"/>
+          <a:ext cx="0" cy="0"/>
+          <a:chOff x="0" y="0"/>
+          <a:chExt cx="0" cy="0"/>
+        </a:xfrm>
+      </p:grpSpPr>
+      <p:sp>
+        <p:nvSpPr>
+          <p:cNvPr id="2" name="Title 1">
+            <a:extLst>
+              <a:ext uri="{FF2B5EF4-FFF2-40B4-BE49-F238E27FC236}">
+                <a16:creationId xmlns:a16="http://schemas.microsoft.com/office/drawing/2014/main" id="{3C96B53C-360B-A7DC-1397-EE5C9B1C729C}"/>
+              </a:ext>
+            </a:extLst>
+          </p:cNvPr>
+          <p:cNvSpPr>
+            <a:spLocks noGrp="1"/>
+          </p:cNvSpPr>
+          <p:nvPr>
+            <p:ph type="title"/>
+          </p:nvPr>
+        </p:nvSpPr>
+        <p:spPr/>
+        <p:txBody>
+          <a:bodyPr/>
           <a:lstStyle/>
           <a:p>
             <a:r>
               <a:rPr lang="en-US" dirty="0"/>
-              <a:t>What have I done about it?</a:t>
+              <a:t>Major SAS Steps/Proc vs R package/functions</a:t>
             </a:r>
-          </a:p>
-          <a:p>
-            <a:r>
-              <a:rPr lang="en-US" altLang="zh-CN" dirty="0"/>
-              <a:t>Enterprise Modeling and Analytics – the Cash Flow model</a:t>
-            </a:r>
-          </a:p>
-          <a:p>
-            <a:r>
-              <a:rPr lang="en-US" dirty="0"/>
-              <a:t>Data</a:t>
-            </a:r>
-          </a:p>
-          <a:p>
-            <a:r>
-              <a:rPr lang="en-US" dirty="0"/>
-              <a:t>variables</a:t>
-            </a:r>
-          </a:p>
-          <a:p>
-            <a:r>
-              <a:rPr lang="en-US" dirty="0"/>
-              <a:t>Models: logistic regression with splines</a:t>
-            </a:r>
-          </a:p>
-          <a:p>
-            <a:pPr lvl="1"/>
-            <a:r>
-              <a:rPr lang="en-US" dirty="0"/>
-              <a:t>Choose number and location of the knots.</a:t>
-            </a:r>
-          </a:p>
-          <a:p>
-            <a:r>
-              <a:rPr lang="en-US" dirty="0"/>
-              <a:t>Macro functions</a:t>
-            </a:r>
-          </a:p>
-          <a:p>
-            <a:r>
-              <a:rPr lang="en-US" dirty="0"/>
-              <a:t>Output</a:t>
-            </a:r>
-          </a:p>
-          <a:p>
-            <a:endParaRPr lang="en-US" dirty="0"/>
           </a:p>
         </p:txBody>
       </p:sp>
@@ -3919,7 +11034,7 @@
           <p:cNvPr id="6" name="Picture 5">
             <a:extLst>
               <a:ext uri="{FF2B5EF4-FFF2-40B4-BE49-F238E27FC236}">
-                <a16:creationId xmlns:a16="http://schemas.microsoft.com/office/drawing/2014/main" id="{3BD6ABAE-7B06-B6A2-3815-5904B9452D4D}"/>
+                <a16:creationId xmlns:a16="http://schemas.microsoft.com/office/drawing/2014/main" id="{D89187F8-9708-A2D8-B314-1950D2AA2EBD}"/>
               </a:ext>
             </a:extLst>
           </p:cNvPr>
@@ -3949,7 +11064,7 @@
           <p:cNvPr id="7" name="Picture 6">
             <a:extLst>
               <a:ext uri="{FF2B5EF4-FFF2-40B4-BE49-F238E27FC236}">
-                <a16:creationId xmlns:a16="http://schemas.microsoft.com/office/drawing/2014/main" id="{494C9954-0469-668E-7585-18F1E0856937}"/>
+                <a16:creationId xmlns:a16="http://schemas.microsoft.com/office/drawing/2014/main" id="{D093ED12-F9C4-7300-59D7-16AC180856DE}"/>
               </a:ext>
             </a:extLst>
           </p:cNvPr>
@@ -3979,7 +11094,7 @@
           <p:cNvPr id="8" name="Picture 7">
             <a:extLst>
               <a:ext uri="{FF2B5EF4-FFF2-40B4-BE49-F238E27FC236}">
-                <a16:creationId xmlns:a16="http://schemas.microsoft.com/office/drawing/2014/main" id="{C55D0646-7CAB-C11F-17EA-EF7DD14FC55C}"/>
+                <a16:creationId xmlns:a16="http://schemas.microsoft.com/office/drawing/2014/main" id="{FE7EB734-6903-49D5-A647-AE7BC6E4ECF2}"/>
               </a:ext>
             </a:extLst>
           </p:cNvPr>
@@ -4004,10 +11119,299 @@
           </a:prstGeom>
         </p:spPr>
       </p:pic>
+      <p:sp>
+        <p:nvSpPr>
+          <p:cNvPr id="4" name="Content Placeholder 2">
+            <a:extLst>
+              <a:ext uri="{FF2B5EF4-FFF2-40B4-BE49-F238E27FC236}">
+                <a16:creationId xmlns:a16="http://schemas.microsoft.com/office/drawing/2014/main" id="{EA2E8D98-C1AD-CCC4-08D9-50F3BE804787}"/>
+              </a:ext>
+            </a:extLst>
+          </p:cNvPr>
+          <p:cNvSpPr txBox="1">
+            <a:spLocks/>
+          </p:cNvSpPr>
+          <p:nvPr/>
+        </p:nvSpPr>
+        <p:spPr>
+          <a:xfrm>
+            <a:off x="5024264" y="1941576"/>
+            <a:ext cx="6402700" cy="3413145"/>
+          </a:xfrm>
+          <a:prstGeom prst="rect">
+            <a:avLst/>
+          </a:prstGeom>
+        </p:spPr>
+        <p:txBody>
+          <a:bodyPr vert="horz" lIns="91440" tIns="45720" rIns="91440" bIns="45720" rtlCol="0">
+            <a:normAutofit fontScale="70000" lnSpcReduction="20000"/>
+          </a:bodyPr>
+          <a:lstStyle>
+            <a:lvl1pPr marL="228600" indent="-228600" algn="l" defTabSz="914400" rtl="0" eaLnBrk="1" latinLnBrk="0" hangingPunct="1">
+              <a:lnSpc>
+                <a:spcPct val="90000"/>
+              </a:lnSpc>
+              <a:spcBef>
+                <a:spcPts val="1000"/>
+              </a:spcBef>
+              <a:buFont typeface="Arial" panose="020B0604020202020204" pitchFamily="34" charset="0"/>
+              <a:buChar char="•"/>
+              <a:defRPr sz="2800" kern="1200">
+                <a:solidFill>
+                  <a:schemeClr val="tx1"/>
+                </a:solidFill>
+                <a:latin typeface="+mn-lt"/>
+                <a:ea typeface="+mn-ea"/>
+                <a:cs typeface="+mn-cs"/>
+              </a:defRPr>
+            </a:lvl1pPr>
+            <a:lvl2pPr marL="685800" indent="-228600" algn="l" defTabSz="914400" rtl="0" eaLnBrk="1" latinLnBrk="0" hangingPunct="1">
+              <a:lnSpc>
+                <a:spcPct val="90000"/>
+              </a:lnSpc>
+              <a:spcBef>
+                <a:spcPts val="500"/>
+              </a:spcBef>
+              <a:buFont typeface="Arial" panose="020B0604020202020204" pitchFamily="34" charset="0"/>
+              <a:buChar char="•"/>
+              <a:defRPr sz="2400" kern="1200">
+                <a:solidFill>
+                  <a:schemeClr val="tx1"/>
+                </a:solidFill>
+                <a:latin typeface="+mn-lt"/>
+                <a:ea typeface="+mn-ea"/>
+                <a:cs typeface="+mn-cs"/>
+              </a:defRPr>
+            </a:lvl2pPr>
+            <a:lvl3pPr marL="1143000" indent="-228600" algn="l" defTabSz="914400" rtl="0" eaLnBrk="1" latinLnBrk="0" hangingPunct="1">
+              <a:lnSpc>
+                <a:spcPct val="90000"/>
+              </a:lnSpc>
+              <a:spcBef>
+                <a:spcPts val="500"/>
+              </a:spcBef>
+              <a:buFont typeface="Arial" panose="020B0604020202020204" pitchFamily="34" charset="0"/>
+              <a:buChar char="•"/>
+              <a:defRPr sz="2000" kern="1200">
+                <a:solidFill>
+                  <a:schemeClr val="tx1"/>
+                </a:solidFill>
+                <a:latin typeface="+mn-lt"/>
+                <a:ea typeface="+mn-ea"/>
+                <a:cs typeface="+mn-cs"/>
+              </a:defRPr>
+            </a:lvl3pPr>
+            <a:lvl4pPr marL="1600200" indent="-228600" algn="l" defTabSz="914400" rtl="0" eaLnBrk="1" latinLnBrk="0" hangingPunct="1">
+              <a:lnSpc>
+                <a:spcPct val="90000"/>
+              </a:lnSpc>
+              <a:spcBef>
+                <a:spcPts val="500"/>
+              </a:spcBef>
+              <a:buFont typeface="Arial" panose="020B0604020202020204" pitchFamily="34" charset="0"/>
+              <a:buChar char="•"/>
+              <a:defRPr sz="1800" kern="1200">
+                <a:solidFill>
+                  <a:schemeClr val="tx1"/>
+                </a:solidFill>
+                <a:latin typeface="+mn-lt"/>
+                <a:ea typeface="+mn-ea"/>
+                <a:cs typeface="+mn-cs"/>
+              </a:defRPr>
+            </a:lvl4pPr>
+            <a:lvl5pPr marL="2057400" indent="-228600" algn="l" defTabSz="914400" rtl="0" eaLnBrk="1" latinLnBrk="0" hangingPunct="1">
+              <a:lnSpc>
+                <a:spcPct val="90000"/>
+              </a:lnSpc>
+              <a:spcBef>
+                <a:spcPts val="500"/>
+              </a:spcBef>
+              <a:buFont typeface="Arial" panose="020B0604020202020204" pitchFamily="34" charset="0"/>
+              <a:buChar char="•"/>
+              <a:defRPr sz="1800" kern="1200">
+                <a:solidFill>
+                  <a:schemeClr val="tx1"/>
+                </a:solidFill>
+                <a:latin typeface="+mn-lt"/>
+                <a:ea typeface="+mn-ea"/>
+                <a:cs typeface="+mn-cs"/>
+              </a:defRPr>
+            </a:lvl5pPr>
+            <a:lvl6pPr marL="2514600" indent="-228600" algn="l" defTabSz="914400" rtl="0" eaLnBrk="1" latinLnBrk="0" hangingPunct="1">
+              <a:lnSpc>
+                <a:spcPct val="90000"/>
+              </a:lnSpc>
+              <a:spcBef>
+                <a:spcPts val="500"/>
+              </a:spcBef>
+              <a:buFont typeface="Arial" panose="020B0604020202020204" pitchFamily="34" charset="0"/>
+              <a:buChar char="•"/>
+              <a:defRPr sz="1800" kern="1200">
+                <a:solidFill>
+                  <a:schemeClr val="tx1"/>
+                </a:solidFill>
+                <a:latin typeface="+mn-lt"/>
+                <a:ea typeface="+mn-ea"/>
+                <a:cs typeface="+mn-cs"/>
+              </a:defRPr>
+            </a:lvl6pPr>
+            <a:lvl7pPr marL="2971800" indent="-228600" algn="l" defTabSz="914400" rtl="0" eaLnBrk="1" latinLnBrk="0" hangingPunct="1">
+              <a:lnSpc>
+                <a:spcPct val="90000"/>
+              </a:lnSpc>
+              <a:spcBef>
+                <a:spcPts val="500"/>
+              </a:spcBef>
+              <a:buFont typeface="Arial" panose="020B0604020202020204" pitchFamily="34" charset="0"/>
+              <a:buChar char="•"/>
+              <a:defRPr sz="1800" kern="1200">
+                <a:solidFill>
+                  <a:schemeClr val="tx1"/>
+                </a:solidFill>
+                <a:latin typeface="+mn-lt"/>
+                <a:ea typeface="+mn-ea"/>
+                <a:cs typeface="+mn-cs"/>
+              </a:defRPr>
+            </a:lvl7pPr>
+            <a:lvl8pPr marL="3429000" indent="-228600" algn="l" defTabSz="914400" rtl="0" eaLnBrk="1" latinLnBrk="0" hangingPunct="1">
+              <a:lnSpc>
+                <a:spcPct val="90000"/>
+              </a:lnSpc>
+              <a:spcBef>
+                <a:spcPts val="500"/>
+              </a:spcBef>
+              <a:buFont typeface="Arial" panose="020B0604020202020204" pitchFamily="34" charset="0"/>
+              <a:buChar char="•"/>
+              <a:defRPr sz="1800" kern="1200">
+                <a:solidFill>
+                  <a:schemeClr val="tx1"/>
+                </a:solidFill>
+                <a:latin typeface="+mn-lt"/>
+                <a:ea typeface="+mn-ea"/>
+                <a:cs typeface="+mn-cs"/>
+              </a:defRPr>
+            </a:lvl8pPr>
+            <a:lvl9pPr marL="3886200" indent="-228600" algn="l" defTabSz="914400" rtl="0" eaLnBrk="1" latinLnBrk="0" hangingPunct="1">
+              <a:lnSpc>
+                <a:spcPct val="90000"/>
+              </a:lnSpc>
+              <a:spcBef>
+                <a:spcPts val="500"/>
+              </a:spcBef>
+              <a:buFont typeface="Arial" panose="020B0604020202020204" pitchFamily="34" charset="0"/>
+              <a:buChar char="•"/>
+              <a:defRPr sz="1800" kern="1200">
+                <a:solidFill>
+                  <a:schemeClr val="tx1"/>
+                </a:solidFill>
+                <a:latin typeface="+mn-lt"/>
+                <a:ea typeface="+mn-ea"/>
+                <a:cs typeface="+mn-cs"/>
+              </a:defRPr>
+            </a:lvl9pPr>
+          </a:lstStyle>
+          <a:p>
+            <a:r>
+              <a:rPr lang="en-US" altLang="zh-CN" dirty="0"/>
+              <a:t>Enterprise Modeling and Analytics – the Cash Flow model</a:t>
+            </a:r>
+          </a:p>
+          <a:p>
+            <a:r>
+              <a:rPr lang="en-US" dirty="0"/>
+              <a:t>Data: date/month/time, missing values, N/A</a:t>
+            </a:r>
+          </a:p>
+          <a:p>
+            <a:r>
+              <a:rPr lang="en-US" dirty="0"/>
+              <a:t>Variables: filter data, </a:t>
+            </a:r>
+          </a:p>
+          <a:p>
+            <a:r>
+              <a:rPr lang="en-US" dirty="0"/>
+              <a:t>merge tables</a:t>
+            </a:r>
+          </a:p>
+          <a:p>
+            <a:pPr lvl="1"/>
+            <a:r>
+              <a:rPr lang="en-US" dirty="0"/>
+              <a:t>Concatenate</a:t>
+            </a:r>
+          </a:p>
+          <a:p>
+            <a:pPr lvl="1"/>
+            <a:r>
+              <a:rPr lang="en-US" dirty="0"/>
+              <a:t>match merging (with n= dataset option)</a:t>
+            </a:r>
+          </a:p>
+          <a:p>
+            <a:r>
+              <a:rPr lang="en-US" dirty="0"/>
+              <a:t>Models: logistic regression with splines</a:t>
+            </a:r>
+          </a:p>
+          <a:p>
+            <a:pPr lvl="1"/>
+            <a:r>
+              <a:rPr lang="en-US" dirty="0"/>
+              <a:t>Choose number and location of the knots.</a:t>
+            </a:r>
+          </a:p>
+          <a:p>
+            <a:r>
+              <a:rPr lang="en-US" dirty="0"/>
+              <a:t>Macro functions</a:t>
+            </a:r>
+          </a:p>
+          <a:p>
+            <a:r>
+              <a:rPr lang="en-US" dirty="0"/>
+              <a:t>Output</a:t>
+            </a:r>
+          </a:p>
+          <a:p>
+            <a:endParaRPr lang="en-US" dirty="0"/>
+          </a:p>
+        </p:txBody>
+      </p:sp>
+      <p:sp>
+        <p:nvSpPr>
+          <p:cNvPr id="9" name="Content Placeholder 8">
+            <a:extLst>
+              <a:ext uri="{FF2B5EF4-FFF2-40B4-BE49-F238E27FC236}">
+                <a16:creationId xmlns:a16="http://schemas.microsoft.com/office/drawing/2014/main" id="{E0C96031-E926-D7AB-F4F4-6F05AB855B5E}"/>
+              </a:ext>
+            </a:extLst>
+          </p:cNvPr>
+          <p:cNvSpPr>
+            <a:spLocks noGrp="1"/>
+          </p:cNvSpPr>
+          <p:nvPr>
+            <p:ph idx="1"/>
+          </p:nvPr>
+        </p:nvSpPr>
+        <p:spPr>
+          <a:xfrm>
+            <a:off x="502920" y="3939539"/>
+            <a:ext cx="3573780" cy="1086803"/>
+          </a:xfrm>
+        </p:spPr>
+        <p:txBody>
+          <a:bodyPr/>
+          <a:lstStyle/>
+          <a:p>
+            <a:endParaRPr lang="en-US" dirty="0"/>
+          </a:p>
+        </p:txBody>
+      </p:sp>
     </p:spTree>
     <p:extLst>
       <p:ext uri="{BB962C8B-B14F-4D97-AF65-F5344CB8AC3E}">
-        <p14:creationId xmlns:p14="http://schemas.microsoft.com/office/powerpoint/2010/main" val="3588703417"/>
+        <p14:creationId xmlns:p14="http://schemas.microsoft.com/office/powerpoint/2010/main" val="3421575707"/>
       </p:ext>
     </p:extLst>
   </p:cSld>
@@ -4017,12 +11421,18 @@
 </p:sld>
 </file>
 
-<file path=ppt/slides/slide6.xml><?xml version="1.0" encoding="utf-8"?>
+<file path=ppt/slides/slide8.xml><?xml version="1.0" encoding="utf-8"?>
 <p:sld xmlns:a="http://schemas.openxmlformats.org/drawingml/2006/main" xmlns:r="http://schemas.openxmlformats.org/officeDocument/2006/relationships" xmlns:p="http://schemas.openxmlformats.org/presentationml/2006/main">
   <p:cSld>
     <p:spTree>
       <p:nvGrpSpPr>
-        <p:cNvPr id="1" name=""/>
+        <p:cNvPr id="1" name="">
+          <a:extLst>
+            <a:ext uri="{FF2B5EF4-FFF2-40B4-BE49-F238E27FC236}">
+              <a16:creationId xmlns:a16="http://schemas.microsoft.com/office/drawing/2014/main" id="{40074CE9-62D6-2BB2-E61F-1B1261FA1298}"/>
+            </a:ext>
+          </a:extLst>
+        </p:cNvPr>
         <p:cNvGrpSpPr/>
         <p:nvPr/>
       </p:nvGrpSpPr>
@@ -4039,7 +11449,7 @@
           <p:cNvPr id="2" name="Title 1">
             <a:extLst>
               <a:ext uri="{FF2B5EF4-FFF2-40B4-BE49-F238E27FC236}">
-                <a16:creationId xmlns:a16="http://schemas.microsoft.com/office/drawing/2014/main" id="{B43C6558-4EC7-F455-AEE9-D12FD0A89C62}"/>
+                <a16:creationId xmlns:a16="http://schemas.microsoft.com/office/drawing/2014/main" id="{1A312F8B-F4C9-4874-7DA4-22CD586751FE}"/>
               </a:ext>
             </a:extLst>
           </p:cNvPr>
@@ -4055,7 +11465,10 @@
           <a:bodyPr/>
           <a:lstStyle/>
           <a:p>
-            <a:endParaRPr lang="en-US"/>
+            <a:r>
+              <a:rPr lang="en-US" dirty="0"/>
+              <a:t>Steps for refactoring</a:t>
+            </a:r>
           </a:p>
         </p:txBody>
       </p:sp>
@@ -4064,7 +11477,7 @@
           <p:cNvPr id="3" name="Content Placeholder 2">
             <a:extLst>
               <a:ext uri="{FF2B5EF4-FFF2-40B4-BE49-F238E27FC236}">
-                <a16:creationId xmlns:a16="http://schemas.microsoft.com/office/drawing/2014/main" id="{5655E68B-3CB9-4EB7-342D-A9E2A3772252}"/>
+                <a16:creationId xmlns:a16="http://schemas.microsoft.com/office/drawing/2014/main" id="{A0BC23D4-DEEC-D0CD-B063-D5658C599C4C}"/>
               </a:ext>
             </a:extLst>
           </p:cNvPr>
@@ -4075,222 +11488,405 @@
             <p:ph idx="1"/>
           </p:nvPr>
         </p:nvSpPr>
-        <p:spPr/>
+        <p:spPr>
+          <a:xfrm>
+            <a:off x="609600" y="1347216"/>
+            <a:ext cx="4578096" cy="3241409"/>
+          </a:xfrm>
+        </p:spPr>
         <p:txBody>
-          <a:bodyPr/>
+          <a:bodyPr>
+            <a:normAutofit fontScale="92500" lnSpcReduction="10000"/>
+          </a:bodyPr>
           <a:lstStyle/>
           <a:p>
             <a:r>
               <a:rPr lang="en-US" dirty="0"/>
-              <a:t>What additional value does my approach provide?</a:t>
+              <a:t>What have I done about it?</a:t>
             </a:r>
+          </a:p>
+          <a:p>
+            <a:r>
+              <a:rPr lang="en-US" altLang="zh-CN" dirty="0"/>
+              <a:t>Enterprise Modeling and Analytics – the Cash Flow model</a:t>
+            </a:r>
+          </a:p>
+          <a:p>
+            <a:r>
+              <a:rPr lang="en-US" altLang="zh-CN" dirty="0"/>
+              <a:t>SAS: PROC compare</a:t>
+            </a:r>
+          </a:p>
+          <a:p>
+            <a:r>
+              <a:rPr lang="en-US" dirty="0"/>
+              <a:t>R: compared</a:t>
+            </a:r>
+          </a:p>
+          <a:p>
+            <a:r>
+              <a:rPr lang="en-US" dirty="0"/>
+              <a:t>How to make a tolerance level?</a:t>
+            </a:r>
+          </a:p>
+          <a:p>
+            <a:endParaRPr lang="en-US" dirty="0"/>
+          </a:p>
+        </p:txBody>
+      </p:sp>
+      <p:pic>
+        <p:nvPicPr>
+          <p:cNvPr id="6" name="Picture 5">
+            <a:extLst>
+              <a:ext uri="{FF2B5EF4-FFF2-40B4-BE49-F238E27FC236}">
+                <a16:creationId xmlns:a16="http://schemas.microsoft.com/office/drawing/2014/main" id="{63B42BA1-1151-4CFE-D8B5-E02DDD41A0EE}"/>
+              </a:ext>
+            </a:extLst>
+          </p:cNvPr>
+          <p:cNvPicPr>
+            <a:picLocks noChangeAspect="1"/>
+          </p:cNvPicPr>
+          <p:nvPr/>
+        </p:nvPicPr>
+        <p:blipFill>
+          <a:blip r:embed="rId2"/>
+          <a:stretch>
+            <a:fillRect/>
+          </a:stretch>
+        </p:blipFill>
+        <p:spPr>
+          <a:xfrm>
+            <a:off x="1446197" y="5207810"/>
+            <a:ext cx="1877291" cy="769689"/>
+          </a:xfrm>
+          <a:prstGeom prst="rect">
+            <a:avLst/>
+          </a:prstGeom>
+        </p:spPr>
+      </p:pic>
+      <p:pic>
+        <p:nvPicPr>
+          <p:cNvPr id="7" name="Picture 6">
+            <a:extLst>
+              <a:ext uri="{FF2B5EF4-FFF2-40B4-BE49-F238E27FC236}">
+                <a16:creationId xmlns:a16="http://schemas.microsoft.com/office/drawing/2014/main" id="{F74468B4-F5B5-FE68-0C47-CC2309DE1D12}"/>
+              </a:ext>
+            </a:extLst>
+          </p:cNvPr>
+          <p:cNvPicPr>
+            <a:picLocks noChangeAspect="1"/>
+          </p:cNvPicPr>
+          <p:nvPr/>
+        </p:nvPicPr>
+        <p:blipFill>
+          <a:blip r:embed="rId3"/>
+          <a:stretch>
+            <a:fillRect/>
+          </a:stretch>
+        </p:blipFill>
+        <p:spPr>
+          <a:xfrm>
+            <a:off x="5024264" y="5174343"/>
+            <a:ext cx="2143471" cy="803156"/>
+          </a:xfrm>
+          <a:prstGeom prst="rect">
+            <a:avLst/>
+          </a:prstGeom>
+        </p:spPr>
+      </p:pic>
+      <p:pic>
+        <p:nvPicPr>
+          <p:cNvPr id="8" name="Picture 7">
+            <a:extLst>
+              <a:ext uri="{FF2B5EF4-FFF2-40B4-BE49-F238E27FC236}">
+                <a16:creationId xmlns:a16="http://schemas.microsoft.com/office/drawing/2014/main" id="{BBAC54FE-1225-9162-8A7B-6CAB854D7938}"/>
+              </a:ext>
+            </a:extLst>
+          </p:cNvPr>
+          <p:cNvPicPr>
+            <a:picLocks noChangeAspect="1"/>
+          </p:cNvPicPr>
+          <p:nvPr/>
+        </p:nvPicPr>
+        <p:blipFill>
+          <a:blip r:embed="rId4"/>
+          <a:stretch>
+            <a:fillRect/>
+          </a:stretch>
+        </p:blipFill>
+        <p:spPr>
+          <a:xfrm>
+            <a:off x="8564702" y="5210176"/>
+            <a:ext cx="2862262" cy="966787"/>
+          </a:xfrm>
+          <a:prstGeom prst="rect">
+            <a:avLst/>
+          </a:prstGeom>
+        </p:spPr>
+      </p:pic>
+      <p:sp>
+        <p:nvSpPr>
+          <p:cNvPr id="4" name="Content Placeholder 2">
+            <a:extLst>
+              <a:ext uri="{FF2B5EF4-FFF2-40B4-BE49-F238E27FC236}">
+                <a16:creationId xmlns:a16="http://schemas.microsoft.com/office/drawing/2014/main" id="{63DAD067-F15E-9C00-BF8C-B324CCAB9A23}"/>
+              </a:ext>
+            </a:extLst>
+          </p:cNvPr>
+          <p:cNvSpPr txBox="1">
+            <a:spLocks/>
+          </p:cNvSpPr>
+          <p:nvPr/>
+        </p:nvSpPr>
+        <p:spPr>
+          <a:xfrm>
+            <a:off x="4829558" y="1347216"/>
+            <a:ext cx="4349496" cy="3413145"/>
+          </a:xfrm>
+          <a:prstGeom prst="rect">
+            <a:avLst/>
+          </a:prstGeom>
+        </p:spPr>
+        <p:txBody>
+          <a:bodyPr vert="horz" lIns="91440" tIns="45720" rIns="91440" bIns="45720" rtlCol="0">
+            <a:normAutofit fontScale="62500" lnSpcReduction="20000"/>
+          </a:bodyPr>
+          <a:lstStyle>
+            <a:lvl1pPr marL="228600" indent="-228600" algn="l" defTabSz="914400" rtl="0" eaLnBrk="1" latinLnBrk="0" hangingPunct="1">
+              <a:lnSpc>
+                <a:spcPct val="90000"/>
+              </a:lnSpc>
+              <a:spcBef>
+                <a:spcPts val="1000"/>
+              </a:spcBef>
+              <a:buFont typeface="Arial" panose="020B0604020202020204" pitchFamily="34" charset="0"/>
+              <a:buChar char="•"/>
+              <a:defRPr sz="2800" kern="1200">
+                <a:solidFill>
+                  <a:schemeClr val="tx1"/>
+                </a:solidFill>
+                <a:latin typeface="+mn-lt"/>
+                <a:ea typeface="+mn-ea"/>
+                <a:cs typeface="+mn-cs"/>
+              </a:defRPr>
+            </a:lvl1pPr>
+            <a:lvl2pPr marL="685800" indent="-228600" algn="l" defTabSz="914400" rtl="0" eaLnBrk="1" latinLnBrk="0" hangingPunct="1">
+              <a:lnSpc>
+                <a:spcPct val="90000"/>
+              </a:lnSpc>
+              <a:spcBef>
+                <a:spcPts val="500"/>
+              </a:spcBef>
+              <a:buFont typeface="Arial" panose="020B0604020202020204" pitchFamily="34" charset="0"/>
+              <a:buChar char="•"/>
+              <a:defRPr sz="2400" kern="1200">
+                <a:solidFill>
+                  <a:schemeClr val="tx1"/>
+                </a:solidFill>
+                <a:latin typeface="+mn-lt"/>
+                <a:ea typeface="+mn-ea"/>
+                <a:cs typeface="+mn-cs"/>
+              </a:defRPr>
+            </a:lvl2pPr>
+            <a:lvl3pPr marL="1143000" indent="-228600" algn="l" defTabSz="914400" rtl="0" eaLnBrk="1" latinLnBrk="0" hangingPunct="1">
+              <a:lnSpc>
+                <a:spcPct val="90000"/>
+              </a:lnSpc>
+              <a:spcBef>
+                <a:spcPts val="500"/>
+              </a:spcBef>
+              <a:buFont typeface="Arial" panose="020B0604020202020204" pitchFamily="34" charset="0"/>
+              <a:buChar char="•"/>
+              <a:defRPr sz="2000" kern="1200">
+                <a:solidFill>
+                  <a:schemeClr val="tx1"/>
+                </a:solidFill>
+                <a:latin typeface="+mn-lt"/>
+                <a:ea typeface="+mn-ea"/>
+                <a:cs typeface="+mn-cs"/>
+              </a:defRPr>
+            </a:lvl3pPr>
+            <a:lvl4pPr marL="1600200" indent="-228600" algn="l" defTabSz="914400" rtl="0" eaLnBrk="1" latinLnBrk="0" hangingPunct="1">
+              <a:lnSpc>
+                <a:spcPct val="90000"/>
+              </a:lnSpc>
+              <a:spcBef>
+                <a:spcPts val="500"/>
+              </a:spcBef>
+              <a:buFont typeface="Arial" panose="020B0604020202020204" pitchFamily="34" charset="0"/>
+              <a:buChar char="•"/>
+              <a:defRPr sz="1800" kern="1200">
+                <a:solidFill>
+                  <a:schemeClr val="tx1"/>
+                </a:solidFill>
+                <a:latin typeface="+mn-lt"/>
+                <a:ea typeface="+mn-ea"/>
+                <a:cs typeface="+mn-cs"/>
+              </a:defRPr>
+            </a:lvl4pPr>
+            <a:lvl5pPr marL="2057400" indent="-228600" algn="l" defTabSz="914400" rtl="0" eaLnBrk="1" latinLnBrk="0" hangingPunct="1">
+              <a:lnSpc>
+                <a:spcPct val="90000"/>
+              </a:lnSpc>
+              <a:spcBef>
+                <a:spcPts val="500"/>
+              </a:spcBef>
+              <a:buFont typeface="Arial" panose="020B0604020202020204" pitchFamily="34" charset="0"/>
+              <a:buChar char="•"/>
+              <a:defRPr sz="1800" kern="1200">
+                <a:solidFill>
+                  <a:schemeClr val="tx1"/>
+                </a:solidFill>
+                <a:latin typeface="+mn-lt"/>
+                <a:ea typeface="+mn-ea"/>
+                <a:cs typeface="+mn-cs"/>
+              </a:defRPr>
+            </a:lvl5pPr>
+            <a:lvl6pPr marL="2514600" indent="-228600" algn="l" defTabSz="914400" rtl="0" eaLnBrk="1" latinLnBrk="0" hangingPunct="1">
+              <a:lnSpc>
+                <a:spcPct val="90000"/>
+              </a:lnSpc>
+              <a:spcBef>
+                <a:spcPts val="500"/>
+              </a:spcBef>
+              <a:buFont typeface="Arial" panose="020B0604020202020204" pitchFamily="34" charset="0"/>
+              <a:buChar char="•"/>
+              <a:defRPr sz="1800" kern="1200">
+                <a:solidFill>
+                  <a:schemeClr val="tx1"/>
+                </a:solidFill>
+                <a:latin typeface="+mn-lt"/>
+                <a:ea typeface="+mn-ea"/>
+                <a:cs typeface="+mn-cs"/>
+              </a:defRPr>
+            </a:lvl6pPr>
+            <a:lvl7pPr marL="2971800" indent="-228600" algn="l" defTabSz="914400" rtl="0" eaLnBrk="1" latinLnBrk="0" hangingPunct="1">
+              <a:lnSpc>
+                <a:spcPct val="90000"/>
+              </a:lnSpc>
+              <a:spcBef>
+                <a:spcPts val="500"/>
+              </a:spcBef>
+              <a:buFont typeface="Arial" panose="020B0604020202020204" pitchFamily="34" charset="0"/>
+              <a:buChar char="•"/>
+              <a:defRPr sz="1800" kern="1200">
+                <a:solidFill>
+                  <a:schemeClr val="tx1"/>
+                </a:solidFill>
+                <a:latin typeface="+mn-lt"/>
+                <a:ea typeface="+mn-ea"/>
+                <a:cs typeface="+mn-cs"/>
+              </a:defRPr>
+            </a:lvl7pPr>
+            <a:lvl8pPr marL="3429000" indent="-228600" algn="l" defTabSz="914400" rtl="0" eaLnBrk="1" latinLnBrk="0" hangingPunct="1">
+              <a:lnSpc>
+                <a:spcPct val="90000"/>
+              </a:lnSpc>
+              <a:spcBef>
+                <a:spcPts val="500"/>
+              </a:spcBef>
+              <a:buFont typeface="Arial" panose="020B0604020202020204" pitchFamily="34" charset="0"/>
+              <a:buChar char="•"/>
+              <a:defRPr sz="1800" kern="1200">
+                <a:solidFill>
+                  <a:schemeClr val="tx1"/>
+                </a:solidFill>
+                <a:latin typeface="+mn-lt"/>
+                <a:ea typeface="+mn-ea"/>
+                <a:cs typeface="+mn-cs"/>
+              </a:defRPr>
+            </a:lvl8pPr>
+            <a:lvl9pPr marL="3886200" indent="-228600" algn="l" defTabSz="914400" rtl="0" eaLnBrk="1" latinLnBrk="0" hangingPunct="1">
+              <a:lnSpc>
+                <a:spcPct val="90000"/>
+              </a:lnSpc>
+              <a:spcBef>
+                <a:spcPts val="500"/>
+              </a:spcBef>
+              <a:buFont typeface="Arial" panose="020B0604020202020204" pitchFamily="34" charset="0"/>
+              <a:buChar char="•"/>
+              <a:defRPr sz="1800" kern="1200">
+                <a:solidFill>
+                  <a:schemeClr val="tx1"/>
+                </a:solidFill>
+                <a:latin typeface="+mn-lt"/>
+                <a:ea typeface="+mn-ea"/>
+                <a:cs typeface="+mn-cs"/>
+              </a:defRPr>
+            </a:lvl9pPr>
+          </a:lstStyle>
+          <a:p>
+            <a:r>
+              <a:rPr lang="en-US" altLang="zh-CN" dirty="0"/>
+              <a:t>Enterprise Modeling and Analytics – the Cash Flow model</a:t>
+            </a:r>
+          </a:p>
+          <a:p>
+            <a:r>
+              <a:rPr lang="en-US" dirty="0"/>
+              <a:t>Data: date/month/time, missing values, N/A</a:t>
+            </a:r>
+          </a:p>
+          <a:p>
+            <a:r>
+              <a:rPr lang="en-US" dirty="0"/>
+              <a:t>Variables: filter data, </a:t>
+            </a:r>
+          </a:p>
+          <a:p>
+            <a:r>
+              <a:rPr lang="en-US" dirty="0"/>
+              <a:t>merge tables</a:t>
+            </a:r>
+          </a:p>
+          <a:p>
+            <a:pPr lvl="1"/>
+            <a:r>
+              <a:rPr lang="en-US" dirty="0"/>
+              <a:t>Concatenate</a:t>
+            </a:r>
+          </a:p>
+          <a:p>
+            <a:pPr lvl="1"/>
+            <a:r>
+              <a:rPr lang="en-US" dirty="0"/>
+              <a:t>match merging (with n= dataset option)</a:t>
+            </a:r>
+          </a:p>
+          <a:p>
+            <a:r>
+              <a:rPr lang="en-US" dirty="0"/>
+              <a:t>Models: logistic regression with splines</a:t>
+            </a:r>
+          </a:p>
+          <a:p>
+            <a:pPr lvl="1"/>
+            <a:r>
+              <a:rPr lang="en-US" dirty="0"/>
+              <a:t>Choose number and location of the knots.</a:t>
+            </a:r>
+          </a:p>
+          <a:p>
+            <a:r>
+              <a:rPr lang="en-US" dirty="0"/>
+              <a:t>Macro functions</a:t>
+            </a:r>
+          </a:p>
+          <a:p>
+            <a:r>
+              <a:rPr lang="en-US" dirty="0"/>
+              <a:t>Output</a:t>
+            </a:r>
+          </a:p>
+          <a:p>
+            <a:endParaRPr lang="en-US" dirty="0"/>
           </a:p>
         </p:txBody>
       </p:sp>
     </p:spTree>
     <p:extLst>
       <p:ext uri="{BB962C8B-B14F-4D97-AF65-F5344CB8AC3E}">
-        <p14:creationId xmlns:p14="http://schemas.microsoft.com/office/powerpoint/2010/main" val="331261954"/>
-      </p:ext>
-    </p:extLst>
-  </p:cSld>
-  <p:clrMapOvr>
-    <a:masterClrMapping/>
-  </p:clrMapOvr>
-</p:sld>
-</file>
-
-<file path=ppt/slides/slide7.xml><?xml version="1.0" encoding="utf-8"?>
-<p:sld xmlns:a="http://schemas.openxmlformats.org/drawingml/2006/main" xmlns:r="http://schemas.openxmlformats.org/officeDocument/2006/relationships" xmlns:p="http://schemas.openxmlformats.org/presentationml/2006/main">
-  <p:cSld>
-    <p:spTree>
-      <p:nvGrpSpPr>
-        <p:cNvPr id="1" name=""/>
-        <p:cNvGrpSpPr/>
-        <p:nvPr/>
-      </p:nvGrpSpPr>
-      <p:grpSpPr>
-        <a:xfrm>
-          <a:off x="0" y="0"/>
-          <a:ext cx="0" cy="0"/>
-          <a:chOff x="0" y="0"/>
-          <a:chExt cx="0" cy="0"/>
-        </a:xfrm>
-      </p:grpSpPr>
-      <p:sp>
-        <p:nvSpPr>
-          <p:cNvPr id="2" name="Title 1">
-            <a:extLst>
-              <a:ext uri="{FF2B5EF4-FFF2-40B4-BE49-F238E27FC236}">
-                <a16:creationId xmlns:a16="http://schemas.microsoft.com/office/drawing/2014/main" id="{9E681912-C0D5-AF85-91B0-7D9532929F7F}"/>
-              </a:ext>
-            </a:extLst>
-          </p:cNvPr>
-          <p:cNvSpPr>
-            <a:spLocks noGrp="1"/>
-          </p:cNvSpPr>
-          <p:nvPr>
-            <p:ph type="title"/>
-          </p:nvPr>
-        </p:nvSpPr>
-        <p:spPr/>
-        <p:txBody>
-          <a:bodyPr/>
-          <a:lstStyle/>
-          <a:p>
-            <a:endParaRPr lang="en-US"/>
-          </a:p>
-        </p:txBody>
-      </p:sp>
-      <p:sp>
-        <p:nvSpPr>
-          <p:cNvPr id="3" name="Content Placeholder 2">
-            <a:extLst>
-              <a:ext uri="{FF2B5EF4-FFF2-40B4-BE49-F238E27FC236}">
-                <a16:creationId xmlns:a16="http://schemas.microsoft.com/office/drawing/2014/main" id="{E48A637E-A23A-F19C-2EC6-9A9B52F8A2BA}"/>
-              </a:ext>
-            </a:extLst>
-          </p:cNvPr>
-          <p:cNvSpPr>
-            <a:spLocks noGrp="1"/>
-          </p:cNvSpPr>
-          <p:nvPr>
-            <p:ph idx="1"/>
-          </p:nvPr>
-        </p:nvSpPr>
-        <p:spPr/>
-        <p:txBody>
-          <a:bodyPr/>
-          <a:lstStyle/>
-          <a:p>
-            <a:r>
-              <a:rPr lang="en-US" dirty="0"/>
-              <a:t>Where do we </a:t>
-            </a:r>
-            <a:r>
-              <a:rPr lang="en-US"/>
-              <a:t>go from there?</a:t>
-            </a:r>
-          </a:p>
-        </p:txBody>
-      </p:sp>
-    </p:spTree>
-    <p:extLst>
-      <p:ext uri="{BB962C8B-B14F-4D97-AF65-F5344CB8AC3E}">
-        <p14:creationId xmlns:p14="http://schemas.microsoft.com/office/powerpoint/2010/main" val="1238321945"/>
-      </p:ext>
-    </p:extLst>
-  </p:cSld>
-  <p:clrMapOvr>
-    <a:masterClrMapping/>
-  </p:clrMapOvr>
-</p:sld>
-</file>
-
-<file path=ppt/slides/slide8.xml><?xml version="1.0" encoding="utf-8"?>
-<p:sld xmlns:a="http://schemas.openxmlformats.org/drawingml/2006/main" xmlns:r="http://schemas.openxmlformats.org/officeDocument/2006/relationships" xmlns:p="http://schemas.openxmlformats.org/presentationml/2006/main">
-  <p:cSld>
-    <p:spTree>
-      <p:nvGrpSpPr>
-        <p:cNvPr id="1" name=""/>
-        <p:cNvGrpSpPr/>
-        <p:nvPr/>
-      </p:nvGrpSpPr>
-      <p:grpSpPr>
-        <a:xfrm>
-          <a:off x="0" y="0"/>
-          <a:ext cx="0" cy="0"/>
-          <a:chOff x="0" y="0"/>
-          <a:chExt cx="0" cy="0"/>
-        </a:xfrm>
-      </p:grpSpPr>
-      <p:sp>
-        <p:nvSpPr>
-          <p:cNvPr id="2" name="Title 1">
-            <a:extLst>
-              <a:ext uri="{FF2B5EF4-FFF2-40B4-BE49-F238E27FC236}">
-                <a16:creationId xmlns:a16="http://schemas.microsoft.com/office/drawing/2014/main" id="{79765071-DC72-93E5-9B2F-5F473699886E}"/>
-              </a:ext>
-            </a:extLst>
-          </p:cNvPr>
-          <p:cNvSpPr>
-            <a:spLocks noGrp="1"/>
-          </p:cNvSpPr>
-          <p:nvPr>
-            <p:ph type="title"/>
-          </p:nvPr>
-        </p:nvSpPr>
-        <p:spPr/>
-        <p:txBody>
-          <a:bodyPr/>
-          <a:lstStyle/>
-          <a:p>
-            <a:r>
-              <a:rPr lang="en-US" altLang="zh-CN" dirty="0"/>
-              <a:t>Reference:</a:t>
-            </a:r>
-            <a:endParaRPr lang="en-US" dirty="0"/>
-          </a:p>
-        </p:txBody>
-      </p:sp>
-      <p:sp>
-        <p:nvSpPr>
-          <p:cNvPr id="3" name="Content Placeholder 2">
-            <a:extLst>
-              <a:ext uri="{FF2B5EF4-FFF2-40B4-BE49-F238E27FC236}">
-                <a16:creationId xmlns:a16="http://schemas.microsoft.com/office/drawing/2014/main" id="{BA3456FF-E78F-8DA1-FCFF-D93708555E23}"/>
-              </a:ext>
-            </a:extLst>
-          </p:cNvPr>
-          <p:cNvSpPr>
-            <a:spLocks noGrp="1"/>
-          </p:cNvSpPr>
-          <p:nvPr>
-            <p:ph idx="1"/>
-          </p:nvPr>
-        </p:nvSpPr>
-        <p:spPr/>
-        <p:txBody>
-          <a:bodyPr>
-            <a:normAutofit/>
-          </a:bodyPr>
-          <a:lstStyle/>
-          <a:p>
-            <a:r>
-              <a:rPr lang="en-US" sz="2000" dirty="0">
-                <a:hlinkClick r:id="rId2"/>
-              </a:rPr>
-              <a:t>AWS </a:t>
-            </a:r>
-            <a:r>
-              <a:rPr lang="en-US" sz="2000" dirty="0" err="1">
-                <a:hlinkClick r:id="rId2"/>
-              </a:rPr>
-              <a:t>re:Invent</a:t>
-            </a:r>
-            <a:r>
-              <a:rPr lang="en-US" sz="2000" dirty="0">
-                <a:hlinkClick r:id="rId2"/>
-              </a:rPr>
-              <a:t> 2021 - Fannie Mae: Migrating at scale without lifting and shifting</a:t>
-            </a:r>
-            <a:endParaRPr lang="en-US" sz="2000" dirty="0"/>
-          </a:p>
-          <a:p>
-            <a:r>
-              <a:rPr lang="en-US" sz="2000" dirty="0">
-                <a:hlinkClick r:id="rId3"/>
-              </a:rPr>
-              <a:t>Fannie Mae’s Digital Transformation Journey with AWS | Amazon Web Services</a:t>
-            </a:r>
-            <a:endParaRPr lang="en-US" sz="2000" dirty="0"/>
-          </a:p>
-        </p:txBody>
-      </p:sp>
-    </p:spTree>
-    <p:extLst>
-      <p:ext uri="{BB962C8B-B14F-4D97-AF65-F5344CB8AC3E}">
-        <p14:creationId xmlns:p14="http://schemas.microsoft.com/office/powerpoint/2010/main" val="1077489760"/>
+        <p14:creationId xmlns:p14="http://schemas.microsoft.com/office/powerpoint/2010/main" val="4097000794"/>
       </p:ext>
     </p:extLst>
   </p:cSld>
@@ -4322,7 +11918,7 @@
           <p:cNvPr id="2" name="Title 1">
             <a:extLst>
               <a:ext uri="{FF2B5EF4-FFF2-40B4-BE49-F238E27FC236}">
-                <a16:creationId xmlns:a16="http://schemas.microsoft.com/office/drawing/2014/main" id="{082D5B5A-22EB-F6BE-03B9-DA990AE01051}"/>
+                <a16:creationId xmlns:a16="http://schemas.microsoft.com/office/drawing/2014/main" id="{FF673D30-F5D8-4541-A08A-A1F0FD253A32}"/>
               </a:ext>
             </a:extLst>
           </p:cNvPr>
@@ -4340,40 +11936,198 @@
           <a:p>
             <a:r>
               <a:rPr lang="en-US" dirty="0"/>
-              <a:t>Q&amp;A</a:t>
+              <a:t>Accuracy</a:t>
             </a:r>
           </a:p>
         </p:txBody>
       </p:sp>
-      <p:sp>
-        <p:nvSpPr>
-          <p:cNvPr id="3" name="Content Placeholder 2">
-            <a:extLst>
-              <a:ext uri="{FF2B5EF4-FFF2-40B4-BE49-F238E27FC236}">
-                <a16:creationId xmlns:a16="http://schemas.microsoft.com/office/drawing/2014/main" id="{BA79DD26-0915-7E46-B9E9-A23C1002591E}"/>
-              </a:ext>
-            </a:extLst>
-          </p:cNvPr>
-          <p:cNvSpPr>
-            <a:spLocks noGrp="1"/>
-          </p:cNvSpPr>
-          <p:nvPr>
-            <p:ph idx="1"/>
-          </p:nvPr>
-        </p:nvSpPr>
-        <p:spPr/>
-        <p:txBody>
-          <a:bodyPr/>
-          <a:lstStyle/>
-          <a:p>
-            <a:endParaRPr lang="en-US"/>
-          </a:p>
-        </p:txBody>
-      </p:sp>
+      <mc:AlternateContent xmlns:mc="http://schemas.openxmlformats.org/markup-compatibility/2006" xmlns:a14="http://schemas.microsoft.com/office/drawing/2010/main">
+        <mc:Choice Requires="a14">
+          <p:sp>
+            <p:nvSpPr>
+              <p:cNvPr id="3" name="Content Placeholder 2">
+                <a:extLst>
+                  <a:ext uri="{FF2B5EF4-FFF2-40B4-BE49-F238E27FC236}">
+                    <a16:creationId xmlns:a16="http://schemas.microsoft.com/office/drawing/2014/main" id="{47921899-9ED9-44BF-4E51-990C1927209C}"/>
+                  </a:ext>
+                </a:extLst>
+              </p:cNvPr>
+              <p:cNvSpPr>
+                <a:spLocks noGrp="1"/>
+              </p:cNvSpPr>
+              <p:nvPr>
+                <p:ph idx="1"/>
+              </p:nvPr>
+            </p:nvSpPr>
+            <p:spPr/>
+            <p:txBody>
+              <a:bodyPr/>
+              <a:lstStyle/>
+              <a:p>
+                <a14:m>
+                  <m:oMath xmlns:m="http://schemas.openxmlformats.org/officeDocument/2006/math">
+                    <m:r>
+                      <a:rPr lang="en-US" b="0" i="1" smtClean="0">
+                        <a:latin typeface="Cambria Math" panose="02040503050406030204" pitchFamily="18" charset="0"/>
+                      </a:rPr>
+                      <m:t>𝑉𝑎𝑟</m:t>
+                    </m:r>
+                    <m:r>
+                      <a:rPr lang="en-US" b="0" i="1" smtClean="0">
+                        <a:latin typeface="Cambria Math" panose="02040503050406030204" pitchFamily="18" charset="0"/>
+                      </a:rPr>
+                      <m:t>1=</m:t>
+                    </m:r>
+                    <m:f>
+                      <m:fPr>
+                        <m:ctrlPr>
+                          <a:rPr lang="en-US" i="1" smtClean="0">
+                            <a:latin typeface="Cambria Math" panose="02040503050406030204" pitchFamily="18" charset="0"/>
+                          </a:rPr>
+                        </m:ctrlPr>
+                      </m:fPr>
+                      <m:num>
+                        <m:r>
+                          <a:rPr lang="en-US" b="0" i="1" smtClean="0">
+                            <a:latin typeface="Cambria Math" panose="02040503050406030204" pitchFamily="18" charset="0"/>
+                          </a:rPr>
+                          <m:t>𝑉𝑎𝑟</m:t>
+                        </m:r>
+                        <m:r>
+                          <a:rPr lang="en-US" b="0" i="1" smtClean="0">
+                            <a:latin typeface="Cambria Math" panose="02040503050406030204" pitchFamily="18" charset="0"/>
+                          </a:rPr>
+                          <m:t>2</m:t>
+                        </m:r>
+                      </m:num>
+                      <m:den>
+                        <m:r>
+                          <a:rPr lang="en-US" b="0" i="1" smtClean="0">
+                            <a:latin typeface="Cambria Math" panose="02040503050406030204" pitchFamily="18" charset="0"/>
+                          </a:rPr>
+                          <m:t>𝑉𝑎𝑟</m:t>
+                        </m:r>
+                        <m:r>
+                          <a:rPr lang="en-US" b="0" i="1" smtClean="0">
+                            <a:latin typeface="Cambria Math" panose="02040503050406030204" pitchFamily="18" charset="0"/>
+                          </a:rPr>
+                          <m:t>3</m:t>
+                        </m:r>
+                      </m:den>
+                    </m:f>
+                    <m:r>
+                      <a:rPr lang="en-US" b="0" i="1" smtClean="0">
+                        <a:latin typeface="Cambria Math" panose="02040503050406030204" pitchFamily="18" charset="0"/>
+                      </a:rPr>
+                      <m:t> ∗</m:t>
+                    </m:r>
+                    <m:r>
+                      <a:rPr lang="en-US" b="0" i="1" smtClean="0">
+                        <a:latin typeface="Cambria Math" panose="02040503050406030204" pitchFamily="18" charset="0"/>
+                      </a:rPr>
+                      <m:t>𝐻𝑜𝑚𝑒</m:t>
+                    </m:r>
+                    <m:r>
+                      <a:rPr lang="en-US" b="0" i="1" smtClean="0">
+                        <a:latin typeface="Cambria Math" panose="02040503050406030204" pitchFamily="18" charset="0"/>
+                      </a:rPr>
+                      <m:t>_</m:t>
+                    </m:r>
+                    <m:r>
+                      <a:rPr lang="en-US" b="0" i="1" smtClean="0">
+                        <a:latin typeface="Cambria Math" panose="02040503050406030204" pitchFamily="18" charset="0"/>
+                      </a:rPr>
+                      <m:t>𝑝𝑟𝑖𝑐𝑒</m:t>
+                    </m:r>
+                  </m:oMath>
+                </a14:m>
+                <a:endParaRPr lang="en-US" dirty="0"/>
+              </a:p>
+              <a:p>
+                <a:r>
+                  <a:rPr lang="en-US" dirty="0"/>
+                  <a:t>Var2 and var3 have differences at  E-09 level.</a:t>
+                </a:r>
+              </a:p>
+              <a:p>
+                <a:r>
+                  <a:rPr lang="en-US" dirty="0"/>
+                  <a:t>Home price is a large number, </a:t>
+                </a:r>
+              </a:p>
+              <a:p>
+                <a:pPr lvl="1"/>
+                <a:r>
+                  <a:rPr lang="en-US" dirty="0"/>
+                  <a:t>e.g. $1,000,000, </a:t>
+                </a:r>
+              </a:p>
+              <a:p>
+                <a:pPr lvl="1"/>
+                <a:r>
+                  <a:rPr lang="en-US" dirty="0"/>
+                  <a:t>median house price in the U.S. :$430,000</a:t>
+                </a:r>
+              </a:p>
+              <a:p>
+                <a:r>
+                  <a:rPr lang="en-US" dirty="0"/>
+                  <a:t>Var 1 are different</a:t>
+                </a:r>
+              </a:p>
+              <a:p>
+                <a:r>
+                  <a:rPr lang="en-US" dirty="0"/>
+                  <a:t>This can be applied to many cases, such as population, distance.</a:t>
+                </a:r>
+              </a:p>
+            </p:txBody>
+          </p:sp>
+        </mc:Choice>
+        <mc:Fallback xmlns="">
+          <p:sp>
+            <p:nvSpPr>
+              <p:cNvPr id="3" name="Content Placeholder 2">
+                <a:extLst>
+                  <a:ext uri="{FF2B5EF4-FFF2-40B4-BE49-F238E27FC236}">
+                    <a16:creationId xmlns:a16="http://schemas.microsoft.com/office/drawing/2014/main" id="{47921899-9ED9-44BF-4E51-990C1927209C}"/>
+                  </a:ext>
+                </a:extLst>
+              </p:cNvPr>
+              <p:cNvSpPr>
+                <a:spLocks noGrp="1" noRot="1" noChangeAspect="1" noMove="1" noResize="1" noEditPoints="1" noAdjustHandles="1" noChangeArrowheads="1" noChangeShapeType="1" noTextEdit="1"/>
+              </p:cNvSpPr>
+              <p:nvPr>
+                <p:ph idx="1"/>
+              </p:nvPr>
+            </p:nvSpPr>
+            <p:spPr>
+              <a:blipFill>
+                <a:blip r:embed="rId2"/>
+                <a:stretch>
+                  <a:fillRect l="-1043"/>
+                </a:stretch>
+              </a:blipFill>
+            </p:spPr>
+            <p:txBody>
+              <a:bodyPr/>
+              <a:lstStyle/>
+              <a:p>
+                <a:r>
+                  <a:rPr lang="en-US">
+                    <a:noFill/>
+                  </a:rPr>
+                  <a:t> </a:t>
+                </a:r>
+              </a:p>
+            </p:txBody>
+          </p:sp>
+        </mc:Fallback>
+      </mc:AlternateContent>
     </p:spTree>
     <p:extLst>
       <p:ext uri="{BB962C8B-B14F-4D97-AF65-F5344CB8AC3E}">
-        <p14:creationId xmlns:p14="http://schemas.microsoft.com/office/powerpoint/2010/main" val="354203763"/>
+        <p14:creationId xmlns:p14="http://schemas.microsoft.com/office/powerpoint/2010/main" val="3973137075"/>
       </p:ext>
     </p:extLst>
   </p:cSld>

--- a/2026 WSDS - Wujian Xue.pptx
+++ b/2026 WSDS - Wujian Xue.pptx
@@ -127,753 +127,6 @@
 </file>
 
 <file path=ppt/diagrams/colors1.xml><?xml version="1.0" encoding="utf-8"?>
-<dgm:colorsDef xmlns:dgm="http://schemas.openxmlformats.org/drawingml/2006/diagram" xmlns:a="http://schemas.openxmlformats.org/drawingml/2006/main" uniqueId="urn:microsoft.com/office/officeart/2005/8/colors/accent1_2">
-  <dgm:title val=""/>
-  <dgm:desc val=""/>
-  <dgm:catLst>
-    <dgm:cat type="accent1" pri="11200"/>
-  </dgm:catLst>
-  <dgm:styleLbl name="node0">
-    <dgm:fillClrLst meth="repeat">
-      <a:schemeClr val="accent1"/>
-    </dgm:fillClrLst>
-    <dgm:linClrLst meth="repeat">
-      <a:schemeClr val="lt1"/>
-    </dgm:linClrLst>
-    <dgm:effectClrLst/>
-    <dgm:txLinClrLst/>
-    <dgm:txFillClrLst/>
-    <dgm:txEffectClrLst/>
-  </dgm:styleLbl>
-  <dgm:styleLbl name="alignNode1">
-    <dgm:fillClrLst meth="repeat">
-      <a:schemeClr val="accent1"/>
-    </dgm:fillClrLst>
-    <dgm:linClrLst meth="repeat">
-      <a:schemeClr val="accent1"/>
-    </dgm:linClrLst>
-    <dgm:effectClrLst/>
-    <dgm:txLinClrLst/>
-    <dgm:txFillClrLst/>
-    <dgm:txEffectClrLst/>
-  </dgm:styleLbl>
-  <dgm:styleLbl name="node1">
-    <dgm:fillClrLst meth="repeat">
-      <a:schemeClr val="accent1"/>
-    </dgm:fillClrLst>
-    <dgm:linClrLst meth="repeat">
-      <a:schemeClr val="lt1"/>
-    </dgm:linClrLst>
-    <dgm:effectClrLst/>
-    <dgm:txLinClrLst/>
-    <dgm:txFillClrLst/>
-    <dgm:txEffectClrLst/>
-  </dgm:styleLbl>
-  <dgm:styleLbl name="lnNode1">
-    <dgm:fillClrLst meth="repeat">
-      <a:schemeClr val="accent1"/>
-    </dgm:fillClrLst>
-    <dgm:linClrLst meth="repeat">
-      <a:schemeClr val="lt1"/>
-    </dgm:linClrLst>
-    <dgm:effectClrLst/>
-    <dgm:txLinClrLst/>
-    <dgm:txFillClrLst/>
-    <dgm:txEffectClrLst/>
-  </dgm:styleLbl>
-  <dgm:styleLbl name="vennNode1">
-    <dgm:fillClrLst meth="repeat">
-      <a:schemeClr val="accent1">
-        <a:alpha val="50000"/>
-      </a:schemeClr>
-    </dgm:fillClrLst>
-    <dgm:linClrLst meth="repeat">
-      <a:schemeClr val="lt1"/>
-    </dgm:linClrLst>
-    <dgm:effectClrLst/>
-    <dgm:txLinClrLst/>
-    <dgm:txFillClrLst/>
-    <dgm:txEffectClrLst/>
-  </dgm:styleLbl>
-  <dgm:styleLbl name="node2">
-    <dgm:fillClrLst meth="repeat">
-      <a:schemeClr val="accent1"/>
-    </dgm:fillClrLst>
-    <dgm:linClrLst meth="repeat">
-      <a:schemeClr val="lt1"/>
-    </dgm:linClrLst>
-    <dgm:effectClrLst/>
-    <dgm:txLinClrLst/>
-    <dgm:txFillClrLst/>
-    <dgm:txEffectClrLst/>
-  </dgm:styleLbl>
-  <dgm:styleLbl name="node3">
-    <dgm:fillClrLst meth="repeat">
-      <a:schemeClr val="accent1"/>
-    </dgm:fillClrLst>
-    <dgm:linClrLst meth="repeat">
-      <a:schemeClr val="lt1"/>
-    </dgm:linClrLst>
-    <dgm:effectClrLst/>
-    <dgm:txLinClrLst/>
-    <dgm:txFillClrLst/>
-    <dgm:txEffectClrLst/>
-  </dgm:styleLbl>
-  <dgm:styleLbl name="node4">
-    <dgm:fillClrLst meth="repeat">
-      <a:schemeClr val="accent1"/>
-    </dgm:fillClrLst>
-    <dgm:linClrLst meth="repeat">
-      <a:schemeClr val="lt1"/>
-    </dgm:linClrLst>
-    <dgm:effectClrLst/>
-    <dgm:txLinClrLst/>
-    <dgm:txFillClrLst/>
-    <dgm:txEffectClrLst/>
-  </dgm:styleLbl>
-  <dgm:styleLbl name="fgImgPlace1">
-    <dgm:fillClrLst meth="repeat">
-      <a:schemeClr val="accent1">
-        <a:tint val="50000"/>
-      </a:schemeClr>
-    </dgm:fillClrLst>
-    <dgm:linClrLst meth="repeat">
-      <a:schemeClr val="lt1"/>
-    </dgm:linClrLst>
-    <dgm:effectClrLst/>
-    <dgm:txLinClrLst/>
-    <dgm:txFillClrLst meth="repeat">
-      <a:schemeClr val="lt1"/>
-    </dgm:txFillClrLst>
-    <dgm:txEffectClrLst/>
-  </dgm:styleLbl>
-  <dgm:styleLbl name="alignImgPlace1">
-    <dgm:fillClrLst meth="repeat">
-      <a:schemeClr val="accent1">
-        <a:tint val="50000"/>
-      </a:schemeClr>
-    </dgm:fillClrLst>
-    <dgm:linClrLst meth="repeat">
-      <a:schemeClr val="lt1"/>
-    </dgm:linClrLst>
-    <dgm:effectClrLst/>
-    <dgm:txLinClrLst/>
-    <dgm:txFillClrLst meth="repeat">
-      <a:schemeClr val="lt1"/>
-    </dgm:txFillClrLst>
-    <dgm:txEffectClrLst/>
-  </dgm:styleLbl>
-  <dgm:styleLbl name="bgImgPlace1">
-    <dgm:fillClrLst meth="repeat">
-      <a:schemeClr val="accent1">
-        <a:tint val="50000"/>
-      </a:schemeClr>
-    </dgm:fillClrLst>
-    <dgm:linClrLst meth="repeat">
-      <a:schemeClr val="lt1"/>
-    </dgm:linClrLst>
-    <dgm:effectClrLst/>
-    <dgm:txLinClrLst/>
-    <dgm:txFillClrLst meth="repeat">
-      <a:schemeClr val="lt1"/>
-    </dgm:txFillClrLst>
-    <dgm:txEffectClrLst/>
-  </dgm:styleLbl>
-  <dgm:styleLbl name="sibTrans2D1">
-    <dgm:fillClrLst meth="repeat">
-      <a:schemeClr val="accent1">
-        <a:tint val="60000"/>
-      </a:schemeClr>
-    </dgm:fillClrLst>
-    <dgm:linClrLst meth="repeat">
-      <a:schemeClr val="accent1">
-        <a:tint val="60000"/>
-      </a:schemeClr>
-    </dgm:linClrLst>
-    <dgm:effectClrLst/>
-    <dgm:txLinClrLst/>
-    <dgm:txFillClrLst/>
-    <dgm:txEffectClrLst/>
-  </dgm:styleLbl>
-  <dgm:styleLbl name="fgSibTrans2D1">
-    <dgm:fillClrLst meth="repeat">
-      <a:schemeClr val="accent1">
-        <a:tint val="60000"/>
-      </a:schemeClr>
-    </dgm:fillClrLst>
-    <dgm:linClrLst meth="repeat">
-      <a:schemeClr val="accent1">
-        <a:tint val="60000"/>
-      </a:schemeClr>
-    </dgm:linClrLst>
-    <dgm:effectClrLst/>
-    <dgm:txLinClrLst/>
-    <dgm:txFillClrLst/>
-    <dgm:txEffectClrLst/>
-  </dgm:styleLbl>
-  <dgm:styleLbl name="bgSibTrans2D1">
-    <dgm:fillClrLst meth="repeat">
-      <a:schemeClr val="accent1">
-        <a:tint val="60000"/>
-      </a:schemeClr>
-    </dgm:fillClrLst>
-    <dgm:linClrLst meth="repeat">
-      <a:schemeClr val="accent1">
-        <a:tint val="60000"/>
-      </a:schemeClr>
-    </dgm:linClrLst>
-    <dgm:effectClrLst/>
-    <dgm:txLinClrLst/>
-    <dgm:txFillClrLst/>
-    <dgm:txEffectClrLst/>
-  </dgm:styleLbl>
-  <dgm:styleLbl name="sibTrans1D1">
-    <dgm:fillClrLst meth="repeat">
-      <a:schemeClr val="accent1"/>
-    </dgm:fillClrLst>
-    <dgm:linClrLst meth="repeat">
-      <a:schemeClr val="accent1"/>
-    </dgm:linClrLst>
-    <dgm:effectClrLst/>
-    <dgm:txLinClrLst/>
-    <dgm:txFillClrLst meth="repeat">
-      <a:schemeClr val="tx1"/>
-    </dgm:txFillClrLst>
-    <dgm:txEffectClrLst/>
-  </dgm:styleLbl>
-  <dgm:styleLbl name="callout">
-    <dgm:fillClrLst meth="repeat">
-      <a:schemeClr val="accent1"/>
-    </dgm:fillClrLst>
-    <dgm:linClrLst meth="repeat">
-      <a:schemeClr val="accent1">
-        <a:tint val="50000"/>
-      </a:schemeClr>
-    </dgm:linClrLst>
-    <dgm:effectClrLst/>
-    <dgm:txLinClrLst/>
-    <dgm:txFillClrLst meth="repeat">
-      <a:schemeClr val="tx1"/>
-    </dgm:txFillClrLst>
-    <dgm:txEffectClrLst/>
-  </dgm:styleLbl>
-  <dgm:styleLbl name="asst0">
-    <dgm:fillClrLst meth="repeat">
-      <a:schemeClr val="accent1"/>
-    </dgm:fillClrLst>
-    <dgm:linClrLst meth="repeat">
-      <a:schemeClr val="lt1"/>
-    </dgm:linClrLst>
-    <dgm:effectClrLst/>
-    <dgm:txLinClrLst/>
-    <dgm:txFillClrLst/>
-    <dgm:txEffectClrLst/>
-  </dgm:styleLbl>
-  <dgm:styleLbl name="asst1">
-    <dgm:fillClrLst meth="repeat">
-      <a:schemeClr val="accent1"/>
-    </dgm:fillClrLst>
-    <dgm:linClrLst meth="repeat">
-      <a:schemeClr val="lt1"/>
-    </dgm:linClrLst>
-    <dgm:effectClrLst/>
-    <dgm:txLinClrLst/>
-    <dgm:txFillClrLst/>
-    <dgm:txEffectClrLst/>
-  </dgm:styleLbl>
-  <dgm:styleLbl name="asst2">
-    <dgm:fillClrLst meth="repeat">
-      <a:schemeClr val="accent1"/>
-    </dgm:fillClrLst>
-    <dgm:linClrLst meth="repeat">
-      <a:schemeClr val="lt1"/>
-    </dgm:linClrLst>
-    <dgm:effectClrLst/>
-    <dgm:txLinClrLst/>
-    <dgm:txFillClrLst/>
-    <dgm:txEffectClrLst/>
-  </dgm:styleLbl>
-  <dgm:styleLbl name="asst3">
-    <dgm:fillClrLst meth="repeat">
-      <a:schemeClr val="accent1"/>
-    </dgm:fillClrLst>
-    <dgm:linClrLst meth="repeat">
-      <a:schemeClr val="lt1"/>
-    </dgm:linClrLst>
-    <dgm:effectClrLst/>
-    <dgm:txLinClrLst/>
-    <dgm:txFillClrLst/>
-    <dgm:txEffectClrLst/>
-  </dgm:styleLbl>
-  <dgm:styleLbl name="asst4">
-    <dgm:fillClrLst meth="repeat">
-      <a:schemeClr val="accent1"/>
-    </dgm:fillClrLst>
-    <dgm:linClrLst meth="repeat">
-      <a:schemeClr val="lt1"/>
-    </dgm:linClrLst>
-    <dgm:effectClrLst/>
-    <dgm:txLinClrLst/>
-    <dgm:txFillClrLst/>
-    <dgm:txEffectClrLst/>
-  </dgm:styleLbl>
-  <dgm:styleLbl name="parChTrans2D1">
-    <dgm:fillClrLst meth="repeat">
-      <a:schemeClr val="accent1">
-        <a:tint val="60000"/>
-      </a:schemeClr>
-    </dgm:fillClrLst>
-    <dgm:linClrLst meth="repeat">
-      <a:schemeClr val="accent1">
-        <a:tint val="60000"/>
-      </a:schemeClr>
-    </dgm:linClrLst>
-    <dgm:effectClrLst/>
-    <dgm:txLinClrLst/>
-    <dgm:txFillClrLst meth="repeat">
-      <a:schemeClr val="lt1"/>
-    </dgm:txFillClrLst>
-    <dgm:txEffectClrLst/>
-  </dgm:styleLbl>
-  <dgm:styleLbl name="parChTrans2D2">
-    <dgm:fillClrLst meth="repeat">
-      <a:schemeClr val="accent1"/>
-    </dgm:fillClrLst>
-    <dgm:linClrLst meth="repeat">
-      <a:schemeClr val="accent1"/>
-    </dgm:linClrLst>
-    <dgm:effectClrLst/>
-    <dgm:txLinClrLst/>
-    <dgm:txFillClrLst meth="repeat">
-      <a:schemeClr val="lt1"/>
-    </dgm:txFillClrLst>
-    <dgm:txEffectClrLst/>
-  </dgm:styleLbl>
-  <dgm:styleLbl name="parChTrans2D3">
-    <dgm:fillClrLst meth="repeat">
-      <a:schemeClr val="accent1"/>
-    </dgm:fillClrLst>
-    <dgm:linClrLst meth="repeat">
-      <a:schemeClr val="accent1"/>
-    </dgm:linClrLst>
-    <dgm:effectClrLst/>
-    <dgm:txLinClrLst/>
-    <dgm:txFillClrLst meth="repeat">
-      <a:schemeClr val="lt1"/>
-    </dgm:txFillClrLst>
-    <dgm:txEffectClrLst/>
-  </dgm:styleLbl>
-  <dgm:styleLbl name="parChTrans2D4">
-    <dgm:fillClrLst meth="repeat">
-      <a:schemeClr val="accent1"/>
-    </dgm:fillClrLst>
-    <dgm:linClrLst meth="repeat">
-      <a:schemeClr val="accent1"/>
-    </dgm:linClrLst>
-    <dgm:effectClrLst/>
-    <dgm:txLinClrLst/>
-    <dgm:txFillClrLst meth="repeat">
-      <a:schemeClr val="lt1"/>
-    </dgm:txFillClrLst>
-    <dgm:txEffectClrLst/>
-  </dgm:styleLbl>
-  <dgm:styleLbl name="parChTrans1D1">
-    <dgm:fillClrLst meth="repeat">
-      <a:schemeClr val="accent1"/>
-    </dgm:fillClrLst>
-    <dgm:linClrLst meth="repeat">
-      <a:schemeClr val="accent1">
-        <a:shade val="60000"/>
-      </a:schemeClr>
-    </dgm:linClrLst>
-    <dgm:effectClrLst/>
-    <dgm:txLinClrLst/>
-    <dgm:txFillClrLst meth="repeat">
-      <a:schemeClr val="tx1"/>
-    </dgm:txFillClrLst>
-    <dgm:txEffectClrLst/>
-  </dgm:styleLbl>
-  <dgm:styleLbl name="parChTrans1D2">
-    <dgm:fillClrLst meth="repeat">
-      <a:schemeClr val="accent1"/>
-    </dgm:fillClrLst>
-    <dgm:linClrLst meth="repeat">
-      <a:schemeClr val="accent1">
-        <a:shade val="60000"/>
-      </a:schemeClr>
-    </dgm:linClrLst>
-    <dgm:effectClrLst/>
-    <dgm:txLinClrLst/>
-    <dgm:txFillClrLst meth="repeat">
-      <a:schemeClr val="tx1"/>
-    </dgm:txFillClrLst>
-    <dgm:txEffectClrLst/>
-  </dgm:styleLbl>
-  <dgm:styleLbl name="parChTrans1D3">
-    <dgm:fillClrLst meth="repeat">
-      <a:schemeClr val="accent1"/>
-    </dgm:fillClrLst>
-    <dgm:linClrLst meth="repeat">
-      <a:schemeClr val="accent1">
-        <a:shade val="80000"/>
-      </a:schemeClr>
-    </dgm:linClrLst>
-    <dgm:effectClrLst/>
-    <dgm:txLinClrLst/>
-    <dgm:txFillClrLst meth="repeat">
-      <a:schemeClr val="tx1"/>
-    </dgm:txFillClrLst>
-    <dgm:txEffectClrLst/>
-  </dgm:styleLbl>
-  <dgm:styleLbl name="parChTrans1D4">
-    <dgm:fillClrLst meth="repeat">
-      <a:schemeClr val="accent1"/>
-    </dgm:fillClrLst>
-    <dgm:linClrLst meth="repeat">
-      <a:schemeClr val="accent1">
-        <a:shade val="80000"/>
-      </a:schemeClr>
-    </dgm:linClrLst>
-    <dgm:effectClrLst/>
-    <dgm:txLinClrLst/>
-    <dgm:txFillClrLst meth="repeat">
-      <a:schemeClr val="tx1"/>
-    </dgm:txFillClrLst>
-    <dgm:txEffectClrLst/>
-  </dgm:styleLbl>
-  <dgm:styleLbl name="fgAcc1">
-    <dgm:fillClrLst meth="repeat">
-      <a:schemeClr val="lt1">
-        <a:alpha val="90000"/>
-      </a:schemeClr>
-    </dgm:fillClrLst>
-    <dgm:linClrLst meth="repeat">
-      <a:schemeClr val="accent1"/>
-    </dgm:linClrLst>
-    <dgm:effectClrLst/>
-    <dgm:txLinClrLst/>
-    <dgm:txFillClrLst meth="repeat">
-      <a:schemeClr val="dk1"/>
-    </dgm:txFillClrLst>
-    <dgm:txEffectClrLst/>
-  </dgm:styleLbl>
-  <dgm:styleLbl name="conFgAcc1">
-    <dgm:fillClrLst meth="repeat">
-      <a:schemeClr val="lt1">
-        <a:alpha val="90000"/>
-      </a:schemeClr>
-    </dgm:fillClrLst>
-    <dgm:linClrLst meth="repeat">
-      <a:schemeClr val="accent1"/>
-    </dgm:linClrLst>
-    <dgm:effectClrLst/>
-    <dgm:txLinClrLst/>
-    <dgm:txFillClrLst meth="repeat">
-      <a:schemeClr val="dk1"/>
-    </dgm:txFillClrLst>
-    <dgm:txEffectClrLst/>
-  </dgm:styleLbl>
-  <dgm:styleLbl name="alignAcc1">
-    <dgm:fillClrLst meth="repeat">
-      <a:schemeClr val="lt1">
-        <a:alpha val="90000"/>
-      </a:schemeClr>
-    </dgm:fillClrLst>
-    <dgm:linClrLst meth="repeat">
-      <a:schemeClr val="accent1"/>
-    </dgm:linClrLst>
-    <dgm:effectClrLst/>
-    <dgm:txLinClrLst/>
-    <dgm:txFillClrLst meth="repeat">
-      <a:schemeClr val="dk1"/>
-    </dgm:txFillClrLst>
-    <dgm:txEffectClrLst/>
-  </dgm:styleLbl>
-  <dgm:styleLbl name="trAlignAcc1">
-    <dgm:fillClrLst meth="repeat">
-      <a:schemeClr val="lt1">
-        <a:alpha val="40000"/>
-      </a:schemeClr>
-    </dgm:fillClrLst>
-    <dgm:linClrLst meth="repeat">
-      <a:schemeClr val="accent1"/>
-    </dgm:linClrLst>
-    <dgm:effectClrLst/>
-    <dgm:txLinClrLst/>
-    <dgm:txFillClrLst meth="repeat">
-      <a:schemeClr val="dk1"/>
-    </dgm:txFillClrLst>
-    <dgm:txEffectClrLst/>
-  </dgm:styleLbl>
-  <dgm:styleLbl name="bgAcc1">
-    <dgm:fillClrLst meth="repeat">
-      <a:schemeClr val="lt1">
-        <a:alpha val="90000"/>
-      </a:schemeClr>
-    </dgm:fillClrLst>
-    <dgm:linClrLst meth="repeat">
-      <a:schemeClr val="accent1"/>
-    </dgm:linClrLst>
-    <dgm:effectClrLst/>
-    <dgm:txLinClrLst/>
-    <dgm:txFillClrLst meth="repeat">
-      <a:schemeClr val="dk1"/>
-    </dgm:txFillClrLst>
-    <dgm:txEffectClrLst/>
-  </dgm:styleLbl>
-  <dgm:styleLbl name="solidFgAcc1">
-    <dgm:fillClrLst meth="repeat">
-      <a:schemeClr val="lt1"/>
-    </dgm:fillClrLst>
-    <dgm:linClrLst meth="repeat">
-      <a:schemeClr val="accent1"/>
-    </dgm:linClrLst>
-    <dgm:effectClrLst/>
-    <dgm:txLinClrLst/>
-    <dgm:txFillClrLst meth="repeat">
-      <a:schemeClr val="dk1"/>
-    </dgm:txFillClrLst>
-    <dgm:txEffectClrLst/>
-  </dgm:styleLbl>
-  <dgm:styleLbl name="solidAlignAcc1">
-    <dgm:fillClrLst meth="repeat">
-      <a:schemeClr val="lt1"/>
-    </dgm:fillClrLst>
-    <dgm:linClrLst meth="repeat">
-      <a:schemeClr val="accent1"/>
-    </dgm:linClrLst>
-    <dgm:effectClrLst/>
-    <dgm:txLinClrLst/>
-    <dgm:txFillClrLst meth="repeat">
-      <a:schemeClr val="dk1"/>
-    </dgm:txFillClrLst>
-    <dgm:txEffectClrLst/>
-  </dgm:styleLbl>
-  <dgm:styleLbl name="solidBgAcc1">
-    <dgm:fillClrLst meth="repeat">
-      <a:schemeClr val="lt1"/>
-    </dgm:fillClrLst>
-    <dgm:linClrLst meth="repeat">
-      <a:schemeClr val="accent1"/>
-    </dgm:linClrLst>
-    <dgm:effectClrLst/>
-    <dgm:txLinClrLst/>
-    <dgm:txFillClrLst meth="repeat">
-      <a:schemeClr val="dk1"/>
-    </dgm:txFillClrLst>
-    <dgm:txEffectClrLst/>
-  </dgm:styleLbl>
-  <dgm:styleLbl name="fgAccFollowNode1">
-    <dgm:fillClrLst meth="repeat">
-      <a:schemeClr val="accent1">
-        <a:alpha val="90000"/>
-        <a:tint val="40000"/>
-      </a:schemeClr>
-    </dgm:fillClrLst>
-    <dgm:linClrLst meth="repeat">
-      <a:schemeClr val="accent1">
-        <a:alpha val="90000"/>
-        <a:tint val="40000"/>
-      </a:schemeClr>
-    </dgm:linClrLst>
-    <dgm:effectClrLst/>
-    <dgm:txLinClrLst/>
-    <dgm:txFillClrLst meth="repeat">
-      <a:schemeClr val="dk1"/>
-    </dgm:txFillClrLst>
-    <dgm:txEffectClrLst/>
-  </dgm:styleLbl>
-  <dgm:styleLbl name="alignAccFollowNode1">
-    <dgm:fillClrLst meth="repeat">
-      <a:schemeClr val="accent1">
-        <a:alpha val="90000"/>
-        <a:tint val="40000"/>
-      </a:schemeClr>
-    </dgm:fillClrLst>
-    <dgm:linClrLst meth="repeat">
-      <a:schemeClr val="accent1">
-        <a:alpha val="90000"/>
-        <a:tint val="40000"/>
-      </a:schemeClr>
-    </dgm:linClrLst>
-    <dgm:effectClrLst/>
-    <dgm:txLinClrLst/>
-    <dgm:txFillClrLst meth="repeat">
-      <a:schemeClr val="dk1"/>
-    </dgm:txFillClrLst>
-    <dgm:txEffectClrLst/>
-  </dgm:styleLbl>
-  <dgm:styleLbl name="bgAccFollowNode1">
-    <dgm:fillClrLst meth="repeat">
-      <a:schemeClr val="accent1">
-        <a:alpha val="90000"/>
-        <a:tint val="40000"/>
-      </a:schemeClr>
-    </dgm:fillClrLst>
-    <dgm:linClrLst meth="repeat">
-      <a:schemeClr val="accent1">
-        <a:alpha val="90000"/>
-        <a:tint val="40000"/>
-      </a:schemeClr>
-    </dgm:linClrLst>
-    <dgm:effectClrLst/>
-    <dgm:txLinClrLst/>
-    <dgm:txFillClrLst meth="repeat">
-      <a:schemeClr val="dk1"/>
-    </dgm:txFillClrLst>
-    <dgm:txEffectClrLst/>
-  </dgm:styleLbl>
-  <dgm:styleLbl name="fgAcc0">
-    <dgm:fillClrLst meth="repeat">
-      <a:schemeClr val="lt1">
-        <a:alpha val="90000"/>
-      </a:schemeClr>
-    </dgm:fillClrLst>
-    <dgm:linClrLst meth="repeat">
-      <a:schemeClr val="accent1"/>
-    </dgm:linClrLst>
-    <dgm:effectClrLst/>
-    <dgm:txLinClrLst/>
-    <dgm:txFillClrLst meth="repeat">
-      <a:schemeClr val="dk1"/>
-    </dgm:txFillClrLst>
-    <dgm:txEffectClrLst/>
-  </dgm:styleLbl>
-  <dgm:styleLbl name="fgAcc2">
-    <dgm:fillClrLst meth="repeat">
-      <a:schemeClr val="lt1">
-        <a:alpha val="90000"/>
-      </a:schemeClr>
-    </dgm:fillClrLst>
-    <dgm:linClrLst meth="repeat">
-      <a:schemeClr val="accent1"/>
-    </dgm:linClrLst>
-    <dgm:effectClrLst/>
-    <dgm:txLinClrLst/>
-    <dgm:txFillClrLst meth="repeat">
-      <a:schemeClr val="dk1"/>
-    </dgm:txFillClrLst>
-    <dgm:txEffectClrLst/>
-  </dgm:styleLbl>
-  <dgm:styleLbl name="fgAcc3">
-    <dgm:fillClrLst meth="repeat">
-      <a:schemeClr val="lt1">
-        <a:alpha val="90000"/>
-      </a:schemeClr>
-    </dgm:fillClrLst>
-    <dgm:linClrLst meth="repeat">
-      <a:schemeClr val="accent1"/>
-    </dgm:linClrLst>
-    <dgm:effectClrLst/>
-    <dgm:txLinClrLst/>
-    <dgm:txFillClrLst meth="repeat">
-      <a:schemeClr val="dk1"/>
-    </dgm:txFillClrLst>
-    <dgm:txEffectClrLst/>
-  </dgm:styleLbl>
-  <dgm:styleLbl name="fgAcc4">
-    <dgm:fillClrLst meth="repeat">
-      <a:schemeClr val="lt1">
-        <a:alpha val="90000"/>
-      </a:schemeClr>
-    </dgm:fillClrLst>
-    <dgm:linClrLst meth="repeat">
-      <a:schemeClr val="accent1"/>
-    </dgm:linClrLst>
-    <dgm:effectClrLst/>
-    <dgm:txLinClrLst/>
-    <dgm:txFillClrLst meth="repeat">
-      <a:schemeClr val="dk1"/>
-    </dgm:txFillClrLst>
-    <dgm:txEffectClrLst/>
-  </dgm:styleLbl>
-  <dgm:styleLbl name="bgShp">
-    <dgm:fillClrLst meth="repeat">
-      <a:schemeClr val="accent1">
-        <a:tint val="40000"/>
-      </a:schemeClr>
-    </dgm:fillClrLst>
-    <dgm:linClrLst meth="repeat">
-      <a:schemeClr val="accent1"/>
-    </dgm:linClrLst>
-    <dgm:effectClrLst/>
-    <dgm:txLinClrLst/>
-    <dgm:txFillClrLst meth="repeat">
-      <a:schemeClr val="dk1"/>
-    </dgm:txFillClrLst>
-    <dgm:txEffectClrLst/>
-  </dgm:styleLbl>
-  <dgm:styleLbl name="dkBgShp">
-    <dgm:fillClrLst meth="repeat">
-      <a:schemeClr val="accent1">
-        <a:shade val="80000"/>
-      </a:schemeClr>
-    </dgm:fillClrLst>
-    <dgm:linClrLst meth="repeat">
-      <a:schemeClr val="accent1"/>
-    </dgm:linClrLst>
-    <dgm:effectClrLst/>
-    <dgm:txLinClrLst/>
-    <dgm:txFillClrLst meth="repeat">
-      <a:schemeClr val="lt1"/>
-    </dgm:txFillClrLst>
-    <dgm:txEffectClrLst/>
-  </dgm:styleLbl>
-  <dgm:styleLbl name="trBgShp">
-    <dgm:fillClrLst meth="repeat">
-      <a:schemeClr val="accent1">
-        <a:tint val="50000"/>
-        <a:alpha val="40000"/>
-      </a:schemeClr>
-    </dgm:fillClrLst>
-    <dgm:linClrLst meth="repeat">
-      <a:schemeClr val="accent1"/>
-    </dgm:linClrLst>
-    <dgm:effectClrLst/>
-    <dgm:txLinClrLst/>
-    <dgm:txFillClrLst meth="repeat">
-      <a:schemeClr val="lt1"/>
-    </dgm:txFillClrLst>
-    <dgm:txEffectClrLst/>
-  </dgm:styleLbl>
-  <dgm:styleLbl name="fgShp">
-    <dgm:fillClrLst meth="repeat">
-      <a:schemeClr val="accent1">
-        <a:tint val="60000"/>
-      </a:schemeClr>
-    </dgm:fillClrLst>
-    <dgm:linClrLst meth="repeat">
-      <a:schemeClr val="lt1"/>
-    </dgm:linClrLst>
-    <dgm:effectClrLst/>
-    <dgm:txLinClrLst/>
-    <dgm:txFillClrLst meth="repeat">
-      <a:schemeClr val="dk1"/>
-    </dgm:txFillClrLst>
-    <dgm:txEffectClrLst/>
-  </dgm:styleLbl>
-  <dgm:styleLbl name="revTx">
-    <dgm:fillClrLst meth="repeat">
-      <a:schemeClr val="lt1">
-        <a:alpha val="0"/>
-      </a:schemeClr>
-    </dgm:fillClrLst>
-    <dgm:linClrLst meth="repeat">
-      <a:schemeClr val="dk1">
-        <a:alpha val="0"/>
-      </a:schemeClr>
-    </dgm:linClrLst>
-    <dgm:effectClrLst/>
-    <dgm:txLinClrLst/>
-    <dgm:txFillClrLst meth="repeat">
-      <a:schemeClr val="tx1"/>
-    </dgm:txFillClrLst>
-    <dgm:txEffectClrLst/>
-  </dgm:styleLbl>
-</dgm:colorsDef>
-</file>
-
-<file path=ppt/diagrams/colors2.xml><?xml version="1.0" encoding="utf-8"?>
 <dgm:colorsDef xmlns:dgm="http://schemas.openxmlformats.org/drawingml/2006/diagram" xmlns:a="http://schemas.openxmlformats.org/drawingml/2006/main" uniqueId="urn:microsoft.com/office/officeart/2005/8/colors/accent1_2">
   <dgm:title val=""/>
   <dgm:desc val=""/>
@@ -1871,495 +1124,6 @@
 </dgm:dataModel>
 </file>
 
-<file path=ppt/diagrams/data2.xml><?xml version="1.0" encoding="utf-8"?>
-<dgm:dataModel xmlns:dgm="http://schemas.openxmlformats.org/drawingml/2006/diagram" xmlns:a="http://schemas.openxmlformats.org/drawingml/2006/main">
-  <dgm:ptLst>
-    <dgm:pt modelId="{4A2BAD2F-C6BD-42BE-B521-AEF54FC35A84}" type="doc">
-      <dgm:prSet loTypeId="urn:microsoft.com/office/officeart/2005/8/layout/process4" loCatId="process" qsTypeId="urn:microsoft.com/office/officeart/2005/8/quickstyle/simple1" qsCatId="simple" csTypeId="urn:microsoft.com/office/officeart/2005/8/colors/accent1_2" csCatId="accent1" phldr="1"/>
-      <dgm:spPr/>
-      <dgm:t>
-        <a:bodyPr/>
-        <a:lstStyle/>
-        <a:p>
-          <a:endParaRPr lang="en-US"/>
-        </a:p>
-      </dgm:t>
-    </dgm:pt>
-    <dgm:pt modelId="{63BCB48E-6580-4F8C-BE41-3AA9365A60D9}">
-      <dgm:prSet phldrT="[Text]" phldr="0"/>
-      <dgm:spPr/>
-      <dgm:t>
-        <a:bodyPr/>
-        <a:lstStyle/>
-        <a:p>
-          <a:r>
-            <a:rPr lang="en-US" dirty="0"/>
-            <a:t>data</a:t>
-          </a:r>
-        </a:p>
-      </dgm:t>
-    </dgm:pt>
-    <dgm:pt modelId="{B0CACA04-FF4B-4401-8ABA-31A959DBA274}" type="parTrans" cxnId="{5EE3CE6B-1BC3-4914-8195-D031D88D80EA}">
-      <dgm:prSet/>
-      <dgm:spPr/>
-      <dgm:t>
-        <a:bodyPr/>
-        <a:lstStyle/>
-        <a:p>
-          <a:endParaRPr lang="en-US"/>
-        </a:p>
-      </dgm:t>
-    </dgm:pt>
-    <dgm:pt modelId="{FEF831AA-DFBB-444E-A754-ECA5184B54C1}" type="sibTrans" cxnId="{5EE3CE6B-1BC3-4914-8195-D031D88D80EA}">
-      <dgm:prSet/>
-      <dgm:spPr/>
-      <dgm:t>
-        <a:bodyPr/>
-        <a:lstStyle/>
-        <a:p>
-          <a:endParaRPr lang="en-US"/>
-        </a:p>
-      </dgm:t>
-    </dgm:pt>
-    <dgm:pt modelId="{4D5FDF7B-8E5D-49C4-BF8A-4283C1AF15F7}">
-      <dgm:prSet phldrT="[Text]" phldr="1"/>
-      <dgm:spPr/>
-      <dgm:t>
-        <a:bodyPr/>
-        <a:lstStyle/>
-        <a:p>
-          <a:endParaRPr lang="en-US" dirty="0"/>
-        </a:p>
-      </dgm:t>
-    </dgm:pt>
-    <dgm:pt modelId="{70FA3552-5DE9-4E6F-814C-2B2767A67D72}" type="parTrans" cxnId="{0D12DDB1-6A2C-421E-80E3-00AADB916462}">
-      <dgm:prSet/>
-      <dgm:spPr/>
-      <dgm:t>
-        <a:bodyPr/>
-        <a:lstStyle/>
-        <a:p>
-          <a:endParaRPr lang="en-US"/>
-        </a:p>
-      </dgm:t>
-    </dgm:pt>
-    <dgm:pt modelId="{40C368F5-C26D-4CB0-A6E6-F3D4AE19313E}" type="sibTrans" cxnId="{0D12DDB1-6A2C-421E-80E3-00AADB916462}">
-      <dgm:prSet/>
-      <dgm:spPr/>
-      <dgm:t>
-        <a:bodyPr/>
-        <a:lstStyle/>
-        <a:p>
-          <a:endParaRPr lang="en-US"/>
-        </a:p>
-      </dgm:t>
-    </dgm:pt>
-    <dgm:pt modelId="{9BF7C278-0898-4F75-B99B-942AA4A4EF6A}">
-      <dgm:prSet phldrT="[Text]" phldr="1"/>
-      <dgm:spPr/>
-      <dgm:t>
-        <a:bodyPr/>
-        <a:lstStyle/>
-        <a:p>
-          <a:endParaRPr lang="en-US"/>
-        </a:p>
-      </dgm:t>
-    </dgm:pt>
-    <dgm:pt modelId="{81152DB3-B3FA-4DF7-941F-A2DDF2884AC1}" type="parTrans" cxnId="{207A89ED-9122-4A7F-BD2E-5F3EF94A01A3}">
-      <dgm:prSet/>
-      <dgm:spPr/>
-      <dgm:t>
-        <a:bodyPr/>
-        <a:lstStyle/>
-        <a:p>
-          <a:endParaRPr lang="en-US"/>
-        </a:p>
-      </dgm:t>
-    </dgm:pt>
-    <dgm:pt modelId="{BFAF05C8-0DA3-4812-8872-22E4C7282464}" type="sibTrans" cxnId="{207A89ED-9122-4A7F-BD2E-5F3EF94A01A3}">
-      <dgm:prSet/>
-      <dgm:spPr/>
-      <dgm:t>
-        <a:bodyPr/>
-        <a:lstStyle/>
-        <a:p>
-          <a:endParaRPr lang="en-US"/>
-        </a:p>
-      </dgm:t>
-    </dgm:pt>
-    <dgm:pt modelId="{F9669802-F6C7-42E4-9E84-8C855085DAFD}">
-      <dgm:prSet phldrT="[Text]" phldr="0"/>
-      <dgm:spPr/>
-      <dgm:t>
-        <a:bodyPr/>
-        <a:lstStyle/>
-        <a:p>
-          <a:r>
-            <a:rPr lang="en-US" dirty="0"/>
-            <a:t>model</a:t>
-          </a:r>
-        </a:p>
-      </dgm:t>
-    </dgm:pt>
-    <dgm:pt modelId="{5E013583-8383-46B4-AE62-E53F2FD865B9}" type="parTrans" cxnId="{4CFFC550-A101-4408-A8D0-7727C352BC58}">
-      <dgm:prSet/>
-      <dgm:spPr/>
-      <dgm:t>
-        <a:bodyPr/>
-        <a:lstStyle/>
-        <a:p>
-          <a:endParaRPr lang="en-US"/>
-        </a:p>
-      </dgm:t>
-    </dgm:pt>
-    <dgm:pt modelId="{83C51DC6-1228-4932-9BCD-9D4C9B875A74}" type="sibTrans" cxnId="{4CFFC550-A101-4408-A8D0-7727C352BC58}">
-      <dgm:prSet/>
-      <dgm:spPr/>
-      <dgm:t>
-        <a:bodyPr/>
-        <a:lstStyle/>
-        <a:p>
-          <a:endParaRPr lang="en-US"/>
-        </a:p>
-      </dgm:t>
-    </dgm:pt>
-    <dgm:pt modelId="{0D750001-9FA8-4C1E-A34C-D76EACEA1613}">
-      <dgm:prSet phldrT="[Text]" phldr="1"/>
-      <dgm:spPr/>
-      <dgm:t>
-        <a:bodyPr/>
-        <a:lstStyle/>
-        <a:p>
-          <a:endParaRPr lang="en-US"/>
-        </a:p>
-      </dgm:t>
-    </dgm:pt>
-    <dgm:pt modelId="{C475E581-B421-4FF2-ABDC-046722B52890}" type="parTrans" cxnId="{95E8356C-9F4F-43C9-8F35-41A1355D4295}">
-      <dgm:prSet/>
-      <dgm:spPr/>
-      <dgm:t>
-        <a:bodyPr/>
-        <a:lstStyle/>
-        <a:p>
-          <a:endParaRPr lang="en-US"/>
-        </a:p>
-      </dgm:t>
-    </dgm:pt>
-    <dgm:pt modelId="{3681BA6B-9182-4241-9830-57D5101C167B}" type="sibTrans" cxnId="{95E8356C-9F4F-43C9-8F35-41A1355D4295}">
-      <dgm:prSet/>
-      <dgm:spPr/>
-      <dgm:t>
-        <a:bodyPr/>
-        <a:lstStyle/>
-        <a:p>
-          <a:endParaRPr lang="en-US"/>
-        </a:p>
-      </dgm:t>
-    </dgm:pt>
-    <dgm:pt modelId="{6F0EC70C-ECE9-45D9-A0C8-CCAF3C6C95CE}">
-      <dgm:prSet phldrT="[Text]" phldr="1"/>
-      <dgm:spPr/>
-      <dgm:t>
-        <a:bodyPr/>
-        <a:lstStyle/>
-        <a:p>
-          <a:endParaRPr lang="en-US"/>
-        </a:p>
-      </dgm:t>
-    </dgm:pt>
-    <dgm:pt modelId="{7DEA2ADC-C1BB-4666-8E2F-C53381C4827F}" type="parTrans" cxnId="{58AB408D-2DAC-447B-9284-969667146363}">
-      <dgm:prSet/>
-      <dgm:spPr/>
-      <dgm:t>
-        <a:bodyPr/>
-        <a:lstStyle/>
-        <a:p>
-          <a:endParaRPr lang="en-US"/>
-        </a:p>
-      </dgm:t>
-    </dgm:pt>
-    <dgm:pt modelId="{1AEDB370-6AA6-40F5-AE9A-43A42136410E}" type="sibTrans" cxnId="{58AB408D-2DAC-447B-9284-969667146363}">
-      <dgm:prSet/>
-      <dgm:spPr/>
-      <dgm:t>
-        <a:bodyPr/>
-        <a:lstStyle/>
-        <a:p>
-          <a:endParaRPr lang="en-US"/>
-        </a:p>
-      </dgm:t>
-    </dgm:pt>
-    <dgm:pt modelId="{76A53774-2801-4E97-93E7-61F74DECBE9E}">
-      <dgm:prSet phldrT="[Text]" phldr="0"/>
-      <dgm:spPr/>
-      <dgm:t>
-        <a:bodyPr/>
-        <a:lstStyle/>
-        <a:p>
-          <a:r>
-            <a:rPr lang="en-US" dirty="0"/>
-            <a:t>output</a:t>
-          </a:r>
-        </a:p>
-      </dgm:t>
-    </dgm:pt>
-    <dgm:pt modelId="{5F79598C-043A-45A4-BB8D-3C6E249BFA4A}" type="parTrans" cxnId="{5F8AEEFA-8B15-4D68-B5E9-0850468CD818}">
-      <dgm:prSet/>
-      <dgm:spPr/>
-      <dgm:t>
-        <a:bodyPr/>
-        <a:lstStyle/>
-        <a:p>
-          <a:endParaRPr lang="en-US"/>
-        </a:p>
-      </dgm:t>
-    </dgm:pt>
-    <dgm:pt modelId="{BD5A7E9E-CC37-4CC8-B307-A23E9359F469}" type="sibTrans" cxnId="{5F8AEEFA-8B15-4D68-B5E9-0850468CD818}">
-      <dgm:prSet/>
-      <dgm:spPr/>
-      <dgm:t>
-        <a:bodyPr/>
-        <a:lstStyle/>
-        <a:p>
-          <a:endParaRPr lang="en-US"/>
-        </a:p>
-      </dgm:t>
-    </dgm:pt>
-    <dgm:pt modelId="{3FE77D03-5696-4713-8A78-8A718EE78003}">
-      <dgm:prSet phldrT="[Text]" phldr="1"/>
-      <dgm:spPr/>
-      <dgm:t>
-        <a:bodyPr/>
-        <a:lstStyle/>
-        <a:p>
-          <a:endParaRPr lang="en-US"/>
-        </a:p>
-      </dgm:t>
-    </dgm:pt>
-    <dgm:pt modelId="{64B8C078-BE65-442D-8500-18745D376B86}" type="parTrans" cxnId="{F0F6B33A-3043-4BFF-918C-1D86669DD87F}">
-      <dgm:prSet/>
-      <dgm:spPr/>
-      <dgm:t>
-        <a:bodyPr/>
-        <a:lstStyle/>
-        <a:p>
-          <a:endParaRPr lang="en-US"/>
-        </a:p>
-      </dgm:t>
-    </dgm:pt>
-    <dgm:pt modelId="{F334CEE4-7D7D-4CCF-8364-431090DAC753}" type="sibTrans" cxnId="{F0F6B33A-3043-4BFF-918C-1D86669DD87F}">
-      <dgm:prSet/>
-      <dgm:spPr/>
-      <dgm:t>
-        <a:bodyPr/>
-        <a:lstStyle/>
-        <a:p>
-          <a:endParaRPr lang="en-US"/>
-        </a:p>
-      </dgm:t>
-    </dgm:pt>
-    <dgm:pt modelId="{2A01B639-C2A3-4DEC-9117-2CA993083719}">
-      <dgm:prSet phldrT="[Text]" phldr="1"/>
-      <dgm:spPr/>
-      <dgm:t>
-        <a:bodyPr/>
-        <a:lstStyle/>
-        <a:p>
-          <a:endParaRPr lang="en-US"/>
-        </a:p>
-      </dgm:t>
-    </dgm:pt>
-    <dgm:pt modelId="{376E95F4-953F-4F71-A7BB-15E06A0F327A}" type="parTrans" cxnId="{C9E94C94-225A-4291-9179-9EF3517626B9}">
-      <dgm:prSet/>
-      <dgm:spPr/>
-      <dgm:t>
-        <a:bodyPr/>
-        <a:lstStyle/>
-        <a:p>
-          <a:endParaRPr lang="en-US"/>
-        </a:p>
-      </dgm:t>
-    </dgm:pt>
-    <dgm:pt modelId="{D97C45CC-F273-4C6E-8FE4-148875F638C2}" type="sibTrans" cxnId="{C9E94C94-225A-4291-9179-9EF3517626B9}">
-      <dgm:prSet/>
-      <dgm:spPr/>
-      <dgm:t>
-        <a:bodyPr/>
-        <a:lstStyle/>
-        <a:p>
-          <a:endParaRPr lang="en-US"/>
-        </a:p>
-      </dgm:t>
-    </dgm:pt>
-    <dgm:pt modelId="{782FADAD-BC02-407B-B192-AD829DBD0CEE}" type="pres">
-      <dgm:prSet presAssocID="{4A2BAD2F-C6BD-42BE-B521-AEF54FC35A84}" presName="Name0" presStyleCnt="0">
-        <dgm:presLayoutVars>
-          <dgm:dir/>
-          <dgm:animLvl val="lvl"/>
-          <dgm:resizeHandles val="exact"/>
-        </dgm:presLayoutVars>
-      </dgm:prSet>
-      <dgm:spPr/>
-    </dgm:pt>
-    <dgm:pt modelId="{9DAD537D-975C-43B3-95EC-5351EF0B9445}" type="pres">
-      <dgm:prSet presAssocID="{76A53774-2801-4E97-93E7-61F74DECBE9E}" presName="boxAndChildren" presStyleCnt="0"/>
-      <dgm:spPr/>
-    </dgm:pt>
-    <dgm:pt modelId="{DE09E13C-70B7-4F9C-929A-48776F2A2C22}" type="pres">
-      <dgm:prSet presAssocID="{76A53774-2801-4E97-93E7-61F74DECBE9E}" presName="parentTextBox" presStyleLbl="node1" presStyleIdx="0" presStyleCnt="3"/>
-      <dgm:spPr/>
-    </dgm:pt>
-    <dgm:pt modelId="{AEEF2733-1BA1-4F29-B7EC-73CE43B078B7}" type="pres">
-      <dgm:prSet presAssocID="{76A53774-2801-4E97-93E7-61F74DECBE9E}" presName="entireBox" presStyleLbl="node1" presStyleIdx="0" presStyleCnt="3"/>
-      <dgm:spPr/>
-    </dgm:pt>
-    <dgm:pt modelId="{2A89B9C6-649B-497A-AE2E-60877CBA8482}" type="pres">
-      <dgm:prSet presAssocID="{76A53774-2801-4E97-93E7-61F74DECBE9E}" presName="descendantBox" presStyleCnt="0"/>
-      <dgm:spPr/>
-    </dgm:pt>
-    <dgm:pt modelId="{68DD444A-9F84-4A2B-847B-786807B073EF}" type="pres">
-      <dgm:prSet presAssocID="{3FE77D03-5696-4713-8A78-8A718EE78003}" presName="childTextBox" presStyleLbl="fgAccFollowNode1" presStyleIdx="0" presStyleCnt="6">
-        <dgm:presLayoutVars>
-          <dgm:bulletEnabled val="1"/>
-        </dgm:presLayoutVars>
-      </dgm:prSet>
-      <dgm:spPr/>
-    </dgm:pt>
-    <dgm:pt modelId="{F69694CA-D69A-4172-9B19-7262ADC7F9A0}" type="pres">
-      <dgm:prSet presAssocID="{2A01B639-C2A3-4DEC-9117-2CA993083719}" presName="childTextBox" presStyleLbl="fgAccFollowNode1" presStyleIdx="1" presStyleCnt="6">
-        <dgm:presLayoutVars>
-          <dgm:bulletEnabled val="1"/>
-        </dgm:presLayoutVars>
-      </dgm:prSet>
-      <dgm:spPr/>
-    </dgm:pt>
-    <dgm:pt modelId="{F58D45BB-5246-4262-A146-6E70BF6D8F9A}" type="pres">
-      <dgm:prSet presAssocID="{83C51DC6-1228-4932-9BCD-9D4C9B875A74}" presName="sp" presStyleCnt="0"/>
-      <dgm:spPr/>
-    </dgm:pt>
-    <dgm:pt modelId="{291ABDFC-781A-44CB-86FC-F070ADC50E99}" type="pres">
-      <dgm:prSet presAssocID="{F9669802-F6C7-42E4-9E84-8C855085DAFD}" presName="arrowAndChildren" presStyleCnt="0"/>
-      <dgm:spPr/>
-    </dgm:pt>
-    <dgm:pt modelId="{654CBAA6-FEDB-4439-B88F-18FDC37A7512}" type="pres">
-      <dgm:prSet presAssocID="{F9669802-F6C7-42E4-9E84-8C855085DAFD}" presName="parentTextArrow" presStyleLbl="node1" presStyleIdx="0" presStyleCnt="3"/>
-      <dgm:spPr/>
-    </dgm:pt>
-    <dgm:pt modelId="{0180DD5A-4FD6-43F5-9468-4ADD7CE6D895}" type="pres">
-      <dgm:prSet presAssocID="{F9669802-F6C7-42E4-9E84-8C855085DAFD}" presName="arrow" presStyleLbl="node1" presStyleIdx="1" presStyleCnt="3"/>
-      <dgm:spPr/>
-    </dgm:pt>
-    <dgm:pt modelId="{853B62ED-CA8E-40D3-9303-0DB43E1A34A7}" type="pres">
-      <dgm:prSet presAssocID="{F9669802-F6C7-42E4-9E84-8C855085DAFD}" presName="descendantArrow" presStyleCnt="0"/>
-      <dgm:spPr/>
-    </dgm:pt>
-    <dgm:pt modelId="{73351C8A-9DBA-4076-9F44-98FACFDAB796}" type="pres">
-      <dgm:prSet presAssocID="{0D750001-9FA8-4C1E-A34C-D76EACEA1613}" presName="childTextArrow" presStyleLbl="fgAccFollowNode1" presStyleIdx="2" presStyleCnt="6">
-        <dgm:presLayoutVars>
-          <dgm:bulletEnabled val="1"/>
-        </dgm:presLayoutVars>
-      </dgm:prSet>
-      <dgm:spPr/>
-    </dgm:pt>
-    <dgm:pt modelId="{6D8E9151-016C-46F6-A9C0-F85547647CBA}" type="pres">
-      <dgm:prSet presAssocID="{6F0EC70C-ECE9-45D9-A0C8-CCAF3C6C95CE}" presName="childTextArrow" presStyleLbl="fgAccFollowNode1" presStyleIdx="3" presStyleCnt="6">
-        <dgm:presLayoutVars>
-          <dgm:bulletEnabled val="1"/>
-        </dgm:presLayoutVars>
-      </dgm:prSet>
-      <dgm:spPr/>
-    </dgm:pt>
-    <dgm:pt modelId="{3A2057C3-71B2-4C0B-AC69-7E142CFC3AE1}" type="pres">
-      <dgm:prSet presAssocID="{FEF831AA-DFBB-444E-A754-ECA5184B54C1}" presName="sp" presStyleCnt="0"/>
-      <dgm:spPr/>
-    </dgm:pt>
-    <dgm:pt modelId="{D43DBCBF-3F7C-4F49-93CD-7BF3312C47BD}" type="pres">
-      <dgm:prSet presAssocID="{63BCB48E-6580-4F8C-BE41-3AA9365A60D9}" presName="arrowAndChildren" presStyleCnt="0"/>
-      <dgm:spPr/>
-    </dgm:pt>
-    <dgm:pt modelId="{5718F3BE-4297-4ACC-AAF0-C0795AF8F668}" type="pres">
-      <dgm:prSet presAssocID="{63BCB48E-6580-4F8C-BE41-3AA9365A60D9}" presName="parentTextArrow" presStyleLbl="node1" presStyleIdx="1" presStyleCnt="3"/>
-      <dgm:spPr/>
-    </dgm:pt>
-    <dgm:pt modelId="{EFE0E04D-0AEB-4F9D-863C-7C1CE9E4CCE9}" type="pres">
-      <dgm:prSet presAssocID="{63BCB48E-6580-4F8C-BE41-3AA9365A60D9}" presName="arrow" presStyleLbl="node1" presStyleIdx="2" presStyleCnt="3" custLinFactNeighborX="77070" custLinFactNeighborY="-1923"/>
-      <dgm:spPr/>
-    </dgm:pt>
-    <dgm:pt modelId="{4593A8AB-72C0-4BE9-B4D5-EF5468C2AF17}" type="pres">
-      <dgm:prSet presAssocID="{63BCB48E-6580-4F8C-BE41-3AA9365A60D9}" presName="descendantArrow" presStyleCnt="0"/>
-      <dgm:spPr/>
-    </dgm:pt>
-    <dgm:pt modelId="{4F779B3E-278B-43D9-964C-326D68A80CDA}" type="pres">
-      <dgm:prSet presAssocID="{4D5FDF7B-8E5D-49C4-BF8A-4283C1AF15F7}" presName="childTextArrow" presStyleLbl="fgAccFollowNode1" presStyleIdx="4" presStyleCnt="6">
-        <dgm:presLayoutVars>
-          <dgm:bulletEnabled val="1"/>
-        </dgm:presLayoutVars>
-      </dgm:prSet>
-      <dgm:spPr/>
-    </dgm:pt>
-    <dgm:pt modelId="{E0EC5BFA-8429-4091-9DC3-692D36C50327}" type="pres">
-      <dgm:prSet presAssocID="{9BF7C278-0898-4F75-B99B-942AA4A4EF6A}" presName="childTextArrow" presStyleLbl="fgAccFollowNode1" presStyleIdx="5" presStyleCnt="6">
-        <dgm:presLayoutVars>
-          <dgm:bulletEnabled val="1"/>
-        </dgm:presLayoutVars>
-      </dgm:prSet>
-      <dgm:spPr/>
-    </dgm:pt>
-  </dgm:ptLst>
-  <dgm:cxnLst>
-    <dgm:cxn modelId="{1FC9D100-49EC-480F-BFE7-88AF9BD1BD80}" type="presOf" srcId="{6F0EC70C-ECE9-45D9-A0C8-CCAF3C6C95CE}" destId="{6D8E9151-016C-46F6-A9C0-F85547647CBA}" srcOrd="0" destOrd="0" presId="urn:microsoft.com/office/officeart/2005/8/layout/process4"/>
-    <dgm:cxn modelId="{368E440E-E56B-4FFD-9F9E-316C98E7AB92}" type="presOf" srcId="{F9669802-F6C7-42E4-9E84-8C855085DAFD}" destId="{0180DD5A-4FD6-43F5-9468-4ADD7CE6D895}" srcOrd="1" destOrd="0" presId="urn:microsoft.com/office/officeart/2005/8/layout/process4"/>
-    <dgm:cxn modelId="{91D5CB15-FE4C-431F-8DD5-D0EBC2CAC08B}" type="presOf" srcId="{3FE77D03-5696-4713-8A78-8A718EE78003}" destId="{68DD444A-9F84-4A2B-847B-786807B073EF}" srcOrd="0" destOrd="0" presId="urn:microsoft.com/office/officeart/2005/8/layout/process4"/>
-    <dgm:cxn modelId="{AA57272B-30C8-4D06-8AE6-9A3D84F6E1A1}" type="presOf" srcId="{63BCB48E-6580-4F8C-BE41-3AA9365A60D9}" destId="{5718F3BE-4297-4ACC-AAF0-C0795AF8F668}" srcOrd="0" destOrd="0" presId="urn:microsoft.com/office/officeart/2005/8/layout/process4"/>
-    <dgm:cxn modelId="{68AE423A-5027-4B6F-83D9-7EE7586AC6D6}" type="presOf" srcId="{4A2BAD2F-C6BD-42BE-B521-AEF54FC35A84}" destId="{782FADAD-BC02-407B-B192-AD829DBD0CEE}" srcOrd="0" destOrd="0" presId="urn:microsoft.com/office/officeart/2005/8/layout/process4"/>
-    <dgm:cxn modelId="{F0F6B33A-3043-4BFF-918C-1D86669DD87F}" srcId="{76A53774-2801-4E97-93E7-61F74DECBE9E}" destId="{3FE77D03-5696-4713-8A78-8A718EE78003}" srcOrd="0" destOrd="0" parTransId="{64B8C078-BE65-442D-8500-18745D376B86}" sibTransId="{F334CEE4-7D7D-4CCF-8364-431090DAC753}"/>
-    <dgm:cxn modelId="{98335C3F-D745-44CA-AF94-7A897A3392C2}" type="presOf" srcId="{76A53774-2801-4E97-93E7-61F74DECBE9E}" destId="{AEEF2733-1BA1-4F29-B7EC-73CE43B078B7}" srcOrd="1" destOrd="0" presId="urn:microsoft.com/office/officeart/2005/8/layout/process4"/>
-    <dgm:cxn modelId="{F3744F45-F8FB-4A59-9D70-F8B6B160CB4A}" type="presOf" srcId="{63BCB48E-6580-4F8C-BE41-3AA9365A60D9}" destId="{EFE0E04D-0AEB-4F9D-863C-7C1CE9E4CCE9}" srcOrd="1" destOrd="0" presId="urn:microsoft.com/office/officeart/2005/8/layout/process4"/>
-    <dgm:cxn modelId="{C9B25847-2E58-4AA3-B510-EFC0F3BF0415}" type="presOf" srcId="{F9669802-F6C7-42E4-9E84-8C855085DAFD}" destId="{654CBAA6-FEDB-4439-B88F-18FDC37A7512}" srcOrd="0" destOrd="0" presId="urn:microsoft.com/office/officeart/2005/8/layout/process4"/>
-    <dgm:cxn modelId="{5EE3CE6B-1BC3-4914-8195-D031D88D80EA}" srcId="{4A2BAD2F-C6BD-42BE-B521-AEF54FC35A84}" destId="{63BCB48E-6580-4F8C-BE41-3AA9365A60D9}" srcOrd="0" destOrd="0" parTransId="{B0CACA04-FF4B-4401-8ABA-31A959DBA274}" sibTransId="{FEF831AA-DFBB-444E-A754-ECA5184B54C1}"/>
-    <dgm:cxn modelId="{95E8356C-9F4F-43C9-8F35-41A1355D4295}" srcId="{F9669802-F6C7-42E4-9E84-8C855085DAFD}" destId="{0D750001-9FA8-4C1E-A34C-D76EACEA1613}" srcOrd="0" destOrd="0" parTransId="{C475E581-B421-4FF2-ABDC-046722B52890}" sibTransId="{3681BA6B-9182-4241-9830-57D5101C167B}"/>
-    <dgm:cxn modelId="{4CFFC550-A101-4408-A8D0-7727C352BC58}" srcId="{4A2BAD2F-C6BD-42BE-B521-AEF54FC35A84}" destId="{F9669802-F6C7-42E4-9E84-8C855085DAFD}" srcOrd="1" destOrd="0" parTransId="{5E013583-8383-46B4-AE62-E53F2FD865B9}" sibTransId="{83C51DC6-1228-4932-9BCD-9D4C9B875A74}"/>
-    <dgm:cxn modelId="{325ECD54-02EB-43A2-A273-8ADB4B1A74B1}" type="presOf" srcId="{2A01B639-C2A3-4DEC-9117-2CA993083719}" destId="{F69694CA-D69A-4172-9B19-7262ADC7F9A0}" srcOrd="0" destOrd="0" presId="urn:microsoft.com/office/officeart/2005/8/layout/process4"/>
-    <dgm:cxn modelId="{8E190E8B-A77A-4EB6-A5EE-AD2CA830EFA2}" type="presOf" srcId="{4D5FDF7B-8E5D-49C4-BF8A-4283C1AF15F7}" destId="{4F779B3E-278B-43D9-964C-326D68A80CDA}" srcOrd="0" destOrd="0" presId="urn:microsoft.com/office/officeart/2005/8/layout/process4"/>
-    <dgm:cxn modelId="{58AB408D-2DAC-447B-9284-969667146363}" srcId="{F9669802-F6C7-42E4-9E84-8C855085DAFD}" destId="{6F0EC70C-ECE9-45D9-A0C8-CCAF3C6C95CE}" srcOrd="1" destOrd="0" parTransId="{7DEA2ADC-C1BB-4666-8E2F-C53381C4827F}" sibTransId="{1AEDB370-6AA6-40F5-AE9A-43A42136410E}"/>
-    <dgm:cxn modelId="{C9E94C94-225A-4291-9179-9EF3517626B9}" srcId="{76A53774-2801-4E97-93E7-61F74DECBE9E}" destId="{2A01B639-C2A3-4DEC-9117-2CA993083719}" srcOrd="1" destOrd="0" parTransId="{376E95F4-953F-4F71-A7BB-15E06A0F327A}" sibTransId="{D97C45CC-F273-4C6E-8FE4-148875F638C2}"/>
-    <dgm:cxn modelId="{71E292A4-C0C8-4A79-B8FA-D3F2ABBFC01F}" type="presOf" srcId="{76A53774-2801-4E97-93E7-61F74DECBE9E}" destId="{DE09E13C-70B7-4F9C-929A-48776F2A2C22}" srcOrd="0" destOrd="0" presId="urn:microsoft.com/office/officeart/2005/8/layout/process4"/>
-    <dgm:cxn modelId="{0D12DDB1-6A2C-421E-80E3-00AADB916462}" srcId="{63BCB48E-6580-4F8C-BE41-3AA9365A60D9}" destId="{4D5FDF7B-8E5D-49C4-BF8A-4283C1AF15F7}" srcOrd="0" destOrd="0" parTransId="{70FA3552-5DE9-4E6F-814C-2B2767A67D72}" sibTransId="{40C368F5-C26D-4CB0-A6E6-F3D4AE19313E}"/>
-    <dgm:cxn modelId="{70D8BFCC-91A1-4316-B9BE-0781A5896715}" type="presOf" srcId="{9BF7C278-0898-4F75-B99B-942AA4A4EF6A}" destId="{E0EC5BFA-8429-4091-9DC3-692D36C50327}" srcOrd="0" destOrd="0" presId="urn:microsoft.com/office/officeart/2005/8/layout/process4"/>
-    <dgm:cxn modelId="{B60594CF-739F-4EAD-A34E-A583357526DE}" type="presOf" srcId="{0D750001-9FA8-4C1E-A34C-D76EACEA1613}" destId="{73351C8A-9DBA-4076-9F44-98FACFDAB796}" srcOrd="0" destOrd="0" presId="urn:microsoft.com/office/officeart/2005/8/layout/process4"/>
-    <dgm:cxn modelId="{207A89ED-9122-4A7F-BD2E-5F3EF94A01A3}" srcId="{63BCB48E-6580-4F8C-BE41-3AA9365A60D9}" destId="{9BF7C278-0898-4F75-B99B-942AA4A4EF6A}" srcOrd="1" destOrd="0" parTransId="{81152DB3-B3FA-4DF7-941F-A2DDF2884AC1}" sibTransId="{BFAF05C8-0DA3-4812-8872-22E4C7282464}"/>
-    <dgm:cxn modelId="{5F8AEEFA-8B15-4D68-B5E9-0850468CD818}" srcId="{4A2BAD2F-C6BD-42BE-B521-AEF54FC35A84}" destId="{76A53774-2801-4E97-93E7-61F74DECBE9E}" srcOrd="2" destOrd="0" parTransId="{5F79598C-043A-45A4-BB8D-3C6E249BFA4A}" sibTransId="{BD5A7E9E-CC37-4CC8-B307-A23E9359F469}"/>
-    <dgm:cxn modelId="{41723689-7778-4C57-8E8B-CB451C27F2E6}" type="presParOf" srcId="{782FADAD-BC02-407B-B192-AD829DBD0CEE}" destId="{9DAD537D-975C-43B3-95EC-5351EF0B9445}" srcOrd="0" destOrd="0" presId="urn:microsoft.com/office/officeart/2005/8/layout/process4"/>
-    <dgm:cxn modelId="{073201FF-37EE-4F66-9BEB-E36D9CAE80DD}" type="presParOf" srcId="{9DAD537D-975C-43B3-95EC-5351EF0B9445}" destId="{DE09E13C-70B7-4F9C-929A-48776F2A2C22}" srcOrd="0" destOrd="0" presId="urn:microsoft.com/office/officeart/2005/8/layout/process4"/>
-    <dgm:cxn modelId="{E982AF8E-1070-4D11-8B71-92DE73C5F3AA}" type="presParOf" srcId="{9DAD537D-975C-43B3-95EC-5351EF0B9445}" destId="{AEEF2733-1BA1-4F29-B7EC-73CE43B078B7}" srcOrd="1" destOrd="0" presId="urn:microsoft.com/office/officeart/2005/8/layout/process4"/>
-    <dgm:cxn modelId="{7CC8236D-2467-4DBD-86D9-53B7507C1907}" type="presParOf" srcId="{9DAD537D-975C-43B3-95EC-5351EF0B9445}" destId="{2A89B9C6-649B-497A-AE2E-60877CBA8482}" srcOrd="2" destOrd="0" presId="urn:microsoft.com/office/officeart/2005/8/layout/process4"/>
-    <dgm:cxn modelId="{AEC110D4-0C37-4F3C-9385-461EE22138B8}" type="presParOf" srcId="{2A89B9C6-649B-497A-AE2E-60877CBA8482}" destId="{68DD444A-9F84-4A2B-847B-786807B073EF}" srcOrd="0" destOrd="0" presId="urn:microsoft.com/office/officeart/2005/8/layout/process4"/>
-    <dgm:cxn modelId="{6C9AA9F6-80CD-44CE-8056-C96FCABBB8EE}" type="presParOf" srcId="{2A89B9C6-649B-497A-AE2E-60877CBA8482}" destId="{F69694CA-D69A-4172-9B19-7262ADC7F9A0}" srcOrd="1" destOrd="0" presId="urn:microsoft.com/office/officeart/2005/8/layout/process4"/>
-    <dgm:cxn modelId="{EAF3A825-F324-4081-B8A4-9A7D8F466A67}" type="presParOf" srcId="{782FADAD-BC02-407B-B192-AD829DBD0CEE}" destId="{F58D45BB-5246-4262-A146-6E70BF6D8F9A}" srcOrd="1" destOrd="0" presId="urn:microsoft.com/office/officeart/2005/8/layout/process4"/>
-    <dgm:cxn modelId="{2058A1BA-4D0C-4202-A67E-0CB12B309EC4}" type="presParOf" srcId="{782FADAD-BC02-407B-B192-AD829DBD0CEE}" destId="{291ABDFC-781A-44CB-86FC-F070ADC50E99}" srcOrd="2" destOrd="0" presId="urn:microsoft.com/office/officeart/2005/8/layout/process4"/>
-    <dgm:cxn modelId="{1B7A6CC6-4EB0-4C9D-B18C-3491470E6EBD}" type="presParOf" srcId="{291ABDFC-781A-44CB-86FC-F070ADC50E99}" destId="{654CBAA6-FEDB-4439-B88F-18FDC37A7512}" srcOrd="0" destOrd="0" presId="urn:microsoft.com/office/officeart/2005/8/layout/process4"/>
-    <dgm:cxn modelId="{7F65C8F1-8C98-4FEE-B9F4-1F57A565CC1D}" type="presParOf" srcId="{291ABDFC-781A-44CB-86FC-F070ADC50E99}" destId="{0180DD5A-4FD6-43F5-9468-4ADD7CE6D895}" srcOrd="1" destOrd="0" presId="urn:microsoft.com/office/officeart/2005/8/layout/process4"/>
-    <dgm:cxn modelId="{1FE50DE7-0C52-4FE5-82EF-12B5C64A3EE9}" type="presParOf" srcId="{291ABDFC-781A-44CB-86FC-F070ADC50E99}" destId="{853B62ED-CA8E-40D3-9303-0DB43E1A34A7}" srcOrd="2" destOrd="0" presId="urn:microsoft.com/office/officeart/2005/8/layout/process4"/>
-    <dgm:cxn modelId="{8ADE97A4-2A39-4293-BFAD-5D3F8A1C2F98}" type="presParOf" srcId="{853B62ED-CA8E-40D3-9303-0DB43E1A34A7}" destId="{73351C8A-9DBA-4076-9F44-98FACFDAB796}" srcOrd="0" destOrd="0" presId="urn:microsoft.com/office/officeart/2005/8/layout/process4"/>
-    <dgm:cxn modelId="{AB4E6F29-28B0-4CC1-A81F-BB930C124525}" type="presParOf" srcId="{853B62ED-CA8E-40D3-9303-0DB43E1A34A7}" destId="{6D8E9151-016C-46F6-A9C0-F85547647CBA}" srcOrd="1" destOrd="0" presId="urn:microsoft.com/office/officeart/2005/8/layout/process4"/>
-    <dgm:cxn modelId="{081626D5-C8D3-4979-ACC9-E0DDD1130AE1}" type="presParOf" srcId="{782FADAD-BC02-407B-B192-AD829DBD0CEE}" destId="{3A2057C3-71B2-4C0B-AC69-7E142CFC3AE1}" srcOrd="3" destOrd="0" presId="urn:microsoft.com/office/officeart/2005/8/layout/process4"/>
-    <dgm:cxn modelId="{0D6B7EAC-A653-4667-816A-4E6C109A45D0}" type="presParOf" srcId="{782FADAD-BC02-407B-B192-AD829DBD0CEE}" destId="{D43DBCBF-3F7C-4F49-93CD-7BF3312C47BD}" srcOrd="4" destOrd="0" presId="urn:microsoft.com/office/officeart/2005/8/layout/process4"/>
-    <dgm:cxn modelId="{88BCADA6-BFB7-465A-A780-D5A8893A6C51}" type="presParOf" srcId="{D43DBCBF-3F7C-4F49-93CD-7BF3312C47BD}" destId="{5718F3BE-4297-4ACC-AAF0-C0795AF8F668}" srcOrd="0" destOrd="0" presId="urn:microsoft.com/office/officeart/2005/8/layout/process4"/>
-    <dgm:cxn modelId="{5B2846A1-CD6D-4953-A13A-6793C0967BE9}" type="presParOf" srcId="{D43DBCBF-3F7C-4F49-93CD-7BF3312C47BD}" destId="{EFE0E04D-0AEB-4F9D-863C-7C1CE9E4CCE9}" srcOrd="1" destOrd="0" presId="urn:microsoft.com/office/officeart/2005/8/layout/process4"/>
-    <dgm:cxn modelId="{5C1B7865-3124-4338-868F-311DB2D3D509}" type="presParOf" srcId="{D43DBCBF-3F7C-4F49-93CD-7BF3312C47BD}" destId="{4593A8AB-72C0-4BE9-B4D5-EF5468C2AF17}" srcOrd="2" destOrd="0" presId="urn:microsoft.com/office/officeart/2005/8/layout/process4"/>
-    <dgm:cxn modelId="{2AD50421-BC15-4D7A-9FD2-82564C31512D}" type="presParOf" srcId="{4593A8AB-72C0-4BE9-B4D5-EF5468C2AF17}" destId="{4F779B3E-278B-43D9-964C-326D68A80CDA}" srcOrd="0" destOrd="0" presId="urn:microsoft.com/office/officeart/2005/8/layout/process4"/>
-    <dgm:cxn modelId="{11C9DE33-3ED1-4191-81FA-3CF6F21FA6B2}" type="presParOf" srcId="{4593A8AB-72C0-4BE9-B4D5-EF5468C2AF17}" destId="{E0EC5BFA-8429-4091-9DC3-692D36C50327}" srcOrd="1" destOrd="0" presId="urn:microsoft.com/office/officeart/2005/8/layout/process4"/>
-  </dgm:cxnLst>
-  <dgm:bg/>
-  <dgm:whole/>
-  <dgm:extLst>
-    <a:ext uri="http://schemas.microsoft.com/office/drawing/2008/diagram">
-      <dsp:dataModelExt xmlns:dsp="http://schemas.microsoft.com/office/drawing/2008/diagram" relId="rId6" minVer="http://schemas.openxmlformats.org/drawingml/2006/diagram"/>
-    </a:ext>
-  </dgm:extLst>
-</dgm:dataModel>
-</file>
-
 <file path=ppt/diagrams/drawing1.xml><?xml version="1.0" encoding="utf-8"?>
 <dsp:drawing xmlns:dgm="http://schemas.openxmlformats.org/drawingml/2006/diagram" xmlns:dsp="http://schemas.microsoft.com/office/drawing/2008/diagram" xmlns:a="http://schemas.openxmlformats.org/drawingml/2006/main">
   <dsp:spTree>
@@ -2375,8 +1139,8 @@
       </dsp:nvSpPr>
       <dsp:spPr>
         <a:xfrm>
-          <a:off x="758380" y="0"/>
-          <a:ext cx="8594979" cy="1880292"/>
+          <a:off x="887011" y="0"/>
+          <a:ext cx="10052792" cy="1705033"/>
         </a:xfrm>
         <a:prstGeom prst="rightArrow">
           <a:avLst/>
@@ -2415,8 +1179,8 @@
       </dsp:nvSpPr>
       <dsp:spPr>
         <a:xfrm>
-          <a:off x="3456" y="564087"/>
-          <a:ext cx="2245517" cy="752116"/>
+          <a:off x="4042" y="511509"/>
+          <a:ext cx="2626384" cy="682013"/>
         </a:xfrm>
         <a:prstGeom prst="roundRect">
           <a:avLst/>
@@ -2458,12 +1222,12 @@
         </a:fontRef>
       </dsp:style>
       <dsp:txBody>
-        <a:bodyPr spcFirstLastPara="0" vert="horz" wrap="square" lIns="118110" tIns="118110" rIns="118110" bIns="118110" numCol="1" spcCol="1270" anchor="ctr" anchorCtr="0">
+        <a:bodyPr spcFirstLastPara="0" vert="horz" wrap="square" lIns="106680" tIns="106680" rIns="106680" bIns="106680" numCol="1" spcCol="1270" anchor="ctr" anchorCtr="0">
           <a:noAutofit/>
         </a:bodyPr>
         <a:lstStyle/>
         <a:p>
-          <a:pPr marL="0" lvl="0" indent="0" algn="ctr" defTabSz="1377950">
+          <a:pPr marL="0" lvl="0" indent="0" algn="ctr" defTabSz="1244600">
             <a:lnSpc>
               <a:spcPct val="90000"/>
             </a:lnSpc>
@@ -2476,14 +1240,14 @@
             <a:buNone/>
           </a:pPr>
           <a:r>
-            <a:rPr lang="en-US" sz="3100" kern="1200" dirty="0"/>
+            <a:rPr lang="en-US" sz="2800" kern="1200" dirty="0"/>
             <a:t>Data</a:t>
           </a:r>
         </a:p>
       </dsp:txBody>
       <dsp:txXfrm>
-        <a:off x="40171" y="600802"/>
-        <a:ext cx="2172087" cy="678686"/>
+        <a:off x="37335" y="544802"/>
+        <a:ext cx="2559798" cy="615427"/>
       </dsp:txXfrm>
     </dsp:sp>
     <dsp:sp modelId="{02C6F657-DC22-4874-B839-ED01F19A363A}">
@@ -2493,8 +1257,8 @@
       </dsp:nvSpPr>
       <dsp:spPr>
         <a:xfrm>
-          <a:off x="2623226" y="564087"/>
-          <a:ext cx="2245517" cy="752116"/>
+          <a:off x="3068157" y="511509"/>
+          <a:ext cx="2626384" cy="682013"/>
         </a:xfrm>
         <a:prstGeom prst="roundRect">
           <a:avLst/>
@@ -2536,12 +1300,12 @@
         </a:fontRef>
       </dsp:style>
       <dsp:txBody>
-        <a:bodyPr spcFirstLastPara="0" vert="horz" wrap="square" lIns="118110" tIns="118110" rIns="118110" bIns="118110" numCol="1" spcCol="1270" anchor="ctr" anchorCtr="0">
+        <a:bodyPr spcFirstLastPara="0" vert="horz" wrap="square" lIns="106680" tIns="106680" rIns="106680" bIns="106680" numCol="1" spcCol="1270" anchor="ctr" anchorCtr="0">
           <a:noAutofit/>
         </a:bodyPr>
         <a:lstStyle/>
         <a:p>
-          <a:pPr marL="0" lvl="0" indent="0" algn="ctr" defTabSz="1377950">
+          <a:pPr marL="0" lvl="0" indent="0" algn="ctr" defTabSz="1244600">
             <a:lnSpc>
               <a:spcPct val="90000"/>
             </a:lnSpc>
@@ -2554,15 +1318,15 @@
             <a:buNone/>
           </a:pPr>
           <a:r>
-            <a:rPr lang="en-US" sz="3100" kern="1200"/>
+            <a:rPr lang="en-US" sz="2800" kern="1200"/>
             <a:t>Data Prep</a:t>
           </a:r>
-          <a:endParaRPr lang="en-US" sz="3100" kern="1200" dirty="0"/>
+          <a:endParaRPr lang="en-US" sz="2800" kern="1200" dirty="0"/>
         </a:p>
       </dsp:txBody>
       <dsp:txXfrm>
-        <a:off x="2659941" y="600802"/>
-        <a:ext cx="2172087" cy="678686"/>
+        <a:off x="3101450" y="544802"/>
+        <a:ext cx="2559798" cy="615427"/>
       </dsp:txXfrm>
     </dsp:sp>
     <dsp:sp modelId="{C00E62EC-C631-4907-A6A9-ACFBFA247E6A}">
@@ -2572,8 +1336,8 @@
       </dsp:nvSpPr>
       <dsp:spPr>
         <a:xfrm>
-          <a:off x="5242996" y="564087"/>
-          <a:ext cx="2245517" cy="752116"/>
+          <a:off x="6132272" y="511509"/>
+          <a:ext cx="2626384" cy="682013"/>
         </a:xfrm>
         <a:prstGeom prst="roundRect">
           <a:avLst/>
@@ -2615,12 +1379,12 @@
         </a:fontRef>
       </dsp:style>
       <dsp:txBody>
-        <a:bodyPr spcFirstLastPara="0" vert="horz" wrap="square" lIns="118110" tIns="118110" rIns="118110" bIns="118110" numCol="1" spcCol="1270" anchor="ctr" anchorCtr="0">
+        <a:bodyPr spcFirstLastPara="0" vert="horz" wrap="square" lIns="106680" tIns="106680" rIns="106680" bIns="106680" numCol="1" spcCol="1270" anchor="ctr" anchorCtr="0">
           <a:noAutofit/>
         </a:bodyPr>
         <a:lstStyle/>
         <a:p>
-          <a:pPr marL="0" lvl="0" indent="0" algn="ctr" defTabSz="1377950">
+          <a:pPr marL="0" lvl="0" indent="0" algn="ctr" defTabSz="1244600">
             <a:lnSpc>
               <a:spcPct val="90000"/>
             </a:lnSpc>
@@ -2633,14 +1397,14 @@
             <a:buNone/>
           </a:pPr>
           <a:r>
-            <a:rPr lang="en-US" sz="3100" kern="1200" dirty="0"/>
+            <a:rPr lang="en-US" sz="2800" kern="1200" dirty="0"/>
             <a:t>model</a:t>
           </a:r>
         </a:p>
       </dsp:txBody>
       <dsp:txXfrm>
-        <a:off x="5279711" y="600802"/>
-        <a:ext cx="2172087" cy="678686"/>
+        <a:off x="6165565" y="544802"/>
+        <a:ext cx="2559798" cy="615427"/>
       </dsp:txXfrm>
     </dsp:sp>
     <dsp:sp modelId="{2B39B381-C3F6-40EF-9153-96AC0478B650}">
@@ -2650,8 +1414,8 @@
       </dsp:nvSpPr>
       <dsp:spPr>
         <a:xfrm>
-          <a:off x="7862766" y="564087"/>
-          <a:ext cx="2245517" cy="752116"/>
+          <a:off x="9196388" y="511509"/>
+          <a:ext cx="2626384" cy="682013"/>
         </a:xfrm>
         <a:prstGeom prst="roundRect">
           <a:avLst/>
@@ -2693,12 +1457,12 @@
         </a:fontRef>
       </dsp:style>
       <dsp:txBody>
-        <a:bodyPr spcFirstLastPara="0" vert="horz" wrap="square" lIns="118110" tIns="118110" rIns="118110" bIns="118110" numCol="1" spcCol="1270" anchor="ctr" anchorCtr="0">
+        <a:bodyPr spcFirstLastPara="0" vert="horz" wrap="square" lIns="106680" tIns="106680" rIns="106680" bIns="106680" numCol="1" spcCol="1270" anchor="ctr" anchorCtr="0">
           <a:noAutofit/>
         </a:bodyPr>
         <a:lstStyle/>
         <a:p>
-          <a:pPr marL="0" lvl="0" indent="0" algn="ctr" defTabSz="1377950">
+          <a:pPr marL="0" lvl="0" indent="0" algn="ctr" defTabSz="1244600">
             <a:lnSpc>
               <a:spcPct val="90000"/>
             </a:lnSpc>
@@ -2711,722 +1475,14 @@
             <a:buNone/>
           </a:pPr>
           <a:r>
-            <a:rPr lang="en-US" sz="3100" kern="1200" dirty="0"/>
+            <a:rPr lang="en-US" sz="2800" kern="1200" dirty="0"/>
             <a:t>output</a:t>
           </a:r>
         </a:p>
       </dsp:txBody>
       <dsp:txXfrm>
-        <a:off x="7899481" y="600802"/>
-        <a:ext cx="2172087" cy="678686"/>
-      </dsp:txXfrm>
-    </dsp:sp>
-  </dsp:spTree>
-</dsp:drawing>
-</file>
-
-<file path=ppt/diagrams/drawing2.xml><?xml version="1.0" encoding="utf-8"?>
-<dsp:drawing xmlns:dgm="http://schemas.openxmlformats.org/drawingml/2006/diagram" xmlns:dsp="http://schemas.microsoft.com/office/drawing/2008/diagram" xmlns:a="http://schemas.openxmlformats.org/drawingml/2006/main">
-  <dsp:spTree>
-    <dsp:nvGrpSpPr>
-      <dsp:cNvPr id="0" name=""/>
-      <dsp:cNvGrpSpPr/>
-    </dsp:nvGrpSpPr>
-    <dsp:grpSpPr/>
-    <dsp:sp modelId="{AEEF2733-1BA1-4F29-B7EC-73CE43B078B7}">
-      <dsp:nvSpPr>
-        <dsp:cNvPr id="0" name=""/>
-        <dsp:cNvSpPr/>
-      </dsp:nvSpPr>
-      <dsp:spPr>
-        <a:xfrm>
-          <a:off x="0" y="4078917"/>
-          <a:ext cx="5062219" cy="1338791"/>
-        </a:xfrm>
-        <a:prstGeom prst="rect">
-          <a:avLst/>
-        </a:prstGeom>
-        <a:solidFill>
-          <a:schemeClr val="accent1">
-            <a:hueOff val="0"/>
-            <a:satOff val="0"/>
-            <a:lumOff val="0"/>
-            <a:alphaOff val="0"/>
-          </a:schemeClr>
-        </a:solidFill>
-        <a:ln w="12700" cap="flat" cmpd="sng" algn="ctr">
-          <a:solidFill>
-            <a:schemeClr val="lt1">
-              <a:hueOff val="0"/>
-              <a:satOff val="0"/>
-              <a:lumOff val="0"/>
-              <a:alphaOff val="0"/>
-            </a:schemeClr>
-          </a:solidFill>
-          <a:prstDash val="solid"/>
-          <a:miter lim="800000"/>
-        </a:ln>
-        <a:effectLst/>
-      </dsp:spPr>
-      <dsp:style>
-        <a:lnRef idx="2">
-          <a:scrgbClr r="0" g="0" b="0"/>
-        </a:lnRef>
-        <a:fillRef idx="1">
-          <a:scrgbClr r="0" g="0" b="0"/>
-        </a:fillRef>
-        <a:effectRef idx="0">
-          <a:scrgbClr r="0" g="0" b="0"/>
-        </a:effectRef>
-        <a:fontRef idx="minor">
-          <a:schemeClr val="lt1"/>
-        </a:fontRef>
-      </dsp:style>
-      <dsp:txBody>
-        <a:bodyPr spcFirstLastPara="0" vert="horz" wrap="square" lIns="177800" tIns="177800" rIns="177800" bIns="177800" numCol="1" spcCol="1270" anchor="ctr" anchorCtr="0">
-          <a:noAutofit/>
-        </a:bodyPr>
-        <a:lstStyle/>
-        <a:p>
-          <a:pPr marL="0" lvl="0" indent="0" algn="ctr" defTabSz="1111250">
-            <a:lnSpc>
-              <a:spcPct val="90000"/>
-            </a:lnSpc>
-            <a:spcBef>
-              <a:spcPct val="0"/>
-            </a:spcBef>
-            <a:spcAft>
-              <a:spcPct val="35000"/>
-            </a:spcAft>
-            <a:buNone/>
-          </a:pPr>
-          <a:r>
-            <a:rPr lang="en-US" sz="2500" kern="1200" dirty="0"/>
-            <a:t>output</a:t>
-          </a:r>
-        </a:p>
-      </dsp:txBody>
-      <dsp:txXfrm>
-        <a:off x="0" y="4078917"/>
-        <a:ext cx="5062219" cy="722947"/>
-      </dsp:txXfrm>
-    </dsp:sp>
-    <dsp:sp modelId="{68DD444A-9F84-4A2B-847B-786807B073EF}">
-      <dsp:nvSpPr>
-        <dsp:cNvPr id="0" name=""/>
-        <dsp:cNvSpPr/>
-      </dsp:nvSpPr>
-      <dsp:spPr>
-        <a:xfrm>
-          <a:off x="0" y="4775089"/>
-          <a:ext cx="2531110" cy="615844"/>
-        </a:xfrm>
-        <a:prstGeom prst="rect">
-          <a:avLst/>
-        </a:prstGeom>
-        <a:solidFill>
-          <a:schemeClr val="accent1">
-            <a:alpha val="90000"/>
-            <a:tint val="40000"/>
-            <a:hueOff val="0"/>
-            <a:satOff val="0"/>
-            <a:lumOff val="0"/>
-            <a:alphaOff val="0"/>
-          </a:schemeClr>
-        </a:solidFill>
-        <a:ln w="12700" cap="flat" cmpd="sng" algn="ctr">
-          <a:solidFill>
-            <a:schemeClr val="accent1">
-              <a:alpha val="90000"/>
-              <a:tint val="40000"/>
-              <a:hueOff val="0"/>
-              <a:satOff val="0"/>
-              <a:lumOff val="0"/>
-              <a:alphaOff val="0"/>
-            </a:schemeClr>
-          </a:solidFill>
-          <a:prstDash val="solid"/>
-          <a:miter lim="800000"/>
-        </a:ln>
-        <a:effectLst/>
-      </dsp:spPr>
-      <dsp:style>
-        <a:lnRef idx="2">
-          <a:scrgbClr r="0" g="0" b="0"/>
-        </a:lnRef>
-        <a:fillRef idx="1">
-          <a:scrgbClr r="0" g="0" b="0"/>
-        </a:fillRef>
-        <a:effectRef idx="0">
-          <a:scrgbClr r="0" g="0" b="0"/>
-        </a:effectRef>
-        <a:fontRef idx="minor"/>
-      </dsp:style>
-      <dsp:txBody>
-        <a:bodyPr spcFirstLastPara="0" vert="horz" wrap="square" lIns="263144" tIns="46990" rIns="263144" bIns="46990" numCol="1" spcCol="1270" anchor="ctr" anchorCtr="0">
-          <a:noAutofit/>
-        </a:bodyPr>
-        <a:lstStyle/>
-        <a:p>
-          <a:pPr marL="0" lvl="0" indent="0" algn="ctr" defTabSz="1644650">
-            <a:lnSpc>
-              <a:spcPct val="90000"/>
-            </a:lnSpc>
-            <a:spcBef>
-              <a:spcPct val="0"/>
-            </a:spcBef>
-            <a:spcAft>
-              <a:spcPct val="35000"/>
-            </a:spcAft>
-            <a:buNone/>
-          </a:pPr>
-          <a:endParaRPr lang="en-US" sz="3700" kern="1200"/>
-        </a:p>
-      </dsp:txBody>
-      <dsp:txXfrm>
-        <a:off x="0" y="4775089"/>
-        <a:ext cx="2531110" cy="615844"/>
-      </dsp:txXfrm>
-    </dsp:sp>
-    <dsp:sp modelId="{F69694CA-D69A-4172-9B19-7262ADC7F9A0}">
-      <dsp:nvSpPr>
-        <dsp:cNvPr id="0" name=""/>
-        <dsp:cNvSpPr/>
-      </dsp:nvSpPr>
-      <dsp:spPr>
-        <a:xfrm>
-          <a:off x="2531110" y="4775089"/>
-          <a:ext cx="2531110" cy="615844"/>
-        </a:xfrm>
-        <a:prstGeom prst="rect">
-          <a:avLst/>
-        </a:prstGeom>
-        <a:solidFill>
-          <a:schemeClr val="accent1">
-            <a:alpha val="90000"/>
-            <a:tint val="40000"/>
-            <a:hueOff val="0"/>
-            <a:satOff val="0"/>
-            <a:lumOff val="0"/>
-            <a:alphaOff val="0"/>
-          </a:schemeClr>
-        </a:solidFill>
-        <a:ln w="12700" cap="flat" cmpd="sng" algn="ctr">
-          <a:solidFill>
-            <a:schemeClr val="accent1">
-              <a:alpha val="90000"/>
-              <a:tint val="40000"/>
-              <a:hueOff val="0"/>
-              <a:satOff val="0"/>
-              <a:lumOff val="0"/>
-              <a:alphaOff val="0"/>
-            </a:schemeClr>
-          </a:solidFill>
-          <a:prstDash val="solid"/>
-          <a:miter lim="800000"/>
-        </a:ln>
-        <a:effectLst/>
-      </dsp:spPr>
-      <dsp:style>
-        <a:lnRef idx="2">
-          <a:scrgbClr r="0" g="0" b="0"/>
-        </a:lnRef>
-        <a:fillRef idx="1">
-          <a:scrgbClr r="0" g="0" b="0"/>
-        </a:fillRef>
-        <a:effectRef idx="0">
-          <a:scrgbClr r="0" g="0" b="0"/>
-        </a:effectRef>
-        <a:fontRef idx="minor"/>
-      </dsp:style>
-      <dsp:txBody>
-        <a:bodyPr spcFirstLastPara="0" vert="horz" wrap="square" lIns="263144" tIns="46990" rIns="263144" bIns="46990" numCol="1" spcCol="1270" anchor="ctr" anchorCtr="0">
-          <a:noAutofit/>
-        </a:bodyPr>
-        <a:lstStyle/>
-        <a:p>
-          <a:pPr marL="0" lvl="0" indent="0" algn="ctr" defTabSz="1644650">
-            <a:lnSpc>
-              <a:spcPct val="90000"/>
-            </a:lnSpc>
-            <a:spcBef>
-              <a:spcPct val="0"/>
-            </a:spcBef>
-            <a:spcAft>
-              <a:spcPct val="35000"/>
-            </a:spcAft>
-            <a:buNone/>
-          </a:pPr>
-          <a:endParaRPr lang="en-US" sz="3700" kern="1200"/>
-        </a:p>
-      </dsp:txBody>
-      <dsp:txXfrm>
-        <a:off x="2531110" y="4775089"/>
-        <a:ext cx="2531110" cy="615844"/>
-      </dsp:txXfrm>
-    </dsp:sp>
-    <dsp:sp modelId="{0180DD5A-4FD6-43F5-9468-4ADD7CE6D895}">
-      <dsp:nvSpPr>
-        <dsp:cNvPr id="0" name=""/>
-        <dsp:cNvSpPr/>
-      </dsp:nvSpPr>
-      <dsp:spPr>
-        <a:xfrm rot="10800000">
-          <a:off x="0" y="2039937"/>
-          <a:ext cx="5062219" cy="2059061"/>
-        </a:xfrm>
-        <a:prstGeom prst="upArrowCallout">
-          <a:avLst/>
-        </a:prstGeom>
-        <a:solidFill>
-          <a:schemeClr val="accent1">
-            <a:hueOff val="0"/>
-            <a:satOff val="0"/>
-            <a:lumOff val="0"/>
-            <a:alphaOff val="0"/>
-          </a:schemeClr>
-        </a:solidFill>
-        <a:ln w="12700" cap="flat" cmpd="sng" algn="ctr">
-          <a:solidFill>
-            <a:schemeClr val="lt1">
-              <a:hueOff val="0"/>
-              <a:satOff val="0"/>
-              <a:lumOff val="0"/>
-              <a:alphaOff val="0"/>
-            </a:schemeClr>
-          </a:solidFill>
-          <a:prstDash val="solid"/>
-          <a:miter lim="800000"/>
-        </a:ln>
-        <a:effectLst/>
-      </dsp:spPr>
-      <dsp:style>
-        <a:lnRef idx="2">
-          <a:scrgbClr r="0" g="0" b="0"/>
-        </a:lnRef>
-        <a:fillRef idx="1">
-          <a:scrgbClr r="0" g="0" b="0"/>
-        </a:fillRef>
-        <a:effectRef idx="0">
-          <a:scrgbClr r="0" g="0" b="0"/>
-        </a:effectRef>
-        <a:fontRef idx="minor">
-          <a:schemeClr val="lt1"/>
-        </a:fontRef>
-      </dsp:style>
-      <dsp:txBody>
-        <a:bodyPr spcFirstLastPara="0" vert="horz" wrap="square" lIns="177800" tIns="177800" rIns="177800" bIns="177800" numCol="1" spcCol="1270" anchor="ctr" anchorCtr="0">
-          <a:noAutofit/>
-        </a:bodyPr>
-        <a:lstStyle/>
-        <a:p>
-          <a:pPr marL="0" lvl="0" indent="0" algn="ctr" defTabSz="1111250">
-            <a:lnSpc>
-              <a:spcPct val="90000"/>
-            </a:lnSpc>
-            <a:spcBef>
-              <a:spcPct val="0"/>
-            </a:spcBef>
-            <a:spcAft>
-              <a:spcPct val="35000"/>
-            </a:spcAft>
-            <a:buNone/>
-          </a:pPr>
-          <a:r>
-            <a:rPr lang="en-US" sz="2500" kern="1200" dirty="0"/>
-            <a:t>model</a:t>
-          </a:r>
-        </a:p>
-      </dsp:txBody>
-      <dsp:txXfrm rot="-10800000">
-        <a:off x="0" y="2039937"/>
-        <a:ext cx="5062219" cy="722730"/>
-      </dsp:txXfrm>
-    </dsp:sp>
-    <dsp:sp modelId="{73351C8A-9DBA-4076-9F44-98FACFDAB796}">
-      <dsp:nvSpPr>
-        <dsp:cNvPr id="0" name=""/>
-        <dsp:cNvSpPr/>
-      </dsp:nvSpPr>
-      <dsp:spPr>
-        <a:xfrm>
-          <a:off x="0" y="2762668"/>
-          <a:ext cx="2531110" cy="615659"/>
-        </a:xfrm>
-        <a:prstGeom prst="rect">
-          <a:avLst/>
-        </a:prstGeom>
-        <a:solidFill>
-          <a:schemeClr val="accent1">
-            <a:alpha val="90000"/>
-            <a:tint val="40000"/>
-            <a:hueOff val="0"/>
-            <a:satOff val="0"/>
-            <a:lumOff val="0"/>
-            <a:alphaOff val="0"/>
-          </a:schemeClr>
-        </a:solidFill>
-        <a:ln w="12700" cap="flat" cmpd="sng" algn="ctr">
-          <a:solidFill>
-            <a:schemeClr val="accent1">
-              <a:alpha val="90000"/>
-              <a:tint val="40000"/>
-              <a:hueOff val="0"/>
-              <a:satOff val="0"/>
-              <a:lumOff val="0"/>
-              <a:alphaOff val="0"/>
-            </a:schemeClr>
-          </a:solidFill>
-          <a:prstDash val="solid"/>
-          <a:miter lim="800000"/>
-        </a:ln>
-        <a:effectLst/>
-      </dsp:spPr>
-      <dsp:style>
-        <a:lnRef idx="2">
-          <a:scrgbClr r="0" g="0" b="0"/>
-        </a:lnRef>
-        <a:fillRef idx="1">
-          <a:scrgbClr r="0" g="0" b="0"/>
-        </a:fillRef>
-        <a:effectRef idx="0">
-          <a:scrgbClr r="0" g="0" b="0"/>
-        </a:effectRef>
-        <a:fontRef idx="minor"/>
-      </dsp:style>
-      <dsp:txBody>
-        <a:bodyPr spcFirstLastPara="0" vert="horz" wrap="square" lIns="263144" tIns="46990" rIns="263144" bIns="46990" numCol="1" spcCol="1270" anchor="ctr" anchorCtr="0">
-          <a:noAutofit/>
-        </a:bodyPr>
-        <a:lstStyle/>
-        <a:p>
-          <a:pPr marL="0" lvl="0" indent="0" algn="ctr" defTabSz="1644650">
-            <a:lnSpc>
-              <a:spcPct val="90000"/>
-            </a:lnSpc>
-            <a:spcBef>
-              <a:spcPct val="0"/>
-            </a:spcBef>
-            <a:spcAft>
-              <a:spcPct val="35000"/>
-            </a:spcAft>
-            <a:buNone/>
-          </a:pPr>
-          <a:endParaRPr lang="en-US" sz="3700" kern="1200"/>
-        </a:p>
-      </dsp:txBody>
-      <dsp:txXfrm>
-        <a:off x="0" y="2762668"/>
-        <a:ext cx="2531110" cy="615659"/>
-      </dsp:txXfrm>
-    </dsp:sp>
-    <dsp:sp modelId="{6D8E9151-016C-46F6-A9C0-F85547647CBA}">
-      <dsp:nvSpPr>
-        <dsp:cNvPr id="0" name=""/>
-        <dsp:cNvSpPr/>
-      </dsp:nvSpPr>
-      <dsp:spPr>
-        <a:xfrm>
-          <a:off x="2531110" y="2762668"/>
-          <a:ext cx="2531110" cy="615659"/>
-        </a:xfrm>
-        <a:prstGeom prst="rect">
-          <a:avLst/>
-        </a:prstGeom>
-        <a:solidFill>
-          <a:schemeClr val="accent1">
-            <a:alpha val="90000"/>
-            <a:tint val="40000"/>
-            <a:hueOff val="0"/>
-            <a:satOff val="0"/>
-            <a:lumOff val="0"/>
-            <a:alphaOff val="0"/>
-          </a:schemeClr>
-        </a:solidFill>
-        <a:ln w="12700" cap="flat" cmpd="sng" algn="ctr">
-          <a:solidFill>
-            <a:schemeClr val="accent1">
-              <a:alpha val="90000"/>
-              <a:tint val="40000"/>
-              <a:hueOff val="0"/>
-              <a:satOff val="0"/>
-              <a:lumOff val="0"/>
-              <a:alphaOff val="0"/>
-            </a:schemeClr>
-          </a:solidFill>
-          <a:prstDash val="solid"/>
-          <a:miter lim="800000"/>
-        </a:ln>
-        <a:effectLst/>
-      </dsp:spPr>
-      <dsp:style>
-        <a:lnRef idx="2">
-          <a:scrgbClr r="0" g="0" b="0"/>
-        </a:lnRef>
-        <a:fillRef idx="1">
-          <a:scrgbClr r="0" g="0" b="0"/>
-        </a:fillRef>
-        <a:effectRef idx="0">
-          <a:scrgbClr r="0" g="0" b="0"/>
-        </a:effectRef>
-        <a:fontRef idx="minor"/>
-      </dsp:style>
-      <dsp:txBody>
-        <a:bodyPr spcFirstLastPara="0" vert="horz" wrap="square" lIns="263144" tIns="46990" rIns="263144" bIns="46990" numCol="1" spcCol="1270" anchor="ctr" anchorCtr="0">
-          <a:noAutofit/>
-        </a:bodyPr>
-        <a:lstStyle/>
-        <a:p>
-          <a:pPr marL="0" lvl="0" indent="0" algn="ctr" defTabSz="1644650">
-            <a:lnSpc>
-              <a:spcPct val="90000"/>
-            </a:lnSpc>
-            <a:spcBef>
-              <a:spcPct val="0"/>
-            </a:spcBef>
-            <a:spcAft>
-              <a:spcPct val="35000"/>
-            </a:spcAft>
-            <a:buNone/>
-          </a:pPr>
-          <a:endParaRPr lang="en-US" sz="3700" kern="1200"/>
-        </a:p>
-      </dsp:txBody>
-      <dsp:txXfrm>
-        <a:off x="2531110" y="2762668"/>
-        <a:ext cx="2531110" cy="615659"/>
-      </dsp:txXfrm>
-    </dsp:sp>
-    <dsp:sp modelId="{EFE0E04D-0AEB-4F9D-863C-7C1CE9E4CCE9}">
-      <dsp:nvSpPr>
-        <dsp:cNvPr id="0" name=""/>
-        <dsp:cNvSpPr/>
-      </dsp:nvSpPr>
-      <dsp:spPr>
-        <a:xfrm rot="10800000">
-          <a:off x="0" y="0"/>
-          <a:ext cx="5062219" cy="2059061"/>
-        </a:xfrm>
-        <a:prstGeom prst="upArrowCallout">
-          <a:avLst/>
-        </a:prstGeom>
-        <a:solidFill>
-          <a:schemeClr val="accent1">
-            <a:hueOff val="0"/>
-            <a:satOff val="0"/>
-            <a:lumOff val="0"/>
-            <a:alphaOff val="0"/>
-          </a:schemeClr>
-        </a:solidFill>
-        <a:ln w="12700" cap="flat" cmpd="sng" algn="ctr">
-          <a:solidFill>
-            <a:schemeClr val="lt1">
-              <a:hueOff val="0"/>
-              <a:satOff val="0"/>
-              <a:lumOff val="0"/>
-              <a:alphaOff val="0"/>
-            </a:schemeClr>
-          </a:solidFill>
-          <a:prstDash val="solid"/>
-          <a:miter lim="800000"/>
-        </a:ln>
-        <a:effectLst/>
-      </dsp:spPr>
-      <dsp:style>
-        <a:lnRef idx="2">
-          <a:scrgbClr r="0" g="0" b="0"/>
-        </a:lnRef>
-        <a:fillRef idx="1">
-          <a:scrgbClr r="0" g="0" b="0"/>
-        </a:fillRef>
-        <a:effectRef idx="0">
-          <a:scrgbClr r="0" g="0" b="0"/>
-        </a:effectRef>
-        <a:fontRef idx="minor">
-          <a:schemeClr val="lt1"/>
-        </a:fontRef>
-      </dsp:style>
-      <dsp:txBody>
-        <a:bodyPr spcFirstLastPara="0" vert="horz" wrap="square" lIns="177800" tIns="177800" rIns="177800" bIns="177800" numCol="1" spcCol="1270" anchor="ctr" anchorCtr="0">
-          <a:noAutofit/>
-        </a:bodyPr>
-        <a:lstStyle/>
-        <a:p>
-          <a:pPr marL="0" lvl="0" indent="0" algn="ctr" defTabSz="1111250">
-            <a:lnSpc>
-              <a:spcPct val="90000"/>
-            </a:lnSpc>
-            <a:spcBef>
-              <a:spcPct val="0"/>
-            </a:spcBef>
-            <a:spcAft>
-              <a:spcPct val="35000"/>
-            </a:spcAft>
-            <a:buNone/>
-          </a:pPr>
-          <a:r>
-            <a:rPr lang="en-US" sz="2500" kern="1200" dirty="0"/>
-            <a:t>data</a:t>
-          </a:r>
-        </a:p>
-      </dsp:txBody>
-      <dsp:txXfrm rot="-10800000">
-        <a:off x="0" y="0"/>
-        <a:ext cx="5062219" cy="722730"/>
-      </dsp:txXfrm>
-    </dsp:sp>
-    <dsp:sp modelId="{4F779B3E-278B-43D9-964C-326D68A80CDA}">
-      <dsp:nvSpPr>
-        <dsp:cNvPr id="0" name=""/>
-        <dsp:cNvSpPr/>
-      </dsp:nvSpPr>
-      <dsp:spPr>
-        <a:xfrm>
-          <a:off x="0" y="723688"/>
-          <a:ext cx="2531110" cy="615659"/>
-        </a:xfrm>
-        <a:prstGeom prst="rect">
-          <a:avLst/>
-        </a:prstGeom>
-        <a:solidFill>
-          <a:schemeClr val="accent1">
-            <a:alpha val="90000"/>
-            <a:tint val="40000"/>
-            <a:hueOff val="0"/>
-            <a:satOff val="0"/>
-            <a:lumOff val="0"/>
-            <a:alphaOff val="0"/>
-          </a:schemeClr>
-        </a:solidFill>
-        <a:ln w="12700" cap="flat" cmpd="sng" algn="ctr">
-          <a:solidFill>
-            <a:schemeClr val="accent1">
-              <a:alpha val="90000"/>
-              <a:tint val="40000"/>
-              <a:hueOff val="0"/>
-              <a:satOff val="0"/>
-              <a:lumOff val="0"/>
-              <a:alphaOff val="0"/>
-            </a:schemeClr>
-          </a:solidFill>
-          <a:prstDash val="solid"/>
-          <a:miter lim="800000"/>
-        </a:ln>
-        <a:effectLst/>
-      </dsp:spPr>
-      <dsp:style>
-        <a:lnRef idx="2">
-          <a:scrgbClr r="0" g="0" b="0"/>
-        </a:lnRef>
-        <a:fillRef idx="1">
-          <a:scrgbClr r="0" g="0" b="0"/>
-        </a:fillRef>
-        <a:effectRef idx="0">
-          <a:scrgbClr r="0" g="0" b="0"/>
-        </a:effectRef>
-        <a:fontRef idx="minor"/>
-      </dsp:style>
-      <dsp:txBody>
-        <a:bodyPr spcFirstLastPara="0" vert="horz" wrap="square" lIns="263144" tIns="46990" rIns="263144" bIns="46990" numCol="1" spcCol="1270" anchor="ctr" anchorCtr="0">
-          <a:noAutofit/>
-        </a:bodyPr>
-        <a:lstStyle/>
-        <a:p>
-          <a:pPr marL="0" lvl="0" indent="0" algn="ctr" defTabSz="1644650">
-            <a:lnSpc>
-              <a:spcPct val="90000"/>
-            </a:lnSpc>
-            <a:spcBef>
-              <a:spcPct val="0"/>
-            </a:spcBef>
-            <a:spcAft>
-              <a:spcPct val="35000"/>
-            </a:spcAft>
-            <a:buNone/>
-          </a:pPr>
-          <a:endParaRPr lang="en-US" sz="3700" kern="1200"/>
-        </a:p>
-      </dsp:txBody>
-      <dsp:txXfrm>
-        <a:off x="0" y="723688"/>
-        <a:ext cx="2531110" cy="615659"/>
-      </dsp:txXfrm>
-    </dsp:sp>
-    <dsp:sp modelId="{E0EC5BFA-8429-4091-9DC3-692D36C50327}">
-      <dsp:nvSpPr>
-        <dsp:cNvPr id="0" name=""/>
-        <dsp:cNvSpPr/>
-      </dsp:nvSpPr>
-      <dsp:spPr>
-        <a:xfrm>
-          <a:off x="2531110" y="723688"/>
-          <a:ext cx="2531110" cy="615659"/>
-        </a:xfrm>
-        <a:prstGeom prst="rect">
-          <a:avLst/>
-        </a:prstGeom>
-        <a:solidFill>
-          <a:schemeClr val="accent1">
-            <a:alpha val="90000"/>
-            <a:tint val="40000"/>
-            <a:hueOff val="0"/>
-            <a:satOff val="0"/>
-            <a:lumOff val="0"/>
-            <a:alphaOff val="0"/>
-          </a:schemeClr>
-        </a:solidFill>
-        <a:ln w="12700" cap="flat" cmpd="sng" algn="ctr">
-          <a:solidFill>
-            <a:schemeClr val="accent1">
-              <a:alpha val="90000"/>
-              <a:tint val="40000"/>
-              <a:hueOff val="0"/>
-              <a:satOff val="0"/>
-              <a:lumOff val="0"/>
-              <a:alphaOff val="0"/>
-            </a:schemeClr>
-          </a:solidFill>
-          <a:prstDash val="solid"/>
-          <a:miter lim="800000"/>
-        </a:ln>
-        <a:effectLst/>
-      </dsp:spPr>
-      <dsp:style>
-        <a:lnRef idx="2">
-          <a:scrgbClr r="0" g="0" b="0"/>
-        </a:lnRef>
-        <a:fillRef idx="1">
-          <a:scrgbClr r="0" g="0" b="0"/>
-        </a:fillRef>
-        <a:effectRef idx="0">
-          <a:scrgbClr r="0" g="0" b="0"/>
-        </a:effectRef>
-        <a:fontRef idx="minor"/>
-      </dsp:style>
-      <dsp:txBody>
-        <a:bodyPr spcFirstLastPara="0" vert="horz" wrap="square" lIns="263144" tIns="46990" rIns="263144" bIns="46990" numCol="1" spcCol="1270" anchor="ctr" anchorCtr="0">
-          <a:noAutofit/>
-        </a:bodyPr>
-        <a:lstStyle/>
-        <a:p>
-          <a:pPr marL="0" lvl="0" indent="0" algn="ctr" defTabSz="1644650">
-            <a:lnSpc>
-              <a:spcPct val="90000"/>
-            </a:lnSpc>
-            <a:spcBef>
-              <a:spcPct val="0"/>
-            </a:spcBef>
-            <a:spcAft>
-              <a:spcPct val="35000"/>
-            </a:spcAft>
-            <a:buNone/>
-          </a:pPr>
-          <a:endParaRPr lang="en-US" sz="3700" kern="1200"/>
-        </a:p>
-      </dsp:txBody>
-      <dsp:txXfrm>
-        <a:off x="2531110" y="723688"/>
-        <a:ext cx="2531110" cy="615659"/>
+        <a:off x="9229681" y="544802"/>
+        <a:ext cx="2559798" cy="615427"/>
       </dsp:txXfrm>
     </dsp:sp>
   </dsp:spTree>
@@ -3587,1394 +1643,7 @@
 </dgm:layoutDef>
 </file>
 
-<file path=ppt/diagrams/layout2.xml><?xml version="1.0" encoding="utf-8"?>
-<dgm:layoutDef xmlns:dgm="http://schemas.openxmlformats.org/drawingml/2006/diagram" xmlns:a="http://schemas.openxmlformats.org/drawingml/2006/main" uniqueId="urn:microsoft.com/office/officeart/2005/8/layout/process4">
-  <dgm:title val=""/>
-  <dgm:desc val=""/>
-  <dgm:catLst>
-    <dgm:cat type="process" pri="16000"/>
-    <dgm:cat type="list" pri="20000"/>
-  </dgm:catLst>
-  <dgm:sampData>
-    <dgm:dataModel>
-      <dgm:ptLst>
-        <dgm:pt modelId="0" type="doc"/>
-        <dgm:pt modelId="1">
-          <dgm:prSet phldr="1"/>
-        </dgm:pt>
-        <dgm:pt modelId="11">
-          <dgm:prSet phldr="1"/>
-        </dgm:pt>
-        <dgm:pt modelId="12">
-          <dgm:prSet phldr="1"/>
-        </dgm:pt>
-        <dgm:pt modelId="2">
-          <dgm:prSet phldr="1"/>
-        </dgm:pt>
-        <dgm:pt modelId="21">
-          <dgm:prSet phldr="1"/>
-        </dgm:pt>
-        <dgm:pt modelId="22">
-          <dgm:prSet phldr="1"/>
-        </dgm:pt>
-        <dgm:pt modelId="3">
-          <dgm:prSet phldr="1"/>
-        </dgm:pt>
-        <dgm:pt modelId="31">
-          <dgm:prSet phldr="1"/>
-        </dgm:pt>
-        <dgm:pt modelId="32">
-          <dgm:prSet phldr="1"/>
-        </dgm:pt>
-      </dgm:ptLst>
-      <dgm:cxnLst>
-        <dgm:cxn modelId="4" srcId="0" destId="1" srcOrd="0" destOrd="0"/>
-        <dgm:cxn modelId="5" srcId="0" destId="2" srcOrd="1" destOrd="0"/>
-        <dgm:cxn modelId="6" srcId="0" destId="3" srcOrd="2" destOrd="0"/>
-        <dgm:cxn modelId="13" srcId="1" destId="11" srcOrd="0" destOrd="0"/>
-        <dgm:cxn modelId="14" srcId="1" destId="12" srcOrd="1" destOrd="0"/>
-        <dgm:cxn modelId="23" srcId="2" destId="21" srcOrd="0" destOrd="0"/>
-        <dgm:cxn modelId="24" srcId="2" destId="22" srcOrd="1" destOrd="0"/>
-        <dgm:cxn modelId="33" srcId="3" destId="31" srcOrd="0" destOrd="0"/>
-        <dgm:cxn modelId="34" srcId="3" destId="32" srcOrd="1" destOrd="0"/>
-      </dgm:cxnLst>
-      <dgm:bg/>
-      <dgm:whole/>
-    </dgm:dataModel>
-  </dgm:sampData>
-  <dgm:styleData>
-    <dgm:dataModel>
-      <dgm:ptLst>
-        <dgm:pt modelId="0" type="doc"/>
-        <dgm:pt modelId="1"/>
-        <dgm:pt modelId="11"/>
-        <dgm:pt modelId="2"/>
-        <dgm:pt modelId="21"/>
-      </dgm:ptLst>
-      <dgm:cxnLst>
-        <dgm:cxn modelId="4" srcId="0" destId="1" srcOrd="0" destOrd="0"/>
-        <dgm:cxn modelId="5" srcId="0" destId="2" srcOrd="1" destOrd="0"/>
-        <dgm:cxn modelId="13" srcId="1" destId="11" srcOrd="0" destOrd="0"/>
-        <dgm:cxn modelId="23" srcId="2" destId="21" srcOrd="0" destOrd="0"/>
-      </dgm:cxnLst>
-      <dgm:bg/>
-      <dgm:whole/>
-    </dgm:dataModel>
-  </dgm:styleData>
-  <dgm:clrData>
-    <dgm:dataModel>
-      <dgm:ptLst>
-        <dgm:pt modelId="0" type="doc"/>
-        <dgm:pt modelId="1"/>
-        <dgm:pt modelId="11"/>
-        <dgm:pt modelId="2"/>
-        <dgm:pt modelId="21"/>
-        <dgm:pt modelId="3"/>
-        <dgm:pt modelId="31"/>
-        <dgm:pt modelId="4"/>
-        <dgm:pt modelId="41"/>
-      </dgm:ptLst>
-      <dgm:cxnLst>
-        <dgm:cxn modelId="5" srcId="0" destId="1" srcOrd="0" destOrd="0"/>
-        <dgm:cxn modelId="6" srcId="0" destId="2" srcOrd="1" destOrd="0"/>
-        <dgm:cxn modelId="7" srcId="0" destId="3" srcOrd="2" destOrd="0"/>
-        <dgm:cxn modelId="8" srcId="0" destId="4" srcOrd="3" destOrd="0"/>
-        <dgm:cxn modelId="13" srcId="1" destId="11" srcOrd="0" destOrd="0"/>
-        <dgm:cxn modelId="23" srcId="2" destId="21" srcOrd="0" destOrd="0"/>
-        <dgm:cxn modelId="33" srcId="3" destId="31" srcOrd="0" destOrd="0"/>
-        <dgm:cxn modelId="43" srcId="4" destId="41" srcOrd="0" destOrd="0"/>
-      </dgm:cxnLst>
-      <dgm:bg/>
-      <dgm:whole/>
-    </dgm:dataModel>
-  </dgm:clrData>
-  <dgm:layoutNode name="Name0">
-    <dgm:varLst>
-      <dgm:dir/>
-      <dgm:animLvl val="lvl"/>
-      <dgm:resizeHandles val="exact"/>
-    </dgm:varLst>
-    <dgm:alg type="lin">
-      <dgm:param type="linDir" val="fromB"/>
-    </dgm:alg>
-    <dgm:shape xmlns:r="http://schemas.openxmlformats.org/officeDocument/2006/relationships" r:blip="">
-      <dgm:adjLst/>
-    </dgm:shape>
-    <dgm:presOf/>
-    <dgm:constrLst>
-      <dgm:constr type="h" for="ch" forName="boxAndChildren" refType="h"/>
-      <dgm:constr type="h" for="ch" forName="arrowAndChildren" refType="h" refFor="ch" refForName="boxAndChildren" op="equ" fact="1.538"/>
-      <dgm:constr type="w" for="ch" forName="arrowAndChildren" refType="w"/>
-      <dgm:constr type="w" for="ch" forName="boxAndChildren" refType="w"/>
-      <dgm:constr type="h" for="ch" forName="sp" refType="h" fact="-0.015"/>
-      <dgm:constr type="primFontSz" for="des" forName="parentTextBox" val="65"/>
-      <dgm:constr type="primFontSz" for="des" forName="parentTextArrow" refType="primFontSz" refFor="des" refForName="parentTextBox" op="equ"/>
-      <dgm:constr type="primFontSz" for="des" forName="childTextArrow" val="65"/>
-      <dgm:constr type="primFontSz" for="des" forName="childTextBox" refType="primFontSz" refFor="des" refForName="childTextArrow" op="equ"/>
-    </dgm:constrLst>
-    <dgm:ruleLst/>
-    <dgm:forEach name="Name1" axis="ch" ptType="node" st="-1" step="-1">
-      <dgm:choose name="Name2">
-        <dgm:if name="Name3" axis="self" ptType="node" func="revPos" op="equ" val="1">
-          <dgm:layoutNode name="boxAndChildren">
-            <dgm:alg type="composite"/>
-            <dgm:shape xmlns:r="http://schemas.openxmlformats.org/officeDocument/2006/relationships" r:blip="">
-              <dgm:adjLst/>
-            </dgm:shape>
-            <dgm:presOf/>
-            <dgm:choose name="Name4">
-              <dgm:if name="Name5" axis="ch" ptType="node" func="cnt" op="gte" val="1">
-                <dgm:constrLst>
-                  <dgm:constr type="w" for="ch" forName="parentTextBox" refType="w"/>
-                  <dgm:constr type="h" for="ch" forName="parentTextBox" refType="h" fact="0.54"/>
-                  <dgm:constr type="t" for="ch" forName="parentTextBox"/>
-                  <dgm:constr type="w" for="ch" forName="entireBox" refType="w"/>
-                  <dgm:constr type="h" for="ch" forName="entireBox" refType="h"/>
-                  <dgm:constr type="w" for="ch" forName="descendantBox" refType="w"/>
-                  <dgm:constr type="b" for="ch" forName="descendantBox" refType="h" fact="0.98"/>
-                  <dgm:constr type="h" for="ch" forName="descendantBox" refType="h" fact="0.46"/>
-                </dgm:constrLst>
-              </dgm:if>
-              <dgm:else name="Name6">
-                <dgm:constrLst>
-                  <dgm:constr type="w" for="ch" forName="parentTextBox" refType="w"/>
-                  <dgm:constr type="h" for="ch" forName="parentTextBox" refType="h"/>
-                </dgm:constrLst>
-              </dgm:else>
-            </dgm:choose>
-            <dgm:ruleLst/>
-            <dgm:layoutNode name="parentTextBox">
-              <dgm:alg type="tx"/>
-              <dgm:choose name="Name7">
-                <dgm:if name="Name8" axis="ch" ptType="node" func="cnt" op="gte" val="1">
-                  <dgm:shape xmlns:r="http://schemas.openxmlformats.org/officeDocument/2006/relationships" type="rect" r:blip="" zOrderOff="1" hideGeom="1">
-                    <dgm:adjLst/>
-                  </dgm:shape>
-                </dgm:if>
-                <dgm:else name="Name9">
-                  <dgm:shape xmlns:r="http://schemas.openxmlformats.org/officeDocument/2006/relationships" type="rect" r:blip="">
-                    <dgm:adjLst/>
-                  </dgm:shape>
-                </dgm:else>
-              </dgm:choose>
-              <dgm:presOf axis="self"/>
-              <dgm:constrLst/>
-              <dgm:ruleLst>
-                <dgm:rule type="primFontSz" val="5" fact="NaN" max="NaN"/>
-              </dgm:ruleLst>
-            </dgm:layoutNode>
-            <dgm:choose name="Name10">
-              <dgm:if name="Name11" axis="ch" ptType="node" func="cnt" op="gte" val="1">
-                <dgm:layoutNode name="entireBox">
-                  <dgm:alg type="sp"/>
-                  <dgm:shape xmlns:r="http://schemas.openxmlformats.org/officeDocument/2006/relationships" type="rect" r:blip="">
-                    <dgm:adjLst/>
-                  </dgm:shape>
-                  <dgm:presOf axis="self"/>
-                  <dgm:constrLst/>
-                  <dgm:ruleLst/>
-                </dgm:layoutNode>
-                <dgm:layoutNode name="descendantBox" styleLbl="fgAccFollowNode1">
-                  <dgm:choose name="Name12">
-                    <dgm:if name="Name13" func="var" arg="dir" op="equ" val="norm">
-                      <dgm:alg type="lin"/>
-                    </dgm:if>
-                    <dgm:else name="Name14">
-                      <dgm:alg type="lin">
-                        <dgm:param type="linDir" val="fromR"/>
-                      </dgm:alg>
-                    </dgm:else>
-                  </dgm:choose>
-                  <dgm:shape xmlns:r="http://schemas.openxmlformats.org/officeDocument/2006/relationships" r:blip="">
-                    <dgm:adjLst/>
-                  </dgm:shape>
-                  <dgm:presOf/>
-                  <dgm:constrLst>
-                    <dgm:constr type="w" for="ch" forName="childTextBox" refType="w"/>
-                    <dgm:constr type="h" for="ch" forName="childTextBox" refType="h"/>
-                  </dgm:constrLst>
-                  <dgm:ruleLst/>
-                  <dgm:forEach name="Name15" axis="ch" ptType="node">
-                    <dgm:layoutNode name="childTextBox" styleLbl="fgAccFollowNode1">
-                      <dgm:varLst>
-                        <dgm:bulletEnabled val="1"/>
-                      </dgm:varLst>
-                      <dgm:alg type="tx"/>
-                      <dgm:shape xmlns:r="http://schemas.openxmlformats.org/officeDocument/2006/relationships" type="rect" r:blip="">
-                        <dgm:adjLst/>
-                      </dgm:shape>
-                      <dgm:presOf axis="desOrSelf" ptType="node"/>
-                      <dgm:constrLst>
-                        <dgm:constr type="tMarg" refType="primFontSz" fact="0.1"/>
-                        <dgm:constr type="bMarg" refType="primFontSz" fact="0.1"/>
-                      </dgm:constrLst>
-                      <dgm:ruleLst>
-                        <dgm:rule type="primFontSz" val="5" fact="NaN" max="NaN"/>
-                      </dgm:ruleLst>
-                    </dgm:layoutNode>
-                  </dgm:forEach>
-                </dgm:layoutNode>
-              </dgm:if>
-              <dgm:else name="Name16"/>
-            </dgm:choose>
-          </dgm:layoutNode>
-        </dgm:if>
-        <dgm:else name="Name17">
-          <dgm:layoutNode name="arrowAndChildren">
-            <dgm:alg type="composite"/>
-            <dgm:shape xmlns:r="http://schemas.openxmlformats.org/officeDocument/2006/relationships" r:blip="">
-              <dgm:adjLst/>
-            </dgm:shape>
-            <dgm:presOf/>
-            <dgm:choose name="Name18">
-              <dgm:if name="Name19" axis="ch" ptType="node" func="cnt" op="gte" val="1">
-                <dgm:constrLst>
-                  <dgm:constr type="w" for="ch" forName="parentTextArrow" refType="w"/>
-                  <dgm:constr type="t" for="ch" forName="parentTextArrow"/>
-                  <dgm:constr type="h" for="ch" forName="parentTextArrow" refType="h" fact="0.351"/>
-                  <dgm:constr type="w" for="ch" forName="arrow" refType="w"/>
-                  <dgm:constr type="h" for="ch" forName="arrow" refType="h"/>
-                  <dgm:constr type="w" for="ch" forName="descendantArrow" refType="w"/>
-                  <dgm:constr type="b" for="ch" forName="descendantArrow" refType="h" fact="0.65"/>
-                  <dgm:constr type="h" for="ch" forName="descendantArrow" refType="h" fact="0.299"/>
-                </dgm:constrLst>
-              </dgm:if>
-              <dgm:else name="Name20">
-                <dgm:constrLst>
-                  <dgm:constr type="w" for="ch" forName="parentTextArrow" refType="w"/>
-                  <dgm:constr type="h" for="ch" forName="parentTextArrow" refType="h"/>
-                </dgm:constrLst>
-              </dgm:else>
-            </dgm:choose>
-            <dgm:ruleLst/>
-            <dgm:layoutNode name="parentTextArrow">
-              <dgm:alg type="tx"/>
-              <dgm:choose name="Name21">
-                <dgm:if name="Name22" axis="ch" ptType="node" func="cnt" op="gte" val="1">
-                  <dgm:shape xmlns:r="http://schemas.openxmlformats.org/officeDocument/2006/relationships" type="rect" r:blip="" zOrderOff="1" hideGeom="1">
-                    <dgm:adjLst/>
-                  </dgm:shape>
-                </dgm:if>
-                <dgm:else name="Name23">
-                  <dgm:shape xmlns:r="http://schemas.openxmlformats.org/officeDocument/2006/relationships" rot="180" type="upArrowCallout" r:blip="">
-                    <dgm:adjLst/>
-                  </dgm:shape>
-                </dgm:else>
-              </dgm:choose>
-              <dgm:presOf axis="self"/>
-              <dgm:constrLst/>
-              <dgm:ruleLst>
-                <dgm:rule type="primFontSz" val="5" fact="NaN" max="NaN"/>
-              </dgm:ruleLst>
-            </dgm:layoutNode>
-            <dgm:choose name="Name24">
-              <dgm:if name="Name25" axis="ch" ptType="node" func="cnt" op="gte" val="1">
-                <dgm:layoutNode name="arrow">
-                  <dgm:alg type="sp"/>
-                  <dgm:shape xmlns:r="http://schemas.openxmlformats.org/officeDocument/2006/relationships" rot="180" type="upArrowCallout" r:blip="">
-                    <dgm:adjLst/>
-                  </dgm:shape>
-                  <dgm:presOf axis="self"/>
-                  <dgm:constrLst/>
-                  <dgm:ruleLst/>
-                </dgm:layoutNode>
-                <dgm:layoutNode name="descendantArrow">
-                  <dgm:choose name="Name26">
-                    <dgm:if name="Name27" func="var" arg="dir" op="equ" val="norm">
-                      <dgm:alg type="lin"/>
-                    </dgm:if>
-                    <dgm:else name="Name28">
-                      <dgm:alg type="lin">
-                        <dgm:param type="linDir" val="fromR"/>
-                      </dgm:alg>
-                    </dgm:else>
-                  </dgm:choose>
-                  <dgm:shape xmlns:r="http://schemas.openxmlformats.org/officeDocument/2006/relationships" r:blip="">
-                    <dgm:adjLst/>
-                  </dgm:shape>
-                  <dgm:presOf/>
-                  <dgm:constrLst>
-                    <dgm:constr type="w" for="ch" forName="childTextArrow" refType="w"/>
-                    <dgm:constr type="h" for="ch" forName="childTextArrow" refType="h"/>
-                  </dgm:constrLst>
-                  <dgm:ruleLst/>
-                  <dgm:forEach name="Name29" axis="ch" ptType="node">
-                    <dgm:layoutNode name="childTextArrow" styleLbl="fgAccFollowNode1">
-                      <dgm:varLst>
-                        <dgm:bulletEnabled val="1"/>
-                      </dgm:varLst>
-                      <dgm:alg type="tx"/>
-                      <dgm:shape xmlns:r="http://schemas.openxmlformats.org/officeDocument/2006/relationships" type="rect" r:blip="">
-                        <dgm:adjLst/>
-                      </dgm:shape>
-                      <dgm:presOf axis="desOrSelf" ptType="node"/>
-                      <dgm:constrLst>
-                        <dgm:constr type="tMarg" refType="primFontSz" fact="0.1"/>
-                        <dgm:constr type="bMarg" refType="primFontSz" fact="0.1"/>
-                      </dgm:constrLst>
-                      <dgm:ruleLst>
-                        <dgm:rule type="primFontSz" val="5" fact="NaN" max="NaN"/>
-                      </dgm:ruleLst>
-                    </dgm:layoutNode>
-                  </dgm:forEach>
-                </dgm:layoutNode>
-              </dgm:if>
-              <dgm:else name="Name30"/>
-            </dgm:choose>
-          </dgm:layoutNode>
-        </dgm:else>
-      </dgm:choose>
-      <dgm:forEach name="Name31" axis="precedSib" ptType="sibTrans" st="-1" cnt="1">
-        <dgm:layoutNode name="sp">
-          <dgm:alg type="sp"/>
-          <dgm:shape xmlns:r="http://schemas.openxmlformats.org/officeDocument/2006/relationships" r:blip="">
-            <dgm:adjLst/>
-          </dgm:shape>
-          <dgm:presOf axis="self"/>
-          <dgm:constrLst/>
-          <dgm:ruleLst/>
-        </dgm:layoutNode>
-      </dgm:forEach>
-    </dgm:forEach>
-  </dgm:layoutNode>
-</dgm:layoutDef>
-</file>
-
 <file path=ppt/diagrams/quickStyle1.xml><?xml version="1.0" encoding="utf-8"?>
-<dgm:styleDef xmlns:dgm="http://schemas.openxmlformats.org/drawingml/2006/diagram" xmlns:a="http://schemas.openxmlformats.org/drawingml/2006/main" uniqueId="urn:microsoft.com/office/officeart/2005/8/quickstyle/simple1">
-  <dgm:title val=""/>
-  <dgm:desc val=""/>
-  <dgm:catLst>
-    <dgm:cat type="simple" pri="10100"/>
-  </dgm:catLst>
-  <dgm:scene3d>
-    <a:camera prst="orthographicFront"/>
-    <a:lightRig rig="threePt" dir="t"/>
-  </dgm:scene3d>
-  <dgm:styleLbl name="node0">
-    <dgm:scene3d>
-      <a:camera prst="orthographicFront"/>
-      <a:lightRig rig="threePt" dir="t"/>
-    </dgm:scene3d>
-    <dgm:sp3d/>
-    <dgm:txPr/>
-    <dgm:style>
-      <a:lnRef idx="2">
-        <a:scrgbClr r="0" g="0" b="0"/>
-      </a:lnRef>
-      <a:fillRef idx="1">
-        <a:scrgbClr r="0" g="0" b="0"/>
-      </a:fillRef>
-      <a:effectRef idx="0">
-        <a:scrgbClr r="0" g="0" b="0"/>
-      </a:effectRef>
-      <a:fontRef idx="minor">
-        <a:schemeClr val="lt1"/>
-      </a:fontRef>
-    </dgm:style>
-  </dgm:styleLbl>
-  <dgm:styleLbl name="lnNode1">
-    <dgm:scene3d>
-      <a:camera prst="orthographicFront"/>
-      <a:lightRig rig="threePt" dir="t"/>
-    </dgm:scene3d>
-    <dgm:sp3d/>
-    <dgm:txPr/>
-    <dgm:style>
-      <a:lnRef idx="2">
-        <a:scrgbClr r="0" g="0" b="0"/>
-      </a:lnRef>
-      <a:fillRef idx="1">
-        <a:scrgbClr r="0" g="0" b="0"/>
-      </a:fillRef>
-      <a:effectRef idx="0">
-        <a:scrgbClr r="0" g="0" b="0"/>
-      </a:effectRef>
-      <a:fontRef idx="minor">
-        <a:schemeClr val="lt1"/>
-      </a:fontRef>
-    </dgm:style>
-  </dgm:styleLbl>
-  <dgm:styleLbl name="vennNode1">
-    <dgm:scene3d>
-      <a:camera prst="orthographicFront"/>
-      <a:lightRig rig="threePt" dir="t"/>
-    </dgm:scene3d>
-    <dgm:sp3d/>
-    <dgm:txPr/>
-    <dgm:style>
-      <a:lnRef idx="2">
-        <a:scrgbClr r="0" g="0" b="0"/>
-      </a:lnRef>
-      <a:fillRef idx="1">
-        <a:scrgbClr r="0" g="0" b="0"/>
-      </a:fillRef>
-      <a:effectRef idx="0">
-        <a:scrgbClr r="0" g="0" b="0"/>
-      </a:effectRef>
-      <a:fontRef idx="minor">
-        <a:schemeClr val="tx1"/>
-      </a:fontRef>
-    </dgm:style>
-  </dgm:styleLbl>
-  <dgm:styleLbl name="alignNode1">
-    <dgm:scene3d>
-      <a:camera prst="orthographicFront"/>
-      <a:lightRig rig="threePt" dir="t"/>
-    </dgm:scene3d>
-    <dgm:sp3d/>
-    <dgm:txPr/>
-    <dgm:style>
-      <a:lnRef idx="2">
-        <a:scrgbClr r="0" g="0" b="0"/>
-      </a:lnRef>
-      <a:fillRef idx="1">
-        <a:scrgbClr r="0" g="0" b="0"/>
-      </a:fillRef>
-      <a:effectRef idx="0">
-        <a:scrgbClr r="0" g="0" b="0"/>
-      </a:effectRef>
-      <a:fontRef idx="minor">
-        <a:schemeClr val="lt1"/>
-      </a:fontRef>
-    </dgm:style>
-  </dgm:styleLbl>
-  <dgm:styleLbl name="node1">
-    <dgm:scene3d>
-      <a:camera prst="orthographicFront"/>
-      <a:lightRig rig="threePt" dir="t"/>
-    </dgm:scene3d>
-    <dgm:sp3d/>
-    <dgm:txPr/>
-    <dgm:style>
-      <a:lnRef idx="2">
-        <a:scrgbClr r="0" g="0" b="0"/>
-      </a:lnRef>
-      <a:fillRef idx="1">
-        <a:scrgbClr r="0" g="0" b="0"/>
-      </a:fillRef>
-      <a:effectRef idx="0">
-        <a:scrgbClr r="0" g="0" b="0"/>
-      </a:effectRef>
-      <a:fontRef idx="minor">
-        <a:schemeClr val="lt1"/>
-      </a:fontRef>
-    </dgm:style>
-  </dgm:styleLbl>
-  <dgm:styleLbl name="node2">
-    <dgm:scene3d>
-      <a:camera prst="orthographicFront"/>
-      <a:lightRig rig="threePt" dir="t"/>
-    </dgm:scene3d>
-    <dgm:sp3d/>
-    <dgm:txPr/>
-    <dgm:style>
-      <a:lnRef idx="2">
-        <a:scrgbClr r="0" g="0" b="0"/>
-      </a:lnRef>
-      <a:fillRef idx="1">
-        <a:scrgbClr r="0" g="0" b="0"/>
-      </a:fillRef>
-      <a:effectRef idx="0">
-        <a:scrgbClr r="0" g="0" b="0"/>
-      </a:effectRef>
-      <a:fontRef idx="minor">
-        <a:schemeClr val="lt1"/>
-      </a:fontRef>
-    </dgm:style>
-  </dgm:styleLbl>
-  <dgm:styleLbl name="node3">
-    <dgm:scene3d>
-      <a:camera prst="orthographicFront"/>
-      <a:lightRig rig="threePt" dir="t"/>
-    </dgm:scene3d>
-    <dgm:sp3d/>
-    <dgm:txPr/>
-    <dgm:style>
-      <a:lnRef idx="2">
-        <a:scrgbClr r="0" g="0" b="0"/>
-      </a:lnRef>
-      <a:fillRef idx="1">
-        <a:scrgbClr r="0" g="0" b="0"/>
-      </a:fillRef>
-      <a:effectRef idx="0">
-        <a:scrgbClr r="0" g="0" b="0"/>
-      </a:effectRef>
-      <a:fontRef idx="minor">
-        <a:schemeClr val="lt1"/>
-      </a:fontRef>
-    </dgm:style>
-  </dgm:styleLbl>
-  <dgm:styleLbl name="node4">
-    <dgm:scene3d>
-      <a:camera prst="orthographicFront"/>
-      <a:lightRig rig="threePt" dir="t"/>
-    </dgm:scene3d>
-    <dgm:sp3d/>
-    <dgm:txPr/>
-    <dgm:style>
-      <a:lnRef idx="2">
-        <a:scrgbClr r="0" g="0" b="0"/>
-      </a:lnRef>
-      <a:fillRef idx="1">
-        <a:scrgbClr r="0" g="0" b="0"/>
-      </a:fillRef>
-      <a:effectRef idx="0">
-        <a:scrgbClr r="0" g="0" b="0"/>
-      </a:effectRef>
-      <a:fontRef idx="minor">
-        <a:schemeClr val="lt1"/>
-      </a:fontRef>
-    </dgm:style>
-  </dgm:styleLbl>
-  <dgm:styleLbl name="fgImgPlace1">
-    <dgm:scene3d>
-      <a:camera prst="orthographicFront"/>
-      <a:lightRig rig="threePt" dir="t"/>
-    </dgm:scene3d>
-    <dgm:sp3d/>
-    <dgm:txPr/>
-    <dgm:style>
-      <a:lnRef idx="2">
-        <a:scrgbClr r="0" g="0" b="0"/>
-      </a:lnRef>
-      <a:fillRef idx="1">
-        <a:scrgbClr r="0" g="0" b="0"/>
-      </a:fillRef>
-      <a:effectRef idx="0">
-        <a:scrgbClr r="0" g="0" b="0"/>
-      </a:effectRef>
-      <a:fontRef idx="minor"/>
-    </dgm:style>
-  </dgm:styleLbl>
-  <dgm:styleLbl name="alignImgPlace1">
-    <dgm:scene3d>
-      <a:camera prst="orthographicFront"/>
-      <a:lightRig rig="threePt" dir="t"/>
-    </dgm:scene3d>
-    <dgm:sp3d/>
-    <dgm:txPr/>
-    <dgm:style>
-      <a:lnRef idx="2">
-        <a:scrgbClr r="0" g="0" b="0"/>
-      </a:lnRef>
-      <a:fillRef idx="1">
-        <a:scrgbClr r="0" g="0" b="0"/>
-      </a:fillRef>
-      <a:effectRef idx="0">
-        <a:scrgbClr r="0" g="0" b="0"/>
-      </a:effectRef>
-      <a:fontRef idx="minor"/>
-    </dgm:style>
-  </dgm:styleLbl>
-  <dgm:styleLbl name="bgImgPlace1">
-    <dgm:scene3d>
-      <a:camera prst="orthographicFront"/>
-      <a:lightRig rig="threePt" dir="t"/>
-    </dgm:scene3d>
-    <dgm:sp3d/>
-    <dgm:txPr/>
-    <dgm:style>
-      <a:lnRef idx="2">
-        <a:scrgbClr r="0" g="0" b="0"/>
-      </a:lnRef>
-      <a:fillRef idx="1">
-        <a:scrgbClr r="0" g="0" b="0"/>
-      </a:fillRef>
-      <a:effectRef idx="0">
-        <a:scrgbClr r="0" g="0" b="0"/>
-      </a:effectRef>
-      <a:fontRef idx="minor"/>
-    </dgm:style>
-  </dgm:styleLbl>
-  <dgm:styleLbl name="sibTrans2D1">
-    <dgm:scene3d>
-      <a:camera prst="orthographicFront"/>
-      <a:lightRig rig="threePt" dir="t"/>
-    </dgm:scene3d>
-    <dgm:sp3d/>
-    <dgm:txPr/>
-    <dgm:style>
-      <a:lnRef idx="0">
-        <a:scrgbClr r="0" g="0" b="0"/>
-      </a:lnRef>
-      <a:fillRef idx="1">
-        <a:scrgbClr r="0" g="0" b="0"/>
-      </a:fillRef>
-      <a:effectRef idx="0">
-        <a:scrgbClr r="0" g="0" b="0"/>
-      </a:effectRef>
-      <a:fontRef idx="minor">
-        <a:schemeClr val="lt1"/>
-      </a:fontRef>
-    </dgm:style>
-  </dgm:styleLbl>
-  <dgm:styleLbl name="fgSibTrans2D1">
-    <dgm:scene3d>
-      <a:camera prst="orthographicFront"/>
-      <a:lightRig rig="threePt" dir="t"/>
-    </dgm:scene3d>
-    <dgm:sp3d/>
-    <dgm:txPr/>
-    <dgm:style>
-      <a:lnRef idx="0">
-        <a:scrgbClr r="0" g="0" b="0"/>
-      </a:lnRef>
-      <a:fillRef idx="1">
-        <a:scrgbClr r="0" g="0" b="0"/>
-      </a:fillRef>
-      <a:effectRef idx="0">
-        <a:scrgbClr r="0" g="0" b="0"/>
-      </a:effectRef>
-      <a:fontRef idx="minor">
-        <a:schemeClr val="lt1"/>
-      </a:fontRef>
-    </dgm:style>
-  </dgm:styleLbl>
-  <dgm:styleLbl name="bgSibTrans2D1">
-    <dgm:scene3d>
-      <a:camera prst="orthographicFront"/>
-      <a:lightRig rig="threePt" dir="t"/>
-    </dgm:scene3d>
-    <dgm:sp3d/>
-    <dgm:txPr/>
-    <dgm:style>
-      <a:lnRef idx="0">
-        <a:scrgbClr r="0" g="0" b="0"/>
-      </a:lnRef>
-      <a:fillRef idx="1">
-        <a:scrgbClr r="0" g="0" b="0"/>
-      </a:fillRef>
-      <a:effectRef idx="0">
-        <a:scrgbClr r="0" g="0" b="0"/>
-      </a:effectRef>
-      <a:fontRef idx="minor">
-        <a:schemeClr val="lt1"/>
-      </a:fontRef>
-    </dgm:style>
-  </dgm:styleLbl>
-  <dgm:styleLbl name="sibTrans1D1">
-    <dgm:scene3d>
-      <a:camera prst="orthographicFront"/>
-      <a:lightRig rig="threePt" dir="t"/>
-    </dgm:scene3d>
-    <dgm:sp3d/>
-    <dgm:txPr/>
-    <dgm:style>
-      <a:lnRef idx="1">
-        <a:scrgbClr r="0" g="0" b="0"/>
-      </a:lnRef>
-      <a:fillRef idx="0">
-        <a:scrgbClr r="0" g="0" b="0"/>
-      </a:fillRef>
-      <a:effectRef idx="0">
-        <a:scrgbClr r="0" g="0" b="0"/>
-      </a:effectRef>
-      <a:fontRef idx="minor"/>
-    </dgm:style>
-  </dgm:styleLbl>
-  <dgm:styleLbl name="callout">
-    <dgm:scene3d>
-      <a:camera prst="orthographicFront"/>
-      <a:lightRig rig="threePt" dir="t"/>
-    </dgm:scene3d>
-    <dgm:sp3d/>
-    <dgm:txPr/>
-    <dgm:style>
-      <a:lnRef idx="2">
-        <a:scrgbClr r="0" g="0" b="0"/>
-      </a:lnRef>
-      <a:fillRef idx="1">
-        <a:scrgbClr r="0" g="0" b="0"/>
-      </a:fillRef>
-      <a:effectRef idx="0">
-        <a:scrgbClr r="0" g="0" b="0"/>
-      </a:effectRef>
-      <a:fontRef idx="minor"/>
-    </dgm:style>
-  </dgm:styleLbl>
-  <dgm:styleLbl name="asst0">
-    <dgm:scene3d>
-      <a:camera prst="orthographicFront"/>
-      <a:lightRig rig="threePt" dir="t"/>
-    </dgm:scene3d>
-    <dgm:sp3d/>
-    <dgm:txPr/>
-    <dgm:style>
-      <a:lnRef idx="2">
-        <a:scrgbClr r="0" g="0" b="0"/>
-      </a:lnRef>
-      <a:fillRef idx="1">
-        <a:scrgbClr r="0" g="0" b="0"/>
-      </a:fillRef>
-      <a:effectRef idx="0">
-        <a:scrgbClr r="0" g="0" b="0"/>
-      </a:effectRef>
-      <a:fontRef idx="minor">
-        <a:schemeClr val="lt1"/>
-      </a:fontRef>
-    </dgm:style>
-  </dgm:styleLbl>
-  <dgm:styleLbl name="asst1">
-    <dgm:scene3d>
-      <a:camera prst="orthographicFront"/>
-      <a:lightRig rig="threePt" dir="t"/>
-    </dgm:scene3d>
-    <dgm:sp3d/>
-    <dgm:txPr/>
-    <dgm:style>
-      <a:lnRef idx="2">
-        <a:scrgbClr r="0" g="0" b="0"/>
-      </a:lnRef>
-      <a:fillRef idx="1">
-        <a:scrgbClr r="0" g="0" b="0"/>
-      </a:fillRef>
-      <a:effectRef idx="0">
-        <a:scrgbClr r="0" g="0" b="0"/>
-      </a:effectRef>
-      <a:fontRef idx="minor">
-        <a:schemeClr val="lt1"/>
-      </a:fontRef>
-    </dgm:style>
-  </dgm:styleLbl>
-  <dgm:styleLbl name="asst2">
-    <dgm:scene3d>
-      <a:camera prst="orthographicFront"/>
-      <a:lightRig rig="threePt" dir="t"/>
-    </dgm:scene3d>
-    <dgm:sp3d/>
-    <dgm:txPr/>
-    <dgm:style>
-      <a:lnRef idx="2">
-        <a:scrgbClr r="0" g="0" b="0"/>
-      </a:lnRef>
-      <a:fillRef idx="1">
-        <a:scrgbClr r="0" g="0" b="0"/>
-      </a:fillRef>
-      <a:effectRef idx="0">
-        <a:scrgbClr r="0" g="0" b="0"/>
-      </a:effectRef>
-      <a:fontRef idx="minor">
-        <a:schemeClr val="lt1"/>
-      </a:fontRef>
-    </dgm:style>
-  </dgm:styleLbl>
-  <dgm:styleLbl name="asst3">
-    <dgm:scene3d>
-      <a:camera prst="orthographicFront"/>
-      <a:lightRig rig="threePt" dir="t"/>
-    </dgm:scene3d>
-    <dgm:sp3d/>
-    <dgm:txPr/>
-    <dgm:style>
-      <a:lnRef idx="2">
-        <a:scrgbClr r="0" g="0" b="0"/>
-      </a:lnRef>
-      <a:fillRef idx="1">
-        <a:scrgbClr r="0" g="0" b="0"/>
-      </a:fillRef>
-      <a:effectRef idx="0">
-        <a:scrgbClr r="0" g="0" b="0"/>
-      </a:effectRef>
-      <a:fontRef idx="minor">
-        <a:schemeClr val="lt1"/>
-      </a:fontRef>
-    </dgm:style>
-  </dgm:styleLbl>
-  <dgm:styleLbl name="asst4">
-    <dgm:scene3d>
-      <a:camera prst="orthographicFront"/>
-      <a:lightRig rig="threePt" dir="t"/>
-    </dgm:scene3d>
-    <dgm:sp3d/>
-    <dgm:txPr/>
-    <dgm:style>
-      <a:lnRef idx="2">
-        <a:scrgbClr r="0" g="0" b="0"/>
-      </a:lnRef>
-      <a:fillRef idx="1">
-        <a:scrgbClr r="0" g="0" b="0"/>
-      </a:fillRef>
-      <a:effectRef idx="0">
-        <a:scrgbClr r="0" g="0" b="0"/>
-      </a:effectRef>
-      <a:fontRef idx="minor">
-        <a:schemeClr val="lt1"/>
-      </a:fontRef>
-    </dgm:style>
-  </dgm:styleLbl>
-  <dgm:styleLbl name="parChTrans2D1">
-    <dgm:scene3d>
-      <a:camera prst="orthographicFront"/>
-      <a:lightRig rig="threePt" dir="t"/>
-    </dgm:scene3d>
-    <dgm:sp3d/>
-    <dgm:txPr/>
-    <dgm:style>
-      <a:lnRef idx="2">
-        <a:scrgbClr r="0" g="0" b="0"/>
-      </a:lnRef>
-      <a:fillRef idx="1">
-        <a:scrgbClr r="0" g="0" b="0"/>
-      </a:fillRef>
-      <a:effectRef idx="0">
-        <a:scrgbClr r="0" g="0" b="0"/>
-      </a:effectRef>
-      <a:fontRef idx="minor">
-        <a:schemeClr val="lt1"/>
-      </a:fontRef>
-    </dgm:style>
-  </dgm:styleLbl>
-  <dgm:styleLbl name="parChTrans2D2">
-    <dgm:scene3d>
-      <a:camera prst="orthographicFront"/>
-      <a:lightRig rig="threePt" dir="t"/>
-    </dgm:scene3d>
-    <dgm:sp3d/>
-    <dgm:txPr/>
-    <dgm:style>
-      <a:lnRef idx="2">
-        <a:scrgbClr r="0" g="0" b="0"/>
-      </a:lnRef>
-      <a:fillRef idx="1">
-        <a:scrgbClr r="0" g="0" b="0"/>
-      </a:fillRef>
-      <a:effectRef idx="0">
-        <a:scrgbClr r="0" g="0" b="0"/>
-      </a:effectRef>
-      <a:fontRef idx="minor">
-        <a:schemeClr val="lt1"/>
-      </a:fontRef>
-    </dgm:style>
-  </dgm:styleLbl>
-  <dgm:styleLbl name="parChTrans2D3">
-    <dgm:scene3d>
-      <a:camera prst="orthographicFront"/>
-      <a:lightRig rig="threePt" dir="t"/>
-    </dgm:scene3d>
-    <dgm:sp3d/>
-    <dgm:txPr/>
-    <dgm:style>
-      <a:lnRef idx="2">
-        <a:scrgbClr r="0" g="0" b="0"/>
-      </a:lnRef>
-      <a:fillRef idx="1">
-        <a:scrgbClr r="0" g="0" b="0"/>
-      </a:fillRef>
-      <a:effectRef idx="0">
-        <a:scrgbClr r="0" g="0" b="0"/>
-      </a:effectRef>
-      <a:fontRef idx="minor">
-        <a:schemeClr val="lt1"/>
-      </a:fontRef>
-    </dgm:style>
-  </dgm:styleLbl>
-  <dgm:styleLbl name="parChTrans2D4">
-    <dgm:scene3d>
-      <a:camera prst="orthographicFront"/>
-      <a:lightRig rig="threePt" dir="t"/>
-    </dgm:scene3d>
-    <dgm:sp3d/>
-    <dgm:txPr/>
-    <dgm:style>
-      <a:lnRef idx="2">
-        <a:scrgbClr r="0" g="0" b="0"/>
-      </a:lnRef>
-      <a:fillRef idx="1">
-        <a:scrgbClr r="0" g="0" b="0"/>
-      </a:fillRef>
-      <a:effectRef idx="0">
-        <a:scrgbClr r="0" g="0" b="0"/>
-      </a:effectRef>
-      <a:fontRef idx="minor">
-        <a:schemeClr val="lt1"/>
-      </a:fontRef>
-    </dgm:style>
-  </dgm:styleLbl>
-  <dgm:styleLbl name="parChTrans1D1">
-    <dgm:scene3d>
-      <a:camera prst="orthographicFront"/>
-      <a:lightRig rig="threePt" dir="t"/>
-    </dgm:scene3d>
-    <dgm:sp3d/>
-    <dgm:txPr/>
-    <dgm:style>
-      <a:lnRef idx="2">
-        <a:scrgbClr r="0" g="0" b="0"/>
-      </a:lnRef>
-      <a:fillRef idx="0">
-        <a:scrgbClr r="0" g="0" b="0"/>
-      </a:fillRef>
-      <a:effectRef idx="0">
-        <a:scrgbClr r="0" g="0" b="0"/>
-      </a:effectRef>
-      <a:fontRef idx="minor"/>
-    </dgm:style>
-  </dgm:styleLbl>
-  <dgm:styleLbl name="parChTrans1D2">
-    <dgm:scene3d>
-      <a:camera prst="orthographicFront"/>
-      <a:lightRig rig="threePt" dir="t"/>
-    </dgm:scene3d>
-    <dgm:sp3d/>
-    <dgm:txPr/>
-    <dgm:style>
-      <a:lnRef idx="2">
-        <a:scrgbClr r="0" g="0" b="0"/>
-      </a:lnRef>
-      <a:fillRef idx="0">
-        <a:scrgbClr r="0" g="0" b="0"/>
-      </a:fillRef>
-      <a:effectRef idx="0">
-        <a:scrgbClr r="0" g="0" b="0"/>
-      </a:effectRef>
-      <a:fontRef idx="minor"/>
-    </dgm:style>
-  </dgm:styleLbl>
-  <dgm:styleLbl name="parChTrans1D3">
-    <dgm:scene3d>
-      <a:camera prst="orthographicFront"/>
-      <a:lightRig rig="threePt" dir="t"/>
-    </dgm:scene3d>
-    <dgm:sp3d/>
-    <dgm:txPr/>
-    <dgm:style>
-      <a:lnRef idx="2">
-        <a:scrgbClr r="0" g="0" b="0"/>
-      </a:lnRef>
-      <a:fillRef idx="0">
-        <a:scrgbClr r="0" g="0" b="0"/>
-      </a:fillRef>
-      <a:effectRef idx="0">
-        <a:scrgbClr r="0" g="0" b="0"/>
-      </a:effectRef>
-      <a:fontRef idx="minor"/>
-    </dgm:style>
-  </dgm:styleLbl>
-  <dgm:styleLbl name="parChTrans1D4">
-    <dgm:scene3d>
-      <a:camera prst="orthographicFront"/>
-      <a:lightRig rig="threePt" dir="t"/>
-    </dgm:scene3d>
-    <dgm:sp3d/>
-    <dgm:txPr/>
-    <dgm:style>
-      <a:lnRef idx="2">
-        <a:scrgbClr r="0" g="0" b="0"/>
-      </a:lnRef>
-      <a:fillRef idx="0">
-        <a:scrgbClr r="0" g="0" b="0"/>
-      </a:fillRef>
-      <a:effectRef idx="0">
-        <a:scrgbClr r="0" g="0" b="0"/>
-      </a:effectRef>
-      <a:fontRef idx="minor"/>
-    </dgm:style>
-  </dgm:styleLbl>
-  <dgm:styleLbl name="fgAcc1">
-    <dgm:scene3d>
-      <a:camera prst="orthographicFront"/>
-      <a:lightRig rig="threePt" dir="t"/>
-    </dgm:scene3d>
-    <dgm:sp3d/>
-    <dgm:txPr/>
-    <dgm:style>
-      <a:lnRef idx="2">
-        <a:scrgbClr r="0" g="0" b="0"/>
-      </a:lnRef>
-      <a:fillRef idx="1">
-        <a:scrgbClr r="0" g="0" b="0"/>
-      </a:fillRef>
-      <a:effectRef idx="0">
-        <a:scrgbClr r="0" g="0" b="0"/>
-      </a:effectRef>
-      <a:fontRef idx="minor"/>
-    </dgm:style>
-  </dgm:styleLbl>
-  <dgm:styleLbl name="conFgAcc1">
-    <dgm:scene3d>
-      <a:camera prst="orthographicFront"/>
-      <a:lightRig rig="threePt" dir="t"/>
-    </dgm:scene3d>
-    <dgm:sp3d/>
-    <dgm:txPr/>
-    <dgm:style>
-      <a:lnRef idx="2">
-        <a:scrgbClr r="0" g="0" b="0"/>
-      </a:lnRef>
-      <a:fillRef idx="1">
-        <a:scrgbClr r="0" g="0" b="0"/>
-      </a:fillRef>
-      <a:effectRef idx="0">
-        <a:scrgbClr r="0" g="0" b="0"/>
-      </a:effectRef>
-      <a:fontRef idx="minor"/>
-    </dgm:style>
-  </dgm:styleLbl>
-  <dgm:styleLbl name="alignAcc1">
-    <dgm:scene3d>
-      <a:camera prst="orthographicFront"/>
-      <a:lightRig rig="threePt" dir="t"/>
-    </dgm:scene3d>
-    <dgm:sp3d/>
-    <dgm:txPr/>
-    <dgm:style>
-      <a:lnRef idx="2">
-        <a:scrgbClr r="0" g="0" b="0"/>
-      </a:lnRef>
-      <a:fillRef idx="1">
-        <a:scrgbClr r="0" g="0" b="0"/>
-      </a:fillRef>
-      <a:effectRef idx="0">
-        <a:scrgbClr r="0" g="0" b="0"/>
-      </a:effectRef>
-      <a:fontRef idx="minor"/>
-    </dgm:style>
-  </dgm:styleLbl>
-  <dgm:styleLbl name="trAlignAcc1">
-    <dgm:scene3d>
-      <a:camera prst="orthographicFront"/>
-      <a:lightRig rig="threePt" dir="t"/>
-    </dgm:scene3d>
-    <dgm:sp3d/>
-    <dgm:txPr/>
-    <dgm:style>
-      <a:lnRef idx="1">
-        <a:scrgbClr r="0" g="0" b="0"/>
-      </a:lnRef>
-      <a:fillRef idx="1">
-        <a:scrgbClr r="0" g="0" b="0"/>
-      </a:fillRef>
-      <a:effectRef idx="0">
-        <a:scrgbClr r="0" g="0" b="0"/>
-      </a:effectRef>
-      <a:fontRef idx="minor"/>
-    </dgm:style>
-  </dgm:styleLbl>
-  <dgm:styleLbl name="bgAcc1">
-    <dgm:scene3d>
-      <a:camera prst="orthographicFront"/>
-      <a:lightRig rig="threePt" dir="t"/>
-    </dgm:scene3d>
-    <dgm:sp3d/>
-    <dgm:txPr/>
-    <dgm:style>
-      <a:lnRef idx="2">
-        <a:scrgbClr r="0" g="0" b="0"/>
-      </a:lnRef>
-      <a:fillRef idx="1">
-        <a:scrgbClr r="0" g="0" b="0"/>
-      </a:fillRef>
-      <a:effectRef idx="0">
-        <a:scrgbClr r="0" g="0" b="0"/>
-      </a:effectRef>
-      <a:fontRef idx="minor"/>
-    </dgm:style>
-  </dgm:styleLbl>
-  <dgm:styleLbl name="solidFgAcc1">
-    <dgm:scene3d>
-      <a:camera prst="orthographicFront"/>
-      <a:lightRig rig="threePt" dir="t"/>
-    </dgm:scene3d>
-    <dgm:sp3d/>
-    <dgm:txPr/>
-    <dgm:style>
-      <a:lnRef idx="2">
-        <a:scrgbClr r="0" g="0" b="0"/>
-      </a:lnRef>
-      <a:fillRef idx="1">
-        <a:scrgbClr r="0" g="0" b="0"/>
-      </a:fillRef>
-      <a:effectRef idx="0">
-        <a:scrgbClr r="0" g="0" b="0"/>
-      </a:effectRef>
-      <a:fontRef idx="minor"/>
-    </dgm:style>
-  </dgm:styleLbl>
-  <dgm:styleLbl name="solidAlignAcc1">
-    <dgm:scene3d>
-      <a:camera prst="orthographicFront"/>
-      <a:lightRig rig="threePt" dir="t"/>
-    </dgm:scene3d>
-    <dgm:sp3d/>
-    <dgm:txPr/>
-    <dgm:style>
-      <a:lnRef idx="2">
-        <a:scrgbClr r="0" g="0" b="0"/>
-      </a:lnRef>
-      <a:fillRef idx="1">
-        <a:scrgbClr r="0" g="0" b="0"/>
-      </a:fillRef>
-      <a:effectRef idx="0">
-        <a:scrgbClr r="0" g="0" b="0"/>
-      </a:effectRef>
-      <a:fontRef idx="minor"/>
-    </dgm:style>
-  </dgm:styleLbl>
-  <dgm:styleLbl name="solidBgAcc1">
-    <dgm:scene3d>
-      <a:camera prst="orthographicFront"/>
-      <a:lightRig rig="threePt" dir="t"/>
-    </dgm:scene3d>
-    <dgm:sp3d/>
-    <dgm:txPr/>
-    <dgm:style>
-      <a:lnRef idx="2">
-        <a:scrgbClr r="0" g="0" b="0"/>
-      </a:lnRef>
-      <a:fillRef idx="1">
-        <a:scrgbClr r="0" g="0" b="0"/>
-      </a:fillRef>
-      <a:effectRef idx="0">
-        <a:scrgbClr r="0" g="0" b="0"/>
-      </a:effectRef>
-      <a:fontRef idx="minor"/>
-    </dgm:style>
-  </dgm:styleLbl>
-  <dgm:styleLbl name="fgAccFollowNode1">
-    <dgm:scene3d>
-      <a:camera prst="orthographicFront"/>
-      <a:lightRig rig="threePt" dir="t"/>
-    </dgm:scene3d>
-    <dgm:sp3d/>
-    <dgm:txPr/>
-    <dgm:style>
-      <a:lnRef idx="2">
-        <a:scrgbClr r="0" g="0" b="0"/>
-      </a:lnRef>
-      <a:fillRef idx="1">
-        <a:scrgbClr r="0" g="0" b="0"/>
-      </a:fillRef>
-      <a:effectRef idx="0">
-        <a:scrgbClr r="0" g="0" b="0"/>
-      </a:effectRef>
-      <a:fontRef idx="minor"/>
-    </dgm:style>
-  </dgm:styleLbl>
-  <dgm:styleLbl name="alignAccFollowNode1">
-    <dgm:scene3d>
-      <a:camera prst="orthographicFront"/>
-      <a:lightRig rig="threePt" dir="t"/>
-    </dgm:scene3d>
-    <dgm:sp3d/>
-    <dgm:txPr/>
-    <dgm:style>
-      <a:lnRef idx="2">
-        <a:scrgbClr r="0" g="0" b="0"/>
-      </a:lnRef>
-      <a:fillRef idx="1">
-        <a:scrgbClr r="0" g="0" b="0"/>
-      </a:fillRef>
-      <a:effectRef idx="0">
-        <a:scrgbClr r="0" g="0" b="0"/>
-      </a:effectRef>
-      <a:fontRef idx="minor"/>
-    </dgm:style>
-  </dgm:styleLbl>
-  <dgm:styleLbl name="bgAccFollowNode1">
-    <dgm:scene3d>
-      <a:camera prst="orthographicFront"/>
-      <a:lightRig rig="threePt" dir="t"/>
-    </dgm:scene3d>
-    <dgm:sp3d/>
-    <dgm:txPr/>
-    <dgm:style>
-      <a:lnRef idx="2">
-        <a:scrgbClr r="0" g="0" b="0"/>
-      </a:lnRef>
-      <a:fillRef idx="1">
-        <a:scrgbClr r="0" g="0" b="0"/>
-      </a:fillRef>
-      <a:effectRef idx="0">
-        <a:scrgbClr r="0" g="0" b="0"/>
-      </a:effectRef>
-      <a:fontRef idx="minor"/>
-    </dgm:style>
-  </dgm:styleLbl>
-  <dgm:styleLbl name="fgAcc0">
-    <dgm:scene3d>
-      <a:camera prst="orthographicFront"/>
-      <a:lightRig rig="threePt" dir="t"/>
-    </dgm:scene3d>
-    <dgm:sp3d/>
-    <dgm:txPr/>
-    <dgm:style>
-      <a:lnRef idx="2">
-        <a:scrgbClr r="0" g="0" b="0"/>
-      </a:lnRef>
-      <a:fillRef idx="1">
-        <a:scrgbClr r="0" g="0" b="0"/>
-      </a:fillRef>
-      <a:effectRef idx="0">
-        <a:scrgbClr r="0" g="0" b="0"/>
-      </a:effectRef>
-      <a:fontRef idx="minor"/>
-    </dgm:style>
-  </dgm:styleLbl>
-  <dgm:styleLbl name="fgAcc2">
-    <dgm:scene3d>
-      <a:camera prst="orthographicFront"/>
-      <a:lightRig rig="threePt" dir="t"/>
-    </dgm:scene3d>
-    <dgm:sp3d/>
-    <dgm:txPr/>
-    <dgm:style>
-      <a:lnRef idx="2">
-        <a:scrgbClr r="0" g="0" b="0"/>
-      </a:lnRef>
-      <a:fillRef idx="1">
-        <a:scrgbClr r="0" g="0" b="0"/>
-      </a:fillRef>
-      <a:effectRef idx="0">
-        <a:scrgbClr r="0" g="0" b="0"/>
-      </a:effectRef>
-      <a:fontRef idx="minor"/>
-    </dgm:style>
-  </dgm:styleLbl>
-  <dgm:styleLbl name="fgAcc3">
-    <dgm:scene3d>
-      <a:camera prst="orthographicFront"/>
-      <a:lightRig rig="threePt" dir="t"/>
-    </dgm:scene3d>
-    <dgm:sp3d/>
-    <dgm:txPr/>
-    <dgm:style>
-      <a:lnRef idx="2">
-        <a:scrgbClr r="0" g="0" b="0"/>
-      </a:lnRef>
-      <a:fillRef idx="1">
-        <a:scrgbClr r="0" g="0" b="0"/>
-      </a:fillRef>
-      <a:effectRef idx="0">
-        <a:scrgbClr r="0" g="0" b="0"/>
-      </a:effectRef>
-      <a:fontRef idx="minor"/>
-    </dgm:style>
-  </dgm:styleLbl>
-  <dgm:styleLbl name="fgAcc4">
-    <dgm:scene3d>
-      <a:camera prst="orthographicFront"/>
-      <a:lightRig rig="threePt" dir="t"/>
-    </dgm:scene3d>
-    <dgm:sp3d/>
-    <dgm:txPr/>
-    <dgm:style>
-      <a:lnRef idx="2">
-        <a:scrgbClr r="0" g="0" b="0"/>
-      </a:lnRef>
-      <a:fillRef idx="1">
-        <a:scrgbClr r="0" g="0" b="0"/>
-      </a:fillRef>
-      <a:effectRef idx="0">
-        <a:scrgbClr r="0" g="0" b="0"/>
-      </a:effectRef>
-      <a:fontRef idx="minor"/>
-    </dgm:style>
-  </dgm:styleLbl>
-  <dgm:styleLbl name="bgShp">
-    <dgm:scene3d>
-      <a:camera prst="orthographicFront"/>
-      <a:lightRig rig="threePt" dir="t"/>
-    </dgm:scene3d>
-    <dgm:sp3d/>
-    <dgm:txPr/>
-    <dgm:style>
-      <a:lnRef idx="0">
-        <a:scrgbClr r="0" g="0" b="0"/>
-      </a:lnRef>
-      <a:fillRef idx="1">
-        <a:scrgbClr r="0" g="0" b="0"/>
-      </a:fillRef>
-      <a:effectRef idx="0">
-        <a:scrgbClr r="0" g="0" b="0"/>
-      </a:effectRef>
-      <a:fontRef idx="minor"/>
-    </dgm:style>
-  </dgm:styleLbl>
-  <dgm:styleLbl name="dkBgShp">
-    <dgm:scene3d>
-      <a:camera prst="orthographicFront"/>
-      <a:lightRig rig="threePt" dir="t"/>
-    </dgm:scene3d>
-    <dgm:sp3d/>
-    <dgm:txPr/>
-    <dgm:style>
-      <a:lnRef idx="0">
-        <a:scrgbClr r="0" g="0" b="0"/>
-      </a:lnRef>
-      <a:fillRef idx="1">
-        <a:scrgbClr r="0" g="0" b="0"/>
-      </a:fillRef>
-      <a:effectRef idx="0">
-        <a:scrgbClr r="0" g="0" b="0"/>
-      </a:effectRef>
-      <a:fontRef idx="minor"/>
-    </dgm:style>
-  </dgm:styleLbl>
-  <dgm:styleLbl name="trBgShp">
-    <dgm:scene3d>
-      <a:camera prst="orthographicFront"/>
-      <a:lightRig rig="threePt" dir="t"/>
-    </dgm:scene3d>
-    <dgm:sp3d/>
-    <dgm:txPr/>
-    <dgm:style>
-      <a:lnRef idx="0">
-        <a:scrgbClr r="0" g="0" b="0"/>
-      </a:lnRef>
-      <a:fillRef idx="1">
-        <a:scrgbClr r="0" g="0" b="0"/>
-      </a:fillRef>
-      <a:effectRef idx="0">
-        <a:scrgbClr r="0" g="0" b="0"/>
-      </a:effectRef>
-      <a:fontRef idx="minor"/>
-    </dgm:style>
-  </dgm:styleLbl>
-  <dgm:styleLbl name="fgShp">
-    <dgm:scene3d>
-      <a:camera prst="orthographicFront"/>
-      <a:lightRig rig="threePt" dir="t"/>
-    </dgm:scene3d>
-    <dgm:sp3d/>
-    <dgm:txPr/>
-    <dgm:style>
-      <a:lnRef idx="2">
-        <a:scrgbClr r="0" g="0" b="0"/>
-      </a:lnRef>
-      <a:fillRef idx="1">
-        <a:scrgbClr r="0" g="0" b="0"/>
-      </a:fillRef>
-      <a:effectRef idx="0">
-        <a:scrgbClr r="0" g="0" b="0"/>
-      </a:effectRef>
-      <a:fontRef idx="minor"/>
-    </dgm:style>
-  </dgm:styleLbl>
-  <dgm:styleLbl name="revTx">
-    <dgm:scene3d>
-      <a:camera prst="orthographicFront"/>
-      <a:lightRig rig="threePt" dir="t"/>
-    </dgm:scene3d>
-    <dgm:sp3d/>
-    <dgm:txPr/>
-    <dgm:style>
-      <a:lnRef idx="0">
-        <a:scrgbClr r="0" g="0" b="0"/>
-      </a:lnRef>
-      <a:fillRef idx="0">
-        <a:scrgbClr r="0" g="0" b="0"/>
-      </a:fillRef>
-      <a:effectRef idx="0">
-        <a:scrgbClr r="0" g="0" b="0"/>
-      </a:effectRef>
-      <a:fontRef idx="minor"/>
-    </dgm:style>
-  </dgm:styleLbl>
-</dgm:styleDef>
-</file>
-
-<file path=ppt/diagrams/quickStyle2.xml><?xml version="1.0" encoding="utf-8"?>
 <dgm:styleDef xmlns:dgm="http://schemas.openxmlformats.org/drawingml/2006/diagram" xmlns:a="http://schemas.openxmlformats.org/drawingml/2006/main" uniqueId="urn:microsoft.com/office/officeart/2005/8/quickstyle/simple1">
   <dgm:title val=""/>
   <dgm:desc val=""/>
@@ -6155,7 +2824,7 @@
           <a:p>
             <a:fld id="{9DFF5FDE-556D-4288-960F-3880543CC0D0}" type="datetimeFigureOut">
               <a:rPr lang="en-US" smtClean="0"/>
-              <a:t>10/8/2026</a:t>
+              <a:t>10/9/2026</a:t>
             </a:fld>
             <a:endParaRPr lang="en-US"/>
           </a:p>
@@ -6353,7 +3022,7 @@
           <a:p>
             <a:fld id="{9DFF5FDE-556D-4288-960F-3880543CC0D0}" type="datetimeFigureOut">
               <a:rPr lang="en-US" smtClean="0"/>
-              <a:t>10/8/2026</a:t>
+              <a:t>10/9/2026</a:t>
             </a:fld>
             <a:endParaRPr lang="en-US"/>
           </a:p>
@@ -6561,7 +3230,7 @@
           <a:p>
             <a:fld id="{9DFF5FDE-556D-4288-960F-3880543CC0D0}" type="datetimeFigureOut">
               <a:rPr lang="en-US" smtClean="0"/>
-              <a:t>10/8/2026</a:t>
+              <a:t>10/9/2026</a:t>
             </a:fld>
             <a:endParaRPr lang="en-US"/>
           </a:p>
@@ -6759,7 +3428,7 @@
           <a:p>
             <a:fld id="{9DFF5FDE-556D-4288-960F-3880543CC0D0}" type="datetimeFigureOut">
               <a:rPr lang="en-US" smtClean="0"/>
-              <a:t>10/8/2026</a:t>
+              <a:t>10/9/2026</a:t>
             </a:fld>
             <a:endParaRPr lang="en-US"/>
           </a:p>
@@ -7034,7 +3703,7 @@
           <a:p>
             <a:fld id="{9DFF5FDE-556D-4288-960F-3880543CC0D0}" type="datetimeFigureOut">
               <a:rPr lang="en-US" smtClean="0"/>
-              <a:t>10/8/2026</a:t>
+              <a:t>10/9/2026</a:t>
             </a:fld>
             <a:endParaRPr lang="en-US"/>
           </a:p>
@@ -7299,7 +3968,7 @@
           <a:p>
             <a:fld id="{9DFF5FDE-556D-4288-960F-3880543CC0D0}" type="datetimeFigureOut">
               <a:rPr lang="en-US" smtClean="0"/>
-              <a:t>10/8/2026</a:t>
+              <a:t>10/9/2026</a:t>
             </a:fld>
             <a:endParaRPr lang="en-US"/>
           </a:p>
@@ -7711,7 +4380,7 @@
           <a:p>
             <a:fld id="{9DFF5FDE-556D-4288-960F-3880543CC0D0}" type="datetimeFigureOut">
               <a:rPr lang="en-US" smtClean="0"/>
-              <a:t>10/8/2026</a:t>
+              <a:t>10/9/2026</a:t>
             </a:fld>
             <a:endParaRPr lang="en-US"/>
           </a:p>
@@ -7852,7 +4521,7 @@
           <a:p>
             <a:fld id="{9DFF5FDE-556D-4288-960F-3880543CC0D0}" type="datetimeFigureOut">
               <a:rPr lang="en-US" smtClean="0"/>
-              <a:t>10/8/2026</a:t>
+              <a:t>10/9/2026</a:t>
             </a:fld>
             <a:endParaRPr lang="en-US"/>
           </a:p>
@@ -7965,7 +4634,7 @@
           <a:p>
             <a:fld id="{9DFF5FDE-556D-4288-960F-3880543CC0D0}" type="datetimeFigureOut">
               <a:rPr lang="en-US" smtClean="0"/>
-              <a:t>10/8/2026</a:t>
+              <a:t>10/9/2026</a:t>
             </a:fld>
             <a:endParaRPr lang="en-US"/>
           </a:p>
@@ -8276,7 +4945,7 @@
           <a:p>
             <a:fld id="{9DFF5FDE-556D-4288-960F-3880543CC0D0}" type="datetimeFigureOut">
               <a:rPr lang="en-US" smtClean="0"/>
-              <a:t>10/8/2026</a:t>
+              <a:t>10/9/2026</a:t>
             </a:fld>
             <a:endParaRPr lang="en-US"/>
           </a:p>
@@ -8564,7 +5233,7 @@
           <a:p>
             <a:fld id="{9DFF5FDE-556D-4288-960F-3880543CC0D0}" type="datetimeFigureOut">
               <a:rPr lang="en-US" smtClean="0"/>
-              <a:t>10/8/2026</a:t>
+              <a:t>10/9/2026</a:t>
             </a:fld>
             <a:endParaRPr lang="en-US"/>
           </a:p>
@@ -8805,7 +5474,7 @@
           <a:p>
             <a:fld id="{9DFF5FDE-556D-4288-960F-3880543CC0D0}" type="datetimeFigureOut">
               <a:rPr lang="en-US" smtClean="0"/>
-              <a:t>10/8/2026</a:t>
+              <a:t>10/9/2026</a:t>
             </a:fld>
             <a:endParaRPr lang="en-US"/>
           </a:p>
@@ -9246,7 +5915,7 @@
         </p:spPr>
         <p:txBody>
           <a:bodyPr>
-            <a:normAutofit/>
+            <a:normAutofit fontScale="90000"/>
           </a:bodyPr>
           <a:lstStyle/>
           <a:p>
@@ -9270,13 +5939,13 @@
               </a:rPr>
             </a:br>
             <a:r>
-              <a:rPr lang="en-US" sz="3200" b="1" dirty="0">
+              <a:rPr lang="en-US" sz="3600" b="1" dirty="0">
                 <a:latin typeface="+mn-lt"/>
                 <a:cs typeface="Times New Roman" panose="02020603050405020304" pitchFamily="18" charset="0"/>
               </a:rPr>
               <a:t>Lessons Learned from an Enterprise AWS Migration at Fannie Mae</a:t>
             </a:r>
-            <a:endParaRPr lang="en-US" sz="3200" dirty="0">
+            <a:endParaRPr lang="en-US" sz="3600" dirty="0">
               <a:latin typeface="+mn-lt"/>
               <a:cs typeface="Times New Roman" panose="02020603050405020304" pitchFamily="18" charset="0"/>
             </a:endParaRPr>
@@ -9638,7 +6307,7 @@
           <a:bodyPr/>
           <a:lstStyle/>
           <a:p>
-            <a:endParaRPr lang="en-US"/>
+            <a:endParaRPr lang="en-US" dirty="0"/>
           </a:p>
         </p:txBody>
       </p:sp>
@@ -9665,11 +6334,13 @@
           <a:p>
             <a:r>
               <a:rPr lang="en-US" dirty="0"/>
-              <a:t>Where do we </a:t>
-            </a:r>
-            <a:r>
-              <a:rPr lang="en-US"/>
-              <a:t>go from there?</a:t>
+              <a:t>Where do we go from there?</a:t>
+            </a:r>
+          </a:p>
+          <a:p>
+            <a:r>
+              <a:rPr lang="en-US" dirty="0"/>
+              <a:t>Tech in 2020 seems pretty old at 2026. So how will we see in 2030?</a:t>
             </a:r>
           </a:p>
         </p:txBody>
@@ -9790,8 +6461,20 @@
               <a:rPr lang="en-US" sz="2000" dirty="0">
                 <a:hlinkClick r:id="rId4"/>
               </a:rPr>
-              <a:t>What is a Cloud Migration Strategy? - Cloud Migration Strategy Explained - AWS</a:t>
-            </a:r>
+              <a:t>What is a Cloud Migration Strategy? - Cloud Migration Strategy Explained – AWS</a:t>
+            </a:r>
+            <a:endParaRPr lang="en-US" sz="2000" dirty="0"/>
+          </a:p>
+          <a:p>
+            <a:r>
+              <a:rPr lang="en-US" sz="2000" dirty="0">
+                <a:hlinkClick r:id="rId5"/>
+              </a:rPr>
+              <a:t>Understanding the “7 Rs” - Cloud Migration Strategies | AWS Builder Center</a:t>
+            </a:r>
+            <a:endParaRPr lang="en-US" sz="2000" dirty="0"/>
+          </a:p>
+          <a:p>
             <a:endParaRPr lang="en-US" sz="2000" dirty="0"/>
           </a:p>
         </p:txBody>
@@ -10006,10 +6689,57 @@
           <a:bodyPr/>
           <a:lstStyle/>
           <a:p>
-            <a:r>
-              <a:rPr lang="en-US" dirty="0"/>
+            <a:pPr marL="514350" indent="-514350">
+              <a:buFont typeface="+mj-lt"/>
+              <a:buAutoNum type="arabicPeriod"/>
+            </a:pPr>
+            <a:r>
+              <a:rPr lang="en-US" sz="3600" dirty="0"/>
               <a:t>Background</a:t>
             </a:r>
+          </a:p>
+          <a:p>
+            <a:pPr marL="514350" indent="-514350">
+              <a:buFont typeface="+mj-lt"/>
+              <a:buAutoNum type="arabicPeriod"/>
+            </a:pPr>
+            <a:r>
+              <a:rPr lang="en-US" sz="3600" dirty="0"/>
+              <a:t>Cloud Migration at Fannie Mae</a:t>
+            </a:r>
+          </a:p>
+          <a:p>
+            <a:pPr marL="514350" indent="-514350">
+              <a:buFont typeface="+mj-lt"/>
+              <a:buAutoNum type="arabicPeriod"/>
+            </a:pPr>
+            <a:r>
+              <a:rPr lang="en-US" sz="3600" dirty="0"/>
+              <a:t>My work in the migration</a:t>
+            </a:r>
+          </a:p>
+          <a:p>
+            <a:pPr marL="514350" indent="-514350">
+              <a:buFont typeface="+mj-lt"/>
+              <a:buAutoNum type="arabicPeriod"/>
+            </a:pPr>
+            <a:r>
+              <a:rPr lang="en-US" sz="3600" dirty="0"/>
+              <a:t>Accuracy and Efficiency </a:t>
+            </a:r>
+          </a:p>
+          <a:p>
+            <a:pPr marL="514350" indent="-514350">
+              <a:buFont typeface="+mj-lt"/>
+              <a:buAutoNum type="arabicPeriod"/>
+            </a:pPr>
+            <a:r>
+              <a:rPr lang="en-US" sz="3600" dirty="0"/>
+              <a:t>Gen AI and future of code conversion</a:t>
+            </a:r>
+          </a:p>
+          <a:p>
+            <a:endParaRPr lang="en-US" dirty="0"/>
           </a:p>
           <a:p>
             <a:endParaRPr lang="en-US" dirty="0"/>
@@ -10069,7 +6799,7 @@
           <a:p>
             <a:r>
               <a:rPr lang="en-US" dirty="0"/>
-              <a:t>Background</a:t>
+              <a:t>1.Background</a:t>
             </a:r>
           </a:p>
         </p:txBody>
@@ -10132,7 +6862,7 @@
         </p:blipFill>
         <p:spPr>
           <a:xfrm>
-            <a:off x="1463364" y="2278303"/>
+            <a:off x="710400" y="2273598"/>
             <a:ext cx="2638011" cy="1384610"/>
           </a:xfrm>
           <a:prstGeom prst="rect">
@@ -10162,7 +6892,7 @@
         </p:blipFill>
         <p:spPr>
           <a:xfrm>
-            <a:off x="1716240" y="4115591"/>
+            <a:off x="931236" y="3623715"/>
             <a:ext cx="1290890" cy="861801"/>
           </a:xfrm>
           <a:prstGeom prst="rect">
@@ -10235,6 +6965,96 @@
           </a:p>
         </p:txBody>
       </p:sp>
+      <p:pic>
+        <p:nvPicPr>
+          <p:cNvPr id="7" name="Picture 6">
+            <a:extLst>
+              <a:ext uri="{FF2B5EF4-FFF2-40B4-BE49-F238E27FC236}">
+                <a16:creationId xmlns:a16="http://schemas.microsoft.com/office/drawing/2014/main" id="{C5282124-3EF7-4252-3560-5FC11F8C46FF}"/>
+              </a:ext>
+            </a:extLst>
+          </p:cNvPr>
+          <p:cNvPicPr>
+            <a:picLocks noChangeAspect="1"/>
+          </p:cNvPicPr>
+          <p:nvPr/>
+        </p:nvPicPr>
+        <p:blipFill>
+          <a:blip r:embed="rId5"/>
+          <a:stretch>
+            <a:fillRect/>
+          </a:stretch>
+        </p:blipFill>
+        <p:spPr>
+          <a:xfrm>
+            <a:off x="931236" y="5194362"/>
+            <a:ext cx="1877291" cy="769689"/>
+          </a:xfrm>
+          <a:prstGeom prst="rect">
+            <a:avLst/>
+          </a:prstGeom>
+        </p:spPr>
+      </p:pic>
+      <p:pic>
+        <p:nvPicPr>
+          <p:cNvPr id="9" name="Picture 8">
+            <a:extLst>
+              <a:ext uri="{FF2B5EF4-FFF2-40B4-BE49-F238E27FC236}">
+                <a16:creationId xmlns:a16="http://schemas.microsoft.com/office/drawing/2014/main" id="{E37C989E-9BF8-3A3A-3F0C-0FFB67224333}"/>
+              </a:ext>
+            </a:extLst>
+          </p:cNvPr>
+          <p:cNvPicPr>
+            <a:picLocks noChangeAspect="1"/>
+          </p:cNvPicPr>
+          <p:nvPr/>
+        </p:nvPicPr>
+        <p:blipFill>
+          <a:blip r:embed="rId6"/>
+          <a:stretch>
+            <a:fillRect/>
+          </a:stretch>
+        </p:blipFill>
+        <p:spPr>
+          <a:xfrm>
+            <a:off x="3817118" y="3501925"/>
+            <a:ext cx="2143471" cy="803156"/>
+          </a:xfrm>
+          <a:prstGeom prst="rect">
+            <a:avLst/>
+          </a:prstGeom>
+        </p:spPr>
+      </p:pic>
+      <p:pic>
+        <p:nvPicPr>
+          <p:cNvPr id="10" name="Picture 9">
+            <a:extLst>
+              <a:ext uri="{FF2B5EF4-FFF2-40B4-BE49-F238E27FC236}">
+                <a16:creationId xmlns:a16="http://schemas.microsoft.com/office/drawing/2014/main" id="{0DBA16AA-692D-7041-DE6B-C2AAAA535BBC}"/>
+              </a:ext>
+            </a:extLst>
+          </p:cNvPr>
+          <p:cNvPicPr>
+            <a:picLocks noChangeAspect="1"/>
+          </p:cNvPicPr>
+          <p:nvPr/>
+        </p:nvPicPr>
+        <p:blipFill>
+          <a:blip r:embed="rId7"/>
+          <a:stretch>
+            <a:fillRect/>
+          </a:stretch>
+        </p:blipFill>
+        <p:spPr>
+          <a:xfrm>
+            <a:off x="3791690" y="4997264"/>
+            <a:ext cx="2862262" cy="966787"/>
+          </a:xfrm>
+          <a:prstGeom prst="rect">
+            <a:avLst/>
+          </a:prstGeom>
+        </p:spPr>
+      </p:pic>
     </p:spTree>
     <p:extLst>
       <p:ext uri="{BB962C8B-B14F-4D97-AF65-F5344CB8AC3E}">
@@ -10286,7 +7106,10 @@
           <a:bodyPr/>
           <a:lstStyle/>
           <a:p>
-            <a:endParaRPr lang="en-US"/>
+            <a:r>
+              <a:rPr lang="en-US" dirty="0"/>
+              <a:t>2.Cloud Migration in Fannie Mae</a:t>
+            </a:r>
           </a:p>
         </p:txBody>
       </p:sp>
@@ -10395,14 +7218,14 @@
             <p:ph idx="1"/>
             <p:extLst>
               <p:ext uri="{D42A27DB-BD31-4B8C-83A1-F6EECF244321}">
-                <p14:modId xmlns:p14="http://schemas.microsoft.com/office/powerpoint/2010/main" val="3365300088"/>
+                <p14:modId xmlns:p14="http://schemas.microsoft.com/office/powerpoint/2010/main" val="2901776967"/>
               </p:ext>
             </p:extLst>
           </p:nvPr>
         </p:nvGraphicFramePr>
         <p:xfrm>
-          <a:off x="838200" y="1525848"/>
-          <a:ext cx="10111740" cy="1880292"/>
+          <a:off x="146649" y="1525848"/>
+          <a:ext cx="11826815" cy="1705033"/>
         </p:xfrm>
         <a:graphic>
           <a:graphicData uri="http://schemas.openxmlformats.org/drawingml/2006/diagram">
@@ -10426,8 +7249,269 @@
         </p:nvSpPr>
         <p:spPr>
           <a:xfrm>
-            <a:off x="495300" y="3230881"/>
-            <a:ext cx="2578244" cy="1653540"/>
+            <a:off x="146648" y="3079730"/>
+            <a:ext cx="3087153" cy="3200300"/>
+          </a:xfrm>
+          <a:prstGeom prst="rect">
+            <a:avLst/>
+          </a:prstGeom>
+        </p:spPr>
+        <p:txBody>
+          <a:bodyPr vert="horz" lIns="91440" tIns="45720" rIns="91440" bIns="45720" rtlCol="0">
+            <a:normAutofit fontScale="25000" lnSpcReduction="20000"/>
+          </a:bodyPr>
+          <a:lstStyle>
+            <a:lvl1pPr marL="228600" indent="-228600" algn="l" defTabSz="914400" rtl="0" eaLnBrk="1" latinLnBrk="0" hangingPunct="1">
+              <a:lnSpc>
+                <a:spcPct val="90000"/>
+              </a:lnSpc>
+              <a:spcBef>
+                <a:spcPts val="1000"/>
+              </a:spcBef>
+              <a:buFont typeface="Arial" panose="020B0604020202020204" pitchFamily="34" charset="0"/>
+              <a:buChar char="•"/>
+              <a:defRPr sz="2800" kern="1200">
+                <a:solidFill>
+                  <a:schemeClr val="tx1"/>
+                </a:solidFill>
+                <a:latin typeface="+mn-lt"/>
+                <a:ea typeface="+mn-ea"/>
+                <a:cs typeface="+mn-cs"/>
+              </a:defRPr>
+            </a:lvl1pPr>
+            <a:lvl2pPr marL="685800" indent="-228600" algn="l" defTabSz="914400" rtl="0" eaLnBrk="1" latinLnBrk="0" hangingPunct="1">
+              <a:lnSpc>
+                <a:spcPct val="90000"/>
+              </a:lnSpc>
+              <a:spcBef>
+                <a:spcPts val="500"/>
+              </a:spcBef>
+              <a:buFont typeface="Arial" panose="020B0604020202020204" pitchFamily="34" charset="0"/>
+              <a:buChar char="•"/>
+              <a:defRPr sz="2400" kern="1200">
+                <a:solidFill>
+                  <a:schemeClr val="tx1"/>
+                </a:solidFill>
+                <a:latin typeface="+mn-lt"/>
+                <a:ea typeface="+mn-ea"/>
+                <a:cs typeface="+mn-cs"/>
+              </a:defRPr>
+            </a:lvl2pPr>
+            <a:lvl3pPr marL="1143000" indent="-228600" algn="l" defTabSz="914400" rtl="0" eaLnBrk="1" latinLnBrk="0" hangingPunct="1">
+              <a:lnSpc>
+                <a:spcPct val="90000"/>
+              </a:lnSpc>
+              <a:spcBef>
+                <a:spcPts val="500"/>
+              </a:spcBef>
+              <a:buFont typeface="Arial" panose="020B0604020202020204" pitchFamily="34" charset="0"/>
+              <a:buChar char="•"/>
+              <a:defRPr sz="2000" kern="1200">
+                <a:solidFill>
+                  <a:schemeClr val="tx1"/>
+                </a:solidFill>
+                <a:latin typeface="+mn-lt"/>
+                <a:ea typeface="+mn-ea"/>
+                <a:cs typeface="+mn-cs"/>
+              </a:defRPr>
+            </a:lvl3pPr>
+            <a:lvl4pPr marL="1600200" indent="-228600" algn="l" defTabSz="914400" rtl="0" eaLnBrk="1" latinLnBrk="0" hangingPunct="1">
+              <a:lnSpc>
+                <a:spcPct val="90000"/>
+              </a:lnSpc>
+              <a:spcBef>
+                <a:spcPts val="500"/>
+              </a:spcBef>
+              <a:buFont typeface="Arial" panose="020B0604020202020204" pitchFamily="34" charset="0"/>
+              <a:buChar char="•"/>
+              <a:defRPr sz="1800" kern="1200">
+                <a:solidFill>
+                  <a:schemeClr val="tx1"/>
+                </a:solidFill>
+                <a:latin typeface="+mn-lt"/>
+                <a:ea typeface="+mn-ea"/>
+                <a:cs typeface="+mn-cs"/>
+              </a:defRPr>
+            </a:lvl4pPr>
+            <a:lvl5pPr marL="2057400" indent="-228600" algn="l" defTabSz="914400" rtl="0" eaLnBrk="1" latinLnBrk="0" hangingPunct="1">
+              <a:lnSpc>
+                <a:spcPct val="90000"/>
+              </a:lnSpc>
+              <a:spcBef>
+                <a:spcPts val="500"/>
+              </a:spcBef>
+              <a:buFont typeface="Arial" panose="020B0604020202020204" pitchFamily="34" charset="0"/>
+              <a:buChar char="•"/>
+              <a:defRPr sz="1800" kern="1200">
+                <a:solidFill>
+                  <a:schemeClr val="tx1"/>
+                </a:solidFill>
+                <a:latin typeface="+mn-lt"/>
+                <a:ea typeface="+mn-ea"/>
+                <a:cs typeface="+mn-cs"/>
+              </a:defRPr>
+            </a:lvl5pPr>
+            <a:lvl6pPr marL="2514600" indent="-228600" algn="l" defTabSz="914400" rtl="0" eaLnBrk="1" latinLnBrk="0" hangingPunct="1">
+              <a:lnSpc>
+                <a:spcPct val="90000"/>
+              </a:lnSpc>
+              <a:spcBef>
+                <a:spcPts val="500"/>
+              </a:spcBef>
+              <a:buFont typeface="Arial" panose="020B0604020202020204" pitchFamily="34" charset="0"/>
+              <a:buChar char="•"/>
+              <a:defRPr sz="1800" kern="1200">
+                <a:solidFill>
+                  <a:schemeClr val="tx1"/>
+                </a:solidFill>
+                <a:latin typeface="+mn-lt"/>
+                <a:ea typeface="+mn-ea"/>
+                <a:cs typeface="+mn-cs"/>
+              </a:defRPr>
+            </a:lvl6pPr>
+            <a:lvl7pPr marL="2971800" indent="-228600" algn="l" defTabSz="914400" rtl="0" eaLnBrk="1" latinLnBrk="0" hangingPunct="1">
+              <a:lnSpc>
+                <a:spcPct val="90000"/>
+              </a:lnSpc>
+              <a:spcBef>
+                <a:spcPts val="500"/>
+              </a:spcBef>
+              <a:buFont typeface="Arial" panose="020B0604020202020204" pitchFamily="34" charset="0"/>
+              <a:buChar char="•"/>
+              <a:defRPr sz="1800" kern="1200">
+                <a:solidFill>
+                  <a:schemeClr val="tx1"/>
+                </a:solidFill>
+                <a:latin typeface="+mn-lt"/>
+                <a:ea typeface="+mn-ea"/>
+                <a:cs typeface="+mn-cs"/>
+              </a:defRPr>
+            </a:lvl7pPr>
+            <a:lvl8pPr marL="3429000" indent="-228600" algn="l" defTabSz="914400" rtl="0" eaLnBrk="1" latinLnBrk="0" hangingPunct="1">
+              <a:lnSpc>
+                <a:spcPct val="90000"/>
+              </a:lnSpc>
+              <a:spcBef>
+                <a:spcPts val="500"/>
+              </a:spcBef>
+              <a:buFont typeface="Arial" panose="020B0604020202020204" pitchFamily="34" charset="0"/>
+              <a:buChar char="•"/>
+              <a:defRPr sz="1800" kern="1200">
+                <a:solidFill>
+                  <a:schemeClr val="tx1"/>
+                </a:solidFill>
+                <a:latin typeface="+mn-lt"/>
+                <a:ea typeface="+mn-ea"/>
+                <a:cs typeface="+mn-cs"/>
+              </a:defRPr>
+            </a:lvl8pPr>
+            <a:lvl9pPr marL="3886200" indent="-228600" algn="l" defTabSz="914400" rtl="0" eaLnBrk="1" latinLnBrk="0" hangingPunct="1">
+              <a:lnSpc>
+                <a:spcPct val="90000"/>
+              </a:lnSpc>
+              <a:spcBef>
+                <a:spcPts val="500"/>
+              </a:spcBef>
+              <a:buFont typeface="Arial" panose="020B0604020202020204" pitchFamily="34" charset="0"/>
+              <a:buChar char="•"/>
+              <a:defRPr sz="1800" kern="1200">
+                <a:solidFill>
+                  <a:schemeClr val="tx1"/>
+                </a:solidFill>
+                <a:latin typeface="+mn-lt"/>
+                <a:ea typeface="+mn-ea"/>
+                <a:cs typeface="+mn-cs"/>
+              </a:defRPr>
+            </a:lvl9pPr>
+          </a:lstStyle>
+          <a:p>
+            <a:r>
+              <a:rPr lang="en-US" sz="7400" dirty="0"/>
+              <a:t>Convert sas7bdat to </a:t>
+            </a:r>
+            <a:r>
+              <a:rPr lang="en-US" sz="7400" dirty="0" err="1"/>
+              <a:t>rds</a:t>
+            </a:r>
+            <a:endParaRPr lang="en-US" sz="7400" dirty="0"/>
+          </a:p>
+          <a:p>
+            <a:r>
+              <a:rPr lang="en-US" sz="7400" dirty="0"/>
+              <a:t>Import dataset</a:t>
+            </a:r>
+          </a:p>
+          <a:p>
+            <a:r>
+              <a:rPr lang="en-US" sz="7400" dirty="0"/>
+              <a:t>Data format: sas7bdat/</a:t>
+            </a:r>
+            <a:r>
+              <a:rPr lang="en-US" sz="7400" dirty="0" err="1"/>
+              <a:t>rds</a:t>
+            </a:r>
+            <a:r>
+              <a:rPr lang="en-US" sz="7400" dirty="0"/>
+              <a:t>/parquet</a:t>
+            </a:r>
+          </a:p>
+          <a:p>
+            <a:endParaRPr lang="en-US" sz="7400" dirty="0"/>
+          </a:p>
+          <a:p>
+            <a:r>
+              <a:rPr lang="en-US" sz="7400" dirty="0"/>
+              <a:t>date/month/time,</a:t>
+            </a:r>
+          </a:p>
+          <a:p>
+            <a:r>
+              <a:rPr lang="en-US" altLang="zh-CN" sz="7400" dirty="0"/>
+              <a:t>Origin date</a:t>
+            </a:r>
+            <a:endParaRPr lang="en-US" sz="7400" dirty="0"/>
+          </a:p>
+          <a:p>
+            <a:r>
+              <a:rPr lang="en-US" sz="7400" dirty="0"/>
+              <a:t>missing values, </a:t>
+            </a:r>
+          </a:p>
+          <a:p>
+            <a:r>
+              <a:rPr lang="en-US" sz="7400" dirty="0"/>
+              <a:t>N/A </a:t>
+            </a:r>
+          </a:p>
+          <a:p>
+            <a:r>
+              <a:rPr lang="en-US" sz="7400" dirty="0"/>
+              <a:t>Updated monthly</a:t>
+            </a:r>
+          </a:p>
+          <a:p>
+            <a:endParaRPr lang="en-US" dirty="0"/>
+          </a:p>
+        </p:txBody>
+      </p:sp>
+      <p:sp>
+        <p:nvSpPr>
+          <p:cNvPr id="13" name="Content Placeholder 2">
+            <a:extLst>
+              <a:ext uri="{FF2B5EF4-FFF2-40B4-BE49-F238E27FC236}">
+                <a16:creationId xmlns:a16="http://schemas.microsoft.com/office/drawing/2014/main" id="{F1472C4E-723B-DF16-860A-479E2B15B381}"/>
+              </a:ext>
+            </a:extLst>
+          </p:cNvPr>
+          <p:cNvSpPr txBox="1">
+            <a:spLocks/>
+          </p:cNvSpPr>
+          <p:nvPr/>
+        </p:nvSpPr>
+        <p:spPr>
+          <a:xfrm>
+            <a:off x="3260785" y="3079730"/>
+            <a:ext cx="3022456" cy="3413145"/>
           </a:xfrm>
           <a:prstGeom prst="rect">
             <a:avLst/>
@@ -10603,33 +7687,91 @@
           </a:lstStyle>
           <a:p>
             <a:r>
-              <a:rPr lang="en-US" sz="2600" dirty="0"/>
-              <a:t>date/month/time,</a:t>
-            </a:r>
-          </a:p>
-          <a:p>
-            <a:r>
-              <a:rPr lang="en-US" sz="2600" dirty="0"/>
-              <a:t> missing values, </a:t>
-            </a:r>
-          </a:p>
-          <a:p>
-            <a:r>
-              <a:rPr lang="en-US" sz="2600" dirty="0"/>
-              <a:t>N/A </a:t>
-            </a:r>
-          </a:p>
-          <a:p>
-            <a:endParaRPr lang="en-US" dirty="0"/>
-          </a:p>
-        </p:txBody>
-      </p:sp>
-      <p:sp>
-        <p:nvSpPr>
-          <p:cNvPr id="13" name="Content Placeholder 2">
-            <a:extLst>
-              <a:ext uri="{FF2B5EF4-FFF2-40B4-BE49-F238E27FC236}">
-                <a16:creationId xmlns:a16="http://schemas.microsoft.com/office/drawing/2014/main" id="{F1472C4E-723B-DF16-860A-479E2B15B381}"/>
+              <a:rPr lang="en-US" sz="2400" dirty="0"/>
+              <a:t>Variables: filter data </a:t>
+            </a:r>
+          </a:p>
+          <a:p>
+            <a:r>
+              <a:rPr lang="en-US" sz="2400" dirty="0"/>
+              <a:t>merge tables</a:t>
+            </a:r>
+          </a:p>
+          <a:p>
+            <a:pPr marL="458788" lvl="1" indent="-342900">
+              <a:buFont typeface="Courier New" panose="02070309020205020404" pitchFamily="49" charset="0"/>
+              <a:buChar char="o"/>
+            </a:pPr>
+            <a:r>
+              <a:rPr lang="en-US" dirty="0"/>
+              <a:t>Concatenate</a:t>
+            </a:r>
+          </a:p>
+          <a:p>
+            <a:pPr marL="458788" lvl="1" indent="-342900">
+              <a:buFont typeface="Courier New" panose="02070309020205020404" pitchFamily="49" charset="0"/>
+              <a:buChar char="o"/>
+            </a:pPr>
+            <a:r>
+              <a:rPr lang="en-US" dirty="0"/>
+              <a:t>match merging (with n= dataset option)</a:t>
+            </a:r>
+          </a:p>
+          <a:p>
+            <a:pPr marL="458788" lvl="1" indent="-342900">
+              <a:buFont typeface="Courier New" panose="02070309020205020404" pitchFamily="49" charset="0"/>
+              <a:buChar char="o"/>
+            </a:pPr>
+            <a:r>
+              <a:rPr lang="en-US" dirty="0"/>
+              <a:t>match merging (if a and b)</a:t>
+            </a:r>
+          </a:p>
+          <a:p>
+            <a:pPr marL="228600" lvl="1">
+              <a:spcBef>
+                <a:spcPts val="1000"/>
+              </a:spcBef>
+            </a:pPr>
+            <a:r>
+              <a:rPr lang="en-US" altLang="zh-CN" dirty="0"/>
+              <a:t>Loops: </a:t>
+            </a:r>
+          </a:p>
+          <a:p>
+            <a:pPr marL="458788" lvl="1" indent="-342900">
+              <a:lnSpc>
+                <a:spcPct val="100000"/>
+              </a:lnSpc>
+              <a:buFont typeface="Courier New" panose="02070309020205020404" pitchFamily="49" charset="0"/>
+              <a:buChar char="o"/>
+            </a:pPr>
+            <a:r>
+              <a:rPr lang="en-US" altLang="zh-CN" dirty="0"/>
+              <a:t>do until</a:t>
+            </a:r>
+          </a:p>
+          <a:p>
+            <a:pPr marL="458788" lvl="1" indent="-342900">
+              <a:lnSpc>
+                <a:spcPct val="100000"/>
+              </a:lnSpc>
+              <a:buFont typeface="Courier New" panose="02070309020205020404" pitchFamily="49" charset="0"/>
+              <a:buChar char="o"/>
+            </a:pPr>
+            <a:r>
+              <a:rPr lang="en-US" dirty="0"/>
+              <a:t>Nested do loops</a:t>
+            </a:r>
+          </a:p>
+        </p:txBody>
+      </p:sp>
+      <p:sp>
+        <p:nvSpPr>
+          <p:cNvPr id="3" name="Content Placeholder 3">
+            <a:extLst>
+              <a:ext uri="{FF2B5EF4-FFF2-40B4-BE49-F238E27FC236}">
+                <a16:creationId xmlns:a16="http://schemas.microsoft.com/office/drawing/2014/main" id="{2A66A781-E17E-6043-235A-E5DF2C57F5D7}"/>
               </a:ext>
             </a:extLst>
           </p:cNvPr>
@@ -10640,8 +7782,477 @@
         </p:nvSpPr>
         <p:spPr>
           <a:xfrm>
-            <a:off x="3356826" y="3079730"/>
-            <a:ext cx="3654916" cy="3413145"/>
+            <a:off x="6310224" y="2923282"/>
+            <a:ext cx="3334107" cy="796805"/>
+          </a:xfrm>
+          <a:prstGeom prst="rect">
+            <a:avLst/>
+          </a:prstGeom>
+        </p:spPr>
+        <p:txBody>
+          <a:bodyPr vert="horz" lIns="91440" tIns="45720" rIns="91440" bIns="45720" rtlCol="0">
+            <a:normAutofit fontScale="55000" lnSpcReduction="20000"/>
+          </a:bodyPr>
+          <a:lstStyle>
+            <a:lvl1pPr marL="228600" indent="-228600" algn="l" defTabSz="914400" rtl="0" eaLnBrk="1" latinLnBrk="0" hangingPunct="1">
+              <a:lnSpc>
+                <a:spcPct val="90000"/>
+              </a:lnSpc>
+              <a:spcBef>
+                <a:spcPts val="1000"/>
+              </a:spcBef>
+              <a:buFont typeface="Arial" panose="020B0604020202020204" pitchFamily="34" charset="0"/>
+              <a:buChar char="•"/>
+              <a:defRPr sz="2800" kern="1200">
+                <a:solidFill>
+                  <a:schemeClr val="tx1"/>
+                </a:solidFill>
+                <a:latin typeface="+mn-lt"/>
+                <a:ea typeface="+mn-ea"/>
+                <a:cs typeface="+mn-cs"/>
+              </a:defRPr>
+            </a:lvl1pPr>
+            <a:lvl2pPr marL="685800" indent="-228600" algn="l" defTabSz="914400" rtl="0" eaLnBrk="1" latinLnBrk="0" hangingPunct="1">
+              <a:lnSpc>
+                <a:spcPct val="90000"/>
+              </a:lnSpc>
+              <a:spcBef>
+                <a:spcPts val="500"/>
+              </a:spcBef>
+              <a:buFont typeface="Arial" panose="020B0604020202020204" pitchFamily="34" charset="0"/>
+              <a:buChar char="•"/>
+              <a:defRPr sz="2400" kern="1200">
+                <a:solidFill>
+                  <a:schemeClr val="tx1"/>
+                </a:solidFill>
+                <a:latin typeface="+mn-lt"/>
+                <a:ea typeface="+mn-ea"/>
+                <a:cs typeface="+mn-cs"/>
+              </a:defRPr>
+            </a:lvl2pPr>
+            <a:lvl3pPr marL="1143000" indent="-228600" algn="l" defTabSz="914400" rtl="0" eaLnBrk="1" latinLnBrk="0" hangingPunct="1">
+              <a:lnSpc>
+                <a:spcPct val="90000"/>
+              </a:lnSpc>
+              <a:spcBef>
+                <a:spcPts val="500"/>
+              </a:spcBef>
+              <a:buFont typeface="Arial" panose="020B0604020202020204" pitchFamily="34" charset="0"/>
+              <a:buChar char="•"/>
+              <a:defRPr sz="2000" kern="1200">
+                <a:solidFill>
+                  <a:schemeClr val="tx1"/>
+                </a:solidFill>
+                <a:latin typeface="+mn-lt"/>
+                <a:ea typeface="+mn-ea"/>
+                <a:cs typeface="+mn-cs"/>
+              </a:defRPr>
+            </a:lvl3pPr>
+            <a:lvl4pPr marL="1600200" indent="-228600" algn="l" defTabSz="914400" rtl="0" eaLnBrk="1" latinLnBrk="0" hangingPunct="1">
+              <a:lnSpc>
+                <a:spcPct val="90000"/>
+              </a:lnSpc>
+              <a:spcBef>
+                <a:spcPts val="500"/>
+              </a:spcBef>
+              <a:buFont typeface="Arial" panose="020B0604020202020204" pitchFamily="34" charset="0"/>
+              <a:buChar char="•"/>
+              <a:defRPr sz="1800" kern="1200">
+                <a:solidFill>
+                  <a:schemeClr val="tx1"/>
+                </a:solidFill>
+                <a:latin typeface="+mn-lt"/>
+                <a:ea typeface="+mn-ea"/>
+                <a:cs typeface="+mn-cs"/>
+              </a:defRPr>
+            </a:lvl4pPr>
+            <a:lvl5pPr marL="2057400" indent="-228600" algn="l" defTabSz="914400" rtl="0" eaLnBrk="1" latinLnBrk="0" hangingPunct="1">
+              <a:lnSpc>
+                <a:spcPct val="90000"/>
+              </a:lnSpc>
+              <a:spcBef>
+                <a:spcPts val="500"/>
+              </a:spcBef>
+              <a:buFont typeface="Arial" panose="020B0604020202020204" pitchFamily="34" charset="0"/>
+              <a:buChar char="•"/>
+              <a:defRPr sz="1800" kern="1200">
+                <a:solidFill>
+                  <a:schemeClr val="tx1"/>
+                </a:solidFill>
+                <a:latin typeface="+mn-lt"/>
+                <a:ea typeface="+mn-ea"/>
+                <a:cs typeface="+mn-cs"/>
+              </a:defRPr>
+            </a:lvl5pPr>
+            <a:lvl6pPr marL="2514600" indent="-228600" algn="l" defTabSz="914400" rtl="0" eaLnBrk="1" latinLnBrk="0" hangingPunct="1">
+              <a:lnSpc>
+                <a:spcPct val="90000"/>
+              </a:lnSpc>
+              <a:spcBef>
+                <a:spcPts val="500"/>
+              </a:spcBef>
+              <a:buFont typeface="Arial" panose="020B0604020202020204" pitchFamily="34" charset="0"/>
+              <a:buChar char="•"/>
+              <a:defRPr sz="1800" kern="1200">
+                <a:solidFill>
+                  <a:schemeClr val="tx1"/>
+                </a:solidFill>
+                <a:latin typeface="+mn-lt"/>
+                <a:ea typeface="+mn-ea"/>
+                <a:cs typeface="+mn-cs"/>
+              </a:defRPr>
+            </a:lvl6pPr>
+            <a:lvl7pPr marL="2971800" indent="-228600" algn="l" defTabSz="914400" rtl="0" eaLnBrk="1" latinLnBrk="0" hangingPunct="1">
+              <a:lnSpc>
+                <a:spcPct val="90000"/>
+              </a:lnSpc>
+              <a:spcBef>
+                <a:spcPts val="500"/>
+              </a:spcBef>
+              <a:buFont typeface="Arial" panose="020B0604020202020204" pitchFamily="34" charset="0"/>
+              <a:buChar char="•"/>
+              <a:defRPr sz="1800" kern="1200">
+                <a:solidFill>
+                  <a:schemeClr val="tx1"/>
+                </a:solidFill>
+                <a:latin typeface="+mn-lt"/>
+                <a:ea typeface="+mn-ea"/>
+                <a:cs typeface="+mn-cs"/>
+              </a:defRPr>
+            </a:lvl7pPr>
+            <a:lvl8pPr marL="3429000" indent="-228600" algn="l" defTabSz="914400" rtl="0" eaLnBrk="1" latinLnBrk="0" hangingPunct="1">
+              <a:lnSpc>
+                <a:spcPct val="90000"/>
+              </a:lnSpc>
+              <a:spcBef>
+                <a:spcPts val="500"/>
+              </a:spcBef>
+              <a:buFont typeface="Arial" panose="020B0604020202020204" pitchFamily="34" charset="0"/>
+              <a:buChar char="•"/>
+              <a:defRPr sz="1800" kern="1200">
+                <a:solidFill>
+                  <a:schemeClr val="tx1"/>
+                </a:solidFill>
+                <a:latin typeface="+mn-lt"/>
+                <a:ea typeface="+mn-ea"/>
+                <a:cs typeface="+mn-cs"/>
+              </a:defRPr>
+            </a:lvl8pPr>
+            <a:lvl9pPr marL="3886200" indent="-228600" algn="l" defTabSz="914400" rtl="0" eaLnBrk="1" latinLnBrk="0" hangingPunct="1">
+              <a:lnSpc>
+                <a:spcPct val="90000"/>
+              </a:lnSpc>
+              <a:spcBef>
+                <a:spcPts val="500"/>
+              </a:spcBef>
+              <a:buFont typeface="Arial" panose="020B0604020202020204" pitchFamily="34" charset="0"/>
+              <a:buChar char="•"/>
+              <a:defRPr sz="1800" kern="1200">
+                <a:solidFill>
+                  <a:schemeClr val="tx1"/>
+                </a:solidFill>
+                <a:latin typeface="+mn-lt"/>
+                <a:ea typeface="+mn-ea"/>
+                <a:cs typeface="+mn-cs"/>
+              </a:defRPr>
+            </a:lvl9pPr>
+          </a:lstStyle>
+          <a:p>
+            <a:r>
+              <a:rPr lang="en-US" dirty="0"/>
+              <a:t>Spline in Linear/logistic regression</a:t>
+            </a:r>
+          </a:p>
+          <a:p>
+            <a:r>
+              <a:rPr lang="en-US" dirty="0"/>
+              <a:t>Two </a:t>
+            </a:r>
+            <a:r>
+              <a:rPr lang="en-US"/>
+              <a:t>step regression</a:t>
+            </a:r>
+            <a:endParaRPr lang="en-US" dirty="0"/>
+          </a:p>
+        </p:txBody>
+      </p:sp>
+    </p:spTree>
+    <p:extLst>
+      <p:ext uri="{BB962C8B-B14F-4D97-AF65-F5344CB8AC3E}">
+        <p14:creationId xmlns:p14="http://schemas.microsoft.com/office/powerpoint/2010/main" val="3588703417"/>
+      </p:ext>
+    </p:extLst>
+  </p:cSld>
+  <p:clrMapOvr>
+    <a:masterClrMapping/>
+  </p:clrMapOvr>
+</p:sld>
+</file>
+
+<file path=ppt/slides/slide6.xml><?xml version="1.0" encoding="utf-8"?>
+<p:sld xmlns:a="http://schemas.openxmlformats.org/drawingml/2006/main" xmlns:r="http://schemas.openxmlformats.org/officeDocument/2006/relationships" xmlns:p="http://schemas.openxmlformats.org/presentationml/2006/main">
+  <p:cSld>
+    <p:spTree>
+      <p:nvGrpSpPr>
+        <p:cNvPr id="1" name="">
+          <a:extLst>
+            <a:ext uri="{FF2B5EF4-FFF2-40B4-BE49-F238E27FC236}">
+              <a16:creationId xmlns:a16="http://schemas.microsoft.com/office/drawing/2014/main" id="{24795404-4793-4153-45B6-147571F0820C}"/>
+            </a:ext>
+          </a:extLst>
+        </p:cNvPr>
+        <p:cNvGrpSpPr/>
+        <p:nvPr/>
+      </p:nvGrpSpPr>
+      <p:grpSpPr>
+        <a:xfrm>
+          <a:off x="0" y="0"/>
+          <a:ext cx="0" cy="0"/>
+          <a:chOff x="0" y="0"/>
+          <a:chExt cx="0" cy="0"/>
+        </a:xfrm>
+      </p:grpSpPr>
+      <p:sp>
+        <p:nvSpPr>
+          <p:cNvPr id="2" name="Title 1">
+            <a:extLst>
+              <a:ext uri="{FF2B5EF4-FFF2-40B4-BE49-F238E27FC236}">
+                <a16:creationId xmlns:a16="http://schemas.microsoft.com/office/drawing/2014/main" id="{A1D02713-65CC-0B2F-4169-1F342A167AE8}"/>
+              </a:ext>
+            </a:extLst>
+          </p:cNvPr>
+          <p:cNvSpPr>
+            <a:spLocks noGrp="1"/>
+          </p:cNvSpPr>
+          <p:nvPr>
+            <p:ph type="title"/>
+          </p:nvPr>
+        </p:nvSpPr>
+        <p:spPr/>
+        <p:txBody>
+          <a:bodyPr/>
+          <a:lstStyle/>
+          <a:p>
+            <a:r>
+              <a:rPr lang="en-US" dirty="0"/>
+              <a:t>Steps for refactoring</a:t>
+            </a:r>
+          </a:p>
+        </p:txBody>
+      </p:sp>
+      <p:sp>
+        <p:nvSpPr>
+          <p:cNvPr id="4" name="Content Placeholder 3">
+            <a:extLst>
+              <a:ext uri="{FF2B5EF4-FFF2-40B4-BE49-F238E27FC236}">
+                <a16:creationId xmlns:a16="http://schemas.microsoft.com/office/drawing/2014/main" id="{B225A04A-A19E-03F6-5A6F-E66D9D66BD3C}"/>
+              </a:ext>
+            </a:extLst>
+          </p:cNvPr>
+          <p:cNvSpPr>
+            <a:spLocks noGrp="1"/>
+          </p:cNvSpPr>
+          <p:nvPr>
+            <p:ph idx="1"/>
+          </p:nvPr>
+        </p:nvSpPr>
+        <p:spPr>
+          <a:xfrm>
+            <a:off x="838200" y="1825625"/>
+            <a:ext cx="4561936" cy="796805"/>
+          </a:xfrm>
+        </p:spPr>
+        <p:txBody>
+          <a:bodyPr>
+            <a:normAutofit fontScale="92500" lnSpcReduction="20000"/>
+          </a:bodyPr>
+          <a:lstStyle/>
+          <a:p>
+            <a:r>
+              <a:rPr lang="en-US" dirty="0"/>
+              <a:t>Convert in 4 methods</a:t>
+            </a:r>
+          </a:p>
+          <a:p>
+            <a:r>
+              <a:rPr lang="en-US" dirty="0"/>
+              <a:t>Page 99</a:t>
+            </a:r>
+          </a:p>
+        </p:txBody>
+      </p:sp>
+    </p:spTree>
+    <p:extLst>
+      <p:ext uri="{BB962C8B-B14F-4D97-AF65-F5344CB8AC3E}">
+        <p14:creationId xmlns:p14="http://schemas.microsoft.com/office/powerpoint/2010/main" val="310505272"/>
+      </p:ext>
+    </p:extLst>
+  </p:cSld>
+  <p:clrMapOvr>
+    <a:masterClrMapping/>
+  </p:clrMapOvr>
+</p:sld>
+</file>
+
+<file path=ppt/slides/slide7.xml><?xml version="1.0" encoding="utf-8"?>
+<p:sld xmlns:a="http://schemas.openxmlformats.org/drawingml/2006/main" xmlns:r="http://schemas.openxmlformats.org/officeDocument/2006/relationships" xmlns:p="http://schemas.openxmlformats.org/presentationml/2006/main">
+  <p:cSld>
+    <p:spTree>
+      <p:nvGrpSpPr>
+        <p:cNvPr id="1" name="">
+          <a:extLst>
+            <a:ext uri="{FF2B5EF4-FFF2-40B4-BE49-F238E27FC236}">
+              <a16:creationId xmlns:a16="http://schemas.microsoft.com/office/drawing/2014/main" id="{B2BCD0B7-14BF-9591-2491-51EC0B8A6CEB}"/>
+            </a:ext>
+          </a:extLst>
+        </p:cNvPr>
+        <p:cNvGrpSpPr/>
+        <p:nvPr/>
+      </p:nvGrpSpPr>
+      <p:grpSpPr>
+        <a:xfrm>
+          <a:off x="0" y="0"/>
+          <a:ext cx="0" cy="0"/>
+          <a:chOff x="0" y="0"/>
+          <a:chExt cx="0" cy="0"/>
+        </a:xfrm>
+      </p:grpSpPr>
+      <p:sp>
+        <p:nvSpPr>
+          <p:cNvPr id="2" name="Title 1">
+            <a:extLst>
+              <a:ext uri="{FF2B5EF4-FFF2-40B4-BE49-F238E27FC236}">
+                <a16:creationId xmlns:a16="http://schemas.microsoft.com/office/drawing/2014/main" id="{3C96B53C-360B-A7DC-1397-EE5C9B1C729C}"/>
+              </a:ext>
+            </a:extLst>
+          </p:cNvPr>
+          <p:cNvSpPr>
+            <a:spLocks noGrp="1"/>
+          </p:cNvSpPr>
+          <p:nvPr>
+            <p:ph type="title"/>
+          </p:nvPr>
+        </p:nvSpPr>
+        <p:spPr/>
+        <p:txBody>
+          <a:bodyPr/>
+          <a:lstStyle/>
+          <a:p>
+            <a:r>
+              <a:rPr lang="en-US" dirty="0"/>
+              <a:t>Major SAS Steps/Proc vs R package/functions</a:t>
+            </a:r>
+          </a:p>
+        </p:txBody>
+      </p:sp>
+      <p:pic>
+        <p:nvPicPr>
+          <p:cNvPr id="6" name="Picture 5">
+            <a:extLst>
+              <a:ext uri="{FF2B5EF4-FFF2-40B4-BE49-F238E27FC236}">
+                <a16:creationId xmlns:a16="http://schemas.microsoft.com/office/drawing/2014/main" id="{D89187F8-9708-A2D8-B314-1950D2AA2EBD}"/>
+              </a:ext>
+            </a:extLst>
+          </p:cNvPr>
+          <p:cNvPicPr>
+            <a:picLocks noChangeAspect="1"/>
+          </p:cNvPicPr>
+          <p:nvPr/>
+        </p:nvPicPr>
+        <p:blipFill>
+          <a:blip r:embed="rId2"/>
+          <a:stretch>
+            <a:fillRect/>
+          </a:stretch>
+        </p:blipFill>
+        <p:spPr>
+          <a:xfrm>
+            <a:off x="550456" y="1690688"/>
+            <a:ext cx="1877291" cy="769689"/>
+          </a:xfrm>
+          <a:prstGeom prst="rect">
+            <a:avLst/>
+          </a:prstGeom>
+        </p:spPr>
+      </p:pic>
+      <p:pic>
+        <p:nvPicPr>
+          <p:cNvPr id="7" name="Picture 6">
+            <a:extLst>
+              <a:ext uri="{FF2B5EF4-FFF2-40B4-BE49-F238E27FC236}">
+                <a16:creationId xmlns:a16="http://schemas.microsoft.com/office/drawing/2014/main" id="{D093ED12-F9C4-7300-59D7-16AC180856DE}"/>
+              </a:ext>
+            </a:extLst>
+          </p:cNvPr>
+          <p:cNvPicPr>
+            <a:picLocks noChangeAspect="1"/>
+          </p:cNvPicPr>
+          <p:nvPr/>
+        </p:nvPicPr>
+        <p:blipFill>
+          <a:blip r:embed="rId3"/>
+          <a:stretch>
+            <a:fillRect/>
+          </a:stretch>
+        </p:blipFill>
+        <p:spPr>
+          <a:xfrm>
+            <a:off x="4351404" y="1690688"/>
+            <a:ext cx="2143471" cy="803156"/>
+          </a:xfrm>
+          <a:prstGeom prst="rect">
+            <a:avLst/>
+          </a:prstGeom>
+        </p:spPr>
+      </p:pic>
+      <p:pic>
+        <p:nvPicPr>
+          <p:cNvPr id="8" name="Picture 7">
+            <a:extLst>
+              <a:ext uri="{FF2B5EF4-FFF2-40B4-BE49-F238E27FC236}">
+                <a16:creationId xmlns:a16="http://schemas.microsoft.com/office/drawing/2014/main" id="{FE7EB734-6903-49D5-A647-AE7BC6E4ECF2}"/>
+              </a:ext>
+            </a:extLst>
+          </p:cNvPr>
+          <p:cNvPicPr>
+            <a:picLocks noChangeAspect="1"/>
+          </p:cNvPicPr>
+          <p:nvPr/>
+        </p:nvPicPr>
+        <p:blipFill>
+          <a:blip r:embed="rId4"/>
+          <a:stretch>
+            <a:fillRect/>
+          </a:stretch>
+        </p:blipFill>
+        <p:spPr>
+          <a:xfrm>
+            <a:off x="8590581" y="1608873"/>
+            <a:ext cx="2862262" cy="966787"/>
+          </a:xfrm>
+          <a:prstGeom prst="rect">
+            <a:avLst/>
+          </a:prstGeom>
+        </p:spPr>
+      </p:pic>
+      <p:sp>
+        <p:nvSpPr>
+          <p:cNvPr id="4" name="Content Placeholder 2">
+            <a:extLst>
+              <a:ext uri="{FF2B5EF4-FFF2-40B4-BE49-F238E27FC236}">
+                <a16:creationId xmlns:a16="http://schemas.microsoft.com/office/drawing/2014/main" id="{EA2E8D98-C1AD-CCC4-08D9-50F3BE804787}"/>
+              </a:ext>
+            </a:extLst>
+          </p:cNvPr>
+          <p:cNvSpPr txBox="1">
+            <a:spLocks/>
+          </p:cNvSpPr>
+          <p:nvPr/>
+        </p:nvSpPr>
+        <p:spPr>
+          <a:xfrm>
+            <a:off x="4574362" y="2735206"/>
+            <a:ext cx="2637321" cy="3413145"/>
           </a:xfrm>
           <a:prstGeom prst="rect">
             <a:avLst/>
@@ -10817,130 +8428,44 @@
           </a:lstStyle>
           <a:p>
             <a:r>
-              <a:rPr lang="en-US" sz="2400" dirty="0"/>
-              <a:t>Variables: filter data, </a:t>
-            </a:r>
-          </a:p>
-          <a:p>
-            <a:r>
-              <a:rPr lang="en-US" sz="2400" dirty="0"/>
-              <a:t>merge tables</a:t>
-            </a:r>
-          </a:p>
-          <a:p>
-            <a:pPr lvl="1"/>
-            <a:r>
-              <a:rPr lang="en-US" dirty="0"/>
-              <a:t>Concatenate</a:t>
-            </a:r>
-          </a:p>
-          <a:p>
-            <a:pPr lvl="1"/>
-            <a:r>
-              <a:rPr lang="en-US" dirty="0"/>
-              <a:t>match merging (with n= dataset option)</a:t>
-            </a:r>
-          </a:p>
-        </p:txBody>
-      </p:sp>
-    </p:spTree>
-    <p:extLst>
-      <p:ext uri="{BB962C8B-B14F-4D97-AF65-F5344CB8AC3E}">
-        <p14:creationId xmlns:p14="http://schemas.microsoft.com/office/powerpoint/2010/main" val="3588703417"/>
-      </p:ext>
-    </p:extLst>
-  </p:cSld>
-  <p:clrMapOvr>
-    <a:masterClrMapping/>
-  </p:clrMapOvr>
-</p:sld>
-</file>
-
-<file path=ppt/slides/slide6.xml><?xml version="1.0" encoding="utf-8"?>
-<p:sld xmlns:a="http://schemas.openxmlformats.org/drawingml/2006/main" xmlns:r="http://schemas.openxmlformats.org/officeDocument/2006/relationships" xmlns:p="http://schemas.openxmlformats.org/presentationml/2006/main">
-  <p:cSld>
-    <p:spTree>
-      <p:nvGrpSpPr>
-        <p:cNvPr id="1" name="">
-          <a:extLst>
-            <a:ext uri="{FF2B5EF4-FFF2-40B4-BE49-F238E27FC236}">
-              <a16:creationId xmlns:a16="http://schemas.microsoft.com/office/drawing/2014/main" id="{24795404-4793-4153-45B6-147571F0820C}"/>
-            </a:ext>
-          </a:extLst>
-        </p:cNvPr>
-        <p:cNvGrpSpPr/>
-        <p:nvPr/>
-      </p:nvGrpSpPr>
-      <p:grpSpPr>
-        <a:xfrm>
-          <a:off x="0" y="0"/>
-          <a:ext cx="0" cy="0"/>
-          <a:chOff x="0" y="0"/>
-          <a:chExt cx="0" cy="0"/>
-        </a:xfrm>
-      </p:grpSpPr>
-      <p:sp>
-        <p:nvSpPr>
-          <p:cNvPr id="2" name="Title 1">
-            <a:extLst>
-              <a:ext uri="{FF2B5EF4-FFF2-40B4-BE49-F238E27FC236}">
-                <a16:creationId xmlns:a16="http://schemas.microsoft.com/office/drawing/2014/main" id="{A1D02713-65CC-0B2F-4169-1F342A167AE8}"/>
-              </a:ext>
-            </a:extLst>
-          </p:cNvPr>
-          <p:cNvSpPr>
-            <a:spLocks noGrp="1"/>
-          </p:cNvSpPr>
-          <p:nvPr>
-            <p:ph type="title"/>
-          </p:nvPr>
-        </p:nvSpPr>
-        <p:spPr/>
-        <p:txBody>
-          <a:bodyPr/>
-          <a:lstStyle/>
-          <a:p>
-            <a:r>
-              <a:rPr lang="en-US" dirty="0"/>
-              <a:t>Steps for refactoring</a:t>
-            </a:r>
-          </a:p>
-        </p:txBody>
-      </p:sp>
-      <p:graphicFrame>
-        <p:nvGraphicFramePr>
-          <p:cNvPr id="11" name="Diagram 10">
-            <a:extLst>
-              <a:ext uri="{FF2B5EF4-FFF2-40B4-BE49-F238E27FC236}">
-                <a16:creationId xmlns:a16="http://schemas.microsoft.com/office/drawing/2014/main" id="{D55503A3-8723-DC89-CF48-254E03E680D5}"/>
-              </a:ext>
-            </a:extLst>
-          </p:cNvPr>
-          <p:cNvGraphicFramePr/>
-          <p:nvPr>
-            <p:extLst>
-              <p:ext uri="{D42A27DB-BD31-4B8C-83A1-F6EECF244321}">
-                <p14:modId xmlns:p14="http://schemas.microsoft.com/office/powerpoint/2010/main" val="223565139"/>
-              </p:ext>
-            </p:extLst>
-          </p:nvPr>
-        </p:nvGraphicFramePr>
-        <p:xfrm>
-          <a:off x="6096000" y="365125"/>
-          <a:ext cx="5062220" cy="5418667"/>
-        </p:xfrm>
-        <a:graphic>
-          <a:graphicData uri="http://schemas.openxmlformats.org/drawingml/2006/diagram">
-            <dgm:relIds xmlns:dgm="http://schemas.openxmlformats.org/drawingml/2006/diagram" xmlns:r="http://schemas.openxmlformats.org/officeDocument/2006/relationships" r:dm="rId2" r:lo="rId3" r:qs="rId4" r:cs="rId5"/>
-          </a:graphicData>
-        </a:graphic>
-      </p:graphicFrame>
-      <p:sp>
-        <p:nvSpPr>
-          <p:cNvPr id="4" name="Content Placeholder 3">
-            <a:extLst>
-              <a:ext uri="{FF2B5EF4-FFF2-40B4-BE49-F238E27FC236}">
-                <a16:creationId xmlns:a16="http://schemas.microsoft.com/office/drawing/2014/main" id="{B225A04A-A19E-03F6-5A6F-E66D9D66BD3C}"/>
+              <a:rPr lang="en-US" altLang="zh-CN" dirty="0" err="1"/>
+              <a:t>tidyverse</a:t>
+            </a:r>
+            <a:r>
+              <a:rPr lang="en-US" altLang="zh-CN" dirty="0"/>
+              <a:t>, </a:t>
+            </a:r>
+          </a:p>
+          <a:p>
+            <a:r>
+              <a:rPr lang="en-US" altLang="zh-CN" dirty="0"/>
+              <a:t>arsenal,</a:t>
+            </a:r>
+          </a:p>
+          <a:p>
+            <a:r>
+              <a:rPr lang="en-US" altLang="zh-CN" dirty="0"/>
+              <a:t>Haven</a:t>
+            </a:r>
+          </a:p>
+          <a:p>
+            <a:r>
+              <a:rPr lang="en-US" altLang="zh-CN" dirty="0" err="1"/>
+              <a:t>aod</a:t>
+            </a:r>
+            <a:endParaRPr lang="en-US" altLang="zh-CN" dirty="0"/>
+          </a:p>
+          <a:p>
+            <a:endParaRPr lang="en-US" altLang="zh-CN" dirty="0"/>
+          </a:p>
+        </p:txBody>
+      </p:sp>
+      <p:sp>
+        <p:nvSpPr>
+          <p:cNvPr id="9" name="Content Placeholder 8">
+            <a:extLst>
+              <a:ext uri="{FF2B5EF4-FFF2-40B4-BE49-F238E27FC236}">
+                <a16:creationId xmlns:a16="http://schemas.microsoft.com/office/drawing/2014/main" id="{E0C96031-E926-D7AB-F4F4-6F05AB855B5E}"/>
               </a:ext>
             </a:extLst>
           </p:cNvPr>
@@ -10953,458 +8478,34 @@
         </p:nvSpPr>
         <p:spPr>
           <a:xfrm>
-            <a:off x="838200" y="1825625"/>
-            <a:ext cx="1074420" cy="4351338"/>
+            <a:off x="339016" y="2735206"/>
+            <a:ext cx="4012387" cy="468559"/>
           </a:xfrm>
         </p:spPr>
         <p:txBody>
-          <a:bodyPr/>
+          <a:bodyPr>
+            <a:normAutofit fontScale="40000" lnSpcReduction="20000"/>
+          </a:bodyPr>
           <a:lstStyle/>
           <a:p>
-            <a:endParaRPr lang="en-US" dirty="0"/>
-          </a:p>
-        </p:txBody>
-      </p:sp>
-    </p:spTree>
-    <p:extLst>
-      <p:ext uri="{BB962C8B-B14F-4D97-AF65-F5344CB8AC3E}">
-        <p14:creationId xmlns:p14="http://schemas.microsoft.com/office/powerpoint/2010/main" val="310505272"/>
-      </p:ext>
-    </p:extLst>
-  </p:cSld>
-  <p:clrMapOvr>
-    <a:masterClrMapping/>
-  </p:clrMapOvr>
-</p:sld>
-</file>
-
-<file path=ppt/slides/slide7.xml><?xml version="1.0" encoding="utf-8"?>
-<p:sld xmlns:a="http://schemas.openxmlformats.org/drawingml/2006/main" xmlns:r="http://schemas.openxmlformats.org/officeDocument/2006/relationships" xmlns:p="http://schemas.openxmlformats.org/presentationml/2006/main">
-  <p:cSld>
-    <p:spTree>
-      <p:nvGrpSpPr>
-        <p:cNvPr id="1" name="">
-          <a:extLst>
-            <a:ext uri="{FF2B5EF4-FFF2-40B4-BE49-F238E27FC236}">
-              <a16:creationId xmlns:a16="http://schemas.microsoft.com/office/drawing/2014/main" id="{B2BCD0B7-14BF-9591-2491-51EC0B8A6CEB}"/>
-            </a:ext>
-          </a:extLst>
-        </p:cNvPr>
-        <p:cNvGrpSpPr/>
-        <p:nvPr/>
-      </p:nvGrpSpPr>
-      <p:grpSpPr>
-        <a:xfrm>
-          <a:off x="0" y="0"/>
-          <a:ext cx="0" cy="0"/>
-          <a:chOff x="0" y="0"/>
-          <a:chExt cx="0" cy="0"/>
-        </a:xfrm>
-      </p:grpSpPr>
-      <p:sp>
-        <p:nvSpPr>
-          <p:cNvPr id="2" name="Title 1">
-            <a:extLst>
-              <a:ext uri="{FF2B5EF4-FFF2-40B4-BE49-F238E27FC236}">
-                <a16:creationId xmlns:a16="http://schemas.microsoft.com/office/drawing/2014/main" id="{3C96B53C-360B-A7DC-1397-EE5C9B1C729C}"/>
-              </a:ext>
-            </a:extLst>
-          </p:cNvPr>
-          <p:cNvSpPr>
-            <a:spLocks noGrp="1"/>
-          </p:cNvSpPr>
-          <p:nvPr>
-            <p:ph type="title"/>
-          </p:nvPr>
-        </p:nvSpPr>
-        <p:spPr/>
-        <p:txBody>
-          <a:bodyPr/>
-          <a:lstStyle/>
-          <a:p>
             <a:r>
               <a:rPr lang="en-US" dirty="0"/>
-              <a:t>Major SAS Steps/Proc vs R package/functions</a:t>
-            </a:r>
-          </a:p>
-        </p:txBody>
-      </p:sp>
-      <p:pic>
-        <p:nvPicPr>
-          <p:cNvPr id="6" name="Picture 5">
-            <a:extLst>
-              <a:ext uri="{FF2B5EF4-FFF2-40B4-BE49-F238E27FC236}">
-                <a16:creationId xmlns:a16="http://schemas.microsoft.com/office/drawing/2014/main" id="{D89187F8-9708-A2D8-B314-1950D2AA2EBD}"/>
-              </a:ext>
-            </a:extLst>
-          </p:cNvPr>
-          <p:cNvPicPr>
-            <a:picLocks noChangeAspect="1"/>
-          </p:cNvPicPr>
-          <p:nvPr/>
-        </p:nvPicPr>
-        <p:blipFill>
-          <a:blip r:embed="rId2"/>
-          <a:stretch>
-            <a:fillRect/>
-          </a:stretch>
-        </p:blipFill>
-        <p:spPr>
-          <a:xfrm>
-            <a:off x="1446197" y="5207810"/>
-            <a:ext cx="1877291" cy="769689"/>
-          </a:xfrm>
-          <a:prstGeom prst="rect">
-            <a:avLst/>
-          </a:prstGeom>
-        </p:spPr>
-      </p:pic>
-      <p:pic>
-        <p:nvPicPr>
-          <p:cNvPr id="7" name="Picture 6">
-            <a:extLst>
-              <a:ext uri="{FF2B5EF4-FFF2-40B4-BE49-F238E27FC236}">
-                <a16:creationId xmlns:a16="http://schemas.microsoft.com/office/drawing/2014/main" id="{D093ED12-F9C4-7300-59D7-16AC180856DE}"/>
-              </a:ext>
-            </a:extLst>
-          </p:cNvPr>
-          <p:cNvPicPr>
-            <a:picLocks noChangeAspect="1"/>
-          </p:cNvPicPr>
-          <p:nvPr/>
-        </p:nvPicPr>
-        <p:blipFill>
-          <a:blip r:embed="rId3"/>
-          <a:stretch>
-            <a:fillRect/>
-          </a:stretch>
-        </p:blipFill>
-        <p:spPr>
-          <a:xfrm>
-            <a:off x="5024264" y="5174343"/>
-            <a:ext cx="2143471" cy="803156"/>
-          </a:xfrm>
-          <a:prstGeom prst="rect">
-            <a:avLst/>
-          </a:prstGeom>
-        </p:spPr>
-      </p:pic>
-      <p:pic>
-        <p:nvPicPr>
-          <p:cNvPr id="8" name="Picture 7">
-            <a:extLst>
-              <a:ext uri="{FF2B5EF4-FFF2-40B4-BE49-F238E27FC236}">
-                <a16:creationId xmlns:a16="http://schemas.microsoft.com/office/drawing/2014/main" id="{FE7EB734-6903-49D5-A647-AE7BC6E4ECF2}"/>
-              </a:ext>
-            </a:extLst>
-          </p:cNvPr>
-          <p:cNvPicPr>
-            <a:picLocks noChangeAspect="1"/>
-          </p:cNvPicPr>
-          <p:nvPr/>
-        </p:nvPicPr>
-        <p:blipFill>
-          <a:blip r:embed="rId4"/>
-          <a:stretch>
-            <a:fillRect/>
-          </a:stretch>
-        </p:blipFill>
-        <p:spPr>
-          <a:xfrm>
-            <a:off x="8564702" y="5210176"/>
-            <a:ext cx="2862262" cy="966787"/>
-          </a:xfrm>
-          <a:prstGeom prst="rect">
-            <a:avLst/>
-          </a:prstGeom>
-        </p:spPr>
-      </p:pic>
-      <p:sp>
-        <p:nvSpPr>
-          <p:cNvPr id="4" name="Content Placeholder 2">
-            <a:extLst>
-              <a:ext uri="{FF2B5EF4-FFF2-40B4-BE49-F238E27FC236}">
-                <a16:creationId xmlns:a16="http://schemas.microsoft.com/office/drawing/2014/main" id="{EA2E8D98-C1AD-CCC4-08D9-50F3BE804787}"/>
-              </a:ext>
-            </a:extLst>
-          </p:cNvPr>
-          <p:cNvSpPr txBox="1">
-            <a:spLocks/>
-          </p:cNvSpPr>
-          <p:nvPr/>
-        </p:nvSpPr>
-        <p:spPr>
-          <a:xfrm>
-            <a:off x="5024264" y="1941576"/>
-            <a:ext cx="6402700" cy="3413145"/>
-          </a:xfrm>
-          <a:prstGeom prst="rect">
-            <a:avLst/>
-          </a:prstGeom>
-        </p:spPr>
-        <p:txBody>
-          <a:bodyPr vert="horz" lIns="91440" tIns="45720" rIns="91440" bIns="45720" rtlCol="0">
-            <a:normAutofit fontScale="70000" lnSpcReduction="20000"/>
-          </a:bodyPr>
-          <a:lstStyle>
-            <a:lvl1pPr marL="228600" indent="-228600" algn="l" defTabSz="914400" rtl="0" eaLnBrk="1" latinLnBrk="0" hangingPunct="1">
-              <a:lnSpc>
-                <a:spcPct val="90000"/>
-              </a:lnSpc>
-              <a:spcBef>
-                <a:spcPts val="1000"/>
-              </a:spcBef>
-              <a:buFont typeface="Arial" panose="020B0604020202020204" pitchFamily="34" charset="0"/>
-              <a:buChar char="•"/>
-              <a:defRPr sz="2800" kern="1200">
-                <a:solidFill>
-                  <a:schemeClr val="tx1"/>
-                </a:solidFill>
-                <a:latin typeface="+mn-lt"/>
-                <a:ea typeface="+mn-ea"/>
-                <a:cs typeface="+mn-cs"/>
-              </a:defRPr>
-            </a:lvl1pPr>
-            <a:lvl2pPr marL="685800" indent="-228600" algn="l" defTabSz="914400" rtl="0" eaLnBrk="1" latinLnBrk="0" hangingPunct="1">
-              <a:lnSpc>
-                <a:spcPct val="90000"/>
-              </a:lnSpc>
-              <a:spcBef>
-                <a:spcPts val="500"/>
-              </a:spcBef>
-              <a:buFont typeface="Arial" panose="020B0604020202020204" pitchFamily="34" charset="0"/>
-              <a:buChar char="•"/>
-              <a:defRPr sz="2400" kern="1200">
-                <a:solidFill>
-                  <a:schemeClr val="tx1"/>
-                </a:solidFill>
-                <a:latin typeface="+mn-lt"/>
-                <a:ea typeface="+mn-ea"/>
-                <a:cs typeface="+mn-cs"/>
-              </a:defRPr>
-            </a:lvl2pPr>
-            <a:lvl3pPr marL="1143000" indent="-228600" algn="l" defTabSz="914400" rtl="0" eaLnBrk="1" latinLnBrk="0" hangingPunct="1">
-              <a:lnSpc>
-                <a:spcPct val="90000"/>
-              </a:lnSpc>
-              <a:spcBef>
-                <a:spcPts val="500"/>
-              </a:spcBef>
-              <a:buFont typeface="Arial" panose="020B0604020202020204" pitchFamily="34" charset="0"/>
-              <a:buChar char="•"/>
-              <a:defRPr sz="2000" kern="1200">
-                <a:solidFill>
-                  <a:schemeClr val="tx1"/>
-                </a:solidFill>
-                <a:latin typeface="+mn-lt"/>
-                <a:ea typeface="+mn-ea"/>
-                <a:cs typeface="+mn-cs"/>
-              </a:defRPr>
-            </a:lvl3pPr>
-            <a:lvl4pPr marL="1600200" indent="-228600" algn="l" defTabSz="914400" rtl="0" eaLnBrk="1" latinLnBrk="0" hangingPunct="1">
-              <a:lnSpc>
-                <a:spcPct val="90000"/>
-              </a:lnSpc>
-              <a:spcBef>
-                <a:spcPts val="500"/>
-              </a:spcBef>
-              <a:buFont typeface="Arial" panose="020B0604020202020204" pitchFamily="34" charset="0"/>
-              <a:buChar char="•"/>
-              <a:defRPr sz="1800" kern="1200">
-                <a:solidFill>
-                  <a:schemeClr val="tx1"/>
-                </a:solidFill>
-                <a:latin typeface="+mn-lt"/>
-                <a:ea typeface="+mn-ea"/>
-                <a:cs typeface="+mn-cs"/>
-              </a:defRPr>
-            </a:lvl4pPr>
-            <a:lvl5pPr marL="2057400" indent="-228600" algn="l" defTabSz="914400" rtl="0" eaLnBrk="1" latinLnBrk="0" hangingPunct="1">
-              <a:lnSpc>
-                <a:spcPct val="90000"/>
-              </a:lnSpc>
-              <a:spcBef>
-                <a:spcPts val="500"/>
-              </a:spcBef>
-              <a:buFont typeface="Arial" panose="020B0604020202020204" pitchFamily="34" charset="0"/>
-              <a:buChar char="•"/>
-              <a:defRPr sz="1800" kern="1200">
-                <a:solidFill>
-                  <a:schemeClr val="tx1"/>
-                </a:solidFill>
-                <a:latin typeface="+mn-lt"/>
-                <a:ea typeface="+mn-ea"/>
-                <a:cs typeface="+mn-cs"/>
-              </a:defRPr>
-            </a:lvl5pPr>
-            <a:lvl6pPr marL="2514600" indent="-228600" algn="l" defTabSz="914400" rtl="0" eaLnBrk="1" latinLnBrk="0" hangingPunct="1">
-              <a:lnSpc>
-                <a:spcPct val="90000"/>
-              </a:lnSpc>
-              <a:spcBef>
-                <a:spcPts val="500"/>
-              </a:spcBef>
-              <a:buFont typeface="Arial" panose="020B0604020202020204" pitchFamily="34" charset="0"/>
-              <a:buChar char="•"/>
-              <a:defRPr sz="1800" kern="1200">
-                <a:solidFill>
-                  <a:schemeClr val="tx1"/>
-                </a:solidFill>
-                <a:latin typeface="+mn-lt"/>
-                <a:ea typeface="+mn-ea"/>
-                <a:cs typeface="+mn-cs"/>
-              </a:defRPr>
-            </a:lvl6pPr>
-            <a:lvl7pPr marL="2971800" indent="-228600" algn="l" defTabSz="914400" rtl="0" eaLnBrk="1" latinLnBrk="0" hangingPunct="1">
-              <a:lnSpc>
-                <a:spcPct val="90000"/>
-              </a:lnSpc>
-              <a:spcBef>
-                <a:spcPts val="500"/>
-              </a:spcBef>
-              <a:buFont typeface="Arial" panose="020B0604020202020204" pitchFamily="34" charset="0"/>
-              <a:buChar char="•"/>
-              <a:defRPr sz="1800" kern="1200">
-                <a:solidFill>
-                  <a:schemeClr val="tx1"/>
-                </a:solidFill>
-                <a:latin typeface="+mn-lt"/>
-                <a:ea typeface="+mn-ea"/>
-                <a:cs typeface="+mn-cs"/>
-              </a:defRPr>
-            </a:lvl7pPr>
-            <a:lvl8pPr marL="3429000" indent="-228600" algn="l" defTabSz="914400" rtl="0" eaLnBrk="1" latinLnBrk="0" hangingPunct="1">
-              <a:lnSpc>
-                <a:spcPct val="90000"/>
-              </a:lnSpc>
-              <a:spcBef>
-                <a:spcPts val="500"/>
-              </a:spcBef>
-              <a:buFont typeface="Arial" panose="020B0604020202020204" pitchFamily="34" charset="0"/>
-              <a:buChar char="•"/>
-              <a:defRPr sz="1800" kern="1200">
-                <a:solidFill>
-                  <a:schemeClr val="tx1"/>
-                </a:solidFill>
-                <a:latin typeface="+mn-lt"/>
-                <a:ea typeface="+mn-ea"/>
-                <a:cs typeface="+mn-cs"/>
-              </a:defRPr>
-            </a:lvl8pPr>
-            <a:lvl9pPr marL="3886200" indent="-228600" algn="l" defTabSz="914400" rtl="0" eaLnBrk="1" latinLnBrk="0" hangingPunct="1">
-              <a:lnSpc>
-                <a:spcPct val="90000"/>
-              </a:lnSpc>
-              <a:spcBef>
-                <a:spcPts val="500"/>
-              </a:spcBef>
-              <a:buFont typeface="Arial" panose="020B0604020202020204" pitchFamily="34" charset="0"/>
-              <a:buChar char="•"/>
-              <a:defRPr sz="1800" kern="1200">
-                <a:solidFill>
-                  <a:schemeClr val="tx1"/>
-                </a:solidFill>
-                <a:latin typeface="+mn-lt"/>
-                <a:ea typeface="+mn-ea"/>
-                <a:cs typeface="+mn-cs"/>
-              </a:defRPr>
-            </a:lvl9pPr>
-          </a:lstStyle>
-          <a:p>
-            <a:r>
-              <a:rPr lang="en-US" altLang="zh-CN" dirty="0"/>
-              <a:t>Enterprise Modeling and Analytics – the Cash Flow model</a:t>
-            </a:r>
-          </a:p>
-          <a:p>
+              <a:t>PROC TABULATE – </a:t>
+            </a:r>
+            <a:r>
+              <a:rPr lang="en-US" dirty="0" err="1"/>
+              <a:t>summarise</a:t>
+            </a:r>
             <a:r>
               <a:rPr lang="en-US" dirty="0"/>
-              <a:t>Data: date/month/time, missing values, N/A</a:t>
+              <a:t>()</a:t>
             </a:r>
           </a:p>
           <a:p>
             <a:r>
               <a:rPr lang="en-US" dirty="0"/>
-              <a:t>Variables: filter data, </a:t>
-            </a:r>
-          </a:p>
-          <a:p>
-            <a:r>
-              <a:rPr lang="en-US" dirty="0"/>
-              <a:t>merge tables</a:t>
-            </a:r>
-          </a:p>
-          <a:p>
-            <a:pPr lvl="1"/>
-            <a:r>
-              <a:rPr lang="en-US" dirty="0"/>
-              <a:t>Concatenate</a:t>
-            </a:r>
-          </a:p>
-          <a:p>
-            <a:pPr lvl="1"/>
-            <a:r>
-              <a:rPr lang="en-US" dirty="0"/>
-              <a:t>match merging (with n= dataset option)</a:t>
-            </a:r>
-          </a:p>
-          <a:p>
-            <a:r>
-              <a:rPr lang="en-US" dirty="0"/>
-              <a:t>Models: logistic regression with splines</a:t>
-            </a:r>
-          </a:p>
-          <a:p>
-            <a:pPr lvl="1"/>
-            <a:r>
-              <a:rPr lang="en-US" dirty="0"/>
-              <a:t>Choose number and location of the knots.</a:t>
-            </a:r>
-          </a:p>
-          <a:p>
-            <a:r>
-              <a:rPr lang="en-US" dirty="0"/>
-              <a:t>Macro functions</a:t>
-            </a:r>
-          </a:p>
-          <a:p>
-            <a:r>
-              <a:rPr lang="en-US" dirty="0"/>
-              <a:t>Output</a:t>
-            </a:r>
-          </a:p>
-          <a:p>
-            <a:endParaRPr lang="en-US" dirty="0"/>
-          </a:p>
-        </p:txBody>
-      </p:sp>
-      <p:sp>
-        <p:nvSpPr>
-          <p:cNvPr id="9" name="Content Placeholder 8">
-            <a:extLst>
-              <a:ext uri="{FF2B5EF4-FFF2-40B4-BE49-F238E27FC236}">
-                <a16:creationId xmlns:a16="http://schemas.microsoft.com/office/drawing/2014/main" id="{E0C96031-E926-D7AB-F4F4-6F05AB855B5E}"/>
-              </a:ext>
-            </a:extLst>
-          </p:cNvPr>
-          <p:cNvSpPr>
-            <a:spLocks noGrp="1"/>
-          </p:cNvSpPr>
-          <p:nvPr>
-            <p:ph idx="1"/>
-          </p:nvPr>
-        </p:nvSpPr>
-        <p:spPr>
-          <a:xfrm>
-            <a:off x="502920" y="3939539"/>
-            <a:ext cx="3573780" cy="1086803"/>
-          </a:xfrm>
-        </p:spPr>
-        <p:txBody>
-          <a:bodyPr/>
-          <a:lstStyle/>
-          <a:p>
-            <a:endParaRPr lang="en-US" dirty="0"/>
+              <a:t>PROC GENMOD</a:t>
+            </a:r>
           </a:p>
         </p:txBody>
       </p:sp>

--- a/2026 WSDS - Wujian Xue.pptx
+++ b/2026 WSDS - Wujian Xue.pptx
@@ -9,17 +9,18 @@
     <p:sldId id="264" r:id="rId3"/>
     <p:sldId id="257" r:id="rId4"/>
     <p:sldId id="258" r:id="rId5"/>
-    <p:sldId id="259" r:id="rId6"/>
-    <p:sldId id="271" r:id="rId7"/>
+    <p:sldId id="272" r:id="rId6"/>
+    <p:sldId id="259" r:id="rId7"/>
     <p:sldId id="270" r:id="rId8"/>
-    <p:sldId id="269" r:id="rId9"/>
-    <p:sldId id="265" r:id="rId10"/>
-    <p:sldId id="266" r:id="rId11"/>
-    <p:sldId id="267" r:id="rId12"/>
-    <p:sldId id="260" r:id="rId13"/>
-    <p:sldId id="261" r:id="rId14"/>
-    <p:sldId id="263" r:id="rId15"/>
-    <p:sldId id="262" r:id="rId16"/>
+    <p:sldId id="271" r:id="rId9"/>
+    <p:sldId id="269" r:id="rId10"/>
+    <p:sldId id="265" r:id="rId11"/>
+    <p:sldId id="266" r:id="rId12"/>
+    <p:sldId id="267" r:id="rId13"/>
+    <p:sldId id="260" r:id="rId14"/>
+    <p:sldId id="261" r:id="rId15"/>
+    <p:sldId id="263" r:id="rId16"/>
+    <p:sldId id="262" r:id="rId17"/>
   </p:sldIdLst>
   <p:sldSz cx="12192000" cy="6858000"/>
   <p:notesSz cx="6858000" cy="9144000"/>
@@ -2824,7 +2825,7 @@
           <a:p>
             <a:fld id="{9DFF5FDE-556D-4288-960F-3880543CC0D0}" type="datetimeFigureOut">
               <a:rPr lang="en-US" smtClean="0"/>
-              <a:t>10/9/2026</a:t>
+              <a:t>10/11/2026</a:t>
             </a:fld>
             <a:endParaRPr lang="en-US"/>
           </a:p>
@@ -3022,7 +3023,7 @@
           <a:p>
             <a:fld id="{9DFF5FDE-556D-4288-960F-3880543CC0D0}" type="datetimeFigureOut">
               <a:rPr lang="en-US" smtClean="0"/>
-              <a:t>10/9/2026</a:t>
+              <a:t>10/11/2026</a:t>
             </a:fld>
             <a:endParaRPr lang="en-US"/>
           </a:p>
@@ -3230,7 +3231,7 @@
           <a:p>
             <a:fld id="{9DFF5FDE-556D-4288-960F-3880543CC0D0}" type="datetimeFigureOut">
               <a:rPr lang="en-US" smtClean="0"/>
-              <a:t>10/9/2026</a:t>
+              <a:t>10/11/2026</a:t>
             </a:fld>
             <a:endParaRPr lang="en-US"/>
           </a:p>
@@ -3428,7 +3429,7 @@
           <a:p>
             <a:fld id="{9DFF5FDE-556D-4288-960F-3880543CC0D0}" type="datetimeFigureOut">
               <a:rPr lang="en-US" smtClean="0"/>
-              <a:t>10/9/2026</a:t>
+              <a:t>10/11/2026</a:t>
             </a:fld>
             <a:endParaRPr lang="en-US"/>
           </a:p>
@@ -3703,7 +3704,7 @@
           <a:p>
             <a:fld id="{9DFF5FDE-556D-4288-960F-3880543CC0D0}" type="datetimeFigureOut">
               <a:rPr lang="en-US" smtClean="0"/>
-              <a:t>10/9/2026</a:t>
+              <a:t>10/11/2026</a:t>
             </a:fld>
             <a:endParaRPr lang="en-US"/>
           </a:p>
@@ -3968,7 +3969,7 @@
           <a:p>
             <a:fld id="{9DFF5FDE-556D-4288-960F-3880543CC0D0}" type="datetimeFigureOut">
               <a:rPr lang="en-US" smtClean="0"/>
-              <a:t>10/9/2026</a:t>
+              <a:t>10/11/2026</a:t>
             </a:fld>
             <a:endParaRPr lang="en-US"/>
           </a:p>
@@ -4380,7 +4381,7 @@
           <a:p>
             <a:fld id="{9DFF5FDE-556D-4288-960F-3880543CC0D0}" type="datetimeFigureOut">
               <a:rPr lang="en-US" smtClean="0"/>
-              <a:t>10/9/2026</a:t>
+              <a:t>10/11/2026</a:t>
             </a:fld>
             <a:endParaRPr lang="en-US"/>
           </a:p>
@@ -4521,7 +4522,7 @@
           <a:p>
             <a:fld id="{9DFF5FDE-556D-4288-960F-3880543CC0D0}" type="datetimeFigureOut">
               <a:rPr lang="en-US" smtClean="0"/>
-              <a:t>10/9/2026</a:t>
+              <a:t>10/11/2026</a:t>
             </a:fld>
             <a:endParaRPr lang="en-US"/>
           </a:p>
@@ -4634,7 +4635,7 @@
           <a:p>
             <a:fld id="{9DFF5FDE-556D-4288-960F-3880543CC0D0}" type="datetimeFigureOut">
               <a:rPr lang="en-US" smtClean="0"/>
-              <a:t>10/9/2026</a:t>
+              <a:t>10/11/2026</a:t>
             </a:fld>
             <a:endParaRPr lang="en-US"/>
           </a:p>
@@ -4945,7 +4946,7 @@
           <a:p>
             <a:fld id="{9DFF5FDE-556D-4288-960F-3880543CC0D0}" type="datetimeFigureOut">
               <a:rPr lang="en-US" smtClean="0"/>
-              <a:t>10/9/2026</a:t>
+              <a:t>10/11/2026</a:t>
             </a:fld>
             <a:endParaRPr lang="en-US"/>
           </a:p>
@@ -5233,7 +5234,7 @@
           <a:p>
             <a:fld id="{9DFF5FDE-556D-4288-960F-3880543CC0D0}" type="datetimeFigureOut">
               <a:rPr lang="en-US" smtClean="0"/>
-              <a:t>10/9/2026</a:t>
+              <a:t>10/11/2026</a:t>
             </a:fld>
             <a:endParaRPr lang="en-US"/>
           </a:p>
@@ -5474,7 +5475,7 @@
           <a:p>
             <a:fld id="{9DFF5FDE-556D-4288-960F-3880543CC0D0}" type="datetimeFigureOut">
               <a:rPr lang="en-US" smtClean="0"/>
-              <a:t>10/9/2026</a:t>
+              <a:t>10/11/2026</a:t>
             </a:fld>
             <a:endParaRPr lang="en-US"/>
           </a:p>
@@ -6038,2987 +6039,6 @@
           <p:cNvPr id="2" name="Title 1">
             <a:extLst>
               <a:ext uri="{FF2B5EF4-FFF2-40B4-BE49-F238E27FC236}">
-                <a16:creationId xmlns:a16="http://schemas.microsoft.com/office/drawing/2014/main" id="{BDCA0D58-006F-0ED1-D928-9053639D7AE8}"/>
-              </a:ext>
-            </a:extLst>
-          </p:cNvPr>
-          <p:cNvSpPr>
-            <a:spLocks noGrp="1"/>
-          </p:cNvSpPr>
-          <p:nvPr>
-            <p:ph type="title"/>
-          </p:nvPr>
-        </p:nvSpPr>
-        <p:spPr/>
-        <p:txBody>
-          <a:bodyPr/>
-          <a:lstStyle/>
-          <a:p>
-            <a:r>
-              <a:rPr lang="en-US" dirty="0"/>
-              <a:t>Efficiency</a:t>
-            </a:r>
-          </a:p>
-        </p:txBody>
-      </p:sp>
-      <p:sp>
-        <p:nvSpPr>
-          <p:cNvPr id="3" name="Content Placeholder 2">
-            <a:extLst>
-              <a:ext uri="{FF2B5EF4-FFF2-40B4-BE49-F238E27FC236}">
-                <a16:creationId xmlns:a16="http://schemas.microsoft.com/office/drawing/2014/main" id="{F8DC0A5E-A212-3E5A-61F0-5486D95F0C41}"/>
-              </a:ext>
-            </a:extLst>
-          </p:cNvPr>
-          <p:cNvSpPr>
-            <a:spLocks noGrp="1"/>
-          </p:cNvSpPr>
-          <p:nvPr>
-            <p:ph idx="1"/>
-          </p:nvPr>
-        </p:nvSpPr>
-        <p:spPr/>
-        <p:txBody>
-          <a:bodyPr/>
-          <a:lstStyle/>
-          <a:p>
-            <a:endParaRPr lang="en-US"/>
-          </a:p>
-        </p:txBody>
-      </p:sp>
-    </p:spTree>
-    <p:extLst>
-      <p:ext uri="{BB962C8B-B14F-4D97-AF65-F5344CB8AC3E}">
-        <p14:creationId xmlns:p14="http://schemas.microsoft.com/office/powerpoint/2010/main" val="683459612"/>
-      </p:ext>
-    </p:extLst>
-  </p:cSld>
-  <p:clrMapOvr>
-    <a:masterClrMapping/>
-  </p:clrMapOvr>
-</p:sld>
-</file>
-
-<file path=ppt/slides/slide11.xml><?xml version="1.0" encoding="utf-8"?>
-<p:sld xmlns:a="http://schemas.openxmlformats.org/drawingml/2006/main" xmlns:r="http://schemas.openxmlformats.org/officeDocument/2006/relationships" xmlns:p="http://schemas.openxmlformats.org/presentationml/2006/main">
-  <p:cSld>
-    <p:spTree>
-      <p:nvGrpSpPr>
-        <p:cNvPr id="1" name=""/>
-        <p:cNvGrpSpPr/>
-        <p:nvPr/>
-      </p:nvGrpSpPr>
-      <p:grpSpPr>
-        <a:xfrm>
-          <a:off x="0" y="0"/>
-          <a:ext cx="0" cy="0"/>
-          <a:chOff x="0" y="0"/>
-          <a:chExt cx="0" cy="0"/>
-        </a:xfrm>
-      </p:grpSpPr>
-      <p:sp>
-        <p:nvSpPr>
-          <p:cNvPr id="2" name="Title 1">
-            <a:extLst>
-              <a:ext uri="{FF2B5EF4-FFF2-40B4-BE49-F238E27FC236}">
-                <a16:creationId xmlns:a16="http://schemas.microsoft.com/office/drawing/2014/main" id="{1E601B93-71FC-ED4E-DAD1-2DC88351F539}"/>
-              </a:ext>
-            </a:extLst>
-          </p:cNvPr>
-          <p:cNvSpPr>
-            <a:spLocks noGrp="1"/>
-          </p:cNvSpPr>
-          <p:nvPr>
-            <p:ph type="title"/>
-          </p:nvPr>
-        </p:nvSpPr>
-        <p:spPr/>
-        <p:txBody>
-          <a:bodyPr/>
-          <a:lstStyle/>
-          <a:p>
-            <a:r>
-              <a:rPr lang="en-US" altLang="zh-CN" dirty="0"/>
-              <a:t>Merge Tables</a:t>
-            </a:r>
-            <a:endParaRPr lang="en-US" dirty="0"/>
-          </a:p>
-        </p:txBody>
-      </p:sp>
-      <p:sp>
-        <p:nvSpPr>
-          <p:cNvPr id="3" name="Content Placeholder 2">
-            <a:extLst>
-              <a:ext uri="{FF2B5EF4-FFF2-40B4-BE49-F238E27FC236}">
-                <a16:creationId xmlns:a16="http://schemas.microsoft.com/office/drawing/2014/main" id="{BD0A8754-420C-E67C-1B6E-990DE726033A}"/>
-              </a:ext>
-            </a:extLst>
-          </p:cNvPr>
-          <p:cNvSpPr>
-            <a:spLocks noGrp="1"/>
-          </p:cNvSpPr>
-          <p:nvPr>
-            <p:ph idx="1"/>
-          </p:nvPr>
-        </p:nvSpPr>
-        <p:spPr/>
-        <p:txBody>
-          <a:bodyPr/>
-          <a:lstStyle/>
-          <a:p>
-            <a:r>
-              <a:rPr lang="en-US" dirty="0"/>
-              <a:t>concatenation</a:t>
-            </a:r>
-          </a:p>
-        </p:txBody>
-      </p:sp>
-    </p:spTree>
-    <p:extLst>
-      <p:ext uri="{BB962C8B-B14F-4D97-AF65-F5344CB8AC3E}">
-        <p14:creationId xmlns:p14="http://schemas.microsoft.com/office/powerpoint/2010/main" val="2510015937"/>
-      </p:ext>
-    </p:extLst>
-  </p:cSld>
-  <p:clrMapOvr>
-    <a:masterClrMapping/>
-  </p:clrMapOvr>
-</p:sld>
-</file>
-
-<file path=ppt/slides/slide12.xml><?xml version="1.0" encoding="utf-8"?>
-<p:sld xmlns:a="http://schemas.openxmlformats.org/drawingml/2006/main" xmlns:r="http://schemas.openxmlformats.org/officeDocument/2006/relationships" xmlns:p="http://schemas.openxmlformats.org/presentationml/2006/main">
-  <p:cSld>
-    <p:spTree>
-      <p:nvGrpSpPr>
-        <p:cNvPr id="1" name=""/>
-        <p:cNvGrpSpPr/>
-        <p:nvPr/>
-      </p:nvGrpSpPr>
-      <p:grpSpPr>
-        <a:xfrm>
-          <a:off x="0" y="0"/>
-          <a:ext cx="0" cy="0"/>
-          <a:chOff x="0" y="0"/>
-          <a:chExt cx="0" cy="0"/>
-        </a:xfrm>
-      </p:grpSpPr>
-      <p:sp>
-        <p:nvSpPr>
-          <p:cNvPr id="2" name="Title 1">
-            <a:extLst>
-              <a:ext uri="{FF2B5EF4-FFF2-40B4-BE49-F238E27FC236}">
-                <a16:creationId xmlns:a16="http://schemas.microsoft.com/office/drawing/2014/main" id="{B43C6558-4EC7-F455-AEE9-D12FD0A89C62}"/>
-              </a:ext>
-            </a:extLst>
-          </p:cNvPr>
-          <p:cNvSpPr>
-            <a:spLocks noGrp="1"/>
-          </p:cNvSpPr>
-          <p:nvPr>
-            <p:ph type="title"/>
-          </p:nvPr>
-        </p:nvSpPr>
-        <p:spPr/>
-        <p:txBody>
-          <a:bodyPr/>
-          <a:lstStyle/>
-          <a:p>
-            <a:endParaRPr lang="en-US"/>
-          </a:p>
-        </p:txBody>
-      </p:sp>
-      <p:sp>
-        <p:nvSpPr>
-          <p:cNvPr id="3" name="Content Placeholder 2">
-            <a:extLst>
-              <a:ext uri="{FF2B5EF4-FFF2-40B4-BE49-F238E27FC236}">
-                <a16:creationId xmlns:a16="http://schemas.microsoft.com/office/drawing/2014/main" id="{5655E68B-3CB9-4EB7-342D-A9E2A3772252}"/>
-              </a:ext>
-            </a:extLst>
-          </p:cNvPr>
-          <p:cNvSpPr>
-            <a:spLocks noGrp="1"/>
-          </p:cNvSpPr>
-          <p:nvPr>
-            <p:ph idx="1"/>
-          </p:nvPr>
-        </p:nvSpPr>
-        <p:spPr/>
-        <p:txBody>
-          <a:bodyPr/>
-          <a:lstStyle/>
-          <a:p>
-            <a:r>
-              <a:rPr lang="en-US" dirty="0"/>
-              <a:t>What additional value does my approach provide?</a:t>
-            </a:r>
-          </a:p>
-        </p:txBody>
-      </p:sp>
-    </p:spTree>
-    <p:extLst>
-      <p:ext uri="{BB962C8B-B14F-4D97-AF65-F5344CB8AC3E}">
-        <p14:creationId xmlns:p14="http://schemas.microsoft.com/office/powerpoint/2010/main" val="331261954"/>
-      </p:ext>
-    </p:extLst>
-  </p:cSld>
-  <p:clrMapOvr>
-    <a:masterClrMapping/>
-  </p:clrMapOvr>
-</p:sld>
-</file>
-
-<file path=ppt/slides/slide13.xml><?xml version="1.0" encoding="utf-8"?>
-<p:sld xmlns:a="http://schemas.openxmlformats.org/drawingml/2006/main" xmlns:r="http://schemas.openxmlformats.org/officeDocument/2006/relationships" xmlns:p="http://schemas.openxmlformats.org/presentationml/2006/main">
-  <p:cSld>
-    <p:spTree>
-      <p:nvGrpSpPr>
-        <p:cNvPr id="1" name=""/>
-        <p:cNvGrpSpPr/>
-        <p:nvPr/>
-      </p:nvGrpSpPr>
-      <p:grpSpPr>
-        <a:xfrm>
-          <a:off x="0" y="0"/>
-          <a:ext cx="0" cy="0"/>
-          <a:chOff x="0" y="0"/>
-          <a:chExt cx="0" cy="0"/>
-        </a:xfrm>
-      </p:grpSpPr>
-      <p:sp>
-        <p:nvSpPr>
-          <p:cNvPr id="2" name="Title 1">
-            <a:extLst>
-              <a:ext uri="{FF2B5EF4-FFF2-40B4-BE49-F238E27FC236}">
-                <a16:creationId xmlns:a16="http://schemas.microsoft.com/office/drawing/2014/main" id="{9E681912-C0D5-AF85-91B0-7D9532929F7F}"/>
-              </a:ext>
-            </a:extLst>
-          </p:cNvPr>
-          <p:cNvSpPr>
-            <a:spLocks noGrp="1"/>
-          </p:cNvSpPr>
-          <p:nvPr>
-            <p:ph type="title"/>
-          </p:nvPr>
-        </p:nvSpPr>
-        <p:spPr/>
-        <p:txBody>
-          <a:bodyPr/>
-          <a:lstStyle/>
-          <a:p>
-            <a:endParaRPr lang="en-US" dirty="0"/>
-          </a:p>
-        </p:txBody>
-      </p:sp>
-      <p:sp>
-        <p:nvSpPr>
-          <p:cNvPr id="3" name="Content Placeholder 2">
-            <a:extLst>
-              <a:ext uri="{FF2B5EF4-FFF2-40B4-BE49-F238E27FC236}">
-                <a16:creationId xmlns:a16="http://schemas.microsoft.com/office/drawing/2014/main" id="{E48A637E-A23A-F19C-2EC6-9A9B52F8A2BA}"/>
-              </a:ext>
-            </a:extLst>
-          </p:cNvPr>
-          <p:cNvSpPr>
-            <a:spLocks noGrp="1"/>
-          </p:cNvSpPr>
-          <p:nvPr>
-            <p:ph idx="1"/>
-          </p:nvPr>
-        </p:nvSpPr>
-        <p:spPr/>
-        <p:txBody>
-          <a:bodyPr/>
-          <a:lstStyle/>
-          <a:p>
-            <a:r>
-              <a:rPr lang="en-US" dirty="0"/>
-              <a:t>Where do we go from there?</a:t>
-            </a:r>
-          </a:p>
-          <a:p>
-            <a:r>
-              <a:rPr lang="en-US" dirty="0"/>
-              <a:t>Tech in 2020 seems pretty old at 2026. So how will we see in 2030?</a:t>
-            </a:r>
-          </a:p>
-        </p:txBody>
-      </p:sp>
-    </p:spTree>
-    <p:extLst>
-      <p:ext uri="{BB962C8B-B14F-4D97-AF65-F5344CB8AC3E}">
-        <p14:creationId xmlns:p14="http://schemas.microsoft.com/office/powerpoint/2010/main" val="1238321945"/>
-      </p:ext>
-    </p:extLst>
-  </p:cSld>
-  <p:clrMapOvr>
-    <a:masterClrMapping/>
-  </p:clrMapOvr>
-</p:sld>
-</file>
-
-<file path=ppt/slides/slide14.xml><?xml version="1.0" encoding="utf-8"?>
-<p:sld xmlns:a="http://schemas.openxmlformats.org/drawingml/2006/main" xmlns:r="http://schemas.openxmlformats.org/officeDocument/2006/relationships" xmlns:p="http://schemas.openxmlformats.org/presentationml/2006/main">
-  <p:cSld>
-    <p:spTree>
-      <p:nvGrpSpPr>
-        <p:cNvPr id="1" name=""/>
-        <p:cNvGrpSpPr/>
-        <p:nvPr/>
-      </p:nvGrpSpPr>
-      <p:grpSpPr>
-        <a:xfrm>
-          <a:off x="0" y="0"/>
-          <a:ext cx="0" cy="0"/>
-          <a:chOff x="0" y="0"/>
-          <a:chExt cx="0" cy="0"/>
-        </a:xfrm>
-      </p:grpSpPr>
-      <p:sp>
-        <p:nvSpPr>
-          <p:cNvPr id="2" name="Title 1">
-            <a:extLst>
-              <a:ext uri="{FF2B5EF4-FFF2-40B4-BE49-F238E27FC236}">
-                <a16:creationId xmlns:a16="http://schemas.microsoft.com/office/drawing/2014/main" id="{79765071-DC72-93E5-9B2F-5F473699886E}"/>
-              </a:ext>
-            </a:extLst>
-          </p:cNvPr>
-          <p:cNvSpPr>
-            <a:spLocks noGrp="1"/>
-          </p:cNvSpPr>
-          <p:nvPr>
-            <p:ph type="title"/>
-          </p:nvPr>
-        </p:nvSpPr>
-        <p:spPr/>
-        <p:txBody>
-          <a:bodyPr/>
-          <a:lstStyle/>
-          <a:p>
-            <a:r>
-              <a:rPr lang="en-US" altLang="zh-CN" dirty="0"/>
-              <a:t>Reference:</a:t>
-            </a:r>
-            <a:endParaRPr lang="en-US" dirty="0"/>
-          </a:p>
-        </p:txBody>
-      </p:sp>
-      <p:sp>
-        <p:nvSpPr>
-          <p:cNvPr id="3" name="Content Placeholder 2">
-            <a:extLst>
-              <a:ext uri="{FF2B5EF4-FFF2-40B4-BE49-F238E27FC236}">
-                <a16:creationId xmlns:a16="http://schemas.microsoft.com/office/drawing/2014/main" id="{BA3456FF-E78F-8DA1-FCFF-D93708555E23}"/>
-              </a:ext>
-            </a:extLst>
-          </p:cNvPr>
-          <p:cNvSpPr>
-            <a:spLocks noGrp="1"/>
-          </p:cNvSpPr>
-          <p:nvPr>
-            <p:ph idx="1"/>
-          </p:nvPr>
-        </p:nvSpPr>
-        <p:spPr/>
-        <p:txBody>
-          <a:bodyPr>
-            <a:normAutofit/>
-          </a:bodyPr>
-          <a:lstStyle/>
-          <a:p>
-            <a:r>
-              <a:rPr lang="en-US" sz="2000" dirty="0">
-                <a:hlinkClick r:id="rId2"/>
-              </a:rPr>
-              <a:t>AWS </a:t>
-            </a:r>
-            <a:r>
-              <a:rPr lang="en-US" sz="2000" dirty="0" err="1">
-                <a:hlinkClick r:id="rId2"/>
-              </a:rPr>
-              <a:t>re:Invent</a:t>
-            </a:r>
-            <a:r>
-              <a:rPr lang="en-US" sz="2000" dirty="0">
-                <a:hlinkClick r:id="rId2"/>
-              </a:rPr>
-              <a:t> 2021 - Fannie Mae: Migrating at scale without lifting and shifting</a:t>
-            </a:r>
-            <a:endParaRPr lang="en-US" sz="2000" dirty="0"/>
-          </a:p>
-          <a:p>
-            <a:r>
-              <a:rPr lang="en-US" sz="2000" dirty="0">
-                <a:hlinkClick r:id="rId3"/>
-              </a:rPr>
-              <a:t>Fannie Mae’s Digital Transformation Journey with AWS | Amazon Web Services</a:t>
-            </a:r>
-            <a:endParaRPr lang="en-US" sz="2000" dirty="0"/>
-          </a:p>
-          <a:p>
-            <a:r>
-              <a:rPr lang="en-US" sz="2000" dirty="0">
-                <a:hlinkClick r:id="rId4"/>
-              </a:rPr>
-              <a:t>What is a Cloud Migration Strategy? - Cloud Migration Strategy Explained – AWS</a:t>
-            </a:r>
-            <a:endParaRPr lang="en-US" sz="2000" dirty="0"/>
-          </a:p>
-          <a:p>
-            <a:r>
-              <a:rPr lang="en-US" sz="2000" dirty="0">
-                <a:hlinkClick r:id="rId5"/>
-              </a:rPr>
-              <a:t>Understanding the “7 Rs” - Cloud Migration Strategies | AWS Builder Center</a:t>
-            </a:r>
-            <a:endParaRPr lang="en-US" sz="2000" dirty="0"/>
-          </a:p>
-          <a:p>
-            <a:endParaRPr lang="en-US" sz="2000" dirty="0"/>
-          </a:p>
-        </p:txBody>
-      </p:sp>
-    </p:spTree>
-    <p:extLst>
-      <p:ext uri="{BB962C8B-B14F-4D97-AF65-F5344CB8AC3E}">
-        <p14:creationId xmlns:p14="http://schemas.microsoft.com/office/powerpoint/2010/main" val="1077489760"/>
-      </p:ext>
-    </p:extLst>
-  </p:cSld>
-  <p:clrMapOvr>
-    <a:masterClrMapping/>
-  </p:clrMapOvr>
-</p:sld>
-</file>
-
-<file path=ppt/slides/slide15.xml><?xml version="1.0" encoding="utf-8"?>
-<p:sld xmlns:a="http://schemas.openxmlformats.org/drawingml/2006/main" xmlns:r="http://schemas.openxmlformats.org/officeDocument/2006/relationships" xmlns:p="http://schemas.openxmlformats.org/presentationml/2006/main">
-  <p:cSld>
-    <p:spTree>
-      <p:nvGrpSpPr>
-        <p:cNvPr id="1" name=""/>
-        <p:cNvGrpSpPr/>
-        <p:nvPr/>
-      </p:nvGrpSpPr>
-      <p:grpSpPr>
-        <a:xfrm>
-          <a:off x="0" y="0"/>
-          <a:ext cx="0" cy="0"/>
-          <a:chOff x="0" y="0"/>
-          <a:chExt cx="0" cy="0"/>
-        </a:xfrm>
-      </p:grpSpPr>
-      <p:sp>
-        <p:nvSpPr>
-          <p:cNvPr id="2" name="Title 1">
-            <a:extLst>
-              <a:ext uri="{FF2B5EF4-FFF2-40B4-BE49-F238E27FC236}">
-                <a16:creationId xmlns:a16="http://schemas.microsoft.com/office/drawing/2014/main" id="{082D5B5A-22EB-F6BE-03B9-DA990AE01051}"/>
-              </a:ext>
-            </a:extLst>
-          </p:cNvPr>
-          <p:cNvSpPr>
-            <a:spLocks noGrp="1"/>
-          </p:cNvSpPr>
-          <p:nvPr>
-            <p:ph type="title"/>
-          </p:nvPr>
-        </p:nvSpPr>
-        <p:spPr/>
-        <p:txBody>
-          <a:bodyPr/>
-          <a:lstStyle/>
-          <a:p>
-            <a:r>
-              <a:rPr lang="en-US" dirty="0"/>
-              <a:t>Q&amp;A</a:t>
-            </a:r>
-          </a:p>
-        </p:txBody>
-      </p:sp>
-      <p:sp>
-        <p:nvSpPr>
-          <p:cNvPr id="3" name="Content Placeholder 2">
-            <a:extLst>
-              <a:ext uri="{FF2B5EF4-FFF2-40B4-BE49-F238E27FC236}">
-                <a16:creationId xmlns:a16="http://schemas.microsoft.com/office/drawing/2014/main" id="{BA79DD26-0915-7E46-B9E9-A23C1002591E}"/>
-              </a:ext>
-            </a:extLst>
-          </p:cNvPr>
-          <p:cNvSpPr>
-            <a:spLocks noGrp="1"/>
-          </p:cNvSpPr>
-          <p:nvPr>
-            <p:ph idx="1"/>
-          </p:nvPr>
-        </p:nvSpPr>
-        <p:spPr>
-          <a:xfrm>
-            <a:off x="5029200" y="5414009"/>
-            <a:ext cx="1173480" cy="332423"/>
-          </a:xfrm>
-        </p:spPr>
-        <p:txBody>
-          <a:bodyPr>
-            <a:normAutofit fontScale="62500" lnSpcReduction="20000"/>
-          </a:bodyPr>
-          <a:lstStyle/>
-          <a:p>
-            <a:pPr marL="0" indent="0">
-              <a:buNone/>
-            </a:pPr>
-            <a:r>
-              <a:rPr lang="en-US" dirty="0"/>
-              <a:t>My </a:t>
-            </a:r>
-            <a:r>
-              <a:rPr lang="en-US" dirty="0" err="1"/>
-              <a:t>Github</a:t>
-            </a:r>
-            <a:endParaRPr lang="en-US" dirty="0"/>
-          </a:p>
-        </p:txBody>
-      </p:sp>
-      <p:pic>
-        <p:nvPicPr>
-          <p:cNvPr id="5" name="Picture 4">
-            <a:extLst>
-              <a:ext uri="{FF2B5EF4-FFF2-40B4-BE49-F238E27FC236}">
-                <a16:creationId xmlns:a16="http://schemas.microsoft.com/office/drawing/2014/main" id="{EDC50AFE-4C70-3BD6-2457-93F253C69C25}"/>
-              </a:ext>
-            </a:extLst>
-          </p:cNvPr>
-          <p:cNvPicPr>
-            <a:picLocks noChangeAspect="1"/>
-          </p:cNvPicPr>
-          <p:nvPr/>
-        </p:nvPicPr>
-        <p:blipFill>
-          <a:blip r:embed="rId2"/>
-          <a:stretch>
-            <a:fillRect/>
-          </a:stretch>
-        </p:blipFill>
-        <p:spPr>
-          <a:xfrm>
-            <a:off x="4366260" y="2468880"/>
-            <a:ext cx="2499360" cy="2499360"/>
-          </a:xfrm>
-          <a:prstGeom prst="rect">
-            <a:avLst/>
-          </a:prstGeom>
-        </p:spPr>
-      </p:pic>
-    </p:spTree>
-    <p:extLst>
-      <p:ext uri="{BB962C8B-B14F-4D97-AF65-F5344CB8AC3E}">
-        <p14:creationId xmlns:p14="http://schemas.microsoft.com/office/powerpoint/2010/main" val="354203763"/>
-      </p:ext>
-    </p:extLst>
-  </p:cSld>
-  <p:clrMapOvr>
-    <a:masterClrMapping/>
-  </p:clrMapOvr>
-</p:sld>
-</file>
-
-<file path=ppt/slides/slide2.xml><?xml version="1.0" encoding="utf-8"?>
-<p:sld xmlns:a="http://schemas.openxmlformats.org/drawingml/2006/main" xmlns:r="http://schemas.openxmlformats.org/officeDocument/2006/relationships" xmlns:p="http://schemas.openxmlformats.org/presentationml/2006/main">
-  <p:cSld>
-    <p:spTree>
-      <p:nvGrpSpPr>
-        <p:cNvPr id="1" name=""/>
-        <p:cNvGrpSpPr/>
-        <p:nvPr/>
-      </p:nvGrpSpPr>
-      <p:grpSpPr>
-        <a:xfrm>
-          <a:off x="0" y="0"/>
-          <a:ext cx="0" cy="0"/>
-          <a:chOff x="0" y="0"/>
-          <a:chExt cx="0" cy="0"/>
-        </a:xfrm>
-      </p:grpSpPr>
-      <p:sp>
-        <p:nvSpPr>
-          <p:cNvPr id="2" name="Title 1">
-            <a:extLst>
-              <a:ext uri="{FF2B5EF4-FFF2-40B4-BE49-F238E27FC236}">
-                <a16:creationId xmlns:a16="http://schemas.microsoft.com/office/drawing/2014/main" id="{36350338-C315-D975-5D8F-2109AEE0C6F2}"/>
-              </a:ext>
-            </a:extLst>
-          </p:cNvPr>
-          <p:cNvSpPr>
-            <a:spLocks noGrp="1"/>
-          </p:cNvSpPr>
-          <p:nvPr>
-            <p:ph type="title"/>
-          </p:nvPr>
-        </p:nvSpPr>
-        <p:spPr/>
-        <p:txBody>
-          <a:bodyPr/>
-          <a:lstStyle/>
-          <a:p>
-            <a:r>
-              <a:rPr lang="en-US" dirty="0"/>
-              <a:t>Agenda</a:t>
-            </a:r>
-          </a:p>
-        </p:txBody>
-      </p:sp>
-      <p:sp>
-        <p:nvSpPr>
-          <p:cNvPr id="3" name="Content Placeholder 2">
-            <a:extLst>
-              <a:ext uri="{FF2B5EF4-FFF2-40B4-BE49-F238E27FC236}">
-                <a16:creationId xmlns:a16="http://schemas.microsoft.com/office/drawing/2014/main" id="{CC0E6403-ACCF-DA80-E763-D2DE51B20776}"/>
-              </a:ext>
-            </a:extLst>
-          </p:cNvPr>
-          <p:cNvSpPr>
-            <a:spLocks noGrp="1"/>
-          </p:cNvSpPr>
-          <p:nvPr>
-            <p:ph idx="1"/>
-          </p:nvPr>
-        </p:nvSpPr>
-        <p:spPr/>
-        <p:txBody>
-          <a:bodyPr/>
-          <a:lstStyle/>
-          <a:p>
-            <a:pPr marL="514350" indent="-514350">
-              <a:buFont typeface="+mj-lt"/>
-              <a:buAutoNum type="arabicPeriod"/>
-            </a:pPr>
-            <a:r>
-              <a:rPr lang="en-US" sz="3600" dirty="0"/>
-              <a:t>Background</a:t>
-            </a:r>
-          </a:p>
-          <a:p>
-            <a:pPr marL="514350" indent="-514350">
-              <a:buFont typeface="+mj-lt"/>
-              <a:buAutoNum type="arabicPeriod"/>
-            </a:pPr>
-            <a:r>
-              <a:rPr lang="en-US" sz="3600" dirty="0"/>
-              <a:t>Cloud Migration at Fannie Mae</a:t>
-            </a:r>
-          </a:p>
-          <a:p>
-            <a:pPr marL="514350" indent="-514350">
-              <a:buFont typeface="+mj-lt"/>
-              <a:buAutoNum type="arabicPeriod"/>
-            </a:pPr>
-            <a:r>
-              <a:rPr lang="en-US" sz="3600" dirty="0"/>
-              <a:t>My work in the migration</a:t>
-            </a:r>
-          </a:p>
-          <a:p>
-            <a:pPr marL="514350" indent="-514350">
-              <a:buFont typeface="+mj-lt"/>
-              <a:buAutoNum type="arabicPeriod"/>
-            </a:pPr>
-            <a:r>
-              <a:rPr lang="en-US" sz="3600" dirty="0"/>
-              <a:t>Accuracy and Efficiency </a:t>
-            </a:r>
-          </a:p>
-          <a:p>
-            <a:pPr marL="514350" indent="-514350">
-              <a:buFont typeface="+mj-lt"/>
-              <a:buAutoNum type="arabicPeriod"/>
-            </a:pPr>
-            <a:r>
-              <a:rPr lang="en-US" sz="3600" dirty="0"/>
-              <a:t>Gen AI and future of code conversion</a:t>
-            </a:r>
-          </a:p>
-          <a:p>
-            <a:endParaRPr lang="en-US" dirty="0"/>
-          </a:p>
-          <a:p>
-            <a:endParaRPr lang="en-US" dirty="0"/>
-          </a:p>
-        </p:txBody>
-      </p:sp>
-    </p:spTree>
-    <p:extLst>
-      <p:ext uri="{BB962C8B-B14F-4D97-AF65-F5344CB8AC3E}">
-        <p14:creationId xmlns:p14="http://schemas.microsoft.com/office/powerpoint/2010/main" val="4015355743"/>
-      </p:ext>
-    </p:extLst>
-  </p:cSld>
-  <p:clrMapOvr>
-    <a:masterClrMapping/>
-  </p:clrMapOvr>
-</p:sld>
-</file>
-
-<file path=ppt/slides/slide3.xml><?xml version="1.0" encoding="utf-8"?>
-<p:sld xmlns:a="http://schemas.openxmlformats.org/drawingml/2006/main" xmlns:r="http://schemas.openxmlformats.org/officeDocument/2006/relationships" xmlns:p="http://schemas.openxmlformats.org/presentationml/2006/main">
-  <p:cSld>
-    <p:spTree>
-      <p:nvGrpSpPr>
-        <p:cNvPr id="1" name=""/>
-        <p:cNvGrpSpPr/>
-        <p:nvPr/>
-      </p:nvGrpSpPr>
-      <p:grpSpPr>
-        <a:xfrm>
-          <a:off x="0" y="0"/>
-          <a:ext cx="0" cy="0"/>
-          <a:chOff x="0" y="0"/>
-          <a:chExt cx="0" cy="0"/>
-        </a:xfrm>
-      </p:grpSpPr>
-      <p:sp>
-        <p:nvSpPr>
-          <p:cNvPr id="2" name="Title 1">
-            <a:extLst>
-              <a:ext uri="{FF2B5EF4-FFF2-40B4-BE49-F238E27FC236}">
-                <a16:creationId xmlns:a16="http://schemas.microsoft.com/office/drawing/2014/main" id="{77E4F433-6378-4049-F2C3-EE92E0049A7B}"/>
-              </a:ext>
-            </a:extLst>
-          </p:cNvPr>
-          <p:cNvSpPr>
-            <a:spLocks noGrp="1"/>
-          </p:cNvSpPr>
-          <p:nvPr>
-            <p:ph type="title"/>
-          </p:nvPr>
-        </p:nvSpPr>
-        <p:spPr/>
-        <p:txBody>
-          <a:bodyPr/>
-          <a:lstStyle/>
-          <a:p>
-            <a:r>
-              <a:rPr lang="en-US" dirty="0"/>
-              <a:t>1.Background</a:t>
-            </a:r>
-          </a:p>
-        </p:txBody>
-      </p:sp>
-      <p:sp>
-        <p:nvSpPr>
-          <p:cNvPr id="3" name="Content Placeholder 2">
-            <a:extLst>
-              <a:ext uri="{FF2B5EF4-FFF2-40B4-BE49-F238E27FC236}">
-                <a16:creationId xmlns:a16="http://schemas.microsoft.com/office/drawing/2014/main" id="{FF3838B1-29DE-A684-2D91-585BAAF4FB7E}"/>
-              </a:ext>
-            </a:extLst>
-          </p:cNvPr>
-          <p:cNvSpPr>
-            <a:spLocks noGrp="1"/>
-          </p:cNvSpPr>
-          <p:nvPr>
-            <p:ph idx="1"/>
-          </p:nvPr>
-        </p:nvSpPr>
-        <p:spPr>
-          <a:xfrm>
-            <a:off x="838200" y="1825625"/>
-            <a:ext cx="10515600" cy="585066"/>
-          </a:xfrm>
-        </p:spPr>
-        <p:txBody>
-          <a:bodyPr/>
-          <a:lstStyle/>
-          <a:p>
-            <a:r>
-              <a:rPr lang="en-US" dirty="0"/>
-              <a:t>What is the problem and why</a:t>
-            </a:r>
-          </a:p>
-          <a:p>
-            <a:endParaRPr lang="en-US" dirty="0"/>
-          </a:p>
-        </p:txBody>
-      </p:sp>
-      <p:pic>
-        <p:nvPicPr>
-          <p:cNvPr id="4" name="Picture 3">
-            <a:extLst>
-              <a:ext uri="{FF2B5EF4-FFF2-40B4-BE49-F238E27FC236}">
-                <a16:creationId xmlns:a16="http://schemas.microsoft.com/office/drawing/2014/main" id="{BCDAE49C-C251-F75B-7AAE-63C6E1173405}"/>
-              </a:ext>
-            </a:extLst>
-          </p:cNvPr>
-          <p:cNvPicPr>
-            <a:picLocks noChangeAspect="1"/>
-          </p:cNvPicPr>
-          <p:nvPr/>
-        </p:nvPicPr>
-        <p:blipFill>
-          <a:blip r:embed="rId2"/>
-          <a:stretch>
-            <a:fillRect/>
-          </a:stretch>
-        </p:blipFill>
-        <p:spPr>
-          <a:xfrm>
-            <a:off x="710400" y="2273598"/>
-            <a:ext cx="2638011" cy="1384610"/>
-          </a:xfrm>
-          <a:prstGeom prst="rect">
-            <a:avLst/>
-          </a:prstGeom>
-        </p:spPr>
-      </p:pic>
-      <p:pic>
-        <p:nvPicPr>
-          <p:cNvPr id="5" name="Picture 4">
-            <a:extLst>
-              <a:ext uri="{FF2B5EF4-FFF2-40B4-BE49-F238E27FC236}">
-                <a16:creationId xmlns:a16="http://schemas.microsoft.com/office/drawing/2014/main" id="{108087BF-A1B2-3CB3-9920-38BE92E30EDC}"/>
-              </a:ext>
-            </a:extLst>
-          </p:cNvPr>
-          <p:cNvPicPr>
-            <a:picLocks noChangeAspect="1"/>
-          </p:cNvPicPr>
-          <p:nvPr/>
-        </p:nvPicPr>
-        <p:blipFill>
-          <a:blip r:embed="rId3"/>
-          <a:stretch>
-            <a:fillRect/>
-          </a:stretch>
-        </p:blipFill>
-        <p:spPr>
-          <a:xfrm>
-            <a:off x="931236" y="3623715"/>
-            <a:ext cx="1290890" cy="861801"/>
-          </a:xfrm>
-          <a:prstGeom prst="rect">
-            <a:avLst/>
-          </a:prstGeom>
-        </p:spPr>
-      </p:pic>
-      <p:pic>
-        <p:nvPicPr>
-          <p:cNvPr id="6" name="Picture 5">
-            <a:extLst>
-              <a:ext uri="{FF2B5EF4-FFF2-40B4-BE49-F238E27FC236}">
-                <a16:creationId xmlns:a16="http://schemas.microsoft.com/office/drawing/2014/main" id="{8D1A128A-3E1F-2F81-712A-3809EA2ACB2A}"/>
-              </a:ext>
-            </a:extLst>
-          </p:cNvPr>
-          <p:cNvPicPr>
-            <a:picLocks noChangeAspect="1"/>
-          </p:cNvPicPr>
-          <p:nvPr/>
-        </p:nvPicPr>
-        <p:blipFill>
-          <a:blip r:embed="rId4"/>
-          <a:stretch>
-            <a:fillRect/>
-          </a:stretch>
-        </p:blipFill>
-        <p:spPr>
-          <a:xfrm>
-            <a:off x="6969180" y="1690688"/>
-            <a:ext cx="4512420" cy="3736848"/>
-          </a:xfrm>
-          <a:prstGeom prst="rect">
-            <a:avLst/>
-          </a:prstGeom>
-        </p:spPr>
-      </p:pic>
-      <p:sp>
-        <p:nvSpPr>
-          <p:cNvPr id="8" name="TextBox 7">
-            <a:extLst>
-              <a:ext uri="{FF2B5EF4-FFF2-40B4-BE49-F238E27FC236}">
-                <a16:creationId xmlns:a16="http://schemas.microsoft.com/office/drawing/2014/main" id="{1302E16F-7A83-3FFA-BF0B-8B32BA61716B}"/>
-              </a:ext>
-            </a:extLst>
-          </p:cNvPr>
-          <p:cNvSpPr txBox="1"/>
-          <p:nvPr/>
-        </p:nvSpPr>
-        <p:spPr>
-          <a:xfrm>
-            <a:off x="7985760" y="931768"/>
-            <a:ext cx="2950755" cy="369332"/>
-          </a:xfrm>
-          <a:prstGeom prst="rect">
-            <a:avLst/>
-          </a:prstGeom>
-          <a:noFill/>
-        </p:spPr>
-        <p:txBody>
-          <a:bodyPr wrap="square">
-            <a:spAutoFit/>
-          </a:bodyPr>
-          <a:lstStyle/>
-          <a:p>
-            <a:r>
-              <a:rPr lang="en-US" dirty="0"/>
-              <a:t>7 Rs in AWS Cloud Migration</a:t>
-            </a:r>
-          </a:p>
-        </p:txBody>
-      </p:sp>
-      <p:pic>
-        <p:nvPicPr>
-          <p:cNvPr id="7" name="Picture 6">
-            <a:extLst>
-              <a:ext uri="{FF2B5EF4-FFF2-40B4-BE49-F238E27FC236}">
-                <a16:creationId xmlns:a16="http://schemas.microsoft.com/office/drawing/2014/main" id="{C5282124-3EF7-4252-3560-5FC11F8C46FF}"/>
-              </a:ext>
-            </a:extLst>
-          </p:cNvPr>
-          <p:cNvPicPr>
-            <a:picLocks noChangeAspect="1"/>
-          </p:cNvPicPr>
-          <p:nvPr/>
-        </p:nvPicPr>
-        <p:blipFill>
-          <a:blip r:embed="rId5"/>
-          <a:stretch>
-            <a:fillRect/>
-          </a:stretch>
-        </p:blipFill>
-        <p:spPr>
-          <a:xfrm>
-            <a:off x="931236" y="5194362"/>
-            <a:ext cx="1877291" cy="769689"/>
-          </a:xfrm>
-          <a:prstGeom prst="rect">
-            <a:avLst/>
-          </a:prstGeom>
-        </p:spPr>
-      </p:pic>
-      <p:pic>
-        <p:nvPicPr>
-          <p:cNvPr id="9" name="Picture 8">
-            <a:extLst>
-              <a:ext uri="{FF2B5EF4-FFF2-40B4-BE49-F238E27FC236}">
-                <a16:creationId xmlns:a16="http://schemas.microsoft.com/office/drawing/2014/main" id="{E37C989E-9BF8-3A3A-3F0C-0FFB67224333}"/>
-              </a:ext>
-            </a:extLst>
-          </p:cNvPr>
-          <p:cNvPicPr>
-            <a:picLocks noChangeAspect="1"/>
-          </p:cNvPicPr>
-          <p:nvPr/>
-        </p:nvPicPr>
-        <p:blipFill>
-          <a:blip r:embed="rId6"/>
-          <a:stretch>
-            <a:fillRect/>
-          </a:stretch>
-        </p:blipFill>
-        <p:spPr>
-          <a:xfrm>
-            <a:off x="3817118" y="3501925"/>
-            <a:ext cx="2143471" cy="803156"/>
-          </a:xfrm>
-          <a:prstGeom prst="rect">
-            <a:avLst/>
-          </a:prstGeom>
-        </p:spPr>
-      </p:pic>
-      <p:pic>
-        <p:nvPicPr>
-          <p:cNvPr id="10" name="Picture 9">
-            <a:extLst>
-              <a:ext uri="{FF2B5EF4-FFF2-40B4-BE49-F238E27FC236}">
-                <a16:creationId xmlns:a16="http://schemas.microsoft.com/office/drawing/2014/main" id="{0DBA16AA-692D-7041-DE6B-C2AAAA535BBC}"/>
-              </a:ext>
-            </a:extLst>
-          </p:cNvPr>
-          <p:cNvPicPr>
-            <a:picLocks noChangeAspect="1"/>
-          </p:cNvPicPr>
-          <p:nvPr/>
-        </p:nvPicPr>
-        <p:blipFill>
-          <a:blip r:embed="rId7"/>
-          <a:stretch>
-            <a:fillRect/>
-          </a:stretch>
-        </p:blipFill>
-        <p:spPr>
-          <a:xfrm>
-            <a:off x="3791690" y="4997264"/>
-            <a:ext cx="2862262" cy="966787"/>
-          </a:xfrm>
-          <a:prstGeom prst="rect">
-            <a:avLst/>
-          </a:prstGeom>
-        </p:spPr>
-      </p:pic>
-    </p:spTree>
-    <p:extLst>
-      <p:ext uri="{BB962C8B-B14F-4D97-AF65-F5344CB8AC3E}">
-        <p14:creationId xmlns:p14="http://schemas.microsoft.com/office/powerpoint/2010/main" val="2985780587"/>
-      </p:ext>
-    </p:extLst>
-  </p:cSld>
-  <p:clrMapOvr>
-    <a:masterClrMapping/>
-  </p:clrMapOvr>
-</p:sld>
-</file>
-
-<file path=ppt/slides/slide4.xml><?xml version="1.0" encoding="utf-8"?>
-<p:sld xmlns:a="http://schemas.openxmlformats.org/drawingml/2006/main" xmlns:r="http://schemas.openxmlformats.org/officeDocument/2006/relationships" xmlns:p="http://schemas.openxmlformats.org/presentationml/2006/main">
-  <p:cSld>
-    <p:spTree>
-      <p:nvGrpSpPr>
-        <p:cNvPr id="1" name=""/>
-        <p:cNvGrpSpPr/>
-        <p:nvPr/>
-      </p:nvGrpSpPr>
-      <p:grpSpPr>
-        <a:xfrm>
-          <a:off x="0" y="0"/>
-          <a:ext cx="0" cy="0"/>
-          <a:chOff x="0" y="0"/>
-          <a:chExt cx="0" cy="0"/>
-        </a:xfrm>
-      </p:grpSpPr>
-      <p:sp>
-        <p:nvSpPr>
-          <p:cNvPr id="2" name="Title 1">
-            <a:extLst>
-              <a:ext uri="{FF2B5EF4-FFF2-40B4-BE49-F238E27FC236}">
-                <a16:creationId xmlns:a16="http://schemas.microsoft.com/office/drawing/2014/main" id="{BA84EECB-BE89-FA10-B559-C2D06E9BFD18}"/>
-              </a:ext>
-            </a:extLst>
-          </p:cNvPr>
-          <p:cNvSpPr>
-            <a:spLocks noGrp="1"/>
-          </p:cNvSpPr>
-          <p:nvPr>
-            <p:ph type="title"/>
-          </p:nvPr>
-        </p:nvSpPr>
-        <p:spPr/>
-        <p:txBody>
-          <a:bodyPr/>
-          <a:lstStyle/>
-          <a:p>
-            <a:r>
-              <a:rPr lang="en-US" dirty="0"/>
-              <a:t>2.Cloud Migration in Fannie Mae</a:t>
-            </a:r>
-          </a:p>
-        </p:txBody>
-      </p:sp>
-      <p:sp>
-        <p:nvSpPr>
-          <p:cNvPr id="3" name="Content Placeholder 2">
-            <a:extLst>
-              <a:ext uri="{FF2B5EF4-FFF2-40B4-BE49-F238E27FC236}">
-                <a16:creationId xmlns:a16="http://schemas.microsoft.com/office/drawing/2014/main" id="{D79C73C9-79BC-BE4B-D99B-67D620D66A20}"/>
-              </a:ext>
-            </a:extLst>
-          </p:cNvPr>
-          <p:cNvSpPr>
-            <a:spLocks noGrp="1"/>
-          </p:cNvSpPr>
-          <p:nvPr>
-            <p:ph idx="1"/>
-          </p:nvPr>
-        </p:nvSpPr>
-        <p:spPr/>
-        <p:txBody>
-          <a:bodyPr/>
-          <a:lstStyle/>
-          <a:p>
-            <a:r>
-              <a:rPr lang="en-US" dirty="0"/>
-              <a:t>What has been done about it?</a:t>
-            </a:r>
-          </a:p>
-          <a:p>
-            <a:endParaRPr lang="en-US" dirty="0"/>
-          </a:p>
-        </p:txBody>
-      </p:sp>
-    </p:spTree>
-    <p:extLst>
-      <p:ext uri="{BB962C8B-B14F-4D97-AF65-F5344CB8AC3E}">
-        <p14:creationId xmlns:p14="http://schemas.microsoft.com/office/powerpoint/2010/main" val="3421866799"/>
-      </p:ext>
-    </p:extLst>
-  </p:cSld>
-  <p:clrMapOvr>
-    <a:masterClrMapping/>
-  </p:clrMapOvr>
-</p:sld>
-</file>
-
-<file path=ppt/slides/slide5.xml><?xml version="1.0" encoding="utf-8"?>
-<p:sld xmlns:a="http://schemas.openxmlformats.org/drawingml/2006/main" xmlns:r="http://schemas.openxmlformats.org/officeDocument/2006/relationships" xmlns:p="http://schemas.openxmlformats.org/presentationml/2006/main">
-  <p:cSld>
-    <p:spTree>
-      <p:nvGrpSpPr>
-        <p:cNvPr id="1" name=""/>
-        <p:cNvGrpSpPr/>
-        <p:nvPr/>
-      </p:nvGrpSpPr>
-      <p:grpSpPr>
-        <a:xfrm>
-          <a:off x="0" y="0"/>
-          <a:ext cx="0" cy="0"/>
-          <a:chOff x="0" y="0"/>
-          <a:chExt cx="0" cy="0"/>
-        </a:xfrm>
-      </p:grpSpPr>
-      <p:sp>
-        <p:nvSpPr>
-          <p:cNvPr id="2" name="Title 1">
-            <a:extLst>
-              <a:ext uri="{FF2B5EF4-FFF2-40B4-BE49-F238E27FC236}">
-                <a16:creationId xmlns:a16="http://schemas.microsoft.com/office/drawing/2014/main" id="{8DB06789-BA5D-116A-9606-AAEF943A72D0}"/>
-              </a:ext>
-            </a:extLst>
-          </p:cNvPr>
-          <p:cNvSpPr>
-            <a:spLocks noGrp="1"/>
-          </p:cNvSpPr>
-          <p:nvPr>
-            <p:ph type="title"/>
-          </p:nvPr>
-        </p:nvSpPr>
-        <p:spPr/>
-        <p:txBody>
-          <a:bodyPr/>
-          <a:lstStyle/>
-          <a:p>
-            <a:r>
-              <a:rPr lang="en-US" dirty="0"/>
-              <a:t>Steps for refactoring</a:t>
-            </a:r>
-          </a:p>
-        </p:txBody>
-      </p:sp>
-      <p:graphicFrame>
-        <p:nvGraphicFramePr>
-          <p:cNvPr id="10" name="Content Placeholder 9">
-            <a:extLst>
-              <a:ext uri="{FF2B5EF4-FFF2-40B4-BE49-F238E27FC236}">
-                <a16:creationId xmlns:a16="http://schemas.microsoft.com/office/drawing/2014/main" id="{A65D244A-BC2B-A613-E67C-48CF73C5F636}"/>
-              </a:ext>
-            </a:extLst>
-          </p:cNvPr>
-          <p:cNvGraphicFramePr>
-            <a:graphicFrameLocks noGrp="1"/>
-          </p:cNvGraphicFramePr>
-          <p:nvPr>
-            <p:ph idx="1"/>
-            <p:extLst>
-              <p:ext uri="{D42A27DB-BD31-4B8C-83A1-F6EECF244321}">
-                <p14:modId xmlns:p14="http://schemas.microsoft.com/office/powerpoint/2010/main" val="2901776967"/>
-              </p:ext>
-            </p:extLst>
-          </p:nvPr>
-        </p:nvGraphicFramePr>
-        <p:xfrm>
-          <a:off x="146649" y="1525848"/>
-          <a:ext cx="11826815" cy="1705033"/>
-        </p:xfrm>
-        <a:graphic>
-          <a:graphicData uri="http://schemas.openxmlformats.org/drawingml/2006/diagram">
-            <dgm:relIds xmlns:dgm="http://schemas.openxmlformats.org/drawingml/2006/diagram" xmlns:r="http://schemas.openxmlformats.org/officeDocument/2006/relationships" r:dm="rId2" r:lo="rId3" r:qs="rId4" r:cs="rId5"/>
-          </a:graphicData>
-        </a:graphic>
-      </p:graphicFrame>
-      <p:sp>
-        <p:nvSpPr>
-          <p:cNvPr id="12" name="Content Placeholder 2">
-            <a:extLst>
-              <a:ext uri="{FF2B5EF4-FFF2-40B4-BE49-F238E27FC236}">
-                <a16:creationId xmlns:a16="http://schemas.microsoft.com/office/drawing/2014/main" id="{B6AB3908-57C4-C0B7-4C30-8AC2917A9C16}"/>
-              </a:ext>
-            </a:extLst>
-          </p:cNvPr>
-          <p:cNvSpPr txBox="1">
-            <a:spLocks/>
-          </p:cNvSpPr>
-          <p:nvPr/>
-        </p:nvSpPr>
-        <p:spPr>
-          <a:xfrm>
-            <a:off x="146648" y="3079730"/>
-            <a:ext cx="3087153" cy="3200300"/>
-          </a:xfrm>
-          <a:prstGeom prst="rect">
-            <a:avLst/>
-          </a:prstGeom>
-        </p:spPr>
-        <p:txBody>
-          <a:bodyPr vert="horz" lIns="91440" tIns="45720" rIns="91440" bIns="45720" rtlCol="0">
-            <a:normAutofit fontScale="25000" lnSpcReduction="20000"/>
-          </a:bodyPr>
-          <a:lstStyle>
-            <a:lvl1pPr marL="228600" indent="-228600" algn="l" defTabSz="914400" rtl="0" eaLnBrk="1" latinLnBrk="0" hangingPunct="1">
-              <a:lnSpc>
-                <a:spcPct val="90000"/>
-              </a:lnSpc>
-              <a:spcBef>
-                <a:spcPts val="1000"/>
-              </a:spcBef>
-              <a:buFont typeface="Arial" panose="020B0604020202020204" pitchFamily="34" charset="0"/>
-              <a:buChar char="•"/>
-              <a:defRPr sz="2800" kern="1200">
-                <a:solidFill>
-                  <a:schemeClr val="tx1"/>
-                </a:solidFill>
-                <a:latin typeface="+mn-lt"/>
-                <a:ea typeface="+mn-ea"/>
-                <a:cs typeface="+mn-cs"/>
-              </a:defRPr>
-            </a:lvl1pPr>
-            <a:lvl2pPr marL="685800" indent="-228600" algn="l" defTabSz="914400" rtl="0" eaLnBrk="1" latinLnBrk="0" hangingPunct="1">
-              <a:lnSpc>
-                <a:spcPct val="90000"/>
-              </a:lnSpc>
-              <a:spcBef>
-                <a:spcPts val="500"/>
-              </a:spcBef>
-              <a:buFont typeface="Arial" panose="020B0604020202020204" pitchFamily="34" charset="0"/>
-              <a:buChar char="•"/>
-              <a:defRPr sz="2400" kern="1200">
-                <a:solidFill>
-                  <a:schemeClr val="tx1"/>
-                </a:solidFill>
-                <a:latin typeface="+mn-lt"/>
-                <a:ea typeface="+mn-ea"/>
-                <a:cs typeface="+mn-cs"/>
-              </a:defRPr>
-            </a:lvl2pPr>
-            <a:lvl3pPr marL="1143000" indent="-228600" algn="l" defTabSz="914400" rtl="0" eaLnBrk="1" latinLnBrk="0" hangingPunct="1">
-              <a:lnSpc>
-                <a:spcPct val="90000"/>
-              </a:lnSpc>
-              <a:spcBef>
-                <a:spcPts val="500"/>
-              </a:spcBef>
-              <a:buFont typeface="Arial" panose="020B0604020202020204" pitchFamily="34" charset="0"/>
-              <a:buChar char="•"/>
-              <a:defRPr sz="2000" kern="1200">
-                <a:solidFill>
-                  <a:schemeClr val="tx1"/>
-                </a:solidFill>
-                <a:latin typeface="+mn-lt"/>
-                <a:ea typeface="+mn-ea"/>
-                <a:cs typeface="+mn-cs"/>
-              </a:defRPr>
-            </a:lvl3pPr>
-            <a:lvl4pPr marL="1600200" indent="-228600" algn="l" defTabSz="914400" rtl="0" eaLnBrk="1" latinLnBrk="0" hangingPunct="1">
-              <a:lnSpc>
-                <a:spcPct val="90000"/>
-              </a:lnSpc>
-              <a:spcBef>
-                <a:spcPts val="500"/>
-              </a:spcBef>
-              <a:buFont typeface="Arial" panose="020B0604020202020204" pitchFamily="34" charset="0"/>
-              <a:buChar char="•"/>
-              <a:defRPr sz="1800" kern="1200">
-                <a:solidFill>
-                  <a:schemeClr val="tx1"/>
-                </a:solidFill>
-                <a:latin typeface="+mn-lt"/>
-                <a:ea typeface="+mn-ea"/>
-                <a:cs typeface="+mn-cs"/>
-              </a:defRPr>
-            </a:lvl4pPr>
-            <a:lvl5pPr marL="2057400" indent="-228600" algn="l" defTabSz="914400" rtl="0" eaLnBrk="1" latinLnBrk="0" hangingPunct="1">
-              <a:lnSpc>
-                <a:spcPct val="90000"/>
-              </a:lnSpc>
-              <a:spcBef>
-                <a:spcPts val="500"/>
-              </a:spcBef>
-              <a:buFont typeface="Arial" panose="020B0604020202020204" pitchFamily="34" charset="0"/>
-              <a:buChar char="•"/>
-              <a:defRPr sz="1800" kern="1200">
-                <a:solidFill>
-                  <a:schemeClr val="tx1"/>
-                </a:solidFill>
-                <a:latin typeface="+mn-lt"/>
-                <a:ea typeface="+mn-ea"/>
-                <a:cs typeface="+mn-cs"/>
-              </a:defRPr>
-            </a:lvl5pPr>
-            <a:lvl6pPr marL="2514600" indent="-228600" algn="l" defTabSz="914400" rtl="0" eaLnBrk="1" latinLnBrk="0" hangingPunct="1">
-              <a:lnSpc>
-                <a:spcPct val="90000"/>
-              </a:lnSpc>
-              <a:spcBef>
-                <a:spcPts val="500"/>
-              </a:spcBef>
-              <a:buFont typeface="Arial" panose="020B0604020202020204" pitchFamily="34" charset="0"/>
-              <a:buChar char="•"/>
-              <a:defRPr sz="1800" kern="1200">
-                <a:solidFill>
-                  <a:schemeClr val="tx1"/>
-                </a:solidFill>
-                <a:latin typeface="+mn-lt"/>
-                <a:ea typeface="+mn-ea"/>
-                <a:cs typeface="+mn-cs"/>
-              </a:defRPr>
-            </a:lvl6pPr>
-            <a:lvl7pPr marL="2971800" indent="-228600" algn="l" defTabSz="914400" rtl="0" eaLnBrk="1" latinLnBrk="0" hangingPunct="1">
-              <a:lnSpc>
-                <a:spcPct val="90000"/>
-              </a:lnSpc>
-              <a:spcBef>
-                <a:spcPts val="500"/>
-              </a:spcBef>
-              <a:buFont typeface="Arial" panose="020B0604020202020204" pitchFamily="34" charset="0"/>
-              <a:buChar char="•"/>
-              <a:defRPr sz="1800" kern="1200">
-                <a:solidFill>
-                  <a:schemeClr val="tx1"/>
-                </a:solidFill>
-                <a:latin typeface="+mn-lt"/>
-                <a:ea typeface="+mn-ea"/>
-                <a:cs typeface="+mn-cs"/>
-              </a:defRPr>
-            </a:lvl7pPr>
-            <a:lvl8pPr marL="3429000" indent="-228600" algn="l" defTabSz="914400" rtl="0" eaLnBrk="1" latinLnBrk="0" hangingPunct="1">
-              <a:lnSpc>
-                <a:spcPct val="90000"/>
-              </a:lnSpc>
-              <a:spcBef>
-                <a:spcPts val="500"/>
-              </a:spcBef>
-              <a:buFont typeface="Arial" panose="020B0604020202020204" pitchFamily="34" charset="0"/>
-              <a:buChar char="•"/>
-              <a:defRPr sz="1800" kern="1200">
-                <a:solidFill>
-                  <a:schemeClr val="tx1"/>
-                </a:solidFill>
-                <a:latin typeface="+mn-lt"/>
-                <a:ea typeface="+mn-ea"/>
-                <a:cs typeface="+mn-cs"/>
-              </a:defRPr>
-            </a:lvl8pPr>
-            <a:lvl9pPr marL="3886200" indent="-228600" algn="l" defTabSz="914400" rtl="0" eaLnBrk="1" latinLnBrk="0" hangingPunct="1">
-              <a:lnSpc>
-                <a:spcPct val="90000"/>
-              </a:lnSpc>
-              <a:spcBef>
-                <a:spcPts val="500"/>
-              </a:spcBef>
-              <a:buFont typeface="Arial" panose="020B0604020202020204" pitchFamily="34" charset="0"/>
-              <a:buChar char="•"/>
-              <a:defRPr sz="1800" kern="1200">
-                <a:solidFill>
-                  <a:schemeClr val="tx1"/>
-                </a:solidFill>
-                <a:latin typeface="+mn-lt"/>
-                <a:ea typeface="+mn-ea"/>
-                <a:cs typeface="+mn-cs"/>
-              </a:defRPr>
-            </a:lvl9pPr>
-          </a:lstStyle>
-          <a:p>
-            <a:r>
-              <a:rPr lang="en-US" sz="7400" dirty="0"/>
-              <a:t>Convert sas7bdat to </a:t>
-            </a:r>
-            <a:r>
-              <a:rPr lang="en-US" sz="7400" dirty="0" err="1"/>
-              <a:t>rds</a:t>
-            </a:r>
-            <a:endParaRPr lang="en-US" sz="7400" dirty="0"/>
-          </a:p>
-          <a:p>
-            <a:r>
-              <a:rPr lang="en-US" sz="7400" dirty="0"/>
-              <a:t>Import dataset</a:t>
-            </a:r>
-          </a:p>
-          <a:p>
-            <a:r>
-              <a:rPr lang="en-US" sz="7400" dirty="0"/>
-              <a:t>Data format: sas7bdat/</a:t>
-            </a:r>
-            <a:r>
-              <a:rPr lang="en-US" sz="7400" dirty="0" err="1"/>
-              <a:t>rds</a:t>
-            </a:r>
-            <a:r>
-              <a:rPr lang="en-US" sz="7400" dirty="0"/>
-              <a:t>/parquet</a:t>
-            </a:r>
-          </a:p>
-          <a:p>
-            <a:endParaRPr lang="en-US" sz="7400" dirty="0"/>
-          </a:p>
-          <a:p>
-            <a:r>
-              <a:rPr lang="en-US" sz="7400" dirty="0"/>
-              <a:t>date/month/time,</a:t>
-            </a:r>
-          </a:p>
-          <a:p>
-            <a:r>
-              <a:rPr lang="en-US" altLang="zh-CN" sz="7400" dirty="0"/>
-              <a:t>Origin date</a:t>
-            </a:r>
-            <a:endParaRPr lang="en-US" sz="7400" dirty="0"/>
-          </a:p>
-          <a:p>
-            <a:r>
-              <a:rPr lang="en-US" sz="7400" dirty="0"/>
-              <a:t>missing values, </a:t>
-            </a:r>
-          </a:p>
-          <a:p>
-            <a:r>
-              <a:rPr lang="en-US" sz="7400" dirty="0"/>
-              <a:t>N/A </a:t>
-            </a:r>
-          </a:p>
-          <a:p>
-            <a:r>
-              <a:rPr lang="en-US" sz="7400" dirty="0"/>
-              <a:t>Updated monthly</a:t>
-            </a:r>
-          </a:p>
-          <a:p>
-            <a:endParaRPr lang="en-US" dirty="0"/>
-          </a:p>
-        </p:txBody>
-      </p:sp>
-      <p:sp>
-        <p:nvSpPr>
-          <p:cNvPr id="13" name="Content Placeholder 2">
-            <a:extLst>
-              <a:ext uri="{FF2B5EF4-FFF2-40B4-BE49-F238E27FC236}">
-                <a16:creationId xmlns:a16="http://schemas.microsoft.com/office/drawing/2014/main" id="{F1472C4E-723B-DF16-860A-479E2B15B381}"/>
-              </a:ext>
-            </a:extLst>
-          </p:cNvPr>
-          <p:cNvSpPr txBox="1">
-            <a:spLocks/>
-          </p:cNvSpPr>
-          <p:nvPr/>
-        </p:nvSpPr>
-        <p:spPr>
-          <a:xfrm>
-            <a:off x="3260785" y="3079730"/>
-            <a:ext cx="3022456" cy="3413145"/>
-          </a:xfrm>
-          <a:prstGeom prst="rect">
-            <a:avLst/>
-          </a:prstGeom>
-        </p:spPr>
-        <p:txBody>
-          <a:bodyPr vert="horz" lIns="91440" tIns="45720" rIns="91440" bIns="45720" rtlCol="0">
-            <a:normAutofit fontScale="92500" lnSpcReduction="10000"/>
-          </a:bodyPr>
-          <a:lstStyle>
-            <a:lvl1pPr marL="228600" indent="-228600" algn="l" defTabSz="914400" rtl="0" eaLnBrk="1" latinLnBrk="0" hangingPunct="1">
-              <a:lnSpc>
-                <a:spcPct val="90000"/>
-              </a:lnSpc>
-              <a:spcBef>
-                <a:spcPts val="1000"/>
-              </a:spcBef>
-              <a:buFont typeface="Arial" panose="020B0604020202020204" pitchFamily="34" charset="0"/>
-              <a:buChar char="•"/>
-              <a:defRPr sz="2800" kern="1200">
-                <a:solidFill>
-                  <a:schemeClr val="tx1"/>
-                </a:solidFill>
-                <a:latin typeface="+mn-lt"/>
-                <a:ea typeface="+mn-ea"/>
-                <a:cs typeface="+mn-cs"/>
-              </a:defRPr>
-            </a:lvl1pPr>
-            <a:lvl2pPr marL="685800" indent="-228600" algn="l" defTabSz="914400" rtl="0" eaLnBrk="1" latinLnBrk="0" hangingPunct="1">
-              <a:lnSpc>
-                <a:spcPct val="90000"/>
-              </a:lnSpc>
-              <a:spcBef>
-                <a:spcPts val="500"/>
-              </a:spcBef>
-              <a:buFont typeface="Arial" panose="020B0604020202020204" pitchFamily="34" charset="0"/>
-              <a:buChar char="•"/>
-              <a:defRPr sz="2400" kern="1200">
-                <a:solidFill>
-                  <a:schemeClr val="tx1"/>
-                </a:solidFill>
-                <a:latin typeface="+mn-lt"/>
-                <a:ea typeface="+mn-ea"/>
-                <a:cs typeface="+mn-cs"/>
-              </a:defRPr>
-            </a:lvl2pPr>
-            <a:lvl3pPr marL="1143000" indent="-228600" algn="l" defTabSz="914400" rtl="0" eaLnBrk="1" latinLnBrk="0" hangingPunct="1">
-              <a:lnSpc>
-                <a:spcPct val="90000"/>
-              </a:lnSpc>
-              <a:spcBef>
-                <a:spcPts val="500"/>
-              </a:spcBef>
-              <a:buFont typeface="Arial" panose="020B0604020202020204" pitchFamily="34" charset="0"/>
-              <a:buChar char="•"/>
-              <a:defRPr sz="2000" kern="1200">
-                <a:solidFill>
-                  <a:schemeClr val="tx1"/>
-                </a:solidFill>
-                <a:latin typeface="+mn-lt"/>
-                <a:ea typeface="+mn-ea"/>
-                <a:cs typeface="+mn-cs"/>
-              </a:defRPr>
-            </a:lvl3pPr>
-            <a:lvl4pPr marL="1600200" indent="-228600" algn="l" defTabSz="914400" rtl="0" eaLnBrk="1" latinLnBrk="0" hangingPunct="1">
-              <a:lnSpc>
-                <a:spcPct val="90000"/>
-              </a:lnSpc>
-              <a:spcBef>
-                <a:spcPts val="500"/>
-              </a:spcBef>
-              <a:buFont typeface="Arial" panose="020B0604020202020204" pitchFamily="34" charset="0"/>
-              <a:buChar char="•"/>
-              <a:defRPr sz="1800" kern="1200">
-                <a:solidFill>
-                  <a:schemeClr val="tx1"/>
-                </a:solidFill>
-                <a:latin typeface="+mn-lt"/>
-                <a:ea typeface="+mn-ea"/>
-                <a:cs typeface="+mn-cs"/>
-              </a:defRPr>
-            </a:lvl4pPr>
-            <a:lvl5pPr marL="2057400" indent="-228600" algn="l" defTabSz="914400" rtl="0" eaLnBrk="1" latinLnBrk="0" hangingPunct="1">
-              <a:lnSpc>
-                <a:spcPct val="90000"/>
-              </a:lnSpc>
-              <a:spcBef>
-                <a:spcPts val="500"/>
-              </a:spcBef>
-              <a:buFont typeface="Arial" panose="020B0604020202020204" pitchFamily="34" charset="0"/>
-              <a:buChar char="•"/>
-              <a:defRPr sz="1800" kern="1200">
-                <a:solidFill>
-                  <a:schemeClr val="tx1"/>
-                </a:solidFill>
-                <a:latin typeface="+mn-lt"/>
-                <a:ea typeface="+mn-ea"/>
-                <a:cs typeface="+mn-cs"/>
-              </a:defRPr>
-            </a:lvl5pPr>
-            <a:lvl6pPr marL="2514600" indent="-228600" algn="l" defTabSz="914400" rtl="0" eaLnBrk="1" latinLnBrk="0" hangingPunct="1">
-              <a:lnSpc>
-                <a:spcPct val="90000"/>
-              </a:lnSpc>
-              <a:spcBef>
-                <a:spcPts val="500"/>
-              </a:spcBef>
-              <a:buFont typeface="Arial" panose="020B0604020202020204" pitchFamily="34" charset="0"/>
-              <a:buChar char="•"/>
-              <a:defRPr sz="1800" kern="1200">
-                <a:solidFill>
-                  <a:schemeClr val="tx1"/>
-                </a:solidFill>
-                <a:latin typeface="+mn-lt"/>
-                <a:ea typeface="+mn-ea"/>
-                <a:cs typeface="+mn-cs"/>
-              </a:defRPr>
-            </a:lvl6pPr>
-            <a:lvl7pPr marL="2971800" indent="-228600" algn="l" defTabSz="914400" rtl="0" eaLnBrk="1" latinLnBrk="0" hangingPunct="1">
-              <a:lnSpc>
-                <a:spcPct val="90000"/>
-              </a:lnSpc>
-              <a:spcBef>
-                <a:spcPts val="500"/>
-              </a:spcBef>
-              <a:buFont typeface="Arial" panose="020B0604020202020204" pitchFamily="34" charset="0"/>
-              <a:buChar char="•"/>
-              <a:defRPr sz="1800" kern="1200">
-                <a:solidFill>
-                  <a:schemeClr val="tx1"/>
-                </a:solidFill>
-                <a:latin typeface="+mn-lt"/>
-                <a:ea typeface="+mn-ea"/>
-                <a:cs typeface="+mn-cs"/>
-              </a:defRPr>
-            </a:lvl7pPr>
-            <a:lvl8pPr marL="3429000" indent="-228600" algn="l" defTabSz="914400" rtl="0" eaLnBrk="1" latinLnBrk="0" hangingPunct="1">
-              <a:lnSpc>
-                <a:spcPct val="90000"/>
-              </a:lnSpc>
-              <a:spcBef>
-                <a:spcPts val="500"/>
-              </a:spcBef>
-              <a:buFont typeface="Arial" panose="020B0604020202020204" pitchFamily="34" charset="0"/>
-              <a:buChar char="•"/>
-              <a:defRPr sz="1800" kern="1200">
-                <a:solidFill>
-                  <a:schemeClr val="tx1"/>
-                </a:solidFill>
-                <a:latin typeface="+mn-lt"/>
-                <a:ea typeface="+mn-ea"/>
-                <a:cs typeface="+mn-cs"/>
-              </a:defRPr>
-            </a:lvl8pPr>
-            <a:lvl9pPr marL="3886200" indent="-228600" algn="l" defTabSz="914400" rtl="0" eaLnBrk="1" latinLnBrk="0" hangingPunct="1">
-              <a:lnSpc>
-                <a:spcPct val="90000"/>
-              </a:lnSpc>
-              <a:spcBef>
-                <a:spcPts val="500"/>
-              </a:spcBef>
-              <a:buFont typeface="Arial" panose="020B0604020202020204" pitchFamily="34" charset="0"/>
-              <a:buChar char="•"/>
-              <a:defRPr sz="1800" kern="1200">
-                <a:solidFill>
-                  <a:schemeClr val="tx1"/>
-                </a:solidFill>
-                <a:latin typeface="+mn-lt"/>
-                <a:ea typeface="+mn-ea"/>
-                <a:cs typeface="+mn-cs"/>
-              </a:defRPr>
-            </a:lvl9pPr>
-          </a:lstStyle>
-          <a:p>
-            <a:r>
-              <a:rPr lang="en-US" sz="2400" dirty="0"/>
-              <a:t>Variables: filter data </a:t>
-            </a:r>
-          </a:p>
-          <a:p>
-            <a:r>
-              <a:rPr lang="en-US" sz="2400" dirty="0"/>
-              <a:t>merge tables</a:t>
-            </a:r>
-          </a:p>
-          <a:p>
-            <a:pPr marL="458788" lvl="1" indent="-342900">
-              <a:buFont typeface="Courier New" panose="02070309020205020404" pitchFamily="49" charset="0"/>
-              <a:buChar char="o"/>
-            </a:pPr>
-            <a:r>
-              <a:rPr lang="en-US" dirty="0"/>
-              <a:t>Concatenate</a:t>
-            </a:r>
-          </a:p>
-          <a:p>
-            <a:pPr marL="458788" lvl="1" indent="-342900">
-              <a:buFont typeface="Courier New" panose="02070309020205020404" pitchFamily="49" charset="0"/>
-              <a:buChar char="o"/>
-            </a:pPr>
-            <a:r>
-              <a:rPr lang="en-US" dirty="0"/>
-              <a:t>match merging (with n= dataset option)</a:t>
-            </a:r>
-          </a:p>
-          <a:p>
-            <a:pPr marL="458788" lvl="1" indent="-342900">
-              <a:buFont typeface="Courier New" panose="02070309020205020404" pitchFamily="49" charset="0"/>
-              <a:buChar char="o"/>
-            </a:pPr>
-            <a:r>
-              <a:rPr lang="en-US" dirty="0"/>
-              <a:t>match merging (if a and b)</a:t>
-            </a:r>
-          </a:p>
-          <a:p>
-            <a:pPr marL="228600" lvl="1">
-              <a:spcBef>
-                <a:spcPts val="1000"/>
-              </a:spcBef>
-            </a:pPr>
-            <a:r>
-              <a:rPr lang="en-US" altLang="zh-CN" dirty="0"/>
-              <a:t>Loops: </a:t>
-            </a:r>
-          </a:p>
-          <a:p>
-            <a:pPr marL="458788" lvl="1" indent="-342900">
-              <a:lnSpc>
-                <a:spcPct val="100000"/>
-              </a:lnSpc>
-              <a:buFont typeface="Courier New" panose="02070309020205020404" pitchFamily="49" charset="0"/>
-              <a:buChar char="o"/>
-            </a:pPr>
-            <a:r>
-              <a:rPr lang="en-US" altLang="zh-CN" dirty="0"/>
-              <a:t>do until</a:t>
-            </a:r>
-          </a:p>
-          <a:p>
-            <a:pPr marL="458788" lvl="1" indent="-342900">
-              <a:lnSpc>
-                <a:spcPct val="100000"/>
-              </a:lnSpc>
-              <a:buFont typeface="Courier New" panose="02070309020205020404" pitchFamily="49" charset="0"/>
-              <a:buChar char="o"/>
-            </a:pPr>
-            <a:r>
-              <a:rPr lang="en-US" dirty="0"/>
-              <a:t>Nested do loops</a:t>
-            </a:r>
-          </a:p>
-        </p:txBody>
-      </p:sp>
-      <p:sp>
-        <p:nvSpPr>
-          <p:cNvPr id="3" name="Content Placeholder 3">
-            <a:extLst>
-              <a:ext uri="{FF2B5EF4-FFF2-40B4-BE49-F238E27FC236}">
-                <a16:creationId xmlns:a16="http://schemas.microsoft.com/office/drawing/2014/main" id="{2A66A781-E17E-6043-235A-E5DF2C57F5D7}"/>
-              </a:ext>
-            </a:extLst>
-          </p:cNvPr>
-          <p:cNvSpPr txBox="1">
-            <a:spLocks/>
-          </p:cNvSpPr>
-          <p:nvPr/>
-        </p:nvSpPr>
-        <p:spPr>
-          <a:xfrm>
-            <a:off x="6310224" y="2923282"/>
-            <a:ext cx="3334107" cy="796805"/>
-          </a:xfrm>
-          <a:prstGeom prst="rect">
-            <a:avLst/>
-          </a:prstGeom>
-        </p:spPr>
-        <p:txBody>
-          <a:bodyPr vert="horz" lIns="91440" tIns="45720" rIns="91440" bIns="45720" rtlCol="0">
-            <a:normAutofit fontScale="55000" lnSpcReduction="20000"/>
-          </a:bodyPr>
-          <a:lstStyle>
-            <a:lvl1pPr marL="228600" indent="-228600" algn="l" defTabSz="914400" rtl="0" eaLnBrk="1" latinLnBrk="0" hangingPunct="1">
-              <a:lnSpc>
-                <a:spcPct val="90000"/>
-              </a:lnSpc>
-              <a:spcBef>
-                <a:spcPts val="1000"/>
-              </a:spcBef>
-              <a:buFont typeface="Arial" panose="020B0604020202020204" pitchFamily="34" charset="0"/>
-              <a:buChar char="•"/>
-              <a:defRPr sz="2800" kern="1200">
-                <a:solidFill>
-                  <a:schemeClr val="tx1"/>
-                </a:solidFill>
-                <a:latin typeface="+mn-lt"/>
-                <a:ea typeface="+mn-ea"/>
-                <a:cs typeface="+mn-cs"/>
-              </a:defRPr>
-            </a:lvl1pPr>
-            <a:lvl2pPr marL="685800" indent="-228600" algn="l" defTabSz="914400" rtl="0" eaLnBrk="1" latinLnBrk="0" hangingPunct="1">
-              <a:lnSpc>
-                <a:spcPct val="90000"/>
-              </a:lnSpc>
-              <a:spcBef>
-                <a:spcPts val="500"/>
-              </a:spcBef>
-              <a:buFont typeface="Arial" panose="020B0604020202020204" pitchFamily="34" charset="0"/>
-              <a:buChar char="•"/>
-              <a:defRPr sz="2400" kern="1200">
-                <a:solidFill>
-                  <a:schemeClr val="tx1"/>
-                </a:solidFill>
-                <a:latin typeface="+mn-lt"/>
-                <a:ea typeface="+mn-ea"/>
-                <a:cs typeface="+mn-cs"/>
-              </a:defRPr>
-            </a:lvl2pPr>
-            <a:lvl3pPr marL="1143000" indent="-228600" algn="l" defTabSz="914400" rtl="0" eaLnBrk="1" latinLnBrk="0" hangingPunct="1">
-              <a:lnSpc>
-                <a:spcPct val="90000"/>
-              </a:lnSpc>
-              <a:spcBef>
-                <a:spcPts val="500"/>
-              </a:spcBef>
-              <a:buFont typeface="Arial" panose="020B0604020202020204" pitchFamily="34" charset="0"/>
-              <a:buChar char="•"/>
-              <a:defRPr sz="2000" kern="1200">
-                <a:solidFill>
-                  <a:schemeClr val="tx1"/>
-                </a:solidFill>
-                <a:latin typeface="+mn-lt"/>
-                <a:ea typeface="+mn-ea"/>
-                <a:cs typeface="+mn-cs"/>
-              </a:defRPr>
-            </a:lvl3pPr>
-            <a:lvl4pPr marL="1600200" indent="-228600" algn="l" defTabSz="914400" rtl="0" eaLnBrk="1" latinLnBrk="0" hangingPunct="1">
-              <a:lnSpc>
-                <a:spcPct val="90000"/>
-              </a:lnSpc>
-              <a:spcBef>
-                <a:spcPts val="500"/>
-              </a:spcBef>
-              <a:buFont typeface="Arial" panose="020B0604020202020204" pitchFamily="34" charset="0"/>
-              <a:buChar char="•"/>
-              <a:defRPr sz="1800" kern="1200">
-                <a:solidFill>
-                  <a:schemeClr val="tx1"/>
-                </a:solidFill>
-                <a:latin typeface="+mn-lt"/>
-                <a:ea typeface="+mn-ea"/>
-                <a:cs typeface="+mn-cs"/>
-              </a:defRPr>
-            </a:lvl4pPr>
-            <a:lvl5pPr marL="2057400" indent="-228600" algn="l" defTabSz="914400" rtl="0" eaLnBrk="1" latinLnBrk="0" hangingPunct="1">
-              <a:lnSpc>
-                <a:spcPct val="90000"/>
-              </a:lnSpc>
-              <a:spcBef>
-                <a:spcPts val="500"/>
-              </a:spcBef>
-              <a:buFont typeface="Arial" panose="020B0604020202020204" pitchFamily="34" charset="0"/>
-              <a:buChar char="•"/>
-              <a:defRPr sz="1800" kern="1200">
-                <a:solidFill>
-                  <a:schemeClr val="tx1"/>
-                </a:solidFill>
-                <a:latin typeface="+mn-lt"/>
-                <a:ea typeface="+mn-ea"/>
-                <a:cs typeface="+mn-cs"/>
-              </a:defRPr>
-            </a:lvl5pPr>
-            <a:lvl6pPr marL="2514600" indent="-228600" algn="l" defTabSz="914400" rtl="0" eaLnBrk="1" latinLnBrk="0" hangingPunct="1">
-              <a:lnSpc>
-                <a:spcPct val="90000"/>
-              </a:lnSpc>
-              <a:spcBef>
-                <a:spcPts val="500"/>
-              </a:spcBef>
-              <a:buFont typeface="Arial" panose="020B0604020202020204" pitchFamily="34" charset="0"/>
-              <a:buChar char="•"/>
-              <a:defRPr sz="1800" kern="1200">
-                <a:solidFill>
-                  <a:schemeClr val="tx1"/>
-                </a:solidFill>
-                <a:latin typeface="+mn-lt"/>
-                <a:ea typeface="+mn-ea"/>
-                <a:cs typeface="+mn-cs"/>
-              </a:defRPr>
-            </a:lvl6pPr>
-            <a:lvl7pPr marL="2971800" indent="-228600" algn="l" defTabSz="914400" rtl="0" eaLnBrk="1" latinLnBrk="0" hangingPunct="1">
-              <a:lnSpc>
-                <a:spcPct val="90000"/>
-              </a:lnSpc>
-              <a:spcBef>
-                <a:spcPts val="500"/>
-              </a:spcBef>
-              <a:buFont typeface="Arial" panose="020B0604020202020204" pitchFamily="34" charset="0"/>
-              <a:buChar char="•"/>
-              <a:defRPr sz="1800" kern="1200">
-                <a:solidFill>
-                  <a:schemeClr val="tx1"/>
-                </a:solidFill>
-                <a:latin typeface="+mn-lt"/>
-                <a:ea typeface="+mn-ea"/>
-                <a:cs typeface="+mn-cs"/>
-              </a:defRPr>
-            </a:lvl7pPr>
-            <a:lvl8pPr marL="3429000" indent="-228600" algn="l" defTabSz="914400" rtl="0" eaLnBrk="1" latinLnBrk="0" hangingPunct="1">
-              <a:lnSpc>
-                <a:spcPct val="90000"/>
-              </a:lnSpc>
-              <a:spcBef>
-                <a:spcPts val="500"/>
-              </a:spcBef>
-              <a:buFont typeface="Arial" panose="020B0604020202020204" pitchFamily="34" charset="0"/>
-              <a:buChar char="•"/>
-              <a:defRPr sz="1800" kern="1200">
-                <a:solidFill>
-                  <a:schemeClr val="tx1"/>
-                </a:solidFill>
-                <a:latin typeface="+mn-lt"/>
-                <a:ea typeface="+mn-ea"/>
-                <a:cs typeface="+mn-cs"/>
-              </a:defRPr>
-            </a:lvl8pPr>
-            <a:lvl9pPr marL="3886200" indent="-228600" algn="l" defTabSz="914400" rtl="0" eaLnBrk="1" latinLnBrk="0" hangingPunct="1">
-              <a:lnSpc>
-                <a:spcPct val="90000"/>
-              </a:lnSpc>
-              <a:spcBef>
-                <a:spcPts val="500"/>
-              </a:spcBef>
-              <a:buFont typeface="Arial" panose="020B0604020202020204" pitchFamily="34" charset="0"/>
-              <a:buChar char="•"/>
-              <a:defRPr sz="1800" kern="1200">
-                <a:solidFill>
-                  <a:schemeClr val="tx1"/>
-                </a:solidFill>
-                <a:latin typeface="+mn-lt"/>
-                <a:ea typeface="+mn-ea"/>
-                <a:cs typeface="+mn-cs"/>
-              </a:defRPr>
-            </a:lvl9pPr>
-          </a:lstStyle>
-          <a:p>
-            <a:r>
-              <a:rPr lang="en-US" dirty="0"/>
-              <a:t>Spline in Linear/logistic regression</a:t>
-            </a:r>
-          </a:p>
-          <a:p>
-            <a:r>
-              <a:rPr lang="en-US" dirty="0"/>
-              <a:t>Two </a:t>
-            </a:r>
-            <a:r>
-              <a:rPr lang="en-US"/>
-              <a:t>step regression</a:t>
-            </a:r>
-            <a:endParaRPr lang="en-US" dirty="0"/>
-          </a:p>
-        </p:txBody>
-      </p:sp>
-    </p:spTree>
-    <p:extLst>
-      <p:ext uri="{BB962C8B-B14F-4D97-AF65-F5344CB8AC3E}">
-        <p14:creationId xmlns:p14="http://schemas.microsoft.com/office/powerpoint/2010/main" val="3588703417"/>
-      </p:ext>
-    </p:extLst>
-  </p:cSld>
-  <p:clrMapOvr>
-    <a:masterClrMapping/>
-  </p:clrMapOvr>
-</p:sld>
-</file>
-
-<file path=ppt/slides/slide6.xml><?xml version="1.0" encoding="utf-8"?>
-<p:sld xmlns:a="http://schemas.openxmlformats.org/drawingml/2006/main" xmlns:r="http://schemas.openxmlformats.org/officeDocument/2006/relationships" xmlns:p="http://schemas.openxmlformats.org/presentationml/2006/main">
-  <p:cSld>
-    <p:spTree>
-      <p:nvGrpSpPr>
-        <p:cNvPr id="1" name="">
-          <a:extLst>
-            <a:ext uri="{FF2B5EF4-FFF2-40B4-BE49-F238E27FC236}">
-              <a16:creationId xmlns:a16="http://schemas.microsoft.com/office/drawing/2014/main" id="{24795404-4793-4153-45B6-147571F0820C}"/>
-            </a:ext>
-          </a:extLst>
-        </p:cNvPr>
-        <p:cNvGrpSpPr/>
-        <p:nvPr/>
-      </p:nvGrpSpPr>
-      <p:grpSpPr>
-        <a:xfrm>
-          <a:off x="0" y="0"/>
-          <a:ext cx="0" cy="0"/>
-          <a:chOff x="0" y="0"/>
-          <a:chExt cx="0" cy="0"/>
-        </a:xfrm>
-      </p:grpSpPr>
-      <p:sp>
-        <p:nvSpPr>
-          <p:cNvPr id="2" name="Title 1">
-            <a:extLst>
-              <a:ext uri="{FF2B5EF4-FFF2-40B4-BE49-F238E27FC236}">
-                <a16:creationId xmlns:a16="http://schemas.microsoft.com/office/drawing/2014/main" id="{A1D02713-65CC-0B2F-4169-1F342A167AE8}"/>
-              </a:ext>
-            </a:extLst>
-          </p:cNvPr>
-          <p:cNvSpPr>
-            <a:spLocks noGrp="1"/>
-          </p:cNvSpPr>
-          <p:nvPr>
-            <p:ph type="title"/>
-          </p:nvPr>
-        </p:nvSpPr>
-        <p:spPr/>
-        <p:txBody>
-          <a:bodyPr/>
-          <a:lstStyle/>
-          <a:p>
-            <a:r>
-              <a:rPr lang="en-US" dirty="0"/>
-              <a:t>Steps for refactoring</a:t>
-            </a:r>
-          </a:p>
-        </p:txBody>
-      </p:sp>
-      <p:sp>
-        <p:nvSpPr>
-          <p:cNvPr id="4" name="Content Placeholder 3">
-            <a:extLst>
-              <a:ext uri="{FF2B5EF4-FFF2-40B4-BE49-F238E27FC236}">
-                <a16:creationId xmlns:a16="http://schemas.microsoft.com/office/drawing/2014/main" id="{B225A04A-A19E-03F6-5A6F-E66D9D66BD3C}"/>
-              </a:ext>
-            </a:extLst>
-          </p:cNvPr>
-          <p:cNvSpPr>
-            <a:spLocks noGrp="1"/>
-          </p:cNvSpPr>
-          <p:nvPr>
-            <p:ph idx="1"/>
-          </p:nvPr>
-        </p:nvSpPr>
-        <p:spPr>
-          <a:xfrm>
-            <a:off x="838200" y="1825625"/>
-            <a:ext cx="4561936" cy="796805"/>
-          </a:xfrm>
-        </p:spPr>
-        <p:txBody>
-          <a:bodyPr>
-            <a:normAutofit fontScale="92500" lnSpcReduction="20000"/>
-          </a:bodyPr>
-          <a:lstStyle/>
-          <a:p>
-            <a:r>
-              <a:rPr lang="en-US" dirty="0"/>
-              <a:t>Convert in 4 methods</a:t>
-            </a:r>
-          </a:p>
-          <a:p>
-            <a:r>
-              <a:rPr lang="en-US" dirty="0"/>
-              <a:t>Page 99</a:t>
-            </a:r>
-          </a:p>
-        </p:txBody>
-      </p:sp>
-    </p:spTree>
-    <p:extLst>
-      <p:ext uri="{BB962C8B-B14F-4D97-AF65-F5344CB8AC3E}">
-        <p14:creationId xmlns:p14="http://schemas.microsoft.com/office/powerpoint/2010/main" val="310505272"/>
-      </p:ext>
-    </p:extLst>
-  </p:cSld>
-  <p:clrMapOvr>
-    <a:masterClrMapping/>
-  </p:clrMapOvr>
-</p:sld>
-</file>
-
-<file path=ppt/slides/slide7.xml><?xml version="1.0" encoding="utf-8"?>
-<p:sld xmlns:a="http://schemas.openxmlformats.org/drawingml/2006/main" xmlns:r="http://schemas.openxmlformats.org/officeDocument/2006/relationships" xmlns:p="http://schemas.openxmlformats.org/presentationml/2006/main">
-  <p:cSld>
-    <p:spTree>
-      <p:nvGrpSpPr>
-        <p:cNvPr id="1" name="">
-          <a:extLst>
-            <a:ext uri="{FF2B5EF4-FFF2-40B4-BE49-F238E27FC236}">
-              <a16:creationId xmlns:a16="http://schemas.microsoft.com/office/drawing/2014/main" id="{B2BCD0B7-14BF-9591-2491-51EC0B8A6CEB}"/>
-            </a:ext>
-          </a:extLst>
-        </p:cNvPr>
-        <p:cNvGrpSpPr/>
-        <p:nvPr/>
-      </p:nvGrpSpPr>
-      <p:grpSpPr>
-        <a:xfrm>
-          <a:off x="0" y="0"/>
-          <a:ext cx="0" cy="0"/>
-          <a:chOff x="0" y="0"/>
-          <a:chExt cx="0" cy="0"/>
-        </a:xfrm>
-      </p:grpSpPr>
-      <p:sp>
-        <p:nvSpPr>
-          <p:cNvPr id="2" name="Title 1">
-            <a:extLst>
-              <a:ext uri="{FF2B5EF4-FFF2-40B4-BE49-F238E27FC236}">
-                <a16:creationId xmlns:a16="http://schemas.microsoft.com/office/drawing/2014/main" id="{3C96B53C-360B-A7DC-1397-EE5C9B1C729C}"/>
-              </a:ext>
-            </a:extLst>
-          </p:cNvPr>
-          <p:cNvSpPr>
-            <a:spLocks noGrp="1"/>
-          </p:cNvSpPr>
-          <p:nvPr>
-            <p:ph type="title"/>
-          </p:nvPr>
-        </p:nvSpPr>
-        <p:spPr/>
-        <p:txBody>
-          <a:bodyPr/>
-          <a:lstStyle/>
-          <a:p>
-            <a:r>
-              <a:rPr lang="en-US" dirty="0"/>
-              <a:t>Major SAS Steps/Proc vs R package/functions</a:t>
-            </a:r>
-          </a:p>
-        </p:txBody>
-      </p:sp>
-      <p:pic>
-        <p:nvPicPr>
-          <p:cNvPr id="6" name="Picture 5">
-            <a:extLst>
-              <a:ext uri="{FF2B5EF4-FFF2-40B4-BE49-F238E27FC236}">
-                <a16:creationId xmlns:a16="http://schemas.microsoft.com/office/drawing/2014/main" id="{D89187F8-9708-A2D8-B314-1950D2AA2EBD}"/>
-              </a:ext>
-            </a:extLst>
-          </p:cNvPr>
-          <p:cNvPicPr>
-            <a:picLocks noChangeAspect="1"/>
-          </p:cNvPicPr>
-          <p:nvPr/>
-        </p:nvPicPr>
-        <p:blipFill>
-          <a:blip r:embed="rId2"/>
-          <a:stretch>
-            <a:fillRect/>
-          </a:stretch>
-        </p:blipFill>
-        <p:spPr>
-          <a:xfrm>
-            <a:off x="550456" y="1690688"/>
-            <a:ext cx="1877291" cy="769689"/>
-          </a:xfrm>
-          <a:prstGeom prst="rect">
-            <a:avLst/>
-          </a:prstGeom>
-        </p:spPr>
-      </p:pic>
-      <p:pic>
-        <p:nvPicPr>
-          <p:cNvPr id="7" name="Picture 6">
-            <a:extLst>
-              <a:ext uri="{FF2B5EF4-FFF2-40B4-BE49-F238E27FC236}">
-                <a16:creationId xmlns:a16="http://schemas.microsoft.com/office/drawing/2014/main" id="{D093ED12-F9C4-7300-59D7-16AC180856DE}"/>
-              </a:ext>
-            </a:extLst>
-          </p:cNvPr>
-          <p:cNvPicPr>
-            <a:picLocks noChangeAspect="1"/>
-          </p:cNvPicPr>
-          <p:nvPr/>
-        </p:nvPicPr>
-        <p:blipFill>
-          <a:blip r:embed="rId3"/>
-          <a:stretch>
-            <a:fillRect/>
-          </a:stretch>
-        </p:blipFill>
-        <p:spPr>
-          <a:xfrm>
-            <a:off x="4351404" y="1690688"/>
-            <a:ext cx="2143471" cy="803156"/>
-          </a:xfrm>
-          <a:prstGeom prst="rect">
-            <a:avLst/>
-          </a:prstGeom>
-        </p:spPr>
-      </p:pic>
-      <p:pic>
-        <p:nvPicPr>
-          <p:cNvPr id="8" name="Picture 7">
-            <a:extLst>
-              <a:ext uri="{FF2B5EF4-FFF2-40B4-BE49-F238E27FC236}">
-                <a16:creationId xmlns:a16="http://schemas.microsoft.com/office/drawing/2014/main" id="{FE7EB734-6903-49D5-A647-AE7BC6E4ECF2}"/>
-              </a:ext>
-            </a:extLst>
-          </p:cNvPr>
-          <p:cNvPicPr>
-            <a:picLocks noChangeAspect="1"/>
-          </p:cNvPicPr>
-          <p:nvPr/>
-        </p:nvPicPr>
-        <p:blipFill>
-          <a:blip r:embed="rId4"/>
-          <a:stretch>
-            <a:fillRect/>
-          </a:stretch>
-        </p:blipFill>
-        <p:spPr>
-          <a:xfrm>
-            <a:off x="8590581" y="1608873"/>
-            <a:ext cx="2862262" cy="966787"/>
-          </a:xfrm>
-          <a:prstGeom prst="rect">
-            <a:avLst/>
-          </a:prstGeom>
-        </p:spPr>
-      </p:pic>
-      <p:sp>
-        <p:nvSpPr>
-          <p:cNvPr id="4" name="Content Placeholder 2">
-            <a:extLst>
-              <a:ext uri="{FF2B5EF4-FFF2-40B4-BE49-F238E27FC236}">
-                <a16:creationId xmlns:a16="http://schemas.microsoft.com/office/drawing/2014/main" id="{EA2E8D98-C1AD-CCC4-08D9-50F3BE804787}"/>
-              </a:ext>
-            </a:extLst>
-          </p:cNvPr>
-          <p:cNvSpPr txBox="1">
-            <a:spLocks/>
-          </p:cNvSpPr>
-          <p:nvPr/>
-        </p:nvSpPr>
-        <p:spPr>
-          <a:xfrm>
-            <a:off x="4574362" y="2735206"/>
-            <a:ext cx="2637321" cy="3413145"/>
-          </a:xfrm>
-          <a:prstGeom prst="rect">
-            <a:avLst/>
-          </a:prstGeom>
-        </p:spPr>
-        <p:txBody>
-          <a:bodyPr vert="horz" lIns="91440" tIns="45720" rIns="91440" bIns="45720" rtlCol="0">
-            <a:normAutofit/>
-          </a:bodyPr>
-          <a:lstStyle>
-            <a:lvl1pPr marL="228600" indent="-228600" algn="l" defTabSz="914400" rtl="0" eaLnBrk="1" latinLnBrk="0" hangingPunct="1">
-              <a:lnSpc>
-                <a:spcPct val="90000"/>
-              </a:lnSpc>
-              <a:spcBef>
-                <a:spcPts val="1000"/>
-              </a:spcBef>
-              <a:buFont typeface="Arial" panose="020B0604020202020204" pitchFamily="34" charset="0"/>
-              <a:buChar char="•"/>
-              <a:defRPr sz="2800" kern="1200">
-                <a:solidFill>
-                  <a:schemeClr val="tx1"/>
-                </a:solidFill>
-                <a:latin typeface="+mn-lt"/>
-                <a:ea typeface="+mn-ea"/>
-                <a:cs typeface="+mn-cs"/>
-              </a:defRPr>
-            </a:lvl1pPr>
-            <a:lvl2pPr marL="685800" indent="-228600" algn="l" defTabSz="914400" rtl="0" eaLnBrk="1" latinLnBrk="0" hangingPunct="1">
-              <a:lnSpc>
-                <a:spcPct val="90000"/>
-              </a:lnSpc>
-              <a:spcBef>
-                <a:spcPts val="500"/>
-              </a:spcBef>
-              <a:buFont typeface="Arial" panose="020B0604020202020204" pitchFamily="34" charset="0"/>
-              <a:buChar char="•"/>
-              <a:defRPr sz="2400" kern="1200">
-                <a:solidFill>
-                  <a:schemeClr val="tx1"/>
-                </a:solidFill>
-                <a:latin typeface="+mn-lt"/>
-                <a:ea typeface="+mn-ea"/>
-                <a:cs typeface="+mn-cs"/>
-              </a:defRPr>
-            </a:lvl2pPr>
-            <a:lvl3pPr marL="1143000" indent="-228600" algn="l" defTabSz="914400" rtl="0" eaLnBrk="1" latinLnBrk="0" hangingPunct="1">
-              <a:lnSpc>
-                <a:spcPct val="90000"/>
-              </a:lnSpc>
-              <a:spcBef>
-                <a:spcPts val="500"/>
-              </a:spcBef>
-              <a:buFont typeface="Arial" panose="020B0604020202020204" pitchFamily="34" charset="0"/>
-              <a:buChar char="•"/>
-              <a:defRPr sz="2000" kern="1200">
-                <a:solidFill>
-                  <a:schemeClr val="tx1"/>
-                </a:solidFill>
-                <a:latin typeface="+mn-lt"/>
-                <a:ea typeface="+mn-ea"/>
-                <a:cs typeface="+mn-cs"/>
-              </a:defRPr>
-            </a:lvl3pPr>
-            <a:lvl4pPr marL="1600200" indent="-228600" algn="l" defTabSz="914400" rtl="0" eaLnBrk="1" latinLnBrk="0" hangingPunct="1">
-              <a:lnSpc>
-                <a:spcPct val="90000"/>
-              </a:lnSpc>
-              <a:spcBef>
-                <a:spcPts val="500"/>
-              </a:spcBef>
-              <a:buFont typeface="Arial" panose="020B0604020202020204" pitchFamily="34" charset="0"/>
-              <a:buChar char="•"/>
-              <a:defRPr sz="1800" kern="1200">
-                <a:solidFill>
-                  <a:schemeClr val="tx1"/>
-                </a:solidFill>
-                <a:latin typeface="+mn-lt"/>
-                <a:ea typeface="+mn-ea"/>
-                <a:cs typeface="+mn-cs"/>
-              </a:defRPr>
-            </a:lvl4pPr>
-            <a:lvl5pPr marL="2057400" indent="-228600" algn="l" defTabSz="914400" rtl="0" eaLnBrk="1" latinLnBrk="0" hangingPunct="1">
-              <a:lnSpc>
-                <a:spcPct val="90000"/>
-              </a:lnSpc>
-              <a:spcBef>
-                <a:spcPts val="500"/>
-              </a:spcBef>
-              <a:buFont typeface="Arial" panose="020B0604020202020204" pitchFamily="34" charset="0"/>
-              <a:buChar char="•"/>
-              <a:defRPr sz="1800" kern="1200">
-                <a:solidFill>
-                  <a:schemeClr val="tx1"/>
-                </a:solidFill>
-                <a:latin typeface="+mn-lt"/>
-                <a:ea typeface="+mn-ea"/>
-                <a:cs typeface="+mn-cs"/>
-              </a:defRPr>
-            </a:lvl5pPr>
-            <a:lvl6pPr marL="2514600" indent="-228600" algn="l" defTabSz="914400" rtl="0" eaLnBrk="1" latinLnBrk="0" hangingPunct="1">
-              <a:lnSpc>
-                <a:spcPct val="90000"/>
-              </a:lnSpc>
-              <a:spcBef>
-                <a:spcPts val="500"/>
-              </a:spcBef>
-              <a:buFont typeface="Arial" panose="020B0604020202020204" pitchFamily="34" charset="0"/>
-              <a:buChar char="•"/>
-              <a:defRPr sz="1800" kern="1200">
-                <a:solidFill>
-                  <a:schemeClr val="tx1"/>
-                </a:solidFill>
-                <a:latin typeface="+mn-lt"/>
-                <a:ea typeface="+mn-ea"/>
-                <a:cs typeface="+mn-cs"/>
-              </a:defRPr>
-            </a:lvl6pPr>
-            <a:lvl7pPr marL="2971800" indent="-228600" algn="l" defTabSz="914400" rtl="0" eaLnBrk="1" latinLnBrk="0" hangingPunct="1">
-              <a:lnSpc>
-                <a:spcPct val="90000"/>
-              </a:lnSpc>
-              <a:spcBef>
-                <a:spcPts val="500"/>
-              </a:spcBef>
-              <a:buFont typeface="Arial" panose="020B0604020202020204" pitchFamily="34" charset="0"/>
-              <a:buChar char="•"/>
-              <a:defRPr sz="1800" kern="1200">
-                <a:solidFill>
-                  <a:schemeClr val="tx1"/>
-                </a:solidFill>
-                <a:latin typeface="+mn-lt"/>
-                <a:ea typeface="+mn-ea"/>
-                <a:cs typeface="+mn-cs"/>
-              </a:defRPr>
-            </a:lvl7pPr>
-            <a:lvl8pPr marL="3429000" indent="-228600" algn="l" defTabSz="914400" rtl="0" eaLnBrk="1" latinLnBrk="0" hangingPunct="1">
-              <a:lnSpc>
-                <a:spcPct val="90000"/>
-              </a:lnSpc>
-              <a:spcBef>
-                <a:spcPts val="500"/>
-              </a:spcBef>
-              <a:buFont typeface="Arial" panose="020B0604020202020204" pitchFamily="34" charset="0"/>
-              <a:buChar char="•"/>
-              <a:defRPr sz="1800" kern="1200">
-                <a:solidFill>
-                  <a:schemeClr val="tx1"/>
-                </a:solidFill>
-                <a:latin typeface="+mn-lt"/>
-                <a:ea typeface="+mn-ea"/>
-                <a:cs typeface="+mn-cs"/>
-              </a:defRPr>
-            </a:lvl8pPr>
-            <a:lvl9pPr marL="3886200" indent="-228600" algn="l" defTabSz="914400" rtl="0" eaLnBrk="1" latinLnBrk="0" hangingPunct="1">
-              <a:lnSpc>
-                <a:spcPct val="90000"/>
-              </a:lnSpc>
-              <a:spcBef>
-                <a:spcPts val="500"/>
-              </a:spcBef>
-              <a:buFont typeface="Arial" panose="020B0604020202020204" pitchFamily="34" charset="0"/>
-              <a:buChar char="•"/>
-              <a:defRPr sz="1800" kern="1200">
-                <a:solidFill>
-                  <a:schemeClr val="tx1"/>
-                </a:solidFill>
-                <a:latin typeface="+mn-lt"/>
-                <a:ea typeface="+mn-ea"/>
-                <a:cs typeface="+mn-cs"/>
-              </a:defRPr>
-            </a:lvl9pPr>
-          </a:lstStyle>
-          <a:p>
-            <a:r>
-              <a:rPr lang="en-US" altLang="zh-CN" dirty="0" err="1"/>
-              <a:t>tidyverse</a:t>
-            </a:r>
-            <a:r>
-              <a:rPr lang="en-US" altLang="zh-CN" dirty="0"/>
-              <a:t>, </a:t>
-            </a:r>
-          </a:p>
-          <a:p>
-            <a:r>
-              <a:rPr lang="en-US" altLang="zh-CN" dirty="0"/>
-              <a:t>arsenal,</a:t>
-            </a:r>
-          </a:p>
-          <a:p>
-            <a:r>
-              <a:rPr lang="en-US" altLang="zh-CN" dirty="0"/>
-              <a:t>Haven</a:t>
-            </a:r>
-          </a:p>
-          <a:p>
-            <a:r>
-              <a:rPr lang="en-US" altLang="zh-CN" dirty="0" err="1"/>
-              <a:t>aod</a:t>
-            </a:r>
-            <a:endParaRPr lang="en-US" altLang="zh-CN" dirty="0"/>
-          </a:p>
-          <a:p>
-            <a:endParaRPr lang="en-US" altLang="zh-CN" dirty="0"/>
-          </a:p>
-        </p:txBody>
-      </p:sp>
-      <p:sp>
-        <p:nvSpPr>
-          <p:cNvPr id="9" name="Content Placeholder 8">
-            <a:extLst>
-              <a:ext uri="{FF2B5EF4-FFF2-40B4-BE49-F238E27FC236}">
-                <a16:creationId xmlns:a16="http://schemas.microsoft.com/office/drawing/2014/main" id="{E0C96031-E926-D7AB-F4F4-6F05AB855B5E}"/>
-              </a:ext>
-            </a:extLst>
-          </p:cNvPr>
-          <p:cNvSpPr>
-            <a:spLocks noGrp="1"/>
-          </p:cNvSpPr>
-          <p:nvPr>
-            <p:ph idx="1"/>
-          </p:nvPr>
-        </p:nvSpPr>
-        <p:spPr>
-          <a:xfrm>
-            <a:off x="339016" y="2735206"/>
-            <a:ext cx="4012387" cy="468559"/>
-          </a:xfrm>
-        </p:spPr>
-        <p:txBody>
-          <a:bodyPr>
-            <a:normAutofit fontScale="40000" lnSpcReduction="20000"/>
-          </a:bodyPr>
-          <a:lstStyle/>
-          <a:p>
-            <a:r>
-              <a:rPr lang="en-US" dirty="0"/>
-              <a:t>PROC TABULATE – </a:t>
-            </a:r>
-            <a:r>
-              <a:rPr lang="en-US" dirty="0" err="1"/>
-              <a:t>summarise</a:t>
-            </a:r>
-            <a:r>
-              <a:rPr lang="en-US" dirty="0"/>
-              <a:t>()</a:t>
-            </a:r>
-          </a:p>
-          <a:p>
-            <a:r>
-              <a:rPr lang="en-US" dirty="0"/>
-              <a:t>PROC GENMOD</a:t>
-            </a:r>
-          </a:p>
-        </p:txBody>
-      </p:sp>
-    </p:spTree>
-    <p:extLst>
-      <p:ext uri="{BB962C8B-B14F-4D97-AF65-F5344CB8AC3E}">
-        <p14:creationId xmlns:p14="http://schemas.microsoft.com/office/powerpoint/2010/main" val="3421575707"/>
-      </p:ext>
-    </p:extLst>
-  </p:cSld>
-  <p:clrMapOvr>
-    <a:masterClrMapping/>
-  </p:clrMapOvr>
-</p:sld>
-</file>
-
-<file path=ppt/slides/slide8.xml><?xml version="1.0" encoding="utf-8"?>
-<p:sld xmlns:a="http://schemas.openxmlformats.org/drawingml/2006/main" xmlns:r="http://schemas.openxmlformats.org/officeDocument/2006/relationships" xmlns:p="http://schemas.openxmlformats.org/presentationml/2006/main">
-  <p:cSld>
-    <p:spTree>
-      <p:nvGrpSpPr>
-        <p:cNvPr id="1" name="">
-          <a:extLst>
-            <a:ext uri="{FF2B5EF4-FFF2-40B4-BE49-F238E27FC236}">
-              <a16:creationId xmlns:a16="http://schemas.microsoft.com/office/drawing/2014/main" id="{40074CE9-62D6-2BB2-E61F-1B1261FA1298}"/>
-            </a:ext>
-          </a:extLst>
-        </p:cNvPr>
-        <p:cNvGrpSpPr/>
-        <p:nvPr/>
-      </p:nvGrpSpPr>
-      <p:grpSpPr>
-        <a:xfrm>
-          <a:off x="0" y="0"/>
-          <a:ext cx="0" cy="0"/>
-          <a:chOff x="0" y="0"/>
-          <a:chExt cx="0" cy="0"/>
-        </a:xfrm>
-      </p:grpSpPr>
-      <p:sp>
-        <p:nvSpPr>
-          <p:cNvPr id="2" name="Title 1">
-            <a:extLst>
-              <a:ext uri="{FF2B5EF4-FFF2-40B4-BE49-F238E27FC236}">
-                <a16:creationId xmlns:a16="http://schemas.microsoft.com/office/drawing/2014/main" id="{1A312F8B-F4C9-4874-7DA4-22CD586751FE}"/>
-              </a:ext>
-            </a:extLst>
-          </p:cNvPr>
-          <p:cNvSpPr>
-            <a:spLocks noGrp="1"/>
-          </p:cNvSpPr>
-          <p:nvPr>
-            <p:ph type="title"/>
-          </p:nvPr>
-        </p:nvSpPr>
-        <p:spPr/>
-        <p:txBody>
-          <a:bodyPr/>
-          <a:lstStyle/>
-          <a:p>
-            <a:r>
-              <a:rPr lang="en-US" dirty="0"/>
-              <a:t>Steps for refactoring</a:t>
-            </a:r>
-          </a:p>
-        </p:txBody>
-      </p:sp>
-      <p:sp>
-        <p:nvSpPr>
-          <p:cNvPr id="3" name="Content Placeholder 2">
-            <a:extLst>
-              <a:ext uri="{FF2B5EF4-FFF2-40B4-BE49-F238E27FC236}">
-                <a16:creationId xmlns:a16="http://schemas.microsoft.com/office/drawing/2014/main" id="{A0BC23D4-DEEC-D0CD-B063-D5658C599C4C}"/>
-              </a:ext>
-            </a:extLst>
-          </p:cNvPr>
-          <p:cNvSpPr>
-            <a:spLocks noGrp="1"/>
-          </p:cNvSpPr>
-          <p:nvPr>
-            <p:ph idx="1"/>
-          </p:nvPr>
-        </p:nvSpPr>
-        <p:spPr>
-          <a:xfrm>
-            <a:off x="609600" y="1347216"/>
-            <a:ext cx="4578096" cy="3241409"/>
-          </a:xfrm>
-        </p:spPr>
-        <p:txBody>
-          <a:bodyPr>
-            <a:normAutofit fontScale="92500" lnSpcReduction="10000"/>
-          </a:bodyPr>
-          <a:lstStyle/>
-          <a:p>
-            <a:r>
-              <a:rPr lang="en-US" dirty="0"/>
-              <a:t>What have I done about it?</a:t>
-            </a:r>
-          </a:p>
-          <a:p>
-            <a:r>
-              <a:rPr lang="en-US" altLang="zh-CN" dirty="0"/>
-              <a:t>Enterprise Modeling and Analytics – the Cash Flow model</a:t>
-            </a:r>
-          </a:p>
-          <a:p>
-            <a:r>
-              <a:rPr lang="en-US" altLang="zh-CN" dirty="0"/>
-              <a:t>SAS: PROC compare</a:t>
-            </a:r>
-          </a:p>
-          <a:p>
-            <a:r>
-              <a:rPr lang="en-US" dirty="0"/>
-              <a:t>R: compared</a:t>
-            </a:r>
-          </a:p>
-          <a:p>
-            <a:r>
-              <a:rPr lang="en-US" dirty="0"/>
-              <a:t>How to make a tolerance level?</a:t>
-            </a:r>
-          </a:p>
-          <a:p>
-            <a:endParaRPr lang="en-US" dirty="0"/>
-          </a:p>
-        </p:txBody>
-      </p:sp>
-      <p:pic>
-        <p:nvPicPr>
-          <p:cNvPr id="6" name="Picture 5">
-            <a:extLst>
-              <a:ext uri="{FF2B5EF4-FFF2-40B4-BE49-F238E27FC236}">
-                <a16:creationId xmlns:a16="http://schemas.microsoft.com/office/drawing/2014/main" id="{63B42BA1-1151-4CFE-D8B5-E02DDD41A0EE}"/>
-              </a:ext>
-            </a:extLst>
-          </p:cNvPr>
-          <p:cNvPicPr>
-            <a:picLocks noChangeAspect="1"/>
-          </p:cNvPicPr>
-          <p:nvPr/>
-        </p:nvPicPr>
-        <p:blipFill>
-          <a:blip r:embed="rId2"/>
-          <a:stretch>
-            <a:fillRect/>
-          </a:stretch>
-        </p:blipFill>
-        <p:spPr>
-          <a:xfrm>
-            <a:off x="1446197" y="5207810"/>
-            <a:ext cx="1877291" cy="769689"/>
-          </a:xfrm>
-          <a:prstGeom prst="rect">
-            <a:avLst/>
-          </a:prstGeom>
-        </p:spPr>
-      </p:pic>
-      <p:pic>
-        <p:nvPicPr>
-          <p:cNvPr id="7" name="Picture 6">
-            <a:extLst>
-              <a:ext uri="{FF2B5EF4-FFF2-40B4-BE49-F238E27FC236}">
-                <a16:creationId xmlns:a16="http://schemas.microsoft.com/office/drawing/2014/main" id="{F74468B4-F5B5-FE68-0C47-CC2309DE1D12}"/>
-              </a:ext>
-            </a:extLst>
-          </p:cNvPr>
-          <p:cNvPicPr>
-            <a:picLocks noChangeAspect="1"/>
-          </p:cNvPicPr>
-          <p:nvPr/>
-        </p:nvPicPr>
-        <p:blipFill>
-          <a:blip r:embed="rId3"/>
-          <a:stretch>
-            <a:fillRect/>
-          </a:stretch>
-        </p:blipFill>
-        <p:spPr>
-          <a:xfrm>
-            <a:off x="5024264" y="5174343"/>
-            <a:ext cx="2143471" cy="803156"/>
-          </a:xfrm>
-          <a:prstGeom prst="rect">
-            <a:avLst/>
-          </a:prstGeom>
-        </p:spPr>
-      </p:pic>
-      <p:pic>
-        <p:nvPicPr>
-          <p:cNvPr id="8" name="Picture 7">
-            <a:extLst>
-              <a:ext uri="{FF2B5EF4-FFF2-40B4-BE49-F238E27FC236}">
-                <a16:creationId xmlns:a16="http://schemas.microsoft.com/office/drawing/2014/main" id="{BBAC54FE-1225-9162-8A7B-6CAB854D7938}"/>
-              </a:ext>
-            </a:extLst>
-          </p:cNvPr>
-          <p:cNvPicPr>
-            <a:picLocks noChangeAspect="1"/>
-          </p:cNvPicPr>
-          <p:nvPr/>
-        </p:nvPicPr>
-        <p:blipFill>
-          <a:blip r:embed="rId4"/>
-          <a:stretch>
-            <a:fillRect/>
-          </a:stretch>
-        </p:blipFill>
-        <p:spPr>
-          <a:xfrm>
-            <a:off x="8564702" y="5210176"/>
-            <a:ext cx="2862262" cy="966787"/>
-          </a:xfrm>
-          <a:prstGeom prst="rect">
-            <a:avLst/>
-          </a:prstGeom>
-        </p:spPr>
-      </p:pic>
-      <p:sp>
-        <p:nvSpPr>
-          <p:cNvPr id="4" name="Content Placeholder 2">
-            <a:extLst>
-              <a:ext uri="{FF2B5EF4-FFF2-40B4-BE49-F238E27FC236}">
-                <a16:creationId xmlns:a16="http://schemas.microsoft.com/office/drawing/2014/main" id="{63DAD067-F15E-9C00-BF8C-B324CCAB9A23}"/>
-              </a:ext>
-            </a:extLst>
-          </p:cNvPr>
-          <p:cNvSpPr txBox="1">
-            <a:spLocks/>
-          </p:cNvSpPr>
-          <p:nvPr/>
-        </p:nvSpPr>
-        <p:spPr>
-          <a:xfrm>
-            <a:off x="4829558" y="1347216"/>
-            <a:ext cx="4349496" cy="3413145"/>
-          </a:xfrm>
-          <a:prstGeom prst="rect">
-            <a:avLst/>
-          </a:prstGeom>
-        </p:spPr>
-        <p:txBody>
-          <a:bodyPr vert="horz" lIns="91440" tIns="45720" rIns="91440" bIns="45720" rtlCol="0">
-            <a:normAutofit fontScale="62500" lnSpcReduction="20000"/>
-          </a:bodyPr>
-          <a:lstStyle>
-            <a:lvl1pPr marL="228600" indent="-228600" algn="l" defTabSz="914400" rtl="0" eaLnBrk="1" latinLnBrk="0" hangingPunct="1">
-              <a:lnSpc>
-                <a:spcPct val="90000"/>
-              </a:lnSpc>
-              <a:spcBef>
-                <a:spcPts val="1000"/>
-              </a:spcBef>
-              <a:buFont typeface="Arial" panose="020B0604020202020204" pitchFamily="34" charset="0"/>
-              <a:buChar char="•"/>
-              <a:defRPr sz="2800" kern="1200">
-                <a:solidFill>
-                  <a:schemeClr val="tx1"/>
-                </a:solidFill>
-                <a:latin typeface="+mn-lt"/>
-                <a:ea typeface="+mn-ea"/>
-                <a:cs typeface="+mn-cs"/>
-              </a:defRPr>
-            </a:lvl1pPr>
-            <a:lvl2pPr marL="685800" indent="-228600" algn="l" defTabSz="914400" rtl="0" eaLnBrk="1" latinLnBrk="0" hangingPunct="1">
-              <a:lnSpc>
-                <a:spcPct val="90000"/>
-              </a:lnSpc>
-              <a:spcBef>
-                <a:spcPts val="500"/>
-              </a:spcBef>
-              <a:buFont typeface="Arial" panose="020B0604020202020204" pitchFamily="34" charset="0"/>
-              <a:buChar char="•"/>
-              <a:defRPr sz="2400" kern="1200">
-                <a:solidFill>
-                  <a:schemeClr val="tx1"/>
-                </a:solidFill>
-                <a:latin typeface="+mn-lt"/>
-                <a:ea typeface="+mn-ea"/>
-                <a:cs typeface="+mn-cs"/>
-              </a:defRPr>
-            </a:lvl2pPr>
-            <a:lvl3pPr marL="1143000" indent="-228600" algn="l" defTabSz="914400" rtl="0" eaLnBrk="1" latinLnBrk="0" hangingPunct="1">
-              <a:lnSpc>
-                <a:spcPct val="90000"/>
-              </a:lnSpc>
-              <a:spcBef>
-                <a:spcPts val="500"/>
-              </a:spcBef>
-              <a:buFont typeface="Arial" panose="020B0604020202020204" pitchFamily="34" charset="0"/>
-              <a:buChar char="•"/>
-              <a:defRPr sz="2000" kern="1200">
-                <a:solidFill>
-                  <a:schemeClr val="tx1"/>
-                </a:solidFill>
-                <a:latin typeface="+mn-lt"/>
-                <a:ea typeface="+mn-ea"/>
-                <a:cs typeface="+mn-cs"/>
-              </a:defRPr>
-            </a:lvl3pPr>
-            <a:lvl4pPr marL="1600200" indent="-228600" algn="l" defTabSz="914400" rtl="0" eaLnBrk="1" latinLnBrk="0" hangingPunct="1">
-              <a:lnSpc>
-                <a:spcPct val="90000"/>
-              </a:lnSpc>
-              <a:spcBef>
-                <a:spcPts val="500"/>
-              </a:spcBef>
-              <a:buFont typeface="Arial" panose="020B0604020202020204" pitchFamily="34" charset="0"/>
-              <a:buChar char="•"/>
-              <a:defRPr sz="1800" kern="1200">
-                <a:solidFill>
-                  <a:schemeClr val="tx1"/>
-                </a:solidFill>
-                <a:latin typeface="+mn-lt"/>
-                <a:ea typeface="+mn-ea"/>
-                <a:cs typeface="+mn-cs"/>
-              </a:defRPr>
-            </a:lvl4pPr>
-            <a:lvl5pPr marL="2057400" indent="-228600" algn="l" defTabSz="914400" rtl="0" eaLnBrk="1" latinLnBrk="0" hangingPunct="1">
-              <a:lnSpc>
-                <a:spcPct val="90000"/>
-              </a:lnSpc>
-              <a:spcBef>
-                <a:spcPts val="500"/>
-              </a:spcBef>
-              <a:buFont typeface="Arial" panose="020B0604020202020204" pitchFamily="34" charset="0"/>
-              <a:buChar char="•"/>
-              <a:defRPr sz="1800" kern="1200">
-                <a:solidFill>
-                  <a:schemeClr val="tx1"/>
-                </a:solidFill>
-                <a:latin typeface="+mn-lt"/>
-                <a:ea typeface="+mn-ea"/>
-                <a:cs typeface="+mn-cs"/>
-              </a:defRPr>
-            </a:lvl5pPr>
-            <a:lvl6pPr marL="2514600" indent="-228600" algn="l" defTabSz="914400" rtl="0" eaLnBrk="1" latinLnBrk="0" hangingPunct="1">
-              <a:lnSpc>
-                <a:spcPct val="90000"/>
-              </a:lnSpc>
-              <a:spcBef>
-                <a:spcPts val="500"/>
-              </a:spcBef>
-              <a:buFont typeface="Arial" panose="020B0604020202020204" pitchFamily="34" charset="0"/>
-              <a:buChar char="•"/>
-              <a:defRPr sz="1800" kern="1200">
-                <a:solidFill>
-                  <a:schemeClr val="tx1"/>
-                </a:solidFill>
-                <a:latin typeface="+mn-lt"/>
-                <a:ea typeface="+mn-ea"/>
-                <a:cs typeface="+mn-cs"/>
-              </a:defRPr>
-            </a:lvl6pPr>
-            <a:lvl7pPr marL="2971800" indent="-228600" algn="l" defTabSz="914400" rtl="0" eaLnBrk="1" latinLnBrk="0" hangingPunct="1">
-              <a:lnSpc>
-                <a:spcPct val="90000"/>
-              </a:lnSpc>
-              <a:spcBef>
-                <a:spcPts val="500"/>
-              </a:spcBef>
-              <a:buFont typeface="Arial" panose="020B0604020202020204" pitchFamily="34" charset="0"/>
-              <a:buChar char="•"/>
-              <a:defRPr sz="1800" kern="1200">
-                <a:solidFill>
-                  <a:schemeClr val="tx1"/>
-                </a:solidFill>
-                <a:latin typeface="+mn-lt"/>
-                <a:ea typeface="+mn-ea"/>
-                <a:cs typeface="+mn-cs"/>
-              </a:defRPr>
-            </a:lvl7pPr>
-            <a:lvl8pPr marL="3429000" indent="-228600" algn="l" defTabSz="914400" rtl="0" eaLnBrk="1" latinLnBrk="0" hangingPunct="1">
-              <a:lnSpc>
-                <a:spcPct val="90000"/>
-              </a:lnSpc>
-              <a:spcBef>
-                <a:spcPts val="500"/>
-              </a:spcBef>
-              <a:buFont typeface="Arial" panose="020B0604020202020204" pitchFamily="34" charset="0"/>
-              <a:buChar char="•"/>
-              <a:defRPr sz="1800" kern="1200">
-                <a:solidFill>
-                  <a:schemeClr val="tx1"/>
-                </a:solidFill>
-                <a:latin typeface="+mn-lt"/>
-                <a:ea typeface="+mn-ea"/>
-                <a:cs typeface="+mn-cs"/>
-              </a:defRPr>
-            </a:lvl8pPr>
-            <a:lvl9pPr marL="3886200" indent="-228600" algn="l" defTabSz="914400" rtl="0" eaLnBrk="1" latinLnBrk="0" hangingPunct="1">
-              <a:lnSpc>
-                <a:spcPct val="90000"/>
-              </a:lnSpc>
-              <a:spcBef>
-                <a:spcPts val="500"/>
-              </a:spcBef>
-              <a:buFont typeface="Arial" panose="020B0604020202020204" pitchFamily="34" charset="0"/>
-              <a:buChar char="•"/>
-              <a:defRPr sz="1800" kern="1200">
-                <a:solidFill>
-                  <a:schemeClr val="tx1"/>
-                </a:solidFill>
-                <a:latin typeface="+mn-lt"/>
-                <a:ea typeface="+mn-ea"/>
-                <a:cs typeface="+mn-cs"/>
-              </a:defRPr>
-            </a:lvl9pPr>
-          </a:lstStyle>
-          <a:p>
-            <a:r>
-              <a:rPr lang="en-US" altLang="zh-CN" dirty="0"/>
-              <a:t>Enterprise Modeling and Analytics – the Cash Flow model</a:t>
-            </a:r>
-          </a:p>
-          <a:p>
-            <a:r>
-              <a:rPr lang="en-US" dirty="0"/>
-              <a:t>Data: date/month/time, missing values, N/A</a:t>
-            </a:r>
-          </a:p>
-          <a:p>
-            <a:r>
-              <a:rPr lang="en-US" dirty="0"/>
-              <a:t>Variables: filter data, </a:t>
-            </a:r>
-          </a:p>
-          <a:p>
-            <a:r>
-              <a:rPr lang="en-US" dirty="0"/>
-              <a:t>merge tables</a:t>
-            </a:r>
-          </a:p>
-          <a:p>
-            <a:pPr lvl="1"/>
-            <a:r>
-              <a:rPr lang="en-US" dirty="0"/>
-              <a:t>Concatenate</a:t>
-            </a:r>
-          </a:p>
-          <a:p>
-            <a:pPr lvl="1"/>
-            <a:r>
-              <a:rPr lang="en-US" dirty="0"/>
-              <a:t>match merging (with n= dataset option)</a:t>
-            </a:r>
-          </a:p>
-          <a:p>
-            <a:r>
-              <a:rPr lang="en-US" dirty="0"/>
-              <a:t>Models: logistic regression with splines</a:t>
-            </a:r>
-          </a:p>
-          <a:p>
-            <a:pPr lvl="1"/>
-            <a:r>
-              <a:rPr lang="en-US" dirty="0"/>
-              <a:t>Choose number and location of the knots.</a:t>
-            </a:r>
-          </a:p>
-          <a:p>
-            <a:r>
-              <a:rPr lang="en-US" dirty="0"/>
-              <a:t>Macro functions</a:t>
-            </a:r>
-          </a:p>
-          <a:p>
-            <a:r>
-              <a:rPr lang="en-US" dirty="0"/>
-              <a:t>Output</a:t>
-            </a:r>
-          </a:p>
-          <a:p>
-            <a:endParaRPr lang="en-US" dirty="0"/>
-          </a:p>
-        </p:txBody>
-      </p:sp>
-    </p:spTree>
-    <p:extLst>
-      <p:ext uri="{BB962C8B-B14F-4D97-AF65-F5344CB8AC3E}">
-        <p14:creationId xmlns:p14="http://schemas.microsoft.com/office/powerpoint/2010/main" val="4097000794"/>
-      </p:ext>
-    </p:extLst>
-  </p:cSld>
-  <p:clrMapOvr>
-    <a:masterClrMapping/>
-  </p:clrMapOvr>
-</p:sld>
-</file>
-
-<file path=ppt/slides/slide9.xml><?xml version="1.0" encoding="utf-8"?>
-<p:sld xmlns:a="http://schemas.openxmlformats.org/drawingml/2006/main" xmlns:r="http://schemas.openxmlformats.org/officeDocument/2006/relationships" xmlns:p="http://schemas.openxmlformats.org/presentationml/2006/main">
-  <p:cSld>
-    <p:spTree>
-      <p:nvGrpSpPr>
-        <p:cNvPr id="1" name=""/>
-        <p:cNvGrpSpPr/>
-        <p:nvPr/>
-      </p:nvGrpSpPr>
-      <p:grpSpPr>
-        <a:xfrm>
-          <a:off x="0" y="0"/>
-          <a:ext cx="0" cy="0"/>
-          <a:chOff x="0" y="0"/>
-          <a:chExt cx="0" cy="0"/>
-        </a:xfrm>
-      </p:grpSpPr>
-      <p:sp>
-        <p:nvSpPr>
-          <p:cNvPr id="2" name="Title 1">
-            <a:extLst>
-              <a:ext uri="{FF2B5EF4-FFF2-40B4-BE49-F238E27FC236}">
                 <a16:creationId xmlns:a16="http://schemas.microsoft.com/office/drawing/2014/main" id="{FF673D30-F5D8-4541-A08A-A1F0FD253A32}"/>
               </a:ext>
             </a:extLst>
@@ -9229,6 +6249,3105 @@
     <p:extLst>
       <p:ext uri="{BB962C8B-B14F-4D97-AF65-F5344CB8AC3E}">
         <p14:creationId xmlns:p14="http://schemas.microsoft.com/office/powerpoint/2010/main" val="3973137075"/>
+      </p:ext>
+    </p:extLst>
+  </p:cSld>
+  <p:clrMapOvr>
+    <a:masterClrMapping/>
+  </p:clrMapOvr>
+</p:sld>
+</file>
+
+<file path=ppt/slides/slide11.xml><?xml version="1.0" encoding="utf-8"?>
+<p:sld xmlns:a="http://schemas.openxmlformats.org/drawingml/2006/main" xmlns:r="http://schemas.openxmlformats.org/officeDocument/2006/relationships" xmlns:p="http://schemas.openxmlformats.org/presentationml/2006/main">
+  <p:cSld>
+    <p:spTree>
+      <p:nvGrpSpPr>
+        <p:cNvPr id="1" name=""/>
+        <p:cNvGrpSpPr/>
+        <p:nvPr/>
+      </p:nvGrpSpPr>
+      <p:grpSpPr>
+        <a:xfrm>
+          <a:off x="0" y="0"/>
+          <a:ext cx="0" cy="0"/>
+          <a:chOff x="0" y="0"/>
+          <a:chExt cx="0" cy="0"/>
+        </a:xfrm>
+      </p:grpSpPr>
+      <p:sp>
+        <p:nvSpPr>
+          <p:cNvPr id="2" name="Title 1">
+            <a:extLst>
+              <a:ext uri="{FF2B5EF4-FFF2-40B4-BE49-F238E27FC236}">
+                <a16:creationId xmlns:a16="http://schemas.microsoft.com/office/drawing/2014/main" id="{BDCA0D58-006F-0ED1-D928-9053639D7AE8}"/>
+              </a:ext>
+            </a:extLst>
+          </p:cNvPr>
+          <p:cNvSpPr>
+            <a:spLocks noGrp="1"/>
+          </p:cNvSpPr>
+          <p:nvPr>
+            <p:ph type="title"/>
+          </p:nvPr>
+        </p:nvSpPr>
+        <p:spPr/>
+        <p:txBody>
+          <a:bodyPr/>
+          <a:lstStyle/>
+          <a:p>
+            <a:r>
+              <a:rPr lang="en-US" dirty="0"/>
+              <a:t>Efficiency</a:t>
+            </a:r>
+          </a:p>
+        </p:txBody>
+      </p:sp>
+      <p:sp>
+        <p:nvSpPr>
+          <p:cNvPr id="3" name="Content Placeholder 2">
+            <a:extLst>
+              <a:ext uri="{FF2B5EF4-FFF2-40B4-BE49-F238E27FC236}">
+                <a16:creationId xmlns:a16="http://schemas.microsoft.com/office/drawing/2014/main" id="{F8DC0A5E-A212-3E5A-61F0-5486D95F0C41}"/>
+              </a:ext>
+            </a:extLst>
+          </p:cNvPr>
+          <p:cNvSpPr>
+            <a:spLocks noGrp="1"/>
+          </p:cNvSpPr>
+          <p:nvPr>
+            <p:ph idx="1"/>
+          </p:nvPr>
+        </p:nvSpPr>
+        <p:spPr/>
+        <p:txBody>
+          <a:bodyPr/>
+          <a:lstStyle/>
+          <a:p>
+            <a:endParaRPr lang="en-US"/>
+          </a:p>
+        </p:txBody>
+      </p:sp>
+    </p:spTree>
+    <p:extLst>
+      <p:ext uri="{BB962C8B-B14F-4D97-AF65-F5344CB8AC3E}">
+        <p14:creationId xmlns:p14="http://schemas.microsoft.com/office/powerpoint/2010/main" val="683459612"/>
+      </p:ext>
+    </p:extLst>
+  </p:cSld>
+  <p:clrMapOvr>
+    <a:masterClrMapping/>
+  </p:clrMapOvr>
+</p:sld>
+</file>
+
+<file path=ppt/slides/slide12.xml><?xml version="1.0" encoding="utf-8"?>
+<p:sld xmlns:a="http://schemas.openxmlformats.org/drawingml/2006/main" xmlns:r="http://schemas.openxmlformats.org/officeDocument/2006/relationships" xmlns:p="http://schemas.openxmlformats.org/presentationml/2006/main">
+  <p:cSld>
+    <p:spTree>
+      <p:nvGrpSpPr>
+        <p:cNvPr id="1" name=""/>
+        <p:cNvGrpSpPr/>
+        <p:nvPr/>
+      </p:nvGrpSpPr>
+      <p:grpSpPr>
+        <a:xfrm>
+          <a:off x="0" y="0"/>
+          <a:ext cx="0" cy="0"/>
+          <a:chOff x="0" y="0"/>
+          <a:chExt cx="0" cy="0"/>
+        </a:xfrm>
+      </p:grpSpPr>
+      <p:sp>
+        <p:nvSpPr>
+          <p:cNvPr id="2" name="Title 1">
+            <a:extLst>
+              <a:ext uri="{FF2B5EF4-FFF2-40B4-BE49-F238E27FC236}">
+                <a16:creationId xmlns:a16="http://schemas.microsoft.com/office/drawing/2014/main" id="{1E601B93-71FC-ED4E-DAD1-2DC88351F539}"/>
+              </a:ext>
+            </a:extLst>
+          </p:cNvPr>
+          <p:cNvSpPr>
+            <a:spLocks noGrp="1"/>
+          </p:cNvSpPr>
+          <p:nvPr>
+            <p:ph type="title"/>
+          </p:nvPr>
+        </p:nvSpPr>
+        <p:spPr/>
+        <p:txBody>
+          <a:bodyPr/>
+          <a:lstStyle/>
+          <a:p>
+            <a:r>
+              <a:rPr lang="en-US" altLang="zh-CN" dirty="0"/>
+              <a:t>Merge Tables</a:t>
+            </a:r>
+            <a:endParaRPr lang="en-US" dirty="0"/>
+          </a:p>
+        </p:txBody>
+      </p:sp>
+      <p:sp>
+        <p:nvSpPr>
+          <p:cNvPr id="3" name="Content Placeholder 2">
+            <a:extLst>
+              <a:ext uri="{FF2B5EF4-FFF2-40B4-BE49-F238E27FC236}">
+                <a16:creationId xmlns:a16="http://schemas.microsoft.com/office/drawing/2014/main" id="{BD0A8754-420C-E67C-1B6E-990DE726033A}"/>
+              </a:ext>
+            </a:extLst>
+          </p:cNvPr>
+          <p:cNvSpPr>
+            <a:spLocks noGrp="1"/>
+          </p:cNvSpPr>
+          <p:nvPr>
+            <p:ph idx="1"/>
+          </p:nvPr>
+        </p:nvSpPr>
+        <p:spPr/>
+        <p:txBody>
+          <a:bodyPr/>
+          <a:lstStyle/>
+          <a:p>
+            <a:r>
+              <a:rPr lang="en-US" dirty="0"/>
+              <a:t>concatenation</a:t>
+            </a:r>
+          </a:p>
+        </p:txBody>
+      </p:sp>
+    </p:spTree>
+    <p:extLst>
+      <p:ext uri="{BB962C8B-B14F-4D97-AF65-F5344CB8AC3E}">
+        <p14:creationId xmlns:p14="http://schemas.microsoft.com/office/powerpoint/2010/main" val="2510015937"/>
+      </p:ext>
+    </p:extLst>
+  </p:cSld>
+  <p:clrMapOvr>
+    <a:masterClrMapping/>
+  </p:clrMapOvr>
+</p:sld>
+</file>
+
+<file path=ppt/slides/slide13.xml><?xml version="1.0" encoding="utf-8"?>
+<p:sld xmlns:a="http://schemas.openxmlformats.org/drawingml/2006/main" xmlns:r="http://schemas.openxmlformats.org/officeDocument/2006/relationships" xmlns:p="http://schemas.openxmlformats.org/presentationml/2006/main">
+  <p:cSld>
+    <p:spTree>
+      <p:nvGrpSpPr>
+        <p:cNvPr id="1" name=""/>
+        <p:cNvGrpSpPr/>
+        <p:nvPr/>
+      </p:nvGrpSpPr>
+      <p:grpSpPr>
+        <a:xfrm>
+          <a:off x="0" y="0"/>
+          <a:ext cx="0" cy="0"/>
+          <a:chOff x="0" y="0"/>
+          <a:chExt cx="0" cy="0"/>
+        </a:xfrm>
+      </p:grpSpPr>
+      <p:sp>
+        <p:nvSpPr>
+          <p:cNvPr id="2" name="Title 1">
+            <a:extLst>
+              <a:ext uri="{FF2B5EF4-FFF2-40B4-BE49-F238E27FC236}">
+                <a16:creationId xmlns:a16="http://schemas.microsoft.com/office/drawing/2014/main" id="{B43C6558-4EC7-F455-AEE9-D12FD0A89C62}"/>
+              </a:ext>
+            </a:extLst>
+          </p:cNvPr>
+          <p:cNvSpPr>
+            <a:spLocks noGrp="1"/>
+          </p:cNvSpPr>
+          <p:nvPr>
+            <p:ph type="title"/>
+          </p:nvPr>
+        </p:nvSpPr>
+        <p:spPr/>
+        <p:txBody>
+          <a:bodyPr/>
+          <a:lstStyle/>
+          <a:p>
+            <a:endParaRPr lang="en-US"/>
+          </a:p>
+        </p:txBody>
+      </p:sp>
+      <p:sp>
+        <p:nvSpPr>
+          <p:cNvPr id="3" name="Content Placeholder 2">
+            <a:extLst>
+              <a:ext uri="{FF2B5EF4-FFF2-40B4-BE49-F238E27FC236}">
+                <a16:creationId xmlns:a16="http://schemas.microsoft.com/office/drawing/2014/main" id="{5655E68B-3CB9-4EB7-342D-A9E2A3772252}"/>
+              </a:ext>
+            </a:extLst>
+          </p:cNvPr>
+          <p:cNvSpPr>
+            <a:spLocks noGrp="1"/>
+          </p:cNvSpPr>
+          <p:nvPr>
+            <p:ph idx="1"/>
+          </p:nvPr>
+        </p:nvSpPr>
+        <p:spPr/>
+        <p:txBody>
+          <a:bodyPr/>
+          <a:lstStyle/>
+          <a:p>
+            <a:r>
+              <a:rPr lang="en-US" dirty="0"/>
+              <a:t>What additional value does my approach provide?</a:t>
+            </a:r>
+          </a:p>
+        </p:txBody>
+      </p:sp>
+    </p:spTree>
+    <p:extLst>
+      <p:ext uri="{BB962C8B-B14F-4D97-AF65-F5344CB8AC3E}">
+        <p14:creationId xmlns:p14="http://schemas.microsoft.com/office/powerpoint/2010/main" val="331261954"/>
+      </p:ext>
+    </p:extLst>
+  </p:cSld>
+  <p:clrMapOvr>
+    <a:masterClrMapping/>
+  </p:clrMapOvr>
+</p:sld>
+</file>
+
+<file path=ppt/slides/slide14.xml><?xml version="1.0" encoding="utf-8"?>
+<p:sld xmlns:a="http://schemas.openxmlformats.org/drawingml/2006/main" xmlns:r="http://schemas.openxmlformats.org/officeDocument/2006/relationships" xmlns:p="http://schemas.openxmlformats.org/presentationml/2006/main">
+  <p:cSld>
+    <p:spTree>
+      <p:nvGrpSpPr>
+        <p:cNvPr id="1" name=""/>
+        <p:cNvGrpSpPr/>
+        <p:nvPr/>
+      </p:nvGrpSpPr>
+      <p:grpSpPr>
+        <a:xfrm>
+          <a:off x="0" y="0"/>
+          <a:ext cx="0" cy="0"/>
+          <a:chOff x="0" y="0"/>
+          <a:chExt cx="0" cy="0"/>
+        </a:xfrm>
+      </p:grpSpPr>
+      <p:sp>
+        <p:nvSpPr>
+          <p:cNvPr id="2" name="Title 1">
+            <a:extLst>
+              <a:ext uri="{FF2B5EF4-FFF2-40B4-BE49-F238E27FC236}">
+                <a16:creationId xmlns:a16="http://schemas.microsoft.com/office/drawing/2014/main" id="{9E681912-C0D5-AF85-91B0-7D9532929F7F}"/>
+              </a:ext>
+            </a:extLst>
+          </p:cNvPr>
+          <p:cNvSpPr>
+            <a:spLocks noGrp="1"/>
+          </p:cNvSpPr>
+          <p:nvPr>
+            <p:ph type="title"/>
+          </p:nvPr>
+        </p:nvSpPr>
+        <p:spPr/>
+        <p:txBody>
+          <a:bodyPr/>
+          <a:lstStyle/>
+          <a:p>
+            <a:endParaRPr lang="en-US" dirty="0"/>
+          </a:p>
+        </p:txBody>
+      </p:sp>
+      <p:sp>
+        <p:nvSpPr>
+          <p:cNvPr id="3" name="Content Placeholder 2">
+            <a:extLst>
+              <a:ext uri="{FF2B5EF4-FFF2-40B4-BE49-F238E27FC236}">
+                <a16:creationId xmlns:a16="http://schemas.microsoft.com/office/drawing/2014/main" id="{E48A637E-A23A-F19C-2EC6-9A9B52F8A2BA}"/>
+              </a:ext>
+            </a:extLst>
+          </p:cNvPr>
+          <p:cNvSpPr>
+            <a:spLocks noGrp="1"/>
+          </p:cNvSpPr>
+          <p:nvPr>
+            <p:ph idx="1"/>
+          </p:nvPr>
+        </p:nvSpPr>
+        <p:spPr/>
+        <p:txBody>
+          <a:bodyPr/>
+          <a:lstStyle/>
+          <a:p>
+            <a:r>
+              <a:rPr lang="en-US" dirty="0"/>
+              <a:t>Where do we go from there?</a:t>
+            </a:r>
+          </a:p>
+          <a:p>
+            <a:r>
+              <a:rPr lang="en-US" dirty="0"/>
+              <a:t>Tech in 2020 seems pretty old at 2026. So how will we see in 2030?</a:t>
+            </a:r>
+          </a:p>
+        </p:txBody>
+      </p:sp>
+    </p:spTree>
+    <p:extLst>
+      <p:ext uri="{BB962C8B-B14F-4D97-AF65-F5344CB8AC3E}">
+        <p14:creationId xmlns:p14="http://schemas.microsoft.com/office/powerpoint/2010/main" val="1238321945"/>
+      </p:ext>
+    </p:extLst>
+  </p:cSld>
+  <p:clrMapOvr>
+    <a:masterClrMapping/>
+  </p:clrMapOvr>
+</p:sld>
+</file>
+
+<file path=ppt/slides/slide15.xml><?xml version="1.0" encoding="utf-8"?>
+<p:sld xmlns:a="http://schemas.openxmlformats.org/drawingml/2006/main" xmlns:r="http://schemas.openxmlformats.org/officeDocument/2006/relationships" xmlns:p="http://schemas.openxmlformats.org/presentationml/2006/main">
+  <p:cSld>
+    <p:spTree>
+      <p:nvGrpSpPr>
+        <p:cNvPr id="1" name=""/>
+        <p:cNvGrpSpPr/>
+        <p:nvPr/>
+      </p:nvGrpSpPr>
+      <p:grpSpPr>
+        <a:xfrm>
+          <a:off x="0" y="0"/>
+          <a:ext cx="0" cy="0"/>
+          <a:chOff x="0" y="0"/>
+          <a:chExt cx="0" cy="0"/>
+        </a:xfrm>
+      </p:grpSpPr>
+      <p:sp>
+        <p:nvSpPr>
+          <p:cNvPr id="2" name="Title 1">
+            <a:extLst>
+              <a:ext uri="{FF2B5EF4-FFF2-40B4-BE49-F238E27FC236}">
+                <a16:creationId xmlns:a16="http://schemas.microsoft.com/office/drawing/2014/main" id="{79765071-DC72-93E5-9B2F-5F473699886E}"/>
+              </a:ext>
+            </a:extLst>
+          </p:cNvPr>
+          <p:cNvSpPr>
+            <a:spLocks noGrp="1"/>
+          </p:cNvSpPr>
+          <p:nvPr>
+            <p:ph type="title"/>
+          </p:nvPr>
+        </p:nvSpPr>
+        <p:spPr/>
+        <p:txBody>
+          <a:bodyPr/>
+          <a:lstStyle/>
+          <a:p>
+            <a:r>
+              <a:rPr lang="en-US" altLang="zh-CN" dirty="0"/>
+              <a:t>Reference:</a:t>
+            </a:r>
+            <a:endParaRPr lang="en-US" dirty="0"/>
+          </a:p>
+        </p:txBody>
+      </p:sp>
+      <p:sp>
+        <p:nvSpPr>
+          <p:cNvPr id="3" name="Content Placeholder 2">
+            <a:extLst>
+              <a:ext uri="{FF2B5EF4-FFF2-40B4-BE49-F238E27FC236}">
+                <a16:creationId xmlns:a16="http://schemas.microsoft.com/office/drawing/2014/main" id="{BA3456FF-E78F-8DA1-FCFF-D93708555E23}"/>
+              </a:ext>
+            </a:extLst>
+          </p:cNvPr>
+          <p:cNvSpPr>
+            <a:spLocks noGrp="1"/>
+          </p:cNvSpPr>
+          <p:nvPr>
+            <p:ph idx="1"/>
+          </p:nvPr>
+        </p:nvSpPr>
+        <p:spPr/>
+        <p:txBody>
+          <a:bodyPr>
+            <a:normAutofit/>
+          </a:bodyPr>
+          <a:lstStyle/>
+          <a:p>
+            <a:r>
+              <a:rPr lang="en-US" sz="2000" dirty="0">
+                <a:hlinkClick r:id="rId2"/>
+              </a:rPr>
+              <a:t>AWS </a:t>
+            </a:r>
+            <a:r>
+              <a:rPr lang="en-US" sz="2000" dirty="0" err="1">
+                <a:hlinkClick r:id="rId2"/>
+              </a:rPr>
+              <a:t>re:Invent</a:t>
+            </a:r>
+            <a:r>
+              <a:rPr lang="en-US" sz="2000" dirty="0">
+                <a:hlinkClick r:id="rId2"/>
+              </a:rPr>
+              <a:t> 2021 - Fannie Mae: Migrating at scale without lifting and shifting</a:t>
+            </a:r>
+            <a:endParaRPr lang="en-US" sz="2000" dirty="0"/>
+          </a:p>
+          <a:p>
+            <a:r>
+              <a:rPr lang="en-US" sz="2000" dirty="0">
+                <a:hlinkClick r:id="rId3"/>
+              </a:rPr>
+              <a:t>Fannie Mae’s Digital Transformation Journey with AWS | Amazon Web Services</a:t>
+            </a:r>
+            <a:endParaRPr lang="en-US" sz="2000" dirty="0"/>
+          </a:p>
+          <a:p>
+            <a:r>
+              <a:rPr lang="en-US" sz="2000" dirty="0">
+                <a:hlinkClick r:id="rId4"/>
+              </a:rPr>
+              <a:t>What is a Cloud Migration Strategy? - Cloud Migration Strategy Explained – AWS</a:t>
+            </a:r>
+            <a:endParaRPr lang="en-US" sz="2000" dirty="0"/>
+          </a:p>
+          <a:p>
+            <a:r>
+              <a:rPr lang="en-US" sz="2000" dirty="0">
+                <a:hlinkClick r:id="rId5"/>
+              </a:rPr>
+              <a:t>Understanding the “7 Rs” - Cloud Migration Strategies | AWS Builder Center</a:t>
+            </a:r>
+            <a:endParaRPr lang="en-US" sz="2000" dirty="0"/>
+          </a:p>
+          <a:p>
+            <a:endParaRPr lang="en-US" sz="2000" dirty="0"/>
+          </a:p>
+        </p:txBody>
+      </p:sp>
+    </p:spTree>
+    <p:extLst>
+      <p:ext uri="{BB962C8B-B14F-4D97-AF65-F5344CB8AC3E}">
+        <p14:creationId xmlns:p14="http://schemas.microsoft.com/office/powerpoint/2010/main" val="1077489760"/>
+      </p:ext>
+    </p:extLst>
+  </p:cSld>
+  <p:clrMapOvr>
+    <a:masterClrMapping/>
+  </p:clrMapOvr>
+</p:sld>
+</file>
+
+<file path=ppt/slides/slide16.xml><?xml version="1.0" encoding="utf-8"?>
+<p:sld xmlns:a="http://schemas.openxmlformats.org/drawingml/2006/main" xmlns:r="http://schemas.openxmlformats.org/officeDocument/2006/relationships" xmlns:p="http://schemas.openxmlformats.org/presentationml/2006/main">
+  <p:cSld>
+    <p:spTree>
+      <p:nvGrpSpPr>
+        <p:cNvPr id="1" name=""/>
+        <p:cNvGrpSpPr/>
+        <p:nvPr/>
+      </p:nvGrpSpPr>
+      <p:grpSpPr>
+        <a:xfrm>
+          <a:off x="0" y="0"/>
+          <a:ext cx="0" cy="0"/>
+          <a:chOff x="0" y="0"/>
+          <a:chExt cx="0" cy="0"/>
+        </a:xfrm>
+      </p:grpSpPr>
+      <p:sp>
+        <p:nvSpPr>
+          <p:cNvPr id="2" name="Title 1">
+            <a:extLst>
+              <a:ext uri="{FF2B5EF4-FFF2-40B4-BE49-F238E27FC236}">
+                <a16:creationId xmlns:a16="http://schemas.microsoft.com/office/drawing/2014/main" id="{082D5B5A-22EB-F6BE-03B9-DA990AE01051}"/>
+              </a:ext>
+            </a:extLst>
+          </p:cNvPr>
+          <p:cNvSpPr>
+            <a:spLocks noGrp="1"/>
+          </p:cNvSpPr>
+          <p:nvPr>
+            <p:ph type="title"/>
+          </p:nvPr>
+        </p:nvSpPr>
+        <p:spPr/>
+        <p:txBody>
+          <a:bodyPr/>
+          <a:lstStyle/>
+          <a:p>
+            <a:r>
+              <a:rPr lang="en-US" dirty="0"/>
+              <a:t>Q&amp;A</a:t>
+            </a:r>
+          </a:p>
+        </p:txBody>
+      </p:sp>
+      <p:sp>
+        <p:nvSpPr>
+          <p:cNvPr id="3" name="Content Placeholder 2">
+            <a:extLst>
+              <a:ext uri="{FF2B5EF4-FFF2-40B4-BE49-F238E27FC236}">
+                <a16:creationId xmlns:a16="http://schemas.microsoft.com/office/drawing/2014/main" id="{BA79DD26-0915-7E46-B9E9-A23C1002591E}"/>
+              </a:ext>
+            </a:extLst>
+          </p:cNvPr>
+          <p:cNvSpPr>
+            <a:spLocks noGrp="1"/>
+          </p:cNvSpPr>
+          <p:nvPr>
+            <p:ph idx="1"/>
+          </p:nvPr>
+        </p:nvSpPr>
+        <p:spPr>
+          <a:xfrm>
+            <a:off x="5029200" y="5414009"/>
+            <a:ext cx="1173480" cy="332423"/>
+          </a:xfrm>
+        </p:spPr>
+        <p:txBody>
+          <a:bodyPr>
+            <a:normAutofit fontScale="62500" lnSpcReduction="20000"/>
+          </a:bodyPr>
+          <a:lstStyle/>
+          <a:p>
+            <a:pPr marL="0" indent="0">
+              <a:buNone/>
+            </a:pPr>
+            <a:r>
+              <a:rPr lang="en-US" dirty="0"/>
+              <a:t>My </a:t>
+            </a:r>
+            <a:r>
+              <a:rPr lang="en-US" dirty="0" err="1"/>
+              <a:t>Github</a:t>
+            </a:r>
+            <a:endParaRPr lang="en-US" dirty="0"/>
+          </a:p>
+        </p:txBody>
+      </p:sp>
+      <p:pic>
+        <p:nvPicPr>
+          <p:cNvPr id="5" name="Picture 4">
+            <a:extLst>
+              <a:ext uri="{FF2B5EF4-FFF2-40B4-BE49-F238E27FC236}">
+                <a16:creationId xmlns:a16="http://schemas.microsoft.com/office/drawing/2014/main" id="{EDC50AFE-4C70-3BD6-2457-93F253C69C25}"/>
+              </a:ext>
+            </a:extLst>
+          </p:cNvPr>
+          <p:cNvPicPr>
+            <a:picLocks noChangeAspect="1"/>
+          </p:cNvPicPr>
+          <p:nvPr/>
+        </p:nvPicPr>
+        <p:blipFill>
+          <a:blip r:embed="rId2"/>
+          <a:stretch>
+            <a:fillRect/>
+          </a:stretch>
+        </p:blipFill>
+        <p:spPr>
+          <a:xfrm>
+            <a:off x="4366260" y="2468880"/>
+            <a:ext cx="2499360" cy="2499360"/>
+          </a:xfrm>
+          <a:prstGeom prst="rect">
+            <a:avLst/>
+          </a:prstGeom>
+        </p:spPr>
+      </p:pic>
+    </p:spTree>
+    <p:extLst>
+      <p:ext uri="{BB962C8B-B14F-4D97-AF65-F5344CB8AC3E}">
+        <p14:creationId xmlns:p14="http://schemas.microsoft.com/office/powerpoint/2010/main" val="354203763"/>
+      </p:ext>
+    </p:extLst>
+  </p:cSld>
+  <p:clrMapOvr>
+    <a:masterClrMapping/>
+  </p:clrMapOvr>
+</p:sld>
+</file>
+
+<file path=ppt/slides/slide2.xml><?xml version="1.0" encoding="utf-8"?>
+<p:sld xmlns:a="http://schemas.openxmlformats.org/drawingml/2006/main" xmlns:r="http://schemas.openxmlformats.org/officeDocument/2006/relationships" xmlns:p="http://schemas.openxmlformats.org/presentationml/2006/main">
+  <p:cSld>
+    <p:spTree>
+      <p:nvGrpSpPr>
+        <p:cNvPr id="1" name=""/>
+        <p:cNvGrpSpPr/>
+        <p:nvPr/>
+      </p:nvGrpSpPr>
+      <p:grpSpPr>
+        <a:xfrm>
+          <a:off x="0" y="0"/>
+          <a:ext cx="0" cy="0"/>
+          <a:chOff x="0" y="0"/>
+          <a:chExt cx="0" cy="0"/>
+        </a:xfrm>
+      </p:grpSpPr>
+      <p:sp>
+        <p:nvSpPr>
+          <p:cNvPr id="2" name="Title 1">
+            <a:extLst>
+              <a:ext uri="{FF2B5EF4-FFF2-40B4-BE49-F238E27FC236}">
+                <a16:creationId xmlns:a16="http://schemas.microsoft.com/office/drawing/2014/main" id="{36350338-C315-D975-5D8F-2109AEE0C6F2}"/>
+              </a:ext>
+            </a:extLst>
+          </p:cNvPr>
+          <p:cNvSpPr>
+            <a:spLocks noGrp="1"/>
+          </p:cNvSpPr>
+          <p:nvPr>
+            <p:ph type="title"/>
+          </p:nvPr>
+        </p:nvSpPr>
+        <p:spPr/>
+        <p:txBody>
+          <a:bodyPr/>
+          <a:lstStyle/>
+          <a:p>
+            <a:r>
+              <a:rPr lang="en-US" dirty="0"/>
+              <a:t>Agenda</a:t>
+            </a:r>
+          </a:p>
+        </p:txBody>
+      </p:sp>
+      <p:sp>
+        <p:nvSpPr>
+          <p:cNvPr id="3" name="Content Placeholder 2">
+            <a:extLst>
+              <a:ext uri="{FF2B5EF4-FFF2-40B4-BE49-F238E27FC236}">
+                <a16:creationId xmlns:a16="http://schemas.microsoft.com/office/drawing/2014/main" id="{CC0E6403-ACCF-DA80-E763-D2DE51B20776}"/>
+              </a:ext>
+            </a:extLst>
+          </p:cNvPr>
+          <p:cNvSpPr>
+            <a:spLocks noGrp="1"/>
+          </p:cNvSpPr>
+          <p:nvPr>
+            <p:ph idx="1"/>
+          </p:nvPr>
+        </p:nvSpPr>
+        <p:spPr/>
+        <p:txBody>
+          <a:bodyPr/>
+          <a:lstStyle/>
+          <a:p>
+            <a:pPr marL="514350" indent="-514350">
+              <a:buFont typeface="+mj-lt"/>
+              <a:buAutoNum type="arabicPeriod"/>
+            </a:pPr>
+            <a:r>
+              <a:rPr lang="en-US" sz="3600" dirty="0"/>
+              <a:t>Background</a:t>
+            </a:r>
+          </a:p>
+          <a:p>
+            <a:pPr marL="514350" indent="-514350">
+              <a:buFont typeface="+mj-lt"/>
+              <a:buAutoNum type="arabicPeriod"/>
+            </a:pPr>
+            <a:r>
+              <a:rPr lang="en-US" sz="3600" dirty="0"/>
+              <a:t>Cloud Migration at Fannie Mae</a:t>
+            </a:r>
+          </a:p>
+          <a:p>
+            <a:pPr marL="514350" indent="-514350">
+              <a:buFont typeface="+mj-lt"/>
+              <a:buAutoNum type="arabicPeriod"/>
+            </a:pPr>
+            <a:r>
+              <a:rPr lang="en-US" sz="3600" dirty="0"/>
+              <a:t>My work in the migration</a:t>
+            </a:r>
+          </a:p>
+          <a:p>
+            <a:pPr marL="514350" indent="-514350">
+              <a:buFont typeface="+mj-lt"/>
+              <a:buAutoNum type="arabicPeriod"/>
+            </a:pPr>
+            <a:r>
+              <a:rPr lang="en-US" sz="3600" dirty="0"/>
+              <a:t>Additional </a:t>
+            </a:r>
+            <a:r>
+              <a:rPr lang="en-US" sz="3600"/>
+              <a:t>value: Accuracy </a:t>
+            </a:r>
+            <a:r>
+              <a:rPr lang="en-US" sz="3600" dirty="0"/>
+              <a:t>and Efficiency </a:t>
+            </a:r>
+          </a:p>
+          <a:p>
+            <a:pPr marL="514350" indent="-514350">
+              <a:buFont typeface="+mj-lt"/>
+              <a:buAutoNum type="arabicPeriod"/>
+            </a:pPr>
+            <a:r>
+              <a:rPr lang="en-US" sz="3600" dirty="0"/>
+              <a:t>Gen AI and future of code conversion</a:t>
+            </a:r>
+          </a:p>
+          <a:p>
+            <a:endParaRPr lang="en-US" dirty="0"/>
+          </a:p>
+          <a:p>
+            <a:endParaRPr lang="en-US" dirty="0"/>
+          </a:p>
+        </p:txBody>
+      </p:sp>
+    </p:spTree>
+    <p:extLst>
+      <p:ext uri="{BB962C8B-B14F-4D97-AF65-F5344CB8AC3E}">
+        <p14:creationId xmlns:p14="http://schemas.microsoft.com/office/powerpoint/2010/main" val="4015355743"/>
+      </p:ext>
+    </p:extLst>
+  </p:cSld>
+  <p:clrMapOvr>
+    <a:masterClrMapping/>
+  </p:clrMapOvr>
+</p:sld>
+</file>
+
+<file path=ppt/slides/slide3.xml><?xml version="1.0" encoding="utf-8"?>
+<p:sld xmlns:a="http://schemas.openxmlformats.org/drawingml/2006/main" xmlns:r="http://schemas.openxmlformats.org/officeDocument/2006/relationships" xmlns:p="http://schemas.openxmlformats.org/presentationml/2006/main">
+  <p:cSld>
+    <p:spTree>
+      <p:nvGrpSpPr>
+        <p:cNvPr id="1" name=""/>
+        <p:cNvGrpSpPr/>
+        <p:nvPr/>
+      </p:nvGrpSpPr>
+      <p:grpSpPr>
+        <a:xfrm>
+          <a:off x="0" y="0"/>
+          <a:ext cx="0" cy="0"/>
+          <a:chOff x="0" y="0"/>
+          <a:chExt cx="0" cy="0"/>
+        </a:xfrm>
+      </p:grpSpPr>
+      <p:sp>
+        <p:nvSpPr>
+          <p:cNvPr id="2" name="Title 1">
+            <a:extLst>
+              <a:ext uri="{FF2B5EF4-FFF2-40B4-BE49-F238E27FC236}">
+                <a16:creationId xmlns:a16="http://schemas.microsoft.com/office/drawing/2014/main" id="{77E4F433-6378-4049-F2C3-EE92E0049A7B}"/>
+              </a:ext>
+            </a:extLst>
+          </p:cNvPr>
+          <p:cNvSpPr>
+            <a:spLocks noGrp="1"/>
+          </p:cNvSpPr>
+          <p:nvPr>
+            <p:ph type="title"/>
+          </p:nvPr>
+        </p:nvSpPr>
+        <p:spPr/>
+        <p:txBody>
+          <a:bodyPr/>
+          <a:lstStyle/>
+          <a:p>
+            <a:r>
+              <a:rPr lang="en-US" dirty="0"/>
+              <a:t>1.Background</a:t>
+            </a:r>
+          </a:p>
+        </p:txBody>
+      </p:sp>
+      <p:sp>
+        <p:nvSpPr>
+          <p:cNvPr id="3" name="Content Placeholder 2">
+            <a:extLst>
+              <a:ext uri="{FF2B5EF4-FFF2-40B4-BE49-F238E27FC236}">
+                <a16:creationId xmlns:a16="http://schemas.microsoft.com/office/drawing/2014/main" id="{FF3838B1-29DE-A684-2D91-585BAAF4FB7E}"/>
+              </a:ext>
+            </a:extLst>
+          </p:cNvPr>
+          <p:cNvSpPr>
+            <a:spLocks noGrp="1"/>
+          </p:cNvSpPr>
+          <p:nvPr>
+            <p:ph idx="1"/>
+          </p:nvPr>
+        </p:nvSpPr>
+        <p:spPr>
+          <a:xfrm>
+            <a:off x="838200" y="1825625"/>
+            <a:ext cx="10515600" cy="585066"/>
+          </a:xfrm>
+        </p:spPr>
+        <p:txBody>
+          <a:bodyPr/>
+          <a:lstStyle/>
+          <a:p>
+            <a:r>
+              <a:rPr lang="en-US" dirty="0"/>
+              <a:t>What is the problem and why</a:t>
+            </a:r>
+          </a:p>
+          <a:p>
+            <a:endParaRPr lang="en-US" dirty="0"/>
+          </a:p>
+        </p:txBody>
+      </p:sp>
+      <p:pic>
+        <p:nvPicPr>
+          <p:cNvPr id="4" name="Picture 3">
+            <a:extLst>
+              <a:ext uri="{FF2B5EF4-FFF2-40B4-BE49-F238E27FC236}">
+                <a16:creationId xmlns:a16="http://schemas.microsoft.com/office/drawing/2014/main" id="{BCDAE49C-C251-F75B-7AAE-63C6E1173405}"/>
+              </a:ext>
+            </a:extLst>
+          </p:cNvPr>
+          <p:cNvPicPr>
+            <a:picLocks noChangeAspect="1"/>
+          </p:cNvPicPr>
+          <p:nvPr/>
+        </p:nvPicPr>
+        <p:blipFill>
+          <a:blip r:embed="rId2"/>
+          <a:stretch>
+            <a:fillRect/>
+          </a:stretch>
+        </p:blipFill>
+        <p:spPr>
+          <a:xfrm>
+            <a:off x="710400" y="2273598"/>
+            <a:ext cx="2638011" cy="1384610"/>
+          </a:xfrm>
+          <a:prstGeom prst="rect">
+            <a:avLst/>
+          </a:prstGeom>
+        </p:spPr>
+      </p:pic>
+      <p:pic>
+        <p:nvPicPr>
+          <p:cNvPr id="5" name="Picture 4">
+            <a:extLst>
+              <a:ext uri="{FF2B5EF4-FFF2-40B4-BE49-F238E27FC236}">
+                <a16:creationId xmlns:a16="http://schemas.microsoft.com/office/drawing/2014/main" id="{108087BF-A1B2-3CB3-9920-38BE92E30EDC}"/>
+              </a:ext>
+            </a:extLst>
+          </p:cNvPr>
+          <p:cNvPicPr>
+            <a:picLocks noChangeAspect="1"/>
+          </p:cNvPicPr>
+          <p:nvPr/>
+        </p:nvPicPr>
+        <p:blipFill>
+          <a:blip r:embed="rId3"/>
+          <a:stretch>
+            <a:fillRect/>
+          </a:stretch>
+        </p:blipFill>
+        <p:spPr>
+          <a:xfrm>
+            <a:off x="931236" y="3623715"/>
+            <a:ext cx="1290890" cy="861801"/>
+          </a:xfrm>
+          <a:prstGeom prst="rect">
+            <a:avLst/>
+          </a:prstGeom>
+        </p:spPr>
+      </p:pic>
+      <p:pic>
+        <p:nvPicPr>
+          <p:cNvPr id="6" name="Picture 5">
+            <a:extLst>
+              <a:ext uri="{FF2B5EF4-FFF2-40B4-BE49-F238E27FC236}">
+                <a16:creationId xmlns:a16="http://schemas.microsoft.com/office/drawing/2014/main" id="{8D1A128A-3E1F-2F81-712A-3809EA2ACB2A}"/>
+              </a:ext>
+            </a:extLst>
+          </p:cNvPr>
+          <p:cNvPicPr>
+            <a:picLocks noChangeAspect="1"/>
+          </p:cNvPicPr>
+          <p:nvPr/>
+        </p:nvPicPr>
+        <p:blipFill>
+          <a:blip r:embed="rId4"/>
+          <a:stretch>
+            <a:fillRect/>
+          </a:stretch>
+        </p:blipFill>
+        <p:spPr>
+          <a:xfrm>
+            <a:off x="6969180" y="1690688"/>
+            <a:ext cx="4512420" cy="3736848"/>
+          </a:xfrm>
+          <a:prstGeom prst="rect">
+            <a:avLst/>
+          </a:prstGeom>
+        </p:spPr>
+      </p:pic>
+      <p:sp>
+        <p:nvSpPr>
+          <p:cNvPr id="8" name="TextBox 7">
+            <a:extLst>
+              <a:ext uri="{FF2B5EF4-FFF2-40B4-BE49-F238E27FC236}">
+                <a16:creationId xmlns:a16="http://schemas.microsoft.com/office/drawing/2014/main" id="{1302E16F-7A83-3FFA-BF0B-8B32BA61716B}"/>
+              </a:ext>
+            </a:extLst>
+          </p:cNvPr>
+          <p:cNvSpPr txBox="1"/>
+          <p:nvPr/>
+        </p:nvSpPr>
+        <p:spPr>
+          <a:xfrm>
+            <a:off x="7985760" y="931768"/>
+            <a:ext cx="2950755" cy="369332"/>
+          </a:xfrm>
+          <a:prstGeom prst="rect">
+            <a:avLst/>
+          </a:prstGeom>
+          <a:noFill/>
+        </p:spPr>
+        <p:txBody>
+          <a:bodyPr wrap="square">
+            <a:spAutoFit/>
+          </a:bodyPr>
+          <a:lstStyle/>
+          <a:p>
+            <a:r>
+              <a:rPr lang="en-US" dirty="0"/>
+              <a:t>7 Rs in AWS Cloud Migration</a:t>
+            </a:r>
+          </a:p>
+        </p:txBody>
+      </p:sp>
+      <p:pic>
+        <p:nvPicPr>
+          <p:cNvPr id="7" name="Picture 6">
+            <a:extLst>
+              <a:ext uri="{FF2B5EF4-FFF2-40B4-BE49-F238E27FC236}">
+                <a16:creationId xmlns:a16="http://schemas.microsoft.com/office/drawing/2014/main" id="{C5282124-3EF7-4252-3560-5FC11F8C46FF}"/>
+              </a:ext>
+            </a:extLst>
+          </p:cNvPr>
+          <p:cNvPicPr>
+            <a:picLocks noChangeAspect="1"/>
+          </p:cNvPicPr>
+          <p:nvPr/>
+        </p:nvPicPr>
+        <p:blipFill>
+          <a:blip r:embed="rId5"/>
+          <a:stretch>
+            <a:fillRect/>
+          </a:stretch>
+        </p:blipFill>
+        <p:spPr>
+          <a:xfrm>
+            <a:off x="931236" y="5194362"/>
+            <a:ext cx="1877291" cy="769689"/>
+          </a:xfrm>
+          <a:prstGeom prst="rect">
+            <a:avLst/>
+          </a:prstGeom>
+        </p:spPr>
+      </p:pic>
+      <p:pic>
+        <p:nvPicPr>
+          <p:cNvPr id="9" name="Picture 8">
+            <a:extLst>
+              <a:ext uri="{FF2B5EF4-FFF2-40B4-BE49-F238E27FC236}">
+                <a16:creationId xmlns:a16="http://schemas.microsoft.com/office/drawing/2014/main" id="{E37C989E-9BF8-3A3A-3F0C-0FFB67224333}"/>
+              </a:ext>
+            </a:extLst>
+          </p:cNvPr>
+          <p:cNvPicPr>
+            <a:picLocks noChangeAspect="1"/>
+          </p:cNvPicPr>
+          <p:nvPr/>
+        </p:nvPicPr>
+        <p:blipFill>
+          <a:blip r:embed="rId6"/>
+          <a:stretch>
+            <a:fillRect/>
+          </a:stretch>
+        </p:blipFill>
+        <p:spPr>
+          <a:xfrm>
+            <a:off x="3817118" y="3501925"/>
+            <a:ext cx="2143471" cy="803156"/>
+          </a:xfrm>
+          <a:prstGeom prst="rect">
+            <a:avLst/>
+          </a:prstGeom>
+        </p:spPr>
+      </p:pic>
+      <p:pic>
+        <p:nvPicPr>
+          <p:cNvPr id="10" name="Picture 9">
+            <a:extLst>
+              <a:ext uri="{FF2B5EF4-FFF2-40B4-BE49-F238E27FC236}">
+                <a16:creationId xmlns:a16="http://schemas.microsoft.com/office/drawing/2014/main" id="{0DBA16AA-692D-7041-DE6B-C2AAAA535BBC}"/>
+              </a:ext>
+            </a:extLst>
+          </p:cNvPr>
+          <p:cNvPicPr>
+            <a:picLocks noChangeAspect="1"/>
+          </p:cNvPicPr>
+          <p:nvPr/>
+        </p:nvPicPr>
+        <p:blipFill>
+          <a:blip r:embed="rId7"/>
+          <a:stretch>
+            <a:fillRect/>
+          </a:stretch>
+        </p:blipFill>
+        <p:spPr>
+          <a:xfrm>
+            <a:off x="3791690" y="4997264"/>
+            <a:ext cx="2862262" cy="966787"/>
+          </a:xfrm>
+          <a:prstGeom prst="rect">
+            <a:avLst/>
+          </a:prstGeom>
+        </p:spPr>
+      </p:pic>
+    </p:spTree>
+    <p:extLst>
+      <p:ext uri="{BB962C8B-B14F-4D97-AF65-F5344CB8AC3E}">
+        <p14:creationId xmlns:p14="http://schemas.microsoft.com/office/powerpoint/2010/main" val="2985780587"/>
+      </p:ext>
+    </p:extLst>
+  </p:cSld>
+  <p:clrMapOvr>
+    <a:masterClrMapping/>
+  </p:clrMapOvr>
+</p:sld>
+</file>
+
+<file path=ppt/slides/slide4.xml><?xml version="1.0" encoding="utf-8"?>
+<p:sld xmlns:a="http://schemas.openxmlformats.org/drawingml/2006/main" xmlns:r="http://schemas.openxmlformats.org/officeDocument/2006/relationships" xmlns:p="http://schemas.openxmlformats.org/presentationml/2006/main">
+  <p:cSld>
+    <p:spTree>
+      <p:nvGrpSpPr>
+        <p:cNvPr id="1" name=""/>
+        <p:cNvGrpSpPr/>
+        <p:nvPr/>
+      </p:nvGrpSpPr>
+      <p:grpSpPr>
+        <a:xfrm>
+          <a:off x="0" y="0"/>
+          <a:ext cx="0" cy="0"/>
+          <a:chOff x="0" y="0"/>
+          <a:chExt cx="0" cy="0"/>
+        </a:xfrm>
+      </p:grpSpPr>
+      <p:sp>
+        <p:nvSpPr>
+          <p:cNvPr id="2" name="Title 1">
+            <a:extLst>
+              <a:ext uri="{FF2B5EF4-FFF2-40B4-BE49-F238E27FC236}">
+                <a16:creationId xmlns:a16="http://schemas.microsoft.com/office/drawing/2014/main" id="{BA84EECB-BE89-FA10-B559-C2D06E9BFD18}"/>
+              </a:ext>
+            </a:extLst>
+          </p:cNvPr>
+          <p:cNvSpPr>
+            <a:spLocks noGrp="1"/>
+          </p:cNvSpPr>
+          <p:nvPr>
+            <p:ph type="title"/>
+          </p:nvPr>
+        </p:nvSpPr>
+        <p:spPr/>
+        <p:txBody>
+          <a:bodyPr/>
+          <a:lstStyle/>
+          <a:p>
+            <a:r>
+              <a:rPr lang="en-US" dirty="0"/>
+              <a:t>2.Cloud Migration in Fannie Mae</a:t>
+            </a:r>
+          </a:p>
+        </p:txBody>
+      </p:sp>
+      <p:sp>
+        <p:nvSpPr>
+          <p:cNvPr id="3" name="Content Placeholder 2">
+            <a:extLst>
+              <a:ext uri="{FF2B5EF4-FFF2-40B4-BE49-F238E27FC236}">
+                <a16:creationId xmlns:a16="http://schemas.microsoft.com/office/drawing/2014/main" id="{D79C73C9-79BC-BE4B-D99B-67D620D66A20}"/>
+              </a:ext>
+            </a:extLst>
+          </p:cNvPr>
+          <p:cNvSpPr>
+            <a:spLocks noGrp="1"/>
+          </p:cNvSpPr>
+          <p:nvPr>
+            <p:ph idx="1"/>
+          </p:nvPr>
+        </p:nvSpPr>
+        <p:spPr/>
+        <p:txBody>
+          <a:bodyPr/>
+          <a:lstStyle/>
+          <a:p>
+            <a:r>
+              <a:rPr lang="en-US" dirty="0"/>
+              <a:t>What has been done about it?</a:t>
+            </a:r>
+          </a:p>
+          <a:p>
+            <a:endParaRPr lang="en-US" dirty="0"/>
+          </a:p>
+        </p:txBody>
+      </p:sp>
+    </p:spTree>
+    <p:extLst>
+      <p:ext uri="{BB962C8B-B14F-4D97-AF65-F5344CB8AC3E}">
+        <p14:creationId xmlns:p14="http://schemas.microsoft.com/office/powerpoint/2010/main" val="3421866799"/>
+      </p:ext>
+    </p:extLst>
+  </p:cSld>
+  <p:clrMapOvr>
+    <a:masterClrMapping/>
+  </p:clrMapOvr>
+</p:sld>
+</file>
+
+<file path=ppt/slides/slide5.xml><?xml version="1.0" encoding="utf-8"?>
+<p:sld xmlns:a="http://schemas.openxmlformats.org/drawingml/2006/main" xmlns:r="http://schemas.openxmlformats.org/officeDocument/2006/relationships" xmlns:p="http://schemas.openxmlformats.org/presentationml/2006/main">
+  <p:cSld>
+    <p:spTree>
+      <p:nvGrpSpPr>
+        <p:cNvPr id="1" name="">
+          <a:extLst>
+            <a:ext uri="{FF2B5EF4-FFF2-40B4-BE49-F238E27FC236}">
+              <a16:creationId xmlns:a16="http://schemas.microsoft.com/office/drawing/2014/main" id="{1A9886BA-7B79-D560-2DEE-637F0E8C8C47}"/>
+            </a:ext>
+          </a:extLst>
+        </p:cNvPr>
+        <p:cNvGrpSpPr/>
+        <p:nvPr/>
+      </p:nvGrpSpPr>
+      <p:grpSpPr>
+        <a:xfrm>
+          <a:off x="0" y="0"/>
+          <a:ext cx="0" cy="0"/>
+          <a:chOff x="0" y="0"/>
+          <a:chExt cx="0" cy="0"/>
+        </a:xfrm>
+      </p:grpSpPr>
+      <p:sp>
+        <p:nvSpPr>
+          <p:cNvPr id="2" name="Title 1">
+            <a:extLst>
+              <a:ext uri="{FF2B5EF4-FFF2-40B4-BE49-F238E27FC236}">
+                <a16:creationId xmlns:a16="http://schemas.microsoft.com/office/drawing/2014/main" id="{C7C7F5B2-2031-0D7D-9030-AC5DD355EB1E}"/>
+              </a:ext>
+            </a:extLst>
+          </p:cNvPr>
+          <p:cNvSpPr>
+            <a:spLocks noGrp="1"/>
+          </p:cNvSpPr>
+          <p:nvPr>
+            <p:ph type="title"/>
+          </p:nvPr>
+        </p:nvSpPr>
+        <p:spPr/>
+        <p:txBody>
+          <a:bodyPr/>
+          <a:lstStyle/>
+          <a:p>
+            <a:r>
+              <a:rPr lang="en-US" dirty="0"/>
+              <a:t>3. My work in the Migration</a:t>
+            </a:r>
+          </a:p>
+        </p:txBody>
+      </p:sp>
+      <p:sp>
+        <p:nvSpPr>
+          <p:cNvPr id="3" name="Content Placeholder 2">
+            <a:extLst>
+              <a:ext uri="{FF2B5EF4-FFF2-40B4-BE49-F238E27FC236}">
+                <a16:creationId xmlns:a16="http://schemas.microsoft.com/office/drawing/2014/main" id="{8BECAF14-6B14-4040-C260-9DEF69839E97}"/>
+              </a:ext>
+            </a:extLst>
+          </p:cNvPr>
+          <p:cNvSpPr>
+            <a:spLocks noGrp="1"/>
+          </p:cNvSpPr>
+          <p:nvPr>
+            <p:ph idx="1"/>
+          </p:nvPr>
+        </p:nvSpPr>
+        <p:spPr/>
+        <p:txBody>
+          <a:bodyPr/>
+          <a:lstStyle/>
+          <a:p>
+            <a:r>
+              <a:rPr lang="en-US" dirty="0"/>
+              <a:t>What has been done about it?</a:t>
+            </a:r>
+          </a:p>
+          <a:p>
+            <a:r>
+              <a:rPr lang="en-US" dirty="0"/>
+              <a:t>EMA team single family loss severity and cash flow.</a:t>
+            </a:r>
+          </a:p>
+          <a:p>
+            <a:r>
+              <a:rPr lang="en-US" dirty="0"/>
+              <a:t>Loss severity = dollar loss / unpaid principle balance(UPB)</a:t>
+            </a:r>
+          </a:p>
+          <a:p>
+            <a:endParaRPr lang="en-US" dirty="0"/>
+          </a:p>
+          <a:p>
+            <a:endParaRPr lang="en-US" dirty="0"/>
+          </a:p>
+        </p:txBody>
+      </p:sp>
+    </p:spTree>
+    <p:extLst>
+      <p:ext uri="{BB962C8B-B14F-4D97-AF65-F5344CB8AC3E}">
+        <p14:creationId xmlns:p14="http://schemas.microsoft.com/office/powerpoint/2010/main" val="1147120113"/>
+      </p:ext>
+    </p:extLst>
+  </p:cSld>
+  <p:clrMapOvr>
+    <a:masterClrMapping/>
+  </p:clrMapOvr>
+</p:sld>
+</file>
+
+<file path=ppt/slides/slide6.xml><?xml version="1.0" encoding="utf-8"?>
+<p:sld xmlns:a="http://schemas.openxmlformats.org/drawingml/2006/main" xmlns:r="http://schemas.openxmlformats.org/officeDocument/2006/relationships" xmlns:p="http://schemas.openxmlformats.org/presentationml/2006/main">
+  <p:cSld>
+    <p:spTree>
+      <p:nvGrpSpPr>
+        <p:cNvPr id="1" name=""/>
+        <p:cNvGrpSpPr/>
+        <p:nvPr/>
+      </p:nvGrpSpPr>
+      <p:grpSpPr>
+        <a:xfrm>
+          <a:off x="0" y="0"/>
+          <a:ext cx="0" cy="0"/>
+          <a:chOff x="0" y="0"/>
+          <a:chExt cx="0" cy="0"/>
+        </a:xfrm>
+      </p:grpSpPr>
+      <p:sp>
+        <p:nvSpPr>
+          <p:cNvPr id="2" name="Title 1">
+            <a:extLst>
+              <a:ext uri="{FF2B5EF4-FFF2-40B4-BE49-F238E27FC236}">
+                <a16:creationId xmlns:a16="http://schemas.microsoft.com/office/drawing/2014/main" id="{8DB06789-BA5D-116A-9606-AAEF943A72D0}"/>
+              </a:ext>
+            </a:extLst>
+          </p:cNvPr>
+          <p:cNvSpPr>
+            <a:spLocks noGrp="1"/>
+          </p:cNvSpPr>
+          <p:nvPr>
+            <p:ph type="title"/>
+          </p:nvPr>
+        </p:nvSpPr>
+        <p:spPr/>
+        <p:txBody>
+          <a:bodyPr/>
+          <a:lstStyle/>
+          <a:p>
+            <a:r>
+              <a:rPr lang="en-US" dirty="0"/>
+              <a:t>Steps for refactoring</a:t>
+            </a:r>
+          </a:p>
+        </p:txBody>
+      </p:sp>
+      <p:graphicFrame>
+        <p:nvGraphicFramePr>
+          <p:cNvPr id="10" name="Content Placeholder 9">
+            <a:extLst>
+              <a:ext uri="{FF2B5EF4-FFF2-40B4-BE49-F238E27FC236}">
+                <a16:creationId xmlns:a16="http://schemas.microsoft.com/office/drawing/2014/main" id="{A65D244A-BC2B-A613-E67C-48CF73C5F636}"/>
+              </a:ext>
+            </a:extLst>
+          </p:cNvPr>
+          <p:cNvGraphicFramePr>
+            <a:graphicFrameLocks noGrp="1"/>
+          </p:cNvGraphicFramePr>
+          <p:nvPr>
+            <p:ph idx="1"/>
+            <p:extLst>
+              <p:ext uri="{D42A27DB-BD31-4B8C-83A1-F6EECF244321}">
+                <p14:modId xmlns:p14="http://schemas.microsoft.com/office/powerpoint/2010/main" val="2901776967"/>
+              </p:ext>
+            </p:extLst>
+          </p:nvPr>
+        </p:nvGraphicFramePr>
+        <p:xfrm>
+          <a:off x="146649" y="1525848"/>
+          <a:ext cx="11826815" cy="1705033"/>
+        </p:xfrm>
+        <a:graphic>
+          <a:graphicData uri="http://schemas.openxmlformats.org/drawingml/2006/diagram">
+            <dgm:relIds xmlns:dgm="http://schemas.openxmlformats.org/drawingml/2006/diagram" xmlns:r="http://schemas.openxmlformats.org/officeDocument/2006/relationships" r:dm="rId2" r:lo="rId3" r:qs="rId4" r:cs="rId5"/>
+          </a:graphicData>
+        </a:graphic>
+      </p:graphicFrame>
+      <p:sp>
+        <p:nvSpPr>
+          <p:cNvPr id="12" name="Content Placeholder 2">
+            <a:extLst>
+              <a:ext uri="{FF2B5EF4-FFF2-40B4-BE49-F238E27FC236}">
+                <a16:creationId xmlns:a16="http://schemas.microsoft.com/office/drawing/2014/main" id="{B6AB3908-57C4-C0B7-4C30-8AC2917A9C16}"/>
+              </a:ext>
+            </a:extLst>
+          </p:cNvPr>
+          <p:cNvSpPr txBox="1">
+            <a:spLocks/>
+          </p:cNvSpPr>
+          <p:nvPr/>
+        </p:nvSpPr>
+        <p:spPr>
+          <a:xfrm>
+            <a:off x="146648" y="3079730"/>
+            <a:ext cx="3087153" cy="3200300"/>
+          </a:xfrm>
+          <a:prstGeom prst="rect">
+            <a:avLst/>
+          </a:prstGeom>
+        </p:spPr>
+        <p:txBody>
+          <a:bodyPr vert="horz" lIns="91440" tIns="45720" rIns="91440" bIns="45720" rtlCol="0">
+            <a:normAutofit fontScale="25000" lnSpcReduction="20000"/>
+          </a:bodyPr>
+          <a:lstStyle>
+            <a:lvl1pPr marL="228600" indent="-228600" algn="l" defTabSz="914400" rtl="0" eaLnBrk="1" latinLnBrk="0" hangingPunct="1">
+              <a:lnSpc>
+                <a:spcPct val="90000"/>
+              </a:lnSpc>
+              <a:spcBef>
+                <a:spcPts val="1000"/>
+              </a:spcBef>
+              <a:buFont typeface="Arial" panose="020B0604020202020204" pitchFamily="34" charset="0"/>
+              <a:buChar char="•"/>
+              <a:defRPr sz="2800" kern="1200">
+                <a:solidFill>
+                  <a:schemeClr val="tx1"/>
+                </a:solidFill>
+                <a:latin typeface="+mn-lt"/>
+                <a:ea typeface="+mn-ea"/>
+                <a:cs typeface="+mn-cs"/>
+              </a:defRPr>
+            </a:lvl1pPr>
+            <a:lvl2pPr marL="685800" indent="-228600" algn="l" defTabSz="914400" rtl="0" eaLnBrk="1" latinLnBrk="0" hangingPunct="1">
+              <a:lnSpc>
+                <a:spcPct val="90000"/>
+              </a:lnSpc>
+              <a:spcBef>
+                <a:spcPts val="500"/>
+              </a:spcBef>
+              <a:buFont typeface="Arial" panose="020B0604020202020204" pitchFamily="34" charset="0"/>
+              <a:buChar char="•"/>
+              <a:defRPr sz="2400" kern="1200">
+                <a:solidFill>
+                  <a:schemeClr val="tx1"/>
+                </a:solidFill>
+                <a:latin typeface="+mn-lt"/>
+                <a:ea typeface="+mn-ea"/>
+                <a:cs typeface="+mn-cs"/>
+              </a:defRPr>
+            </a:lvl2pPr>
+            <a:lvl3pPr marL="1143000" indent="-228600" algn="l" defTabSz="914400" rtl="0" eaLnBrk="1" latinLnBrk="0" hangingPunct="1">
+              <a:lnSpc>
+                <a:spcPct val="90000"/>
+              </a:lnSpc>
+              <a:spcBef>
+                <a:spcPts val="500"/>
+              </a:spcBef>
+              <a:buFont typeface="Arial" panose="020B0604020202020204" pitchFamily="34" charset="0"/>
+              <a:buChar char="•"/>
+              <a:defRPr sz="2000" kern="1200">
+                <a:solidFill>
+                  <a:schemeClr val="tx1"/>
+                </a:solidFill>
+                <a:latin typeface="+mn-lt"/>
+                <a:ea typeface="+mn-ea"/>
+                <a:cs typeface="+mn-cs"/>
+              </a:defRPr>
+            </a:lvl3pPr>
+            <a:lvl4pPr marL="1600200" indent="-228600" algn="l" defTabSz="914400" rtl="0" eaLnBrk="1" latinLnBrk="0" hangingPunct="1">
+              <a:lnSpc>
+                <a:spcPct val="90000"/>
+              </a:lnSpc>
+              <a:spcBef>
+                <a:spcPts val="500"/>
+              </a:spcBef>
+              <a:buFont typeface="Arial" panose="020B0604020202020204" pitchFamily="34" charset="0"/>
+              <a:buChar char="•"/>
+              <a:defRPr sz="1800" kern="1200">
+                <a:solidFill>
+                  <a:schemeClr val="tx1"/>
+                </a:solidFill>
+                <a:latin typeface="+mn-lt"/>
+                <a:ea typeface="+mn-ea"/>
+                <a:cs typeface="+mn-cs"/>
+              </a:defRPr>
+            </a:lvl4pPr>
+            <a:lvl5pPr marL="2057400" indent="-228600" algn="l" defTabSz="914400" rtl="0" eaLnBrk="1" latinLnBrk="0" hangingPunct="1">
+              <a:lnSpc>
+                <a:spcPct val="90000"/>
+              </a:lnSpc>
+              <a:spcBef>
+                <a:spcPts val="500"/>
+              </a:spcBef>
+              <a:buFont typeface="Arial" panose="020B0604020202020204" pitchFamily="34" charset="0"/>
+              <a:buChar char="•"/>
+              <a:defRPr sz="1800" kern="1200">
+                <a:solidFill>
+                  <a:schemeClr val="tx1"/>
+                </a:solidFill>
+                <a:latin typeface="+mn-lt"/>
+                <a:ea typeface="+mn-ea"/>
+                <a:cs typeface="+mn-cs"/>
+              </a:defRPr>
+            </a:lvl5pPr>
+            <a:lvl6pPr marL="2514600" indent="-228600" algn="l" defTabSz="914400" rtl="0" eaLnBrk="1" latinLnBrk="0" hangingPunct="1">
+              <a:lnSpc>
+                <a:spcPct val="90000"/>
+              </a:lnSpc>
+              <a:spcBef>
+                <a:spcPts val="500"/>
+              </a:spcBef>
+              <a:buFont typeface="Arial" panose="020B0604020202020204" pitchFamily="34" charset="0"/>
+              <a:buChar char="•"/>
+              <a:defRPr sz="1800" kern="1200">
+                <a:solidFill>
+                  <a:schemeClr val="tx1"/>
+                </a:solidFill>
+                <a:latin typeface="+mn-lt"/>
+                <a:ea typeface="+mn-ea"/>
+                <a:cs typeface="+mn-cs"/>
+              </a:defRPr>
+            </a:lvl6pPr>
+            <a:lvl7pPr marL="2971800" indent="-228600" algn="l" defTabSz="914400" rtl="0" eaLnBrk="1" latinLnBrk="0" hangingPunct="1">
+              <a:lnSpc>
+                <a:spcPct val="90000"/>
+              </a:lnSpc>
+              <a:spcBef>
+                <a:spcPts val="500"/>
+              </a:spcBef>
+              <a:buFont typeface="Arial" panose="020B0604020202020204" pitchFamily="34" charset="0"/>
+              <a:buChar char="•"/>
+              <a:defRPr sz="1800" kern="1200">
+                <a:solidFill>
+                  <a:schemeClr val="tx1"/>
+                </a:solidFill>
+                <a:latin typeface="+mn-lt"/>
+                <a:ea typeface="+mn-ea"/>
+                <a:cs typeface="+mn-cs"/>
+              </a:defRPr>
+            </a:lvl7pPr>
+            <a:lvl8pPr marL="3429000" indent="-228600" algn="l" defTabSz="914400" rtl="0" eaLnBrk="1" latinLnBrk="0" hangingPunct="1">
+              <a:lnSpc>
+                <a:spcPct val="90000"/>
+              </a:lnSpc>
+              <a:spcBef>
+                <a:spcPts val="500"/>
+              </a:spcBef>
+              <a:buFont typeface="Arial" panose="020B0604020202020204" pitchFamily="34" charset="0"/>
+              <a:buChar char="•"/>
+              <a:defRPr sz="1800" kern="1200">
+                <a:solidFill>
+                  <a:schemeClr val="tx1"/>
+                </a:solidFill>
+                <a:latin typeface="+mn-lt"/>
+                <a:ea typeface="+mn-ea"/>
+                <a:cs typeface="+mn-cs"/>
+              </a:defRPr>
+            </a:lvl8pPr>
+            <a:lvl9pPr marL="3886200" indent="-228600" algn="l" defTabSz="914400" rtl="0" eaLnBrk="1" latinLnBrk="0" hangingPunct="1">
+              <a:lnSpc>
+                <a:spcPct val="90000"/>
+              </a:lnSpc>
+              <a:spcBef>
+                <a:spcPts val="500"/>
+              </a:spcBef>
+              <a:buFont typeface="Arial" panose="020B0604020202020204" pitchFamily="34" charset="0"/>
+              <a:buChar char="•"/>
+              <a:defRPr sz="1800" kern="1200">
+                <a:solidFill>
+                  <a:schemeClr val="tx1"/>
+                </a:solidFill>
+                <a:latin typeface="+mn-lt"/>
+                <a:ea typeface="+mn-ea"/>
+                <a:cs typeface="+mn-cs"/>
+              </a:defRPr>
+            </a:lvl9pPr>
+          </a:lstStyle>
+          <a:p>
+            <a:r>
+              <a:rPr lang="en-US" sz="7400" dirty="0"/>
+              <a:t>Convert sas7bdat to </a:t>
+            </a:r>
+            <a:r>
+              <a:rPr lang="en-US" sz="7400" dirty="0" err="1"/>
+              <a:t>rds</a:t>
+            </a:r>
+            <a:endParaRPr lang="en-US" sz="7400" dirty="0"/>
+          </a:p>
+          <a:p>
+            <a:r>
+              <a:rPr lang="en-US" sz="7400" dirty="0"/>
+              <a:t>Import dataset</a:t>
+            </a:r>
+          </a:p>
+          <a:p>
+            <a:r>
+              <a:rPr lang="en-US" sz="7400" dirty="0"/>
+              <a:t>Data format: sas7bdat/</a:t>
+            </a:r>
+            <a:r>
+              <a:rPr lang="en-US" sz="7400" dirty="0" err="1"/>
+              <a:t>rds</a:t>
+            </a:r>
+            <a:r>
+              <a:rPr lang="en-US" sz="7400" dirty="0"/>
+              <a:t>/parquet</a:t>
+            </a:r>
+          </a:p>
+          <a:p>
+            <a:endParaRPr lang="en-US" sz="7400" dirty="0"/>
+          </a:p>
+          <a:p>
+            <a:r>
+              <a:rPr lang="en-US" sz="7400" dirty="0"/>
+              <a:t>date/month/time,</a:t>
+            </a:r>
+          </a:p>
+          <a:p>
+            <a:r>
+              <a:rPr lang="en-US" altLang="zh-CN" sz="7400" dirty="0"/>
+              <a:t>Origin date</a:t>
+            </a:r>
+            <a:endParaRPr lang="en-US" sz="7400" dirty="0"/>
+          </a:p>
+          <a:p>
+            <a:r>
+              <a:rPr lang="en-US" sz="7400" dirty="0"/>
+              <a:t>missing values, </a:t>
+            </a:r>
+          </a:p>
+          <a:p>
+            <a:r>
+              <a:rPr lang="en-US" sz="7400" dirty="0"/>
+              <a:t>N/A </a:t>
+            </a:r>
+          </a:p>
+          <a:p>
+            <a:r>
+              <a:rPr lang="en-US" sz="7400" dirty="0"/>
+              <a:t>Updated monthly</a:t>
+            </a:r>
+          </a:p>
+          <a:p>
+            <a:endParaRPr lang="en-US" dirty="0"/>
+          </a:p>
+        </p:txBody>
+      </p:sp>
+      <p:sp>
+        <p:nvSpPr>
+          <p:cNvPr id="13" name="Content Placeholder 2">
+            <a:extLst>
+              <a:ext uri="{FF2B5EF4-FFF2-40B4-BE49-F238E27FC236}">
+                <a16:creationId xmlns:a16="http://schemas.microsoft.com/office/drawing/2014/main" id="{F1472C4E-723B-DF16-860A-479E2B15B381}"/>
+              </a:ext>
+            </a:extLst>
+          </p:cNvPr>
+          <p:cNvSpPr txBox="1">
+            <a:spLocks/>
+          </p:cNvSpPr>
+          <p:nvPr/>
+        </p:nvSpPr>
+        <p:spPr>
+          <a:xfrm>
+            <a:off x="3260785" y="3079730"/>
+            <a:ext cx="3022456" cy="3413145"/>
+          </a:xfrm>
+          <a:prstGeom prst="rect">
+            <a:avLst/>
+          </a:prstGeom>
+        </p:spPr>
+        <p:txBody>
+          <a:bodyPr vert="horz" lIns="91440" tIns="45720" rIns="91440" bIns="45720" rtlCol="0">
+            <a:normAutofit fontScale="92500" lnSpcReduction="10000"/>
+          </a:bodyPr>
+          <a:lstStyle>
+            <a:lvl1pPr marL="228600" indent="-228600" algn="l" defTabSz="914400" rtl="0" eaLnBrk="1" latinLnBrk="0" hangingPunct="1">
+              <a:lnSpc>
+                <a:spcPct val="90000"/>
+              </a:lnSpc>
+              <a:spcBef>
+                <a:spcPts val="1000"/>
+              </a:spcBef>
+              <a:buFont typeface="Arial" panose="020B0604020202020204" pitchFamily="34" charset="0"/>
+              <a:buChar char="•"/>
+              <a:defRPr sz="2800" kern="1200">
+                <a:solidFill>
+                  <a:schemeClr val="tx1"/>
+                </a:solidFill>
+                <a:latin typeface="+mn-lt"/>
+                <a:ea typeface="+mn-ea"/>
+                <a:cs typeface="+mn-cs"/>
+              </a:defRPr>
+            </a:lvl1pPr>
+            <a:lvl2pPr marL="685800" indent="-228600" algn="l" defTabSz="914400" rtl="0" eaLnBrk="1" latinLnBrk="0" hangingPunct="1">
+              <a:lnSpc>
+                <a:spcPct val="90000"/>
+              </a:lnSpc>
+              <a:spcBef>
+                <a:spcPts val="500"/>
+              </a:spcBef>
+              <a:buFont typeface="Arial" panose="020B0604020202020204" pitchFamily="34" charset="0"/>
+              <a:buChar char="•"/>
+              <a:defRPr sz="2400" kern="1200">
+                <a:solidFill>
+                  <a:schemeClr val="tx1"/>
+                </a:solidFill>
+                <a:latin typeface="+mn-lt"/>
+                <a:ea typeface="+mn-ea"/>
+                <a:cs typeface="+mn-cs"/>
+              </a:defRPr>
+            </a:lvl2pPr>
+            <a:lvl3pPr marL="1143000" indent="-228600" algn="l" defTabSz="914400" rtl="0" eaLnBrk="1" latinLnBrk="0" hangingPunct="1">
+              <a:lnSpc>
+                <a:spcPct val="90000"/>
+              </a:lnSpc>
+              <a:spcBef>
+                <a:spcPts val="500"/>
+              </a:spcBef>
+              <a:buFont typeface="Arial" panose="020B0604020202020204" pitchFamily="34" charset="0"/>
+              <a:buChar char="•"/>
+              <a:defRPr sz="2000" kern="1200">
+                <a:solidFill>
+                  <a:schemeClr val="tx1"/>
+                </a:solidFill>
+                <a:latin typeface="+mn-lt"/>
+                <a:ea typeface="+mn-ea"/>
+                <a:cs typeface="+mn-cs"/>
+              </a:defRPr>
+            </a:lvl3pPr>
+            <a:lvl4pPr marL="1600200" indent="-228600" algn="l" defTabSz="914400" rtl="0" eaLnBrk="1" latinLnBrk="0" hangingPunct="1">
+              <a:lnSpc>
+                <a:spcPct val="90000"/>
+              </a:lnSpc>
+              <a:spcBef>
+                <a:spcPts val="500"/>
+              </a:spcBef>
+              <a:buFont typeface="Arial" panose="020B0604020202020204" pitchFamily="34" charset="0"/>
+              <a:buChar char="•"/>
+              <a:defRPr sz="1800" kern="1200">
+                <a:solidFill>
+                  <a:schemeClr val="tx1"/>
+                </a:solidFill>
+                <a:latin typeface="+mn-lt"/>
+                <a:ea typeface="+mn-ea"/>
+                <a:cs typeface="+mn-cs"/>
+              </a:defRPr>
+            </a:lvl4pPr>
+            <a:lvl5pPr marL="2057400" indent="-228600" algn="l" defTabSz="914400" rtl="0" eaLnBrk="1" latinLnBrk="0" hangingPunct="1">
+              <a:lnSpc>
+                <a:spcPct val="90000"/>
+              </a:lnSpc>
+              <a:spcBef>
+                <a:spcPts val="500"/>
+              </a:spcBef>
+              <a:buFont typeface="Arial" panose="020B0604020202020204" pitchFamily="34" charset="0"/>
+              <a:buChar char="•"/>
+              <a:defRPr sz="1800" kern="1200">
+                <a:solidFill>
+                  <a:schemeClr val="tx1"/>
+                </a:solidFill>
+                <a:latin typeface="+mn-lt"/>
+                <a:ea typeface="+mn-ea"/>
+                <a:cs typeface="+mn-cs"/>
+              </a:defRPr>
+            </a:lvl5pPr>
+            <a:lvl6pPr marL="2514600" indent="-228600" algn="l" defTabSz="914400" rtl="0" eaLnBrk="1" latinLnBrk="0" hangingPunct="1">
+              <a:lnSpc>
+                <a:spcPct val="90000"/>
+              </a:lnSpc>
+              <a:spcBef>
+                <a:spcPts val="500"/>
+              </a:spcBef>
+              <a:buFont typeface="Arial" panose="020B0604020202020204" pitchFamily="34" charset="0"/>
+              <a:buChar char="•"/>
+              <a:defRPr sz="1800" kern="1200">
+                <a:solidFill>
+                  <a:schemeClr val="tx1"/>
+                </a:solidFill>
+                <a:latin typeface="+mn-lt"/>
+                <a:ea typeface="+mn-ea"/>
+                <a:cs typeface="+mn-cs"/>
+              </a:defRPr>
+            </a:lvl6pPr>
+            <a:lvl7pPr marL="2971800" indent="-228600" algn="l" defTabSz="914400" rtl="0" eaLnBrk="1" latinLnBrk="0" hangingPunct="1">
+              <a:lnSpc>
+                <a:spcPct val="90000"/>
+              </a:lnSpc>
+              <a:spcBef>
+                <a:spcPts val="500"/>
+              </a:spcBef>
+              <a:buFont typeface="Arial" panose="020B0604020202020204" pitchFamily="34" charset="0"/>
+              <a:buChar char="•"/>
+              <a:defRPr sz="1800" kern="1200">
+                <a:solidFill>
+                  <a:schemeClr val="tx1"/>
+                </a:solidFill>
+                <a:latin typeface="+mn-lt"/>
+                <a:ea typeface="+mn-ea"/>
+                <a:cs typeface="+mn-cs"/>
+              </a:defRPr>
+            </a:lvl7pPr>
+            <a:lvl8pPr marL="3429000" indent="-228600" algn="l" defTabSz="914400" rtl="0" eaLnBrk="1" latinLnBrk="0" hangingPunct="1">
+              <a:lnSpc>
+                <a:spcPct val="90000"/>
+              </a:lnSpc>
+              <a:spcBef>
+                <a:spcPts val="500"/>
+              </a:spcBef>
+              <a:buFont typeface="Arial" panose="020B0604020202020204" pitchFamily="34" charset="0"/>
+              <a:buChar char="•"/>
+              <a:defRPr sz="1800" kern="1200">
+                <a:solidFill>
+                  <a:schemeClr val="tx1"/>
+                </a:solidFill>
+                <a:latin typeface="+mn-lt"/>
+                <a:ea typeface="+mn-ea"/>
+                <a:cs typeface="+mn-cs"/>
+              </a:defRPr>
+            </a:lvl8pPr>
+            <a:lvl9pPr marL="3886200" indent="-228600" algn="l" defTabSz="914400" rtl="0" eaLnBrk="1" latinLnBrk="0" hangingPunct="1">
+              <a:lnSpc>
+                <a:spcPct val="90000"/>
+              </a:lnSpc>
+              <a:spcBef>
+                <a:spcPts val="500"/>
+              </a:spcBef>
+              <a:buFont typeface="Arial" panose="020B0604020202020204" pitchFamily="34" charset="0"/>
+              <a:buChar char="•"/>
+              <a:defRPr sz="1800" kern="1200">
+                <a:solidFill>
+                  <a:schemeClr val="tx1"/>
+                </a:solidFill>
+                <a:latin typeface="+mn-lt"/>
+                <a:ea typeface="+mn-ea"/>
+                <a:cs typeface="+mn-cs"/>
+              </a:defRPr>
+            </a:lvl9pPr>
+          </a:lstStyle>
+          <a:p>
+            <a:r>
+              <a:rPr lang="en-US" sz="2400" dirty="0"/>
+              <a:t>Variables: filter data </a:t>
+            </a:r>
+          </a:p>
+          <a:p>
+            <a:r>
+              <a:rPr lang="en-US" sz="2400" dirty="0"/>
+              <a:t>merge tables</a:t>
+            </a:r>
+          </a:p>
+          <a:p>
+            <a:pPr marL="458788" lvl="1" indent="-342900">
+              <a:buFont typeface="Courier New" panose="02070309020205020404" pitchFamily="49" charset="0"/>
+              <a:buChar char="o"/>
+            </a:pPr>
+            <a:r>
+              <a:rPr lang="en-US" dirty="0"/>
+              <a:t>Concatenate</a:t>
+            </a:r>
+          </a:p>
+          <a:p>
+            <a:pPr marL="458788" lvl="1" indent="-342900">
+              <a:buFont typeface="Courier New" panose="02070309020205020404" pitchFamily="49" charset="0"/>
+              <a:buChar char="o"/>
+            </a:pPr>
+            <a:r>
+              <a:rPr lang="en-US" dirty="0"/>
+              <a:t>match merging (with n= dataset option)</a:t>
+            </a:r>
+          </a:p>
+          <a:p>
+            <a:pPr marL="458788" lvl="1" indent="-342900">
+              <a:buFont typeface="Courier New" panose="02070309020205020404" pitchFamily="49" charset="0"/>
+              <a:buChar char="o"/>
+            </a:pPr>
+            <a:r>
+              <a:rPr lang="en-US" dirty="0"/>
+              <a:t>match merging (if a and b)</a:t>
+            </a:r>
+          </a:p>
+          <a:p>
+            <a:pPr marL="228600" lvl="1">
+              <a:spcBef>
+                <a:spcPts val="1000"/>
+              </a:spcBef>
+            </a:pPr>
+            <a:r>
+              <a:rPr lang="en-US" altLang="zh-CN" dirty="0"/>
+              <a:t>Loops: </a:t>
+            </a:r>
+          </a:p>
+          <a:p>
+            <a:pPr marL="458788" lvl="1" indent="-342900">
+              <a:lnSpc>
+                <a:spcPct val="100000"/>
+              </a:lnSpc>
+              <a:buFont typeface="Courier New" panose="02070309020205020404" pitchFamily="49" charset="0"/>
+              <a:buChar char="o"/>
+            </a:pPr>
+            <a:r>
+              <a:rPr lang="en-US" altLang="zh-CN" dirty="0"/>
+              <a:t>do until</a:t>
+            </a:r>
+          </a:p>
+          <a:p>
+            <a:pPr marL="458788" lvl="1" indent="-342900">
+              <a:lnSpc>
+                <a:spcPct val="100000"/>
+              </a:lnSpc>
+              <a:buFont typeface="Courier New" panose="02070309020205020404" pitchFamily="49" charset="0"/>
+              <a:buChar char="o"/>
+            </a:pPr>
+            <a:r>
+              <a:rPr lang="en-US" dirty="0"/>
+              <a:t>Nested do loops</a:t>
+            </a:r>
+          </a:p>
+        </p:txBody>
+      </p:sp>
+      <p:sp>
+        <p:nvSpPr>
+          <p:cNvPr id="3" name="Content Placeholder 3">
+            <a:extLst>
+              <a:ext uri="{FF2B5EF4-FFF2-40B4-BE49-F238E27FC236}">
+                <a16:creationId xmlns:a16="http://schemas.microsoft.com/office/drawing/2014/main" id="{2A66A781-E17E-6043-235A-E5DF2C57F5D7}"/>
+              </a:ext>
+            </a:extLst>
+          </p:cNvPr>
+          <p:cNvSpPr txBox="1">
+            <a:spLocks/>
+          </p:cNvSpPr>
+          <p:nvPr/>
+        </p:nvSpPr>
+        <p:spPr>
+          <a:xfrm>
+            <a:off x="6310224" y="2923282"/>
+            <a:ext cx="3334107" cy="796805"/>
+          </a:xfrm>
+          <a:prstGeom prst="rect">
+            <a:avLst/>
+          </a:prstGeom>
+        </p:spPr>
+        <p:txBody>
+          <a:bodyPr vert="horz" lIns="91440" tIns="45720" rIns="91440" bIns="45720" rtlCol="0">
+            <a:normAutofit fontScale="55000" lnSpcReduction="20000"/>
+          </a:bodyPr>
+          <a:lstStyle>
+            <a:lvl1pPr marL="228600" indent="-228600" algn="l" defTabSz="914400" rtl="0" eaLnBrk="1" latinLnBrk="0" hangingPunct="1">
+              <a:lnSpc>
+                <a:spcPct val="90000"/>
+              </a:lnSpc>
+              <a:spcBef>
+                <a:spcPts val="1000"/>
+              </a:spcBef>
+              <a:buFont typeface="Arial" panose="020B0604020202020204" pitchFamily="34" charset="0"/>
+              <a:buChar char="•"/>
+              <a:defRPr sz="2800" kern="1200">
+                <a:solidFill>
+                  <a:schemeClr val="tx1"/>
+                </a:solidFill>
+                <a:latin typeface="+mn-lt"/>
+                <a:ea typeface="+mn-ea"/>
+                <a:cs typeface="+mn-cs"/>
+              </a:defRPr>
+            </a:lvl1pPr>
+            <a:lvl2pPr marL="685800" indent="-228600" algn="l" defTabSz="914400" rtl="0" eaLnBrk="1" latinLnBrk="0" hangingPunct="1">
+              <a:lnSpc>
+                <a:spcPct val="90000"/>
+              </a:lnSpc>
+              <a:spcBef>
+                <a:spcPts val="500"/>
+              </a:spcBef>
+              <a:buFont typeface="Arial" panose="020B0604020202020204" pitchFamily="34" charset="0"/>
+              <a:buChar char="•"/>
+              <a:defRPr sz="2400" kern="1200">
+                <a:solidFill>
+                  <a:schemeClr val="tx1"/>
+                </a:solidFill>
+                <a:latin typeface="+mn-lt"/>
+                <a:ea typeface="+mn-ea"/>
+                <a:cs typeface="+mn-cs"/>
+              </a:defRPr>
+            </a:lvl2pPr>
+            <a:lvl3pPr marL="1143000" indent="-228600" algn="l" defTabSz="914400" rtl="0" eaLnBrk="1" latinLnBrk="0" hangingPunct="1">
+              <a:lnSpc>
+                <a:spcPct val="90000"/>
+              </a:lnSpc>
+              <a:spcBef>
+                <a:spcPts val="500"/>
+              </a:spcBef>
+              <a:buFont typeface="Arial" panose="020B0604020202020204" pitchFamily="34" charset="0"/>
+              <a:buChar char="•"/>
+              <a:defRPr sz="2000" kern="1200">
+                <a:solidFill>
+                  <a:schemeClr val="tx1"/>
+                </a:solidFill>
+                <a:latin typeface="+mn-lt"/>
+                <a:ea typeface="+mn-ea"/>
+                <a:cs typeface="+mn-cs"/>
+              </a:defRPr>
+            </a:lvl3pPr>
+            <a:lvl4pPr marL="1600200" indent="-228600" algn="l" defTabSz="914400" rtl="0" eaLnBrk="1" latinLnBrk="0" hangingPunct="1">
+              <a:lnSpc>
+                <a:spcPct val="90000"/>
+              </a:lnSpc>
+              <a:spcBef>
+                <a:spcPts val="500"/>
+              </a:spcBef>
+              <a:buFont typeface="Arial" panose="020B0604020202020204" pitchFamily="34" charset="0"/>
+              <a:buChar char="•"/>
+              <a:defRPr sz="1800" kern="1200">
+                <a:solidFill>
+                  <a:schemeClr val="tx1"/>
+                </a:solidFill>
+                <a:latin typeface="+mn-lt"/>
+                <a:ea typeface="+mn-ea"/>
+                <a:cs typeface="+mn-cs"/>
+              </a:defRPr>
+            </a:lvl4pPr>
+            <a:lvl5pPr marL="2057400" indent="-228600" algn="l" defTabSz="914400" rtl="0" eaLnBrk="1" latinLnBrk="0" hangingPunct="1">
+              <a:lnSpc>
+                <a:spcPct val="90000"/>
+              </a:lnSpc>
+              <a:spcBef>
+                <a:spcPts val="500"/>
+              </a:spcBef>
+              <a:buFont typeface="Arial" panose="020B0604020202020204" pitchFamily="34" charset="0"/>
+              <a:buChar char="•"/>
+              <a:defRPr sz="1800" kern="1200">
+                <a:solidFill>
+                  <a:schemeClr val="tx1"/>
+                </a:solidFill>
+                <a:latin typeface="+mn-lt"/>
+                <a:ea typeface="+mn-ea"/>
+                <a:cs typeface="+mn-cs"/>
+              </a:defRPr>
+            </a:lvl5pPr>
+            <a:lvl6pPr marL="2514600" indent="-228600" algn="l" defTabSz="914400" rtl="0" eaLnBrk="1" latinLnBrk="0" hangingPunct="1">
+              <a:lnSpc>
+                <a:spcPct val="90000"/>
+              </a:lnSpc>
+              <a:spcBef>
+                <a:spcPts val="500"/>
+              </a:spcBef>
+              <a:buFont typeface="Arial" panose="020B0604020202020204" pitchFamily="34" charset="0"/>
+              <a:buChar char="•"/>
+              <a:defRPr sz="1800" kern="1200">
+                <a:solidFill>
+                  <a:schemeClr val="tx1"/>
+                </a:solidFill>
+                <a:latin typeface="+mn-lt"/>
+                <a:ea typeface="+mn-ea"/>
+                <a:cs typeface="+mn-cs"/>
+              </a:defRPr>
+            </a:lvl6pPr>
+            <a:lvl7pPr marL="2971800" indent="-228600" algn="l" defTabSz="914400" rtl="0" eaLnBrk="1" latinLnBrk="0" hangingPunct="1">
+              <a:lnSpc>
+                <a:spcPct val="90000"/>
+              </a:lnSpc>
+              <a:spcBef>
+                <a:spcPts val="500"/>
+              </a:spcBef>
+              <a:buFont typeface="Arial" panose="020B0604020202020204" pitchFamily="34" charset="0"/>
+              <a:buChar char="•"/>
+              <a:defRPr sz="1800" kern="1200">
+                <a:solidFill>
+                  <a:schemeClr val="tx1"/>
+                </a:solidFill>
+                <a:latin typeface="+mn-lt"/>
+                <a:ea typeface="+mn-ea"/>
+                <a:cs typeface="+mn-cs"/>
+              </a:defRPr>
+            </a:lvl7pPr>
+            <a:lvl8pPr marL="3429000" indent="-228600" algn="l" defTabSz="914400" rtl="0" eaLnBrk="1" latinLnBrk="0" hangingPunct="1">
+              <a:lnSpc>
+                <a:spcPct val="90000"/>
+              </a:lnSpc>
+              <a:spcBef>
+                <a:spcPts val="500"/>
+              </a:spcBef>
+              <a:buFont typeface="Arial" panose="020B0604020202020204" pitchFamily="34" charset="0"/>
+              <a:buChar char="•"/>
+              <a:defRPr sz="1800" kern="1200">
+                <a:solidFill>
+                  <a:schemeClr val="tx1"/>
+                </a:solidFill>
+                <a:latin typeface="+mn-lt"/>
+                <a:ea typeface="+mn-ea"/>
+                <a:cs typeface="+mn-cs"/>
+              </a:defRPr>
+            </a:lvl8pPr>
+            <a:lvl9pPr marL="3886200" indent="-228600" algn="l" defTabSz="914400" rtl="0" eaLnBrk="1" latinLnBrk="0" hangingPunct="1">
+              <a:lnSpc>
+                <a:spcPct val="90000"/>
+              </a:lnSpc>
+              <a:spcBef>
+                <a:spcPts val="500"/>
+              </a:spcBef>
+              <a:buFont typeface="Arial" panose="020B0604020202020204" pitchFamily="34" charset="0"/>
+              <a:buChar char="•"/>
+              <a:defRPr sz="1800" kern="1200">
+                <a:solidFill>
+                  <a:schemeClr val="tx1"/>
+                </a:solidFill>
+                <a:latin typeface="+mn-lt"/>
+                <a:ea typeface="+mn-ea"/>
+                <a:cs typeface="+mn-cs"/>
+              </a:defRPr>
+            </a:lvl9pPr>
+          </a:lstStyle>
+          <a:p>
+            <a:r>
+              <a:rPr lang="en-US" dirty="0"/>
+              <a:t>Spline in Linear/logistic regression</a:t>
+            </a:r>
+          </a:p>
+          <a:p>
+            <a:r>
+              <a:rPr lang="en-US" dirty="0"/>
+              <a:t>Two </a:t>
+            </a:r>
+            <a:r>
+              <a:rPr lang="en-US"/>
+              <a:t>step regression</a:t>
+            </a:r>
+            <a:endParaRPr lang="en-US" dirty="0"/>
+          </a:p>
+        </p:txBody>
+      </p:sp>
+    </p:spTree>
+    <p:extLst>
+      <p:ext uri="{BB962C8B-B14F-4D97-AF65-F5344CB8AC3E}">
+        <p14:creationId xmlns:p14="http://schemas.microsoft.com/office/powerpoint/2010/main" val="3588703417"/>
+      </p:ext>
+    </p:extLst>
+  </p:cSld>
+  <p:clrMapOvr>
+    <a:masterClrMapping/>
+  </p:clrMapOvr>
+</p:sld>
+</file>
+
+<file path=ppt/slides/slide7.xml><?xml version="1.0" encoding="utf-8"?>
+<p:sld xmlns:a="http://schemas.openxmlformats.org/drawingml/2006/main" xmlns:r="http://schemas.openxmlformats.org/officeDocument/2006/relationships" xmlns:p="http://schemas.openxmlformats.org/presentationml/2006/main">
+  <p:cSld>
+    <p:spTree>
+      <p:nvGrpSpPr>
+        <p:cNvPr id="1" name="">
+          <a:extLst>
+            <a:ext uri="{FF2B5EF4-FFF2-40B4-BE49-F238E27FC236}">
+              <a16:creationId xmlns:a16="http://schemas.microsoft.com/office/drawing/2014/main" id="{B2BCD0B7-14BF-9591-2491-51EC0B8A6CEB}"/>
+            </a:ext>
+          </a:extLst>
+        </p:cNvPr>
+        <p:cNvGrpSpPr/>
+        <p:nvPr/>
+      </p:nvGrpSpPr>
+      <p:grpSpPr>
+        <a:xfrm>
+          <a:off x="0" y="0"/>
+          <a:ext cx="0" cy="0"/>
+          <a:chOff x="0" y="0"/>
+          <a:chExt cx="0" cy="0"/>
+        </a:xfrm>
+      </p:grpSpPr>
+      <p:sp>
+        <p:nvSpPr>
+          <p:cNvPr id="2" name="Title 1">
+            <a:extLst>
+              <a:ext uri="{FF2B5EF4-FFF2-40B4-BE49-F238E27FC236}">
+                <a16:creationId xmlns:a16="http://schemas.microsoft.com/office/drawing/2014/main" id="{3C96B53C-360B-A7DC-1397-EE5C9B1C729C}"/>
+              </a:ext>
+            </a:extLst>
+          </p:cNvPr>
+          <p:cNvSpPr>
+            <a:spLocks noGrp="1"/>
+          </p:cNvSpPr>
+          <p:nvPr>
+            <p:ph type="title"/>
+          </p:nvPr>
+        </p:nvSpPr>
+        <p:spPr/>
+        <p:txBody>
+          <a:bodyPr/>
+          <a:lstStyle/>
+          <a:p>
+            <a:r>
+              <a:rPr lang="en-US" dirty="0"/>
+              <a:t>Major SAS Steps/Proc vs R package/functions</a:t>
+            </a:r>
+          </a:p>
+        </p:txBody>
+      </p:sp>
+      <p:pic>
+        <p:nvPicPr>
+          <p:cNvPr id="6" name="Picture 5">
+            <a:extLst>
+              <a:ext uri="{FF2B5EF4-FFF2-40B4-BE49-F238E27FC236}">
+                <a16:creationId xmlns:a16="http://schemas.microsoft.com/office/drawing/2014/main" id="{D89187F8-9708-A2D8-B314-1950D2AA2EBD}"/>
+              </a:ext>
+            </a:extLst>
+          </p:cNvPr>
+          <p:cNvPicPr>
+            <a:picLocks noChangeAspect="1"/>
+          </p:cNvPicPr>
+          <p:nvPr/>
+        </p:nvPicPr>
+        <p:blipFill>
+          <a:blip r:embed="rId2"/>
+          <a:stretch>
+            <a:fillRect/>
+          </a:stretch>
+        </p:blipFill>
+        <p:spPr>
+          <a:xfrm>
+            <a:off x="550456" y="1690688"/>
+            <a:ext cx="1877291" cy="769689"/>
+          </a:xfrm>
+          <a:prstGeom prst="rect">
+            <a:avLst/>
+          </a:prstGeom>
+        </p:spPr>
+      </p:pic>
+      <p:pic>
+        <p:nvPicPr>
+          <p:cNvPr id="7" name="Picture 6">
+            <a:extLst>
+              <a:ext uri="{FF2B5EF4-FFF2-40B4-BE49-F238E27FC236}">
+                <a16:creationId xmlns:a16="http://schemas.microsoft.com/office/drawing/2014/main" id="{D093ED12-F9C4-7300-59D7-16AC180856DE}"/>
+              </a:ext>
+            </a:extLst>
+          </p:cNvPr>
+          <p:cNvPicPr>
+            <a:picLocks noChangeAspect="1"/>
+          </p:cNvPicPr>
+          <p:nvPr/>
+        </p:nvPicPr>
+        <p:blipFill>
+          <a:blip r:embed="rId3"/>
+          <a:stretch>
+            <a:fillRect/>
+          </a:stretch>
+        </p:blipFill>
+        <p:spPr>
+          <a:xfrm>
+            <a:off x="4351404" y="1690688"/>
+            <a:ext cx="2143471" cy="803156"/>
+          </a:xfrm>
+          <a:prstGeom prst="rect">
+            <a:avLst/>
+          </a:prstGeom>
+        </p:spPr>
+      </p:pic>
+      <p:pic>
+        <p:nvPicPr>
+          <p:cNvPr id="8" name="Picture 7">
+            <a:extLst>
+              <a:ext uri="{FF2B5EF4-FFF2-40B4-BE49-F238E27FC236}">
+                <a16:creationId xmlns:a16="http://schemas.microsoft.com/office/drawing/2014/main" id="{FE7EB734-6903-49D5-A647-AE7BC6E4ECF2}"/>
+              </a:ext>
+            </a:extLst>
+          </p:cNvPr>
+          <p:cNvPicPr>
+            <a:picLocks noChangeAspect="1"/>
+          </p:cNvPicPr>
+          <p:nvPr/>
+        </p:nvPicPr>
+        <p:blipFill>
+          <a:blip r:embed="rId4"/>
+          <a:stretch>
+            <a:fillRect/>
+          </a:stretch>
+        </p:blipFill>
+        <p:spPr>
+          <a:xfrm>
+            <a:off x="8590581" y="1608873"/>
+            <a:ext cx="2862262" cy="966787"/>
+          </a:xfrm>
+          <a:prstGeom prst="rect">
+            <a:avLst/>
+          </a:prstGeom>
+        </p:spPr>
+      </p:pic>
+      <p:sp>
+        <p:nvSpPr>
+          <p:cNvPr id="4" name="Content Placeholder 2">
+            <a:extLst>
+              <a:ext uri="{FF2B5EF4-FFF2-40B4-BE49-F238E27FC236}">
+                <a16:creationId xmlns:a16="http://schemas.microsoft.com/office/drawing/2014/main" id="{EA2E8D98-C1AD-CCC4-08D9-50F3BE804787}"/>
+              </a:ext>
+            </a:extLst>
+          </p:cNvPr>
+          <p:cNvSpPr txBox="1">
+            <a:spLocks/>
+          </p:cNvSpPr>
+          <p:nvPr/>
+        </p:nvSpPr>
+        <p:spPr>
+          <a:xfrm>
+            <a:off x="4574362" y="2735206"/>
+            <a:ext cx="2637321" cy="3413145"/>
+          </a:xfrm>
+          <a:prstGeom prst="rect">
+            <a:avLst/>
+          </a:prstGeom>
+        </p:spPr>
+        <p:txBody>
+          <a:bodyPr vert="horz" lIns="91440" tIns="45720" rIns="91440" bIns="45720" rtlCol="0">
+            <a:normAutofit/>
+          </a:bodyPr>
+          <a:lstStyle>
+            <a:lvl1pPr marL="228600" indent="-228600" algn="l" defTabSz="914400" rtl="0" eaLnBrk="1" latinLnBrk="0" hangingPunct="1">
+              <a:lnSpc>
+                <a:spcPct val="90000"/>
+              </a:lnSpc>
+              <a:spcBef>
+                <a:spcPts val="1000"/>
+              </a:spcBef>
+              <a:buFont typeface="Arial" panose="020B0604020202020204" pitchFamily="34" charset="0"/>
+              <a:buChar char="•"/>
+              <a:defRPr sz="2800" kern="1200">
+                <a:solidFill>
+                  <a:schemeClr val="tx1"/>
+                </a:solidFill>
+                <a:latin typeface="+mn-lt"/>
+                <a:ea typeface="+mn-ea"/>
+                <a:cs typeface="+mn-cs"/>
+              </a:defRPr>
+            </a:lvl1pPr>
+            <a:lvl2pPr marL="685800" indent="-228600" algn="l" defTabSz="914400" rtl="0" eaLnBrk="1" latinLnBrk="0" hangingPunct="1">
+              <a:lnSpc>
+                <a:spcPct val="90000"/>
+              </a:lnSpc>
+              <a:spcBef>
+                <a:spcPts val="500"/>
+              </a:spcBef>
+              <a:buFont typeface="Arial" panose="020B0604020202020204" pitchFamily="34" charset="0"/>
+              <a:buChar char="•"/>
+              <a:defRPr sz="2400" kern="1200">
+                <a:solidFill>
+                  <a:schemeClr val="tx1"/>
+                </a:solidFill>
+                <a:latin typeface="+mn-lt"/>
+                <a:ea typeface="+mn-ea"/>
+                <a:cs typeface="+mn-cs"/>
+              </a:defRPr>
+            </a:lvl2pPr>
+            <a:lvl3pPr marL="1143000" indent="-228600" algn="l" defTabSz="914400" rtl="0" eaLnBrk="1" latinLnBrk="0" hangingPunct="1">
+              <a:lnSpc>
+                <a:spcPct val="90000"/>
+              </a:lnSpc>
+              <a:spcBef>
+                <a:spcPts val="500"/>
+              </a:spcBef>
+              <a:buFont typeface="Arial" panose="020B0604020202020204" pitchFamily="34" charset="0"/>
+              <a:buChar char="•"/>
+              <a:defRPr sz="2000" kern="1200">
+                <a:solidFill>
+                  <a:schemeClr val="tx1"/>
+                </a:solidFill>
+                <a:latin typeface="+mn-lt"/>
+                <a:ea typeface="+mn-ea"/>
+                <a:cs typeface="+mn-cs"/>
+              </a:defRPr>
+            </a:lvl3pPr>
+            <a:lvl4pPr marL="1600200" indent="-228600" algn="l" defTabSz="914400" rtl="0" eaLnBrk="1" latinLnBrk="0" hangingPunct="1">
+              <a:lnSpc>
+                <a:spcPct val="90000"/>
+              </a:lnSpc>
+              <a:spcBef>
+                <a:spcPts val="500"/>
+              </a:spcBef>
+              <a:buFont typeface="Arial" panose="020B0604020202020204" pitchFamily="34" charset="0"/>
+              <a:buChar char="•"/>
+              <a:defRPr sz="1800" kern="1200">
+                <a:solidFill>
+                  <a:schemeClr val="tx1"/>
+                </a:solidFill>
+                <a:latin typeface="+mn-lt"/>
+                <a:ea typeface="+mn-ea"/>
+                <a:cs typeface="+mn-cs"/>
+              </a:defRPr>
+            </a:lvl4pPr>
+            <a:lvl5pPr marL="2057400" indent="-228600" algn="l" defTabSz="914400" rtl="0" eaLnBrk="1" latinLnBrk="0" hangingPunct="1">
+              <a:lnSpc>
+                <a:spcPct val="90000"/>
+              </a:lnSpc>
+              <a:spcBef>
+                <a:spcPts val="500"/>
+              </a:spcBef>
+              <a:buFont typeface="Arial" panose="020B0604020202020204" pitchFamily="34" charset="0"/>
+              <a:buChar char="•"/>
+              <a:defRPr sz="1800" kern="1200">
+                <a:solidFill>
+                  <a:schemeClr val="tx1"/>
+                </a:solidFill>
+                <a:latin typeface="+mn-lt"/>
+                <a:ea typeface="+mn-ea"/>
+                <a:cs typeface="+mn-cs"/>
+              </a:defRPr>
+            </a:lvl5pPr>
+            <a:lvl6pPr marL="2514600" indent="-228600" algn="l" defTabSz="914400" rtl="0" eaLnBrk="1" latinLnBrk="0" hangingPunct="1">
+              <a:lnSpc>
+                <a:spcPct val="90000"/>
+              </a:lnSpc>
+              <a:spcBef>
+                <a:spcPts val="500"/>
+              </a:spcBef>
+              <a:buFont typeface="Arial" panose="020B0604020202020204" pitchFamily="34" charset="0"/>
+              <a:buChar char="•"/>
+              <a:defRPr sz="1800" kern="1200">
+                <a:solidFill>
+                  <a:schemeClr val="tx1"/>
+                </a:solidFill>
+                <a:latin typeface="+mn-lt"/>
+                <a:ea typeface="+mn-ea"/>
+                <a:cs typeface="+mn-cs"/>
+              </a:defRPr>
+            </a:lvl6pPr>
+            <a:lvl7pPr marL="2971800" indent="-228600" algn="l" defTabSz="914400" rtl="0" eaLnBrk="1" latinLnBrk="0" hangingPunct="1">
+              <a:lnSpc>
+                <a:spcPct val="90000"/>
+              </a:lnSpc>
+              <a:spcBef>
+                <a:spcPts val="500"/>
+              </a:spcBef>
+              <a:buFont typeface="Arial" panose="020B0604020202020204" pitchFamily="34" charset="0"/>
+              <a:buChar char="•"/>
+              <a:defRPr sz="1800" kern="1200">
+                <a:solidFill>
+                  <a:schemeClr val="tx1"/>
+                </a:solidFill>
+                <a:latin typeface="+mn-lt"/>
+                <a:ea typeface="+mn-ea"/>
+                <a:cs typeface="+mn-cs"/>
+              </a:defRPr>
+            </a:lvl7pPr>
+            <a:lvl8pPr marL="3429000" indent="-228600" algn="l" defTabSz="914400" rtl="0" eaLnBrk="1" latinLnBrk="0" hangingPunct="1">
+              <a:lnSpc>
+                <a:spcPct val="90000"/>
+              </a:lnSpc>
+              <a:spcBef>
+                <a:spcPts val="500"/>
+              </a:spcBef>
+              <a:buFont typeface="Arial" panose="020B0604020202020204" pitchFamily="34" charset="0"/>
+              <a:buChar char="•"/>
+              <a:defRPr sz="1800" kern="1200">
+                <a:solidFill>
+                  <a:schemeClr val="tx1"/>
+                </a:solidFill>
+                <a:latin typeface="+mn-lt"/>
+                <a:ea typeface="+mn-ea"/>
+                <a:cs typeface="+mn-cs"/>
+              </a:defRPr>
+            </a:lvl8pPr>
+            <a:lvl9pPr marL="3886200" indent="-228600" algn="l" defTabSz="914400" rtl="0" eaLnBrk="1" latinLnBrk="0" hangingPunct="1">
+              <a:lnSpc>
+                <a:spcPct val="90000"/>
+              </a:lnSpc>
+              <a:spcBef>
+                <a:spcPts val="500"/>
+              </a:spcBef>
+              <a:buFont typeface="Arial" panose="020B0604020202020204" pitchFamily="34" charset="0"/>
+              <a:buChar char="•"/>
+              <a:defRPr sz="1800" kern="1200">
+                <a:solidFill>
+                  <a:schemeClr val="tx1"/>
+                </a:solidFill>
+                <a:latin typeface="+mn-lt"/>
+                <a:ea typeface="+mn-ea"/>
+                <a:cs typeface="+mn-cs"/>
+              </a:defRPr>
+            </a:lvl9pPr>
+          </a:lstStyle>
+          <a:p>
+            <a:r>
+              <a:rPr lang="en-US" altLang="zh-CN" dirty="0" err="1"/>
+              <a:t>tidyverse</a:t>
+            </a:r>
+            <a:r>
+              <a:rPr lang="en-US" altLang="zh-CN" dirty="0"/>
+              <a:t>, </a:t>
+            </a:r>
+          </a:p>
+          <a:p>
+            <a:r>
+              <a:rPr lang="en-US" altLang="zh-CN" dirty="0"/>
+              <a:t>arsenal,</a:t>
+            </a:r>
+          </a:p>
+          <a:p>
+            <a:r>
+              <a:rPr lang="en-US" altLang="zh-CN" dirty="0"/>
+              <a:t>Haven</a:t>
+            </a:r>
+          </a:p>
+          <a:p>
+            <a:r>
+              <a:rPr lang="en-US" altLang="zh-CN" dirty="0" err="1"/>
+              <a:t>aod</a:t>
+            </a:r>
+            <a:endParaRPr lang="en-US" altLang="zh-CN" dirty="0"/>
+          </a:p>
+          <a:p>
+            <a:endParaRPr lang="en-US" altLang="zh-CN" dirty="0"/>
+          </a:p>
+        </p:txBody>
+      </p:sp>
+      <p:sp>
+        <p:nvSpPr>
+          <p:cNvPr id="9" name="Content Placeholder 8">
+            <a:extLst>
+              <a:ext uri="{FF2B5EF4-FFF2-40B4-BE49-F238E27FC236}">
+                <a16:creationId xmlns:a16="http://schemas.microsoft.com/office/drawing/2014/main" id="{E0C96031-E926-D7AB-F4F4-6F05AB855B5E}"/>
+              </a:ext>
+            </a:extLst>
+          </p:cNvPr>
+          <p:cNvSpPr>
+            <a:spLocks noGrp="1"/>
+          </p:cNvSpPr>
+          <p:nvPr>
+            <p:ph idx="1"/>
+          </p:nvPr>
+        </p:nvSpPr>
+        <p:spPr>
+          <a:xfrm>
+            <a:off x="339016" y="2735206"/>
+            <a:ext cx="4012387" cy="468559"/>
+          </a:xfrm>
+        </p:spPr>
+        <p:txBody>
+          <a:bodyPr>
+            <a:normAutofit fontScale="40000" lnSpcReduction="20000"/>
+          </a:bodyPr>
+          <a:lstStyle/>
+          <a:p>
+            <a:r>
+              <a:rPr lang="en-US" dirty="0"/>
+              <a:t>PROC TABULATE – </a:t>
+            </a:r>
+            <a:r>
+              <a:rPr lang="en-US" dirty="0" err="1"/>
+              <a:t>summarise</a:t>
+            </a:r>
+            <a:r>
+              <a:rPr lang="en-US" dirty="0"/>
+              <a:t>()</a:t>
+            </a:r>
+          </a:p>
+          <a:p>
+            <a:r>
+              <a:rPr lang="en-US" dirty="0"/>
+              <a:t>PROC GENMOD</a:t>
+            </a:r>
+          </a:p>
+        </p:txBody>
+      </p:sp>
+    </p:spTree>
+    <p:extLst>
+      <p:ext uri="{BB962C8B-B14F-4D97-AF65-F5344CB8AC3E}">
+        <p14:creationId xmlns:p14="http://schemas.microsoft.com/office/powerpoint/2010/main" val="3421575707"/>
+      </p:ext>
+    </p:extLst>
+  </p:cSld>
+  <p:clrMapOvr>
+    <a:masterClrMapping/>
+  </p:clrMapOvr>
+</p:sld>
+</file>
+
+<file path=ppt/slides/slide8.xml><?xml version="1.0" encoding="utf-8"?>
+<p:sld xmlns:a="http://schemas.openxmlformats.org/drawingml/2006/main" xmlns:r="http://schemas.openxmlformats.org/officeDocument/2006/relationships" xmlns:p="http://schemas.openxmlformats.org/presentationml/2006/main">
+  <p:cSld>
+    <p:spTree>
+      <p:nvGrpSpPr>
+        <p:cNvPr id="1" name="">
+          <a:extLst>
+            <a:ext uri="{FF2B5EF4-FFF2-40B4-BE49-F238E27FC236}">
+              <a16:creationId xmlns:a16="http://schemas.microsoft.com/office/drawing/2014/main" id="{24795404-4793-4153-45B6-147571F0820C}"/>
+            </a:ext>
+          </a:extLst>
+        </p:cNvPr>
+        <p:cNvGrpSpPr/>
+        <p:nvPr/>
+      </p:nvGrpSpPr>
+      <p:grpSpPr>
+        <a:xfrm>
+          <a:off x="0" y="0"/>
+          <a:ext cx="0" cy="0"/>
+          <a:chOff x="0" y="0"/>
+          <a:chExt cx="0" cy="0"/>
+        </a:xfrm>
+      </p:grpSpPr>
+      <p:sp>
+        <p:nvSpPr>
+          <p:cNvPr id="2" name="Title 1">
+            <a:extLst>
+              <a:ext uri="{FF2B5EF4-FFF2-40B4-BE49-F238E27FC236}">
+                <a16:creationId xmlns:a16="http://schemas.microsoft.com/office/drawing/2014/main" id="{A1D02713-65CC-0B2F-4169-1F342A167AE8}"/>
+              </a:ext>
+            </a:extLst>
+          </p:cNvPr>
+          <p:cNvSpPr>
+            <a:spLocks noGrp="1"/>
+          </p:cNvSpPr>
+          <p:nvPr>
+            <p:ph type="title"/>
+          </p:nvPr>
+        </p:nvSpPr>
+        <p:spPr/>
+        <p:txBody>
+          <a:bodyPr/>
+          <a:lstStyle/>
+          <a:p>
+            <a:r>
+              <a:rPr lang="en-US" dirty="0"/>
+              <a:t>Steps for refactoring</a:t>
+            </a:r>
+          </a:p>
+        </p:txBody>
+      </p:sp>
+      <p:sp>
+        <p:nvSpPr>
+          <p:cNvPr id="4" name="Content Placeholder 3">
+            <a:extLst>
+              <a:ext uri="{FF2B5EF4-FFF2-40B4-BE49-F238E27FC236}">
+                <a16:creationId xmlns:a16="http://schemas.microsoft.com/office/drawing/2014/main" id="{B225A04A-A19E-03F6-5A6F-E66D9D66BD3C}"/>
+              </a:ext>
+            </a:extLst>
+          </p:cNvPr>
+          <p:cNvSpPr>
+            <a:spLocks noGrp="1"/>
+          </p:cNvSpPr>
+          <p:nvPr>
+            <p:ph idx="1"/>
+          </p:nvPr>
+        </p:nvSpPr>
+        <p:spPr>
+          <a:xfrm>
+            <a:off x="838200" y="1825625"/>
+            <a:ext cx="4561936" cy="796805"/>
+          </a:xfrm>
+        </p:spPr>
+        <p:txBody>
+          <a:bodyPr>
+            <a:normAutofit fontScale="92500" lnSpcReduction="20000"/>
+          </a:bodyPr>
+          <a:lstStyle/>
+          <a:p>
+            <a:r>
+              <a:rPr lang="en-US" dirty="0"/>
+              <a:t>Convert in 4 methods</a:t>
+            </a:r>
+          </a:p>
+          <a:p>
+            <a:r>
+              <a:rPr lang="en-US" dirty="0"/>
+              <a:t>Page 99</a:t>
+            </a:r>
+          </a:p>
+        </p:txBody>
+      </p:sp>
+    </p:spTree>
+    <p:extLst>
+      <p:ext uri="{BB962C8B-B14F-4D97-AF65-F5344CB8AC3E}">
+        <p14:creationId xmlns:p14="http://schemas.microsoft.com/office/powerpoint/2010/main" val="310505272"/>
+      </p:ext>
+    </p:extLst>
+  </p:cSld>
+  <p:clrMapOvr>
+    <a:masterClrMapping/>
+  </p:clrMapOvr>
+</p:sld>
+</file>
+
+<file path=ppt/slides/slide9.xml><?xml version="1.0" encoding="utf-8"?>
+<p:sld xmlns:a="http://schemas.openxmlformats.org/drawingml/2006/main" xmlns:r="http://schemas.openxmlformats.org/officeDocument/2006/relationships" xmlns:p="http://schemas.openxmlformats.org/presentationml/2006/main">
+  <p:cSld>
+    <p:spTree>
+      <p:nvGrpSpPr>
+        <p:cNvPr id="1" name="">
+          <a:extLst>
+            <a:ext uri="{FF2B5EF4-FFF2-40B4-BE49-F238E27FC236}">
+              <a16:creationId xmlns:a16="http://schemas.microsoft.com/office/drawing/2014/main" id="{40074CE9-62D6-2BB2-E61F-1B1261FA1298}"/>
+            </a:ext>
+          </a:extLst>
+        </p:cNvPr>
+        <p:cNvGrpSpPr/>
+        <p:nvPr/>
+      </p:nvGrpSpPr>
+      <p:grpSpPr>
+        <a:xfrm>
+          <a:off x="0" y="0"/>
+          <a:ext cx="0" cy="0"/>
+          <a:chOff x="0" y="0"/>
+          <a:chExt cx="0" cy="0"/>
+        </a:xfrm>
+      </p:grpSpPr>
+      <p:sp>
+        <p:nvSpPr>
+          <p:cNvPr id="2" name="Title 1">
+            <a:extLst>
+              <a:ext uri="{FF2B5EF4-FFF2-40B4-BE49-F238E27FC236}">
+                <a16:creationId xmlns:a16="http://schemas.microsoft.com/office/drawing/2014/main" id="{1A312F8B-F4C9-4874-7DA4-22CD586751FE}"/>
+              </a:ext>
+            </a:extLst>
+          </p:cNvPr>
+          <p:cNvSpPr>
+            <a:spLocks noGrp="1"/>
+          </p:cNvSpPr>
+          <p:nvPr>
+            <p:ph type="title"/>
+          </p:nvPr>
+        </p:nvSpPr>
+        <p:spPr/>
+        <p:txBody>
+          <a:bodyPr/>
+          <a:lstStyle/>
+          <a:p>
+            <a:r>
+              <a:rPr lang="en-US" dirty="0"/>
+              <a:t>Steps for refactoring</a:t>
+            </a:r>
+          </a:p>
+        </p:txBody>
+      </p:sp>
+      <p:sp>
+        <p:nvSpPr>
+          <p:cNvPr id="3" name="Content Placeholder 2">
+            <a:extLst>
+              <a:ext uri="{FF2B5EF4-FFF2-40B4-BE49-F238E27FC236}">
+                <a16:creationId xmlns:a16="http://schemas.microsoft.com/office/drawing/2014/main" id="{A0BC23D4-DEEC-D0CD-B063-D5658C599C4C}"/>
+              </a:ext>
+            </a:extLst>
+          </p:cNvPr>
+          <p:cNvSpPr>
+            <a:spLocks noGrp="1"/>
+          </p:cNvSpPr>
+          <p:nvPr>
+            <p:ph idx="1"/>
+          </p:nvPr>
+        </p:nvSpPr>
+        <p:spPr>
+          <a:xfrm>
+            <a:off x="609600" y="1347216"/>
+            <a:ext cx="4578096" cy="3241409"/>
+          </a:xfrm>
+        </p:spPr>
+        <p:txBody>
+          <a:bodyPr>
+            <a:normAutofit fontScale="92500" lnSpcReduction="10000"/>
+          </a:bodyPr>
+          <a:lstStyle/>
+          <a:p>
+            <a:r>
+              <a:rPr lang="en-US" dirty="0"/>
+              <a:t>What have I done about it?</a:t>
+            </a:r>
+          </a:p>
+          <a:p>
+            <a:r>
+              <a:rPr lang="en-US" altLang="zh-CN" dirty="0"/>
+              <a:t>Enterprise Modeling and Analytics – the Cash Flow model</a:t>
+            </a:r>
+          </a:p>
+          <a:p>
+            <a:r>
+              <a:rPr lang="en-US" altLang="zh-CN" dirty="0"/>
+              <a:t>SAS: PROC compare</a:t>
+            </a:r>
+          </a:p>
+          <a:p>
+            <a:r>
+              <a:rPr lang="en-US" dirty="0"/>
+              <a:t>R: compared</a:t>
+            </a:r>
+          </a:p>
+          <a:p>
+            <a:r>
+              <a:rPr lang="en-US" dirty="0"/>
+              <a:t>How to make a tolerance level?</a:t>
+            </a:r>
+          </a:p>
+          <a:p>
+            <a:endParaRPr lang="en-US" dirty="0"/>
+          </a:p>
+        </p:txBody>
+      </p:sp>
+      <p:pic>
+        <p:nvPicPr>
+          <p:cNvPr id="6" name="Picture 5">
+            <a:extLst>
+              <a:ext uri="{FF2B5EF4-FFF2-40B4-BE49-F238E27FC236}">
+                <a16:creationId xmlns:a16="http://schemas.microsoft.com/office/drawing/2014/main" id="{63B42BA1-1151-4CFE-D8B5-E02DDD41A0EE}"/>
+              </a:ext>
+            </a:extLst>
+          </p:cNvPr>
+          <p:cNvPicPr>
+            <a:picLocks noChangeAspect="1"/>
+          </p:cNvPicPr>
+          <p:nvPr/>
+        </p:nvPicPr>
+        <p:blipFill>
+          <a:blip r:embed="rId2"/>
+          <a:stretch>
+            <a:fillRect/>
+          </a:stretch>
+        </p:blipFill>
+        <p:spPr>
+          <a:xfrm>
+            <a:off x="1446197" y="5207810"/>
+            <a:ext cx="1877291" cy="769689"/>
+          </a:xfrm>
+          <a:prstGeom prst="rect">
+            <a:avLst/>
+          </a:prstGeom>
+        </p:spPr>
+      </p:pic>
+      <p:pic>
+        <p:nvPicPr>
+          <p:cNvPr id="7" name="Picture 6">
+            <a:extLst>
+              <a:ext uri="{FF2B5EF4-FFF2-40B4-BE49-F238E27FC236}">
+                <a16:creationId xmlns:a16="http://schemas.microsoft.com/office/drawing/2014/main" id="{F74468B4-F5B5-FE68-0C47-CC2309DE1D12}"/>
+              </a:ext>
+            </a:extLst>
+          </p:cNvPr>
+          <p:cNvPicPr>
+            <a:picLocks noChangeAspect="1"/>
+          </p:cNvPicPr>
+          <p:nvPr/>
+        </p:nvPicPr>
+        <p:blipFill>
+          <a:blip r:embed="rId3"/>
+          <a:stretch>
+            <a:fillRect/>
+          </a:stretch>
+        </p:blipFill>
+        <p:spPr>
+          <a:xfrm>
+            <a:off x="5024264" y="5174343"/>
+            <a:ext cx="2143471" cy="803156"/>
+          </a:xfrm>
+          <a:prstGeom prst="rect">
+            <a:avLst/>
+          </a:prstGeom>
+        </p:spPr>
+      </p:pic>
+      <p:pic>
+        <p:nvPicPr>
+          <p:cNvPr id="8" name="Picture 7">
+            <a:extLst>
+              <a:ext uri="{FF2B5EF4-FFF2-40B4-BE49-F238E27FC236}">
+                <a16:creationId xmlns:a16="http://schemas.microsoft.com/office/drawing/2014/main" id="{BBAC54FE-1225-9162-8A7B-6CAB854D7938}"/>
+              </a:ext>
+            </a:extLst>
+          </p:cNvPr>
+          <p:cNvPicPr>
+            <a:picLocks noChangeAspect="1"/>
+          </p:cNvPicPr>
+          <p:nvPr/>
+        </p:nvPicPr>
+        <p:blipFill>
+          <a:blip r:embed="rId4"/>
+          <a:stretch>
+            <a:fillRect/>
+          </a:stretch>
+        </p:blipFill>
+        <p:spPr>
+          <a:xfrm>
+            <a:off x="8564702" y="5210176"/>
+            <a:ext cx="2862262" cy="966787"/>
+          </a:xfrm>
+          <a:prstGeom prst="rect">
+            <a:avLst/>
+          </a:prstGeom>
+        </p:spPr>
+      </p:pic>
+      <p:sp>
+        <p:nvSpPr>
+          <p:cNvPr id="4" name="Content Placeholder 2">
+            <a:extLst>
+              <a:ext uri="{FF2B5EF4-FFF2-40B4-BE49-F238E27FC236}">
+                <a16:creationId xmlns:a16="http://schemas.microsoft.com/office/drawing/2014/main" id="{63DAD067-F15E-9C00-BF8C-B324CCAB9A23}"/>
+              </a:ext>
+            </a:extLst>
+          </p:cNvPr>
+          <p:cNvSpPr txBox="1">
+            <a:spLocks/>
+          </p:cNvSpPr>
+          <p:nvPr/>
+        </p:nvSpPr>
+        <p:spPr>
+          <a:xfrm>
+            <a:off x="4829558" y="1347216"/>
+            <a:ext cx="4349496" cy="3413145"/>
+          </a:xfrm>
+          <a:prstGeom prst="rect">
+            <a:avLst/>
+          </a:prstGeom>
+        </p:spPr>
+        <p:txBody>
+          <a:bodyPr vert="horz" lIns="91440" tIns="45720" rIns="91440" bIns="45720" rtlCol="0">
+            <a:normAutofit fontScale="62500" lnSpcReduction="20000"/>
+          </a:bodyPr>
+          <a:lstStyle>
+            <a:lvl1pPr marL="228600" indent="-228600" algn="l" defTabSz="914400" rtl="0" eaLnBrk="1" latinLnBrk="0" hangingPunct="1">
+              <a:lnSpc>
+                <a:spcPct val="90000"/>
+              </a:lnSpc>
+              <a:spcBef>
+                <a:spcPts val="1000"/>
+              </a:spcBef>
+              <a:buFont typeface="Arial" panose="020B0604020202020204" pitchFamily="34" charset="0"/>
+              <a:buChar char="•"/>
+              <a:defRPr sz="2800" kern="1200">
+                <a:solidFill>
+                  <a:schemeClr val="tx1"/>
+                </a:solidFill>
+                <a:latin typeface="+mn-lt"/>
+                <a:ea typeface="+mn-ea"/>
+                <a:cs typeface="+mn-cs"/>
+              </a:defRPr>
+            </a:lvl1pPr>
+            <a:lvl2pPr marL="685800" indent="-228600" algn="l" defTabSz="914400" rtl="0" eaLnBrk="1" latinLnBrk="0" hangingPunct="1">
+              <a:lnSpc>
+                <a:spcPct val="90000"/>
+              </a:lnSpc>
+              <a:spcBef>
+                <a:spcPts val="500"/>
+              </a:spcBef>
+              <a:buFont typeface="Arial" panose="020B0604020202020204" pitchFamily="34" charset="0"/>
+              <a:buChar char="•"/>
+              <a:defRPr sz="2400" kern="1200">
+                <a:solidFill>
+                  <a:schemeClr val="tx1"/>
+                </a:solidFill>
+                <a:latin typeface="+mn-lt"/>
+                <a:ea typeface="+mn-ea"/>
+                <a:cs typeface="+mn-cs"/>
+              </a:defRPr>
+            </a:lvl2pPr>
+            <a:lvl3pPr marL="1143000" indent="-228600" algn="l" defTabSz="914400" rtl="0" eaLnBrk="1" latinLnBrk="0" hangingPunct="1">
+              <a:lnSpc>
+                <a:spcPct val="90000"/>
+              </a:lnSpc>
+              <a:spcBef>
+                <a:spcPts val="500"/>
+              </a:spcBef>
+              <a:buFont typeface="Arial" panose="020B0604020202020204" pitchFamily="34" charset="0"/>
+              <a:buChar char="•"/>
+              <a:defRPr sz="2000" kern="1200">
+                <a:solidFill>
+                  <a:schemeClr val="tx1"/>
+                </a:solidFill>
+                <a:latin typeface="+mn-lt"/>
+                <a:ea typeface="+mn-ea"/>
+                <a:cs typeface="+mn-cs"/>
+              </a:defRPr>
+            </a:lvl3pPr>
+            <a:lvl4pPr marL="1600200" indent="-228600" algn="l" defTabSz="914400" rtl="0" eaLnBrk="1" latinLnBrk="0" hangingPunct="1">
+              <a:lnSpc>
+                <a:spcPct val="90000"/>
+              </a:lnSpc>
+              <a:spcBef>
+                <a:spcPts val="500"/>
+              </a:spcBef>
+              <a:buFont typeface="Arial" panose="020B0604020202020204" pitchFamily="34" charset="0"/>
+              <a:buChar char="•"/>
+              <a:defRPr sz="1800" kern="1200">
+                <a:solidFill>
+                  <a:schemeClr val="tx1"/>
+                </a:solidFill>
+                <a:latin typeface="+mn-lt"/>
+                <a:ea typeface="+mn-ea"/>
+                <a:cs typeface="+mn-cs"/>
+              </a:defRPr>
+            </a:lvl4pPr>
+            <a:lvl5pPr marL="2057400" indent="-228600" algn="l" defTabSz="914400" rtl="0" eaLnBrk="1" latinLnBrk="0" hangingPunct="1">
+              <a:lnSpc>
+                <a:spcPct val="90000"/>
+              </a:lnSpc>
+              <a:spcBef>
+                <a:spcPts val="500"/>
+              </a:spcBef>
+              <a:buFont typeface="Arial" panose="020B0604020202020204" pitchFamily="34" charset="0"/>
+              <a:buChar char="•"/>
+              <a:defRPr sz="1800" kern="1200">
+                <a:solidFill>
+                  <a:schemeClr val="tx1"/>
+                </a:solidFill>
+                <a:latin typeface="+mn-lt"/>
+                <a:ea typeface="+mn-ea"/>
+                <a:cs typeface="+mn-cs"/>
+              </a:defRPr>
+            </a:lvl5pPr>
+            <a:lvl6pPr marL="2514600" indent="-228600" algn="l" defTabSz="914400" rtl="0" eaLnBrk="1" latinLnBrk="0" hangingPunct="1">
+              <a:lnSpc>
+                <a:spcPct val="90000"/>
+              </a:lnSpc>
+              <a:spcBef>
+                <a:spcPts val="500"/>
+              </a:spcBef>
+              <a:buFont typeface="Arial" panose="020B0604020202020204" pitchFamily="34" charset="0"/>
+              <a:buChar char="•"/>
+              <a:defRPr sz="1800" kern="1200">
+                <a:solidFill>
+                  <a:schemeClr val="tx1"/>
+                </a:solidFill>
+                <a:latin typeface="+mn-lt"/>
+                <a:ea typeface="+mn-ea"/>
+                <a:cs typeface="+mn-cs"/>
+              </a:defRPr>
+            </a:lvl6pPr>
+            <a:lvl7pPr marL="2971800" indent="-228600" algn="l" defTabSz="914400" rtl="0" eaLnBrk="1" latinLnBrk="0" hangingPunct="1">
+              <a:lnSpc>
+                <a:spcPct val="90000"/>
+              </a:lnSpc>
+              <a:spcBef>
+                <a:spcPts val="500"/>
+              </a:spcBef>
+              <a:buFont typeface="Arial" panose="020B0604020202020204" pitchFamily="34" charset="0"/>
+              <a:buChar char="•"/>
+              <a:defRPr sz="1800" kern="1200">
+                <a:solidFill>
+                  <a:schemeClr val="tx1"/>
+                </a:solidFill>
+                <a:latin typeface="+mn-lt"/>
+                <a:ea typeface="+mn-ea"/>
+                <a:cs typeface="+mn-cs"/>
+              </a:defRPr>
+            </a:lvl7pPr>
+            <a:lvl8pPr marL="3429000" indent="-228600" algn="l" defTabSz="914400" rtl="0" eaLnBrk="1" latinLnBrk="0" hangingPunct="1">
+              <a:lnSpc>
+                <a:spcPct val="90000"/>
+              </a:lnSpc>
+              <a:spcBef>
+                <a:spcPts val="500"/>
+              </a:spcBef>
+              <a:buFont typeface="Arial" panose="020B0604020202020204" pitchFamily="34" charset="0"/>
+              <a:buChar char="•"/>
+              <a:defRPr sz="1800" kern="1200">
+                <a:solidFill>
+                  <a:schemeClr val="tx1"/>
+                </a:solidFill>
+                <a:latin typeface="+mn-lt"/>
+                <a:ea typeface="+mn-ea"/>
+                <a:cs typeface="+mn-cs"/>
+              </a:defRPr>
+            </a:lvl8pPr>
+            <a:lvl9pPr marL="3886200" indent="-228600" algn="l" defTabSz="914400" rtl="0" eaLnBrk="1" latinLnBrk="0" hangingPunct="1">
+              <a:lnSpc>
+                <a:spcPct val="90000"/>
+              </a:lnSpc>
+              <a:spcBef>
+                <a:spcPts val="500"/>
+              </a:spcBef>
+              <a:buFont typeface="Arial" panose="020B0604020202020204" pitchFamily="34" charset="0"/>
+              <a:buChar char="•"/>
+              <a:defRPr sz="1800" kern="1200">
+                <a:solidFill>
+                  <a:schemeClr val="tx1"/>
+                </a:solidFill>
+                <a:latin typeface="+mn-lt"/>
+                <a:ea typeface="+mn-ea"/>
+                <a:cs typeface="+mn-cs"/>
+              </a:defRPr>
+            </a:lvl9pPr>
+          </a:lstStyle>
+          <a:p>
+            <a:r>
+              <a:rPr lang="en-US" altLang="zh-CN" dirty="0"/>
+              <a:t>Enterprise Modeling and Analytics – the Cash Flow model</a:t>
+            </a:r>
+          </a:p>
+          <a:p>
+            <a:r>
+              <a:rPr lang="en-US" dirty="0"/>
+              <a:t>Data: date/month/time, missing values, N/A</a:t>
+            </a:r>
+          </a:p>
+          <a:p>
+            <a:r>
+              <a:rPr lang="en-US" dirty="0"/>
+              <a:t>Variables: filter data, </a:t>
+            </a:r>
+          </a:p>
+          <a:p>
+            <a:r>
+              <a:rPr lang="en-US" dirty="0"/>
+              <a:t>merge tables</a:t>
+            </a:r>
+          </a:p>
+          <a:p>
+            <a:pPr lvl="1"/>
+            <a:r>
+              <a:rPr lang="en-US" dirty="0"/>
+              <a:t>Concatenate</a:t>
+            </a:r>
+          </a:p>
+          <a:p>
+            <a:pPr lvl="1"/>
+            <a:r>
+              <a:rPr lang="en-US" dirty="0"/>
+              <a:t>match merging (with n= dataset option)</a:t>
+            </a:r>
+          </a:p>
+          <a:p>
+            <a:r>
+              <a:rPr lang="en-US" dirty="0"/>
+              <a:t>Models: logistic regression with splines</a:t>
+            </a:r>
+          </a:p>
+          <a:p>
+            <a:pPr lvl="1"/>
+            <a:r>
+              <a:rPr lang="en-US" dirty="0"/>
+              <a:t>Choose number and location of the knots.</a:t>
+            </a:r>
+          </a:p>
+          <a:p>
+            <a:r>
+              <a:rPr lang="en-US" dirty="0"/>
+              <a:t>Macro functions</a:t>
+            </a:r>
+          </a:p>
+          <a:p>
+            <a:r>
+              <a:rPr lang="en-US" dirty="0"/>
+              <a:t>Output</a:t>
+            </a:r>
+          </a:p>
+          <a:p>
+            <a:endParaRPr lang="en-US" dirty="0"/>
+          </a:p>
+        </p:txBody>
+      </p:sp>
+    </p:spTree>
+    <p:extLst>
+      <p:ext uri="{BB962C8B-B14F-4D97-AF65-F5344CB8AC3E}">
+        <p14:creationId xmlns:p14="http://schemas.microsoft.com/office/powerpoint/2010/main" val="4097000794"/>
       </p:ext>
     </p:extLst>
   </p:cSld>

--- a/2026 WSDS - Wujian Xue.pptx
+++ b/2026 WSDS - Wujian Xue.pptx
@@ -2825,7 +2825,7 @@
           <a:p>
             <a:fld id="{9DFF5FDE-556D-4288-960F-3880543CC0D0}" type="datetimeFigureOut">
               <a:rPr lang="en-US" smtClean="0"/>
-              <a:t>10/11/2026</a:t>
+              <a:t>10/13/2026</a:t>
             </a:fld>
             <a:endParaRPr lang="en-US"/>
           </a:p>
@@ -3023,7 +3023,7 @@
           <a:p>
             <a:fld id="{9DFF5FDE-556D-4288-960F-3880543CC0D0}" type="datetimeFigureOut">
               <a:rPr lang="en-US" smtClean="0"/>
-              <a:t>10/11/2026</a:t>
+              <a:t>10/13/2026</a:t>
             </a:fld>
             <a:endParaRPr lang="en-US"/>
           </a:p>
@@ -3231,7 +3231,7 @@
           <a:p>
             <a:fld id="{9DFF5FDE-556D-4288-960F-3880543CC0D0}" type="datetimeFigureOut">
               <a:rPr lang="en-US" smtClean="0"/>
-              <a:t>10/11/2026</a:t>
+              <a:t>10/13/2026</a:t>
             </a:fld>
             <a:endParaRPr lang="en-US"/>
           </a:p>
@@ -3429,7 +3429,7 @@
           <a:p>
             <a:fld id="{9DFF5FDE-556D-4288-960F-3880543CC0D0}" type="datetimeFigureOut">
               <a:rPr lang="en-US" smtClean="0"/>
-              <a:t>10/11/2026</a:t>
+              <a:t>10/13/2026</a:t>
             </a:fld>
             <a:endParaRPr lang="en-US"/>
           </a:p>
@@ -3704,7 +3704,7 @@
           <a:p>
             <a:fld id="{9DFF5FDE-556D-4288-960F-3880543CC0D0}" type="datetimeFigureOut">
               <a:rPr lang="en-US" smtClean="0"/>
-              <a:t>10/11/2026</a:t>
+              <a:t>10/13/2026</a:t>
             </a:fld>
             <a:endParaRPr lang="en-US"/>
           </a:p>
@@ -3969,7 +3969,7 @@
           <a:p>
             <a:fld id="{9DFF5FDE-556D-4288-960F-3880543CC0D0}" type="datetimeFigureOut">
               <a:rPr lang="en-US" smtClean="0"/>
-              <a:t>10/11/2026</a:t>
+              <a:t>10/13/2026</a:t>
             </a:fld>
             <a:endParaRPr lang="en-US"/>
           </a:p>
@@ -4381,7 +4381,7 @@
           <a:p>
             <a:fld id="{9DFF5FDE-556D-4288-960F-3880543CC0D0}" type="datetimeFigureOut">
               <a:rPr lang="en-US" smtClean="0"/>
-              <a:t>10/11/2026</a:t>
+              <a:t>10/13/2026</a:t>
             </a:fld>
             <a:endParaRPr lang="en-US"/>
           </a:p>
@@ -4522,7 +4522,7 @@
           <a:p>
             <a:fld id="{9DFF5FDE-556D-4288-960F-3880543CC0D0}" type="datetimeFigureOut">
               <a:rPr lang="en-US" smtClean="0"/>
-              <a:t>10/11/2026</a:t>
+              <a:t>10/13/2026</a:t>
             </a:fld>
             <a:endParaRPr lang="en-US"/>
           </a:p>
@@ -4635,7 +4635,7 @@
           <a:p>
             <a:fld id="{9DFF5FDE-556D-4288-960F-3880543CC0D0}" type="datetimeFigureOut">
               <a:rPr lang="en-US" smtClean="0"/>
-              <a:t>10/11/2026</a:t>
+              <a:t>10/13/2026</a:t>
             </a:fld>
             <a:endParaRPr lang="en-US"/>
           </a:p>
@@ -4946,7 +4946,7 @@
           <a:p>
             <a:fld id="{9DFF5FDE-556D-4288-960F-3880543CC0D0}" type="datetimeFigureOut">
               <a:rPr lang="en-US" smtClean="0"/>
-              <a:t>10/11/2026</a:t>
+              <a:t>10/13/2026</a:t>
             </a:fld>
             <a:endParaRPr lang="en-US"/>
           </a:p>
@@ -5234,7 +5234,7 @@
           <a:p>
             <a:fld id="{9DFF5FDE-556D-4288-960F-3880543CC0D0}" type="datetimeFigureOut">
               <a:rPr lang="en-US" smtClean="0"/>
-              <a:t>10/11/2026</a:t>
+              <a:t>10/13/2026</a:t>
             </a:fld>
             <a:endParaRPr lang="en-US"/>
           </a:p>
@@ -5475,7 +5475,7 @@
           <a:p>
             <a:fld id="{9DFF5FDE-556D-4288-960F-3880543CC0D0}" type="datetimeFigureOut">
               <a:rPr lang="en-US" smtClean="0"/>
-              <a:t>10/11/2026</a:t>
+              <a:t>10/13/2026</a:t>
             </a:fld>
             <a:endParaRPr lang="en-US"/>
           </a:p>
@@ -6245,6 +6245,41 @@
           </p:sp>
         </mc:Fallback>
       </mc:AlternateContent>
+      <p:sp>
+        <p:nvSpPr>
+          <p:cNvPr id="4" name="TextBox 3">
+            <a:extLst>
+              <a:ext uri="{FF2B5EF4-FFF2-40B4-BE49-F238E27FC236}">
+                <a16:creationId xmlns:a16="http://schemas.microsoft.com/office/drawing/2014/main" id="{14B99E25-EC46-C1F5-C053-56B96913954B}"/>
+              </a:ext>
+            </a:extLst>
+          </p:cNvPr>
+          <p:cNvSpPr txBox="1"/>
+          <p:nvPr/>
+        </p:nvSpPr>
+        <p:spPr>
+          <a:xfrm>
+            <a:off x="7542363" y="6492875"/>
+            <a:ext cx="4649637" cy="276999"/>
+          </a:xfrm>
+          <a:prstGeom prst="rect">
+            <a:avLst/>
+          </a:prstGeom>
+          <a:noFill/>
+        </p:spPr>
+        <p:txBody>
+          <a:bodyPr wrap="square" rtlCol="0">
+            <a:spAutoFit/>
+          </a:bodyPr>
+          <a:lstStyle/>
+          <a:p>
+            <a:r>
+              <a:rPr lang="en-US" sz="1200" dirty="0"/>
+              <a:t>2026, Women in Statistics and Data Science Conference, Cincinnati, OH</a:t>
+            </a:r>
+          </a:p>
+        </p:txBody>
+      </p:sp>
     </p:spTree>
     <p:extLst>
       <p:ext uri="{BB962C8B-B14F-4D97-AF65-F5344CB8AC3E}">
@@ -6587,6 +6622,36 @@
           </a:p>
         </p:txBody>
       </p:sp>
+      <p:pic>
+        <p:nvPicPr>
+          <p:cNvPr id="5" name="Picture 4">
+            <a:extLst>
+              <a:ext uri="{FF2B5EF4-FFF2-40B4-BE49-F238E27FC236}">
+                <a16:creationId xmlns:a16="http://schemas.microsoft.com/office/drawing/2014/main" id="{3C881C29-D8CF-F939-8E3B-1003A5511D4B}"/>
+              </a:ext>
+            </a:extLst>
+          </p:cNvPr>
+          <p:cNvPicPr>
+            <a:picLocks noChangeAspect="1"/>
+          </p:cNvPicPr>
+          <p:nvPr/>
+        </p:nvPicPr>
+        <p:blipFill>
+          <a:blip r:embed="rId2"/>
+          <a:stretch>
+            <a:fillRect/>
+          </a:stretch>
+        </p:blipFill>
+        <p:spPr>
+          <a:xfrm>
+            <a:off x="5193102" y="2949940"/>
+            <a:ext cx="6998898" cy="3713476"/>
+          </a:xfrm>
+          <a:prstGeom prst="rect">
+            <a:avLst/>
+          </a:prstGeom>
+        </p:spPr>
+      </p:pic>
     </p:spTree>
     <p:extLst>
       <p:ext uri="{BB962C8B-B14F-4D97-AF65-F5344CB8AC3E}">
@@ -6717,7 +6782,87 @@
             <a:endParaRPr lang="en-US" sz="2000" dirty="0"/>
           </a:p>
           <a:p>
+            <a:r>
+              <a:rPr lang="en-US" sz="2000" dirty="0" err="1">
+                <a:hlinkClick r:id="rId6"/>
+              </a:rPr>
+              <a:t>asnr</a:t>
+            </a:r>
+            <a:r>
+              <a:rPr lang="en-US" sz="2000" dirty="0">
+                <a:hlinkClick r:id="rId6"/>
+              </a:rPr>
+              <a:t>/</a:t>
+            </a:r>
+            <a:r>
+              <a:rPr lang="en-US" sz="2000" dirty="0" err="1">
+                <a:hlinkClick r:id="rId6"/>
+              </a:rPr>
+              <a:t>sas</a:t>
+            </a:r>
+            <a:r>
+              <a:rPr lang="en-US" sz="2000" dirty="0">
+                <a:hlinkClick r:id="rId6"/>
+              </a:rPr>
+              <a:t>-to-r: Translate SAS to R</a:t>
+            </a:r>
             <a:endParaRPr lang="en-US" sz="2000" dirty="0"/>
+          </a:p>
+          <a:p>
+            <a:r>
+              <a:rPr lang="en-US" sz="2000" dirty="0">
+                <a:hlinkClick r:id="rId7"/>
+              </a:rPr>
+              <a:t>Code-Transcompiler-using-LLMs-public/README.md at main · </a:t>
+            </a:r>
+            <a:r>
+              <a:rPr lang="en-US" sz="2000" dirty="0" err="1">
+                <a:hlinkClick r:id="rId7"/>
+              </a:rPr>
+              <a:t>CSOIreland</a:t>
+            </a:r>
+            <a:r>
+              <a:rPr lang="en-US" sz="2000" dirty="0">
+                <a:hlinkClick r:id="rId7"/>
+              </a:rPr>
+              <a:t>/Code-Transcompiler-using-LLMs-public</a:t>
+            </a:r>
+            <a:endParaRPr lang="en-US" sz="2000" dirty="0"/>
+          </a:p>
+        </p:txBody>
+      </p:sp>
+      <p:sp>
+        <p:nvSpPr>
+          <p:cNvPr id="4" name="TextBox 3">
+            <a:extLst>
+              <a:ext uri="{FF2B5EF4-FFF2-40B4-BE49-F238E27FC236}">
+                <a16:creationId xmlns:a16="http://schemas.microsoft.com/office/drawing/2014/main" id="{E5E627DE-ACAC-D1AB-193D-32D1237B2FE8}"/>
+              </a:ext>
+            </a:extLst>
+          </p:cNvPr>
+          <p:cNvSpPr txBox="1"/>
+          <p:nvPr/>
+        </p:nvSpPr>
+        <p:spPr>
+          <a:xfrm>
+            <a:off x="7542363" y="6492875"/>
+            <a:ext cx="4649637" cy="276999"/>
+          </a:xfrm>
+          <a:prstGeom prst="rect">
+            <a:avLst/>
+          </a:prstGeom>
+          <a:noFill/>
+        </p:spPr>
+        <p:txBody>
+          <a:bodyPr wrap="square" rtlCol="0">
+            <a:spAutoFit/>
+          </a:bodyPr>
+          <a:lstStyle/>
+          <a:p>
+            <a:r>
+              <a:rPr lang="en-US" sz="1200" dirty="0"/>
+              <a:t>2026, Women in Statistics and Data Science Conference, Cincinnati, OH</a:t>
+            </a:r>
           </a:p>
         </p:txBody>
       </p:sp>
@@ -6996,6 +7141,41 @@
           </a:p>
         </p:txBody>
       </p:sp>
+      <p:sp>
+        <p:nvSpPr>
+          <p:cNvPr id="4" name="TextBox 3">
+            <a:extLst>
+              <a:ext uri="{FF2B5EF4-FFF2-40B4-BE49-F238E27FC236}">
+                <a16:creationId xmlns:a16="http://schemas.microsoft.com/office/drawing/2014/main" id="{546BC297-F8DE-1784-BFD2-67AEED894C57}"/>
+              </a:ext>
+            </a:extLst>
+          </p:cNvPr>
+          <p:cNvSpPr txBox="1"/>
+          <p:nvPr/>
+        </p:nvSpPr>
+        <p:spPr>
+          <a:xfrm>
+            <a:off x="7542363" y="6492875"/>
+            <a:ext cx="4649637" cy="276999"/>
+          </a:xfrm>
+          <a:prstGeom prst="rect">
+            <a:avLst/>
+          </a:prstGeom>
+          <a:noFill/>
+        </p:spPr>
+        <p:txBody>
+          <a:bodyPr wrap="square" rtlCol="0">
+            <a:spAutoFit/>
+          </a:bodyPr>
+          <a:lstStyle/>
+          <a:p>
+            <a:r>
+              <a:rPr lang="en-US" sz="1200" dirty="0"/>
+              <a:t>2026, Women in Statistics and Data Science Conference, Cincinnati, OH</a:t>
+            </a:r>
+          </a:p>
+        </p:txBody>
+      </p:sp>
     </p:spTree>
     <p:extLst>
       <p:ext uri="{BB962C8B-B14F-4D97-AF65-F5344CB8AC3E}">
@@ -7305,6 +7485,41 @@
           </a:prstGeom>
         </p:spPr>
       </p:pic>
+      <p:sp>
+        <p:nvSpPr>
+          <p:cNvPr id="11" name="TextBox 10">
+            <a:extLst>
+              <a:ext uri="{FF2B5EF4-FFF2-40B4-BE49-F238E27FC236}">
+                <a16:creationId xmlns:a16="http://schemas.microsoft.com/office/drawing/2014/main" id="{60F343E3-B481-8821-EE0D-C79034097980}"/>
+              </a:ext>
+            </a:extLst>
+          </p:cNvPr>
+          <p:cNvSpPr txBox="1"/>
+          <p:nvPr/>
+        </p:nvSpPr>
+        <p:spPr>
+          <a:xfrm>
+            <a:off x="7542363" y="6492875"/>
+            <a:ext cx="4649637" cy="276999"/>
+          </a:xfrm>
+          <a:prstGeom prst="rect">
+            <a:avLst/>
+          </a:prstGeom>
+          <a:noFill/>
+        </p:spPr>
+        <p:txBody>
+          <a:bodyPr wrap="square" rtlCol="0">
+            <a:spAutoFit/>
+          </a:bodyPr>
+          <a:lstStyle/>
+          <a:p>
+            <a:r>
+              <a:rPr lang="en-US" sz="1200" dirty="0"/>
+              <a:t>2026, Women in Statistics and Data Science Conference, Cincinnati, OH</a:t>
+            </a:r>
+          </a:p>
+        </p:txBody>
+      </p:sp>
     </p:spTree>
     <p:extLst>
       <p:ext uri="{BB962C8B-B14F-4D97-AF65-F5344CB8AC3E}">
@@ -7391,6 +7606,41 @@
           </a:p>
           <a:p>
             <a:endParaRPr lang="en-US" dirty="0"/>
+          </a:p>
+        </p:txBody>
+      </p:sp>
+      <p:sp>
+        <p:nvSpPr>
+          <p:cNvPr id="4" name="TextBox 3">
+            <a:extLst>
+              <a:ext uri="{FF2B5EF4-FFF2-40B4-BE49-F238E27FC236}">
+                <a16:creationId xmlns:a16="http://schemas.microsoft.com/office/drawing/2014/main" id="{65B55003-FA9F-622B-44E4-FC338B76A12B}"/>
+              </a:ext>
+            </a:extLst>
+          </p:cNvPr>
+          <p:cNvSpPr txBox="1"/>
+          <p:nvPr/>
+        </p:nvSpPr>
+        <p:spPr>
+          <a:xfrm>
+            <a:off x="7542363" y="6492875"/>
+            <a:ext cx="4649637" cy="276999"/>
+          </a:xfrm>
+          <a:prstGeom prst="rect">
+            <a:avLst/>
+          </a:prstGeom>
+          <a:noFill/>
+        </p:spPr>
+        <p:txBody>
+          <a:bodyPr wrap="square" rtlCol="0">
+            <a:spAutoFit/>
+          </a:bodyPr>
+          <a:lstStyle/>
+          <a:p>
+            <a:r>
+              <a:rPr lang="en-US" sz="1200" dirty="0"/>
+              <a:t>2026, Women in Statistics and Data Science Conference, Cincinnati, OH</a:t>
+            </a:r>
           </a:p>
         </p:txBody>
       </p:sp>
@@ -7501,6 +7751,41 @@
           </a:p>
           <a:p>
             <a:endParaRPr lang="en-US" dirty="0"/>
+          </a:p>
+        </p:txBody>
+      </p:sp>
+      <p:sp>
+        <p:nvSpPr>
+          <p:cNvPr id="4" name="TextBox 3">
+            <a:extLst>
+              <a:ext uri="{FF2B5EF4-FFF2-40B4-BE49-F238E27FC236}">
+                <a16:creationId xmlns:a16="http://schemas.microsoft.com/office/drawing/2014/main" id="{13F68606-9E81-E44C-879B-FB4E3B5113C4}"/>
+              </a:ext>
+            </a:extLst>
+          </p:cNvPr>
+          <p:cNvSpPr txBox="1"/>
+          <p:nvPr/>
+        </p:nvSpPr>
+        <p:spPr>
+          <a:xfrm>
+            <a:off x="7542363" y="6492875"/>
+            <a:ext cx="4649637" cy="276999"/>
+          </a:xfrm>
+          <a:prstGeom prst="rect">
+            <a:avLst/>
+          </a:prstGeom>
+          <a:noFill/>
+        </p:spPr>
+        <p:txBody>
+          <a:bodyPr wrap="square" rtlCol="0">
+            <a:spAutoFit/>
+          </a:bodyPr>
+          <a:lstStyle/>
+          <a:p>
+            <a:r>
+              <a:rPr lang="en-US" sz="1200" dirty="0"/>
+              <a:t>2026, Women in Statistics and Data Science Conference, Cincinnati, OH</a:t>
+            </a:r>
           </a:p>
         </p:txBody>
       </p:sp>
@@ -8336,6 +8621,41 @@
           </a:p>
         </p:txBody>
       </p:sp>
+      <p:sp>
+        <p:nvSpPr>
+          <p:cNvPr id="4" name="TextBox 3">
+            <a:extLst>
+              <a:ext uri="{FF2B5EF4-FFF2-40B4-BE49-F238E27FC236}">
+                <a16:creationId xmlns:a16="http://schemas.microsoft.com/office/drawing/2014/main" id="{130C66BB-B97B-380D-5781-54F8B1CBEC03}"/>
+              </a:ext>
+            </a:extLst>
+          </p:cNvPr>
+          <p:cNvSpPr txBox="1"/>
+          <p:nvPr/>
+        </p:nvSpPr>
+        <p:spPr>
+          <a:xfrm>
+            <a:off x="7542363" y="6492875"/>
+            <a:ext cx="4649637" cy="276999"/>
+          </a:xfrm>
+          <a:prstGeom prst="rect">
+            <a:avLst/>
+          </a:prstGeom>
+          <a:noFill/>
+        </p:spPr>
+        <p:txBody>
+          <a:bodyPr wrap="square" rtlCol="0">
+            <a:spAutoFit/>
+          </a:bodyPr>
+          <a:lstStyle/>
+          <a:p>
+            <a:r>
+              <a:rPr lang="en-US" sz="1200" dirty="0"/>
+              <a:t>2026, Women in Statistics and Data Science Conference, Cincinnati, OH</a:t>
+            </a:r>
+          </a:p>
+        </p:txBody>
+      </p:sp>
     </p:spTree>
     <p:extLst>
       <p:ext uri="{BB962C8B-B14F-4D97-AF65-F5344CB8AC3E}">
@@ -8764,6 +9084,41 @@
           </a:p>
         </p:txBody>
       </p:sp>
+      <p:sp>
+        <p:nvSpPr>
+          <p:cNvPr id="3" name="TextBox 2">
+            <a:extLst>
+              <a:ext uri="{FF2B5EF4-FFF2-40B4-BE49-F238E27FC236}">
+                <a16:creationId xmlns:a16="http://schemas.microsoft.com/office/drawing/2014/main" id="{D0D43CC5-CEC4-33F3-BEEC-1F69BADAA8CF}"/>
+              </a:ext>
+            </a:extLst>
+          </p:cNvPr>
+          <p:cNvSpPr txBox="1"/>
+          <p:nvPr/>
+        </p:nvSpPr>
+        <p:spPr>
+          <a:xfrm>
+            <a:off x="7542363" y="6492875"/>
+            <a:ext cx="4649637" cy="276999"/>
+          </a:xfrm>
+          <a:prstGeom prst="rect">
+            <a:avLst/>
+          </a:prstGeom>
+          <a:noFill/>
+        </p:spPr>
+        <p:txBody>
+          <a:bodyPr wrap="square" rtlCol="0">
+            <a:spAutoFit/>
+          </a:bodyPr>
+          <a:lstStyle/>
+          <a:p>
+            <a:r>
+              <a:rPr lang="en-US" sz="1200" dirty="0"/>
+              <a:t>2026, Women in Statistics and Data Science Conference, Cincinnati, OH</a:t>
+            </a:r>
+          </a:p>
+        </p:txBody>
+      </p:sp>
     </p:spTree>
     <p:extLst>
       <p:ext uri="{BB962C8B-B14F-4D97-AF65-F5344CB8AC3E}">
@@ -8865,6 +9220,41 @@
             <a:r>
               <a:rPr lang="en-US" dirty="0"/>
               <a:t>Page 99</a:t>
+            </a:r>
+          </a:p>
+        </p:txBody>
+      </p:sp>
+      <p:sp>
+        <p:nvSpPr>
+          <p:cNvPr id="3" name="TextBox 2">
+            <a:extLst>
+              <a:ext uri="{FF2B5EF4-FFF2-40B4-BE49-F238E27FC236}">
+                <a16:creationId xmlns:a16="http://schemas.microsoft.com/office/drawing/2014/main" id="{F2076FA3-9937-CE0D-6532-8C7B6F12DE9F}"/>
+              </a:ext>
+            </a:extLst>
+          </p:cNvPr>
+          <p:cNvSpPr txBox="1"/>
+          <p:nvPr/>
+        </p:nvSpPr>
+        <p:spPr>
+          <a:xfrm>
+            <a:off x="7542363" y="6492875"/>
+            <a:ext cx="4649637" cy="276999"/>
+          </a:xfrm>
+          <a:prstGeom prst="rect">
+            <a:avLst/>
+          </a:prstGeom>
+          <a:noFill/>
+        </p:spPr>
+        <p:txBody>
+          <a:bodyPr wrap="square" rtlCol="0">
+            <a:spAutoFit/>
+          </a:bodyPr>
+          <a:lstStyle/>
+          <a:p>
+            <a:r>
+              <a:rPr lang="en-US" sz="1200" dirty="0"/>
+              <a:t>2026, Women in Statistics and Data Science Conference, Cincinnati, OH</a:t>
             </a:r>
           </a:p>
         </p:txBody>
@@ -9341,6 +9731,41 @@
           </a:p>
           <a:p>
             <a:endParaRPr lang="en-US" dirty="0"/>
+          </a:p>
+        </p:txBody>
+      </p:sp>
+      <p:sp>
+        <p:nvSpPr>
+          <p:cNvPr id="5" name="TextBox 4">
+            <a:extLst>
+              <a:ext uri="{FF2B5EF4-FFF2-40B4-BE49-F238E27FC236}">
+                <a16:creationId xmlns:a16="http://schemas.microsoft.com/office/drawing/2014/main" id="{EEB02195-335B-6B7B-3FC8-0E3B8884489C}"/>
+              </a:ext>
+            </a:extLst>
+          </p:cNvPr>
+          <p:cNvSpPr txBox="1"/>
+          <p:nvPr/>
+        </p:nvSpPr>
+        <p:spPr>
+          <a:xfrm>
+            <a:off x="7542363" y="6492875"/>
+            <a:ext cx="4649637" cy="276999"/>
+          </a:xfrm>
+          <a:prstGeom prst="rect">
+            <a:avLst/>
+          </a:prstGeom>
+          <a:noFill/>
+        </p:spPr>
+        <p:txBody>
+          <a:bodyPr wrap="square" rtlCol="0">
+            <a:spAutoFit/>
+          </a:bodyPr>
+          <a:lstStyle/>
+          <a:p>
+            <a:r>
+              <a:rPr lang="en-US" sz="1200" dirty="0"/>
+              <a:t>2026, Women in Statistics and Data Science Conference, Cincinnati, OH</a:t>
+            </a:r>
           </a:p>
         </p:txBody>
       </p:sp>

--- a/2026 WSDS - Wujian Xue.pptx
+++ b/2026 WSDS - Wujian Xue.pptx
@@ -2825,7 +2825,7 @@
           <a:p>
             <a:fld id="{9DFF5FDE-556D-4288-960F-3880543CC0D0}" type="datetimeFigureOut">
               <a:rPr lang="en-US" smtClean="0"/>
-              <a:t>10/13/2026</a:t>
+              <a:t>10/14/2026</a:t>
             </a:fld>
             <a:endParaRPr lang="en-US"/>
           </a:p>
@@ -3023,7 +3023,7 @@
           <a:p>
             <a:fld id="{9DFF5FDE-556D-4288-960F-3880543CC0D0}" type="datetimeFigureOut">
               <a:rPr lang="en-US" smtClean="0"/>
-              <a:t>10/13/2026</a:t>
+              <a:t>10/14/2026</a:t>
             </a:fld>
             <a:endParaRPr lang="en-US"/>
           </a:p>
@@ -3231,7 +3231,7 @@
           <a:p>
             <a:fld id="{9DFF5FDE-556D-4288-960F-3880543CC0D0}" type="datetimeFigureOut">
               <a:rPr lang="en-US" smtClean="0"/>
-              <a:t>10/13/2026</a:t>
+              <a:t>10/14/2026</a:t>
             </a:fld>
             <a:endParaRPr lang="en-US"/>
           </a:p>
@@ -3429,7 +3429,7 @@
           <a:p>
             <a:fld id="{9DFF5FDE-556D-4288-960F-3880543CC0D0}" type="datetimeFigureOut">
               <a:rPr lang="en-US" smtClean="0"/>
-              <a:t>10/13/2026</a:t>
+              <a:t>10/14/2026</a:t>
             </a:fld>
             <a:endParaRPr lang="en-US"/>
           </a:p>
@@ -3704,7 +3704,7 @@
           <a:p>
             <a:fld id="{9DFF5FDE-556D-4288-960F-3880543CC0D0}" type="datetimeFigureOut">
               <a:rPr lang="en-US" smtClean="0"/>
-              <a:t>10/13/2026</a:t>
+              <a:t>10/14/2026</a:t>
             </a:fld>
             <a:endParaRPr lang="en-US"/>
           </a:p>
@@ -3969,7 +3969,7 @@
           <a:p>
             <a:fld id="{9DFF5FDE-556D-4288-960F-3880543CC0D0}" type="datetimeFigureOut">
               <a:rPr lang="en-US" smtClean="0"/>
-              <a:t>10/13/2026</a:t>
+              <a:t>10/14/2026</a:t>
             </a:fld>
             <a:endParaRPr lang="en-US"/>
           </a:p>
@@ -4381,7 +4381,7 @@
           <a:p>
             <a:fld id="{9DFF5FDE-556D-4288-960F-3880543CC0D0}" type="datetimeFigureOut">
               <a:rPr lang="en-US" smtClean="0"/>
-              <a:t>10/13/2026</a:t>
+              <a:t>10/14/2026</a:t>
             </a:fld>
             <a:endParaRPr lang="en-US"/>
           </a:p>
@@ -4522,7 +4522,7 @@
           <a:p>
             <a:fld id="{9DFF5FDE-556D-4288-960F-3880543CC0D0}" type="datetimeFigureOut">
               <a:rPr lang="en-US" smtClean="0"/>
-              <a:t>10/13/2026</a:t>
+              <a:t>10/14/2026</a:t>
             </a:fld>
             <a:endParaRPr lang="en-US"/>
           </a:p>
@@ -4635,7 +4635,7 @@
           <a:p>
             <a:fld id="{9DFF5FDE-556D-4288-960F-3880543CC0D0}" type="datetimeFigureOut">
               <a:rPr lang="en-US" smtClean="0"/>
-              <a:t>10/13/2026</a:t>
+              <a:t>10/14/2026</a:t>
             </a:fld>
             <a:endParaRPr lang="en-US"/>
           </a:p>
@@ -4946,7 +4946,7 @@
           <a:p>
             <a:fld id="{9DFF5FDE-556D-4288-960F-3880543CC0D0}" type="datetimeFigureOut">
               <a:rPr lang="en-US" smtClean="0"/>
-              <a:t>10/13/2026</a:t>
+              <a:t>10/14/2026</a:t>
             </a:fld>
             <a:endParaRPr lang="en-US"/>
           </a:p>
@@ -5234,7 +5234,7 @@
           <a:p>
             <a:fld id="{9DFF5FDE-556D-4288-960F-3880543CC0D0}" type="datetimeFigureOut">
               <a:rPr lang="en-US" smtClean="0"/>
-              <a:t>10/13/2026</a:t>
+              <a:t>10/14/2026</a:t>
             </a:fld>
             <a:endParaRPr lang="en-US"/>
           </a:p>
@@ -5475,7 +5475,7 @@
           <a:p>
             <a:fld id="{9DFF5FDE-556D-4288-960F-3880543CC0D0}" type="datetimeFigureOut">
               <a:rPr lang="en-US" smtClean="0"/>
-              <a:t>10/13/2026</a:t>
+              <a:t>10/14/2026</a:t>
             </a:fld>
             <a:endParaRPr lang="en-US"/>
           </a:p>
@@ -5925,7 +5925,21 @@
                 <a:latin typeface="+mn-lt"/>
                 <a:cs typeface="Times New Roman" panose="02020603050405020304" pitchFamily="18" charset="0"/>
               </a:rPr>
-              <a:t>From On-Premise to Cloud: </a:t>
+              <a:t>From On-Premise</a:t>
+            </a:r>
+            <a:r>
+              <a:rPr lang="en-US" altLang="zh-CN" sz="8000" b="1" dirty="0">
+                <a:latin typeface="+mn-lt"/>
+                <a:cs typeface="Times New Roman" panose="02020603050405020304" pitchFamily="18" charset="0"/>
+              </a:rPr>
+              <a:t>s</a:t>
+            </a:r>
+            <a:r>
+              <a:rPr lang="en-US" sz="8000" b="1" dirty="0">
+                <a:latin typeface="+mn-lt"/>
+                <a:cs typeface="Times New Roman" panose="02020603050405020304" pitchFamily="18" charset="0"/>
+              </a:rPr>
+              <a:t> to Cloud: </a:t>
             </a:r>
             <a:br>
               <a:rPr lang="en-US" b="1" dirty="0">
@@ -7252,7 +7266,7 @@
         </p:nvSpPr>
         <p:spPr>
           <a:xfrm>
-            <a:off x="838200" y="1825625"/>
+            <a:off x="777815" y="1498251"/>
             <a:ext cx="10515600" cy="585066"/>
           </a:xfrm>
         </p:spPr>
@@ -7292,193 +7306,8 @@
         </p:blipFill>
         <p:spPr>
           <a:xfrm>
-            <a:off x="710400" y="2273598"/>
-            <a:ext cx="2638011" cy="1384610"/>
-          </a:xfrm>
-          <a:prstGeom prst="rect">
-            <a:avLst/>
-          </a:prstGeom>
-        </p:spPr>
-      </p:pic>
-      <p:pic>
-        <p:nvPicPr>
-          <p:cNvPr id="5" name="Picture 4">
-            <a:extLst>
-              <a:ext uri="{FF2B5EF4-FFF2-40B4-BE49-F238E27FC236}">
-                <a16:creationId xmlns:a16="http://schemas.microsoft.com/office/drawing/2014/main" id="{108087BF-A1B2-3CB3-9920-38BE92E30EDC}"/>
-              </a:ext>
-            </a:extLst>
-          </p:cNvPr>
-          <p:cNvPicPr>
-            <a:picLocks noChangeAspect="1"/>
-          </p:cNvPicPr>
-          <p:nvPr/>
-        </p:nvPicPr>
-        <p:blipFill>
-          <a:blip r:embed="rId3"/>
-          <a:stretch>
-            <a:fillRect/>
-          </a:stretch>
-        </p:blipFill>
-        <p:spPr>
-          <a:xfrm>
-            <a:off x="931236" y="3623715"/>
-            <a:ext cx="1290890" cy="861801"/>
-          </a:xfrm>
-          <a:prstGeom prst="rect">
-            <a:avLst/>
-          </a:prstGeom>
-        </p:spPr>
-      </p:pic>
-      <p:pic>
-        <p:nvPicPr>
-          <p:cNvPr id="6" name="Picture 5">
-            <a:extLst>
-              <a:ext uri="{FF2B5EF4-FFF2-40B4-BE49-F238E27FC236}">
-                <a16:creationId xmlns:a16="http://schemas.microsoft.com/office/drawing/2014/main" id="{8D1A128A-3E1F-2F81-712A-3809EA2ACB2A}"/>
-              </a:ext>
-            </a:extLst>
-          </p:cNvPr>
-          <p:cNvPicPr>
-            <a:picLocks noChangeAspect="1"/>
-          </p:cNvPicPr>
-          <p:nvPr/>
-        </p:nvPicPr>
-        <p:blipFill>
-          <a:blip r:embed="rId4"/>
-          <a:stretch>
-            <a:fillRect/>
-          </a:stretch>
-        </p:blipFill>
-        <p:spPr>
-          <a:xfrm>
-            <a:off x="6969180" y="1690688"/>
-            <a:ext cx="4512420" cy="3736848"/>
-          </a:xfrm>
-          <a:prstGeom prst="rect">
-            <a:avLst/>
-          </a:prstGeom>
-        </p:spPr>
-      </p:pic>
-      <p:sp>
-        <p:nvSpPr>
-          <p:cNvPr id="8" name="TextBox 7">
-            <a:extLst>
-              <a:ext uri="{FF2B5EF4-FFF2-40B4-BE49-F238E27FC236}">
-                <a16:creationId xmlns:a16="http://schemas.microsoft.com/office/drawing/2014/main" id="{1302E16F-7A83-3FFA-BF0B-8B32BA61716B}"/>
-              </a:ext>
-            </a:extLst>
-          </p:cNvPr>
-          <p:cNvSpPr txBox="1"/>
-          <p:nvPr/>
-        </p:nvSpPr>
-        <p:spPr>
-          <a:xfrm>
-            <a:off x="7985760" y="931768"/>
-            <a:ext cx="2950755" cy="369332"/>
-          </a:xfrm>
-          <a:prstGeom prst="rect">
-            <a:avLst/>
-          </a:prstGeom>
-          <a:noFill/>
-        </p:spPr>
-        <p:txBody>
-          <a:bodyPr wrap="square">
-            <a:spAutoFit/>
-          </a:bodyPr>
-          <a:lstStyle/>
-          <a:p>
-            <a:r>
-              <a:rPr lang="en-US" dirty="0"/>
-              <a:t>7 Rs in AWS Cloud Migration</a:t>
-            </a:r>
-          </a:p>
-        </p:txBody>
-      </p:sp>
-      <p:pic>
-        <p:nvPicPr>
-          <p:cNvPr id="7" name="Picture 6">
-            <a:extLst>
-              <a:ext uri="{FF2B5EF4-FFF2-40B4-BE49-F238E27FC236}">
-                <a16:creationId xmlns:a16="http://schemas.microsoft.com/office/drawing/2014/main" id="{C5282124-3EF7-4252-3560-5FC11F8C46FF}"/>
-              </a:ext>
-            </a:extLst>
-          </p:cNvPr>
-          <p:cNvPicPr>
-            <a:picLocks noChangeAspect="1"/>
-          </p:cNvPicPr>
-          <p:nvPr/>
-        </p:nvPicPr>
-        <p:blipFill>
-          <a:blip r:embed="rId5"/>
-          <a:stretch>
-            <a:fillRect/>
-          </a:stretch>
-        </p:blipFill>
-        <p:spPr>
-          <a:xfrm>
-            <a:off x="931236" y="5194362"/>
-            <a:ext cx="1877291" cy="769689"/>
-          </a:xfrm>
-          <a:prstGeom prst="rect">
-            <a:avLst/>
-          </a:prstGeom>
-        </p:spPr>
-      </p:pic>
-      <p:pic>
-        <p:nvPicPr>
-          <p:cNvPr id="9" name="Picture 8">
-            <a:extLst>
-              <a:ext uri="{FF2B5EF4-FFF2-40B4-BE49-F238E27FC236}">
-                <a16:creationId xmlns:a16="http://schemas.microsoft.com/office/drawing/2014/main" id="{E37C989E-9BF8-3A3A-3F0C-0FFB67224333}"/>
-              </a:ext>
-            </a:extLst>
-          </p:cNvPr>
-          <p:cNvPicPr>
-            <a:picLocks noChangeAspect="1"/>
-          </p:cNvPicPr>
-          <p:nvPr/>
-        </p:nvPicPr>
-        <p:blipFill>
-          <a:blip r:embed="rId6"/>
-          <a:stretch>
-            <a:fillRect/>
-          </a:stretch>
-        </p:blipFill>
-        <p:spPr>
-          <a:xfrm>
-            <a:off x="3817118" y="3501925"/>
-            <a:ext cx="2143471" cy="803156"/>
-          </a:xfrm>
-          <a:prstGeom prst="rect">
-            <a:avLst/>
-          </a:prstGeom>
-        </p:spPr>
-      </p:pic>
-      <p:pic>
-        <p:nvPicPr>
-          <p:cNvPr id="10" name="Picture 9">
-            <a:extLst>
-              <a:ext uri="{FF2B5EF4-FFF2-40B4-BE49-F238E27FC236}">
-                <a16:creationId xmlns:a16="http://schemas.microsoft.com/office/drawing/2014/main" id="{0DBA16AA-692D-7041-DE6B-C2AAAA535BBC}"/>
-              </a:ext>
-            </a:extLst>
-          </p:cNvPr>
-          <p:cNvPicPr>
-            <a:picLocks noChangeAspect="1"/>
-          </p:cNvPicPr>
-          <p:nvPr/>
-        </p:nvPicPr>
-        <p:blipFill>
-          <a:blip r:embed="rId7"/>
-          <a:stretch>
-            <a:fillRect/>
-          </a:stretch>
-        </p:blipFill>
-        <p:spPr>
-          <a:xfrm>
-            <a:off x="3791690" y="4997264"/>
-            <a:ext cx="2862262" cy="966787"/>
+            <a:off x="1116042" y="2008292"/>
+            <a:ext cx="2301815" cy="1208151"/>
           </a:xfrm>
           <a:prstGeom prst="rect">
             <a:avLst/>
@@ -7520,6 +7349,89 @@
           </a:p>
         </p:txBody>
       </p:sp>
+      <p:pic>
+        <p:nvPicPr>
+          <p:cNvPr id="1026" name="Picture 2" descr="Buy The Fateful History of Fannie Mae at Amazon">
+            <a:extLst>
+              <a:ext uri="{FF2B5EF4-FFF2-40B4-BE49-F238E27FC236}">
+                <a16:creationId xmlns:a16="http://schemas.microsoft.com/office/drawing/2014/main" id="{54F77962-5E48-8590-5D1F-2E1D0804454A}"/>
+              </a:ext>
+            </a:extLst>
+          </p:cNvPr>
+          <p:cNvPicPr>
+            <a:picLocks noChangeAspect="1" noChangeArrowheads="1"/>
+          </p:cNvPicPr>
+          <p:nvPr/>
+        </p:nvPicPr>
+        <p:blipFill>
+          <a:blip r:embed="rId3">
+            <a:extLst>
+              <a:ext uri="{28A0092B-C50C-407E-A947-70E740481C1C}">
+                <a14:useLocalDpi xmlns:a14="http://schemas.microsoft.com/office/drawing/2010/main" val="0"/>
+              </a:ext>
+            </a:extLst>
+          </a:blip>
+          <a:srcRect/>
+          <a:stretch>
+            <a:fillRect/>
+          </a:stretch>
+        </p:blipFill>
+        <p:spPr bwMode="auto">
+          <a:xfrm>
+            <a:off x="9161252" y="2372266"/>
+            <a:ext cx="2563483" cy="3759775"/>
+          </a:xfrm>
+          <a:prstGeom prst="rect">
+            <a:avLst/>
+          </a:prstGeom>
+          <a:noFill/>
+          <a:extLst>
+            <a:ext uri="{909E8E84-426E-40DD-AFC4-6F175D3DCCD1}">
+              <a14:hiddenFill xmlns:a14="http://schemas.microsoft.com/office/drawing/2010/main">
+                <a:solidFill>
+                  <a:srgbClr val="FFFFFF"/>
+                </a:solidFill>
+              </a14:hiddenFill>
+            </a:ext>
+          </a:extLst>
+        </p:spPr>
+      </p:pic>
+      <p:pic>
+        <p:nvPicPr>
+          <p:cNvPr id="13" name="Picture 12">
+            <a:extLst>
+              <a:ext uri="{FF2B5EF4-FFF2-40B4-BE49-F238E27FC236}">
+                <a16:creationId xmlns:a16="http://schemas.microsoft.com/office/drawing/2014/main" id="{2DF3816E-67F8-3536-C248-C26EC415F2AF}"/>
+              </a:ext>
+            </a:extLst>
+          </p:cNvPr>
+          <p:cNvPicPr>
+            <a:picLocks noChangeAspect="1"/>
+          </p:cNvPicPr>
+          <p:nvPr/>
+        </p:nvPicPr>
+        <p:blipFill>
+          <a:blip r:embed="rId4">
+            <a:extLst>
+              <a:ext uri="{28A0092B-C50C-407E-A947-70E740481C1C}">
+                <a14:useLocalDpi xmlns:a14="http://schemas.microsoft.com/office/drawing/2010/main" val="0"/>
+              </a:ext>
+            </a:extLst>
+          </a:blip>
+          <a:stretch>
+            <a:fillRect/>
+          </a:stretch>
+        </p:blipFill>
+        <p:spPr>
+          <a:xfrm>
+            <a:off x="1315402" y="3555558"/>
+            <a:ext cx="7313887" cy="2576483"/>
+          </a:xfrm>
+          <a:prstGeom prst="rect">
+            <a:avLst/>
+          </a:prstGeom>
+        </p:spPr>
+      </p:pic>
     </p:spTree>
     <p:extLst>
       <p:ext uri="{BB962C8B-B14F-4D97-AF65-F5344CB8AC3E}">
@@ -7594,7 +7506,12 @@
             <p:ph idx="1"/>
           </p:nvPr>
         </p:nvSpPr>
-        <p:spPr/>
+        <p:spPr>
+          <a:xfrm>
+            <a:off x="838200" y="1825625"/>
+            <a:ext cx="6640902" cy="4351338"/>
+          </a:xfrm>
+        </p:spPr>
         <p:txBody>
           <a:bodyPr/>
           <a:lstStyle/>
@@ -7644,6 +7561,191 @@
           </a:p>
         </p:txBody>
       </p:sp>
+      <p:pic>
+        <p:nvPicPr>
+          <p:cNvPr id="6" name="Picture 5">
+            <a:extLst>
+              <a:ext uri="{FF2B5EF4-FFF2-40B4-BE49-F238E27FC236}">
+                <a16:creationId xmlns:a16="http://schemas.microsoft.com/office/drawing/2014/main" id="{8D1A128A-3E1F-2F81-712A-3809EA2ACB2A}"/>
+              </a:ext>
+            </a:extLst>
+          </p:cNvPr>
+          <p:cNvPicPr>
+            <a:picLocks noChangeAspect="1"/>
+          </p:cNvPicPr>
+          <p:nvPr/>
+        </p:nvPicPr>
+        <p:blipFill>
+          <a:blip r:embed="rId2"/>
+          <a:stretch>
+            <a:fillRect/>
+          </a:stretch>
+        </p:blipFill>
+        <p:spPr>
+          <a:xfrm>
+            <a:off x="7838618" y="2410690"/>
+            <a:ext cx="3642982" cy="3016845"/>
+          </a:xfrm>
+          <a:prstGeom prst="rect">
+            <a:avLst/>
+          </a:prstGeom>
+        </p:spPr>
+      </p:pic>
+      <p:sp>
+        <p:nvSpPr>
+          <p:cNvPr id="8" name="TextBox 7">
+            <a:extLst>
+              <a:ext uri="{FF2B5EF4-FFF2-40B4-BE49-F238E27FC236}">
+                <a16:creationId xmlns:a16="http://schemas.microsoft.com/office/drawing/2014/main" id="{1302E16F-7A83-3FFA-BF0B-8B32BA61716B}"/>
+              </a:ext>
+            </a:extLst>
+          </p:cNvPr>
+          <p:cNvSpPr txBox="1"/>
+          <p:nvPr/>
+        </p:nvSpPr>
+        <p:spPr>
+          <a:xfrm>
+            <a:off x="8279058" y="1698736"/>
+            <a:ext cx="2950755" cy="369332"/>
+          </a:xfrm>
+          <a:prstGeom prst="rect">
+            <a:avLst/>
+          </a:prstGeom>
+          <a:noFill/>
+        </p:spPr>
+        <p:txBody>
+          <a:bodyPr wrap="square">
+            <a:spAutoFit/>
+          </a:bodyPr>
+          <a:lstStyle/>
+          <a:p>
+            <a:r>
+              <a:rPr lang="en-US" dirty="0"/>
+              <a:t>7 Rs in AWS Cloud Migration</a:t>
+            </a:r>
+          </a:p>
+        </p:txBody>
+      </p:sp>
+      <p:pic>
+        <p:nvPicPr>
+          <p:cNvPr id="5" name="Picture 4">
+            <a:extLst>
+              <a:ext uri="{FF2B5EF4-FFF2-40B4-BE49-F238E27FC236}">
+                <a16:creationId xmlns:a16="http://schemas.microsoft.com/office/drawing/2014/main" id="{108087BF-A1B2-3CB3-9920-38BE92E30EDC}"/>
+              </a:ext>
+            </a:extLst>
+          </p:cNvPr>
+          <p:cNvPicPr>
+            <a:picLocks noChangeAspect="1"/>
+          </p:cNvPicPr>
+          <p:nvPr/>
+        </p:nvPicPr>
+        <p:blipFill>
+          <a:blip r:embed="rId3"/>
+          <a:stretch>
+            <a:fillRect/>
+          </a:stretch>
+        </p:blipFill>
+        <p:spPr>
+          <a:xfrm>
+            <a:off x="957413" y="3623715"/>
+            <a:ext cx="1290890" cy="861801"/>
+          </a:xfrm>
+          <a:prstGeom prst="rect">
+            <a:avLst/>
+          </a:prstGeom>
+        </p:spPr>
+      </p:pic>
+      <p:pic>
+        <p:nvPicPr>
+          <p:cNvPr id="7" name="Picture 6">
+            <a:extLst>
+              <a:ext uri="{FF2B5EF4-FFF2-40B4-BE49-F238E27FC236}">
+                <a16:creationId xmlns:a16="http://schemas.microsoft.com/office/drawing/2014/main" id="{C5282124-3EF7-4252-3560-5FC11F8C46FF}"/>
+              </a:ext>
+            </a:extLst>
+          </p:cNvPr>
+          <p:cNvPicPr>
+            <a:picLocks noChangeAspect="1"/>
+          </p:cNvPicPr>
+          <p:nvPr/>
+        </p:nvPicPr>
+        <p:blipFill>
+          <a:blip r:embed="rId4"/>
+          <a:stretch>
+            <a:fillRect/>
+          </a:stretch>
+        </p:blipFill>
+        <p:spPr>
+          <a:xfrm>
+            <a:off x="957413" y="5194362"/>
+            <a:ext cx="1877291" cy="769689"/>
+          </a:xfrm>
+          <a:prstGeom prst="rect">
+            <a:avLst/>
+          </a:prstGeom>
+        </p:spPr>
+      </p:pic>
+      <p:pic>
+        <p:nvPicPr>
+          <p:cNvPr id="9" name="Picture 8">
+            <a:extLst>
+              <a:ext uri="{FF2B5EF4-FFF2-40B4-BE49-F238E27FC236}">
+                <a16:creationId xmlns:a16="http://schemas.microsoft.com/office/drawing/2014/main" id="{E37C989E-9BF8-3A3A-3F0C-0FFB67224333}"/>
+              </a:ext>
+            </a:extLst>
+          </p:cNvPr>
+          <p:cNvPicPr>
+            <a:picLocks noChangeAspect="1"/>
+          </p:cNvPicPr>
+          <p:nvPr/>
+        </p:nvPicPr>
+        <p:blipFill>
+          <a:blip r:embed="rId5"/>
+          <a:stretch>
+            <a:fillRect/>
+          </a:stretch>
+        </p:blipFill>
+        <p:spPr>
+          <a:xfrm>
+            <a:off x="3843295" y="3501925"/>
+            <a:ext cx="2143471" cy="803156"/>
+          </a:xfrm>
+          <a:prstGeom prst="rect">
+            <a:avLst/>
+          </a:prstGeom>
+        </p:spPr>
+      </p:pic>
+      <p:pic>
+        <p:nvPicPr>
+          <p:cNvPr id="10" name="Picture 9">
+            <a:extLst>
+              <a:ext uri="{FF2B5EF4-FFF2-40B4-BE49-F238E27FC236}">
+                <a16:creationId xmlns:a16="http://schemas.microsoft.com/office/drawing/2014/main" id="{0DBA16AA-692D-7041-DE6B-C2AAAA535BBC}"/>
+              </a:ext>
+            </a:extLst>
+          </p:cNvPr>
+          <p:cNvPicPr>
+            <a:picLocks noChangeAspect="1"/>
+          </p:cNvPicPr>
+          <p:nvPr/>
+        </p:nvPicPr>
+        <p:blipFill>
+          <a:blip r:embed="rId6"/>
+          <a:stretch>
+            <a:fillRect/>
+          </a:stretch>
+        </p:blipFill>
+        <p:spPr>
+          <a:xfrm>
+            <a:off x="3791690" y="4997264"/>
+            <a:ext cx="2862262" cy="966787"/>
+          </a:xfrm>
+          <a:prstGeom prst="rect">
+            <a:avLst/>
+          </a:prstGeom>
+        </p:spPr>
+      </p:pic>
     </p:spTree>
     <p:extLst>
       <p:ext uri="{BB962C8B-B14F-4D97-AF65-F5344CB8AC3E}">

--- a/2026 WSDS - Wujian Xue.pptx
+++ b/2026 WSDS - Wujian Xue.pptx
@@ -6373,6 +6373,10 @@
           <a:bodyPr/>
           <a:lstStyle/>
           <a:p>
+            <a:r>
+              <a:rPr lang="en-US" altLang="zh-CN"/>
+              <a:t>Do loop</a:t>
+            </a:r>
             <a:endParaRPr lang="en-US"/>
           </a:p>
         </p:txBody>
@@ -8928,8 +8932,8 @@
         </p:nvSpPr>
         <p:spPr>
           <a:xfrm>
-            <a:off x="4574362" y="2735206"/>
-            <a:ext cx="2637321" cy="3413145"/>
+            <a:off x="4574363" y="2735206"/>
+            <a:ext cx="2233762" cy="3413145"/>
           </a:xfrm>
           <a:prstGeom prst="rect">
             <a:avLst/>

--- a/2026 WSDS - Wujian Xue.pptx
+++ b/2026 WSDS - Wujian Xue.pptx
@@ -8,19 +8,21 @@
     <p:sldId id="256" r:id="rId2"/>
     <p:sldId id="264" r:id="rId3"/>
     <p:sldId id="257" r:id="rId4"/>
-    <p:sldId id="258" r:id="rId5"/>
-    <p:sldId id="272" r:id="rId6"/>
-    <p:sldId id="259" r:id="rId7"/>
-    <p:sldId id="270" r:id="rId8"/>
-    <p:sldId id="271" r:id="rId9"/>
-    <p:sldId id="269" r:id="rId10"/>
-    <p:sldId id="265" r:id="rId11"/>
-    <p:sldId id="266" r:id="rId12"/>
-    <p:sldId id="267" r:id="rId13"/>
-    <p:sldId id="260" r:id="rId14"/>
-    <p:sldId id="261" r:id="rId15"/>
-    <p:sldId id="263" r:id="rId16"/>
-    <p:sldId id="262" r:id="rId17"/>
+    <p:sldId id="274" r:id="rId5"/>
+    <p:sldId id="273" r:id="rId6"/>
+    <p:sldId id="258" r:id="rId7"/>
+    <p:sldId id="272" r:id="rId8"/>
+    <p:sldId id="259" r:id="rId9"/>
+    <p:sldId id="270" r:id="rId10"/>
+    <p:sldId id="271" r:id="rId11"/>
+    <p:sldId id="269" r:id="rId12"/>
+    <p:sldId id="266" r:id="rId13"/>
+    <p:sldId id="265" r:id="rId14"/>
+    <p:sldId id="267" r:id="rId15"/>
+    <p:sldId id="260" r:id="rId16"/>
+    <p:sldId id="261" r:id="rId17"/>
+    <p:sldId id="263" r:id="rId18"/>
+    <p:sldId id="262" r:id="rId19"/>
   </p:sldIdLst>
   <p:sldSz cx="12192000" cy="6858000"/>
   <p:notesSz cx="6858000" cy="9144000"/>
@@ -874,7 +876,1226 @@
 </dgm:colorsDef>
 </file>
 
+<file path=ppt/diagrams/colors2.xml><?xml version="1.0" encoding="utf-8"?>
+<dgm:colorsDef xmlns:dgm="http://schemas.openxmlformats.org/drawingml/2006/diagram" xmlns:a="http://schemas.openxmlformats.org/drawingml/2006/main" uniqueId="urn:microsoft.com/office/officeart/2005/8/colors/accent1_2">
+  <dgm:title val=""/>
+  <dgm:desc val=""/>
+  <dgm:catLst>
+    <dgm:cat type="accent1" pri="11200"/>
+  </dgm:catLst>
+  <dgm:styleLbl name="node0">
+    <dgm:fillClrLst meth="repeat">
+      <a:schemeClr val="accent1"/>
+    </dgm:fillClrLst>
+    <dgm:linClrLst meth="repeat">
+      <a:schemeClr val="lt1"/>
+    </dgm:linClrLst>
+    <dgm:effectClrLst/>
+    <dgm:txLinClrLst/>
+    <dgm:txFillClrLst/>
+    <dgm:txEffectClrLst/>
+  </dgm:styleLbl>
+  <dgm:styleLbl name="alignNode1">
+    <dgm:fillClrLst meth="repeat">
+      <a:schemeClr val="accent1"/>
+    </dgm:fillClrLst>
+    <dgm:linClrLst meth="repeat">
+      <a:schemeClr val="accent1"/>
+    </dgm:linClrLst>
+    <dgm:effectClrLst/>
+    <dgm:txLinClrLst/>
+    <dgm:txFillClrLst/>
+    <dgm:txEffectClrLst/>
+  </dgm:styleLbl>
+  <dgm:styleLbl name="node1">
+    <dgm:fillClrLst meth="repeat">
+      <a:schemeClr val="accent1"/>
+    </dgm:fillClrLst>
+    <dgm:linClrLst meth="repeat">
+      <a:schemeClr val="lt1"/>
+    </dgm:linClrLst>
+    <dgm:effectClrLst/>
+    <dgm:txLinClrLst/>
+    <dgm:txFillClrLst/>
+    <dgm:txEffectClrLst/>
+  </dgm:styleLbl>
+  <dgm:styleLbl name="lnNode1">
+    <dgm:fillClrLst meth="repeat">
+      <a:schemeClr val="accent1"/>
+    </dgm:fillClrLst>
+    <dgm:linClrLst meth="repeat">
+      <a:schemeClr val="lt1"/>
+    </dgm:linClrLst>
+    <dgm:effectClrLst/>
+    <dgm:txLinClrLst/>
+    <dgm:txFillClrLst/>
+    <dgm:txEffectClrLst/>
+  </dgm:styleLbl>
+  <dgm:styleLbl name="vennNode1">
+    <dgm:fillClrLst meth="repeat">
+      <a:schemeClr val="accent1">
+        <a:alpha val="50000"/>
+      </a:schemeClr>
+    </dgm:fillClrLst>
+    <dgm:linClrLst meth="repeat">
+      <a:schemeClr val="lt1"/>
+    </dgm:linClrLst>
+    <dgm:effectClrLst/>
+    <dgm:txLinClrLst/>
+    <dgm:txFillClrLst/>
+    <dgm:txEffectClrLst/>
+  </dgm:styleLbl>
+  <dgm:styleLbl name="node2">
+    <dgm:fillClrLst meth="repeat">
+      <a:schemeClr val="accent1"/>
+    </dgm:fillClrLst>
+    <dgm:linClrLst meth="repeat">
+      <a:schemeClr val="lt1"/>
+    </dgm:linClrLst>
+    <dgm:effectClrLst/>
+    <dgm:txLinClrLst/>
+    <dgm:txFillClrLst/>
+    <dgm:txEffectClrLst/>
+  </dgm:styleLbl>
+  <dgm:styleLbl name="node3">
+    <dgm:fillClrLst meth="repeat">
+      <a:schemeClr val="accent1"/>
+    </dgm:fillClrLst>
+    <dgm:linClrLst meth="repeat">
+      <a:schemeClr val="lt1"/>
+    </dgm:linClrLst>
+    <dgm:effectClrLst/>
+    <dgm:txLinClrLst/>
+    <dgm:txFillClrLst/>
+    <dgm:txEffectClrLst/>
+  </dgm:styleLbl>
+  <dgm:styleLbl name="node4">
+    <dgm:fillClrLst meth="repeat">
+      <a:schemeClr val="accent1"/>
+    </dgm:fillClrLst>
+    <dgm:linClrLst meth="repeat">
+      <a:schemeClr val="lt1"/>
+    </dgm:linClrLst>
+    <dgm:effectClrLst/>
+    <dgm:txLinClrLst/>
+    <dgm:txFillClrLst/>
+    <dgm:txEffectClrLst/>
+  </dgm:styleLbl>
+  <dgm:styleLbl name="fgImgPlace1">
+    <dgm:fillClrLst meth="repeat">
+      <a:schemeClr val="accent1">
+        <a:tint val="50000"/>
+      </a:schemeClr>
+    </dgm:fillClrLst>
+    <dgm:linClrLst meth="repeat">
+      <a:schemeClr val="lt1"/>
+    </dgm:linClrLst>
+    <dgm:effectClrLst/>
+    <dgm:txLinClrLst/>
+    <dgm:txFillClrLst meth="repeat">
+      <a:schemeClr val="lt1"/>
+    </dgm:txFillClrLst>
+    <dgm:txEffectClrLst/>
+  </dgm:styleLbl>
+  <dgm:styleLbl name="alignImgPlace1">
+    <dgm:fillClrLst meth="repeat">
+      <a:schemeClr val="accent1">
+        <a:tint val="50000"/>
+      </a:schemeClr>
+    </dgm:fillClrLst>
+    <dgm:linClrLst meth="repeat">
+      <a:schemeClr val="lt1"/>
+    </dgm:linClrLst>
+    <dgm:effectClrLst/>
+    <dgm:txLinClrLst/>
+    <dgm:txFillClrLst meth="repeat">
+      <a:schemeClr val="lt1"/>
+    </dgm:txFillClrLst>
+    <dgm:txEffectClrLst/>
+  </dgm:styleLbl>
+  <dgm:styleLbl name="bgImgPlace1">
+    <dgm:fillClrLst meth="repeat">
+      <a:schemeClr val="accent1">
+        <a:tint val="50000"/>
+      </a:schemeClr>
+    </dgm:fillClrLst>
+    <dgm:linClrLst meth="repeat">
+      <a:schemeClr val="lt1"/>
+    </dgm:linClrLst>
+    <dgm:effectClrLst/>
+    <dgm:txLinClrLst/>
+    <dgm:txFillClrLst meth="repeat">
+      <a:schemeClr val="lt1"/>
+    </dgm:txFillClrLst>
+    <dgm:txEffectClrLst/>
+  </dgm:styleLbl>
+  <dgm:styleLbl name="sibTrans2D1">
+    <dgm:fillClrLst meth="repeat">
+      <a:schemeClr val="accent1">
+        <a:tint val="60000"/>
+      </a:schemeClr>
+    </dgm:fillClrLst>
+    <dgm:linClrLst meth="repeat">
+      <a:schemeClr val="accent1">
+        <a:tint val="60000"/>
+      </a:schemeClr>
+    </dgm:linClrLst>
+    <dgm:effectClrLst/>
+    <dgm:txLinClrLst/>
+    <dgm:txFillClrLst/>
+    <dgm:txEffectClrLst/>
+  </dgm:styleLbl>
+  <dgm:styleLbl name="fgSibTrans2D1">
+    <dgm:fillClrLst meth="repeat">
+      <a:schemeClr val="accent1">
+        <a:tint val="60000"/>
+      </a:schemeClr>
+    </dgm:fillClrLst>
+    <dgm:linClrLst meth="repeat">
+      <a:schemeClr val="accent1">
+        <a:tint val="60000"/>
+      </a:schemeClr>
+    </dgm:linClrLst>
+    <dgm:effectClrLst/>
+    <dgm:txLinClrLst/>
+    <dgm:txFillClrLst/>
+    <dgm:txEffectClrLst/>
+  </dgm:styleLbl>
+  <dgm:styleLbl name="bgSibTrans2D1">
+    <dgm:fillClrLst meth="repeat">
+      <a:schemeClr val="accent1">
+        <a:tint val="60000"/>
+      </a:schemeClr>
+    </dgm:fillClrLst>
+    <dgm:linClrLst meth="repeat">
+      <a:schemeClr val="accent1">
+        <a:tint val="60000"/>
+      </a:schemeClr>
+    </dgm:linClrLst>
+    <dgm:effectClrLst/>
+    <dgm:txLinClrLst/>
+    <dgm:txFillClrLst/>
+    <dgm:txEffectClrLst/>
+  </dgm:styleLbl>
+  <dgm:styleLbl name="sibTrans1D1">
+    <dgm:fillClrLst meth="repeat">
+      <a:schemeClr val="accent1"/>
+    </dgm:fillClrLst>
+    <dgm:linClrLst meth="repeat">
+      <a:schemeClr val="accent1"/>
+    </dgm:linClrLst>
+    <dgm:effectClrLst/>
+    <dgm:txLinClrLst/>
+    <dgm:txFillClrLst meth="repeat">
+      <a:schemeClr val="tx1"/>
+    </dgm:txFillClrLst>
+    <dgm:txEffectClrLst/>
+  </dgm:styleLbl>
+  <dgm:styleLbl name="callout">
+    <dgm:fillClrLst meth="repeat">
+      <a:schemeClr val="accent1"/>
+    </dgm:fillClrLst>
+    <dgm:linClrLst meth="repeat">
+      <a:schemeClr val="accent1">
+        <a:tint val="50000"/>
+      </a:schemeClr>
+    </dgm:linClrLst>
+    <dgm:effectClrLst/>
+    <dgm:txLinClrLst/>
+    <dgm:txFillClrLst meth="repeat">
+      <a:schemeClr val="tx1"/>
+    </dgm:txFillClrLst>
+    <dgm:txEffectClrLst/>
+  </dgm:styleLbl>
+  <dgm:styleLbl name="asst0">
+    <dgm:fillClrLst meth="repeat">
+      <a:schemeClr val="accent1"/>
+    </dgm:fillClrLst>
+    <dgm:linClrLst meth="repeat">
+      <a:schemeClr val="lt1"/>
+    </dgm:linClrLst>
+    <dgm:effectClrLst/>
+    <dgm:txLinClrLst/>
+    <dgm:txFillClrLst/>
+    <dgm:txEffectClrLst/>
+  </dgm:styleLbl>
+  <dgm:styleLbl name="asst1">
+    <dgm:fillClrLst meth="repeat">
+      <a:schemeClr val="accent1"/>
+    </dgm:fillClrLst>
+    <dgm:linClrLst meth="repeat">
+      <a:schemeClr val="lt1"/>
+    </dgm:linClrLst>
+    <dgm:effectClrLst/>
+    <dgm:txLinClrLst/>
+    <dgm:txFillClrLst/>
+    <dgm:txEffectClrLst/>
+  </dgm:styleLbl>
+  <dgm:styleLbl name="asst2">
+    <dgm:fillClrLst meth="repeat">
+      <a:schemeClr val="accent1"/>
+    </dgm:fillClrLst>
+    <dgm:linClrLst meth="repeat">
+      <a:schemeClr val="lt1"/>
+    </dgm:linClrLst>
+    <dgm:effectClrLst/>
+    <dgm:txLinClrLst/>
+    <dgm:txFillClrLst/>
+    <dgm:txEffectClrLst/>
+  </dgm:styleLbl>
+  <dgm:styleLbl name="asst3">
+    <dgm:fillClrLst meth="repeat">
+      <a:schemeClr val="accent1"/>
+    </dgm:fillClrLst>
+    <dgm:linClrLst meth="repeat">
+      <a:schemeClr val="lt1"/>
+    </dgm:linClrLst>
+    <dgm:effectClrLst/>
+    <dgm:txLinClrLst/>
+    <dgm:txFillClrLst/>
+    <dgm:txEffectClrLst/>
+  </dgm:styleLbl>
+  <dgm:styleLbl name="asst4">
+    <dgm:fillClrLst meth="repeat">
+      <a:schemeClr val="accent1"/>
+    </dgm:fillClrLst>
+    <dgm:linClrLst meth="repeat">
+      <a:schemeClr val="lt1"/>
+    </dgm:linClrLst>
+    <dgm:effectClrLst/>
+    <dgm:txLinClrLst/>
+    <dgm:txFillClrLst/>
+    <dgm:txEffectClrLst/>
+  </dgm:styleLbl>
+  <dgm:styleLbl name="parChTrans2D1">
+    <dgm:fillClrLst meth="repeat">
+      <a:schemeClr val="accent1">
+        <a:tint val="60000"/>
+      </a:schemeClr>
+    </dgm:fillClrLst>
+    <dgm:linClrLst meth="repeat">
+      <a:schemeClr val="accent1">
+        <a:tint val="60000"/>
+      </a:schemeClr>
+    </dgm:linClrLst>
+    <dgm:effectClrLst/>
+    <dgm:txLinClrLst/>
+    <dgm:txFillClrLst meth="repeat">
+      <a:schemeClr val="lt1"/>
+    </dgm:txFillClrLst>
+    <dgm:txEffectClrLst/>
+  </dgm:styleLbl>
+  <dgm:styleLbl name="parChTrans2D2">
+    <dgm:fillClrLst meth="repeat">
+      <a:schemeClr val="accent1"/>
+    </dgm:fillClrLst>
+    <dgm:linClrLst meth="repeat">
+      <a:schemeClr val="accent1"/>
+    </dgm:linClrLst>
+    <dgm:effectClrLst/>
+    <dgm:txLinClrLst/>
+    <dgm:txFillClrLst meth="repeat">
+      <a:schemeClr val="lt1"/>
+    </dgm:txFillClrLst>
+    <dgm:txEffectClrLst/>
+  </dgm:styleLbl>
+  <dgm:styleLbl name="parChTrans2D3">
+    <dgm:fillClrLst meth="repeat">
+      <a:schemeClr val="accent1"/>
+    </dgm:fillClrLst>
+    <dgm:linClrLst meth="repeat">
+      <a:schemeClr val="accent1"/>
+    </dgm:linClrLst>
+    <dgm:effectClrLst/>
+    <dgm:txLinClrLst/>
+    <dgm:txFillClrLst meth="repeat">
+      <a:schemeClr val="lt1"/>
+    </dgm:txFillClrLst>
+    <dgm:txEffectClrLst/>
+  </dgm:styleLbl>
+  <dgm:styleLbl name="parChTrans2D4">
+    <dgm:fillClrLst meth="repeat">
+      <a:schemeClr val="accent1"/>
+    </dgm:fillClrLst>
+    <dgm:linClrLst meth="repeat">
+      <a:schemeClr val="accent1"/>
+    </dgm:linClrLst>
+    <dgm:effectClrLst/>
+    <dgm:txLinClrLst/>
+    <dgm:txFillClrLst meth="repeat">
+      <a:schemeClr val="lt1"/>
+    </dgm:txFillClrLst>
+    <dgm:txEffectClrLst/>
+  </dgm:styleLbl>
+  <dgm:styleLbl name="parChTrans1D1">
+    <dgm:fillClrLst meth="repeat">
+      <a:schemeClr val="accent1"/>
+    </dgm:fillClrLst>
+    <dgm:linClrLst meth="repeat">
+      <a:schemeClr val="accent1">
+        <a:shade val="60000"/>
+      </a:schemeClr>
+    </dgm:linClrLst>
+    <dgm:effectClrLst/>
+    <dgm:txLinClrLst/>
+    <dgm:txFillClrLst meth="repeat">
+      <a:schemeClr val="tx1"/>
+    </dgm:txFillClrLst>
+    <dgm:txEffectClrLst/>
+  </dgm:styleLbl>
+  <dgm:styleLbl name="parChTrans1D2">
+    <dgm:fillClrLst meth="repeat">
+      <a:schemeClr val="accent1"/>
+    </dgm:fillClrLst>
+    <dgm:linClrLst meth="repeat">
+      <a:schemeClr val="accent1">
+        <a:shade val="60000"/>
+      </a:schemeClr>
+    </dgm:linClrLst>
+    <dgm:effectClrLst/>
+    <dgm:txLinClrLst/>
+    <dgm:txFillClrLst meth="repeat">
+      <a:schemeClr val="tx1"/>
+    </dgm:txFillClrLst>
+    <dgm:txEffectClrLst/>
+  </dgm:styleLbl>
+  <dgm:styleLbl name="parChTrans1D3">
+    <dgm:fillClrLst meth="repeat">
+      <a:schemeClr val="accent1"/>
+    </dgm:fillClrLst>
+    <dgm:linClrLst meth="repeat">
+      <a:schemeClr val="accent1">
+        <a:shade val="80000"/>
+      </a:schemeClr>
+    </dgm:linClrLst>
+    <dgm:effectClrLst/>
+    <dgm:txLinClrLst/>
+    <dgm:txFillClrLst meth="repeat">
+      <a:schemeClr val="tx1"/>
+    </dgm:txFillClrLst>
+    <dgm:txEffectClrLst/>
+  </dgm:styleLbl>
+  <dgm:styleLbl name="parChTrans1D4">
+    <dgm:fillClrLst meth="repeat">
+      <a:schemeClr val="accent1"/>
+    </dgm:fillClrLst>
+    <dgm:linClrLst meth="repeat">
+      <a:schemeClr val="accent1">
+        <a:shade val="80000"/>
+      </a:schemeClr>
+    </dgm:linClrLst>
+    <dgm:effectClrLst/>
+    <dgm:txLinClrLst/>
+    <dgm:txFillClrLst meth="repeat">
+      <a:schemeClr val="tx1"/>
+    </dgm:txFillClrLst>
+    <dgm:txEffectClrLst/>
+  </dgm:styleLbl>
+  <dgm:styleLbl name="fgAcc1">
+    <dgm:fillClrLst meth="repeat">
+      <a:schemeClr val="lt1">
+        <a:alpha val="90000"/>
+      </a:schemeClr>
+    </dgm:fillClrLst>
+    <dgm:linClrLst meth="repeat">
+      <a:schemeClr val="accent1"/>
+    </dgm:linClrLst>
+    <dgm:effectClrLst/>
+    <dgm:txLinClrLst/>
+    <dgm:txFillClrLst meth="repeat">
+      <a:schemeClr val="dk1"/>
+    </dgm:txFillClrLst>
+    <dgm:txEffectClrLst/>
+  </dgm:styleLbl>
+  <dgm:styleLbl name="conFgAcc1">
+    <dgm:fillClrLst meth="repeat">
+      <a:schemeClr val="lt1">
+        <a:alpha val="90000"/>
+      </a:schemeClr>
+    </dgm:fillClrLst>
+    <dgm:linClrLst meth="repeat">
+      <a:schemeClr val="accent1"/>
+    </dgm:linClrLst>
+    <dgm:effectClrLst/>
+    <dgm:txLinClrLst/>
+    <dgm:txFillClrLst meth="repeat">
+      <a:schemeClr val="dk1"/>
+    </dgm:txFillClrLst>
+    <dgm:txEffectClrLst/>
+  </dgm:styleLbl>
+  <dgm:styleLbl name="alignAcc1">
+    <dgm:fillClrLst meth="repeat">
+      <a:schemeClr val="lt1">
+        <a:alpha val="90000"/>
+      </a:schemeClr>
+    </dgm:fillClrLst>
+    <dgm:linClrLst meth="repeat">
+      <a:schemeClr val="accent1"/>
+    </dgm:linClrLst>
+    <dgm:effectClrLst/>
+    <dgm:txLinClrLst/>
+    <dgm:txFillClrLst meth="repeat">
+      <a:schemeClr val="dk1"/>
+    </dgm:txFillClrLst>
+    <dgm:txEffectClrLst/>
+  </dgm:styleLbl>
+  <dgm:styleLbl name="trAlignAcc1">
+    <dgm:fillClrLst meth="repeat">
+      <a:schemeClr val="lt1">
+        <a:alpha val="40000"/>
+      </a:schemeClr>
+    </dgm:fillClrLst>
+    <dgm:linClrLst meth="repeat">
+      <a:schemeClr val="accent1"/>
+    </dgm:linClrLst>
+    <dgm:effectClrLst/>
+    <dgm:txLinClrLst/>
+    <dgm:txFillClrLst meth="repeat">
+      <a:schemeClr val="dk1"/>
+    </dgm:txFillClrLst>
+    <dgm:txEffectClrLst/>
+  </dgm:styleLbl>
+  <dgm:styleLbl name="bgAcc1">
+    <dgm:fillClrLst meth="repeat">
+      <a:schemeClr val="lt1">
+        <a:alpha val="90000"/>
+      </a:schemeClr>
+    </dgm:fillClrLst>
+    <dgm:linClrLst meth="repeat">
+      <a:schemeClr val="accent1"/>
+    </dgm:linClrLst>
+    <dgm:effectClrLst/>
+    <dgm:txLinClrLst/>
+    <dgm:txFillClrLst meth="repeat">
+      <a:schemeClr val="dk1"/>
+    </dgm:txFillClrLst>
+    <dgm:txEffectClrLst/>
+  </dgm:styleLbl>
+  <dgm:styleLbl name="solidFgAcc1">
+    <dgm:fillClrLst meth="repeat">
+      <a:schemeClr val="lt1"/>
+    </dgm:fillClrLst>
+    <dgm:linClrLst meth="repeat">
+      <a:schemeClr val="accent1"/>
+    </dgm:linClrLst>
+    <dgm:effectClrLst/>
+    <dgm:txLinClrLst/>
+    <dgm:txFillClrLst meth="repeat">
+      <a:schemeClr val="dk1"/>
+    </dgm:txFillClrLst>
+    <dgm:txEffectClrLst/>
+  </dgm:styleLbl>
+  <dgm:styleLbl name="solidAlignAcc1">
+    <dgm:fillClrLst meth="repeat">
+      <a:schemeClr val="lt1"/>
+    </dgm:fillClrLst>
+    <dgm:linClrLst meth="repeat">
+      <a:schemeClr val="accent1"/>
+    </dgm:linClrLst>
+    <dgm:effectClrLst/>
+    <dgm:txLinClrLst/>
+    <dgm:txFillClrLst meth="repeat">
+      <a:schemeClr val="dk1"/>
+    </dgm:txFillClrLst>
+    <dgm:txEffectClrLst/>
+  </dgm:styleLbl>
+  <dgm:styleLbl name="solidBgAcc1">
+    <dgm:fillClrLst meth="repeat">
+      <a:schemeClr val="lt1"/>
+    </dgm:fillClrLst>
+    <dgm:linClrLst meth="repeat">
+      <a:schemeClr val="accent1"/>
+    </dgm:linClrLst>
+    <dgm:effectClrLst/>
+    <dgm:txLinClrLst/>
+    <dgm:txFillClrLst meth="repeat">
+      <a:schemeClr val="dk1"/>
+    </dgm:txFillClrLst>
+    <dgm:txEffectClrLst/>
+  </dgm:styleLbl>
+  <dgm:styleLbl name="fgAccFollowNode1">
+    <dgm:fillClrLst meth="repeat">
+      <a:schemeClr val="accent1">
+        <a:alpha val="90000"/>
+        <a:tint val="40000"/>
+      </a:schemeClr>
+    </dgm:fillClrLst>
+    <dgm:linClrLst meth="repeat">
+      <a:schemeClr val="accent1">
+        <a:alpha val="90000"/>
+        <a:tint val="40000"/>
+      </a:schemeClr>
+    </dgm:linClrLst>
+    <dgm:effectClrLst/>
+    <dgm:txLinClrLst/>
+    <dgm:txFillClrLst meth="repeat">
+      <a:schemeClr val="dk1"/>
+    </dgm:txFillClrLst>
+    <dgm:txEffectClrLst/>
+  </dgm:styleLbl>
+  <dgm:styleLbl name="alignAccFollowNode1">
+    <dgm:fillClrLst meth="repeat">
+      <a:schemeClr val="accent1">
+        <a:alpha val="90000"/>
+        <a:tint val="40000"/>
+      </a:schemeClr>
+    </dgm:fillClrLst>
+    <dgm:linClrLst meth="repeat">
+      <a:schemeClr val="accent1">
+        <a:alpha val="90000"/>
+        <a:tint val="40000"/>
+      </a:schemeClr>
+    </dgm:linClrLst>
+    <dgm:effectClrLst/>
+    <dgm:txLinClrLst/>
+    <dgm:txFillClrLst meth="repeat">
+      <a:schemeClr val="dk1"/>
+    </dgm:txFillClrLst>
+    <dgm:txEffectClrLst/>
+  </dgm:styleLbl>
+  <dgm:styleLbl name="bgAccFollowNode1">
+    <dgm:fillClrLst meth="repeat">
+      <a:schemeClr val="accent1">
+        <a:alpha val="90000"/>
+        <a:tint val="40000"/>
+      </a:schemeClr>
+    </dgm:fillClrLst>
+    <dgm:linClrLst meth="repeat">
+      <a:schemeClr val="accent1">
+        <a:alpha val="90000"/>
+        <a:tint val="40000"/>
+      </a:schemeClr>
+    </dgm:linClrLst>
+    <dgm:effectClrLst/>
+    <dgm:txLinClrLst/>
+    <dgm:txFillClrLst meth="repeat">
+      <a:schemeClr val="dk1"/>
+    </dgm:txFillClrLst>
+    <dgm:txEffectClrLst/>
+  </dgm:styleLbl>
+  <dgm:styleLbl name="fgAcc0">
+    <dgm:fillClrLst meth="repeat">
+      <a:schemeClr val="lt1">
+        <a:alpha val="90000"/>
+      </a:schemeClr>
+    </dgm:fillClrLst>
+    <dgm:linClrLst meth="repeat">
+      <a:schemeClr val="accent1"/>
+    </dgm:linClrLst>
+    <dgm:effectClrLst/>
+    <dgm:txLinClrLst/>
+    <dgm:txFillClrLst meth="repeat">
+      <a:schemeClr val="dk1"/>
+    </dgm:txFillClrLst>
+    <dgm:txEffectClrLst/>
+  </dgm:styleLbl>
+  <dgm:styleLbl name="fgAcc2">
+    <dgm:fillClrLst meth="repeat">
+      <a:schemeClr val="lt1">
+        <a:alpha val="90000"/>
+      </a:schemeClr>
+    </dgm:fillClrLst>
+    <dgm:linClrLst meth="repeat">
+      <a:schemeClr val="accent1"/>
+    </dgm:linClrLst>
+    <dgm:effectClrLst/>
+    <dgm:txLinClrLst/>
+    <dgm:txFillClrLst meth="repeat">
+      <a:schemeClr val="dk1"/>
+    </dgm:txFillClrLst>
+    <dgm:txEffectClrLst/>
+  </dgm:styleLbl>
+  <dgm:styleLbl name="fgAcc3">
+    <dgm:fillClrLst meth="repeat">
+      <a:schemeClr val="lt1">
+        <a:alpha val="90000"/>
+      </a:schemeClr>
+    </dgm:fillClrLst>
+    <dgm:linClrLst meth="repeat">
+      <a:schemeClr val="accent1"/>
+    </dgm:linClrLst>
+    <dgm:effectClrLst/>
+    <dgm:txLinClrLst/>
+    <dgm:txFillClrLst meth="repeat">
+      <a:schemeClr val="dk1"/>
+    </dgm:txFillClrLst>
+    <dgm:txEffectClrLst/>
+  </dgm:styleLbl>
+  <dgm:styleLbl name="fgAcc4">
+    <dgm:fillClrLst meth="repeat">
+      <a:schemeClr val="lt1">
+        <a:alpha val="90000"/>
+      </a:schemeClr>
+    </dgm:fillClrLst>
+    <dgm:linClrLst meth="repeat">
+      <a:schemeClr val="accent1"/>
+    </dgm:linClrLst>
+    <dgm:effectClrLst/>
+    <dgm:txLinClrLst/>
+    <dgm:txFillClrLst meth="repeat">
+      <a:schemeClr val="dk1"/>
+    </dgm:txFillClrLst>
+    <dgm:txEffectClrLst/>
+  </dgm:styleLbl>
+  <dgm:styleLbl name="bgShp">
+    <dgm:fillClrLst meth="repeat">
+      <a:schemeClr val="accent1">
+        <a:tint val="40000"/>
+      </a:schemeClr>
+    </dgm:fillClrLst>
+    <dgm:linClrLst meth="repeat">
+      <a:schemeClr val="accent1"/>
+    </dgm:linClrLst>
+    <dgm:effectClrLst/>
+    <dgm:txLinClrLst/>
+    <dgm:txFillClrLst meth="repeat">
+      <a:schemeClr val="dk1"/>
+    </dgm:txFillClrLst>
+    <dgm:txEffectClrLst/>
+  </dgm:styleLbl>
+  <dgm:styleLbl name="dkBgShp">
+    <dgm:fillClrLst meth="repeat">
+      <a:schemeClr val="accent1">
+        <a:shade val="80000"/>
+      </a:schemeClr>
+    </dgm:fillClrLst>
+    <dgm:linClrLst meth="repeat">
+      <a:schemeClr val="accent1"/>
+    </dgm:linClrLst>
+    <dgm:effectClrLst/>
+    <dgm:txLinClrLst/>
+    <dgm:txFillClrLst meth="repeat">
+      <a:schemeClr val="lt1"/>
+    </dgm:txFillClrLst>
+    <dgm:txEffectClrLst/>
+  </dgm:styleLbl>
+  <dgm:styleLbl name="trBgShp">
+    <dgm:fillClrLst meth="repeat">
+      <a:schemeClr val="accent1">
+        <a:tint val="50000"/>
+        <a:alpha val="40000"/>
+      </a:schemeClr>
+    </dgm:fillClrLst>
+    <dgm:linClrLst meth="repeat">
+      <a:schemeClr val="accent1"/>
+    </dgm:linClrLst>
+    <dgm:effectClrLst/>
+    <dgm:txLinClrLst/>
+    <dgm:txFillClrLst meth="repeat">
+      <a:schemeClr val="lt1"/>
+    </dgm:txFillClrLst>
+    <dgm:txEffectClrLst/>
+  </dgm:styleLbl>
+  <dgm:styleLbl name="fgShp">
+    <dgm:fillClrLst meth="repeat">
+      <a:schemeClr val="accent1">
+        <a:tint val="60000"/>
+      </a:schemeClr>
+    </dgm:fillClrLst>
+    <dgm:linClrLst meth="repeat">
+      <a:schemeClr val="lt1"/>
+    </dgm:linClrLst>
+    <dgm:effectClrLst/>
+    <dgm:txLinClrLst/>
+    <dgm:txFillClrLst meth="repeat">
+      <a:schemeClr val="dk1"/>
+    </dgm:txFillClrLst>
+    <dgm:txEffectClrLst/>
+  </dgm:styleLbl>
+  <dgm:styleLbl name="revTx">
+    <dgm:fillClrLst meth="repeat">
+      <a:schemeClr val="lt1">
+        <a:alpha val="0"/>
+      </a:schemeClr>
+    </dgm:fillClrLst>
+    <dgm:linClrLst meth="repeat">
+      <a:schemeClr val="dk1">
+        <a:alpha val="0"/>
+      </a:schemeClr>
+    </dgm:linClrLst>
+    <dgm:effectClrLst/>
+    <dgm:txLinClrLst/>
+    <dgm:txFillClrLst meth="repeat">
+      <a:schemeClr val="tx1"/>
+    </dgm:txFillClrLst>
+    <dgm:txEffectClrLst/>
+  </dgm:styleLbl>
+</dgm:colorsDef>
+</file>
+
 <file path=ppt/diagrams/data1.xml><?xml version="1.0" encoding="utf-8"?>
+<dgm:dataModel xmlns:dgm="http://schemas.openxmlformats.org/drawingml/2006/diagram" xmlns:a="http://schemas.openxmlformats.org/drawingml/2006/main">
+  <dgm:ptLst>
+    <dgm:pt modelId="{3208F64C-0EEF-4D44-B6E6-BFE6459F5DDE}" type="doc">
+      <dgm:prSet loTypeId="urn:microsoft.com/office/officeart/2011/layout/HexagonRadial" loCatId="cycle" qsTypeId="urn:microsoft.com/office/officeart/2005/8/quickstyle/simple1" qsCatId="simple" csTypeId="urn:microsoft.com/office/officeart/2005/8/colors/accent1_2" csCatId="accent1" phldr="1"/>
+      <dgm:spPr/>
+      <dgm:t>
+        <a:bodyPr/>
+        <a:lstStyle/>
+        <a:p>
+          <a:endParaRPr lang="en-US"/>
+        </a:p>
+      </dgm:t>
+    </dgm:pt>
+    <dgm:pt modelId="{602F0427-6797-43C7-9CFF-39FE5CFA72D9}">
+      <dgm:prSet phldrT="[Text]" phldr="0"/>
+      <dgm:spPr/>
+      <dgm:t>
+        <a:bodyPr/>
+        <a:lstStyle/>
+        <a:p>
+          <a:r>
+            <a:rPr lang="en-US" dirty="0"/>
+            <a:t>Cloud migration</a:t>
+          </a:r>
+        </a:p>
+      </dgm:t>
+    </dgm:pt>
+    <dgm:pt modelId="{936A183E-D86C-4E46-90C7-D408ED3AFE0C}" type="parTrans" cxnId="{0C14DDF5-4ABD-41AD-BB04-C7589277FC11}">
+      <dgm:prSet/>
+      <dgm:spPr/>
+      <dgm:t>
+        <a:bodyPr/>
+        <a:lstStyle/>
+        <a:p>
+          <a:endParaRPr lang="en-US"/>
+        </a:p>
+      </dgm:t>
+    </dgm:pt>
+    <dgm:pt modelId="{9D912BBE-A4A4-4ECC-BB0A-28828FC6A443}" type="sibTrans" cxnId="{0C14DDF5-4ABD-41AD-BB04-C7589277FC11}">
+      <dgm:prSet/>
+      <dgm:spPr/>
+      <dgm:t>
+        <a:bodyPr/>
+        <a:lstStyle/>
+        <a:p>
+          <a:endParaRPr lang="en-US"/>
+        </a:p>
+      </dgm:t>
+    </dgm:pt>
+    <dgm:pt modelId="{BE175FE2-498E-448A-B4A7-2283839D76F4}">
+      <dgm:prSet phldrT="[Text]" phldr="0"/>
+      <dgm:spPr>
+        <a:solidFill>
+          <a:schemeClr val="accent2"/>
+        </a:solidFill>
+      </dgm:spPr>
+      <dgm:t>
+        <a:bodyPr/>
+        <a:lstStyle/>
+        <a:p>
+          <a:r>
+            <a:rPr lang="en-US" dirty="0"/>
+            <a:t>Time to customer value</a:t>
+          </a:r>
+        </a:p>
+      </dgm:t>
+    </dgm:pt>
+    <dgm:pt modelId="{D22DE5EC-1A0D-44B8-A0B4-B8E22F720A91}" type="parTrans" cxnId="{09912B82-505C-4526-A64D-7C4639D33CF2}">
+      <dgm:prSet/>
+      <dgm:spPr/>
+      <dgm:t>
+        <a:bodyPr/>
+        <a:lstStyle/>
+        <a:p>
+          <a:endParaRPr lang="en-US"/>
+        </a:p>
+      </dgm:t>
+    </dgm:pt>
+    <dgm:pt modelId="{F7396975-9E05-4FAA-B722-F6253FC2E417}" type="sibTrans" cxnId="{09912B82-505C-4526-A64D-7C4639D33CF2}">
+      <dgm:prSet/>
+      <dgm:spPr/>
+      <dgm:t>
+        <a:bodyPr/>
+        <a:lstStyle/>
+        <a:p>
+          <a:endParaRPr lang="en-US"/>
+        </a:p>
+      </dgm:t>
+    </dgm:pt>
+    <dgm:pt modelId="{1563DCD7-CC83-4FCC-986E-EF0D88F8C8C9}">
+      <dgm:prSet phldrT="[Text]" phldr="0"/>
+      <dgm:spPr>
+        <a:solidFill>
+          <a:schemeClr val="accent3"/>
+        </a:solidFill>
+      </dgm:spPr>
+      <dgm:t>
+        <a:bodyPr/>
+        <a:lstStyle/>
+        <a:p>
+          <a:r>
+            <a:rPr lang="en-US" dirty="0"/>
+            <a:t>Organize for effectiveness</a:t>
+          </a:r>
+        </a:p>
+      </dgm:t>
+    </dgm:pt>
+    <dgm:pt modelId="{59CA1295-6B0D-4D46-9A6E-2BE514C501C1}" type="parTrans" cxnId="{CC0D36AC-DB77-4EAE-B086-2C6AAEFE3F2A}">
+      <dgm:prSet/>
+      <dgm:spPr/>
+      <dgm:t>
+        <a:bodyPr/>
+        <a:lstStyle/>
+        <a:p>
+          <a:endParaRPr lang="en-US"/>
+        </a:p>
+      </dgm:t>
+    </dgm:pt>
+    <dgm:pt modelId="{E189B592-1F81-44E7-B47F-E1578E5C0D66}" type="sibTrans" cxnId="{CC0D36AC-DB77-4EAE-B086-2C6AAEFE3F2A}">
+      <dgm:prSet/>
+      <dgm:spPr/>
+      <dgm:t>
+        <a:bodyPr/>
+        <a:lstStyle/>
+        <a:p>
+          <a:endParaRPr lang="en-US"/>
+        </a:p>
+      </dgm:t>
+    </dgm:pt>
+    <dgm:pt modelId="{E9121F76-5EF8-4413-AF26-8697B1A9AA5A}">
+      <dgm:prSet phldrT="[Text]" phldr="0"/>
+      <dgm:spPr>
+        <a:solidFill>
+          <a:srgbClr val="92D050"/>
+        </a:solidFill>
+      </dgm:spPr>
+      <dgm:t>
+        <a:bodyPr/>
+        <a:lstStyle/>
+        <a:p>
+          <a:r>
+            <a:rPr lang="en-US" dirty="0"/>
+            <a:t>Digital stability</a:t>
+          </a:r>
+        </a:p>
+      </dgm:t>
+    </dgm:pt>
+    <dgm:pt modelId="{8C532E8D-69F8-4B70-A921-97FB40C76A2F}" type="parTrans" cxnId="{81F62DBD-B899-4930-B398-F865E8B6888B}">
+      <dgm:prSet/>
+      <dgm:spPr/>
+      <dgm:t>
+        <a:bodyPr/>
+        <a:lstStyle/>
+        <a:p>
+          <a:endParaRPr lang="en-US"/>
+        </a:p>
+      </dgm:t>
+    </dgm:pt>
+    <dgm:pt modelId="{CCB91678-A106-4A6C-87D2-2D693F9505DB}" type="sibTrans" cxnId="{81F62DBD-B899-4930-B398-F865E8B6888B}">
+      <dgm:prSet/>
+      <dgm:spPr/>
+      <dgm:t>
+        <a:bodyPr/>
+        <a:lstStyle/>
+        <a:p>
+          <a:endParaRPr lang="en-US"/>
+        </a:p>
+      </dgm:t>
+    </dgm:pt>
+    <dgm:pt modelId="{D06E1645-DE76-4E65-BB3C-46F3BAC5AF75}">
+      <dgm:prSet phldrT="[Text]"/>
+      <dgm:spPr>
+        <a:solidFill>
+          <a:srgbClr val="00B0F0"/>
+        </a:solidFill>
+      </dgm:spPr>
+      <dgm:t>
+        <a:bodyPr/>
+        <a:lstStyle/>
+        <a:p>
+          <a:r>
+            <a:rPr lang="en-US" altLang="zh-CN" dirty="0"/>
+            <a:t>Business Innovation at speed</a:t>
+          </a:r>
+          <a:endParaRPr lang="en-US" dirty="0"/>
+        </a:p>
+      </dgm:t>
+    </dgm:pt>
+    <dgm:pt modelId="{BE94E7EA-F143-44A5-B81A-3464EC870185}" type="parTrans" cxnId="{CCB88BBB-D2D2-4EE7-BA30-391C3EBAD68C}">
+      <dgm:prSet/>
+      <dgm:spPr/>
+      <dgm:t>
+        <a:bodyPr/>
+        <a:lstStyle/>
+        <a:p>
+          <a:endParaRPr lang="en-US"/>
+        </a:p>
+      </dgm:t>
+    </dgm:pt>
+    <dgm:pt modelId="{5927F88E-3CFB-42A1-B344-5AA79A4C293A}" type="sibTrans" cxnId="{CCB88BBB-D2D2-4EE7-BA30-391C3EBAD68C}">
+      <dgm:prSet/>
+      <dgm:spPr/>
+      <dgm:t>
+        <a:bodyPr/>
+        <a:lstStyle/>
+        <a:p>
+          <a:endParaRPr lang="en-US"/>
+        </a:p>
+      </dgm:t>
+    </dgm:pt>
+    <dgm:pt modelId="{BB981C33-12A1-4F6C-8D00-12C6EC1236A6}">
+      <dgm:prSet phldrT="[Text]" phldr="0"/>
+      <dgm:spPr>
+        <a:solidFill>
+          <a:srgbClr val="002060"/>
+        </a:solidFill>
+      </dgm:spPr>
+      <dgm:t>
+        <a:bodyPr/>
+        <a:lstStyle/>
+        <a:p>
+          <a:r>
+            <a:rPr lang="en-US" dirty="0"/>
+            <a:t>Enable transformation</a:t>
+          </a:r>
+        </a:p>
+      </dgm:t>
+    </dgm:pt>
+    <dgm:pt modelId="{F7D42D6E-AEC6-4242-B246-7A189388A0F8}" type="parTrans" cxnId="{FA5E902D-85A4-4CD2-87C7-EE50DFA82060}">
+      <dgm:prSet/>
+      <dgm:spPr/>
+      <dgm:t>
+        <a:bodyPr/>
+        <a:lstStyle/>
+        <a:p>
+          <a:endParaRPr lang="en-US"/>
+        </a:p>
+      </dgm:t>
+    </dgm:pt>
+    <dgm:pt modelId="{A5179DFB-4E52-435E-98B6-48F909660EC9}" type="sibTrans" cxnId="{FA5E902D-85A4-4CD2-87C7-EE50DFA82060}">
+      <dgm:prSet/>
+      <dgm:spPr/>
+      <dgm:t>
+        <a:bodyPr/>
+        <a:lstStyle/>
+        <a:p>
+          <a:endParaRPr lang="en-US"/>
+        </a:p>
+      </dgm:t>
+    </dgm:pt>
+    <dgm:pt modelId="{E6B28B6F-C093-4492-834A-5B67CB2968D9}">
+      <dgm:prSet phldrT="[Text]" phldr="0"/>
+      <dgm:spPr>
+        <a:solidFill>
+          <a:srgbClr val="FF0000"/>
+        </a:solidFill>
+      </dgm:spPr>
+      <dgm:t>
+        <a:bodyPr/>
+        <a:lstStyle/>
+        <a:p>
+          <a:r>
+            <a:rPr lang="en-US" dirty="0"/>
+            <a:t>Intelligent </a:t>
+          </a:r>
+          <a:r>
+            <a:rPr lang="en-US" altLang="zh-CN" dirty="0"/>
+            <a:t>automation</a:t>
+          </a:r>
+          <a:endParaRPr lang="en-US" dirty="0"/>
+        </a:p>
+      </dgm:t>
+    </dgm:pt>
+    <dgm:pt modelId="{16007CBA-F250-4A92-91E9-E2465ED87B2A}" type="parTrans" cxnId="{E6ECE566-AB50-4692-8DED-B40CF4E97AB2}">
+      <dgm:prSet/>
+      <dgm:spPr/>
+      <dgm:t>
+        <a:bodyPr/>
+        <a:lstStyle/>
+        <a:p>
+          <a:endParaRPr lang="en-US"/>
+        </a:p>
+      </dgm:t>
+    </dgm:pt>
+    <dgm:pt modelId="{F8A9E26C-260A-45F5-8E9E-ABAE245C49E4}" type="sibTrans" cxnId="{E6ECE566-AB50-4692-8DED-B40CF4E97AB2}">
+      <dgm:prSet/>
+      <dgm:spPr/>
+      <dgm:t>
+        <a:bodyPr/>
+        <a:lstStyle/>
+        <a:p>
+          <a:endParaRPr lang="en-US"/>
+        </a:p>
+      </dgm:t>
+    </dgm:pt>
+    <dgm:pt modelId="{67D15FC6-E047-48C3-847F-243D66AC66A9}" type="pres">
+      <dgm:prSet presAssocID="{3208F64C-0EEF-4D44-B6E6-BFE6459F5DDE}" presName="Name0" presStyleCnt="0">
+        <dgm:presLayoutVars>
+          <dgm:chMax val="1"/>
+          <dgm:chPref val="1"/>
+          <dgm:dir/>
+          <dgm:animOne val="branch"/>
+          <dgm:animLvl val="lvl"/>
+        </dgm:presLayoutVars>
+      </dgm:prSet>
+      <dgm:spPr/>
+    </dgm:pt>
+    <dgm:pt modelId="{F1D19A2F-77BC-4938-9885-093F435A8A47}" type="pres">
+      <dgm:prSet presAssocID="{602F0427-6797-43C7-9CFF-39FE5CFA72D9}" presName="Parent" presStyleLbl="node0" presStyleIdx="0" presStyleCnt="1">
+        <dgm:presLayoutVars>
+          <dgm:chMax val="6"/>
+          <dgm:chPref val="6"/>
+        </dgm:presLayoutVars>
+      </dgm:prSet>
+      <dgm:spPr/>
+    </dgm:pt>
+    <dgm:pt modelId="{D6EA40F1-8F1D-497B-935A-7440D7458290}" type="pres">
+      <dgm:prSet presAssocID="{BE175FE2-498E-448A-B4A7-2283839D76F4}" presName="Accent1" presStyleCnt="0"/>
+      <dgm:spPr/>
+    </dgm:pt>
+    <dgm:pt modelId="{595D05E8-0147-4426-84F2-CAF286F94084}" type="pres">
+      <dgm:prSet presAssocID="{BE175FE2-498E-448A-B4A7-2283839D76F4}" presName="Accent" presStyleLbl="bgShp" presStyleIdx="0" presStyleCnt="6"/>
+      <dgm:spPr/>
+    </dgm:pt>
+    <dgm:pt modelId="{0CB0AA78-D63F-4F3A-AFA6-EAE5E0314406}" type="pres">
+      <dgm:prSet presAssocID="{BE175FE2-498E-448A-B4A7-2283839D76F4}" presName="Child1" presStyleLbl="node1" presStyleIdx="0" presStyleCnt="6">
+        <dgm:presLayoutVars>
+          <dgm:chMax val="0"/>
+          <dgm:chPref val="0"/>
+          <dgm:bulletEnabled val="1"/>
+        </dgm:presLayoutVars>
+      </dgm:prSet>
+      <dgm:spPr/>
+    </dgm:pt>
+    <dgm:pt modelId="{588526E8-04B5-4B80-AA9B-0D229A69CB08}" type="pres">
+      <dgm:prSet presAssocID="{1563DCD7-CC83-4FCC-986E-EF0D88F8C8C9}" presName="Accent2" presStyleCnt="0"/>
+      <dgm:spPr/>
+    </dgm:pt>
+    <dgm:pt modelId="{16108406-D824-48AA-986F-F20B13B82A81}" type="pres">
+      <dgm:prSet presAssocID="{1563DCD7-CC83-4FCC-986E-EF0D88F8C8C9}" presName="Accent" presStyleLbl="bgShp" presStyleIdx="1" presStyleCnt="6"/>
+      <dgm:spPr/>
+    </dgm:pt>
+    <dgm:pt modelId="{9699140C-2F89-460C-BE44-85A64DE59F52}" type="pres">
+      <dgm:prSet presAssocID="{1563DCD7-CC83-4FCC-986E-EF0D88F8C8C9}" presName="Child2" presStyleLbl="node1" presStyleIdx="1" presStyleCnt="6">
+        <dgm:presLayoutVars>
+          <dgm:chMax val="0"/>
+          <dgm:chPref val="0"/>
+          <dgm:bulletEnabled val="1"/>
+        </dgm:presLayoutVars>
+      </dgm:prSet>
+      <dgm:spPr/>
+    </dgm:pt>
+    <dgm:pt modelId="{B9739F21-4DE0-44C7-A0C1-2C212BC562EA}" type="pres">
+      <dgm:prSet presAssocID="{E9121F76-5EF8-4413-AF26-8697B1A9AA5A}" presName="Accent3" presStyleCnt="0"/>
+      <dgm:spPr/>
+    </dgm:pt>
+    <dgm:pt modelId="{322F9847-0308-445A-A02E-9697140899BE}" type="pres">
+      <dgm:prSet presAssocID="{E9121F76-5EF8-4413-AF26-8697B1A9AA5A}" presName="Accent" presStyleLbl="bgShp" presStyleIdx="2" presStyleCnt="6"/>
+      <dgm:spPr/>
+    </dgm:pt>
+    <dgm:pt modelId="{55AB8E64-BB27-433B-A701-D00D0ADFE0F2}" type="pres">
+      <dgm:prSet presAssocID="{E9121F76-5EF8-4413-AF26-8697B1A9AA5A}" presName="Child3" presStyleLbl="node1" presStyleIdx="2" presStyleCnt="6">
+        <dgm:presLayoutVars>
+          <dgm:chMax val="0"/>
+          <dgm:chPref val="0"/>
+          <dgm:bulletEnabled val="1"/>
+        </dgm:presLayoutVars>
+      </dgm:prSet>
+      <dgm:spPr/>
+    </dgm:pt>
+    <dgm:pt modelId="{FE031180-106C-462C-846E-00FB37085631}" type="pres">
+      <dgm:prSet presAssocID="{D06E1645-DE76-4E65-BB3C-46F3BAC5AF75}" presName="Accent4" presStyleCnt="0"/>
+      <dgm:spPr/>
+    </dgm:pt>
+    <dgm:pt modelId="{76DF7524-118F-4A3C-8039-C7730AC993D2}" type="pres">
+      <dgm:prSet presAssocID="{D06E1645-DE76-4E65-BB3C-46F3BAC5AF75}" presName="Accent" presStyleLbl="bgShp" presStyleIdx="3" presStyleCnt="6"/>
+      <dgm:spPr/>
+    </dgm:pt>
+    <dgm:pt modelId="{D57699A4-5871-457E-B5AC-85BE314A9854}" type="pres">
+      <dgm:prSet presAssocID="{D06E1645-DE76-4E65-BB3C-46F3BAC5AF75}" presName="Child4" presStyleLbl="node1" presStyleIdx="3" presStyleCnt="6">
+        <dgm:presLayoutVars>
+          <dgm:chMax val="0"/>
+          <dgm:chPref val="0"/>
+          <dgm:bulletEnabled val="1"/>
+        </dgm:presLayoutVars>
+      </dgm:prSet>
+      <dgm:spPr/>
+    </dgm:pt>
+    <dgm:pt modelId="{5A3A4720-2C82-4FE8-8A1B-0239B901DA21}" type="pres">
+      <dgm:prSet presAssocID="{BB981C33-12A1-4F6C-8D00-12C6EC1236A6}" presName="Accent5" presStyleCnt="0"/>
+      <dgm:spPr/>
+    </dgm:pt>
+    <dgm:pt modelId="{6A5105C0-DF27-4B27-8885-6430EAC6309F}" type="pres">
+      <dgm:prSet presAssocID="{BB981C33-12A1-4F6C-8D00-12C6EC1236A6}" presName="Accent" presStyleLbl="bgShp" presStyleIdx="4" presStyleCnt="6"/>
+      <dgm:spPr/>
+    </dgm:pt>
+    <dgm:pt modelId="{EDC1BEF1-AC06-4D76-AA94-62F6EB75537B}" type="pres">
+      <dgm:prSet presAssocID="{BB981C33-12A1-4F6C-8D00-12C6EC1236A6}" presName="Child5" presStyleLbl="node1" presStyleIdx="4" presStyleCnt="6">
+        <dgm:presLayoutVars>
+          <dgm:chMax val="0"/>
+          <dgm:chPref val="0"/>
+          <dgm:bulletEnabled val="1"/>
+        </dgm:presLayoutVars>
+      </dgm:prSet>
+      <dgm:spPr/>
+    </dgm:pt>
+    <dgm:pt modelId="{0D077B03-4238-4515-BAC2-1FD4B5D76EA1}" type="pres">
+      <dgm:prSet presAssocID="{E6B28B6F-C093-4492-834A-5B67CB2968D9}" presName="Accent6" presStyleCnt="0"/>
+      <dgm:spPr/>
+    </dgm:pt>
+    <dgm:pt modelId="{49B31C55-29E4-4F65-B048-7407A37441AB}" type="pres">
+      <dgm:prSet presAssocID="{E6B28B6F-C093-4492-834A-5B67CB2968D9}" presName="Accent" presStyleLbl="bgShp" presStyleIdx="5" presStyleCnt="6"/>
+      <dgm:spPr/>
+    </dgm:pt>
+    <dgm:pt modelId="{C5A425D9-4151-4A77-AD71-BFDEBC1E8358}" type="pres">
+      <dgm:prSet presAssocID="{E6B28B6F-C093-4492-834A-5B67CB2968D9}" presName="Child6" presStyleLbl="node1" presStyleIdx="5" presStyleCnt="6">
+        <dgm:presLayoutVars>
+          <dgm:chMax val="0"/>
+          <dgm:chPref val="0"/>
+          <dgm:bulletEnabled val="1"/>
+        </dgm:presLayoutVars>
+      </dgm:prSet>
+      <dgm:spPr/>
+    </dgm:pt>
+  </dgm:ptLst>
+  <dgm:cxnLst>
+    <dgm:cxn modelId="{A1E61F11-34AE-4A47-A574-9C0EAE61A1D7}" type="presOf" srcId="{E9121F76-5EF8-4413-AF26-8697B1A9AA5A}" destId="{55AB8E64-BB27-433B-A701-D00D0ADFE0F2}" srcOrd="0" destOrd="0" presId="urn:microsoft.com/office/officeart/2011/layout/HexagonRadial"/>
+    <dgm:cxn modelId="{FA5E902D-85A4-4CD2-87C7-EE50DFA82060}" srcId="{602F0427-6797-43C7-9CFF-39FE5CFA72D9}" destId="{BB981C33-12A1-4F6C-8D00-12C6EC1236A6}" srcOrd="4" destOrd="0" parTransId="{F7D42D6E-AEC6-4242-B246-7A189388A0F8}" sibTransId="{A5179DFB-4E52-435E-98B6-48F909660EC9}"/>
+    <dgm:cxn modelId="{E6ECE566-AB50-4692-8DED-B40CF4E97AB2}" srcId="{602F0427-6797-43C7-9CFF-39FE5CFA72D9}" destId="{E6B28B6F-C093-4492-834A-5B67CB2968D9}" srcOrd="5" destOrd="0" parTransId="{16007CBA-F250-4A92-91E9-E2465ED87B2A}" sibTransId="{F8A9E26C-260A-45F5-8E9E-ABAE245C49E4}"/>
+    <dgm:cxn modelId="{B51CFA6D-8734-48C0-80BD-7223A131C12A}" type="presOf" srcId="{602F0427-6797-43C7-9CFF-39FE5CFA72D9}" destId="{F1D19A2F-77BC-4938-9885-093F435A8A47}" srcOrd="0" destOrd="0" presId="urn:microsoft.com/office/officeart/2011/layout/HexagonRadial"/>
+    <dgm:cxn modelId="{ADEC6658-7BEA-464C-B0A8-7F9E2D7F4212}" type="presOf" srcId="{D06E1645-DE76-4E65-BB3C-46F3BAC5AF75}" destId="{D57699A4-5871-457E-B5AC-85BE314A9854}" srcOrd="0" destOrd="0" presId="urn:microsoft.com/office/officeart/2011/layout/HexagonRadial"/>
+    <dgm:cxn modelId="{09912B82-505C-4526-A64D-7C4639D33CF2}" srcId="{602F0427-6797-43C7-9CFF-39FE5CFA72D9}" destId="{BE175FE2-498E-448A-B4A7-2283839D76F4}" srcOrd="0" destOrd="0" parTransId="{D22DE5EC-1A0D-44B8-A0B4-B8E22F720A91}" sibTransId="{F7396975-9E05-4FAA-B722-F6253FC2E417}"/>
+    <dgm:cxn modelId="{E2FF408A-AF54-4325-94F7-C2B965552F11}" type="presOf" srcId="{BB981C33-12A1-4F6C-8D00-12C6EC1236A6}" destId="{EDC1BEF1-AC06-4D76-AA94-62F6EB75537B}" srcOrd="0" destOrd="0" presId="urn:microsoft.com/office/officeart/2011/layout/HexagonRadial"/>
+    <dgm:cxn modelId="{CC0D36AC-DB77-4EAE-B086-2C6AAEFE3F2A}" srcId="{602F0427-6797-43C7-9CFF-39FE5CFA72D9}" destId="{1563DCD7-CC83-4FCC-986E-EF0D88F8C8C9}" srcOrd="1" destOrd="0" parTransId="{59CA1295-6B0D-4D46-9A6E-2BE514C501C1}" sibTransId="{E189B592-1F81-44E7-B47F-E1578E5C0D66}"/>
+    <dgm:cxn modelId="{DEC95CB3-D37A-42E6-AC0C-303F4F46B98B}" type="presOf" srcId="{BE175FE2-498E-448A-B4A7-2283839D76F4}" destId="{0CB0AA78-D63F-4F3A-AFA6-EAE5E0314406}" srcOrd="0" destOrd="0" presId="urn:microsoft.com/office/officeart/2011/layout/HexagonRadial"/>
+    <dgm:cxn modelId="{CCB88BBB-D2D2-4EE7-BA30-391C3EBAD68C}" srcId="{602F0427-6797-43C7-9CFF-39FE5CFA72D9}" destId="{D06E1645-DE76-4E65-BB3C-46F3BAC5AF75}" srcOrd="3" destOrd="0" parTransId="{BE94E7EA-F143-44A5-B81A-3464EC870185}" sibTransId="{5927F88E-3CFB-42A1-B344-5AA79A4C293A}"/>
+    <dgm:cxn modelId="{81F62DBD-B899-4930-B398-F865E8B6888B}" srcId="{602F0427-6797-43C7-9CFF-39FE5CFA72D9}" destId="{E9121F76-5EF8-4413-AF26-8697B1A9AA5A}" srcOrd="2" destOrd="0" parTransId="{8C532E8D-69F8-4B70-A921-97FB40C76A2F}" sibTransId="{CCB91678-A106-4A6C-87D2-2D693F9505DB}"/>
+    <dgm:cxn modelId="{4AAAA9D4-B283-42CC-9623-26DAF7CFD723}" type="presOf" srcId="{1563DCD7-CC83-4FCC-986E-EF0D88F8C8C9}" destId="{9699140C-2F89-460C-BE44-85A64DE59F52}" srcOrd="0" destOrd="0" presId="urn:microsoft.com/office/officeart/2011/layout/HexagonRadial"/>
+    <dgm:cxn modelId="{F538A5E3-09EB-4D0B-B319-7AD4679BA0B9}" type="presOf" srcId="{E6B28B6F-C093-4492-834A-5B67CB2968D9}" destId="{C5A425D9-4151-4A77-AD71-BFDEBC1E8358}" srcOrd="0" destOrd="0" presId="urn:microsoft.com/office/officeart/2011/layout/HexagonRadial"/>
+    <dgm:cxn modelId="{10130EE6-D901-4362-9F7A-C6893441B7E9}" type="presOf" srcId="{3208F64C-0EEF-4D44-B6E6-BFE6459F5DDE}" destId="{67D15FC6-E047-48C3-847F-243D66AC66A9}" srcOrd="0" destOrd="0" presId="urn:microsoft.com/office/officeart/2011/layout/HexagonRadial"/>
+    <dgm:cxn modelId="{0C14DDF5-4ABD-41AD-BB04-C7589277FC11}" srcId="{3208F64C-0EEF-4D44-B6E6-BFE6459F5DDE}" destId="{602F0427-6797-43C7-9CFF-39FE5CFA72D9}" srcOrd="0" destOrd="0" parTransId="{936A183E-D86C-4E46-90C7-D408ED3AFE0C}" sibTransId="{9D912BBE-A4A4-4ECC-BB0A-28828FC6A443}"/>
+    <dgm:cxn modelId="{CC623D90-E105-4648-9BD5-7122F61BFA61}" type="presParOf" srcId="{67D15FC6-E047-48C3-847F-243D66AC66A9}" destId="{F1D19A2F-77BC-4938-9885-093F435A8A47}" srcOrd="0" destOrd="0" presId="urn:microsoft.com/office/officeart/2011/layout/HexagonRadial"/>
+    <dgm:cxn modelId="{CE2C9365-E8D9-4FCB-AA71-7D2772F9A388}" type="presParOf" srcId="{67D15FC6-E047-48C3-847F-243D66AC66A9}" destId="{D6EA40F1-8F1D-497B-935A-7440D7458290}" srcOrd="1" destOrd="0" presId="urn:microsoft.com/office/officeart/2011/layout/HexagonRadial"/>
+    <dgm:cxn modelId="{A4DCEEFD-8FB7-4C00-B8A9-D7B3F2F2C9BF}" type="presParOf" srcId="{D6EA40F1-8F1D-497B-935A-7440D7458290}" destId="{595D05E8-0147-4426-84F2-CAF286F94084}" srcOrd="0" destOrd="0" presId="urn:microsoft.com/office/officeart/2011/layout/HexagonRadial"/>
+    <dgm:cxn modelId="{78894057-7334-43AA-846B-411D0DBC3668}" type="presParOf" srcId="{67D15FC6-E047-48C3-847F-243D66AC66A9}" destId="{0CB0AA78-D63F-4F3A-AFA6-EAE5E0314406}" srcOrd="2" destOrd="0" presId="urn:microsoft.com/office/officeart/2011/layout/HexagonRadial"/>
+    <dgm:cxn modelId="{5A590799-2041-45C1-A02F-27236B82E88F}" type="presParOf" srcId="{67D15FC6-E047-48C3-847F-243D66AC66A9}" destId="{588526E8-04B5-4B80-AA9B-0D229A69CB08}" srcOrd="3" destOrd="0" presId="urn:microsoft.com/office/officeart/2011/layout/HexagonRadial"/>
+    <dgm:cxn modelId="{57DA7FC2-3729-4E4B-8659-43B4E8875CDA}" type="presParOf" srcId="{588526E8-04B5-4B80-AA9B-0D229A69CB08}" destId="{16108406-D824-48AA-986F-F20B13B82A81}" srcOrd="0" destOrd="0" presId="urn:microsoft.com/office/officeart/2011/layout/HexagonRadial"/>
+    <dgm:cxn modelId="{044FEC93-D461-49D5-94B8-EEB96C0D6014}" type="presParOf" srcId="{67D15FC6-E047-48C3-847F-243D66AC66A9}" destId="{9699140C-2F89-460C-BE44-85A64DE59F52}" srcOrd="4" destOrd="0" presId="urn:microsoft.com/office/officeart/2011/layout/HexagonRadial"/>
+    <dgm:cxn modelId="{01C43576-FFEF-46BE-974D-5CBA463C22D1}" type="presParOf" srcId="{67D15FC6-E047-48C3-847F-243D66AC66A9}" destId="{B9739F21-4DE0-44C7-A0C1-2C212BC562EA}" srcOrd="5" destOrd="0" presId="urn:microsoft.com/office/officeart/2011/layout/HexagonRadial"/>
+    <dgm:cxn modelId="{DF47B44C-D960-4689-8500-79FC13815C82}" type="presParOf" srcId="{B9739F21-4DE0-44C7-A0C1-2C212BC562EA}" destId="{322F9847-0308-445A-A02E-9697140899BE}" srcOrd="0" destOrd="0" presId="urn:microsoft.com/office/officeart/2011/layout/HexagonRadial"/>
+    <dgm:cxn modelId="{992E85C7-6CFF-4810-9D0B-449855C9FFC3}" type="presParOf" srcId="{67D15FC6-E047-48C3-847F-243D66AC66A9}" destId="{55AB8E64-BB27-433B-A701-D00D0ADFE0F2}" srcOrd="6" destOrd="0" presId="urn:microsoft.com/office/officeart/2011/layout/HexagonRadial"/>
+    <dgm:cxn modelId="{803545BC-FDB9-47AC-86F5-101BFDDCCAC4}" type="presParOf" srcId="{67D15FC6-E047-48C3-847F-243D66AC66A9}" destId="{FE031180-106C-462C-846E-00FB37085631}" srcOrd="7" destOrd="0" presId="urn:microsoft.com/office/officeart/2011/layout/HexagonRadial"/>
+    <dgm:cxn modelId="{03504B4D-02BB-4A3A-BEEA-C59BC5A476C0}" type="presParOf" srcId="{FE031180-106C-462C-846E-00FB37085631}" destId="{76DF7524-118F-4A3C-8039-C7730AC993D2}" srcOrd="0" destOrd="0" presId="urn:microsoft.com/office/officeart/2011/layout/HexagonRadial"/>
+    <dgm:cxn modelId="{6BED9F9B-0CD9-4647-8CB4-61F7D1DFA8D7}" type="presParOf" srcId="{67D15FC6-E047-48C3-847F-243D66AC66A9}" destId="{D57699A4-5871-457E-B5AC-85BE314A9854}" srcOrd="8" destOrd="0" presId="urn:microsoft.com/office/officeart/2011/layout/HexagonRadial"/>
+    <dgm:cxn modelId="{35341C55-6CF0-48FF-8A00-6ED472B85D98}" type="presParOf" srcId="{67D15FC6-E047-48C3-847F-243D66AC66A9}" destId="{5A3A4720-2C82-4FE8-8A1B-0239B901DA21}" srcOrd="9" destOrd="0" presId="urn:microsoft.com/office/officeart/2011/layout/HexagonRadial"/>
+    <dgm:cxn modelId="{342F0B4D-CB23-4C8F-9E52-BA9CDAE31D1E}" type="presParOf" srcId="{5A3A4720-2C82-4FE8-8A1B-0239B901DA21}" destId="{6A5105C0-DF27-4B27-8885-6430EAC6309F}" srcOrd="0" destOrd="0" presId="urn:microsoft.com/office/officeart/2011/layout/HexagonRadial"/>
+    <dgm:cxn modelId="{A560CD4C-6750-4686-AB68-EA322E49E259}" type="presParOf" srcId="{67D15FC6-E047-48C3-847F-243D66AC66A9}" destId="{EDC1BEF1-AC06-4D76-AA94-62F6EB75537B}" srcOrd="10" destOrd="0" presId="urn:microsoft.com/office/officeart/2011/layout/HexagonRadial"/>
+    <dgm:cxn modelId="{4E44BC01-AF6B-458D-BD3F-1F9FEAAA8242}" type="presParOf" srcId="{67D15FC6-E047-48C3-847F-243D66AC66A9}" destId="{0D077B03-4238-4515-BAC2-1FD4B5D76EA1}" srcOrd="11" destOrd="0" presId="urn:microsoft.com/office/officeart/2011/layout/HexagonRadial"/>
+    <dgm:cxn modelId="{5CAFD3F7-9D6D-4DDD-95F3-1B3C7EE1D321}" type="presParOf" srcId="{0D077B03-4238-4515-BAC2-1FD4B5D76EA1}" destId="{49B31C55-29E4-4F65-B048-7407A37441AB}" srcOrd="0" destOrd="0" presId="urn:microsoft.com/office/officeart/2011/layout/HexagonRadial"/>
+    <dgm:cxn modelId="{71C6330F-7900-413B-8F3E-4C852976D96E}" type="presParOf" srcId="{67D15FC6-E047-48C3-847F-243D66AC66A9}" destId="{C5A425D9-4151-4A77-AD71-BFDEBC1E8358}" srcOrd="12" destOrd="0" presId="urn:microsoft.com/office/officeart/2011/layout/HexagonRadial"/>
+  </dgm:cxnLst>
+  <dgm:bg/>
+  <dgm:whole/>
+  <dgm:extLst>
+    <a:ext uri="http://schemas.microsoft.com/office/drawing/2008/diagram">
+      <dsp:dataModelExt xmlns:dsp="http://schemas.microsoft.com/office/drawing/2008/diagram" relId="rId8" minVer="http://schemas.openxmlformats.org/drawingml/2006/diagram"/>
+    </a:ext>
+  </dgm:extLst>
+</dgm:dataModel>
+</file>
+
+<file path=ppt/diagrams/data2.xml><?xml version="1.0" encoding="utf-8"?>
 <dgm:dataModel xmlns:dgm="http://schemas.openxmlformats.org/drawingml/2006/diagram" xmlns:a="http://schemas.openxmlformats.org/drawingml/2006/main">
   <dgm:ptLst>
     <dgm:pt modelId="{CC82EFBF-7107-494A-8AAB-7C60D9A18C52}" type="doc">
@@ -1126,6 +2347,776 @@
 </file>
 
 <file path=ppt/diagrams/drawing1.xml><?xml version="1.0" encoding="utf-8"?>
+<dsp:drawing xmlns:dgm="http://schemas.openxmlformats.org/drawingml/2006/diagram" xmlns:dsp="http://schemas.microsoft.com/office/drawing/2008/diagram" xmlns:a="http://schemas.openxmlformats.org/drawingml/2006/main">
+  <dsp:spTree>
+    <dsp:nvGrpSpPr>
+      <dsp:cNvPr id="0" name=""/>
+      <dsp:cNvGrpSpPr/>
+    </dsp:nvGrpSpPr>
+    <dsp:grpSpPr/>
+    <dsp:sp modelId="{F1D19A2F-77BC-4938-9885-093F435A8A47}">
+      <dsp:nvSpPr>
+        <dsp:cNvPr id="0" name=""/>
+        <dsp:cNvSpPr/>
+      </dsp:nvSpPr>
+      <dsp:spPr>
+        <a:xfrm>
+          <a:off x="2057166" y="1404169"/>
+          <a:ext cx="1784760" cy="1543890"/>
+        </a:xfrm>
+        <a:prstGeom prst="hexagon">
+          <a:avLst>
+            <a:gd name="adj" fmla="val 28570"/>
+            <a:gd name="vf" fmla="val 115470"/>
+          </a:avLst>
+        </a:prstGeom>
+        <a:solidFill>
+          <a:schemeClr val="accent1">
+            <a:hueOff val="0"/>
+            <a:satOff val="0"/>
+            <a:lumOff val="0"/>
+            <a:alphaOff val="0"/>
+          </a:schemeClr>
+        </a:solidFill>
+        <a:ln w="12700" cap="flat" cmpd="sng" algn="ctr">
+          <a:solidFill>
+            <a:schemeClr val="lt1">
+              <a:hueOff val="0"/>
+              <a:satOff val="0"/>
+              <a:lumOff val="0"/>
+              <a:alphaOff val="0"/>
+            </a:schemeClr>
+          </a:solidFill>
+          <a:prstDash val="solid"/>
+          <a:miter lim="800000"/>
+        </a:ln>
+        <a:effectLst/>
+      </dsp:spPr>
+      <dsp:style>
+        <a:lnRef idx="2">
+          <a:scrgbClr r="0" g="0" b="0"/>
+        </a:lnRef>
+        <a:fillRef idx="1">
+          <a:scrgbClr r="0" g="0" b="0"/>
+        </a:fillRef>
+        <a:effectRef idx="0">
+          <a:scrgbClr r="0" g="0" b="0"/>
+        </a:effectRef>
+        <a:fontRef idx="minor">
+          <a:schemeClr val="lt1"/>
+        </a:fontRef>
+      </dsp:style>
+      <dsp:txBody>
+        <a:bodyPr spcFirstLastPara="0" vert="horz" wrap="square" lIns="15240" tIns="15240" rIns="15240" bIns="15240" numCol="1" spcCol="1270" anchor="ctr" anchorCtr="0">
+          <a:noAutofit/>
+        </a:bodyPr>
+        <a:lstStyle/>
+        <a:p>
+          <a:pPr marL="0" lvl="0" indent="0" algn="ctr" defTabSz="533400">
+            <a:lnSpc>
+              <a:spcPct val="90000"/>
+            </a:lnSpc>
+            <a:spcBef>
+              <a:spcPct val="0"/>
+            </a:spcBef>
+            <a:spcAft>
+              <a:spcPct val="35000"/>
+            </a:spcAft>
+            <a:buNone/>
+          </a:pPr>
+          <a:r>
+            <a:rPr lang="en-US" sz="1200" kern="1200" dirty="0"/>
+            <a:t>Cloud migration</a:t>
+          </a:r>
+        </a:p>
+      </dsp:txBody>
+      <dsp:txXfrm>
+        <a:off x="2352926" y="1660013"/>
+        <a:ext cx="1193240" cy="1032202"/>
+      </dsp:txXfrm>
+    </dsp:sp>
+    <dsp:sp modelId="{16108406-D824-48AA-986F-F20B13B82A81}">
+      <dsp:nvSpPr>
+        <dsp:cNvPr id="0" name=""/>
+        <dsp:cNvSpPr/>
+      </dsp:nvSpPr>
+      <dsp:spPr>
+        <a:xfrm>
+          <a:off x="3174769" y="665522"/>
+          <a:ext cx="673384" cy="580210"/>
+        </a:xfrm>
+        <a:prstGeom prst="hexagon">
+          <a:avLst>
+            <a:gd name="adj" fmla="val 28900"/>
+            <a:gd name="vf" fmla="val 115470"/>
+          </a:avLst>
+        </a:prstGeom>
+        <a:solidFill>
+          <a:schemeClr val="accent1">
+            <a:tint val="40000"/>
+            <a:hueOff val="0"/>
+            <a:satOff val="0"/>
+            <a:lumOff val="0"/>
+            <a:alphaOff val="0"/>
+          </a:schemeClr>
+        </a:solidFill>
+        <a:ln>
+          <a:noFill/>
+        </a:ln>
+        <a:effectLst/>
+      </dsp:spPr>
+      <dsp:style>
+        <a:lnRef idx="0">
+          <a:scrgbClr r="0" g="0" b="0"/>
+        </a:lnRef>
+        <a:fillRef idx="1">
+          <a:scrgbClr r="0" g="0" b="0"/>
+        </a:fillRef>
+        <a:effectRef idx="0">
+          <a:scrgbClr r="0" g="0" b="0"/>
+        </a:effectRef>
+        <a:fontRef idx="minor"/>
+      </dsp:style>
+    </dsp:sp>
+    <dsp:sp modelId="{0CB0AA78-D63F-4F3A-AFA6-EAE5E0314406}">
+      <dsp:nvSpPr>
+        <dsp:cNvPr id="0" name=""/>
+        <dsp:cNvSpPr/>
+      </dsp:nvSpPr>
+      <dsp:spPr>
+        <a:xfrm>
+          <a:off x="2221568" y="0"/>
+          <a:ext cx="1462598" cy="1265319"/>
+        </a:xfrm>
+        <a:prstGeom prst="hexagon">
+          <a:avLst>
+            <a:gd name="adj" fmla="val 28570"/>
+            <a:gd name="vf" fmla="val 115470"/>
+          </a:avLst>
+        </a:prstGeom>
+        <a:solidFill>
+          <a:schemeClr val="accent2"/>
+        </a:solidFill>
+        <a:ln w="12700" cap="flat" cmpd="sng" algn="ctr">
+          <a:solidFill>
+            <a:schemeClr val="lt1">
+              <a:hueOff val="0"/>
+              <a:satOff val="0"/>
+              <a:lumOff val="0"/>
+              <a:alphaOff val="0"/>
+            </a:schemeClr>
+          </a:solidFill>
+          <a:prstDash val="solid"/>
+          <a:miter lim="800000"/>
+        </a:ln>
+        <a:effectLst/>
+      </dsp:spPr>
+      <dsp:style>
+        <a:lnRef idx="2">
+          <a:scrgbClr r="0" g="0" b="0"/>
+        </a:lnRef>
+        <a:fillRef idx="1">
+          <a:scrgbClr r="0" g="0" b="0"/>
+        </a:fillRef>
+        <a:effectRef idx="0">
+          <a:scrgbClr r="0" g="0" b="0"/>
+        </a:effectRef>
+        <a:fontRef idx="minor">
+          <a:schemeClr val="lt1"/>
+        </a:fontRef>
+      </dsp:style>
+      <dsp:txBody>
+        <a:bodyPr spcFirstLastPara="0" vert="horz" wrap="square" lIns="15240" tIns="15240" rIns="15240" bIns="15240" numCol="1" spcCol="1270" anchor="ctr" anchorCtr="0">
+          <a:noAutofit/>
+        </a:bodyPr>
+        <a:lstStyle/>
+        <a:p>
+          <a:pPr marL="0" lvl="0" indent="0" algn="ctr" defTabSz="533400">
+            <a:lnSpc>
+              <a:spcPct val="90000"/>
+            </a:lnSpc>
+            <a:spcBef>
+              <a:spcPct val="0"/>
+            </a:spcBef>
+            <a:spcAft>
+              <a:spcPct val="35000"/>
+            </a:spcAft>
+            <a:buNone/>
+          </a:pPr>
+          <a:r>
+            <a:rPr lang="en-US" sz="1200" kern="1200" dirty="0"/>
+            <a:t>Time to customer value</a:t>
+          </a:r>
+        </a:p>
+      </dsp:txBody>
+      <dsp:txXfrm>
+        <a:off x="2463952" y="209690"/>
+        <a:ext cx="977830" cy="845939"/>
+      </dsp:txXfrm>
+    </dsp:sp>
+    <dsp:sp modelId="{322F9847-0308-445A-A02E-9697140899BE}">
+      <dsp:nvSpPr>
+        <dsp:cNvPr id="0" name=""/>
+        <dsp:cNvSpPr/>
+      </dsp:nvSpPr>
+      <dsp:spPr>
+        <a:xfrm>
+          <a:off x="3960662" y="1750206"/>
+          <a:ext cx="673384" cy="580210"/>
+        </a:xfrm>
+        <a:prstGeom prst="hexagon">
+          <a:avLst>
+            <a:gd name="adj" fmla="val 28900"/>
+            <a:gd name="vf" fmla="val 115470"/>
+          </a:avLst>
+        </a:prstGeom>
+        <a:solidFill>
+          <a:schemeClr val="accent1">
+            <a:tint val="40000"/>
+            <a:hueOff val="0"/>
+            <a:satOff val="0"/>
+            <a:lumOff val="0"/>
+            <a:alphaOff val="0"/>
+          </a:schemeClr>
+        </a:solidFill>
+        <a:ln>
+          <a:noFill/>
+        </a:ln>
+        <a:effectLst/>
+      </dsp:spPr>
+      <dsp:style>
+        <a:lnRef idx="0">
+          <a:scrgbClr r="0" g="0" b="0"/>
+        </a:lnRef>
+        <a:fillRef idx="1">
+          <a:scrgbClr r="0" g="0" b="0"/>
+        </a:fillRef>
+        <a:effectRef idx="0">
+          <a:scrgbClr r="0" g="0" b="0"/>
+        </a:effectRef>
+        <a:fontRef idx="minor"/>
+      </dsp:style>
+    </dsp:sp>
+    <dsp:sp modelId="{9699140C-2F89-460C-BE44-85A64DE59F52}">
+      <dsp:nvSpPr>
+        <dsp:cNvPr id="0" name=""/>
+        <dsp:cNvSpPr/>
+      </dsp:nvSpPr>
+      <dsp:spPr>
+        <a:xfrm>
+          <a:off x="3562941" y="778256"/>
+          <a:ext cx="1462598" cy="1265319"/>
+        </a:xfrm>
+        <a:prstGeom prst="hexagon">
+          <a:avLst>
+            <a:gd name="adj" fmla="val 28570"/>
+            <a:gd name="vf" fmla="val 115470"/>
+          </a:avLst>
+        </a:prstGeom>
+        <a:solidFill>
+          <a:schemeClr val="accent3"/>
+        </a:solidFill>
+        <a:ln w="12700" cap="flat" cmpd="sng" algn="ctr">
+          <a:solidFill>
+            <a:schemeClr val="lt1">
+              <a:hueOff val="0"/>
+              <a:satOff val="0"/>
+              <a:lumOff val="0"/>
+              <a:alphaOff val="0"/>
+            </a:schemeClr>
+          </a:solidFill>
+          <a:prstDash val="solid"/>
+          <a:miter lim="800000"/>
+        </a:ln>
+        <a:effectLst/>
+      </dsp:spPr>
+      <dsp:style>
+        <a:lnRef idx="2">
+          <a:scrgbClr r="0" g="0" b="0"/>
+        </a:lnRef>
+        <a:fillRef idx="1">
+          <a:scrgbClr r="0" g="0" b="0"/>
+        </a:fillRef>
+        <a:effectRef idx="0">
+          <a:scrgbClr r="0" g="0" b="0"/>
+        </a:effectRef>
+        <a:fontRef idx="minor">
+          <a:schemeClr val="lt1"/>
+        </a:fontRef>
+      </dsp:style>
+      <dsp:txBody>
+        <a:bodyPr spcFirstLastPara="0" vert="horz" wrap="square" lIns="15240" tIns="15240" rIns="15240" bIns="15240" numCol="1" spcCol="1270" anchor="ctr" anchorCtr="0">
+          <a:noAutofit/>
+        </a:bodyPr>
+        <a:lstStyle/>
+        <a:p>
+          <a:pPr marL="0" lvl="0" indent="0" algn="ctr" defTabSz="533400">
+            <a:lnSpc>
+              <a:spcPct val="90000"/>
+            </a:lnSpc>
+            <a:spcBef>
+              <a:spcPct val="0"/>
+            </a:spcBef>
+            <a:spcAft>
+              <a:spcPct val="35000"/>
+            </a:spcAft>
+            <a:buNone/>
+          </a:pPr>
+          <a:r>
+            <a:rPr lang="en-US" sz="1200" kern="1200" dirty="0"/>
+            <a:t>Organize for effectiveness</a:t>
+          </a:r>
+        </a:p>
+      </dsp:txBody>
+      <dsp:txXfrm>
+        <a:off x="3805325" y="987946"/>
+        <a:ext cx="977830" cy="845939"/>
+      </dsp:txXfrm>
+    </dsp:sp>
+    <dsp:sp modelId="{76DF7524-118F-4A3C-8039-C7730AC993D2}">
+      <dsp:nvSpPr>
+        <dsp:cNvPr id="0" name=""/>
+        <dsp:cNvSpPr/>
+      </dsp:nvSpPr>
+      <dsp:spPr>
+        <a:xfrm>
+          <a:off x="3414730" y="2974611"/>
+          <a:ext cx="673384" cy="580210"/>
+        </a:xfrm>
+        <a:prstGeom prst="hexagon">
+          <a:avLst>
+            <a:gd name="adj" fmla="val 28900"/>
+            <a:gd name="vf" fmla="val 115470"/>
+          </a:avLst>
+        </a:prstGeom>
+        <a:solidFill>
+          <a:schemeClr val="accent1">
+            <a:tint val="40000"/>
+            <a:hueOff val="0"/>
+            <a:satOff val="0"/>
+            <a:lumOff val="0"/>
+            <a:alphaOff val="0"/>
+          </a:schemeClr>
+        </a:solidFill>
+        <a:ln>
+          <a:noFill/>
+        </a:ln>
+        <a:effectLst/>
+      </dsp:spPr>
+      <dsp:style>
+        <a:lnRef idx="0">
+          <a:scrgbClr r="0" g="0" b="0"/>
+        </a:lnRef>
+        <a:fillRef idx="1">
+          <a:scrgbClr r="0" g="0" b="0"/>
+        </a:fillRef>
+        <a:effectRef idx="0">
+          <a:scrgbClr r="0" g="0" b="0"/>
+        </a:effectRef>
+        <a:fontRef idx="minor"/>
+      </dsp:style>
+    </dsp:sp>
+    <dsp:sp modelId="{55AB8E64-BB27-433B-A701-D00D0ADFE0F2}">
+      <dsp:nvSpPr>
+        <dsp:cNvPr id="0" name=""/>
+        <dsp:cNvSpPr/>
+      </dsp:nvSpPr>
+      <dsp:spPr>
+        <a:xfrm>
+          <a:off x="3562941" y="2308218"/>
+          <a:ext cx="1462598" cy="1265319"/>
+        </a:xfrm>
+        <a:prstGeom prst="hexagon">
+          <a:avLst>
+            <a:gd name="adj" fmla="val 28570"/>
+            <a:gd name="vf" fmla="val 115470"/>
+          </a:avLst>
+        </a:prstGeom>
+        <a:solidFill>
+          <a:srgbClr val="92D050"/>
+        </a:solidFill>
+        <a:ln w="12700" cap="flat" cmpd="sng" algn="ctr">
+          <a:solidFill>
+            <a:schemeClr val="lt1">
+              <a:hueOff val="0"/>
+              <a:satOff val="0"/>
+              <a:lumOff val="0"/>
+              <a:alphaOff val="0"/>
+            </a:schemeClr>
+          </a:solidFill>
+          <a:prstDash val="solid"/>
+          <a:miter lim="800000"/>
+        </a:ln>
+        <a:effectLst/>
+      </dsp:spPr>
+      <dsp:style>
+        <a:lnRef idx="2">
+          <a:scrgbClr r="0" g="0" b="0"/>
+        </a:lnRef>
+        <a:fillRef idx="1">
+          <a:scrgbClr r="0" g="0" b="0"/>
+        </a:fillRef>
+        <a:effectRef idx="0">
+          <a:scrgbClr r="0" g="0" b="0"/>
+        </a:effectRef>
+        <a:fontRef idx="minor">
+          <a:schemeClr val="lt1"/>
+        </a:fontRef>
+      </dsp:style>
+      <dsp:txBody>
+        <a:bodyPr spcFirstLastPara="0" vert="horz" wrap="square" lIns="15240" tIns="15240" rIns="15240" bIns="15240" numCol="1" spcCol="1270" anchor="ctr" anchorCtr="0">
+          <a:noAutofit/>
+        </a:bodyPr>
+        <a:lstStyle/>
+        <a:p>
+          <a:pPr marL="0" lvl="0" indent="0" algn="ctr" defTabSz="533400">
+            <a:lnSpc>
+              <a:spcPct val="90000"/>
+            </a:lnSpc>
+            <a:spcBef>
+              <a:spcPct val="0"/>
+            </a:spcBef>
+            <a:spcAft>
+              <a:spcPct val="35000"/>
+            </a:spcAft>
+            <a:buNone/>
+          </a:pPr>
+          <a:r>
+            <a:rPr lang="en-US" sz="1200" kern="1200" dirty="0"/>
+            <a:t>Digital stability</a:t>
+          </a:r>
+        </a:p>
+      </dsp:txBody>
+      <dsp:txXfrm>
+        <a:off x="3805325" y="2517908"/>
+        <a:ext cx="977830" cy="845939"/>
+      </dsp:txXfrm>
+    </dsp:sp>
+    <dsp:sp modelId="{6A5105C0-DF27-4B27-8885-6430EAC6309F}">
+      <dsp:nvSpPr>
+        <dsp:cNvPr id="0" name=""/>
+        <dsp:cNvSpPr/>
+      </dsp:nvSpPr>
+      <dsp:spPr>
+        <a:xfrm>
+          <a:off x="2060487" y="3101709"/>
+          <a:ext cx="673384" cy="580210"/>
+        </a:xfrm>
+        <a:prstGeom prst="hexagon">
+          <a:avLst>
+            <a:gd name="adj" fmla="val 28900"/>
+            <a:gd name="vf" fmla="val 115470"/>
+          </a:avLst>
+        </a:prstGeom>
+        <a:solidFill>
+          <a:schemeClr val="accent1">
+            <a:tint val="40000"/>
+            <a:hueOff val="0"/>
+            <a:satOff val="0"/>
+            <a:lumOff val="0"/>
+            <a:alphaOff val="0"/>
+          </a:schemeClr>
+        </a:solidFill>
+        <a:ln>
+          <a:noFill/>
+        </a:ln>
+        <a:effectLst/>
+      </dsp:spPr>
+      <dsp:style>
+        <a:lnRef idx="0">
+          <a:scrgbClr r="0" g="0" b="0"/>
+        </a:lnRef>
+        <a:fillRef idx="1">
+          <a:scrgbClr r="0" g="0" b="0"/>
+        </a:fillRef>
+        <a:effectRef idx="0">
+          <a:scrgbClr r="0" g="0" b="0"/>
+        </a:effectRef>
+        <a:fontRef idx="minor"/>
+      </dsp:style>
+    </dsp:sp>
+    <dsp:sp modelId="{D57699A4-5871-457E-B5AC-85BE314A9854}">
+      <dsp:nvSpPr>
+        <dsp:cNvPr id="0" name=""/>
+        <dsp:cNvSpPr/>
+      </dsp:nvSpPr>
+      <dsp:spPr>
+        <a:xfrm>
+          <a:off x="2221568" y="3087345"/>
+          <a:ext cx="1462598" cy="1265319"/>
+        </a:xfrm>
+        <a:prstGeom prst="hexagon">
+          <a:avLst>
+            <a:gd name="adj" fmla="val 28570"/>
+            <a:gd name="vf" fmla="val 115470"/>
+          </a:avLst>
+        </a:prstGeom>
+        <a:solidFill>
+          <a:srgbClr val="00B0F0"/>
+        </a:solidFill>
+        <a:ln w="12700" cap="flat" cmpd="sng" algn="ctr">
+          <a:solidFill>
+            <a:schemeClr val="lt1">
+              <a:hueOff val="0"/>
+              <a:satOff val="0"/>
+              <a:lumOff val="0"/>
+              <a:alphaOff val="0"/>
+            </a:schemeClr>
+          </a:solidFill>
+          <a:prstDash val="solid"/>
+          <a:miter lim="800000"/>
+        </a:ln>
+        <a:effectLst/>
+      </dsp:spPr>
+      <dsp:style>
+        <a:lnRef idx="2">
+          <a:scrgbClr r="0" g="0" b="0"/>
+        </a:lnRef>
+        <a:fillRef idx="1">
+          <a:scrgbClr r="0" g="0" b="0"/>
+        </a:fillRef>
+        <a:effectRef idx="0">
+          <a:scrgbClr r="0" g="0" b="0"/>
+        </a:effectRef>
+        <a:fontRef idx="minor">
+          <a:schemeClr val="lt1"/>
+        </a:fontRef>
+      </dsp:style>
+      <dsp:txBody>
+        <a:bodyPr spcFirstLastPara="0" vert="horz" wrap="square" lIns="15240" tIns="15240" rIns="15240" bIns="15240" numCol="1" spcCol="1270" anchor="ctr" anchorCtr="0">
+          <a:noAutofit/>
+        </a:bodyPr>
+        <a:lstStyle/>
+        <a:p>
+          <a:pPr marL="0" lvl="0" indent="0" algn="ctr" defTabSz="533400">
+            <a:lnSpc>
+              <a:spcPct val="90000"/>
+            </a:lnSpc>
+            <a:spcBef>
+              <a:spcPct val="0"/>
+            </a:spcBef>
+            <a:spcAft>
+              <a:spcPct val="35000"/>
+            </a:spcAft>
+            <a:buNone/>
+          </a:pPr>
+          <a:r>
+            <a:rPr lang="en-US" altLang="zh-CN" sz="1200" kern="1200" dirty="0"/>
+            <a:t>Business Innovation at speed</a:t>
+          </a:r>
+          <a:endParaRPr lang="en-US" sz="1200" kern="1200" dirty="0"/>
+        </a:p>
+      </dsp:txBody>
+      <dsp:txXfrm>
+        <a:off x="2463952" y="3297035"/>
+        <a:ext cx="977830" cy="845939"/>
+      </dsp:txXfrm>
+    </dsp:sp>
+    <dsp:sp modelId="{49B31C55-29E4-4F65-B048-7407A37441AB}">
+      <dsp:nvSpPr>
+        <dsp:cNvPr id="0" name=""/>
+        <dsp:cNvSpPr/>
+      </dsp:nvSpPr>
+      <dsp:spPr>
+        <a:xfrm>
+          <a:off x="1261725" y="2017460"/>
+          <a:ext cx="673384" cy="580210"/>
+        </a:xfrm>
+        <a:prstGeom prst="hexagon">
+          <a:avLst>
+            <a:gd name="adj" fmla="val 28900"/>
+            <a:gd name="vf" fmla="val 115470"/>
+          </a:avLst>
+        </a:prstGeom>
+        <a:solidFill>
+          <a:schemeClr val="accent1">
+            <a:tint val="40000"/>
+            <a:hueOff val="0"/>
+            <a:satOff val="0"/>
+            <a:lumOff val="0"/>
+            <a:alphaOff val="0"/>
+          </a:schemeClr>
+        </a:solidFill>
+        <a:ln>
+          <a:noFill/>
+        </a:ln>
+        <a:effectLst/>
+      </dsp:spPr>
+      <dsp:style>
+        <a:lnRef idx="0">
+          <a:scrgbClr r="0" g="0" b="0"/>
+        </a:lnRef>
+        <a:fillRef idx="1">
+          <a:scrgbClr r="0" g="0" b="0"/>
+        </a:fillRef>
+        <a:effectRef idx="0">
+          <a:scrgbClr r="0" g="0" b="0"/>
+        </a:effectRef>
+        <a:fontRef idx="minor"/>
+      </dsp:style>
+    </dsp:sp>
+    <dsp:sp modelId="{EDC1BEF1-AC06-4D76-AA94-62F6EB75537B}">
+      <dsp:nvSpPr>
+        <dsp:cNvPr id="0" name=""/>
+        <dsp:cNvSpPr/>
+      </dsp:nvSpPr>
+      <dsp:spPr>
+        <a:xfrm>
+          <a:off x="873968" y="2309088"/>
+          <a:ext cx="1462598" cy="1265319"/>
+        </a:xfrm>
+        <a:prstGeom prst="hexagon">
+          <a:avLst>
+            <a:gd name="adj" fmla="val 28570"/>
+            <a:gd name="vf" fmla="val 115470"/>
+          </a:avLst>
+        </a:prstGeom>
+        <a:solidFill>
+          <a:srgbClr val="002060"/>
+        </a:solidFill>
+        <a:ln w="12700" cap="flat" cmpd="sng" algn="ctr">
+          <a:solidFill>
+            <a:schemeClr val="lt1">
+              <a:hueOff val="0"/>
+              <a:satOff val="0"/>
+              <a:lumOff val="0"/>
+              <a:alphaOff val="0"/>
+            </a:schemeClr>
+          </a:solidFill>
+          <a:prstDash val="solid"/>
+          <a:miter lim="800000"/>
+        </a:ln>
+        <a:effectLst/>
+      </dsp:spPr>
+      <dsp:style>
+        <a:lnRef idx="2">
+          <a:scrgbClr r="0" g="0" b="0"/>
+        </a:lnRef>
+        <a:fillRef idx="1">
+          <a:scrgbClr r="0" g="0" b="0"/>
+        </a:fillRef>
+        <a:effectRef idx="0">
+          <a:scrgbClr r="0" g="0" b="0"/>
+        </a:effectRef>
+        <a:fontRef idx="minor">
+          <a:schemeClr val="lt1"/>
+        </a:fontRef>
+      </dsp:style>
+      <dsp:txBody>
+        <a:bodyPr spcFirstLastPara="0" vert="horz" wrap="square" lIns="15240" tIns="15240" rIns="15240" bIns="15240" numCol="1" spcCol="1270" anchor="ctr" anchorCtr="0">
+          <a:noAutofit/>
+        </a:bodyPr>
+        <a:lstStyle/>
+        <a:p>
+          <a:pPr marL="0" lvl="0" indent="0" algn="ctr" defTabSz="533400">
+            <a:lnSpc>
+              <a:spcPct val="90000"/>
+            </a:lnSpc>
+            <a:spcBef>
+              <a:spcPct val="0"/>
+            </a:spcBef>
+            <a:spcAft>
+              <a:spcPct val="35000"/>
+            </a:spcAft>
+            <a:buNone/>
+          </a:pPr>
+          <a:r>
+            <a:rPr lang="en-US" sz="1200" kern="1200" dirty="0"/>
+            <a:t>Enable transformation</a:t>
+          </a:r>
+        </a:p>
+      </dsp:txBody>
+      <dsp:txXfrm>
+        <a:off x="1116352" y="2518778"/>
+        <a:ext cx="977830" cy="845939"/>
+      </dsp:txXfrm>
+    </dsp:sp>
+    <dsp:sp modelId="{C5A425D9-4151-4A77-AD71-BFDEBC1E8358}">
+      <dsp:nvSpPr>
+        <dsp:cNvPr id="0" name=""/>
+        <dsp:cNvSpPr/>
+      </dsp:nvSpPr>
+      <dsp:spPr>
+        <a:xfrm>
+          <a:off x="873968" y="776515"/>
+          <a:ext cx="1462598" cy="1265319"/>
+        </a:xfrm>
+        <a:prstGeom prst="hexagon">
+          <a:avLst>
+            <a:gd name="adj" fmla="val 28570"/>
+            <a:gd name="vf" fmla="val 115470"/>
+          </a:avLst>
+        </a:prstGeom>
+        <a:solidFill>
+          <a:srgbClr val="FF0000"/>
+        </a:solidFill>
+        <a:ln w="12700" cap="flat" cmpd="sng" algn="ctr">
+          <a:solidFill>
+            <a:schemeClr val="lt1">
+              <a:hueOff val="0"/>
+              <a:satOff val="0"/>
+              <a:lumOff val="0"/>
+              <a:alphaOff val="0"/>
+            </a:schemeClr>
+          </a:solidFill>
+          <a:prstDash val="solid"/>
+          <a:miter lim="800000"/>
+        </a:ln>
+        <a:effectLst/>
+      </dsp:spPr>
+      <dsp:style>
+        <a:lnRef idx="2">
+          <a:scrgbClr r="0" g="0" b="0"/>
+        </a:lnRef>
+        <a:fillRef idx="1">
+          <a:scrgbClr r="0" g="0" b="0"/>
+        </a:fillRef>
+        <a:effectRef idx="0">
+          <a:scrgbClr r="0" g="0" b="0"/>
+        </a:effectRef>
+        <a:fontRef idx="minor">
+          <a:schemeClr val="lt1"/>
+        </a:fontRef>
+      </dsp:style>
+      <dsp:txBody>
+        <a:bodyPr spcFirstLastPara="0" vert="horz" wrap="square" lIns="15240" tIns="15240" rIns="15240" bIns="15240" numCol="1" spcCol="1270" anchor="ctr" anchorCtr="0">
+          <a:noAutofit/>
+        </a:bodyPr>
+        <a:lstStyle/>
+        <a:p>
+          <a:pPr marL="0" lvl="0" indent="0" algn="ctr" defTabSz="533400">
+            <a:lnSpc>
+              <a:spcPct val="90000"/>
+            </a:lnSpc>
+            <a:spcBef>
+              <a:spcPct val="0"/>
+            </a:spcBef>
+            <a:spcAft>
+              <a:spcPct val="35000"/>
+            </a:spcAft>
+            <a:buNone/>
+          </a:pPr>
+          <a:r>
+            <a:rPr lang="en-US" sz="1200" kern="1200" dirty="0"/>
+            <a:t>Intelligent </a:t>
+          </a:r>
+          <a:r>
+            <a:rPr lang="en-US" altLang="zh-CN" sz="1200" kern="1200" dirty="0"/>
+            <a:t>automation</a:t>
+          </a:r>
+          <a:endParaRPr lang="en-US" sz="1200" kern="1200" dirty="0"/>
+        </a:p>
+      </dsp:txBody>
+      <dsp:txXfrm>
+        <a:off x="1116352" y="986205"/>
+        <a:ext cx="977830" cy="845939"/>
+      </dsp:txXfrm>
+    </dsp:sp>
+  </dsp:spTree>
+</dsp:drawing>
+</file>
+
+<file path=ppt/diagrams/drawing2.xml><?xml version="1.0" encoding="utf-8"?>
 <dsp:drawing xmlns:dgm="http://schemas.openxmlformats.org/drawingml/2006/diagram" xmlns:dsp="http://schemas.microsoft.com/office/drawing/2008/diagram" xmlns:a="http://schemas.openxmlformats.org/drawingml/2006/main">
   <dsp:spTree>
     <dsp:nvGrpSpPr>
@@ -1491,6 +3482,1005 @@
 </file>
 
 <file path=ppt/diagrams/layout1.xml><?xml version="1.0" encoding="utf-8"?>
+<dgm:layoutDef xmlns:dgm="http://schemas.openxmlformats.org/drawingml/2006/diagram" xmlns:a="http://schemas.openxmlformats.org/drawingml/2006/main" uniqueId="urn:microsoft.com/office/officeart/2011/layout/HexagonRadial">
+  <dgm:title val="Hexagon Radial"/>
+  <dgm:desc val="Use to show a sequential process that relates to a central idea or theme. Limited to six Level 2 shapes. Works best with small amounts of text. Unused text does not appear, but remains available if you switch layouts."/>
+  <dgm:catLst>
+    <dgm:cat type="cycle" pri="8500"/>
+    <dgm:cat type="officeonline" pri="9000"/>
+  </dgm:catLst>
+  <dgm:sampData>
+    <dgm:dataModel>
+      <dgm:ptLst>
+        <dgm:pt modelId="0" type="doc"/>
+        <dgm:pt modelId="10">
+          <dgm:prSet phldr="1"/>
+        </dgm:pt>
+        <dgm:pt modelId="11">
+          <dgm:prSet phldr="1"/>
+        </dgm:pt>
+        <dgm:pt modelId="12">
+          <dgm:prSet phldr="1"/>
+        </dgm:pt>
+        <dgm:pt modelId="13">
+          <dgm:prSet phldr="1"/>
+        </dgm:pt>
+        <dgm:pt modelId="14">
+          <dgm:prSet phldr="1"/>
+        </dgm:pt>
+        <dgm:pt modelId="15">
+          <dgm:prSet phldr="1"/>
+        </dgm:pt>
+        <dgm:pt modelId="16">
+          <dgm:prSet phldr="1"/>
+        </dgm:pt>
+      </dgm:ptLst>
+      <dgm:cxnLst>
+        <dgm:cxn modelId="40" srcId="0" destId="10" srcOrd="0" destOrd="0"/>
+        <dgm:cxn modelId="50" srcId="10" destId="11" srcOrd="0" destOrd="0"/>
+        <dgm:cxn modelId="60" srcId="10" destId="12" srcOrd="0" destOrd="0"/>
+        <dgm:cxn modelId="70" srcId="10" destId="13" srcOrd="0" destOrd="0"/>
+        <dgm:cxn modelId="80" srcId="10" destId="14" srcOrd="0" destOrd="0"/>
+        <dgm:cxn modelId="90" srcId="10" destId="15" srcOrd="0" destOrd="0"/>
+        <dgm:cxn modelId="100" srcId="10" destId="16" srcOrd="0" destOrd="0"/>
+      </dgm:cxnLst>
+      <dgm:bg/>
+      <dgm:whole/>
+    </dgm:dataModel>
+  </dgm:sampData>
+  <dgm:styleData>
+    <dgm:dataModel>
+      <dgm:ptLst>
+        <dgm:pt modelId="0" type="doc"/>
+        <dgm:pt modelId="10">
+          <dgm:prSet phldr="1"/>
+        </dgm:pt>
+        <dgm:pt modelId="11">
+          <dgm:prSet phldr="1"/>
+        </dgm:pt>
+        <dgm:pt modelId="12">
+          <dgm:prSet phldr="1"/>
+        </dgm:pt>
+        <dgm:pt modelId="13">
+          <dgm:prSet phldr="1"/>
+        </dgm:pt>
+      </dgm:ptLst>
+      <dgm:cxnLst>
+        <dgm:cxn modelId="40" srcId="0" destId="10" srcOrd="0" destOrd="0"/>
+        <dgm:cxn modelId="50" srcId="10" destId="11" srcOrd="0" destOrd="0"/>
+        <dgm:cxn modelId="60" srcId="10" destId="12" srcOrd="0" destOrd="0"/>
+        <dgm:cxn modelId="70" srcId="10" destId="13" srcOrd="0" destOrd="0"/>
+      </dgm:cxnLst>
+      <dgm:bg/>
+      <dgm:whole/>
+    </dgm:dataModel>
+  </dgm:styleData>
+  <dgm:clrData>
+    <dgm:dataModel>
+      <dgm:ptLst>
+        <dgm:pt modelId="0" type="doc"/>
+        <dgm:pt modelId="10">
+          <dgm:prSet phldr="1"/>
+        </dgm:pt>
+        <dgm:pt modelId="11">
+          <dgm:prSet phldr="1"/>
+        </dgm:pt>
+        <dgm:pt modelId="12">
+          <dgm:prSet phldr="1"/>
+        </dgm:pt>
+        <dgm:pt modelId="13">
+          <dgm:prSet phldr="1"/>
+        </dgm:pt>
+        <dgm:pt modelId="14">
+          <dgm:prSet phldr="1"/>
+        </dgm:pt>
+        <dgm:pt modelId="15">
+          <dgm:prSet phldr="1"/>
+        </dgm:pt>
+        <dgm:pt modelId="16">
+          <dgm:prSet phldr="1"/>
+        </dgm:pt>
+      </dgm:ptLst>
+      <dgm:cxnLst>
+        <dgm:cxn modelId="40" srcId="0" destId="10" srcOrd="0" destOrd="0"/>
+        <dgm:cxn modelId="50" srcId="10" destId="11" srcOrd="0" destOrd="0"/>
+        <dgm:cxn modelId="60" srcId="10" destId="12" srcOrd="0" destOrd="0"/>
+        <dgm:cxn modelId="70" srcId="10" destId="13" srcOrd="0" destOrd="0"/>
+        <dgm:cxn modelId="80" srcId="10" destId="14" srcOrd="0" destOrd="0"/>
+        <dgm:cxn modelId="90" srcId="10" destId="15" srcOrd="0" destOrd="0"/>
+        <dgm:cxn modelId="100" srcId="10" destId="16" srcOrd="0" destOrd="0"/>
+      </dgm:cxnLst>
+      <dgm:bg/>
+      <dgm:whole/>
+    </dgm:dataModel>
+  </dgm:clrData>
+  <dgm:layoutNode name="Name0">
+    <dgm:varLst>
+      <dgm:chMax val="1"/>
+      <dgm:chPref val="1"/>
+      <dgm:dir/>
+      <dgm:animOne val="branch"/>
+      <dgm:animLvl val="lvl"/>
+    </dgm:varLst>
+    <dgm:shape xmlns:r="http://schemas.openxmlformats.org/officeDocument/2006/relationships" r:blip="">
+      <dgm:adjLst/>
+    </dgm:shape>
+    <dgm:choose name="Name1">
+      <dgm:if name="Name2" func="var" arg="dir" op="equ" val="norm">
+        <dgm:choose name="Name3">
+          <dgm:if name="Name4" axis="ch ch" ptType="node node" st="1 1" cnt="1 0" func="cnt" op="equ" val="0">
+            <dgm:alg type="composite">
+              <dgm:param type="ar" val="1.1561"/>
+            </dgm:alg>
+            <dgm:constrLst>
+              <dgm:constr type="primFontSz" for="des" forName="Parent" val="65"/>
+              <dgm:constr type="l" for="ch" forName="Parent" refType="w" fact="0"/>
+              <dgm:constr type="t" for="ch" forName="Parent" refType="h" fact="0"/>
+              <dgm:constr type="w" for="ch" forName="Parent" refType="w"/>
+              <dgm:constr type="h" for="ch" forName="Parent" refType="h"/>
+            </dgm:constrLst>
+          </dgm:if>
+          <dgm:if name="Name5" axis="ch ch" ptType="node node" st="1 1" cnt="1 0" func="cnt" op="lte" val="1">
+            <dgm:alg type="composite">
+              <dgm:param type="ar" val="1.368"/>
+            </dgm:alg>
+            <dgm:constrLst>
+              <dgm:constr type="primFontSz" for="des" forName="Parent" val="65"/>
+              <dgm:constr type="primFontSz" for="des" forName="Child1" val="65"/>
+              <dgm:constr type="primFontSz" for="des" forName="Child1" refType="primFontSz" refFor="des" refForName="Parent" op="lte"/>
+              <dgm:constr type="l" for="ch" forName="Accent1" refType="w" fact="0.1685"/>
+              <dgm:constr type="t" for="ch" forName="Accent1" refType="h" fact="0.2946"/>
+              <dgm:constr type="w" for="ch" forName="Accent1" refType="w" fact="0.462"/>
+              <dgm:constr type="h" for="ch" forName="Accent1" refType="h" fact="0.5472"/>
+              <dgm:constr type="l" for="ch" forName="Parent" refType="w" fact="0"/>
+              <dgm:constr type="t" for="ch" forName="Parent" refType="h" fact="0.2885"/>
+              <dgm:constr type="w" for="ch" forName="Parent" refType="w" fact="0.6013"/>
+              <dgm:constr type="h" for="ch" forName="Parent" refType="h" fact="0.7115"/>
+              <dgm:constr type="l" for="ch" forName="Child1" refType="w" fact="0.5073"/>
+              <dgm:constr type="t" for="ch" forName="Child1" refType="h" fact="0"/>
+              <dgm:constr type="w" for="ch" forName="Child1" refType="w" fact="0.4927"/>
+              <dgm:constr type="h" for="ch" forName="Child1" refType="h" fact="0.5831"/>
+            </dgm:constrLst>
+          </dgm:if>
+          <dgm:if name="Name6" axis="ch ch" ptType="node node" st="1 1" cnt="1 0" func="cnt" op="equ" val="2">
+            <dgm:alg type="composite">
+              <dgm:param type="ar" val="1.0619"/>
+            </dgm:alg>
+            <dgm:constrLst>
+              <dgm:constr type="primFontSz" for="des" forName="Parent" val="65"/>
+              <dgm:constr type="primFontSz" for="des" forName="Child1" val="65"/>
+              <dgm:constr type="primFontSz" for="des" forName="Child1" refType="primFontSz" refFor="des" refForName="Parent" op="lte"/>
+              <dgm:constr type="primFontSz" for="des" forName="Child2" refType="primFontSz" refFor="des" refForName="Parent" op="lte"/>
+              <dgm:constr type="primFontSz" for="des" forName="Child2" refType="primFontSz" refFor="des" refForName="Child1" op="equ"/>
+              <dgm:constr type="l" for="ch" forName="Accent2" refType="w" fact="0.6413"/>
+              <dgm:constr type="t" for="ch" forName="Accent2" refType="h" fact="0.3477"/>
+              <dgm:constr type="w" for="ch" forName="Accent2" refType="w" fact="0.2269"/>
+              <dgm:constr type="h" for="ch" forName="Accent2" refType="h" fact="0.2076"/>
+              <dgm:constr type="l" for="ch" forName="Accent1" refType="w" fact="0"/>
+              <dgm:constr type="t" for="ch" forName="Accent1" refType="h" fact="0"/>
+              <dgm:constr type="w" for="ch" forName="Accent1" refType="w" fact="0"/>
+              <dgm:constr type="h" for="ch" forName="Accent1" refType="h" fact="0"/>
+              <dgm:constr type="l" for="ch" forName="Parent" refType="w" fact="0"/>
+              <dgm:constr type="t" for="ch" forName="Parent" refType="h" fact="0.2239"/>
+              <dgm:constr type="w" for="ch" forName="Parent" refType="w" fact="0.6013"/>
+              <dgm:constr type="h" for="ch" forName="Parent" refType="h" fact="0.5523"/>
+              <dgm:constr type="l" for="ch" forName="Child1" refType="w" fact="0.5073"/>
+              <dgm:constr type="t" for="ch" forName="Child1" refType="h" fact="0"/>
+              <dgm:constr type="w" for="ch" forName="Child1" refType="w" fact="0.4927"/>
+              <dgm:constr type="h" for="ch" forName="Child1" refType="h" fact="0.4527"/>
+              <dgm:constr type="l" for="ch" forName="Child2" refType="w" fact="0.5073"/>
+              <dgm:constr type="t" for="ch" forName="Child2" refType="h" fact="0.5473"/>
+              <dgm:constr type="w" for="ch" forName="Child2" refType="w" fact="0.4927"/>
+              <dgm:constr type="h" for="ch" forName="Child2" refType="h" fact="0.4527"/>
+            </dgm:constrLst>
+          </dgm:if>
+          <dgm:if name="Name7" axis="ch ch" ptType="node node" st="1 1" cnt="1 0" func="cnt" op="equ" val="3">
+            <dgm:alg type="composite">
+              <dgm:param type="ar" val="0.8305"/>
+            </dgm:alg>
+            <dgm:constrLst>
+              <dgm:constr type="primFontSz" for="des" forName="Parent" val="65"/>
+              <dgm:constr type="primFontSz" for="des" forName="Child1" val="65"/>
+              <dgm:constr type="primFontSz" for="des" forName="Child1" refType="primFontSz" refFor="des" refForName="Parent" op="lte"/>
+              <dgm:constr type="primFontSz" for="des" forName="Child2" refType="primFontSz" refFor="des" refForName="Parent" op="lte"/>
+              <dgm:constr type="primFontSz" for="des" forName="Child3" refType="primFontSz" refFor="des" refForName="Parent" op="lte"/>
+              <dgm:constr type="primFontSz" for="des" forName="Child2" refType="primFontSz" refFor="des" refForName="Child1" op="equ"/>
+              <dgm:constr type="primFontSz" for="des" forName="Child3" refType="primFontSz" refFor="des" refForName="Child1" op="equ"/>
+              <dgm:constr type="l" for="ch" forName="Accent3" refType="w" fact="0.4573"/>
+              <dgm:constr type="t" for="ch" forName="Accent3" refType="h" fact="0.6145"/>
+              <dgm:constr type="w" for="ch" forName="Accent3" refType="w" fact="0.2269"/>
+              <dgm:constr type="h" for="ch" forName="Accent3" refType="h" fact="0.1623"/>
+              <dgm:constr type="l" for="ch" forName="Accent2" refType="w" fact="0.6413"/>
+              <dgm:constr type="t" for="ch" forName="Accent2" refType="h" fact="0.2719"/>
+              <dgm:constr type="w" for="ch" forName="Accent2" refType="w" fact="0.2269"/>
+              <dgm:constr type="h" for="ch" forName="Accent2" refType="h" fact="0.1623"/>
+              <dgm:constr type="l" for="ch" forName="Accent1" refType="w" fact="0"/>
+              <dgm:constr type="t" for="ch" forName="Accent1" refType="h" fact="0"/>
+              <dgm:constr type="w" for="ch" forName="Accent1" refType="w" fact="0"/>
+              <dgm:constr type="h" for="ch" forName="Accent1" refType="h" fact="0"/>
+              <dgm:constr type="l" for="ch" forName="Child3" refType="w" fact="0.0554"/>
+              <dgm:constr type="t" for="ch" forName="Child3" refType="h" fact="0.646"/>
+              <dgm:constr type="w" for="ch" forName="Child3" refType="w" fact="0.4927"/>
+              <dgm:constr type="h" for="ch" forName="Child3" refType="h" fact="0.354"/>
+              <dgm:constr type="l" for="ch" forName="Parent" refType="w" fact="0"/>
+              <dgm:constr type="t" for="ch" forName="Parent" refType="h" fact="0.1751"/>
+              <dgm:constr type="w" for="ch" forName="Parent" refType="w" fact="0.6013"/>
+              <dgm:constr type="h" for="ch" forName="Parent" refType="h" fact="0.4319"/>
+              <dgm:constr type="l" for="ch" forName="Child1" refType="w" fact="0.5073"/>
+              <dgm:constr type="t" for="ch" forName="Child1" refType="h" fact="0"/>
+              <dgm:constr type="w" for="ch" forName="Child1" refType="w" fact="0.4927"/>
+              <dgm:constr type="h" for="ch" forName="Child1" refType="h" fact="0.354"/>
+              <dgm:constr type="l" for="ch" forName="Child2" refType="w" fact="0.5073"/>
+              <dgm:constr type="t" for="ch" forName="Child2" refType="h" fact="0.428"/>
+              <dgm:constr type="w" for="ch" forName="Child2" refType="w" fact="0.4927"/>
+              <dgm:constr type="h" for="ch" forName="Child2" refType="h" fact="0.354"/>
+            </dgm:constrLst>
+          </dgm:if>
+          <dgm:if name="Name8" axis="ch ch" ptType="node node" st="1 1" cnt="1 0" func="cnt" op="equ" val="4">
+            <dgm:alg type="composite">
+              <dgm:param type="ar" val="0.682"/>
+            </dgm:alg>
+            <dgm:constrLst>
+              <dgm:constr type="primFontSz" for="des" forName="Parent" val="65"/>
+              <dgm:constr type="primFontSz" for="des" forName="Child1" val="65"/>
+              <dgm:constr type="primFontSz" for="des" forName="Child1" refType="primFontSz" refFor="des" refForName="Parent" op="lte"/>
+              <dgm:constr type="primFontSz" for="des" forName="Child2" refType="primFontSz" refFor="des" refForName="Parent" op="lte"/>
+              <dgm:constr type="primFontSz" for="des" forName="Child3" refType="primFontSz" refFor="des" refForName="Parent" op="lte"/>
+              <dgm:constr type="primFontSz" for="des" forName="Child4" refType="primFontSz" refFor="des" refForName="Parent" op="lte"/>
+              <dgm:constr type="primFontSz" for="des" forName="Child2" refType="primFontSz" refFor="des" refForName="Child1" op="equ"/>
+              <dgm:constr type="primFontSz" for="des" forName="Child3" refType="primFontSz" refFor="des" refForName="Child1" op="equ"/>
+              <dgm:constr type="primFontSz" for="des" forName="Child4" refType="primFontSz" refFor="des" refForName="Child1" op="equ"/>
+              <dgm:constr type="l" for="ch" forName="Accent4" refType="w" fact="0.4573"/>
+              <dgm:constr type="t" for="ch" forName="Accent4" refType="h" fact="0.6834"/>
+              <dgm:constr type="w" for="ch" forName="Accent4" refType="w" fact="0.2269"/>
+              <dgm:constr type="h" for="ch" forName="Accent4" refType="h" fact="0.1333"/>
+              <dgm:constr type="l" for="ch" forName="Accent3" refType="w" fact="0.6413"/>
+              <dgm:constr type="t" for="ch" forName="Accent3" refType="h" fact="0.4021"/>
+              <dgm:constr type="w" for="ch" forName="Accent3" refType="w" fact="0.2269"/>
+              <dgm:constr type="h" for="ch" forName="Accent3" refType="h" fact="0.1333"/>
+              <dgm:constr type="l" for="ch" forName="Accent2" refType="w" fact="0.3765"/>
+              <dgm:constr type="t" for="ch" forName="Accent2" refType="h" fact="0.1529"/>
+              <dgm:constr type="w" for="ch" forName="Accent2" refType="w" fact="0.2269"/>
+              <dgm:constr type="h" for="ch" forName="Accent2" refType="h" fact="0.1333"/>
+              <dgm:constr type="l" for="ch" forName="Accent1" refType="w" fact="0"/>
+              <dgm:constr type="t" for="ch" forName="Accent1" refType="h" fact="0"/>
+              <dgm:constr type="w" for="ch" forName="Accent1" refType="w" fact="0"/>
+              <dgm:constr type="h" for="ch" forName="Accent1" refType="h" fact="0"/>
+              <dgm:constr type="l" for="ch" forName="Child4" refType="w" fact="0.0554"/>
+              <dgm:constr type="t" for="ch" forName="Child4" refType="h" fact="0.7093"/>
+              <dgm:constr type="w" for="ch" forName="Child4" refType="w" fact="0.4927"/>
+              <dgm:constr type="h" for="ch" forName="Child4" refType="h" fact="0.2907"/>
+              <dgm:constr type="l" for="ch" forName="Parent" refType="w" fact="0"/>
+              <dgm:constr type="t" for="ch" forName="Parent" refType="h" fact="0.3226"/>
+              <dgm:constr type="w" for="ch" forName="Parent" refType="w" fact="0.6013"/>
+              <dgm:constr type="h" for="ch" forName="Parent" refType="h" fact="0.3547"/>
+              <dgm:constr type="l" for="ch" forName="Child2" refType="w" fact="0.5073"/>
+              <dgm:constr type="t" for="ch" forName="Child2" refType="h" fact="0.1788"/>
+              <dgm:constr type="w" for="ch" forName="Child2" refType="w" fact="0.4927"/>
+              <dgm:constr type="h" for="ch" forName="Child2" refType="h" fact="0.2907"/>
+              <dgm:constr type="l" for="ch" forName="Child3" refType="w" fact="0.5073"/>
+              <dgm:constr type="t" for="ch" forName="Child3" refType="h" fact="0.5303"/>
+              <dgm:constr type="w" for="ch" forName="Child3" refType="w" fact="0.4927"/>
+              <dgm:constr type="h" for="ch" forName="Child3" refType="h" fact="0.2907"/>
+              <dgm:constr type="l" for="ch" forName="Child1" refType="w" fact="0.0554"/>
+              <dgm:constr type="t" for="ch" forName="Child1" refType="h" fact="0"/>
+              <dgm:constr type="w" for="ch" forName="Child1" refType="w" fact="0.4927"/>
+              <dgm:constr type="h" for="ch" forName="Child1" refType="h" fact="0.2907"/>
+            </dgm:constrLst>
+          </dgm:if>
+          <dgm:if name="Name9" axis="ch ch" ptType="node node" st="1 1" cnt="1 0" func="cnt" op="equ" val="5">
+            <dgm:alg type="composite">
+              <dgm:param type="ar" val="0.9538"/>
+            </dgm:alg>
+            <dgm:constrLst>
+              <dgm:constr type="primFontSz" for="des" forName="Parent" val="65"/>
+              <dgm:constr type="primFontSz" for="des" forName="Child1" val="65"/>
+              <dgm:constr type="primFontSz" for="des" forName="Child1" refType="primFontSz" refFor="des" refForName="Parent" op="lte"/>
+              <dgm:constr type="primFontSz" for="des" forName="Child2" refType="primFontSz" refFor="des" refForName="Parent" op="lte"/>
+              <dgm:constr type="primFontSz" for="des" forName="Child3" refType="primFontSz" refFor="des" refForName="Parent" op="lte"/>
+              <dgm:constr type="primFontSz" for="des" forName="Child4" refType="primFontSz" refFor="des" refForName="Parent" op="lte"/>
+              <dgm:constr type="primFontSz" for="des" forName="Child5" refType="primFontSz" refFor="des" refForName="Parent" op="lte"/>
+              <dgm:constr type="primFontSz" for="des" forName="Child2" refType="primFontSz" refFor="des" refForName="Child1" op="equ"/>
+              <dgm:constr type="primFontSz" for="des" forName="Child3" refType="primFontSz" refFor="des" refForName="Child1" op="equ"/>
+              <dgm:constr type="primFontSz" for="des" forName="Child4" refType="primFontSz" refFor="des" refForName="Child1" op="equ"/>
+              <dgm:constr type="primFontSz" for="des" forName="Child5" refType="primFontSz" refFor="des" refForName="Child1" op="equ"/>
+              <dgm:constr type="l" for="ch" forName="Accent5" refType="w" fact="0.2858"/>
+              <dgm:constr type="t" for="ch" forName="Accent5" refType="h" fact="0.7126"/>
+              <dgm:constr type="w" for="ch" forName="Accent5" refType="w" fact="0.1622"/>
+              <dgm:constr type="h" for="ch" forName="Accent5" refType="h" fact="0.1333"/>
+              <dgm:constr type="l" for="ch" forName="Accent4" refType="w" fact="0.612"/>
+              <dgm:constr type="t" for="ch" forName="Accent4" refType="h" fact="0.6834"/>
+              <dgm:constr type="w" for="ch" forName="Accent4" refType="w" fact="0.1622"/>
+              <dgm:constr type="h" for="ch" forName="Accent4" refType="h" fact="0.1333"/>
+              <dgm:constr type="l" for="ch" forName="Accent3" refType="w" fact="0.7435"/>
+              <dgm:constr type="t" for="ch" forName="Accent3" refType="h" fact="0.4021"/>
+              <dgm:constr type="w" for="ch" forName="Accent3" refType="w" fact="0.1622"/>
+              <dgm:constr type="h" for="ch" forName="Accent3" refType="h" fact="0.1333"/>
+              <dgm:constr type="l" for="ch" forName="Accent2" refType="w" fact="0.5542"/>
+              <dgm:constr type="t" for="ch" forName="Accent2" refType="h" fact="0.1529"/>
+              <dgm:constr type="w" for="ch" forName="Accent2" refType="w" fact="0.1622"/>
+              <dgm:constr type="h" for="ch" forName="Accent2" refType="h" fact="0.1333"/>
+              <dgm:constr type="l" for="ch" forName="Accent1" refType="w" fact="0"/>
+              <dgm:constr type="t" for="ch" forName="Accent1" refType="h" fact="0"/>
+              <dgm:constr type="w" for="ch" forName="Accent1" refType="w" fact="0"/>
+              <dgm:constr type="h" for="ch" forName="Accent1" refType="h" fact="0"/>
+              <dgm:constr type="l" for="ch" forName="Child4" refType="w" fact="0.3246"/>
+              <dgm:constr type="t" for="ch" forName="Child4" refType="h" fact="0.7093"/>
+              <dgm:constr type="w" for="ch" forName="Child4" refType="w" fact="0.3523"/>
+              <dgm:constr type="h" for="ch" forName="Child4" refType="h" fact="0.2907"/>
+              <dgm:constr type="l" for="ch" forName="Parent" refType="w" fact="0.285"/>
+              <dgm:constr type="t" for="ch" forName="Parent" refType="h" fact="0.3226"/>
+              <dgm:constr type="w" for="ch" forName="Parent" refType="w" fact="0.4299"/>
+              <dgm:constr type="h" for="ch" forName="Parent" refType="h" fact="0.3547"/>
+              <dgm:constr type="l" for="ch" forName="Child2" refType="w" fact="0.6477"/>
+              <dgm:constr type="t" for="ch" forName="Child2" refType="h" fact="0.1788"/>
+              <dgm:constr type="w" for="ch" forName="Child2" refType="w" fact="0.3523"/>
+              <dgm:constr type="h" for="ch" forName="Child2" refType="h" fact="0.2907"/>
+              <dgm:constr type="l" for="ch" forName="Child3" refType="w" fact="0.6477"/>
+              <dgm:constr type="t" for="ch" forName="Child3" refType="h" fact="0.5303"/>
+              <dgm:constr type="w" for="ch" forName="Child3" refType="w" fact="0.3523"/>
+              <dgm:constr type="h" for="ch" forName="Child3" refType="h" fact="0.2907"/>
+              <dgm:constr type="l" for="ch" forName="Child5" refType="w" fact="0"/>
+              <dgm:constr type="t" for="ch" forName="Child5" refType="h" fact="0.5305"/>
+              <dgm:constr type="w" for="ch" forName="Child5" refType="w" fact="0.3523"/>
+              <dgm:constr type="h" for="ch" forName="Child5" refType="h" fact="0.2907"/>
+              <dgm:constr type="l" for="ch" forName="Child1" refType="w" fact="0.3246"/>
+              <dgm:constr type="t" for="ch" forName="Child1" refType="h" fact="0"/>
+              <dgm:constr type="w" for="ch" forName="Child1" refType="w" fact="0.3523"/>
+              <dgm:constr type="h" for="ch" forName="Child1" refType="h" fact="0.2907"/>
+            </dgm:constrLst>
+          </dgm:if>
+          <dgm:else name="Name10">
+            <dgm:alg type="composite">
+              <dgm:param type="ar" val="0.9538"/>
+            </dgm:alg>
+            <dgm:constrLst>
+              <dgm:constr type="primFontSz" for="des" forName="Parent" val="65"/>
+              <dgm:constr type="primFontSz" for="des" forName="Child1" val="65"/>
+              <dgm:constr type="primFontSz" for="des" forName="Child1" refType="primFontSz" refFor="des" refForName="Parent" op="lte"/>
+              <dgm:constr type="primFontSz" for="des" forName="Child2" refType="primFontSz" refFor="des" refForName="Parent" op="lte"/>
+              <dgm:constr type="primFontSz" for="des" forName="Child3" refType="primFontSz" refFor="des" refForName="Parent" op="lte"/>
+              <dgm:constr type="primFontSz" for="des" forName="Child4" refType="primFontSz" refFor="des" refForName="Parent" op="lte"/>
+              <dgm:constr type="primFontSz" for="des" forName="Child5" refType="primFontSz" refFor="des" refForName="Parent" op="lte"/>
+              <dgm:constr type="primFontSz" for="des" forName="Child6" refType="primFontSz" refFor="des" refForName="Parent" op="lte"/>
+              <dgm:constr type="primFontSz" for="des" forName="Child7" refType="primFontSz" refFor="des" refForName="Parent" op="lte"/>
+              <dgm:constr type="primFontSz" for="des" forName="Child2" refType="primFontSz" refFor="des" refForName="Child1" op="equ"/>
+              <dgm:constr type="primFontSz" for="des" forName="Child3" refType="primFontSz" refFor="des" refForName="Child1" op="equ"/>
+              <dgm:constr type="primFontSz" for="des" forName="Child4" refType="primFontSz" refFor="des" refForName="Child1" op="equ"/>
+              <dgm:constr type="primFontSz" for="des" forName="Child5" refType="primFontSz" refFor="des" refForName="Child1" op="equ"/>
+              <dgm:constr type="primFontSz" for="des" forName="Child6" refType="primFontSz" refFor="des" refForName="Child1" op="equ"/>
+              <dgm:constr type="primFontSz" for="des" forName="Child7" refType="primFontSz" refFor="des" refForName="Child1" op="equ"/>
+              <dgm:constr type="primFontSz" for="des" ptType="node" op="equ" val="65"/>
+              <dgm:constr type="l" for="ch" forName="Accent6" refType="w" fact="0.0934"/>
+              <dgm:constr type="t" for="ch" forName="Accent6" refType="h" fact="0.4635"/>
+              <dgm:constr type="w" for="ch" forName="Accent6" refType="w" fact="0.1622"/>
+              <dgm:constr type="h" for="ch" forName="Accent6" refType="h" fact="0.1333"/>
+              <dgm:constr type="l" for="ch" forName="Accent5" refType="w" fact="0.2858"/>
+              <dgm:constr type="t" for="ch" forName="Accent5" refType="h" fact="0.7126"/>
+              <dgm:constr type="w" for="ch" forName="Accent5" refType="w" fact="0.1622"/>
+              <dgm:constr type="h" for="ch" forName="Accent5" refType="h" fact="0.1333"/>
+              <dgm:constr type="l" for="ch" forName="Accent4" refType="w" fact="0.612"/>
+              <dgm:constr type="t" for="ch" forName="Accent4" refType="h" fact="0.6834"/>
+              <dgm:constr type="w" for="ch" forName="Accent4" refType="w" fact="0.1622"/>
+              <dgm:constr type="h" for="ch" forName="Accent4" refType="h" fact="0.1333"/>
+              <dgm:constr type="l" for="ch" forName="Accent3" refType="w" fact="0.7435"/>
+              <dgm:constr type="t" for="ch" forName="Accent3" refType="h" fact="0.4021"/>
+              <dgm:constr type="w" for="ch" forName="Accent3" refType="w" fact="0.1622"/>
+              <dgm:constr type="h" for="ch" forName="Accent3" refType="h" fact="0.1333"/>
+              <dgm:constr type="l" for="ch" forName="Accent2" refType="w" fact="0.5542"/>
+              <dgm:constr type="t" for="ch" forName="Accent2" refType="h" fact="0.1529"/>
+              <dgm:constr type="w" for="ch" forName="Accent2" refType="w" fact="0.1622"/>
+              <dgm:constr type="h" for="ch" forName="Accent2" refType="h" fact="0.1333"/>
+              <dgm:constr type="l" for="ch" forName="Accent1" refType="w" fact="0"/>
+              <dgm:constr type="t" for="ch" forName="Accent1" refType="h" fact="0"/>
+              <dgm:constr type="w" for="ch" forName="Accent1" refType="w" fact="0"/>
+              <dgm:constr type="h" for="ch" forName="Accent1" refType="h" fact="0"/>
+              <dgm:constr type="l" for="ch" forName="Child4" refType="w" fact="0.3246"/>
+              <dgm:constr type="t" for="ch" forName="Child4" refType="h" fact="0.7093"/>
+              <dgm:constr type="w" for="ch" forName="Child4" refType="w" fact="0.3523"/>
+              <dgm:constr type="h" for="ch" forName="Child4" refType="h" fact="0.2907"/>
+              <dgm:constr type="l" for="ch" forName="Parent" refType="w" fact="0.285"/>
+              <dgm:constr type="t" for="ch" forName="Parent" refType="h" fact="0.3226"/>
+              <dgm:constr type="w" for="ch" forName="Parent" refType="w" fact="0.4299"/>
+              <dgm:constr type="h" for="ch" forName="Parent" refType="h" fact="0.3547"/>
+              <dgm:constr type="l" for="ch" forName="Child2" refType="w" fact="0.6477"/>
+              <dgm:constr type="t" for="ch" forName="Child2" refType="h" fact="0.1788"/>
+              <dgm:constr type="w" for="ch" forName="Child2" refType="w" fact="0.3523"/>
+              <dgm:constr type="h" for="ch" forName="Child2" refType="h" fact="0.2907"/>
+              <dgm:constr type="l" for="ch" forName="Child3" refType="w" fact="0.6477"/>
+              <dgm:constr type="t" for="ch" forName="Child3" refType="h" fact="0.5303"/>
+              <dgm:constr type="w" for="ch" forName="Child3" refType="w" fact="0.3523"/>
+              <dgm:constr type="h" for="ch" forName="Child3" refType="h" fact="0.2907"/>
+              <dgm:constr type="l" for="ch" forName="Child5" refType="w" fact="0"/>
+              <dgm:constr type="t" for="ch" forName="Child5" refType="h" fact="0.5305"/>
+              <dgm:constr type="w" for="ch" forName="Child5" refType="w" fact="0.3523"/>
+              <dgm:constr type="h" for="ch" forName="Child5" refType="h" fact="0.2907"/>
+              <dgm:constr type="l" for="ch" forName="Child6" refType="w" fact="0"/>
+              <dgm:constr type="t" for="ch" forName="Child6" refType="h" fact="0.1784"/>
+              <dgm:constr type="w" for="ch" forName="Child6" refType="w" fact="0.3523"/>
+              <dgm:constr type="h" for="ch" forName="Child6" refType="h" fact="0.2907"/>
+              <dgm:constr type="l" for="ch" forName="Child1" refType="w" fact="0.3246"/>
+              <dgm:constr type="t" for="ch" forName="Child1" refType="h" fact="0"/>
+              <dgm:constr type="w" for="ch" forName="Child1" refType="w" fact="0.3523"/>
+              <dgm:constr type="h" for="ch" forName="Child1" refType="h" fact="0.2907"/>
+            </dgm:constrLst>
+          </dgm:else>
+        </dgm:choose>
+      </dgm:if>
+      <dgm:else name="Name11">
+        <dgm:choose name="Name12">
+          <dgm:if name="Name13" axis="ch ch" ptType="node node" st="1 1" cnt="1 0" func="cnt" op="equ" val="0">
+            <dgm:alg type="composite">
+              <dgm:param type="ar" val="1.1561"/>
+            </dgm:alg>
+            <dgm:constrLst>
+              <dgm:constr type="primFontSz" for="des" forName="Parent" val="65"/>
+              <dgm:constr type="l" for="ch" forName="Parent" refType="w" fact="0"/>
+              <dgm:constr type="t" for="ch" forName="Parent" refType="h" fact="0"/>
+              <dgm:constr type="w" for="ch" forName="Parent" refType="w"/>
+              <dgm:constr type="h" for="ch" forName="Parent" refType="h"/>
+            </dgm:constrLst>
+          </dgm:if>
+          <dgm:if name="Name14" axis="ch ch" ptType="node node" st="1 1" cnt="1 0" func="cnt" op="lte" val="1">
+            <dgm:alg type="composite">
+              <dgm:param type="ar" val="1.368"/>
+            </dgm:alg>
+            <dgm:constrLst>
+              <dgm:constr type="primFontSz" for="des" forName="Parent" val="65"/>
+              <dgm:constr type="primFontSz" for="des" forName="Child1" val="65"/>
+              <dgm:constr type="primFontSz" for="des" forName="Child1" refType="primFontSz" refFor="des" refForName="Parent" op="lte"/>
+              <dgm:constr type="r" for="ch" forName="Accent1" refType="w" fact="0.8315"/>
+              <dgm:constr type="t" for="ch" forName="Accent1" refType="h" fact="0.2946"/>
+              <dgm:constr type="w" for="ch" forName="Accent1" refType="w" fact="0.462"/>
+              <dgm:constr type="h" for="ch" forName="Accent1" refType="h" fact="0.5472"/>
+              <dgm:constr type="r" for="ch" forName="Parent" refType="w"/>
+              <dgm:constr type="t" for="ch" forName="Parent" refType="h" fact="0.2885"/>
+              <dgm:constr type="w" for="ch" forName="Parent" refType="w" fact="0.6013"/>
+              <dgm:constr type="h" for="ch" forName="Parent" refType="h" fact="0.7115"/>
+              <dgm:constr type="r" for="ch" forName="Child1" refType="w" fact="0.4927"/>
+              <dgm:constr type="t" for="ch" forName="Child1" refType="h" fact="0"/>
+              <dgm:constr type="w" for="ch" forName="Child1" refType="w" fact="0.4927"/>
+              <dgm:constr type="h" for="ch" forName="Child1" refType="h" fact="0.5831"/>
+            </dgm:constrLst>
+          </dgm:if>
+          <dgm:if name="Name15" axis="ch ch" ptType="node node" st="1 1" cnt="1 0" func="cnt" op="equ" val="2">
+            <dgm:alg type="composite">
+              <dgm:param type="ar" val="1.0619"/>
+            </dgm:alg>
+            <dgm:constrLst>
+              <dgm:constr type="primFontSz" for="des" forName="Parent" val="65"/>
+              <dgm:constr type="primFontSz" for="des" forName="Child1" val="65"/>
+              <dgm:constr type="primFontSz" for="des" forName="Child1" refType="primFontSz" refFor="des" refForName="Parent" op="lte"/>
+              <dgm:constr type="primFontSz" for="des" forName="Child2" refType="primFontSz" refFor="des" refForName="Parent" op="lte"/>
+              <dgm:constr type="primFontSz" for="des" forName="Child2" refType="primFontSz" refFor="des" refForName="Child1" op="equ"/>
+              <dgm:constr type="r" for="ch" forName="Accent2" refType="w" fact="0.3587"/>
+              <dgm:constr type="t" for="ch" forName="Accent2" refType="h" fact="0.3477"/>
+              <dgm:constr type="w" for="ch" forName="Accent2" refType="w" fact="0.2269"/>
+              <dgm:constr type="h" for="ch" forName="Accent2" refType="h" fact="0.2076"/>
+              <dgm:constr type="r" for="ch" forName="Accent1" refType="w" fact="0"/>
+              <dgm:constr type="t" for="ch" forName="Accent1" refType="h" fact="0"/>
+              <dgm:constr type="w" for="ch" forName="Accent1" refType="w" fact="0"/>
+              <dgm:constr type="h" for="ch" forName="Accent1" refType="h" fact="0"/>
+              <dgm:constr type="r" for="ch" forName="Parent" refType="w"/>
+              <dgm:constr type="t" for="ch" forName="Parent" refType="h" fact="0.2239"/>
+              <dgm:constr type="w" for="ch" forName="Parent" refType="w" fact="0.6013"/>
+              <dgm:constr type="h" for="ch" forName="Parent" refType="h" fact="0.5523"/>
+              <dgm:constr type="r" for="ch" forName="Child1" refType="w" fact="0.4927"/>
+              <dgm:constr type="t" for="ch" forName="Child1" refType="h" fact="0"/>
+              <dgm:constr type="w" for="ch" forName="Child1" refType="w" fact="0.4927"/>
+              <dgm:constr type="h" for="ch" forName="Child1" refType="h" fact="0.4527"/>
+              <dgm:constr type="r" for="ch" forName="Child2" refType="w" fact="0.5073"/>
+              <dgm:constr type="t" for="ch" forName="Child2" refType="h" fact="0.5473"/>
+              <dgm:constr type="w" for="ch" forName="Child2" refType="w" fact="0.4927"/>
+              <dgm:constr type="h" for="ch" forName="Child2" refType="h" fact="0.4527"/>
+            </dgm:constrLst>
+          </dgm:if>
+          <dgm:if name="Name16" axis="ch ch" ptType="node node" st="1 1" cnt="1 0" func="cnt" op="equ" val="3">
+            <dgm:alg type="composite">
+              <dgm:param type="ar" val="0.8305"/>
+            </dgm:alg>
+            <dgm:constrLst>
+              <dgm:constr type="primFontSz" for="des" forName="Parent" val="65"/>
+              <dgm:constr type="primFontSz" for="des" forName="Child1" val="65"/>
+              <dgm:constr type="primFontSz" for="des" forName="Child1" refType="primFontSz" refFor="des" refForName="Parent" op="lte"/>
+              <dgm:constr type="primFontSz" for="des" forName="Child2" refType="primFontSz" refFor="des" refForName="Parent" op="lte"/>
+              <dgm:constr type="primFontSz" for="des" forName="Child3" refType="primFontSz" refFor="des" refForName="Parent" op="lte"/>
+              <dgm:constr type="primFontSz" for="des" forName="Child2" refType="primFontSz" refFor="des" refForName="Child1" op="equ"/>
+              <dgm:constr type="primFontSz" for="des" forName="Child3" refType="primFontSz" refFor="des" refForName="Child1" op="equ"/>
+              <dgm:constr type="r" for="ch" forName="Accent3" refType="w" fact="0.5427"/>
+              <dgm:constr type="t" for="ch" forName="Accent3" refType="h" fact="0.6145"/>
+              <dgm:constr type="w" for="ch" forName="Accent3" refType="w" fact="0.2269"/>
+              <dgm:constr type="h" for="ch" forName="Accent3" refType="h" fact="0.1623"/>
+              <dgm:constr type="r" for="ch" forName="Accent2" refType="w" fact="0.3587"/>
+              <dgm:constr type="t" for="ch" forName="Accent2" refType="h" fact="0.2719"/>
+              <dgm:constr type="w" for="ch" forName="Accent2" refType="w" fact="0.2269"/>
+              <dgm:constr type="h" for="ch" forName="Accent2" refType="h" fact="0.1623"/>
+              <dgm:constr type="r" for="ch" forName="Accent1" refType="w" fact="0"/>
+              <dgm:constr type="t" for="ch" forName="Accent1" refType="h" fact="0"/>
+              <dgm:constr type="w" for="ch" forName="Accent1" refType="w" fact="0"/>
+              <dgm:constr type="h" for="ch" forName="Accent1" refType="h" fact="0"/>
+              <dgm:constr type="r" for="ch" forName="Child3" refType="w" fact="0.9446"/>
+              <dgm:constr type="t" for="ch" forName="Child3" refType="h" fact="0.646"/>
+              <dgm:constr type="w" for="ch" forName="Child3" refType="w" fact="0.4927"/>
+              <dgm:constr type="h" for="ch" forName="Child3" refType="h" fact="0.354"/>
+              <dgm:constr type="r" for="ch" forName="Parent" refType="w"/>
+              <dgm:constr type="t" for="ch" forName="Parent" refType="h" fact="0.1751"/>
+              <dgm:constr type="w" for="ch" forName="Parent" refType="w" fact="0.6013"/>
+              <dgm:constr type="h" for="ch" forName="Parent" refType="h" fact="0.4319"/>
+              <dgm:constr type="r" for="ch" forName="Child1" refType="w" fact="0.4927"/>
+              <dgm:constr type="t" for="ch" forName="Child1" refType="h" fact="0"/>
+              <dgm:constr type="w" for="ch" forName="Child1" refType="w" fact="0.4927"/>
+              <dgm:constr type="h" for="ch" forName="Child1" refType="h" fact="0.354"/>
+              <dgm:constr type="r" for="ch" forName="Child2" refType="w" fact="0.4927"/>
+              <dgm:constr type="t" for="ch" forName="Child2" refType="h" fact="0.428"/>
+              <dgm:constr type="w" for="ch" forName="Child2" refType="w" fact="0.4927"/>
+              <dgm:constr type="h" for="ch" forName="Child2" refType="h" fact="0.354"/>
+            </dgm:constrLst>
+          </dgm:if>
+          <dgm:if name="Name17" axis="ch ch" ptType="node node" st="1 1" cnt="1 0" func="cnt" op="equ" val="4">
+            <dgm:alg type="composite">
+              <dgm:param type="ar" val="0.682"/>
+            </dgm:alg>
+            <dgm:constrLst>
+              <dgm:constr type="primFontSz" for="des" forName="Parent" val="65"/>
+              <dgm:constr type="primFontSz" for="des" forName="Child1" val="65"/>
+              <dgm:constr type="primFontSz" for="des" forName="Child1" refType="primFontSz" refFor="des" refForName="Parent" op="lte"/>
+              <dgm:constr type="primFontSz" for="des" forName="Child2" refType="primFontSz" refFor="des" refForName="Parent" op="lte"/>
+              <dgm:constr type="primFontSz" for="des" forName="Child3" refType="primFontSz" refFor="des" refForName="Parent" op="lte"/>
+              <dgm:constr type="primFontSz" for="des" forName="Child4" refType="primFontSz" refFor="des" refForName="Parent" op="lte"/>
+              <dgm:constr type="primFontSz" for="des" forName="Child2" refType="primFontSz" refFor="des" refForName="Child1" op="equ"/>
+              <dgm:constr type="primFontSz" for="des" forName="Child3" refType="primFontSz" refFor="des" refForName="Child1" op="equ"/>
+              <dgm:constr type="primFontSz" for="des" forName="Child4" refType="primFontSz" refFor="des" refForName="Child1" op="equ"/>
+              <dgm:constr type="r" for="ch" forName="Accent4" refType="w" fact="0.5427"/>
+              <dgm:constr type="t" for="ch" forName="Accent4" refType="h" fact="0.6834"/>
+              <dgm:constr type="w" for="ch" forName="Accent4" refType="w" fact="0.2269"/>
+              <dgm:constr type="h" for="ch" forName="Accent4" refType="h" fact="0.1333"/>
+              <dgm:constr type="r" for="ch" forName="Accent3" refType="w" fact="0.3587"/>
+              <dgm:constr type="t" for="ch" forName="Accent3" refType="h" fact="0.4021"/>
+              <dgm:constr type="w" for="ch" forName="Accent3" refType="w" fact="0.2269"/>
+              <dgm:constr type="h" for="ch" forName="Accent3" refType="h" fact="0.1333"/>
+              <dgm:constr type="r" for="ch" forName="Accent2" refType="w" fact="0.6235"/>
+              <dgm:constr type="t" for="ch" forName="Accent2" refType="h" fact="0.1529"/>
+              <dgm:constr type="w" for="ch" forName="Accent2" refType="w" fact="0.2269"/>
+              <dgm:constr type="h" for="ch" forName="Accent2" refType="h" fact="0.1333"/>
+              <dgm:constr type="r" for="ch" forName="Accent1" refType="w" fact="0"/>
+              <dgm:constr type="t" for="ch" forName="Accent1" refType="h" fact="0"/>
+              <dgm:constr type="w" for="ch" forName="Accent1" refType="w" fact="0"/>
+              <dgm:constr type="h" for="ch" forName="Accent1" refType="h" fact="0"/>
+              <dgm:constr type="r" for="ch" forName="Child4" refType="w" fact="0.9446"/>
+              <dgm:constr type="t" for="ch" forName="Child4" refType="h" fact="0.7093"/>
+              <dgm:constr type="w" for="ch" forName="Child4" refType="w" fact="0.4927"/>
+              <dgm:constr type="h" for="ch" forName="Child4" refType="h" fact="0.2907"/>
+              <dgm:constr type="r" for="ch" forName="Parent" refType="w"/>
+              <dgm:constr type="t" for="ch" forName="Parent" refType="h" fact="0.3226"/>
+              <dgm:constr type="w" for="ch" forName="Parent" refType="w" fact="0.6013"/>
+              <dgm:constr type="h" for="ch" forName="Parent" refType="h" fact="0.3547"/>
+              <dgm:constr type="r" for="ch" forName="Child2" refType="w" fact="0.4927"/>
+              <dgm:constr type="t" for="ch" forName="Child2" refType="h" fact="0.1788"/>
+              <dgm:constr type="w" for="ch" forName="Child2" refType="w" fact="0.4927"/>
+              <dgm:constr type="h" for="ch" forName="Child2" refType="h" fact="0.2907"/>
+              <dgm:constr type="r" for="ch" forName="Child3" refType="w" fact="0.4927"/>
+              <dgm:constr type="t" for="ch" forName="Child3" refType="h" fact="0.5303"/>
+              <dgm:constr type="w" for="ch" forName="Child3" refType="w" fact="0.4927"/>
+              <dgm:constr type="h" for="ch" forName="Child3" refType="h" fact="0.2907"/>
+              <dgm:constr type="r" for="ch" forName="Child1" refType="w" fact="0.9446"/>
+              <dgm:constr type="t" for="ch" forName="Child1" refType="h" fact="0"/>
+              <dgm:constr type="w" for="ch" forName="Child1" refType="w" fact="0.4927"/>
+              <dgm:constr type="h" for="ch" forName="Child1" refType="h" fact="0.2907"/>
+            </dgm:constrLst>
+          </dgm:if>
+          <dgm:if name="Name18" axis="ch ch" ptType="node node" st="1 1" cnt="1 0" func="cnt" op="equ" val="5">
+            <dgm:alg type="composite">
+              <dgm:param type="ar" val="0.9538"/>
+            </dgm:alg>
+            <dgm:constrLst>
+              <dgm:constr type="primFontSz" for="des" forName="Parent" val="65"/>
+              <dgm:constr type="primFontSz" for="des" forName="Child1" val="65"/>
+              <dgm:constr type="primFontSz" for="des" forName="Child1" refType="primFontSz" refFor="des" refForName="Parent" op="lte"/>
+              <dgm:constr type="primFontSz" for="des" forName="Child2" refType="primFontSz" refFor="des" refForName="Parent" op="lte"/>
+              <dgm:constr type="primFontSz" for="des" forName="Child3" refType="primFontSz" refFor="des" refForName="Parent" op="lte"/>
+              <dgm:constr type="primFontSz" for="des" forName="Child4" refType="primFontSz" refFor="des" refForName="Parent" op="lte"/>
+              <dgm:constr type="primFontSz" for="des" forName="Child5" refType="primFontSz" refFor="des" refForName="Parent" op="lte"/>
+              <dgm:constr type="primFontSz" for="des" forName="Child2" refType="primFontSz" refFor="des" refForName="Child1" op="equ"/>
+              <dgm:constr type="primFontSz" for="des" forName="Child3" refType="primFontSz" refFor="des" refForName="Child1" op="equ"/>
+              <dgm:constr type="primFontSz" for="des" forName="Child4" refType="primFontSz" refFor="des" refForName="Child1" op="equ"/>
+              <dgm:constr type="primFontSz" for="des" forName="Child5" refType="primFontSz" refFor="des" refForName="Child1" op="equ"/>
+              <dgm:constr type="r" for="ch" forName="Accent5" refType="w" fact="0.7142"/>
+              <dgm:constr type="t" for="ch" forName="Accent5" refType="h" fact="0.7126"/>
+              <dgm:constr type="w" for="ch" forName="Accent5" refType="w" fact="0.1622"/>
+              <dgm:constr type="h" for="ch" forName="Accent5" refType="h" fact="0.1333"/>
+              <dgm:constr type="r" for="ch" forName="Accent4" refType="w" fact="0.388"/>
+              <dgm:constr type="t" for="ch" forName="Accent4" refType="h" fact="0.6834"/>
+              <dgm:constr type="w" for="ch" forName="Accent4" refType="w" fact="0.1622"/>
+              <dgm:constr type="h" for="ch" forName="Accent4" refType="h" fact="0.1333"/>
+              <dgm:constr type="r" for="ch" forName="Accent3" refType="w" fact="0.2565"/>
+              <dgm:constr type="t" for="ch" forName="Accent3" refType="h" fact="0.4021"/>
+              <dgm:constr type="w" for="ch" forName="Accent3" refType="w" fact="0.1622"/>
+              <dgm:constr type="h" for="ch" forName="Accent3" refType="h" fact="0.1333"/>
+              <dgm:constr type="r" for="ch" forName="Accent2" refType="w" fact="0.4458"/>
+              <dgm:constr type="t" for="ch" forName="Accent2" refType="h" fact="0.1529"/>
+              <dgm:constr type="w" for="ch" forName="Accent2" refType="w" fact="0.1622"/>
+              <dgm:constr type="h" for="ch" forName="Accent2" refType="h" fact="0.1333"/>
+              <dgm:constr type="r" for="ch" forName="Accent1" refType="w" fact="0"/>
+              <dgm:constr type="t" for="ch" forName="Accent1" refType="h" fact="0"/>
+              <dgm:constr type="w" for="ch" forName="Accent1" refType="w" fact="0"/>
+              <dgm:constr type="h" for="ch" forName="Accent1" refType="h" fact="0"/>
+              <dgm:constr type="r" for="ch" forName="Child4" refType="w" fact="0.6754"/>
+              <dgm:constr type="t" for="ch" forName="Child4" refType="h" fact="0.7093"/>
+              <dgm:constr type="w" for="ch" forName="Child4" refType="w" fact="0.3523"/>
+              <dgm:constr type="h" for="ch" forName="Child4" refType="h" fact="0.2907"/>
+              <dgm:constr type="r" for="ch" forName="Parent" refType="w" fact="0.715"/>
+              <dgm:constr type="t" for="ch" forName="Parent" refType="h" fact="0.3226"/>
+              <dgm:constr type="w" for="ch" forName="Parent" refType="w" fact="0.4299"/>
+              <dgm:constr type="h" for="ch" forName="Parent" refType="h" fact="0.3547"/>
+              <dgm:constr type="r" for="ch" forName="Child2" refType="w" fact="0.3523"/>
+              <dgm:constr type="t" for="ch" forName="Child2" refType="h" fact="0.1788"/>
+              <dgm:constr type="w" for="ch" forName="Child2" refType="w" fact="0.3523"/>
+              <dgm:constr type="h" for="ch" forName="Child2" refType="h" fact="0.2907"/>
+              <dgm:constr type="r" for="ch" forName="Child3" refType="w" fact="0.3523"/>
+              <dgm:constr type="t" for="ch" forName="Child3" refType="h" fact="0.5303"/>
+              <dgm:constr type="w" for="ch" forName="Child3" refType="w" fact="0.3523"/>
+              <dgm:constr type="h" for="ch" forName="Child3" refType="h" fact="0.2907"/>
+              <dgm:constr type="r" for="ch" forName="Child5" refType="w"/>
+              <dgm:constr type="t" for="ch" forName="Child5" refType="h" fact="0.5305"/>
+              <dgm:constr type="w" for="ch" forName="Child5" refType="w" fact="0.3523"/>
+              <dgm:constr type="h" for="ch" forName="Child5" refType="h" fact="0.2907"/>
+              <dgm:constr type="r" for="ch" forName="Child1" refType="w" fact="0.6754"/>
+              <dgm:constr type="t" for="ch" forName="Child1" refType="h" fact="0"/>
+              <dgm:constr type="w" for="ch" forName="Child1" refType="w" fact="0.3523"/>
+              <dgm:constr type="h" for="ch" forName="Child1" refType="h" fact="0.2907"/>
+            </dgm:constrLst>
+          </dgm:if>
+          <dgm:else name="Name19">
+            <dgm:alg type="composite">
+              <dgm:param type="ar" val="0.9538"/>
+            </dgm:alg>
+            <dgm:constrLst>
+              <dgm:constr type="primFontSz" for="des" forName="Parent" val="65"/>
+              <dgm:constr type="primFontSz" for="des" forName="Child1" val="65"/>
+              <dgm:constr type="primFontSz" for="des" forName="Child1" refType="primFontSz" refFor="des" refForName="Parent" op="lte"/>
+              <dgm:constr type="primFontSz" for="des" forName="Child2" refType="primFontSz" refFor="des" refForName="Parent" op="lte"/>
+              <dgm:constr type="primFontSz" for="des" forName="Child3" refType="primFontSz" refFor="des" refForName="Parent" op="lte"/>
+              <dgm:constr type="primFontSz" for="des" forName="Child4" refType="primFontSz" refFor="des" refForName="Parent" op="lte"/>
+              <dgm:constr type="primFontSz" for="des" forName="Child5" refType="primFontSz" refFor="des" refForName="Parent" op="lte"/>
+              <dgm:constr type="primFontSz" for="des" forName="Child6" refType="primFontSz" refFor="des" refForName="Parent" op="lte"/>
+              <dgm:constr type="primFontSz" for="des" forName="Child7" refType="primFontSz" refFor="des" refForName="Parent" op="lte"/>
+              <dgm:constr type="primFontSz" for="des" forName="Child2" refType="primFontSz" refFor="des" refForName="Child1" op="equ"/>
+              <dgm:constr type="primFontSz" for="des" forName="Child3" refType="primFontSz" refFor="des" refForName="Child1" op="equ"/>
+              <dgm:constr type="primFontSz" for="des" forName="Child4" refType="primFontSz" refFor="des" refForName="Child1" op="equ"/>
+              <dgm:constr type="primFontSz" for="des" forName="Child5" refType="primFontSz" refFor="des" refForName="Child1" op="equ"/>
+              <dgm:constr type="primFontSz" for="des" forName="Child6" refType="primFontSz" refFor="des" refForName="Child1" op="equ"/>
+              <dgm:constr type="primFontSz" for="des" forName="Child7" refType="primFontSz" refFor="des" refForName="Child1" op="equ"/>
+              <dgm:constr type="primFontSz" for="des" ptType="node" op="equ" val="65"/>
+              <dgm:constr type="r" for="ch" forName="Accent6" refType="w" fact="0.9066"/>
+              <dgm:constr type="t" for="ch" forName="Accent6" refType="h" fact="0.4635"/>
+              <dgm:constr type="w" for="ch" forName="Accent6" refType="w" fact="0.1622"/>
+              <dgm:constr type="h" for="ch" forName="Accent6" refType="h" fact="0.1333"/>
+              <dgm:constr type="r" for="ch" forName="Accent5" refType="w" fact="0.7142"/>
+              <dgm:constr type="t" for="ch" forName="Accent5" refType="h" fact="0.7126"/>
+              <dgm:constr type="w" for="ch" forName="Accent5" refType="w" fact="0.1622"/>
+              <dgm:constr type="h" for="ch" forName="Accent5" refType="h" fact="0.1333"/>
+              <dgm:constr type="r" for="ch" forName="Accent4" refType="w" fact="0.388"/>
+              <dgm:constr type="t" for="ch" forName="Accent4" refType="h" fact="0.6834"/>
+              <dgm:constr type="w" for="ch" forName="Accent4" refType="w" fact="0.1622"/>
+              <dgm:constr type="h" for="ch" forName="Accent4" refType="h" fact="0.1333"/>
+              <dgm:constr type="r" for="ch" forName="Accent3" refType="w" fact="0.2565"/>
+              <dgm:constr type="t" for="ch" forName="Accent3" refType="h" fact="0.4021"/>
+              <dgm:constr type="w" for="ch" forName="Accent3" refType="w" fact="0.1622"/>
+              <dgm:constr type="h" for="ch" forName="Accent3" refType="h" fact="0.1333"/>
+              <dgm:constr type="r" for="ch" forName="Accent2" refType="w" fact="0.4458"/>
+              <dgm:constr type="t" for="ch" forName="Accent2" refType="h" fact="0.1529"/>
+              <dgm:constr type="w" for="ch" forName="Accent2" refType="w" fact="0.1622"/>
+              <dgm:constr type="h" for="ch" forName="Accent2" refType="h" fact="0.1333"/>
+              <dgm:constr type="r" for="ch" forName="Accent1" refType="w" fact="0"/>
+              <dgm:constr type="t" for="ch" forName="Accent1" refType="h" fact="0"/>
+              <dgm:constr type="w" for="ch" forName="Accent1" refType="w" fact="0"/>
+              <dgm:constr type="h" for="ch" forName="Accent1" refType="h" fact="0"/>
+              <dgm:constr type="r" for="ch" forName="Child4" refType="w" fact="0.6754"/>
+              <dgm:constr type="t" for="ch" forName="Child4" refType="h" fact="0.7093"/>
+              <dgm:constr type="w" for="ch" forName="Child4" refType="w" fact="0.3523"/>
+              <dgm:constr type="h" for="ch" forName="Child4" refType="h" fact="0.2907"/>
+              <dgm:constr type="r" for="ch" forName="Parent" refType="w" fact="0.715"/>
+              <dgm:constr type="t" for="ch" forName="Parent" refType="h" fact="0.3226"/>
+              <dgm:constr type="w" for="ch" forName="Parent" refType="w" fact="0.4299"/>
+              <dgm:constr type="h" for="ch" forName="Parent" refType="h" fact="0.3547"/>
+              <dgm:constr type="r" for="ch" forName="Child2" refType="w" fact="0.3523"/>
+              <dgm:constr type="t" for="ch" forName="Child2" refType="h" fact="0.1788"/>
+              <dgm:constr type="w" for="ch" forName="Child2" refType="w" fact="0.3523"/>
+              <dgm:constr type="h" for="ch" forName="Child2" refType="h" fact="0.2907"/>
+              <dgm:constr type="r" for="ch" forName="Child3" refType="w" fact="0.3523"/>
+              <dgm:constr type="t" for="ch" forName="Child3" refType="h" fact="0.5303"/>
+              <dgm:constr type="w" for="ch" forName="Child3" refType="w" fact="0.3523"/>
+              <dgm:constr type="h" for="ch" forName="Child3" refType="h" fact="0.2907"/>
+              <dgm:constr type="r" for="ch" forName="Child5" refType="w"/>
+              <dgm:constr type="t" for="ch" forName="Child5" refType="h" fact="0.5305"/>
+              <dgm:constr type="w" for="ch" forName="Child5" refType="w" fact="0.3523"/>
+              <dgm:constr type="h" for="ch" forName="Child5" refType="h" fact="0.2907"/>
+              <dgm:constr type="r" for="ch" forName="Child6" refType="w"/>
+              <dgm:constr type="t" for="ch" forName="Child6" refType="h" fact="0.1784"/>
+              <dgm:constr type="w" for="ch" forName="Child6" refType="w" fact="0.3523"/>
+              <dgm:constr type="h" for="ch" forName="Child6" refType="h" fact="0.2907"/>
+              <dgm:constr type="r" for="ch" forName="Child1" refType="w" fact="0.6754"/>
+              <dgm:constr type="t" for="ch" forName="Child1" refType="h" fact="0"/>
+              <dgm:constr type="w" for="ch" forName="Child1" refType="w" fact="0.3523"/>
+              <dgm:constr type="h" for="ch" forName="Child1" refType="h" fact="0.2907"/>
+            </dgm:constrLst>
+          </dgm:else>
+        </dgm:choose>
+      </dgm:else>
+    </dgm:choose>
+    <dgm:forEach name="wrapper" axis="self" ptType="parTrans">
+      <dgm:forEach name="accentRepeat" axis="self">
+        <dgm:layoutNode name="Accent" styleLbl="bgShp">
+          <dgm:alg type="sp"/>
+          <dgm:shape xmlns:r="http://schemas.openxmlformats.org/officeDocument/2006/relationships" type="hexagon" r:blip="" zOrderOff="-2">
+            <dgm:adjLst>
+              <dgm:adj idx="1" val="0.289"/>
+              <dgm:adj idx="2" val="1.1547"/>
+            </dgm:adjLst>
+          </dgm:shape>
+          <dgm:presOf/>
+        </dgm:layoutNode>
+      </dgm:forEach>
+    </dgm:forEach>
+    <dgm:forEach name="Name20" axis="ch" ptType="node" cnt="1">
+      <dgm:layoutNode name="Parent" styleLbl="node0">
+        <dgm:varLst>
+          <dgm:chMax val="6"/>
+          <dgm:chPref val="6"/>
+        </dgm:varLst>
+        <dgm:alg type="tx"/>
+        <dgm:shape xmlns:r="http://schemas.openxmlformats.org/officeDocument/2006/relationships" type="hexagon" r:blip="">
+          <dgm:adjLst>
+            <dgm:adj idx="1" val="0.2857"/>
+            <dgm:adj idx="2" val="1.1547"/>
+          </dgm:adjLst>
+        </dgm:shape>
+        <dgm:presOf axis="self"/>
+        <dgm:constrLst>
+          <dgm:constr type="lMarg" refType="primFontSz" fact="0.1"/>
+          <dgm:constr type="rMarg" refType="primFontSz" fact="0.1"/>
+          <dgm:constr type="tMarg" refType="primFontSz" fact="0.1"/>
+          <dgm:constr type="bMarg" refType="primFontSz" fact="0.1"/>
+        </dgm:constrLst>
+        <dgm:ruleLst>
+          <dgm:rule type="primFontSz" val="5" fact="NaN" max="NaN"/>
+        </dgm:ruleLst>
+      </dgm:layoutNode>
+    </dgm:forEach>
+    <dgm:forEach name="Name21" axis="ch ch" ptType="node node" st="1 1" cnt="1 1">
+      <dgm:layoutNode name="Accent1">
+        <dgm:alg type="sp"/>
+        <dgm:shape xmlns:r="http://schemas.openxmlformats.org/officeDocument/2006/relationships" r:blip="" zOrderOff="-2">
+          <dgm:adjLst/>
+        </dgm:shape>
+        <dgm:presOf/>
+        <dgm:constrLst/>
+        <dgm:forEach name="Name22" ref="accentRepeat"/>
+      </dgm:layoutNode>
+      <dgm:layoutNode name="Child1" styleLbl="node1">
+        <dgm:varLst>
+          <dgm:chMax val="0"/>
+          <dgm:chPref val="0"/>
+          <dgm:bulletEnabled val="1"/>
+        </dgm:varLst>
+        <dgm:alg type="tx">
+          <dgm:param type="shpTxLTRAlignCh" val="ctr"/>
+          <dgm:param type="txAnchorVertCh" val="mid"/>
+        </dgm:alg>
+        <dgm:shape xmlns:r="http://schemas.openxmlformats.org/officeDocument/2006/relationships" type="hexagon" r:blip="">
+          <dgm:adjLst>
+            <dgm:adj idx="1" val="0.2857"/>
+            <dgm:adj idx="2" val="1.1547"/>
+          </dgm:adjLst>
+        </dgm:shape>
+        <dgm:presOf axis="desOrSelf" ptType="node"/>
+        <dgm:constrLst>
+          <dgm:constr type="lMarg" refType="primFontSz" fact="0.1"/>
+          <dgm:constr type="rMarg" refType="primFontSz" fact="0.1"/>
+          <dgm:constr type="tMarg" refType="primFontSz" fact="0.1"/>
+          <dgm:constr type="bMarg" refType="primFontSz" fact="0.1"/>
+        </dgm:constrLst>
+        <dgm:ruleLst>
+          <dgm:rule type="primFontSz" val="5" fact="NaN" max="NaN"/>
+        </dgm:ruleLst>
+      </dgm:layoutNode>
+    </dgm:forEach>
+    <dgm:forEach name="Name23" axis="ch ch" ptType="node node" st="1 2" cnt="1 1">
+      <dgm:layoutNode name="Accent2">
+        <dgm:alg type="sp"/>
+        <dgm:shape xmlns:r="http://schemas.openxmlformats.org/officeDocument/2006/relationships" r:blip="" zOrderOff="-2">
+          <dgm:adjLst/>
+        </dgm:shape>
+        <dgm:presOf/>
+        <dgm:constrLst/>
+        <dgm:forEach name="Name24" ref="accentRepeat"/>
+      </dgm:layoutNode>
+      <dgm:layoutNode name="Child2" styleLbl="node1">
+        <dgm:varLst>
+          <dgm:chMax val="0"/>
+          <dgm:chPref val="0"/>
+          <dgm:bulletEnabled val="1"/>
+        </dgm:varLst>
+        <dgm:alg type="tx">
+          <dgm:param type="shpTxLTRAlignCh" val="ctr"/>
+          <dgm:param type="txAnchorVertCh" val="mid"/>
+        </dgm:alg>
+        <dgm:shape xmlns:r="http://schemas.openxmlformats.org/officeDocument/2006/relationships" type="hexagon" r:blip="">
+          <dgm:adjLst>
+            <dgm:adj idx="1" val="0.2857"/>
+            <dgm:adj idx="2" val="1.1547"/>
+          </dgm:adjLst>
+        </dgm:shape>
+        <dgm:presOf axis="desOrSelf" ptType="node"/>
+        <dgm:constrLst>
+          <dgm:constr type="lMarg" refType="primFontSz" fact="0.1"/>
+          <dgm:constr type="rMarg" refType="primFontSz" fact="0.1"/>
+          <dgm:constr type="tMarg" refType="primFontSz" fact="0.1"/>
+          <dgm:constr type="bMarg" refType="primFontSz" fact="0.1"/>
+        </dgm:constrLst>
+        <dgm:ruleLst>
+          <dgm:rule type="primFontSz" val="5" fact="NaN" max="NaN"/>
+        </dgm:ruleLst>
+      </dgm:layoutNode>
+    </dgm:forEach>
+    <dgm:forEach name="Name25" axis="ch ch" ptType="node node" st="1 3" cnt="1 1">
+      <dgm:layoutNode name="Accent3">
+        <dgm:alg type="sp"/>
+        <dgm:shape xmlns:r="http://schemas.openxmlformats.org/officeDocument/2006/relationships" r:blip="" zOrderOff="-2">
+          <dgm:adjLst/>
+        </dgm:shape>
+        <dgm:presOf/>
+        <dgm:constrLst/>
+        <dgm:forEach name="Name26" ref="accentRepeat"/>
+      </dgm:layoutNode>
+      <dgm:layoutNode name="Child3" styleLbl="node1">
+        <dgm:varLst>
+          <dgm:chMax val="0"/>
+          <dgm:chPref val="0"/>
+          <dgm:bulletEnabled val="1"/>
+        </dgm:varLst>
+        <dgm:alg type="tx">
+          <dgm:param type="shpTxLTRAlignCh" val="ctr"/>
+          <dgm:param type="txAnchorVertCh" val="mid"/>
+        </dgm:alg>
+        <dgm:shape xmlns:r="http://schemas.openxmlformats.org/officeDocument/2006/relationships" type="hexagon" r:blip="">
+          <dgm:adjLst>
+            <dgm:adj idx="1" val="0.2857"/>
+            <dgm:adj idx="2" val="1.1547"/>
+          </dgm:adjLst>
+        </dgm:shape>
+        <dgm:presOf axis="desOrSelf" ptType="node"/>
+        <dgm:constrLst>
+          <dgm:constr type="lMarg" refType="primFontSz" fact="0.1"/>
+          <dgm:constr type="rMarg" refType="primFontSz" fact="0.1"/>
+          <dgm:constr type="tMarg" refType="primFontSz" fact="0.1"/>
+          <dgm:constr type="bMarg" refType="primFontSz" fact="0.1"/>
+        </dgm:constrLst>
+        <dgm:ruleLst>
+          <dgm:rule type="primFontSz" val="5" fact="NaN" max="NaN"/>
+        </dgm:ruleLst>
+      </dgm:layoutNode>
+    </dgm:forEach>
+    <dgm:forEach name="Name27" axis="ch ch" ptType="node node" st="1 4" cnt="1 1">
+      <dgm:layoutNode name="Accent4">
+        <dgm:alg type="sp"/>
+        <dgm:shape xmlns:r="http://schemas.openxmlformats.org/officeDocument/2006/relationships" r:blip="">
+          <dgm:adjLst/>
+        </dgm:shape>
+        <dgm:presOf/>
+        <dgm:constrLst/>
+        <dgm:forEach name="Name28" ref="accentRepeat"/>
+      </dgm:layoutNode>
+      <dgm:layoutNode name="Child4" styleLbl="node1">
+        <dgm:varLst>
+          <dgm:chMax val="0"/>
+          <dgm:chPref val="0"/>
+          <dgm:bulletEnabled val="1"/>
+        </dgm:varLst>
+        <dgm:alg type="tx">
+          <dgm:param type="shpTxLTRAlignCh" val="ctr"/>
+          <dgm:param type="txAnchorVertCh" val="mid"/>
+        </dgm:alg>
+        <dgm:shape xmlns:r="http://schemas.openxmlformats.org/officeDocument/2006/relationships" type="hexagon" r:blip="">
+          <dgm:adjLst>
+            <dgm:adj idx="1" val="0.2857"/>
+            <dgm:adj idx="2" val="1.1547"/>
+          </dgm:adjLst>
+        </dgm:shape>
+        <dgm:presOf axis="desOrSelf" ptType="node"/>
+        <dgm:constrLst>
+          <dgm:constr type="lMarg" refType="primFontSz" fact="0.1"/>
+          <dgm:constr type="rMarg" refType="primFontSz" fact="0.1"/>
+          <dgm:constr type="tMarg" refType="primFontSz" fact="0.1"/>
+          <dgm:constr type="bMarg" refType="primFontSz" fact="0.1"/>
+        </dgm:constrLst>
+        <dgm:ruleLst>
+          <dgm:rule type="primFontSz" val="5" fact="NaN" max="NaN"/>
+        </dgm:ruleLst>
+      </dgm:layoutNode>
+    </dgm:forEach>
+    <dgm:forEach name="Name29" axis="ch ch" ptType="node node" st="1 5" cnt="1 1">
+      <dgm:layoutNode name="Accent5">
+        <dgm:alg type="sp"/>
+        <dgm:shape xmlns:r="http://schemas.openxmlformats.org/officeDocument/2006/relationships" r:blip="">
+          <dgm:adjLst/>
+        </dgm:shape>
+        <dgm:presOf/>
+        <dgm:constrLst/>
+        <dgm:forEach name="Name30" ref="accentRepeat"/>
+      </dgm:layoutNode>
+      <dgm:layoutNode name="Child5" styleLbl="node1">
+        <dgm:varLst>
+          <dgm:chMax val="0"/>
+          <dgm:chPref val="0"/>
+          <dgm:bulletEnabled val="1"/>
+        </dgm:varLst>
+        <dgm:alg type="tx">
+          <dgm:param type="shpTxLTRAlignCh" val="ctr"/>
+          <dgm:param type="txAnchorVertCh" val="mid"/>
+        </dgm:alg>
+        <dgm:shape xmlns:r="http://schemas.openxmlformats.org/officeDocument/2006/relationships" type="hexagon" r:blip="">
+          <dgm:adjLst>
+            <dgm:adj idx="1" val="0.2857"/>
+            <dgm:adj idx="2" val="1.1547"/>
+          </dgm:adjLst>
+        </dgm:shape>
+        <dgm:presOf axis="desOrSelf" ptType="node"/>
+        <dgm:constrLst>
+          <dgm:constr type="lMarg" refType="primFontSz" fact="0.1"/>
+          <dgm:constr type="rMarg" refType="primFontSz" fact="0.1"/>
+          <dgm:constr type="tMarg" refType="primFontSz" fact="0.1"/>
+          <dgm:constr type="bMarg" refType="primFontSz" fact="0.1"/>
+        </dgm:constrLst>
+        <dgm:ruleLst>
+          <dgm:rule type="primFontSz" val="5" fact="NaN" max="NaN"/>
+        </dgm:ruleLst>
+      </dgm:layoutNode>
+    </dgm:forEach>
+    <dgm:forEach name="Name31" axis="ch ch" ptType="node node" st="1 6" cnt="1 1">
+      <dgm:layoutNode name="Accent6">
+        <dgm:alg type="sp"/>
+        <dgm:shape xmlns:r="http://schemas.openxmlformats.org/officeDocument/2006/relationships" r:blip="">
+          <dgm:adjLst/>
+        </dgm:shape>
+        <dgm:presOf/>
+        <dgm:constrLst/>
+        <dgm:forEach name="Name32" ref="accentRepeat"/>
+      </dgm:layoutNode>
+      <dgm:layoutNode name="Child6" styleLbl="node1">
+        <dgm:varLst>
+          <dgm:chMax val="0"/>
+          <dgm:chPref val="0"/>
+          <dgm:bulletEnabled val="1"/>
+        </dgm:varLst>
+        <dgm:alg type="tx">
+          <dgm:param type="shpTxLTRAlignCh" val="ctr"/>
+          <dgm:param type="txAnchorVertCh" val="mid"/>
+        </dgm:alg>
+        <dgm:shape xmlns:r="http://schemas.openxmlformats.org/officeDocument/2006/relationships" type="hexagon" r:blip="">
+          <dgm:adjLst>
+            <dgm:adj idx="1" val="0.2857"/>
+            <dgm:adj idx="2" val="1.1547"/>
+          </dgm:adjLst>
+        </dgm:shape>
+        <dgm:presOf axis="desOrSelf" ptType="node"/>
+        <dgm:constrLst>
+          <dgm:constr type="lMarg" refType="primFontSz" fact="0.1"/>
+          <dgm:constr type="rMarg" refType="primFontSz" fact="0.1"/>
+          <dgm:constr type="tMarg" refType="primFontSz" fact="0.1"/>
+          <dgm:constr type="bMarg" refType="primFontSz" fact="0.1"/>
+        </dgm:constrLst>
+        <dgm:ruleLst>
+          <dgm:rule type="primFontSz" val="5" fact="NaN" max="NaN"/>
+        </dgm:ruleLst>
+      </dgm:layoutNode>
+    </dgm:forEach>
+  </dgm:layoutNode>
+</dgm:layoutDef>
+</file>
+
+<file path=ppt/diagrams/layout2.xml><?xml version="1.0" encoding="utf-8"?>
 <dgm:layoutDef xmlns:dgm="http://schemas.openxmlformats.org/drawingml/2006/diagram" xmlns:a="http://schemas.openxmlformats.org/drawingml/2006/main" uniqueId="urn:microsoft.com/office/officeart/2005/8/layout/hProcess9">
   <dgm:title val=""/>
   <dgm:desc val=""/>
@@ -2678,6 +5668,1040 @@
 </dgm:styleDef>
 </file>
 
+<file path=ppt/diagrams/quickStyle2.xml><?xml version="1.0" encoding="utf-8"?>
+<dgm:styleDef xmlns:dgm="http://schemas.openxmlformats.org/drawingml/2006/diagram" xmlns:a="http://schemas.openxmlformats.org/drawingml/2006/main" uniqueId="urn:microsoft.com/office/officeart/2005/8/quickstyle/simple1">
+  <dgm:title val=""/>
+  <dgm:desc val=""/>
+  <dgm:catLst>
+    <dgm:cat type="simple" pri="10100"/>
+  </dgm:catLst>
+  <dgm:scene3d>
+    <a:camera prst="orthographicFront"/>
+    <a:lightRig rig="threePt" dir="t"/>
+  </dgm:scene3d>
+  <dgm:styleLbl name="node0">
+    <dgm:scene3d>
+      <a:camera prst="orthographicFront"/>
+      <a:lightRig rig="threePt" dir="t"/>
+    </dgm:scene3d>
+    <dgm:sp3d/>
+    <dgm:txPr/>
+    <dgm:style>
+      <a:lnRef idx="2">
+        <a:scrgbClr r="0" g="0" b="0"/>
+      </a:lnRef>
+      <a:fillRef idx="1">
+        <a:scrgbClr r="0" g="0" b="0"/>
+      </a:fillRef>
+      <a:effectRef idx="0">
+        <a:scrgbClr r="0" g="0" b="0"/>
+      </a:effectRef>
+      <a:fontRef idx="minor">
+        <a:schemeClr val="lt1"/>
+      </a:fontRef>
+    </dgm:style>
+  </dgm:styleLbl>
+  <dgm:styleLbl name="lnNode1">
+    <dgm:scene3d>
+      <a:camera prst="orthographicFront"/>
+      <a:lightRig rig="threePt" dir="t"/>
+    </dgm:scene3d>
+    <dgm:sp3d/>
+    <dgm:txPr/>
+    <dgm:style>
+      <a:lnRef idx="2">
+        <a:scrgbClr r="0" g="0" b="0"/>
+      </a:lnRef>
+      <a:fillRef idx="1">
+        <a:scrgbClr r="0" g="0" b="0"/>
+      </a:fillRef>
+      <a:effectRef idx="0">
+        <a:scrgbClr r="0" g="0" b="0"/>
+      </a:effectRef>
+      <a:fontRef idx="minor">
+        <a:schemeClr val="lt1"/>
+      </a:fontRef>
+    </dgm:style>
+  </dgm:styleLbl>
+  <dgm:styleLbl name="vennNode1">
+    <dgm:scene3d>
+      <a:camera prst="orthographicFront"/>
+      <a:lightRig rig="threePt" dir="t"/>
+    </dgm:scene3d>
+    <dgm:sp3d/>
+    <dgm:txPr/>
+    <dgm:style>
+      <a:lnRef idx="2">
+        <a:scrgbClr r="0" g="0" b="0"/>
+      </a:lnRef>
+      <a:fillRef idx="1">
+        <a:scrgbClr r="0" g="0" b="0"/>
+      </a:fillRef>
+      <a:effectRef idx="0">
+        <a:scrgbClr r="0" g="0" b="0"/>
+      </a:effectRef>
+      <a:fontRef idx="minor">
+        <a:schemeClr val="tx1"/>
+      </a:fontRef>
+    </dgm:style>
+  </dgm:styleLbl>
+  <dgm:styleLbl name="alignNode1">
+    <dgm:scene3d>
+      <a:camera prst="orthographicFront"/>
+      <a:lightRig rig="threePt" dir="t"/>
+    </dgm:scene3d>
+    <dgm:sp3d/>
+    <dgm:txPr/>
+    <dgm:style>
+      <a:lnRef idx="2">
+        <a:scrgbClr r="0" g="0" b="0"/>
+      </a:lnRef>
+      <a:fillRef idx="1">
+        <a:scrgbClr r="0" g="0" b="0"/>
+      </a:fillRef>
+      <a:effectRef idx="0">
+        <a:scrgbClr r="0" g="0" b="0"/>
+      </a:effectRef>
+      <a:fontRef idx="minor">
+        <a:schemeClr val="lt1"/>
+      </a:fontRef>
+    </dgm:style>
+  </dgm:styleLbl>
+  <dgm:styleLbl name="node1">
+    <dgm:scene3d>
+      <a:camera prst="orthographicFront"/>
+      <a:lightRig rig="threePt" dir="t"/>
+    </dgm:scene3d>
+    <dgm:sp3d/>
+    <dgm:txPr/>
+    <dgm:style>
+      <a:lnRef idx="2">
+        <a:scrgbClr r="0" g="0" b="0"/>
+      </a:lnRef>
+      <a:fillRef idx="1">
+        <a:scrgbClr r="0" g="0" b="0"/>
+      </a:fillRef>
+      <a:effectRef idx="0">
+        <a:scrgbClr r="0" g="0" b="0"/>
+      </a:effectRef>
+      <a:fontRef idx="minor">
+        <a:schemeClr val="lt1"/>
+      </a:fontRef>
+    </dgm:style>
+  </dgm:styleLbl>
+  <dgm:styleLbl name="node2">
+    <dgm:scene3d>
+      <a:camera prst="orthographicFront"/>
+      <a:lightRig rig="threePt" dir="t"/>
+    </dgm:scene3d>
+    <dgm:sp3d/>
+    <dgm:txPr/>
+    <dgm:style>
+      <a:lnRef idx="2">
+        <a:scrgbClr r="0" g="0" b="0"/>
+      </a:lnRef>
+      <a:fillRef idx="1">
+        <a:scrgbClr r="0" g="0" b="0"/>
+      </a:fillRef>
+      <a:effectRef idx="0">
+        <a:scrgbClr r="0" g="0" b="0"/>
+      </a:effectRef>
+      <a:fontRef idx="minor">
+        <a:schemeClr val="lt1"/>
+      </a:fontRef>
+    </dgm:style>
+  </dgm:styleLbl>
+  <dgm:styleLbl name="node3">
+    <dgm:scene3d>
+      <a:camera prst="orthographicFront"/>
+      <a:lightRig rig="threePt" dir="t"/>
+    </dgm:scene3d>
+    <dgm:sp3d/>
+    <dgm:txPr/>
+    <dgm:style>
+      <a:lnRef idx="2">
+        <a:scrgbClr r="0" g="0" b="0"/>
+      </a:lnRef>
+      <a:fillRef idx="1">
+        <a:scrgbClr r="0" g="0" b="0"/>
+      </a:fillRef>
+      <a:effectRef idx="0">
+        <a:scrgbClr r="0" g="0" b="0"/>
+      </a:effectRef>
+      <a:fontRef idx="minor">
+        <a:schemeClr val="lt1"/>
+      </a:fontRef>
+    </dgm:style>
+  </dgm:styleLbl>
+  <dgm:styleLbl name="node4">
+    <dgm:scene3d>
+      <a:camera prst="orthographicFront"/>
+      <a:lightRig rig="threePt" dir="t"/>
+    </dgm:scene3d>
+    <dgm:sp3d/>
+    <dgm:txPr/>
+    <dgm:style>
+      <a:lnRef idx="2">
+        <a:scrgbClr r="0" g="0" b="0"/>
+      </a:lnRef>
+      <a:fillRef idx="1">
+        <a:scrgbClr r="0" g="0" b="0"/>
+      </a:fillRef>
+      <a:effectRef idx="0">
+        <a:scrgbClr r="0" g="0" b="0"/>
+      </a:effectRef>
+      <a:fontRef idx="minor">
+        <a:schemeClr val="lt1"/>
+      </a:fontRef>
+    </dgm:style>
+  </dgm:styleLbl>
+  <dgm:styleLbl name="fgImgPlace1">
+    <dgm:scene3d>
+      <a:camera prst="orthographicFront"/>
+      <a:lightRig rig="threePt" dir="t"/>
+    </dgm:scene3d>
+    <dgm:sp3d/>
+    <dgm:txPr/>
+    <dgm:style>
+      <a:lnRef idx="2">
+        <a:scrgbClr r="0" g="0" b="0"/>
+      </a:lnRef>
+      <a:fillRef idx="1">
+        <a:scrgbClr r="0" g="0" b="0"/>
+      </a:fillRef>
+      <a:effectRef idx="0">
+        <a:scrgbClr r="0" g="0" b="0"/>
+      </a:effectRef>
+      <a:fontRef idx="minor"/>
+    </dgm:style>
+  </dgm:styleLbl>
+  <dgm:styleLbl name="alignImgPlace1">
+    <dgm:scene3d>
+      <a:camera prst="orthographicFront"/>
+      <a:lightRig rig="threePt" dir="t"/>
+    </dgm:scene3d>
+    <dgm:sp3d/>
+    <dgm:txPr/>
+    <dgm:style>
+      <a:lnRef idx="2">
+        <a:scrgbClr r="0" g="0" b="0"/>
+      </a:lnRef>
+      <a:fillRef idx="1">
+        <a:scrgbClr r="0" g="0" b="0"/>
+      </a:fillRef>
+      <a:effectRef idx="0">
+        <a:scrgbClr r="0" g="0" b="0"/>
+      </a:effectRef>
+      <a:fontRef idx="minor"/>
+    </dgm:style>
+  </dgm:styleLbl>
+  <dgm:styleLbl name="bgImgPlace1">
+    <dgm:scene3d>
+      <a:camera prst="orthographicFront"/>
+      <a:lightRig rig="threePt" dir="t"/>
+    </dgm:scene3d>
+    <dgm:sp3d/>
+    <dgm:txPr/>
+    <dgm:style>
+      <a:lnRef idx="2">
+        <a:scrgbClr r="0" g="0" b="0"/>
+      </a:lnRef>
+      <a:fillRef idx="1">
+        <a:scrgbClr r="0" g="0" b="0"/>
+      </a:fillRef>
+      <a:effectRef idx="0">
+        <a:scrgbClr r="0" g="0" b="0"/>
+      </a:effectRef>
+      <a:fontRef idx="minor"/>
+    </dgm:style>
+  </dgm:styleLbl>
+  <dgm:styleLbl name="sibTrans2D1">
+    <dgm:scene3d>
+      <a:camera prst="orthographicFront"/>
+      <a:lightRig rig="threePt" dir="t"/>
+    </dgm:scene3d>
+    <dgm:sp3d/>
+    <dgm:txPr/>
+    <dgm:style>
+      <a:lnRef idx="0">
+        <a:scrgbClr r="0" g="0" b="0"/>
+      </a:lnRef>
+      <a:fillRef idx="1">
+        <a:scrgbClr r="0" g="0" b="0"/>
+      </a:fillRef>
+      <a:effectRef idx="0">
+        <a:scrgbClr r="0" g="0" b="0"/>
+      </a:effectRef>
+      <a:fontRef idx="minor">
+        <a:schemeClr val="lt1"/>
+      </a:fontRef>
+    </dgm:style>
+  </dgm:styleLbl>
+  <dgm:styleLbl name="fgSibTrans2D1">
+    <dgm:scene3d>
+      <a:camera prst="orthographicFront"/>
+      <a:lightRig rig="threePt" dir="t"/>
+    </dgm:scene3d>
+    <dgm:sp3d/>
+    <dgm:txPr/>
+    <dgm:style>
+      <a:lnRef idx="0">
+        <a:scrgbClr r="0" g="0" b="0"/>
+      </a:lnRef>
+      <a:fillRef idx="1">
+        <a:scrgbClr r="0" g="0" b="0"/>
+      </a:fillRef>
+      <a:effectRef idx="0">
+        <a:scrgbClr r="0" g="0" b="0"/>
+      </a:effectRef>
+      <a:fontRef idx="minor">
+        <a:schemeClr val="lt1"/>
+      </a:fontRef>
+    </dgm:style>
+  </dgm:styleLbl>
+  <dgm:styleLbl name="bgSibTrans2D1">
+    <dgm:scene3d>
+      <a:camera prst="orthographicFront"/>
+      <a:lightRig rig="threePt" dir="t"/>
+    </dgm:scene3d>
+    <dgm:sp3d/>
+    <dgm:txPr/>
+    <dgm:style>
+      <a:lnRef idx="0">
+        <a:scrgbClr r="0" g="0" b="0"/>
+      </a:lnRef>
+      <a:fillRef idx="1">
+        <a:scrgbClr r="0" g="0" b="0"/>
+      </a:fillRef>
+      <a:effectRef idx="0">
+        <a:scrgbClr r="0" g="0" b="0"/>
+      </a:effectRef>
+      <a:fontRef idx="minor">
+        <a:schemeClr val="lt1"/>
+      </a:fontRef>
+    </dgm:style>
+  </dgm:styleLbl>
+  <dgm:styleLbl name="sibTrans1D1">
+    <dgm:scene3d>
+      <a:camera prst="orthographicFront"/>
+      <a:lightRig rig="threePt" dir="t"/>
+    </dgm:scene3d>
+    <dgm:sp3d/>
+    <dgm:txPr/>
+    <dgm:style>
+      <a:lnRef idx="1">
+        <a:scrgbClr r="0" g="0" b="0"/>
+      </a:lnRef>
+      <a:fillRef idx="0">
+        <a:scrgbClr r="0" g="0" b="0"/>
+      </a:fillRef>
+      <a:effectRef idx="0">
+        <a:scrgbClr r="0" g="0" b="0"/>
+      </a:effectRef>
+      <a:fontRef idx="minor"/>
+    </dgm:style>
+  </dgm:styleLbl>
+  <dgm:styleLbl name="callout">
+    <dgm:scene3d>
+      <a:camera prst="orthographicFront"/>
+      <a:lightRig rig="threePt" dir="t"/>
+    </dgm:scene3d>
+    <dgm:sp3d/>
+    <dgm:txPr/>
+    <dgm:style>
+      <a:lnRef idx="2">
+        <a:scrgbClr r="0" g="0" b="0"/>
+      </a:lnRef>
+      <a:fillRef idx="1">
+        <a:scrgbClr r="0" g="0" b="0"/>
+      </a:fillRef>
+      <a:effectRef idx="0">
+        <a:scrgbClr r="0" g="0" b="0"/>
+      </a:effectRef>
+      <a:fontRef idx="minor"/>
+    </dgm:style>
+  </dgm:styleLbl>
+  <dgm:styleLbl name="asst0">
+    <dgm:scene3d>
+      <a:camera prst="orthographicFront"/>
+      <a:lightRig rig="threePt" dir="t"/>
+    </dgm:scene3d>
+    <dgm:sp3d/>
+    <dgm:txPr/>
+    <dgm:style>
+      <a:lnRef idx="2">
+        <a:scrgbClr r="0" g="0" b="0"/>
+      </a:lnRef>
+      <a:fillRef idx="1">
+        <a:scrgbClr r="0" g="0" b="0"/>
+      </a:fillRef>
+      <a:effectRef idx="0">
+        <a:scrgbClr r="0" g="0" b="0"/>
+      </a:effectRef>
+      <a:fontRef idx="minor">
+        <a:schemeClr val="lt1"/>
+      </a:fontRef>
+    </dgm:style>
+  </dgm:styleLbl>
+  <dgm:styleLbl name="asst1">
+    <dgm:scene3d>
+      <a:camera prst="orthographicFront"/>
+      <a:lightRig rig="threePt" dir="t"/>
+    </dgm:scene3d>
+    <dgm:sp3d/>
+    <dgm:txPr/>
+    <dgm:style>
+      <a:lnRef idx="2">
+        <a:scrgbClr r="0" g="0" b="0"/>
+      </a:lnRef>
+      <a:fillRef idx="1">
+        <a:scrgbClr r="0" g="0" b="0"/>
+      </a:fillRef>
+      <a:effectRef idx="0">
+        <a:scrgbClr r="0" g="0" b="0"/>
+      </a:effectRef>
+      <a:fontRef idx="minor">
+        <a:schemeClr val="lt1"/>
+      </a:fontRef>
+    </dgm:style>
+  </dgm:styleLbl>
+  <dgm:styleLbl name="asst2">
+    <dgm:scene3d>
+      <a:camera prst="orthographicFront"/>
+      <a:lightRig rig="threePt" dir="t"/>
+    </dgm:scene3d>
+    <dgm:sp3d/>
+    <dgm:txPr/>
+    <dgm:style>
+      <a:lnRef idx="2">
+        <a:scrgbClr r="0" g="0" b="0"/>
+      </a:lnRef>
+      <a:fillRef idx="1">
+        <a:scrgbClr r="0" g="0" b="0"/>
+      </a:fillRef>
+      <a:effectRef idx="0">
+        <a:scrgbClr r="0" g="0" b="0"/>
+      </a:effectRef>
+      <a:fontRef idx="minor">
+        <a:schemeClr val="lt1"/>
+      </a:fontRef>
+    </dgm:style>
+  </dgm:styleLbl>
+  <dgm:styleLbl name="asst3">
+    <dgm:scene3d>
+      <a:camera prst="orthographicFront"/>
+      <a:lightRig rig="threePt" dir="t"/>
+    </dgm:scene3d>
+    <dgm:sp3d/>
+    <dgm:txPr/>
+    <dgm:style>
+      <a:lnRef idx="2">
+        <a:scrgbClr r="0" g="0" b="0"/>
+      </a:lnRef>
+      <a:fillRef idx="1">
+        <a:scrgbClr r="0" g="0" b="0"/>
+      </a:fillRef>
+      <a:effectRef idx="0">
+        <a:scrgbClr r="0" g="0" b="0"/>
+      </a:effectRef>
+      <a:fontRef idx="minor">
+        <a:schemeClr val="lt1"/>
+      </a:fontRef>
+    </dgm:style>
+  </dgm:styleLbl>
+  <dgm:styleLbl name="asst4">
+    <dgm:scene3d>
+      <a:camera prst="orthographicFront"/>
+      <a:lightRig rig="threePt" dir="t"/>
+    </dgm:scene3d>
+    <dgm:sp3d/>
+    <dgm:txPr/>
+    <dgm:style>
+      <a:lnRef idx="2">
+        <a:scrgbClr r="0" g="0" b="0"/>
+      </a:lnRef>
+      <a:fillRef idx="1">
+        <a:scrgbClr r="0" g="0" b="0"/>
+      </a:fillRef>
+      <a:effectRef idx="0">
+        <a:scrgbClr r="0" g="0" b="0"/>
+      </a:effectRef>
+      <a:fontRef idx="minor">
+        <a:schemeClr val="lt1"/>
+      </a:fontRef>
+    </dgm:style>
+  </dgm:styleLbl>
+  <dgm:styleLbl name="parChTrans2D1">
+    <dgm:scene3d>
+      <a:camera prst="orthographicFront"/>
+      <a:lightRig rig="threePt" dir="t"/>
+    </dgm:scene3d>
+    <dgm:sp3d/>
+    <dgm:txPr/>
+    <dgm:style>
+      <a:lnRef idx="2">
+        <a:scrgbClr r="0" g="0" b="0"/>
+      </a:lnRef>
+      <a:fillRef idx="1">
+        <a:scrgbClr r="0" g="0" b="0"/>
+      </a:fillRef>
+      <a:effectRef idx="0">
+        <a:scrgbClr r="0" g="0" b="0"/>
+      </a:effectRef>
+      <a:fontRef idx="minor">
+        <a:schemeClr val="lt1"/>
+      </a:fontRef>
+    </dgm:style>
+  </dgm:styleLbl>
+  <dgm:styleLbl name="parChTrans2D2">
+    <dgm:scene3d>
+      <a:camera prst="orthographicFront"/>
+      <a:lightRig rig="threePt" dir="t"/>
+    </dgm:scene3d>
+    <dgm:sp3d/>
+    <dgm:txPr/>
+    <dgm:style>
+      <a:lnRef idx="2">
+        <a:scrgbClr r="0" g="0" b="0"/>
+      </a:lnRef>
+      <a:fillRef idx="1">
+        <a:scrgbClr r="0" g="0" b="0"/>
+      </a:fillRef>
+      <a:effectRef idx="0">
+        <a:scrgbClr r="0" g="0" b="0"/>
+      </a:effectRef>
+      <a:fontRef idx="minor">
+        <a:schemeClr val="lt1"/>
+      </a:fontRef>
+    </dgm:style>
+  </dgm:styleLbl>
+  <dgm:styleLbl name="parChTrans2D3">
+    <dgm:scene3d>
+      <a:camera prst="orthographicFront"/>
+      <a:lightRig rig="threePt" dir="t"/>
+    </dgm:scene3d>
+    <dgm:sp3d/>
+    <dgm:txPr/>
+    <dgm:style>
+      <a:lnRef idx="2">
+        <a:scrgbClr r="0" g="0" b="0"/>
+      </a:lnRef>
+      <a:fillRef idx="1">
+        <a:scrgbClr r="0" g="0" b="0"/>
+      </a:fillRef>
+      <a:effectRef idx="0">
+        <a:scrgbClr r="0" g="0" b="0"/>
+      </a:effectRef>
+      <a:fontRef idx="minor">
+        <a:schemeClr val="lt1"/>
+      </a:fontRef>
+    </dgm:style>
+  </dgm:styleLbl>
+  <dgm:styleLbl name="parChTrans2D4">
+    <dgm:scene3d>
+      <a:camera prst="orthographicFront"/>
+      <a:lightRig rig="threePt" dir="t"/>
+    </dgm:scene3d>
+    <dgm:sp3d/>
+    <dgm:txPr/>
+    <dgm:style>
+      <a:lnRef idx="2">
+        <a:scrgbClr r="0" g="0" b="0"/>
+      </a:lnRef>
+      <a:fillRef idx="1">
+        <a:scrgbClr r="0" g="0" b="0"/>
+      </a:fillRef>
+      <a:effectRef idx="0">
+        <a:scrgbClr r="0" g="0" b="0"/>
+      </a:effectRef>
+      <a:fontRef idx="minor">
+        <a:schemeClr val="lt1"/>
+      </a:fontRef>
+    </dgm:style>
+  </dgm:styleLbl>
+  <dgm:styleLbl name="parChTrans1D1">
+    <dgm:scene3d>
+      <a:camera prst="orthographicFront"/>
+      <a:lightRig rig="threePt" dir="t"/>
+    </dgm:scene3d>
+    <dgm:sp3d/>
+    <dgm:txPr/>
+    <dgm:style>
+      <a:lnRef idx="2">
+        <a:scrgbClr r="0" g="0" b="0"/>
+      </a:lnRef>
+      <a:fillRef idx="0">
+        <a:scrgbClr r="0" g="0" b="0"/>
+      </a:fillRef>
+      <a:effectRef idx="0">
+        <a:scrgbClr r="0" g="0" b="0"/>
+      </a:effectRef>
+      <a:fontRef idx="minor"/>
+    </dgm:style>
+  </dgm:styleLbl>
+  <dgm:styleLbl name="parChTrans1D2">
+    <dgm:scene3d>
+      <a:camera prst="orthographicFront"/>
+      <a:lightRig rig="threePt" dir="t"/>
+    </dgm:scene3d>
+    <dgm:sp3d/>
+    <dgm:txPr/>
+    <dgm:style>
+      <a:lnRef idx="2">
+        <a:scrgbClr r="0" g="0" b="0"/>
+      </a:lnRef>
+      <a:fillRef idx="0">
+        <a:scrgbClr r="0" g="0" b="0"/>
+      </a:fillRef>
+      <a:effectRef idx="0">
+        <a:scrgbClr r="0" g="0" b="0"/>
+      </a:effectRef>
+      <a:fontRef idx="minor"/>
+    </dgm:style>
+  </dgm:styleLbl>
+  <dgm:styleLbl name="parChTrans1D3">
+    <dgm:scene3d>
+      <a:camera prst="orthographicFront"/>
+      <a:lightRig rig="threePt" dir="t"/>
+    </dgm:scene3d>
+    <dgm:sp3d/>
+    <dgm:txPr/>
+    <dgm:style>
+      <a:lnRef idx="2">
+        <a:scrgbClr r="0" g="0" b="0"/>
+      </a:lnRef>
+      <a:fillRef idx="0">
+        <a:scrgbClr r="0" g="0" b="0"/>
+      </a:fillRef>
+      <a:effectRef idx="0">
+        <a:scrgbClr r="0" g="0" b="0"/>
+      </a:effectRef>
+      <a:fontRef idx="minor"/>
+    </dgm:style>
+  </dgm:styleLbl>
+  <dgm:styleLbl name="parChTrans1D4">
+    <dgm:scene3d>
+      <a:camera prst="orthographicFront"/>
+      <a:lightRig rig="threePt" dir="t"/>
+    </dgm:scene3d>
+    <dgm:sp3d/>
+    <dgm:txPr/>
+    <dgm:style>
+      <a:lnRef idx="2">
+        <a:scrgbClr r="0" g="0" b="0"/>
+      </a:lnRef>
+      <a:fillRef idx="0">
+        <a:scrgbClr r="0" g="0" b="0"/>
+      </a:fillRef>
+      <a:effectRef idx="0">
+        <a:scrgbClr r="0" g="0" b="0"/>
+      </a:effectRef>
+      <a:fontRef idx="minor"/>
+    </dgm:style>
+  </dgm:styleLbl>
+  <dgm:styleLbl name="fgAcc1">
+    <dgm:scene3d>
+      <a:camera prst="orthographicFront"/>
+      <a:lightRig rig="threePt" dir="t"/>
+    </dgm:scene3d>
+    <dgm:sp3d/>
+    <dgm:txPr/>
+    <dgm:style>
+      <a:lnRef idx="2">
+        <a:scrgbClr r="0" g="0" b="0"/>
+      </a:lnRef>
+      <a:fillRef idx="1">
+        <a:scrgbClr r="0" g="0" b="0"/>
+      </a:fillRef>
+      <a:effectRef idx="0">
+        <a:scrgbClr r="0" g="0" b="0"/>
+      </a:effectRef>
+      <a:fontRef idx="minor"/>
+    </dgm:style>
+  </dgm:styleLbl>
+  <dgm:styleLbl name="conFgAcc1">
+    <dgm:scene3d>
+      <a:camera prst="orthographicFront"/>
+      <a:lightRig rig="threePt" dir="t"/>
+    </dgm:scene3d>
+    <dgm:sp3d/>
+    <dgm:txPr/>
+    <dgm:style>
+      <a:lnRef idx="2">
+        <a:scrgbClr r="0" g="0" b="0"/>
+      </a:lnRef>
+      <a:fillRef idx="1">
+        <a:scrgbClr r="0" g="0" b="0"/>
+      </a:fillRef>
+      <a:effectRef idx="0">
+        <a:scrgbClr r="0" g="0" b="0"/>
+      </a:effectRef>
+      <a:fontRef idx="minor"/>
+    </dgm:style>
+  </dgm:styleLbl>
+  <dgm:styleLbl name="alignAcc1">
+    <dgm:scene3d>
+      <a:camera prst="orthographicFront"/>
+      <a:lightRig rig="threePt" dir="t"/>
+    </dgm:scene3d>
+    <dgm:sp3d/>
+    <dgm:txPr/>
+    <dgm:style>
+      <a:lnRef idx="2">
+        <a:scrgbClr r="0" g="0" b="0"/>
+      </a:lnRef>
+      <a:fillRef idx="1">
+        <a:scrgbClr r="0" g="0" b="0"/>
+      </a:fillRef>
+      <a:effectRef idx="0">
+        <a:scrgbClr r="0" g="0" b="0"/>
+      </a:effectRef>
+      <a:fontRef idx="minor"/>
+    </dgm:style>
+  </dgm:styleLbl>
+  <dgm:styleLbl name="trAlignAcc1">
+    <dgm:scene3d>
+      <a:camera prst="orthographicFront"/>
+      <a:lightRig rig="threePt" dir="t"/>
+    </dgm:scene3d>
+    <dgm:sp3d/>
+    <dgm:txPr/>
+    <dgm:style>
+      <a:lnRef idx="1">
+        <a:scrgbClr r="0" g="0" b="0"/>
+      </a:lnRef>
+      <a:fillRef idx="1">
+        <a:scrgbClr r="0" g="0" b="0"/>
+      </a:fillRef>
+      <a:effectRef idx="0">
+        <a:scrgbClr r="0" g="0" b="0"/>
+      </a:effectRef>
+      <a:fontRef idx="minor"/>
+    </dgm:style>
+  </dgm:styleLbl>
+  <dgm:styleLbl name="bgAcc1">
+    <dgm:scene3d>
+      <a:camera prst="orthographicFront"/>
+      <a:lightRig rig="threePt" dir="t"/>
+    </dgm:scene3d>
+    <dgm:sp3d/>
+    <dgm:txPr/>
+    <dgm:style>
+      <a:lnRef idx="2">
+        <a:scrgbClr r="0" g="0" b="0"/>
+      </a:lnRef>
+      <a:fillRef idx="1">
+        <a:scrgbClr r="0" g="0" b="0"/>
+      </a:fillRef>
+      <a:effectRef idx="0">
+        <a:scrgbClr r="0" g="0" b="0"/>
+      </a:effectRef>
+      <a:fontRef idx="minor"/>
+    </dgm:style>
+  </dgm:styleLbl>
+  <dgm:styleLbl name="solidFgAcc1">
+    <dgm:scene3d>
+      <a:camera prst="orthographicFront"/>
+      <a:lightRig rig="threePt" dir="t"/>
+    </dgm:scene3d>
+    <dgm:sp3d/>
+    <dgm:txPr/>
+    <dgm:style>
+      <a:lnRef idx="2">
+        <a:scrgbClr r="0" g="0" b="0"/>
+      </a:lnRef>
+      <a:fillRef idx="1">
+        <a:scrgbClr r="0" g="0" b="0"/>
+      </a:fillRef>
+      <a:effectRef idx="0">
+        <a:scrgbClr r="0" g="0" b="0"/>
+      </a:effectRef>
+      <a:fontRef idx="minor"/>
+    </dgm:style>
+  </dgm:styleLbl>
+  <dgm:styleLbl name="solidAlignAcc1">
+    <dgm:scene3d>
+      <a:camera prst="orthographicFront"/>
+      <a:lightRig rig="threePt" dir="t"/>
+    </dgm:scene3d>
+    <dgm:sp3d/>
+    <dgm:txPr/>
+    <dgm:style>
+      <a:lnRef idx="2">
+        <a:scrgbClr r="0" g="0" b="0"/>
+      </a:lnRef>
+      <a:fillRef idx="1">
+        <a:scrgbClr r="0" g="0" b="0"/>
+      </a:fillRef>
+      <a:effectRef idx="0">
+        <a:scrgbClr r="0" g="0" b="0"/>
+      </a:effectRef>
+      <a:fontRef idx="minor"/>
+    </dgm:style>
+  </dgm:styleLbl>
+  <dgm:styleLbl name="solidBgAcc1">
+    <dgm:scene3d>
+      <a:camera prst="orthographicFront"/>
+      <a:lightRig rig="threePt" dir="t"/>
+    </dgm:scene3d>
+    <dgm:sp3d/>
+    <dgm:txPr/>
+    <dgm:style>
+      <a:lnRef idx="2">
+        <a:scrgbClr r="0" g="0" b="0"/>
+      </a:lnRef>
+      <a:fillRef idx="1">
+        <a:scrgbClr r="0" g="0" b="0"/>
+      </a:fillRef>
+      <a:effectRef idx="0">
+        <a:scrgbClr r="0" g="0" b="0"/>
+      </a:effectRef>
+      <a:fontRef idx="minor"/>
+    </dgm:style>
+  </dgm:styleLbl>
+  <dgm:styleLbl name="fgAccFollowNode1">
+    <dgm:scene3d>
+      <a:camera prst="orthographicFront"/>
+      <a:lightRig rig="threePt" dir="t"/>
+    </dgm:scene3d>
+    <dgm:sp3d/>
+    <dgm:txPr/>
+    <dgm:style>
+      <a:lnRef idx="2">
+        <a:scrgbClr r="0" g="0" b="0"/>
+      </a:lnRef>
+      <a:fillRef idx="1">
+        <a:scrgbClr r="0" g="0" b="0"/>
+      </a:fillRef>
+      <a:effectRef idx="0">
+        <a:scrgbClr r="0" g="0" b="0"/>
+      </a:effectRef>
+      <a:fontRef idx="minor"/>
+    </dgm:style>
+  </dgm:styleLbl>
+  <dgm:styleLbl name="alignAccFollowNode1">
+    <dgm:scene3d>
+      <a:camera prst="orthographicFront"/>
+      <a:lightRig rig="threePt" dir="t"/>
+    </dgm:scene3d>
+    <dgm:sp3d/>
+    <dgm:txPr/>
+    <dgm:style>
+      <a:lnRef idx="2">
+        <a:scrgbClr r="0" g="0" b="0"/>
+      </a:lnRef>
+      <a:fillRef idx="1">
+        <a:scrgbClr r="0" g="0" b="0"/>
+      </a:fillRef>
+      <a:effectRef idx="0">
+        <a:scrgbClr r="0" g="0" b="0"/>
+      </a:effectRef>
+      <a:fontRef idx="minor"/>
+    </dgm:style>
+  </dgm:styleLbl>
+  <dgm:styleLbl name="bgAccFollowNode1">
+    <dgm:scene3d>
+      <a:camera prst="orthographicFront"/>
+      <a:lightRig rig="threePt" dir="t"/>
+    </dgm:scene3d>
+    <dgm:sp3d/>
+    <dgm:txPr/>
+    <dgm:style>
+      <a:lnRef idx="2">
+        <a:scrgbClr r="0" g="0" b="0"/>
+      </a:lnRef>
+      <a:fillRef idx="1">
+        <a:scrgbClr r="0" g="0" b="0"/>
+      </a:fillRef>
+      <a:effectRef idx="0">
+        <a:scrgbClr r="0" g="0" b="0"/>
+      </a:effectRef>
+      <a:fontRef idx="minor"/>
+    </dgm:style>
+  </dgm:styleLbl>
+  <dgm:styleLbl name="fgAcc0">
+    <dgm:scene3d>
+      <a:camera prst="orthographicFront"/>
+      <a:lightRig rig="threePt" dir="t"/>
+    </dgm:scene3d>
+    <dgm:sp3d/>
+    <dgm:txPr/>
+    <dgm:style>
+      <a:lnRef idx="2">
+        <a:scrgbClr r="0" g="0" b="0"/>
+      </a:lnRef>
+      <a:fillRef idx="1">
+        <a:scrgbClr r="0" g="0" b="0"/>
+      </a:fillRef>
+      <a:effectRef idx="0">
+        <a:scrgbClr r="0" g="0" b="0"/>
+      </a:effectRef>
+      <a:fontRef idx="minor"/>
+    </dgm:style>
+  </dgm:styleLbl>
+  <dgm:styleLbl name="fgAcc2">
+    <dgm:scene3d>
+      <a:camera prst="orthographicFront"/>
+      <a:lightRig rig="threePt" dir="t"/>
+    </dgm:scene3d>
+    <dgm:sp3d/>
+    <dgm:txPr/>
+    <dgm:style>
+      <a:lnRef idx="2">
+        <a:scrgbClr r="0" g="0" b="0"/>
+      </a:lnRef>
+      <a:fillRef idx="1">
+        <a:scrgbClr r="0" g="0" b="0"/>
+      </a:fillRef>
+      <a:effectRef idx="0">
+        <a:scrgbClr r="0" g="0" b="0"/>
+      </a:effectRef>
+      <a:fontRef idx="minor"/>
+    </dgm:style>
+  </dgm:styleLbl>
+  <dgm:styleLbl name="fgAcc3">
+    <dgm:scene3d>
+      <a:camera prst="orthographicFront"/>
+      <a:lightRig rig="threePt" dir="t"/>
+    </dgm:scene3d>
+    <dgm:sp3d/>
+    <dgm:txPr/>
+    <dgm:style>
+      <a:lnRef idx="2">
+        <a:scrgbClr r="0" g="0" b="0"/>
+      </a:lnRef>
+      <a:fillRef idx="1">
+        <a:scrgbClr r="0" g="0" b="0"/>
+      </a:fillRef>
+      <a:effectRef idx="0">
+        <a:scrgbClr r="0" g="0" b="0"/>
+      </a:effectRef>
+      <a:fontRef idx="minor"/>
+    </dgm:style>
+  </dgm:styleLbl>
+  <dgm:styleLbl name="fgAcc4">
+    <dgm:scene3d>
+      <a:camera prst="orthographicFront"/>
+      <a:lightRig rig="threePt" dir="t"/>
+    </dgm:scene3d>
+    <dgm:sp3d/>
+    <dgm:txPr/>
+    <dgm:style>
+      <a:lnRef idx="2">
+        <a:scrgbClr r="0" g="0" b="0"/>
+      </a:lnRef>
+      <a:fillRef idx="1">
+        <a:scrgbClr r="0" g="0" b="0"/>
+      </a:fillRef>
+      <a:effectRef idx="0">
+        <a:scrgbClr r="0" g="0" b="0"/>
+      </a:effectRef>
+      <a:fontRef idx="minor"/>
+    </dgm:style>
+  </dgm:styleLbl>
+  <dgm:styleLbl name="bgShp">
+    <dgm:scene3d>
+      <a:camera prst="orthographicFront"/>
+      <a:lightRig rig="threePt" dir="t"/>
+    </dgm:scene3d>
+    <dgm:sp3d/>
+    <dgm:txPr/>
+    <dgm:style>
+      <a:lnRef idx="0">
+        <a:scrgbClr r="0" g="0" b="0"/>
+      </a:lnRef>
+      <a:fillRef idx="1">
+        <a:scrgbClr r="0" g="0" b="0"/>
+      </a:fillRef>
+      <a:effectRef idx="0">
+        <a:scrgbClr r="0" g="0" b="0"/>
+      </a:effectRef>
+      <a:fontRef idx="minor"/>
+    </dgm:style>
+  </dgm:styleLbl>
+  <dgm:styleLbl name="dkBgShp">
+    <dgm:scene3d>
+      <a:camera prst="orthographicFront"/>
+      <a:lightRig rig="threePt" dir="t"/>
+    </dgm:scene3d>
+    <dgm:sp3d/>
+    <dgm:txPr/>
+    <dgm:style>
+      <a:lnRef idx="0">
+        <a:scrgbClr r="0" g="0" b="0"/>
+      </a:lnRef>
+      <a:fillRef idx="1">
+        <a:scrgbClr r="0" g="0" b="0"/>
+      </a:fillRef>
+      <a:effectRef idx="0">
+        <a:scrgbClr r="0" g="0" b="0"/>
+      </a:effectRef>
+      <a:fontRef idx="minor"/>
+    </dgm:style>
+  </dgm:styleLbl>
+  <dgm:styleLbl name="trBgShp">
+    <dgm:scene3d>
+      <a:camera prst="orthographicFront"/>
+      <a:lightRig rig="threePt" dir="t"/>
+    </dgm:scene3d>
+    <dgm:sp3d/>
+    <dgm:txPr/>
+    <dgm:style>
+      <a:lnRef idx="0">
+        <a:scrgbClr r="0" g="0" b="0"/>
+      </a:lnRef>
+      <a:fillRef idx="1">
+        <a:scrgbClr r="0" g="0" b="0"/>
+      </a:fillRef>
+      <a:effectRef idx="0">
+        <a:scrgbClr r="0" g="0" b="0"/>
+      </a:effectRef>
+      <a:fontRef idx="minor"/>
+    </dgm:style>
+  </dgm:styleLbl>
+  <dgm:styleLbl name="fgShp">
+    <dgm:scene3d>
+      <a:camera prst="orthographicFront"/>
+      <a:lightRig rig="threePt" dir="t"/>
+    </dgm:scene3d>
+    <dgm:sp3d/>
+    <dgm:txPr/>
+    <dgm:style>
+      <a:lnRef idx="2">
+        <a:scrgbClr r="0" g="0" b="0"/>
+      </a:lnRef>
+      <a:fillRef idx="1">
+        <a:scrgbClr r="0" g="0" b="0"/>
+      </a:fillRef>
+      <a:effectRef idx="0">
+        <a:scrgbClr r="0" g="0" b="0"/>
+      </a:effectRef>
+      <a:fontRef idx="minor"/>
+    </dgm:style>
+  </dgm:styleLbl>
+  <dgm:styleLbl name="revTx">
+    <dgm:scene3d>
+      <a:camera prst="orthographicFront"/>
+      <a:lightRig rig="threePt" dir="t"/>
+    </dgm:scene3d>
+    <dgm:sp3d/>
+    <dgm:txPr/>
+    <dgm:style>
+      <a:lnRef idx="0">
+        <a:scrgbClr r="0" g="0" b="0"/>
+      </a:lnRef>
+      <a:fillRef idx="0">
+        <a:scrgbClr r="0" g="0" b="0"/>
+      </a:fillRef>
+      <a:effectRef idx="0">
+        <a:scrgbClr r="0" g="0" b="0"/>
+      </a:effectRef>
+      <a:fontRef idx="minor"/>
+    </dgm:style>
+  </dgm:styleLbl>
+</dgm:styleDef>
+</file>
+
 <file path=ppt/slideLayouts/slideLayout1.xml><?xml version="1.0" encoding="utf-8"?>
 <p:sldLayout xmlns:a="http://schemas.openxmlformats.org/drawingml/2006/main" xmlns:r="http://schemas.openxmlformats.org/officeDocument/2006/relationships" xmlns:p="http://schemas.openxmlformats.org/presentationml/2006/main" type="title" preserve="1">
   <p:cSld name="Title Slide">
@@ -2825,7 +6849,7 @@
           <a:p>
             <a:fld id="{9DFF5FDE-556D-4288-960F-3880543CC0D0}" type="datetimeFigureOut">
               <a:rPr lang="en-US" smtClean="0"/>
-              <a:t>10/14/2026</a:t>
+              <a:t>10/15/2026</a:t>
             </a:fld>
             <a:endParaRPr lang="en-US"/>
           </a:p>
@@ -3023,7 +7047,7 @@
           <a:p>
             <a:fld id="{9DFF5FDE-556D-4288-960F-3880543CC0D0}" type="datetimeFigureOut">
               <a:rPr lang="en-US" smtClean="0"/>
-              <a:t>10/14/2026</a:t>
+              <a:t>10/15/2026</a:t>
             </a:fld>
             <a:endParaRPr lang="en-US"/>
           </a:p>
@@ -3231,7 +7255,7 @@
           <a:p>
             <a:fld id="{9DFF5FDE-556D-4288-960F-3880543CC0D0}" type="datetimeFigureOut">
               <a:rPr lang="en-US" smtClean="0"/>
-              <a:t>10/14/2026</a:t>
+              <a:t>10/15/2026</a:t>
             </a:fld>
             <a:endParaRPr lang="en-US"/>
           </a:p>
@@ -3429,7 +7453,7 @@
           <a:p>
             <a:fld id="{9DFF5FDE-556D-4288-960F-3880543CC0D0}" type="datetimeFigureOut">
               <a:rPr lang="en-US" smtClean="0"/>
-              <a:t>10/14/2026</a:t>
+              <a:t>10/15/2026</a:t>
             </a:fld>
             <a:endParaRPr lang="en-US"/>
           </a:p>
@@ -3704,7 +7728,7 @@
           <a:p>
             <a:fld id="{9DFF5FDE-556D-4288-960F-3880543CC0D0}" type="datetimeFigureOut">
               <a:rPr lang="en-US" smtClean="0"/>
-              <a:t>10/14/2026</a:t>
+              <a:t>10/15/2026</a:t>
             </a:fld>
             <a:endParaRPr lang="en-US"/>
           </a:p>
@@ -3969,7 +7993,7 @@
           <a:p>
             <a:fld id="{9DFF5FDE-556D-4288-960F-3880543CC0D0}" type="datetimeFigureOut">
               <a:rPr lang="en-US" smtClean="0"/>
-              <a:t>10/14/2026</a:t>
+              <a:t>10/15/2026</a:t>
             </a:fld>
             <a:endParaRPr lang="en-US"/>
           </a:p>
@@ -4381,7 +8405,7 @@
           <a:p>
             <a:fld id="{9DFF5FDE-556D-4288-960F-3880543CC0D0}" type="datetimeFigureOut">
               <a:rPr lang="en-US" smtClean="0"/>
-              <a:t>10/14/2026</a:t>
+              <a:t>10/15/2026</a:t>
             </a:fld>
             <a:endParaRPr lang="en-US"/>
           </a:p>
@@ -4522,7 +8546,7 @@
           <a:p>
             <a:fld id="{9DFF5FDE-556D-4288-960F-3880543CC0D0}" type="datetimeFigureOut">
               <a:rPr lang="en-US" smtClean="0"/>
-              <a:t>10/14/2026</a:t>
+              <a:t>10/15/2026</a:t>
             </a:fld>
             <a:endParaRPr lang="en-US"/>
           </a:p>
@@ -4635,7 +8659,7 @@
           <a:p>
             <a:fld id="{9DFF5FDE-556D-4288-960F-3880543CC0D0}" type="datetimeFigureOut">
               <a:rPr lang="en-US" smtClean="0"/>
-              <a:t>10/14/2026</a:t>
+              <a:t>10/15/2026</a:t>
             </a:fld>
             <a:endParaRPr lang="en-US"/>
           </a:p>
@@ -4946,7 +8970,7 @@
           <a:p>
             <a:fld id="{9DFF5FDE-556D-4288-960F-3880543CC0D0}" type="datetimeFigureOut">
               <a:rPr lang="en-US" smtClean="0"/>
-              <a:t>10/14/2026</a:t>
+              <a:t>10/15/2026</a:t>
             </a:fld>
             <a:endParaRPr lang="en-US"/>
           </a:p>
@@ -5234,7 +9258,7 @@
           <a:p>
             <a:fld id="{9DFF5FDE-556D-4288-960F-3880543CC0D0}" type="datetimeFigureOut">
               <a:rPr lang="en-US" smtClean="0"/>
-              <a:t>10/14/2026</a:t>
+              <a:t>10/15/2026</a:t>
             </a:fld>
             <a:endParaRPr lang="en-US"/>
           </a:p>
@@ -5475,7 +9499,7 @@
           <a:p>
             <a:fld id="{9DFF5FDE-556D-4288-960F-3880543CC0D0}" type="datetimeFigureOut">
               <a:rPr lang="en-US" smtClean="0"/>
-              <a:t>10/14/2026</a:t>
+              <a:t>10/15/2026</a:t>
             </a:fld>
             <a:endParaRPr lang="en-US"/>
           </a:p>
@@ -6036,6 +10060,749 @@
   <p:cSld>
     <p:spTree>
       <p:nvGrpSpPr>
+        <p:cNvPr id="1" name="">
+          <a:extLst>
+            <a:ext uri="{FF2B5EF4-FFF2-40B4-BE49-F238E27FC236}">
+              <a16:creationId xmlns:a16="http://schemas.microsoft.com/office/drawing/2014/main" id="{24795404-4793-4153-45B6-147571F0820C}"/>
+            </a:ext>
+          </a:extLst>
+        </p:cNvPr>
+        <p:cNvGrpSpPr/>
+        <p:nvPr/>
+      </p:nvGrpSpPr>
+      <p:grpSpPr>
+        <a:xfrm>
+          <a:off x="0" y="0"/>
+          <a:ext cx="0" cy="0"/>
+          <a:chOff x="0" y="0"/>
+          <a:chExt cx="0" cy="0"/>
+        </a:xfrm>
+      </p:grpSpPr>
+      <p:sp>
+        <p:nvSpPr>
+          <p:cNvPr id="2" name="Title 1">
+            <a:extLst>
+              <a:ext uri="{FF2B5EF4-FFF2-40B4-BE49-F238E27FC236}">
+                <a16:creationId xmlns:a16="http://schemas.microsoft.com/office/drawing/2014/main" id="{A1D02713-65CC-0B2F-4169-1F342A167AE8}"/>
+              </a:ext>
+            </a:extLst>
+          </p:cNvPr>
+          <p:cNvSpPr>
+            <a:spLocks noGrp="1"/>
+          </p:cNvSpPr>
+          <p:nvPr>
+            <p:ph type="title"/>
+          </p:nvPr>
+        </p:nvSpPr>
+        <p:spPr/>
+        <p:txBody>
+          <a:bodyPr/>
+          <a:lstStyle/>
+          <a:p>
+            <a:r>
+              <a:rPr lang="en-US" dirty="0"/>
+              <a:t>Steps for refactoring</a:t>
+            </a:r>
+          </a:p>
+        </p:txBody>
+      </p:sp>
+      <p:sp>
+        <p:nvSpPr>
+          <p:cNvPr id="4" name="Content Placeholder 3">
+            <a:extLst>
+              <a:ext uri="{FF2B5EF4-FFF2-40B4-BE49-F238E27FC236}">
+                <a16:creationId xmlns:a16="http://schemas.microsoft.com/office/drawing/2014/main" id="{B225A04A-A19E-03F6-5A6F-E66D9D66BD3C}"/>
+              </a:ext>
+            </a:extLst>
+          </p:cNvPr>
+          <p:cNvSpPr>
+            <a:spLocks noGrp="1"/>
+          </p:cNvSpPr>
+          <p:nvPr>
+            <p:ph idx="1"/>
+          </p:nvPr>
+        </p:nvSpPr>
+        <p:spPr>
+          <a:xfrm>
+            <a:off x="838200" y="1825625"/>
+            <a:ext cx="4561936" cy="796805"/>
+          </a:xfrm>
+        </p:spPr>
+        <p:txBody>
+          <a:bodyPr>
+            <a:normAutofit fontScale="92500" lnSpcReduction="20000"/>
+          </a:bodyPr>
+          <a:lstStyle/>
+          <a:p>
+            <a:r>
+              <a:rPr lang="en-US" dirty="0"/>
+              <a:t>Convert in 4 methods</a:t>
+            </a:r>
+          </a:p>
+          <a:p>
+            <a:r>
+              <a:rPr lang="en-US" dirty="0"/>
+              <a:t>Page 99</a:t>
+            </a:r>
+          </a:p>
+        </p:txBody>
+      </p:sp>
+      <p:sp>
+        <p:nvSpPr>
+          <p:cNvPr id="3" name="TextBox 2">
+            <a:extLst>
+              <a:ext uri="{FF2B5EF4-FFF2-40B4-BE49-F238E27FC236}">
+                <a16:creationId xmlns:a16="http://schemas.microsoft.com/office/drawing/2014/main" id="{F2076FA3-9937-CE0D-6532-8C7B6F12DE9F}"/>
+              </a:ext>
+            </a:extLst>
+          </p:cNvPr>
+          <p:cNvSpPr txBox="1"/>
+          <p:nvPr/>
+        </p:nvSpPr>
+        <p:spPr>
+          <a:xfrm>
+            <a:off x="7542363" y="6492875"/>
+            <a:ext cx="4649637" cy="276999"/>
+          </a:xfrm>
+          <a:prstGeom prst="rect">
+            <a:avLst/>
+          </a:prstGeom>
+          <a:noFill/>
+        </p:spPr>
+        <p:txBody>
+          <a:bodyPr wrap="square" rtlCol="0">
+            <a:spAutoFit/>
+          </a:bodyPr>
+          <a:lstStyle/>
+          <a:p>
+            <a:r>
+              <a:rPr lang="en-US" sz="1200" dirty="0"/>
+              <a:t>2026, Women in Statistics and Data Science Conference, Cincinnati, OH</a:t>
+            </a:r>
+          </a:p>
+        </p:txBody>
+      </p:sp>
+    </p:spTree>
+    <p:extLst>
+      <p:ext uri="{BB962C8B-B14F-4D97-AF65-F5344CB8AC3E}">
+        <p14:creationId xmlns:p14="http://schemas.microsoft.com/office/powerpoint/2010/main" val="310505272"/>
+      </p:ext>
+    </p:extLst>
+  </p:cSld>
+  <p:clrMapOvr>
+    <a:masterClrMapping/>
+  </p:clrMapOvr>
+</p:sld>
+</file>
+
+<file path=ppt/slides/slide11.xml><?xml version="1.0" encoding="utf-8"?>
+<p:sld xmlns:a="http://schemas.openxmlformats.org/drawingml/2006/main" xmlns:r="http://schemas.openxmlformats.org/officeDocument/2006/relationships" xmlns:p="http://schemas.openxmlformats.org/presentationml/2006/main">
+  <p:cSld>
+    <p:spTree>
+      <p:nvGrpSpPr>
+        <p:cNvPr id="1" name="">
+          <a:extLst>
+            <a:ext uri="{FF2B5EF4-FFF2-40B4-BE49-F238E27FC236}">
+              <a16:creationId xmlns:a16="http://schemas.microsoft.com/office/drawing/2014/main" id="{40074CE9-62D6-2BB2-E61F-1B1261FA1298}"/>
+            </a:ext>
+          </a:extLst>
+        </p:cNvPr>
+        <p:cNvGrpSpPr/>
+        <p:nvPr/>
+      </p:nvGrpSpPr>
+      <p:grpSpPr>
+        <a:xfrm>
+          <a:off x="0" y="0"/>
+          <a:ext cx="0" cy="0"/>
+          <a:chOff x="0" y="0"/>
+          <a:chExt cx="0" cy="0"/>
+        </a:xfrm>
+      </p:grpSpPr>
+      <p:sp>
+        <p:nvSpPr>
+          <p:cNvPr id="2" name="Title 1">
+            <a:extLst>
+              <a:ext uri="{FF2B5EF4-FFF2-40B4-BE49-F238E27FC236}">
+                <a16:creationId xmlns:a16="http://schemas.microsoft.com/office/drawing/2014/main" id="{1A312F8B-F4C9-4874-7DA4-22CD586751FE}"/>
+              </a:ext>
+            </a:extLst>
+          </p:cNvPr>
+          <p:cNvSpPr>
+            <a:spLocks noGrp="1"/>
+          </p:cNvSpPr>
+          <p:nvPr>
+            <p:ph type="title"/>
+          </p:nvPr>
+        </p:nvSpPr>
+        <p:spPr/>
+        <p:txBody>
+          <a:bodyPr/>
+          <a:lstStyle/>
+          <a:p>
+            <a:r>
+              <a:rPr lang="en-US" dirty="0"/>
+              <a:t>Steps for refactoring</a:t>
+            </a:r>
+          </a:p>
+        </p:txBody>
+      </p:sp>
+      <p:sp>
+        <p:nvSpPr>
+          <p:cNvPr id="3" name="Content Placeholder 2">
+            <a:extLst>
+              <a:ext uri="{FF2B5EF4-FFF2-40B4-BE49-F238E27FC236}">
+                <a16:creationId xmlns:a16="http://schemas.microsoft.com/office/drawing/2014/main" id="{A0BC23D4-DEEC-D0CD-B063-D5658C599C4C}"/>
+              </a:ext>
+            </a:extLst>
+          </p:cNvPr>
+          <p:cNvSpPr>
+            <a:spLocks noGrp="1"/>
+          </p:cNvSpPr>
+          <p:nvPr>
+            <p:ph idx="1"/>
+          </p:nvPr>
+        </p:nvSpPr>
+        <p:spPr>
+          <a:xfrm>
+            <a:off x="609599" y="1347216"/>
+            <a:ext cx="5277727" cy="3543961"/>
+          </a:xfrm>
+        </p:spPr>
+        <p:txBody>
+          <a:bodyPr>
+            <a:normAutofit/>
+          </a:bodyPr>
+          <a:lstStyle/>
+          <a:p>
+            <a:r>
+              <a:rPr lang="en-US" dirty="0"/>
+              <a:t>What have I done about it?</a:t>
+            </a:r>
+          </a:p>
+          <a:p>
+            <a:r>
+              <a:rPr lang="en-US" altLang="zh-CN" dirty="0"/>
+              <a:t>Enterprise Modeling and Analytics – the Cash Flow model</a:t>
+            </a:r>
+          </a:p>
+          <a:p>
+            <a:r>
+              <a:rPr lang="en-US" altLang="zh-CN" dirty="0"/>
+              <a:t>SAS: PROC compare</a:t>
+            </a:r>
+          </a:p>
+          <a:p>
+            <a:r>
+              <a:rPr lang="en-US" dirty="0"/>
+              <a:t>R: compared</a:t>
+            </a:r>
+          </a:p>
+          <a:p>
+            <a:r>
+              <a:rPr lang="en-US" dirty="0"/>
+              <a:t>How to make a tolerance level?</a:t>
+            </a:r>
+          </a:p>
+          <a:p>
+            <a:endParaRPr lang="en-US" dirty="0"/>
+          </a:p>
+        </p:txBody>
+      </p:sp>
+      <p:pic>
+        <p:nvPicPr>
+          <p:cNvPr id="6" name="Picture 5">
+            <a:extLst>
+              <a:ext uri="{FF2B5EF4-FFF2-40B4-BE49-F238E27FC236}">
+                <a16:creationId xmlns:a16="http://schemas.microsoft.com/office/drawing/2014/main" id="{63B42BA1-1151-4CFE-D8B5-E02DDD41A0EE}"/>
+              </a:ext>
+            </a:extLst>
+          </p:cNvPr>
+          <p:cNvPicPr>
+            <a:picLocks noChangeAspect="1"/>
+          </p:cNvPicPr>
+          <p:nvPr/>
+        </p:nvPicPr>
+        <p:blipFill>
+          <a:blip r:embed="rId2"/>
+          <a:stretch>
+            <a:fillRect/>
+          </a:stretch>
+        </p:blipFill>
+        <p:spPr>
+          <a:xfrm>
+            <a:off x="1446197" y="5207810"/>
+            <a:ext cx="1877291" cy="769689"/>
+          </a:xfrm>
+          <a:prstGeom prst="rect">
+            <a:avLst/>
+          </a:prstGeom>
+        </p:spPr>
+      </p:pic>
+      <p:pic>
+        <p:nvPicPr>
+          <p:cNvPr id="7" name="Picture 6">
+            <a:extLst>
+              <a:ext uri="{FF2B5EF4-FFF2-40B4-BE49-F238E27FC236}">
+                <a16:creationId xmlns:a16="http://schemas.microsoft.com/office/drawing/2014/main" id="{F74468B4-F5B5-FE68-0C47-CC2309DE1D12}"/>
+              </a:ext>
+            </a:extLst>
+          </p:cNvPr>
+          <p:cNvPicPr>
+            <a:picLocks noChangeAspect="1"/>
+          </p:cNvPicPr>
+          <p:nvPr/>
+        </p:nvPicPr>
+        <p:blipFill>
+          <a:blip r:embed="rId3"/>
+          <a:stretch>
+            <a:fillRect/>
+          </a:stretch>
+        </p:blipFill>
+        <p:spPr>
+          <a:xfrm>
+            <a:off x="5024264" y="5174343"/>
+            <a:ext cx="2143471" cy="803156"/>
+          </a:xfrm>
+          <a:prstGeom prst="rect">
+            <a:avLst/>
+          </a:prstGeom>
+        </p:spPr>
+      </p:pic>
+      <p:pic>
+        <p:nvPicPr>
+          <p:cNvPr id="8" name="Picture 7">
+            <a:extLst>
+              <a:ext uri="{FF2B5EF4-FFF2-40B4-BE49-F238E27FC236}">
+                <a16:creationId xmlns:a16="http://schemas.microsoft.com/office/drawing/2014/main" id="{BBAC54FE-1225-9162-8A7B-6CAB854D7938}"/>
+              </a:ext>
+            </a:extLst>
+          </p:cNvPr>
+          <p:cNvPicPr>
+            <a:picLocks noChangeAspect="1"/>
+          </p:cNvPicPr>
+          <p:nvPr/>
+        </p:nvPicPr>
+        <p:blipFill>
+          <a:blip r:embed="rId4"/>
+          <a:stretch>
+            <a:fillRect/>
+          </a:stretch>
+        </p:blipFill>
+        <p:spPr>
+          <a:xfrm>
+            <a:off x="8564702" y="5210176"/>
+            <a:ext cx="2862262" cy="966787"/>
+          </a:xfrm>
+          <a:prstGeom prst="rect">
+            <a:avLst/>
+          </a:prstGeom>
+        </p:spPr>
+      </p:pic>
+      <p:sp>
+        <p:nvSpPr>
+          <p:cNvPr id="4" name="Content Placeholder 2">
+            <a:extLst>
+              <a:ext uri="{FF2B5EF4-FFF2-40B4-BE49-F238E27FC236}">
+                <a16:creationId xmlns:a16="http://schemas.microsoft.com/office/drawing/2014/main" id="{63DAD067-F15E-9C00-BF8C-B324CCAB9A23}"/>
+              </a:ext>
+            </a:extLst>
+          </p:cNvPr>
+          <p:cNvSpPr txBox="1">
+            <a:spLocks/>
+          </p:cNvSpPr>
+          <p:nvPr/>
+        </p:nvSpPr>
+        <p:spPr>
+          <a:xfrm>
+            <a:off x="6304675" y="1347216"/>
+            <a:ext cx="4349496" cy="3413145"/>
+          </a:xfrm>
+          <a:prstGeom prst="rect">
+            <a:avLst/>
+          </a:prstGeom>
+        </p:spPr>
+        <p:txBody>
+          <a:bodyPr vert="horz" lIns="91440" tIns="45720" rIns="91440" bIns="45720" rtlCol="0">
+            <a:normAutofit fontScale="62500" lnSpcReduction="20000"/>
+          </a:bodyPr>
+          <a:lstStyle>
+            <a:lvl1pPr marL="228600" indent="-228600" algn="l" defTabSz="914400" rtl="0" eaLnBrk="1" latinLnBrk="0" hangingPunct="1">
+              <a:lnSpc>
+                <a:spcPct val="90000"/>
+              </a:lnSpc>
+              <a:spcBef>
+                <a:spcPts val="1000"/>
+              </a:spcBef>
+              <a:buFont typeface="Arial" panose="020B0604020202020204" pitchFamily="34" charset="0"/>
+              <a:buChar char="•"/>
+              <a:defRPr sz="2800" kern="1200">
+                <a:solidFill>
+                  <a:schemeClr val="tx1"/>
+                </a:solidFill>
+                <a:latin typeface="+mn-lt"/>
+                <a:ea typeface="+mn-ea"/>
+                <a:cs typeface="+mn-cs"/>
+              </a:defRPr>
+            </a:lvl1pPr>
+            <a:lvl2pPr marL="685800" indent="-228600" algn="l" defTabSz="914400" rtl="0" eaLnBrk="1" latinLnBrk="0" hangingPunct="1">
+              <a:lnSpc>
+                <a:spcPct val="90000"/>
+              </a:lnSpc>
+              <a:spcBef>
+                <a:spcPts val="500"/>
+              </a:spcBef>
+              <a:buFont typeface="Arial" panose="020B0604020202020204" pitchFamily="34" charset="0"/>
+              <a:buChar char="•"/>
+              <a:defRPr sz="2400" kern="1200">
+                <a:solidFill>
+                  <a:schemeClr val="tx1"/>
+                </a:solidFill>
+                <a:latin typeface="+mn-lt"/>
+                <a:ea typeface="+mn-ea"/>
+                <a:cs typeface="+mn-cs"/>
+              </a:defRPr>
+            </a:lvl2pPr>
+            <a:lvl3pPr marL="1143000" indent="-228600" algn="l" defTabSz="914400" rtl="0" eaLnBrk="1" latinLnBrk="0" hangingPunct="1">
+              <a:lnSpc>
+                <a:spcPct val="90000"/>
+              </a:lnSpc>
+              <a:spcBef>
+                <a:spcPts val="500"/>
+              </a:spcBef>
+              <a:buFont typeface="Arial" panose="020B0604020202020204" pitchFamily="34" charset="0"/>
+              <a:buChar char="•"/>
+              <a:defRPr sz="2000" kern="1200">
+                <a:solidFill>
+                  <a:schemeClr val="tx1"/>
+                </a:solidFill>
+                <a:latin typeface="+mn-lt"/>
+                <a:ea typeface="+mn-ea"/>
+                <a:cs typeface="+mn-cs"/>
+              </a:defRPr>
+            </a:lvl3pPr>
+            <a:lvl4pPr marL="1600200" indent="-228600" algn="l" defTabSz="914400" rtl="0" eaLnBrk="1" latinLnBrk="0" hangingPunct="1">
+              <a:lnSpc>
+                <a:spcPct val="90000"/>
+              </a:lnSpc>
+              <a:spcBef>
+                <a:spcPts val="500"/>
+              </a:spcBef>
+              <a:buFont typeface="Arial" panose="020B0604020202020204" pitchFamily="34" charset="0"/>
+              <a:buChar char="•"/>
+              <a:defRPr sz="1800" kern="1200">
+                <a:solidFill>
+                  <a:schemeClr val="tx1"/>
+                </a:solidFill>
+                <a:latin typeface="+mn-lt"/>
+                <a:ea typeface="+mn-ea"/>
+                <a:cs typeface="+mn-cs"/>
+              </a:defRPr>
+            </a:lvl4pPr>
+            <a:lvl5pPr marL="2057400" indent="-228600" algn="l" defTabSz="914400" rtl="0" eaLnBrk="1" latinLnBrk="0" hangingPunct="1">
+              <a:lnSpc>
+                <a:spcPct val="90000"/>
+              </a:lnSpc>
+              <a:spcBef>
+                <a:spcPts val="500"/>
+              </a:spcBef>
+              <a:buFont typeface="Arial" panose="020B0604020202020204" pitchFamily="34" charset="0"/>
+              <a:buChar char="•"/>
+              <a:defRPr sz="1800" kern="1200">
+                <a:solidFill>
+                  <a:schemeClr val="tx1"/>
+                </a:solidFill>
+                <a:latin typeface="+mn-lt"/>
+                <a:ea typeface="+mn-ea"/>
+                <a:cs typeface="+mn-cs"/>
+              </a:defRPr>
+            </a:lvl5pPr>
+            <a:lvl6pPr marL="2514600" indent="-228600" algn="l" defTabSz="914400" rtl="0" eaLnBrk="1" latinLnBrk="0" hangingPunct="1">
+              <a:lnSpc>
+                <a:spcPct val="90000"/>
+              </a:lnSpc>
+              <a:spcBef>
+                <a:spcPts val="500"/>
+              </a:spcBef>
+              <a:buFont typeface="Arial" panose="020B0604020202020204" pitchFamily="34" charset="0"/>
+              <a:buChar char="•"/>
+              <a:defRPr sz="1800" kern="1200">
+                <a:solidFill>
+                  <a:schemeClr val="tx1"/>
+                </a:solidFill>
+                <a:latin typeface="+mn-lt"/>
+                <a:ea typeface="+mn-ea"/>
+                <a:cs typeface="+mn-cs"/>
+              </a:defRPr>
+            </a:lvl6pPr>
+            <a:lvl7pPr marL="2971800" indent="-228600" algn="l" defTabSz="914400" rtl="0" eaLnBrk="1" latinLnBrk="0" hangingPunct="1">
+              <a:lnSpc>
+                <a:spcPct val="90000"/>
+              </a:lnSpc>
+              <a:spcBef>
+                <a:spcPts val="500"/>
+              </a:spcBef>
+              <a:buFont typeface="Arial" panose="020B0604020202020204" pitchFamily="34" charset="0"/>
+              <a:buChar char="•"/>
+              <a:defRPr sz="1800" kern="1200">
+                <a:solidFill>
+                  <a:schemeClr val="tx1"/>
+                </a:solidFill>
+                <a:latin typeface="+mn-lt"/>
+                <a:ea typeface="+mn-ea"/>
+                <a:cs typeface="+mn-cs"/>
+              </a:defRPr>
+            </a:lvl7pPr>
+            <a:lvl8pPr marL="3429000" indent="-228600" algn="l" defTabSz="914400" rtl="0" eaLnBrk="1" latinLnBrk="0" hangingPunct="1">
+              <a:lnSpc>
+                <a:spcPct val="90000"/>
+              </a:lnSpc>
+              <a:spcBef>
+                <a:spcPts val="500"/>
+              </a:spcBef>
+              <a:buFont typeface="Arial" panose="020B0604020202020204" pitchFamily="34" charset="0"/>
+              <a:buChar char="•"/>
+              <a:defRPr sz="1800" kern="1200">
+                <a:solidFill>
+                  <a:schemeClr val="tx1"/>
+                </a:solidFill>
+                <a:latin typeface="+mn-lt"/>
+                <a:ea typeface="+mn-ea"/>
+                <a:cs typeface="+mn-cs"/>
+              </a:defRPr>
+            </a:lvl8pPr>
+            <a:lvl9pPr marL="3886200" indent="-228600" algn="l" defTabSz="914400" rtl="0" eaLnBrk="1" latinLnBrk="0" hangingPunct="1">
+              <a:lnSpc>
+                <a:spcPct val="90000"/>
+              </a:lnSpc>
+              <a:spcBef>
+                <a:spcPts val="500"/>
+              </a:spcBef>
+              <a:buFont typeface="Arial" panose="020B0604020202020204" pitchFamily="34" charset="0"/>
+              <a:buChar char="•"/>
+              <a:defRPr sz="1800" kern="1200">
+                <a:solidFill>
+                  <a:schemeClr val="tx1"/>
+                </a:solidFill>
+                <a:latin typeface="+mn-lt"/>
+                <a:ea typeface="+mn-ea"/>
+                <a:cs typeface="+mn-cs"/>
+              </a:defRPr>
+            </a:lvl9pPr>
+          </a:lstStyle>
+          <a:p>
+            <a:r>
+              <a:rPr lang="en-US" altLang="zh-CN" dirty="0"/>
+              <a:t>Enterprise Modeling and Analytics – the Cash Flow model</a:t>
+            </a:r>
+          </a:p>
+          <a:p>
+            <a:r>
+              <a:rPr lang="en-US" dirty="0"/>
+              <a:t>Data: date/month/time, missing values, N/A</a:t>
+            </a:r>
+          </a:p>
+          <a:p>
+            <a:r>
+              <a:rPr lang="en-US" dirty="0"/>
+              <a:t>Variables: filter data, </a:t>
+            </a:r>
+          </a:p>
+          <a:p>
+            <a:r>
+              <a:rPr lang="en-US" dirty="0"/>
+              <a:t>merge tables</a:t>
+            </a:r>
+          </a:p>
+          <a:p>
+            <a:pPr lvl="1"/>
+            <a:r>
+              <a:rPr lang="en-US" dirty="0"/>
+              <a:t>Concatenate</a:t>
+            </a:r>
+          </a:p>
+          <a:p>
+            <a:pPr lvl="1"/>
+            <a:r>
+              <a:rPr lang="en-US" dirty="0"/>
+              <a:t>match merging (with n= dataset option)</a:t>
+            </a:r>
+          </a:p>
+          <a:p>
+            <a:r>
+              <a:rPr lang="en-US" dirty="0"/>
+              <a:t>Models: logistic regression with splines</a:t>
+            </a:r>
+          </a:p>
+          <a:p>
+            <a:pPr lvl="1"/>
+            <a:r>
+              <a:rPr lang="en-US" dirty="0"/>
+              <a:t>Choose number and location of the knots.</a:t>
+            </a:r>
+          </a:p>
+          <a:p>
+            <a:r>
+              <a:rPr lang="en-US" dirty="0"/>
+              <a:t>Macro functions</a:t>
+            </a:r>
+          </a:p>
+          <a:p>
+            <a:r>
+              <a:rPr lang="en-US" dirty="0"/>
+              <a:t>Output</a:t>
+            </a:r>
+          </a:p>
+          <a:p>
+            <a:endParaRPr lang="en-US" dirty="0"/>
+          </a:p>
+        </p:txBody>
+      </p:sp>
+      <p:sp>
+        <p:nvSpPr>
+          <p:cNvPr id="5" name="TextBox 4">
+            <a:extLst>
+              <a:ext uri="{FF2B5EF4-FFF2-40B4-BE49-F238E27FC236}">
+                <a16:creationId xmlns:a16="http://schemas.microsoft.com/office/drawing/2014/main" id="{EEB02195-335B-6B7B-3FC8-0E3B8884489C}"/>
+              </a:ext>
+            </a:extLst>
+          </p:cNvPr>
+          <p:cNvSpPr txBox="1"/>
+          <p:nvPr/>
+        </p:nvSpPr>
+        <p:spPr>
+          <a:xfrm>
+            <a:off x="7542363" y="6492875"/>
+            <a:ext cx="4649637" cy="276999"/>
+          </a:xfrm>
+          <a:prstGeom prst="rect">
+            <a:avLst/>
+          </a:prstGeom>
+          <a:noFill/>
+        </p:spPr>
+        <p:txBody>
+          <a:bodyPr wrap="square" rtlCol="0">
+            <a:spAutoFit/>
+          </a:bodyPr>
+          <a:lstStyle/>
+          <a:p>
+            <a:r>
+              <a:rPr lang="en-US" sz="1200" dirty="0"/>
+              <a:t>2026, Women in Statistics and Data Science Conference, Cincinnati, OH</a:t>
+            </a:r>
+          </a:p>
+        </p:txBody>
+      </p:sp>
+    </p:spTree>
+    <p:extLst>
+      <p:ext uri="{BB962C8B-B14F-4D97-AF65-F5344CB8AC3E}">
+        <p14:creationId xmlns:p14="http://schemas.microsoft.com/office/powerpoint/2010/main" val="4097000794"/>
+      </p:ext>
+    </p:extLst>
+  </p:cSld>
+  <p:clrMapOvr>
+    <a:masterClrMapping/>
+  </p:clrMapOvr>
+</p:sld>
+</file>
+
+<file path=ppt/slides/slide12.xml><?xml version="1.0" encoding="utf-8"?>
+<p:sld xmlns:a="http://schemas.openxmlformats.org/drawingml/2006/main" xmlns:r="http://schemas.openxmlformats.org/officeDocument/2006/relationships" xmlns:p="http://schemas.openxmlformats.org/presentationml/2006/main">
+  <p:cSld>
+    <p:spTree>
+      <p:nvGrpSpPr>
+        <p:cNvPr id="1" name=""/>
+        <p:cNvGrpSpPr/>
+        <p:nvPr/>
+      </p:nvGrpSpPr>
+      <p:grpSpPr>
+        <a:xfrm>
+          <a:off x="0" y="0"/>
+          <a:ext cx="0" cy="0"/>
+          <a:chOff x="0" y="0"/>
+          <a:chExt cx="0" cy="0"/>
+        </a:xfrm>
+      </p:grpSpPr>
+      <p:sp>
+        <p:nvSpPr>
+          <p:cNvPr id="2" name="Title 1">
+            <a:extLst>
+              <a:ext uri="{FF2B5EF4-FFF2-40B4-BE49-F238E27FC236}">
+                <a16:creationId xmlns:a16="http://schemas.microsoft.com/office/drawing/2014/main" id="{BDCA0D58-006F-0ED1-D928-9053639D7AE8}"/>
+              </a:ext>
+            </a:extLst>
+          </p:cNvPr>
+          <p:cNvSpPr>
+            <a:spLocks noGrp="1"/>
+          </p:cNvSpPr>
+          <p:nvPr>
+            <p:ph type="title"/>
+          </p:nvPr>
+        </p:nvSpPr>
+        <p:spPr/>
+        <p:txBody>
+          <a:bodyPr/>
+          <a:lstStyle/>
+          <a:p>
+            <a:r>
+              <a:rPr lang="en-US" dirty="0"/>
+              <a:t>Efficiency</a:t>
+            </a:r>
+          </a:p>
+        </p:txBody>
+      </p:sp>
+      <p:sp>
+        <p:nvSpPr>
+          <p:cNvPr id="3" name="Content Placeholder 2">
+            <a:extLst>
+              <a:ext uri="{FF2B5EF4-FFF2-40B4-BE49-F238E27FC236}">
+                <a16:creationId xmlns:a16="http://schemas.microsoft.com/office/drawing/2014/main" id="{F8DC0A5E-A212-3E5A-61F0-5486D95F0C41}"/>
+              </a:ext>
+            </a:extLst>
+          </p:cNvPr>
+          <p:cNvSpPr>
+            <a:spLocks noGrp="1"/>
+          </p:cNvSpPr>
+          <p:nvPr>
+            <p:ph idx="1"/>
+          </p:nvPr>
+        </p:nvSpPr>
+        <p:spPr/>
+        <p:txBody>
+          <a:bodyPr/>
+          <a:lstStyle/>
+          <a:p>
+            <a:r>
+              <a:rPr lang="en-US" altLang="zh-CN" dirty="0"/>
+              <a:t>R/ Python is slower than</a:t>
+            </a:r>
+          </a:p>
+          <a:p>
+            <a:r>
+              <a:rPr lang="en-US" altLang="zh-CN" dirty="0"/>
+              <a:t>Do loop</a:t>
+            </a:r>
+            <a:endParaRPr lang="en-US" dirty="0"/>
+          </a:p>
+        </p:txBody>
+      </p:sp>
+    </p:spTree>
+    <p:extLst>
+      <p:ext uri="{BB962C8B-B14F-4D97-AF65-F5344CB8AC3E}">
+        <p14:creationId xmlns:p14="http://schemas.microsoft.com/office/powerpoint/2010/main" val="683459612"/>
+      </p:ext>
+    </p:extLst>
+  </p:cSld>
+  <p:clrMapOvr>
+    <a:masterClrMapping/>
+  </p:clrMapOvr>
+</p:sld>
+</file>
+
+<file path=ppt/slides/slide13.xml><?xml version="1.0" encoding="utf-8"?>
+<p:sld xmlns:a="http://schemas.openxmlformats.org/drawingml/2006/main" xmlns:r="http://schemas.openxmlformats.org/officeDocument/2006/relationships" xmlns:p="http://schemas.openxmlformats.org/presentationml/2006/main">
+  <p:cSld>
+    <p:spTree>
+      <p:nvGrpSpPr>
         <p:cNvPr id="1" name=""/>
         <p:cNvGrpSpPr/>
         <p:nvPr/>
@@ -6307,94 +11074,7 @@
 </p:sld>
 </file>
 
-<file path=ppt/slides/slide11.xml><?xml version="1.0" encoding="utf-8"?>
-<p:sld xmlns:a="http://schemas.openxmlformats.org/drawingml/2006/main" xmlns:r="http://schemas.openxmlformats.org/officeDocument/2006/relationships" xmlns:p="http://schemas.openxmlformats.org/presentationml/2006/main">
-  <p:cSld>
-    <p:spTree>
-      <p:nvGrpSpPr>
-        <p:cNvPr id="1" name=""/>
-        <p:cNvGrpSpPr/>
-        <p:nvPr/>
-      </p:nvGrpSpPr>
-      <p:grpSpPr>
-        <a:xfrm>
-          <a:off x="0" y="0"/>
-          <a:ext cx="0" cy="0"/>
-          <a:chOff x="0" y="0"/>
-          <a:chExt cx="0" cy="0"/>
-        </a:xfrm>
-      </p:grpSpPr>
-      <p:sp>
-        <p:nvSpPr>
-          <p:cNvPr id="2" name="Title 1">
-            <a:extLst>
-              <a:ext uri="{FF2B5EF4-FFF2-40B4-BE49-F238E27FC236}">
-                <a16:creationId xmlns:a16="http://schemas.microsoft.com/office/drawing/2014/main" id="{BDCA0D58-006F-0ED1-D928-9053639D7AE8}"/>
-              </a:ext>
-            </a:extLst>
-          </p:cNvPr>
-          <p:cNvSpPr>
-            <a:spLocks noGrp="1"/>
-          </p:cNvSpPr>
-          <p:nvPr>
-            <p:ph type="title"/>
-          </p:nvPr>
-        </p:nvSpPr>
-        <p:spPr/>
-        <p:txBody>
-          <a:bodyPr/>
-          <a:lstStyle/>
-          <a:p>
-            <a:r>
-              <a:rPr lang="en-US" dirty="0"/>
-              <a:t>Efficiency</a:t>
-            </a:r>
-          </a:p>
-        </p:txBody>
-      </p:sp>
-      <p:sp>
-        <p:nvSpPr>
-          <p:cNvPr id="3" name="Content Placeholder 2">
-            <a:extLst>
-              <a:ext uri="{FF2B5EF4-FFF2-40B4-BE49-F238E27FC236}">
-                <a16:creationId xmlns:a16="http://schemas.microsoft.com/office/drawing/2014/main" id="{F8DC0A5E-A212-3E5A-61F0-5486D95F0C41}"/>
-              </a:ext>
-            </a:extLst>
-          </p:cNvPr>
-          <p:cNvSpPr>
-            <a:spLocks noGrp="1"/>
-          </p:cNvSpPr>
-          <p:nvPr>
-            <p:ph idx="1"/>
-          </p:nvPr>
-        </p:nvSpPr>
-        <p:spPr/>
-        <p:txBody>
-          <a:bodyPr/>
-          <a:lstStyle/>
-          <a:p>
-            <a:r>
-              <a:rPr lang="en-US" altLang="zh-CN"/>
-              <a:t>Do loop</a:t>
-            </a:r>
-            <a:endParaRPr lang="en-US"/>
-          </a:p>
-        </p:txBody>
-      </p:sp>
-    </p:spTree>
-    <p:extLst>
-      <p:ext uri="{BB962C8B-B14F-4D97-AF65-F5344CB8AC3E}">
-        <p14:creationId xmlns:p14="http://schemas.microsoft.com/office/powerpoint/2010/main" val="683459612"/>
-      </p:ext>
-    </p:extLst>
-  </p:cSld>
-  <p:clrMapOvr>
-    <a:masterClrMapping/>
-  </p:clrMapOvr>
-</p:sld>
-</file>
-
-<file path=ppt/slides/slide12.xml><?xml version="1.0" encoding="utf-8"?>
+<file path=ppt/slides/slide14.xml><?xml version="1.0" encoding="utf-8"?>
 <p:sld xmlns:a="http://schemas.openxmlformats.org/drawingml/2006/main" xmlns:r="http://schemas.openxmlformats.org/officeDocument/2006/relationships" xmlns:p="http://schemas.openxmlformats.org/presentationml/2006/main">
   <p:cSld>
     <p:spTree>
@@ -6481,7 +11161,7 @@
 </p:sld>
 </file>
 
-<file path=ppt/slides/slide13.xml><?xml version="1.0" encoding="utf-8"?>
+<file path=ppt/slides/slide15.xml><?xml version="1.0" encoding="utf-8"?>
 <p:sld xmlns:a="http://schemas.openxmlformats.org/drawingml/2006/main" xmlns:r="http://schemas.openxmlformats.org/officeDocument/2006/relationships" xmlns:p="http://schemas.openxmlformats.org/presentationml/2006/main">
   <p:cSld>
     <p:spTree>
@@ -6564,7 +11244,7 @@
 </p:sld>
 </file>
 
-<file path=ppt/slides/slide14.xml><?xml version="1.0" encoding="utf-8"?>
+<file path=ppt/slides/slide16.xml><?xml version="1.0" encoding="utf-8"?>
 <p:sld xmlns:a="http://schemas.openxmlformats.org/drawingml/2006/main" xmlns:r="http://schemas.openxmlformats.org/officeDocument/2006/relationships" xmlns:p="http://schemas.openxmlformats.org/presentationml/2006/main">
   <p:cSld>
     <p:spTree>
@@ -6683,7 +11363,7 @@
 </p:sld>
 </file>
 
-<file path=ppt/slides/slide15.xml><?xml version="1.0" encoding="utf-8"?>
+<file path=ppt/slides/slide17.xml><?xml version="1.0" encoding="utf-8"?>
 <p:sld xmlns:a="http://schemas.openxmlformats.org/drawingml/2006/main" xmlns:r="http://schemas.openxmlformats.org/officeDocument/2006/relationships" xmlns:p="http://schemas.openxmlformats.org/presentationml/2006/main">
   <p:cSld>
     <p:spTree>
@@ -6897,7 +11577,7 @@
 </p:sld>
 </file>
 
-<file path=ppt/slides/slide16.xml><?xml version="1.0" encoding="utf-8"?>
+<file path=ppt/slides/slide18.xml><?xml version="1.0" encoding="utf-8"?>
 <p:sld xmlns:a="http://schemas.openxmlformats.org/drawingml/2006/main" xmlns:r="http://schemas.openxmlformats.org/officeDocument/2006/relationships" xmlns:p="http://schemas.openxmlformats.org/presentationml/2006/main">
   <p:cSld>
     <p:spTree>
@@ -7130,15 +11810,7 @@
             </a:pPr>
             <a:r>
               <a:rPr lang="en-US" sz="3600" dirty="0"/>
-              <a:t>Additional </a:t>
-            </a:r>
-            <a:r>
-              <a:rPr lang="en-US" sz="3600"/>
-              <a:t>value: Accuracy </a:t>
-            </a:r>
-            <a:r>
-              <a:rPr lang="en-US" sz="3600" dirty="0"/>
-              <a:t>and Efficiency </a:t>
+              <a:t>Additional value: Efficiency and Accuracy</a:t>
             </a:r>
           </a:p>
           <a:p>
@@ -7240,14 +11912,19 @@
             <p:ph type="title"/>
           </p:nvPr>
         </p:nvSpPr>
-        <p:spPr/>
+        <p:spPr>
+          <a:xfrm>
+            <a:off x="838200" y="365125"/>
+            <a:ext cx="11092132" cy="1325563"/>
+          </a:xfrm>
+        </p:spPr>
         <p:txBody>
           <a:bodyPr/>
           <a:lstStyle/>
           <a:p>
             <a:r>
               <a:rPr lang="en-US" dirty="0"/>
-              <a:t>1.Background</a:t>
+              <a:t>1.Background – Fannie Mae and cloud migration</a:t>
             </a:r>
           </a:p>
         </p:txBody>
@@ -7271,7 +11948,7 @@
         <p:spPr>
           <a:xfrm>
             <a:off x="777815" y="1498251"/>
-            <a:ext cx="10515600" cy="585066"/>
+            <a:ext cx="5691996" cy="585066"/>
           </a:xfrm>
         </p:spPr>
         <p:txBody>
@@ -7310,7 +11987,7 @@
         </p:blipFill>
         <p:spPr>
           <a:xfrm>
-            <a:off x="1116042" y="2008292"/>
+            <a:off x="590144" y="2379680"/>
             <a:ext cx="2301815" cy="1208151"/>
           </a:xfrm>
           <a:prstGeom prst="rect">
@@ -7355,53 +12032,6 @@
       </p:sp>
       <p:pic>
         <p:nvPicPr>
-          <p:cNvPr id="1026" name="Picture 2" descr="Buy The Fateful History of Fannie Mae at Amazon">
-            <a:extLst>
-              <a:ext uri="{FF2B5EF4-FFF2-40B4-BE49-F238E27FC236}">
-                <a16:creationId xmlns:a16="http://schemas.microsoft.com/office/drawing/2014/main" id="{54F77962-5E48-8590-5D1F-2E1D0804454A}"/>
-              </a:ext>
-            </a:extLst>
-          </p:cNvPr>
-          <p:cNvPicPr>
-            <a:picLocks noChangeAspect="1" noChangeArrowheads="1"/>
-          </p:cNvPicPr>
-          <p:nvPr/>
-        </p:nvPicPr>
-        <p:blipFill>
-          <a:blip r:embed="rId3">
-            <a:extLst>
-              <a:ext uri="{28A0092B-C50C-407E-A947-70E740481C1C}">
-                <a14:useLocalDpi xmlns:a14="http://schemas.microsoft.com/office/drawing/2010/main" val="0"/>
-              </a:ext>
-            </a:extLst>
-          </a:blip>
-          <a:srcRect/>
-          <a:stretch>
-            <a:fillRect/>
-          </a:stretch>
-        </p:blipFill>
-        <p:spPr bwMode="auto">
-          <a:xfrm>
-            <a:off x="9161252" y="2372266"/>
-            <a:ext cx="2563483" cy="3759775"/>
-          </a:xfrm>
-          <a:prstGeom prst="rect">
-            <a:avLst/>
-          </a:prstGeom>
-          <a:noFill/>
-          <a:extLst>
-            <a:ext uri="{909E8E84-426E-40DD-AFC4-6F175D3DCCD1}">
-              <a14:hiddenFill xmlns:a14="http://schemas.microsoft.com/office/drawing/2010/main">
-                <a:solidFill>
-                  <a:srgbClr val="FFFFFF"/>
-                </a:solidFill>
-              </a14:hiddenFill>
-            </a:ext>
-          </a:extLst>
-        </p:spPr>
-      </p:pic>
-      <p:pic>
-        <p:nvPicPr>
           <p:cNvPr id="13" name="Picture 12">
             <a:extLst>
               <a:ext uri="{FF2B5EF4-FFF2-40B4-BE49-F238E27FC236}">
@@ -7415,7 +12045,7 @@
           <p:nvPr/>
         </p:nvPicPr>
         <p:blipFill>
-          <a:blip r:embed="rId4">
+          <a:blip r:embed="rId3">
             <a:extLst>
               <a:ext uri="{28A0092B-C50C-407E-A947-70E740481C1C}">
                 <a14:useLocalDpi xmlns:a14="http://schemas.microsoft.com/office/drawing/2010/main" val="0"/>
@@ -7428,14 +12058,42 @@
         </p:blipFill>
         <p:spPr>
           <a:xfrm>
-            <a:off x="1315402" y="3555558"/>
-            <a:ext cx="7313887" cy="2576483"/>
+            <a:off x="177925" y="4317361"/>
+            <a:ext cx="5918075" cy="2084776"/>
           </a:xfrm>
           <a:prstGeom prst="rect">
             <a:avLst/>
           </a:prstGeom>
         </p:spPr>
       </p:pic>
+      <p:graphicFrame>
+        <p:nvGraphicFramePr>
+          <p:cNvPr id="5" name="Diagram 4">
+            <a:extLst>
+              <a:ext uri="{FF2B5EF4-FFF2-40B4-BE49-F238E27FC236}">
+                <a16:creationId xmlns:a16="http://schemas.microsoft.com/office/drawing/2014/main" id="{D09CA8B3-F6AF-00DD-B037-578938DDCF81}"/>
+              </a:ext>
+            </a:extLst>
+          </p:cNvPr>
+          <p:cNvGraphicFramePr/>
+          <p:nvPr>
+            <p:extLst>
+              <p:ext uri="{D42A27DB-BD31-4B8C-83A1-F6EECF244321}">
+                <p14:modId xmlns:p14="http://schemas.microsoft.com/office/powerpoint/2010/main" val="85743466"/>
+              </p:ext>
+            </p:extLst>
+          </p:nvPr>
+        </p:nvGraphicFramePr>
+        <p:xfrm>
+          <a:off x="6292491" y="2083317"/>
+          <a:ext cx="5899509" cy="4352665"/>
+        </p:xfrm>
+        <a:graphic>
+          <a:graphicData uri="http://schemas.openxmlformats.org/drawingml/2006/diagram">
+            <dgm:relIds xmlns:dgm="http://schemas.openxmlformats.org/drawingml/2006/diagram" xmlns:r="http://schemas.openxmlformats.org/officeDocument/2006/relationships" r:dm="rId4" r:lo="rId5" r:qs="rId6" r:cs="rId7"/>
+          </a:graphicData>
+        </a:graphic>
+      </p:graphicFrame>
     </p:spTree>
     <p:extLst>
       <p:ext uri="{BB962C8B-B14F-4D97-AF65-F5344CB8AC3E}">
@@ -7450,6 +12108,493 @@
 </file>
 
 <file path=ppt/slides/slide4.xml><?xml version="1.0" encoding="utf-8"?>
+<p:sld xmlns:a="http://schemas.openxmlformats.org/drawingml/2006/main" xmlns:r="http://schemas.openxmlformats.org/officeDocument/2006/relationships" xmlns:p="http://schemas.openxmlformats.org/presentationml/2006/main">
+  <p:cSld>
+    <p:spTree>
+      <p:nvGrpSpPr>
+        <p:cNvPr id="1" name="">
+          <a:extLst>
+            <a:ext uri="{FF2B5EF4-FFF2-40B4-BE49-F238E27FC236}">
+              <a16:creationId xmlns:a16="http://schemas.microsoft.com/office/drawing/2014/main" id="{3B4F882F-D782-9FDA-A7C4-638CA99A47B6}"/>
+            </a:ext>
+          </a:extLst>
+        </p:cNvPr>
+        <p:cNvGrpSpPr/>
+        <p:nvPr/>
+      </p:nvGrpSpPr>
+      <p:grpSpPr>
+        <a:xfrm>
+          <a:off x="0" y="0"/>
+          <a:ext cx="0" cy="0"/>
+          <a:chOff x="0" y="0"/>
+          <a:chExt cx="0" cy="0"/>
+        </a:xfrm>
+      </p:grpSpPr>
+      <p:sp>
+        <p:nvSpPr>
+          <p:cNvPr id="2" name="Title 1">
+            <a:extLst>
+              <a:ext uri="{FF2B5EF4-FFF2-40B4-BE49-F238E27FC236}">
+                <a16:creationId xmlns:a16="http://schemas.microsoft.com/office/drawing/2014/main" id="{18CDA0EB-8A86-C17A-5138-140FA594D8D9}"/>
+              </a:ext>
+            </a:extLst>
+          </p:cNvPr>
+          <p:cNvSpPr>
+            <a:spLocks noGrp="1"/>
+          </p:cNvSpPr>
+          <p:nvPr>
+            <p:ph type="title"/>
+          </p:nvPr>
+        </p:nvSpPr>
+        <p:spPr>
+          <a:xfrm>
+            <a:off x="838200" y="365125"/>
+            <a:ext cx="11092132" cy="1325563"/>
+          </a:xfrm>
+        </p:spPr>
+        <p:txBody>
+          <a:bodyPr/>
+          <a:lstStyle/>
+          <a:p>
+            <a:r>
+              <a:rPr lang="en-US" dirty="0"/>
+              <a:t>1.Background – Fannie Mae and cloud migration</a:t>
+            </a:r>
+          </a:p>
+        </p:txBody>
+      </p:sp>
+      <p:sp>
+        <p:nvSpPr>
+          <p:cNvPr id="3" name="Content Placeholder 2">
+            <a:extLst>
+              <a:ext uri="{FF2B5EF4-FFF2-40B4-BE49-F238E27FC236}">
+                <a16:creationId xmlns:a16="http://schemas.microsoft.com/office/drawing/2014/main" id="{75FE67F2-C177-752E-1FA2-340506D3C9F7}"/>
+              </a:ext>
+            </a:extLst>
+          </p:cNvPr>
+          <p:cNvSpPr>
+            <a:spLocks noGrp="1"/>
+          </p:cNvSpPr>
+          <p:nvPr>
+            <p:ph idx="1"/>
+          </p:nvPr>
+        </p:nvSpPr>
+        <p:spPr>
+          <a:xfrm>
+            <a:off x="777815" y="1498251"/>
+            <a:ext cx="5691996" cy="585066"/>
+          </a:xfrm>
+        </p:spPr>
+        <p:txBody>
+          <a:bodyPr/>
+          <a:lstStyle/>
+          <a:p>
+            <a:r>
+              <a:rPr lang="en-US" dirty="0"/>
+              <a:t>What is the problem and why</a:t>
+            </a:r>
+          </a:p>
+          <a:p>
+            <a:endParaRPr lang="en-US" dirty="0"/>
+          </a:p>
+        </p:txBody>
+      </p:sp>
+      <p:sp>
+        <p:nvSpPr>
+          <p:cNvPr id="11" name="TextBox 10">
+            <a:extLst>
+              <a:ext uri="{FF2B5EF4-FFF2-40B4-BE49-F238E27FC236}">
+                <a16:creationId xmlns:a16="http://schemas.microsoft.com/office/drawing/2014/main" id="{EF5FC91A-FA92-5907-9456-EA27FC61D67C}"/>
+              </a:ext>
+            </a:extLst>
+          </p:cNvPr>
+          <p:cNvSpPr txBox="1"/>
+          <p:nvPr/>
+        </p:nvSpPr>
+        <p:spPr>
+          <a:xfrm>
+            <a:off x="7542363" y="6492875"/>
+            <a:ext cx="4649637" cy="276999"/>
+          </a:xfrm>
+          <a:prstGeom prst="rect">
+            <a:avLst/>
+          </a:prstGeom>
+          <a:noFill/>
+        </p:spPr>
+        <p:txBody>
+          <a:bodyPr wrap="square" rtlCol="0">
+            <a:spAutoFit/>
+          </a:bodyPr>
+          <a:lstStyle/>
+          <a:p>
+            <a:r>
+              <a:rPr lang="en-US" sz="1200" dirty="0"/>
+              <a:t>2026, Women in Statistics and Data Science Conference, Cincinnati, OH</a:t>
+            </a:r>
+          </a:p>
+        </p:txBody>
+      </p:sp>
+      <p:pic>
+        <p:nvPicPr>
+          <p:cNvPr id="6" name="Picture 5">
+            <a:extLst>
+              <a:ext uri="{FF2B5EF4-FFF2-40B4-BE49-F238E27FC236}">
+                <a16:creationId xmlns:a16="http://schemas.microsoft.com/office/drawing/2014/main" id="{6340F641-F8E6-3057-3D70-DDCFE5551478}"/>
+              </a:ext>
+            </a:extLst>
+          </p:cNvPr>
+          <p:cNvPicPr>
+            <a:picLocks noChangeAspect="1"/>
+          </p:cNvPicPr>
+          <p:nvPr/>
+        </p:nvPicPr>
+        <p:blipFill>
+          <a:blip r:embed="rId2"/>
+          <a:stretch>
+            <a:fillRect/>
+          </a:stretch>
+        </p:blipFill>
+        <p:spPr>
+          <a:xfrm>
+            <a:off x="1112650" y="2307348"/>
+            <a:ext cx="2007612" cy="2007612"/>
+          </a:xfrm>
+          <a:prstGeom prst="rect">
+            <a:avLst/>
+          </a:prstGeom>
+        </p:spPr>
+      </p:pic>
+      <p:pic>
+        <p:nvPicPr>
+          <p:cNvPr id="7" name="Picture 6">
+            <a:extLst>
+              <a:ext uri="{FF2B5EF4-FFF2-40B4-BE49-F238E27FC236}">
+                <a16:creationId xmlns:a16="http://schemas.microsoft.com/office/drawing/2014/main" id="{3F6480D7-26D2-3482-A7ED-592B9035E641}"/>
+              </a:ext>
+            </a:extLst>
+          </p:cNvPr>
+          <p:cNvPicPr>
+            <a:picLocks noChangeAspect="1"/>
+          </p:cNvPicPr>
+          <p:nvPr/>
+        </p:nvPicPr>
+        <p:blipFill>
+          <a:blip r:embed="rId3"/>
+          <a:stretch>
+            <a:fillRect/>
+          </a:stretch>
+        </p:blipFill>
+        <p:spPr>
+          <a:xfrm>
+            <a:off x="3736676" y="4538992"/>
+            <a:ext cx="1953883" cy="1953883"/>
+          </a:xfrm>
+          <a:prstGeom prst="rect">
+            <a:avLst/>
+          </a:prstGeom>
+        </p:spPr>
+      </p:pic>
+      <p:pic>
+        <p:nvPicPr>
+          <p:cNvPr id="8" name="Picture 7">
+            <a:extLst>
+              <a:ext uri="{FF2B5EF4-FFF2-40B4-BE49-F238E27FC236}">
+                <a16:creationId xmlns:a16="http://schemas.microsoft.com/office/drawing/2014/main" id="{E83B4DBD-0145-6AEA-FF24-821FDDB1F475}"/>
+              </a:ext>
+            </a:extLst>
+          </p:cNvPr>
+          <p:cNvPicPr>
+            <a:picLocks noChangeAspect="1"/>
+          </p:cNvPicPr>
+          <p:nvPr/>
+        </p:nvPicPr>
+        <p:blipFill>
+          <a:blip r:embed="rId4"/>
+          <a:stretch>
+            <a:fillRect/>
+          </a:stretch>
+        </p:blipFill>
+        <p:spPr>
+          <a:xfrm>
+            <a:off x="403734" y="4692020"/>
+            <a:ext cx="2962275" cy="1647825"/>
+          </a:xfrm>
+          <a:prstGeom prst="rect">
+            <a:avLst/>
+          </a:prstGeom>
+        </p:spPr>
+      </p:pic>
+      <p:pic>
+        <p:nvPicPr>
+          <p:cNvPr id="9" name="Picture 8">
+            <a:extLst>
+              <a:ext uri="{FF2B5EF4-FFF2-40B4-BE49-F238E27FC236}">
+                <a16:creationId xmlns:a16="http://schemas.microsoft.com/office/drawing/2014/main" id="{B279E0B5-B727-D5A9-055D-3DC0F311CEBE}"/>
+              </a:ext>
+            </a:extLst>
+          </p:cNvPr>
+          <p:cNvPicPr>
+            <a:picLocks noChangeAspect="1"/>
+          </p:cNvPicPr>
+          <p:nvPr/>
+        </p:nvPicPr>
+        <p:blipFill>
+          <a:blip r:embed="rId5"/>
+          <a:stretch>
+            <a:fillRect/>
+          </a:stretch>
+        </p:blipFill>
+        <p:spPr>
+          <a:xfrm>
+            <a:off x="9160350" y="2826494"/>
+            <a:ext cx="2174759" cy="1205012"/>
+          </a:xfrm>
+          <a:prstGeom prst="rect">
+            <a:avLst/>
+          </a:prstGeom>
+        </p:spPr>
+      </p:pic>
+      <p:pic>
+        <p:nvPicPr>
+          <p:cNvPr id="10" name="Picture 9">
+            <a:extLst>
+              <a:ext uri="{FF2B5EF4-FFF2-40B4-BE49-F238E27FC236}">
+                <a16:creationId xmlns:a16="http://schemas.microsoft.com/office/drawing/2014/main" id="{6CE0E9E8-3561-D27F-FB1C-BD3FE6C2A053}"/>
+              </a:ext>
+            </a:extLst>
+          </p:cNvPr>
+          <p:cNvPicPr>
+            <a:picLocks noChangeAspect="1"/>
+          </p:cNvPicPr>
+          <p:nvPr/>
+        </p:nvPicPr>
+        <p:blipFill>
+          <a:blip r:embed="rId6"/>
+          <a:stretch>
+            <a:fillRect/>
+          </a:stretch>
+        </p:blipFill>
+        <p:spPr>
+          <a:xfrm>
+            <a:off x="3292573" y="2573648"/>
+            <a:ext cx="1699245" cy="1130060"/>
+          </a:xfrm>
+          <a:prstGeom prst="rect">
+            <a:avLst/>
+          </a:prstGeom>
+        </p:spPr>
+      </p:pic>
+    </p:spTree>
+    <p:extLst>
+      <p:ext uri="{BB962C8B-B14F-4D97-AF65-F5344CB8AC3E}">
+        <p14:creationId xmlns:p14="http://schemas.microsoft.com/office/powerpoint/2010/main" val="1635633002"/>
+      </p:ext>
+    </p:extLst>
+  </p:cSld>
+  <p:clrMapOvr>
+    <a:masterClrMapping/>
+  </p:clrMapOvr>
+</p:sld>
+</file>
+
+<file path=ppt/slides/slide5.xml><?xml version="1.0" encoding="utf-8"?>
+<p:sld xmlns:a="http://schemas.openxmlformats.org/drawingml/2006/main" xmlns:r="http://schemas.openxmlformats.org/officeDocument/2006/relationships" xmlns:p="http://schemas.openxmlformats.org/presentationml/2006/main">
+  <p:cSld>
+    <p:spTree>
+      <p:nvGrpSpPr>
+        <p:cNvPr id="1" name="">
+          <a:extLst>
+            <a:ext uri="{FF2B5EF4-FFF2-40B4-BE49-F238E27FC236}">
+              <a16:creationId xmlns:a16="http://schemas.microsoft.com/office/drawing/2014/main" id="{92BFB569-8DFD-66E2-48FC-0E51EBAA34B5}"/>
+            </a:ext>
+          </a:extLst>
+        </p:cNvPr>
+        <p:cNvGrpSpPr/>
+        <p:nvPr/>
+      </p:nvGrpSpPr>
+      <p:grpSpPr>
+        <a:xfrm>
+          <a:off x="0" y="0"/>
+          <a:ext cx="0" cy="0"/>
+          <a:chOff x="0" y="0"/>
+          <a:chExt cx="0" cy="0"/>
+        </a:xfrm>
+      </p:grpSpPr>
+      <p:sp>
+        <p:nvSpPr>
+          <p:cNvPr id="2" name="Title 1">
+            <a:extLst>
+              <a:ext uri="{FF2B5EF4-FFF2-40B4-BE49-F238E27FC236}">
+                <a16:creationId xmlns:a16="http://schemas.microsoft.com/office/drawing/2014/main" id="{AE796B7E-4004-A095-EE40-DCB4D9B6CEBA}"/>
+              </a:ext>
+            </a:extLst>
+          </p:cNvPr>
+          <p:cNvSpPr>
+            <a:spLocks noGrp="1"/>
+          </p:cNvSpPr>
+          <p:nvPr>
+            <p:ph type="title"/>
+          </p:nvPr>
+        </p:nvSpPr>
+        <p:spPr/>
+        <p:txBody>
+          <a:bodyPr/>
+          <a:lstStyle/>
+          <a:p>
+            <a:r>
+              <a:rPr lang="en-US" dirty="0"/>
+              <a:t>2.Cloud Migration in Fannie Mae</a:t>
+            </a:r>
+          </a:p>
+        </p:txBody>
+      </p:sp>
+      <p:sp>
+        <p:nvSpPr>
+          <p:cNvPr id="3" name="Content Placeholder 2">
+            <a:extLst>
+              <a:ext uri="{FF2B5EF4-FFF2-40B4-BE49-F238E27FC236}">
+                <a16:creationId xmlns:a16="http://schemas.microsoft.com/office/drawing/2014/main" id="{2B2B221D-14C4-F1B4-56D8-C8BBFA8E5867}"/>
+              </a:ext>
+            </a:extLst>
+          </p:cNvPr>
+          <p:cNvSpPr>
+            <a:spLocks noGrp="1"/>
+          </p:cNvSpPr>
+          <p:nvPr>
+            <p:ph idx="1"/>
+          </p:nvPr>
+        </p:nvSpPr>
+        <p:spPr>
+          <a:xfrm>
+            <a:off x="631166" y="1611893"/>
+            <a:ext cx="8228162" cy="512133"/>
+          </a:xfrm>
+        </p:spPr>
+        <p:txBody>
+          <a:bodyPr/>
+          <a:lstStyle/>
+          <a:p>
+            <a:r>
+              <a:rPr lang="en-US" altLang="zh-CN" dirty="0"/>
+              <a:t>Cloud adoption is a key for the digital transformation</a:t>
+            </a:r>
+          </a:p>
+        </p:txBody>
+      </p:sp>
+      <p:sp>
+        <p:nvSpPr>
+          <p:cNvPr id="4" name="TextBox 3">
+            <a:extLst>
+              <a:ext uri="{FF2B5EF4-FFF2-40B4-BE49-F238E27FC236}">
+                <a16:creationId xmlns:a16="http://schemas.microsoft.com/office/drawing/2014/main" id="{C0BC3A5D-6610-AA58-25BF-30BC75C3918A}"/>
+              </a:ext>
+            </a:extLst>
+          </p:cNvPr>
+          <p:cNvSpPr txBox="1"/>
+          <p:nvPr/>
+        </p:nvSpPr>
+        <p:spPr>
+          <a:xfrm>
+            <a:off x="7542363" y="6492875"/>
+            <a:ext cx="4649637" cy="276999"/>
+          </a:xfrm>
+          <a:prstGeom prst="rect">
+            <a:avLst/>
+          </a:prstGeom>
+          <a:noFill/>
+        </p:spPr>
+        <p:txBody>
+          <a:bodyPr wrap="square" rtlCol="0">
+            <a:spAutoFit/>
+          </a:bodyPr>
+          <a:lstStyle/>
+          <a:p>
+            <a:r>
+              <a:rPr lang="en-US" sz="1200" dirty="0"/>
+              <a:t>2026, Women in Statistics and Data Science Conference, Cincinnati, OH</a:t>
+            </a:r>
+          </a:p>
+        </p:txBody>
+      </p:sp>
+      <p:pic>
+        <p:nvPicPr>
+          <p:cNvPr id="12" name="Picture 11">
+            <a:extLst>
+              <a:ext uri="{FF2B5EF4-FFF2-40B4-BE49-F238E27FC236}">
+                <a16:creationId xmlns:a16="http://schemas.microsoft.com/office/drawing/2014/main" id="{F9BA9E7C-9A80-3F03-CBAB-AD3A076105E6}"/>
+              </a:ext>
+            </a:extLst>
+          </p:cNvPr>
+          <p:cNvPicPr>
+            <a:picLocks noChangeAspect="1"/>
+          </p:cNvPicPr>
+          <p:nvPr/>
+        </p:nvPicPr>
+        <p:blipFill>
+          <a:blip r:embed="rId2"/>
+          <a:stretch>
+            <a:fillRect/>
+          </a:stretch>
+        </p:blipFill>
+        <p:spPr>
+          <a:xfrm>
+            <a:off x="7893169" y="2902760"/>
+            <a:ext cx="4140679" cy="3428999"/>
+          </a:xfrm>
+          <a:prstGeom prst="rect">
+            <a:avLst/>
+          </a:prstGeom>
+        </p:spPr>
+      </p:pic>
+      <p:sp>
+        <p:nvSpPr>
+          <p:cNvPr id="13" name="TextBox 12">
+            <a:extLst>
+              <a:ext uri="{FF2B5EF4-FFF2-40B4-BE49-F238E27FC236}">
+                <a16:creationId xmlns:a16="http://schemas.microsoft.com/office/drawing/2014/main" id="{C5523028-E3C7-8565-37A0-0CFFDC70841B}"/>
+              </a:ext>
+            </a:extLst>
+          </p:cNvPr>
+          <p:cNvSpPr txBox="1"/>
+          <p:nvPr/>
+        </p:nvSpPr>
+        <p:spPr>
+          <a:xfrm>
+            <a:off x="8403045" y="2268204"/>
+            <a:ext cx="2950755" cy="369332"/>
+          </a:xfrm>
+          <a:prstGeom prst="rect">
+            <a:avLst/>
+          </a:prstGeom>
+          <a:noFill/>
+        </p:spPr>
+        <p:txBody>
+          <a:bodyPr wrap="square">
+            <a:spAutoFit/>
+          </a:bodyPr>
+          <a:lstStyle/>
+          <a:p>
+            <a:r>
+              <a:rPr lang="en-US" dirty="0"/>
+              <a:t>7 Rs in AWS Cloud Migration</a:t>
+            </a:r>
+          </a:p>
+        </p:txBody>
+      </p:sp>
+    </p:spTree>
+    <p:extLst>
+      <p:ext uri="{BB962C8B-B14F-4D97-AF65-F5344CB8AC3E}">
+        <p14:creationId xmlns:p14="http://schemas.microsoft.com/office/powerpoint/2010/main" val="639017355"/>
+      </p:ext>
+    </p:extLst>
+  </p:cSld>
+  <p:clrMapOvr>
+    <a:masterClrMapping/>
+  </p:clrMapOvr>
+</p:sld>
+</file>
+
+<file path=ppt/slides/slide6.xml><?xml version="1.0" encoding="utf-8"?>
 <p:sld xmlns:a="http://schemas.openxmlformats.org/drawingml/2006/main" xmlns:r="http://schemas.openxmlformats.org/officeDocument/2006/relationships" xmlns:p="http://schemas.openxmlformats.org/presentationml/2006/main">
   <p:cSld>
     <p:spTree>
@@ -7763,7 +12908,7 @@
 </p:sld>
 </file>
 
-<file path=ppt/slides/slide5.xml><?xml version="1.0" encoding="utf-8"?>
+<file path=ppt/slides/slide7.xml><?xml version="1.0" encoding="utf-8"?>
 <p:sld xmlns:a="http://schemas.openxmlformats.org/drawingml/2006/main" xmlns:r="http://schemas.openxmlformats.org/officeDocument/2006/relationships" xmlns:p="http://schemas.openxmlformats.org/presentationml/2006/main">
   <p:cSld>
     <p:spTree>
@@ -7908,7 +13053,7 @@
 </p:sld>
 </file>
 
-<file path=ppt/slides/slide6.xml><?xml version="1.0" encoding="utf-8"?>
+<file path=ppt/slides/slide8.xml><?xml version="1.0" encoding="utf-8"?>
 <p:sld xmlns:a="http://schemas.openxmlformats.org/drawingml/2006/main" xmlns:r="http://schemas.openxmlformats.org/officeDocument/2006/relationships" xmlns:p="http://schemas.openxmlformats.org/presentationml/2006/main">
   <p:cSld>
     <p:spTree>
@@ -8775,7 +13920,7 @@
 </p:sld>
 </file>
 
-<file path=ppt/slides/slide7.xml><?xml version="1.0" encoding="utf-8"?>
+<file path=ppt/slides/slide9.xml><?xml version="1.0" encoding="utf-8"?>
 <p:sld xmlns:a="http://schemas.openxmlformats.org/drawingml/2006/main" xmlns:r="http://schemas.openxmlformats.org/officeDocument/2006/relationships" xmlns:p="http://schemas.openxmlformats.org/presentationml/2006/main">
   <p:cSld>
     <p:spTree>
@@ -9229,656 +14374,6 @@
     <p:extLst>
       <p:ext uri="{BB962C8B-B14F-4D97-AF65-F5344CB8AC3E}">
         <p14:creationId xmlns:p14="http://schemas.microsoft.com/office/powerpoint/2010/main" val="3421575707"/>
-      </p:ext>
-    </p:extLst>
-  </p:cSld>
-  <p:clrMapOvr>
-    <a:masterClrMapping/>
-  </p:clrMapOvr>
-</p:sld>
-</file>
-
-<file path=ppt/slides/slide8.xml><?xml version="1.0" encoding="utf-8"?>
-<p:sld xmlns:a="http://schemas.openxmlformats.org/drawingml/2006/main" xmlns:r="http://schemas.openxmlformats.org/officeDocument/2006/relationships" xmlns:p="http://schemas.openxmlformats.org/presentationml/2006/main">
-  <p:cSld>
-    <p:spTree>
-      <p:nvGrpSpPr>
-        <p:cNvPr id="1" name="">
-          <a:extLst>
-            <a:ext uri="{FF2B5EF4-FFF2-40B4-BE49-F238E27FC236}">
-              <a16:creationId xmlns:a16="http://schemas.microsoft.com/office/drawing/2014/main" id="{24795404-4793-4153-45B6-147571F0820C}"/>
-            </a:ext>
-          </a:extLst>
-        </p:cNvPr>
-        <p:cNvGrpSpPr/>
-        <p:nvPr/>
-      </p:nvGrpSpPr>
-      <p:grpSpPr>
-        <a:xfrm>
-          <a:off x="0" y="0"/>
-          <a:ext cx="0" cy="0"/>
-          <a:chOff x="0" y="0"/>
-          <a:chExt cx="0" cy="0"/>
-        </a:xfrm>
-      </p:grpSpPr>
-      <p:sp>
-        <p:nvSpPr>
-          <p:cNvPr id="2" name="Title 1">
-            <a:extLst>
-              <a:ext uri="{FF2B5EF4-FFF2-40B4-BE49-F238E27FC236}">
-                <a16:creationId xmlns:a16="http://schemas.microsoft.com/office/drawing/2014/main" id="{A1D02713-65CC-0B2F-4169-1F342A167AE8}"/>
-              </a:ext>
-            </a:extLst>
-          </p:cNvPr>
-          <p:cNvSpPr>
-            <a:spLocks noGrp="1"/>
-          </p:cNvSpPr>
-          <p:nvPr>
-            <p:ph type="title"/>
-          </p:nvPr>
-        </p:nvSpPr>
-        <p:spPr/>
-        <p:txBody>
-          <a:bodyPr/>
-          <a:lstStyle/>
-          <a:p>
-            <a:r>
-              <a:rPr lang="en-US" dirty="0"/>
-              <a:t>Steps for refactoring</a:t>
-            </a:r>
-          </a:p>
-        </p:txBody>
-      </p:sp>
-      <p:sp>
-        <p:nvSpPr>
-          <p:cNvPr id="4" name="Content Placeholder 3">
-            <a:extLst>
-              <a:ext uri="{FF2B5EF4-FFF2-40B4-BE49-F238E27FC236}">
-                <a16:creationId xmlns:a16="http://schemas.microsoft.com/office/drawing/2014/main" id="{B225A04A-A19E-03F6-5A6F-E66D9D66BD3C}"/>
-              </a:ext>
-            </a:extLst>
-          </p:cNvPr>
-          <p:cNvSpPr>
-            <a:spLocks noGrp="1"/>
-          </p:cNvSpPr>
-          <p:nvPr>
-            <p:ph idx="1"/>
-          </p:nvPr>
-        </p:nvSpPr>
-        <p:spPr>
-          <a:xfrm>
-            <a:off x="838200" y="1825625"/>
-            <a:ext cx="4561936" cy="796805"/>
-          </a:xfrm>
-        </p:spPr>
-        <p:txBody>
-          <a:bodyPr>
-            <a:normAutofit fontScale="92500" lnSpcReduction="20000"/>
-          </a:bodyPr>
-          <a:lstStyle/>
-          <a:p>
-            <a:r>
-              <a:rPr lang="en-US" dirty="0"/>
-              <a:t>Convert in 4 methods</a:t>
-            </a:r>
-          </a:p>
-          <a:p>
-            <a:r>
-              <a:rPr lang="en-US" dirty="0"/>
-              <a:t>Page 99</a:t>
-            </a:r>
-          </a:p>
-        </p:txBody>
-      </p:sp>
-      <p:sp>
-        <p:nvSpPr>
-          <p:cNvPr id="3" name="TextBox 2">
-            <a:extLst>
-              <a:ext uri="{FF2B5EF4-FFF2-40B4-BE49-F238E27FC236}">
-                <a16:creationId xmlns:a16="http://schemas.microsoft.com/office/drawing/2014/main" id="{F2076FA3-9937-CE0D-6532-8C7B6F12DE9F}"/>
-              </a:ext>
-            </a:extLst>
-          </p:cNvPr>
-          <p:cNvSpPr txBox="1"/>
-          <p:nvPr/>
-        </p:nvSpPr>
-        <p:spPr>
-          <a:xfrm>
-            <a:off x="7542363" y="6492875"/>
-            <a:ext cx="4649637" cy="276999"/>
-          </a:xfrm>
-          <a:prstGeom prst="rect">
-            <a:avLst/>
-          </a:prstGeom>
-          <a:noFill/>
-        </p:spPr>
-        <p:txBody>
-          <a:bodyPr wrap="square" rtlCol="0">
-            <a:spAutoFit/>
-          </a:bodyPr>
-          <a:lstStyle/>
-          <a:p>
-            <a:r>
-              <a:rPr lang="en-US" sz="1200" dirty="0"/>
-              <a:t>2026, Women in Statistics and Data Science Conference, Cincinnati, OH</a:t>
-            </a:r>
-          </a:p>
-        </p:txBody>
-      </p:sp>
-    </p:spTree>
-    <p:extLst>
-      <p:ext uri="{BB962C8B-B14F-4D97-AF65-F5344CB8AC3E}">
-        <p14:creationId xmlns:p14="http://schemas.microsoft.com/office/powerpoint/2010/main" val="310505272"/>
-      </p:ext>
-    </p:extLst>
-  </p:cSld>
-  <p:clrMapOvr>
-    <a:masterClrMapping/>
-  </p:clrMapOvr>
-</p:sld>
-</file>
-
-<file path=ppt/slides/slide9.xml><?xml version="1.0" encoding="utf-8"?>
-<p:sld xmlns:a="http://schemas.openxmlformats.org/drawingml/2006/main" xmlns:r="http://schemas.openxmlformats.org/officeDocument/2006/relationships" xmlns:p="http://schemas.openxmlformats.org/presentationml/2006/main">
-  <p:cSld>
-    <p:spTree>
-      <p:nvGrpSpPr>
-        <p:cNvPr id="1" name="">
-          <a:extLst>
-            <a:ext uri="{FF2B5EF4-FFF2-40B4-BE49-F238E27FC236}">
-              <a16:creationId xmlns:a16="http://schemas.microsoft.com/office/drawing/2014/main" id="{40074CE9-62D6-2BB2-E61F-1B1261FA1298}"/>
-            </a:ext>
-          </a:extLst>
-        </p:cNvPr>
-        <p:cNvGrpSpPr/>
-        <p:nvPr/>
-      </p:nvGrpSpPr>
-      <p:grpSpPr>
-        <a:xfrm>
-          <a:off x="0" y="0"/>
-          <a:ext cx="0" cy="0"/>
-          <a:chOff x="0" y="0"/>
-          <a:chExt cx="0" cy="0"/>
-        </a:xfrm>
-      </p:grpSpPr>
-      <p:sp>
-        <p:nvSpPr>
-          <p:cNvPr id="2" name="Title 1">
-            <a:extLst>
-              <a:ext uri="{FF2B5EF4-FFF2-40B4-BE49-F238E27FC236}">
-                <a16:creationId xmlns:a16="http://schemas.microsoft.com/office/drawing/2014/main" id="{1A312F8B-F4C9-4874-7DA4-22CD586751FE}"/>
-              </a:ext>
-            </a:extLst>
-          </p:cNvPr>
-          <p:cNvSpPr>
-            <a:spLocks noGrp="1"/>
-          </p:cNvSpPr>
-          <p:nvPr>
-            <p:ph type="title"/>
-          </p:nvPr>
-        </p:nvSpPr>
-        <p:spPr/>
-        <p:txBody>
-          <a:bodyPr/>
-          <a:lstStyle/>
-          <a:p>
-            <a:r>
-              <a:rPr lang="en-US" dirty="0"/>
-              <a:t>Steps for refactoring</a:t>
-            </a:r>
-          </a:p>
-        </p:txBody>
-      </p:sp>
-      <p:sp>
-        <p:nvSpPr>
-          <p:cNvPr id="3" name="Content Placeholder 2">
-            <a:extLst>
-              <a:ext uri="{FF2B5EF4-FFF2-40B4-BE49-F238E27FC236}">
-                <a16:creationId xmlns:a16="http://schemas.microsoft.com/office/drawing/2014/main" id="{A0BC23D4-DEEC-D0CD-B063-D5658C599C4C}"/>
-              </a:ext>
-            </a:extLst>
-          </p:cNvPr>
-          <p:cNvSpPr>
-            <a:spLocks noGrp="1"/>
-          </p:cNvSpPr>
-          <p:nvPr>
-            <p:ph idx="1"/>
-          </p:nvPr>
-        </p:nvSpPr>
-        <p:spPr>
-          <a:xfrm>
-            <a:off x="609600" y="1347216"/>
-            <a:ext cx="4578096" cy="3241409"/>
-          </a:xfrm>
-        </p:spPr>
-        <p:txBody>
-          <a:bodyPr>
-            <a:normAutofit fontScale="92500" lnSpcReduction="10000"/>
-          </a:bodyPr>
-          <a:lstStyle/>
-          <a:p>
-            <a:r>
-              <a:rPr lang="en-US" dirty="0"/>
-              <a:t>What have I done about it?</a:t>
-            </a:r>
-          </a:p>
-          <a:p>
-            <a:r>
-              <a:rPr lang="en-US" altLang="zh-CN" dirty="0"/>
-              <a:t>Enterprise Modeling and Analytics – the Cash Flow model</a:t>
-            </a:r>
-          </a:p>
-          <a:p>
-            <a:r>
-              <a:rPr lang="en-US" altLang="zh-CN" dirty="0"/>
-              <a:t>SAS: PROC compare</a:t>
-            </a:r>
-          </a:p>
-          <a:p>
-            <a:r>
-              <a:rPr lang="en-US" dirty="0"/>
-              <a:t>R: compared</a:t>
-            </a:r>
-          </a:p>
-          <a:p>
-            <a:r>
-              <a:rPr lang="en-US" dirty="0"/>
-              <a:t>How to make a tolerance level?</a:t>
-            </a:r>
-          </a:p>
-          <a:p>
-            <a:endParaRPr lang="en-US" dirty="0"/>
-          </a:p>
-        </p:txBody>
-      </p:sp>
-      <p:pic>
-        <p:nvPicPr>
-          <p:cNvPr id="6" name="Picture 5">
-            <a:extLst>
-              <a:ext uri="{FF2B5EF4-FFF2-40B4-BE49-F238E27FC236}">
-                <a16:creationId xmlns:a16="http://schemas.microsoft.com/office/drawing/2014/main" id="{63B42BA1-1151-4CFE-D8B5-E02DDD41A0EE}"/>
-              </a:ext>
-            </a:extLst>
-          </p:cNvPr>
-          <p:cNvPicPr>
-            <a:picLocks noChangeAspect="1"/>
-          </p:cNvPicPr>
-          <p:nvPr/>
-        </p:nvPicPr>
-        <p:blipFill>
-          <a:blip r:embed="rId2"/>
-          <a:stretch>
-            <a:fillRect/>
-          </a:stretch>
-        </p:blipFill>
-        <p:spPr>
-          <a:xfrm>
-            <a:off x="1446197" y="5207810"/>
-            <a:ext cx="1877291" cy="769689"/>
-          </a:xfrm>
-          <a:prstGeom prst="rect">
-            <a:avLst/>
-          </a:prstGeom>
-        </p:spPr>
-      </p:pic>
-      <p:pic>
-        <p:nvPicPr>
-          <p:cNvPr id="7" name="Picture 6">
-            <a:extLst>
-              <a:ext uri="{FF2B5EF4-FFF2-40B4-BE49-F238E27FC236}">
-                <a16:creationId xmlns:a16="http://schemas.microsoft.com/office/drawing/2014/main" id="{F74468B4-F5B5-FE68-0C47-CC2309DE1D12}"/>
-              </a:ext>
-            </a:extLst>
-          </p:cNvPr>
-          <p:cNvPicPr>
-            <a:picLocks noChangeAspect="1"/>
-          </p:cNvPicPr>
-          <p:nvPr/>
-        </p:nvPicPr>
-        <p:blipFill>
-          <a:blip r:embed="rId3"/>
-          <a:stretch>
-            <a:fillRect/>
-          </a:stretch>
-        </p:blipFill>
-        <p:spPr>
-          <a:xfrm>
-            <a:off x="5024264" y="5174343"/>
-            <a:ext cx="2143471" cy="803156"/>
-          </a:xfrm>
-          <a:prstGeom prst="rect">
-            <a:avLst/>
-          </a:prstGeom>
-        </p:spPr>
-      </p:pic>
-      <p:pic>
-        <p:nvPicPr>
-          <p:cNvPr id="8" name="Picture 7">
-            <a:extLst>
-              <a:ext uri="{FF2B5EF4-FFF2-40B4-BE49-F238E27FC236}">
-                <a16:creationId xmlns:a16="http://schemas.microsoft.com/office/drawing/2014/main" id="{BBAC54FE-1225-9162-8A7B-6CAB854D7938}"/>
-              </a:ext>
-            </a:extLst>
-          </p:cNvPr>
-          <p:cNvPicPr>
-            <a:picLocks noChangeAspect="1"/>
-          </p:cNvPicPr>
-          <p:nvPr/>
-        </p:nvPicPr>
-        <p:blipFill>
-          <a:blip r:embed="rId4"/>
-          <a:stretch>
-            <a:fillRect/>
-          </a:stretch>
-        </p:blipFill>
-        <p:spPr>
-          <a:xfrm>
-            <a:off x="8564702" y="5210176"/>
-            <a:ext cx="2862262" cy="966787"/>
-          </a:xfrm>
-          <a:prstGeom prst="rect">
-            <a:avLst/>
-          </a:prstGeom>
-        </p:spPr>
-      </p:pic>
-      <p:sp>
-        <p:nvSpPr>
-          <p:cNvPr id="4" name="Content Placeholder 2">
-            <a:extLst>
-              <a:ext uri="{FF2B5EF4-FFF2-40B4-BE49-F238E27FC236}">
-                <a16:creationId xmlns:a16="http://schemas.microsoft.com/office/drawing/2014/main" id="{63DAD067-F15E-9C00-BF8C-B324CCAB9A23}"/>
-              </a:ext>
-            </a:extLst>
-          </p:cNvPr>
-          <p:cNvSpPr txBox="1">
-            <a:spLocks/>
-          </p:cNvSpPr>
-          <p:nvPr/>
-        </p:nvSpPr>
-        <p:spPr>
-          <a:xfrm>
-            <a:off x="4829558" y="1347216"/>
-            <a:ext cx="4349496" cy="3413145"/>
-          </a:xfrm>
-          <a:prstGeom prst="rect">
-            <a:avLst/>
-          </a:prstGeom>
-        </p:spPr>
-        <p:txBody>
-          <a:bodyPr vert="horz" lIns="91440" tIns="45720" rIns="91440" bIns="45720" rtlCol="0">
-            <a:normAutofit fontScale="62500" lnSpcReduction="20000"/>
-          </a:bodyPr>
-          <a:lstStyle>
-            <a:lvl1pPr marL="228600" indent="-228600" algn="l" defTabSz="914400" rtl="0" eaLnBrk="1" latinLnBrk="0" hangingPunct="1">
-              <a:lnSpc>
-                <a:spcPct val="90000"/>
-              </a:lnSpc>
-              <a:spcBef>
-                <a:spcPts val="1000"/>
-              </a:spcBef>
-              <a:buFont typeface="Arial" panose="020B0604020202020204" pitchFamily="34" charset="0"/>
-              <a:buChar char="•"/>
-              <a:defRPr sz="2800" kern="1200">
-                <a:solidFill>
-                  <a:schemeClr val="tx1"/>
-                </a:solidFill>
-                <a:latin typeface="+mn-lt"/>
-                <a:ea typeface="+mn-ea"/>
-                <a:cs typeface="+mn-cs"/>
-              </a:defRPr>
-            </a:lvl1pPr>
-            <a:lvl2pPr marL="685800" indent="-228600" algn="l" defTabSz="914400" rtl="0" eaLnBrk="1" latinLnBrk="0" hangingPunct="1">
-              <a:lnSpc>
-                <a:spcPct val="90000"/>
-              </a:lnSpc>
-              <a:spcBef>
-                <a:spcPts val="500"/>
-              </a:spcBef>
-              <a:buFont typeface="Arial" panose="020B0604020202020204" pitchFamily="34" charset="0"/>
-              <a:buChar char="•"/>
-              <a:defRPr sz="2400" kern="1200">
-                <a:solidFill>
-                  <a:schemeClr val="tx1"/>
-                </a:solidFill>
-                <a:latin typeface="+mn-lt"/>
-                <a:ea typeface="+mn-ea"/>
-                <a:cs typeface="+mn-cs"/>
-              </a:defRPr>
-            </a:lvl2pPr>
-            <a:lvl3pPr marL="1143000" indent="-228600" algn="l" defTabSz="914400" rtl="0" eaLnBrk="1" latinLnBrk="0" hangingPunct="1">
-              <a:lnSpc>
-                <a:spcPct val="90000"/>
-              </a:lnSpc>
-              <a:spcBef>
-                <a:spcPts val="500"/>
-              </a:spcBef>
-              <a:buFont typeface="Arial" panose="020B0604020202020204" pitchFamily="34" charset="0"/>
-              <a:buChar char="•"/>
-              <a:defRPr sz="2000" kern="1200">
-                <a:solidFill>
-                  <a:schemeClr val="tx1"/>
-                </a:solidFill>
-                <a:latin typeface="+mn-lt"/>
-                <a:ea typeface="+mn-ea"/>
-                <a:cs typeface="+mn-cs"/>
-              </a:defRPr>
-            </a:lvl3pPr>
-            <a:lvl4pPr marL="1600200" indent="-228600" algn="l" defTabSz="914400" rtl="0" eaLnBrk="1" latinLnBrk="0" hangingPunct="1">
-              <a:lnSpc>
-                <a:spcPct val="90000"/>
-              </a:lnSpc>
-              <a:spcBef>
-                <a:spcPts val="500"/>
-              </a:spcBef>
-              <a:buFont typeface="Arial" panose="020B0604020202020204" pitchFamily="34" charset="0"/>
-              <a:buChar char="•"/>
-              <a:defRPr sz="1800" kern="1200">
-                <a:solidFill>
-                  <a:schemeClr val="tx1"/>
-                </a:solidFill>
-                <a:latin typeface="+mn-lt"/>
-                <a:ea typeface="+mn-ea"/>
-                <a:cs typeface="+mn-cs"/>
-              </a:defRPr>
-            </a:lvl4pPr>
-            <a:lvl5pPr marL="2057400" indent="-228600" algn="l" defTabSz="914400" rtl="0" eaLnBrk="1" latinLnBrk="0" hangingPunct="1">
-              <a:lnSpc>
-                <a:spcPct val="90000"/>
-              </a:lnSpc>
-              <a:spcBef>
-                <a:spcPts val="500"/>
-              </a:spcBef>
-              <a:buFont typeface="Arial" panose="020B0604020202020204" pitchFamily="34" charset="0"/>
-              <a:buChar char="•"/>
-              <a:defRPr sz="1800" kern="1200">
-                <a:solidFill>
-                  <a:schemeClr val="tx1"/>
-                </a:solidFill>
-                <a:latin typeface="+mn-lt"/>
-                <a:ea typeface="+mn-ea"/>
-                <a:cs typeface="+mn-cs"/>
-              </a:defRPr>
-            </a:lvl5pPr>
-            <a:lvl6pPr marL="2514600" indent="-228600" algn="l" defTabSz="914400" rtl="0" eaLnBrk="1" latinLnBrk="0" hangingPunct="1">
-              <a:lnSpc>
-                <a:spcPct val="90000"/>
-              </a:lnSpc>
-              <a:spcBef>
-                <a:spcPts val="500"/>
-              </a:spcBef>
-              <a:buFont typeface="Arial" panose="020B0604020202020204" pitchFamily="34" charset="0"/>
-              <a:buChar char="•"/>
-              <a:defRPr sz="1800" kern="1200">
-                <a:solidFill>
-                  <a:schemeClr val="tx1"/>
-                </a:solidFill>
-                <a:latin typeface="+mn-lt"/>
-                <a:ea typeface="+mn-ea"/>
-                <a:cs typeface="+mn-cs"/>
-              </a:defRPr>
-            </a:lvl6pPr>
-            <a:lvl7pPr marL="2971800" indent="-228600" algn="l" defTabSz="914400" rtl="0" eaLnBrk="1" latinLnBrk="0" hangingPunct="1">
-              <a:lnSpc>
-                <a:spcPct val="90000"/>
-              </a:lnSpc>
-              <a:spcBef>
-                <a:spcPts val="500"/>
-              </a:spcBef>
-              <a:buFont typeface="Arial" panose="020B0604020202020204" pitchFamily="34" charset="0"/>
-              <a:buChar char="•"/>
-              <a:defRPr sz="1800" kern="1200">
-                <a:solidFill>
-                  <a:schemeClr val="tx1"/>
-                </a:solidFill>
-                <a:latin typeface="+mn-lt"/>
-                <a:ea typeface="+mn-ea"/>
-                <a:cs typeface="+mn-cs"/>
-              </a:defRPr>
-            </a:lvl7pPr>
-            <a:lvl8pPr marL="3429000" indent="-228600" algn="l" defTabSz="914400" rtl="0" eaLnBrk="1" latinLnBrk="0" hangingPunct="1">
-              <a:lnSpc>
-                <a:spcPct val="90000"/>
-              </a:lnSpc>
-              <a:spcBef>
-                <a:spcPts val="500"/>
-              </a:spcBef>
-              <a:buFont typeface="Arial" panose="020B0604020202020204" pitchFamily="34" charset="0"/>
-              <a:buChar char="•"/>
-              <a:defRPr sz="1800" kern="1200">
-                <a:solidFill>
-                  <a:schemeClr val="tx1"/>
-                </a:solidFill>
-                <a:latin typeface="+mn-lt"/>
-                <a:ea typeface="+mn-ea"/>
-                <a:cs typeface="+mn-cs"/>
-              </a:defRPr>
-            </a:lvl8pPr>
-            <a:lvl9pPr marL="3886200" indent="-228600" algn="l" defTabSz="914400" rtl="0" eaLnBrk="1" latinLnBrk="0" hangingPunct="1">
-              <a:lnSpc>
-                <a:spcPct val="90000"/>
-              </a:lnSpc>
-              <a:spcBef>
-                <a:spcPts val="500"/>
-              </a:spcBef>
-              <a:buFont typeface="Arial" panose="020B0604020202020204" pitchFamily="34" charset="0"/>
-              <a:buChar char="•"/>
-              <a:defRPr sz="1800" kern="1200">
-                <a:solidFill>
-                  <a:schemeClr val="tx1"/>
-                </a:solidFill>
-                <a:latin typeface="+mn-lt"/>
-                <a:ea typeface="+mn-ea"/>
-                <a:cs typeface="+mn-cs"/>
-              </a:defRPr>
-            </a:lvl9pPr>
-          </a:lstStyle>
-          <a:p>
-            <a:r>
-              <a:rPr lang="en-US" altLang="zh-CN" dirty="0"/>
-              <a:t>Enterprise Modeling and Analytics – the Cash Flow model</a:t>
-            </a:r>
-          </a:p>
-          <a:p>
-            <a:r>
-              <a:rPr lang="en-US" dirty="0"/>
-              <a:t>Data: date/month/time, missing values, N/A</a:t>
-            </a:r>
-          </a:p>
-          <a:p>
-            <a:r>
-              <a:rPr lang="en-US" dirty="0"/>
-              <a:t>Variables: filter data, </a:t>
-            </a:r>
-          </a:p>
-          <a:p>
-            <a:r>
-              <a:rPr lang="en-US" dirty="0"/>
-              <a:t>merge tables</a:t>
-            </a:r>
-          </a:p>
-          <a:p>
-            <a:pPr lvl="1"/>
-            <a:r>
-              <a:rPr lang="en-US" dirty="0"/>
-              <a:t>Concatenate</a:t>
-            </a:r>
-          </a:p>
-          <a:p>
-            <a:pPr lvl="1"/>
-            <a:r>
-              <a:rPr lang="en-US" dirty="0"/>
-              <a:t>match merging (with n= dataset option)</a:t>
-            </a:r>
-          </a:p>
-          <a:p>
-            <a:r>
-              <a:rPr lang="en-US" dirty="0"/>
-              <a:t>Models: logistic regression with splines</a:t>
-            </a:r>
-          </a:p>
-          <a:p>
-            <a:pPr lvl="1"/>
-            <a:r>
-              <a:rPr lang="en-US" dirty="0"/>
-              <a:t>Choose number and location of the knots.</a:t>
-            </a:r>
-          </a:p>
-          <a:p>
-            <a:r>
-              <a:rPr lang="en-US" dirty="0"/>
-              <a:t>Macro functions</a:t>
-            </a:r>
-          </a:p>
-          <a:p>
-            <a:r>
-              <a:rPr lang="en-US" dirty="0"/>
-              <a:t>Output</a:t>
-            </a:r>
-          </a:p>
-          <a:p>
-            <a:endParaRPr lang="en-US" dirty="0"/>
-          </a:p>
-        </p:txBody>
-      </p:sp>
-      <p:sp>
-        <p:nvSpPr>
-          <p:cNvPr id="5" name="TextBox 4">
-            <a:extLst>
-              <a:ext uri="{FF2B5EF4-FFF2-40B4-BE49-F238E27FC236}">
-                <a16:creationId xmlns:a16="http://schemas.microsoft.com/office/drawing/2014/main" id="{EEB02195-335B-6B7B-3FC8-0E3B8884489C}"/>
-              </a:ext>
-            </a:extLst>
-          </p:cNvPr>
-          <p:cNvSpPr txBox="1"/>
-          <p:nvPr/>
-        </p:nvSpPr>
-        <p:spPr>
-          <a:xfrm>
-            <a:off x="7542363" y="6492875"/>
-            <a:ext cx="4649637" cy="276999"/>
-          </a:xfrm>
-          <a:prstGeom prst="rect">
-            <a:avLst/>
-          </a:prstGeom>
-          <a:noFill/>
-        </p:spPr>
-        <p:txBody>
-          <a:bodyPr wrap="square" rtlCol="0">
-            <a:spAutoFit/>
-          </a:bodyPr>
-          <a:lstStyle/>
-          <a:p>
-            <a:r>
-              <a:rPr lang="en-US" sz="1200" dirty="0"/>
-              <a:t>2026, Women in Statistics and Data Science Conference, Cincinnati, OH</a:t>
-            </a:r>
-          </a:p>
-        </p:txBody>
-      </p:sp>
-    </p:spTree>
-    <p:extLst>
-      <p:ext uri="{BB962C8B-B14F-4D97-AF65-F5344CB8AC3E}">
-        <p14:creationId xmlns:p14="http://schemas.microsoft.com/office/powerpoint/2010/main" val="4097000794"/>
       </p:ext>
     </p:extLst>
   </p:cSld>

--- a/2026 WSDS - Wujian Xue.pptx
+++ b/2026 WSDS - Wujian Xue.pptx
@@ -11948,17 +11948,26 @@
         <p:spPr>
           <a:xfrm>
             <a:off x="777815" y="1498251"/>
-            <a:ext cx="5691996" cy="585066"/>
+            <a:ext cx="7063596" cy="824536"/>
           </a:xfrm>
         </p:spPr>
         <p:txBody>
-          <a:bodyPr/>
+          <a:bodyPr>
+            <a:normAutofit fontScale="92500" lnSpcReduction="20000"/>
+          </a:bodyPr>
           <a:lstStyle/>
           <a:p>
             <a:r>
               <a:rPr lang="en-US" dirty="0"/>
               <a:t>What is the problem and why</a:t>
             </a:r>
+          </a:p>
+          <a:p>
+            <a:r>
+              <a:rPr lang="en-US" altLang="zh-CN" dirty="0"/>
+              <a:t>Women in the migration</a:t>
+            </a:r>
+            <a:endParaRPr lang="en-US" dirty="0"/>
           </a:p>
           <a:p>
             <a:endParaRPr lang="en-US" dirty="0"/>

--- a/2026 WSDS - Wujian Xue.pptx
+++ b/2026 WSDS - Wujian Xue.pptx
@@ -8,8 +8,8 @@
     <p:sldId id="256" r:id="rId2"/>
     <p:sldId id="264" r:id="rId3"/>
     <p:sldId id="257" r:id="rId4"/>
-    <p:sldId id="274" r:id="rId5"/>
-    <p:sldId id="273" r:id="rId6"/>
+    <p:sldId id="273" r:id="rId5"/>
+    <p:sldId id="274" r:id="rId6"/>
     <p:sldId id="258" r:id="rId7"/>
     <p:sldId id="272" r:id="rId8"/>
     <p:sldId id="259" r:id="rId9"/>
@@ -11914,8 +11914,8 @@
         </p:nvSpPr>
         <p:spPr>
           <a:xfrm>
-            <a:off x="838200" y="365125"/>
-            <a:ext cx="11092132" cy="1325563"/>
+            <a:off x="398253" y="72592"/>
+            <a:ext cx="11092132" cy="1133126"/>
           </a:xfrm>
         </p:spPr>
         <p:txBody>
@@ -12124,296 +12124,6 @@
         <p:cNvPr id="1" name="">
           <a:extLst>
             <a:ext uri="{FF2B5EF4-FFF2-40B4-BE49-F238E27FC236}">
-              <a16:creationId xmlns:a16="http://schemas.microsoft.com/office/drawing/2014/main" id="{3B4F882F-D782-9FDA-A7C4-638CA99A47B6}"/>
-            </a:ext>
-          </a:extLst>
-        </p:cNvPr>
-        <p:cNvGrpSpPr/>
-        <p:nvPr/>
-      </p:nvGrpSpPr>
-      <p:grpSpPr>
-        <a:xfrm>
-          <a:off x="0" y="0"/>
-          <a:ext cx="0" cy="0"/>
-          <a:chOff x="0" y="0"/>
-          <a:chExt cx="0" cy="0"/>
-        </a:xfrm>
-      </p:grpSpPr>
-      <p:sp>
-        <p:nvSpPr>
-          <p:cNvPr id="2" name="Title 1">
-            <a:extLst>
-              <a:ext uri="{FF2B5EF4-FFF2-40B4-BE49-F238E27FC236}">
-                <a16:creationId xmlns:a16="http://schemas.microsoft.com/office/drawing/2014/main" id="{18CDA0EB-8A86-C17A-5138-140FA594D8D9}"/>
-              </a:ext>
-            </a:extLst>
-          </p:cNvPr>
-          <p:cNvSpPr>
-            <a:spLocks noGrp="1"/>
-          </p:cNvSpPr>
-          <p:nvPr>
-            <p:ph type="title"/>
-          </p:nvPr>
-        </p:nvSpPr>
-        <p:spPr>
-          <a:xfrm>
-            <a:off x="838200" y="365125"/>
-            <a:ext cx="11092132" cy="1325563"/>
-          </a:xfrm>
-        </p:spPr>
-        <p:txBody>
-          <a:bodyPr/>
-          <a:lstStyle/>
-          <a:p>
-            <a:r>
-              <a:rPr lang="en-US" dirty="0"/>
-              <a:t>1.Background – Fannie Mae and cloud migration</a:t>
-            </a:r>
-          </a:p>
-        </p:txBody>
-      </p:sp>
-      <p:sp>
-        <p:nvSpPr>
-          <p:cNvPr id="3" name="Content Placeholder 2">
-            <a:extLst>
-              <a:ext uri="{FF2B5EF4-FFF2-40B4-BE49-F238E27FC236}">
-                <a16:creationId xmlns:a16="http://schemas.microsoft.com/office/drawing/2014/main" id="{75FE67F2-C177-752E-1FA2-340506D3C9F7}"/>
-              </a:ext>
-            </a:extLst>
-          </p:cNvPr>
-          <p:cNvSpPr>
-            <a:spLocks noGrp="1"/>
-          </p:cNvSpPr>
-          <p:nvPr>
-            <p:ph idx="1"/>
-          </p:nvPr>
-        </p:nvSpPr>
-        <p:spPr>
-          <a:xfrm>
-            <a:off x="777815" y="1498251"/>
-            <a:ext cx="5691996" cy="585066"/>
-          </a:xfrm>
-        </p:spPr>
-        <p:txBody>
-          <a:bodyPr/>
-          <a:lstStyle/>
-          <a:p>
-            <a:r>
-              <a:rPr lang="en-US" dirty="0"/>
-              <a:t>What is the problem and why</a:t>
-            </a:r>
-          </a:p>
-          <a:p>
-            <a:endParaRPr lang="en-US" dirty="0"/>
-          </a:p>
-        </p:txBody>
-      </p:sp>
-      <p:sp>
-        <p:nvSpPr>
-          <p:cNvPr id="11" name="TextBox 10">
-            <a:extLst>
-              <a:ext uri="{FF2B5EF4-FFF2-40B4-BE49-F238E27FC236}">
-                <a16:creationId xmlns:a16="http://schemas.microsoft.com/office/drawing/2014/main" id="{EF5FC91A-FA92-5907-9456-EA27FC61D67C}"/>
-              </a:ext>
-            </a:extLst>
-          </p:cNvPr>
-          <p:cNvSpPr txBox="1"/>
-          <p:nvPr/>
-        </p:nvSpPr>
-        <p:spPr>
-          <a:xfrm>
-            <a:off x="7542363" y="6492875"/>
-            <a:ext cx="4649637" cy="276999"/>
-          </a:xfrm>
-          <a:prstGeom prst="rect">
-            <a:avLst/>
-          </a:prstGeom>
-          <a:noFill/>
-        </p:spPr>
-        <p:txBody>
-          <a:bodyPr wrap="square" rtlCol="0">
-            <a:spAutoFit/>
-          </a:bodyPr>
-          <a:lstStyle/>
-          <a:p>
-            <a:r>
-              <a:rPr lang="en-US" sz="1200" dirty="0"/>
-              <a:t>2026, Women in Statistics and Data Science Conference, Cincinnati, OH</a:t>
-            </a:r>
-          </a:p>
-        </p:txBody>
-      </p:sp>
-      <p:pic>
-        <p:nvPicPr>
-          <p:cNvPr id="6" name="Picture 5">
-            <a:extLst>
-              <a:ext uri="{FF2B5EF4-FFF2-40B4-BE49-F238E27FC236}">
-                <a16:creationId xmlns:a16="http://schemas.microsoft.com/office/drawing/2014/main" id="{6340F641-F8E6-3057-3D70-DDCFE5551478}"/>
-              </a:ext>
-            </a:extLst>
-          </p:cNvPr>
-          <p:cNvPicPr>
-            <a:picLocks noChangeAspect="1"/>
-          </p:cNvPicPr>
-          <p:nvPr/>
-        </p:nvPicPr>
-        <p:blipFill>
-          <a:blip r:embed="rId2"/>
-          <a:stretch>
-            <a:fillRect/>
-          </a:stretch>
-        </p:blipFill>
-        <p:spPr>
-          <a:xfrm>
-            <a:off x="1112650" y="2307348"/>
-            <a:ext cx="2007612" cy="2007612"/>
-          </a:xfrm>
-          <a:prstGeom prst="rect">
-            <a:avLst/>
-          </a:prstGeom>
-        </p:spPr>
-      </p:pic>
-      <p:pic>
-        <p:nvPicPr>
-          <p:cNvPr id="7" name="Picture 6">
-            <a:extLst>
-              <a:ext uri="{FF2B5EF4-FFF2-40B4-BE49-F238E27FC236}">
-                <a16:creationId xmlns:a16="http://schemas.microsoft.com/office/drawing/2014/main" id="{3F6480D7-26D2-3482-A7ED-592B9035E641}"/>
-              </a:ext>
-            </a:extLst>
-          </p:cNvPr>
-          <p:cNvPicPr>
-            <a:picLocks noChangeAspect="1"/>
-          </p:cNvPicPr>
-          <p:nvPr/>
-        </p:nvPicPr>
-        <p:blipFill>
-          <a:blip r:embed="rId3"/>
-          <a:stretch>
-            <a:fillRect/>
-          </a:stretch>
-        </p:blipFill>
-        <p:spPr>
-          <a:xfrm>
-            <a:off x="3736676" y="4538992"/>
-            <a:ext cx="1953883" cy="1953883"/>
-          </a:xfrm>
-          <a:prstGeom prst="rect">
-            <a:avLst/>
-          </a:prstGeom>
-        </p:spPr>
-      </p:pic>
-      <p:pic>
-        <p:nvPicPr>
-          <p:cNvPr id="8" name="Picture 7">
-            <a:extLst>
-              <a:ext uri="{FF2B5EF4-FFF2-40B4-BE49-F238E27FC236}">
-                <a16:creationId xmlns:a16="http://schemas.microsoft.com/office/drawing/2014/main" id="{E83B4DBD-0145-6AEA-FF24-821FDDB1F475}"/>
-              </a:ext>
-            </a:extLst>
-          </p:cNvPr>
-          <p:cNvPicPr>
-            <a:picLocks noChangeAspect="1"/>
-          </p:cNvPicPr>
-          <p:nvPr/>
-        </p:nvPicPr>
-        <p:blipFill>
-          <a:blip r:embed="rId4"/>
-          <a:stretch>
-            <a:fillRect/>
-          </a:stretch>
-        </p:blipFill>
-        <p:spPr>
-          <a:xfrm>
-            <a:off x="403734" y="4692020"/>
-            <a:ext cx="2962275" cy="1647825"/>
-          </a:xfrm>
-          <a:prstGeom prst="rect">
-            <a:avLst/>
-          </a:prstGeom>
-        </p:spPr>
-      </p:pic>
-      <p:pic>
-        <p:nvPicPr>
-          <p:cNvPr id="9" name="Picture 8">
-            <a:extLst>
-              <a:ext uri="{FF2B5EF4-FFF2-40B4-BE49-F238E27FC236}">
-                <a16:creationId xmlns:a16="http://schemas.microsoft.com/office/drawing/2014/main" id="{B279E0B5-B727-D5A9-055D-3DC0F311CEBE}"/>
-              </a:ext>
-            </a:extLst>
-          </p:cNvPr>
-          <p:cNvPicPr>
-            <a:picLocks noChangeAspect="1"/>
-          </p:cNvPicPr>
-          <p:nvPr/>
-        </p:nvPicPr>
-        <p:blipFill>
-          <a:blip r:embed="rId5"/>
-          <a:stretch>
-            <a:fillRect/>
-          </a:stretch>
-        </p:blipFill>
-        <p:spPr>
-          <a:xfrm>
-            <a:off x="9160350" y="2826494"/>
-            <a:ext cx="2174759" cy="1205012"/>
-          </a:xfrm>
-          <a:prstGeom prst="rect">
-            <a:avLst/>
-          </a:prstGeom>
-        </p:spPr>
-      </p:pic>
-      <p:pic>
-        <p:nvPicPr>
-          <p:cNvPr id="10" name="Picture 9">
-            <a:extLst>
-              <a:ext uri="{FF2B5EF4-FFF2-40B4-BE49-F238E27FC236}">
-                <a16:creationId xmlns:a16="http://schemas.microsoft.com/office/drawing/2014/main" id="{6CE0E9E8-3561-D27F-FB1C-BD3FE6C2A053}"/>
-              </a:ext>
-            </a:extLst>
-          </p:cNvPr>
-          <p:cNvPicPr>
-            <a:picLocks noChangeAspect="1"/>
-          </p:cNvPicPr>
-          <p:nvPr/>
-        </p:nvPicPr>
-        <p:blipFill>
-          <a:blip r:embed="rId6"/>
-          <a:stretch>
-            <a:fillRect/>
-          </a:stretch>
-        </p:blipFill>
-        <p:spPr>
-          <a:xfrm>
-            <a:off x="3292573" y="2573648"/>
-            <a:ext cx="1699245" cy="1130060"/>
-          </a:xfrm>
-          <a:prstGeom prst="rect">
-            <a:avLst/>
-          </a:prstGeom>
-        </p:spPr>
-      </p:pic>
-    </p:spTree>
-    <p:extLst>
-      <p:ext uri="{BB962C8B-B14F-4D97-AF65-F5344CB8AC3E}">
-        <p14:creationId xmlns:p14="http://schemas.microsoft.com/office/powerpoint/2010/main" val="1635633002"/>
-      </p:ext>
-    </p:extLst>
-  </p:cSld>
-  <p:clrMapOvr>
-    <a:masterClrMapping/>
-  </p:clrMapOvr>
-</p:sld>
-</file>
-
-<file path=ppt/slides/slide5.xml><?xml version="1.0" encoding="utf-8"?>
-<p:sld xmlns:a="http://schemas.openxmlformats.org/drawingml/2006/main" xmlns:r="http://schemas.openxmlformats.org/officeDocument/2006/relationships" xmlns:p="http://schemas.openxmlformats.org/presentationml/2006/main">
-  <p:cSld>
-    <p:spTree>
-      <p:nvGrpSpPr>
-        <p:cNvPr id="1" name="">
-          <a:extLst>
-            <a:ext uri="{FF2B5EF4-FFF2-40B4-BE49-F238E27FC236}">
               <a16:creationId xmlns:a16="http://schemas.microsoft.com/office/drawing/2014/main" id="{92BFB569-8DFD-66E2-48FC-0E51EBAA34B5}"/>
             </a:ext>
           </a:extLst>
@@ -12594,6 +12304,416 @@
     <p:extLst>
       <p:ext uri="{BB962C8B-B14F-4D97-AF65-F5344CB8AC3E}">
         <p14:creationId xmlns:p14="http://schemas.microsoft.com/office/powerpoint/2010/main" val="639017355"/>
+      </p:ext>
+    </p:extLst>
+  </p:cSld>
+  <p:clrMapOvr>
+    <a:masterClrMapping/>
+  </p:clrMapOvr>
+</p:sld>
+</file>
+
+<file path=ppt/slides/slide5.xml><?xml version="1.0" encoding="utf-8"?>
+<p:sld xmlns:a="http://schemas.openxmlformats.org/drawingml/2006/main" xmlns:r="http://schemas.openxmlformats.org/officeDocument/2006/relationships" xmlns:p="http://schemas.openxmlformats.org/presentationml/2006/main">
+  <p:cSld>
+    <p:spTree>
+      <p:nvGrpSpPr>
+        <p:cNvPr id="1" name="">
+          <a:extLst>
+            <a:ext uri="{FF2B5EF4-FFF2-40B4-BE49-F238E27FC236}">
+              <a16:creationId xmlns:a16="http://schemas.microsoft.com/office/drawing/2014/main" id="{3B4F882F-D782-9FDA-A7C4-638CA99A47B6}"/>
+            </a:ext>
+          </a:extLst>
+        </p:cNvPr>
+        <p:cNvGrpSpPr/>
+        <p:nvPr/>
+      </p:nvGrpSpPr>
+      <p:grpSpPr>
+        <a:xfrm>
+          <a:off x="0" y="0"/>
+          <a:ext cx="0" cy="0"/>
+          <a:chOff x="0" y="0"/>
+          <a:chExt cx="0" cy="0"/>
+        </a:xfrm>
+      </p:grpSpPr>
+      <p:sp>
+        <p:nvSpPr>
+          <p:cNvPr id="2" name="Title 1">
+            <a:extLst>
+              <a:ext uri="{FF2B5EF4-FFF2-40B4-BE49-F238E27FC236}">
+                <a16:creationId xmlns:a16="http://schemas.microsoft.com/office/drawing/2014/main" id="{18CDA0EB-8A86-C17A-5138-140FA594D8D9}"/>
+              </a:ext>
+            </a:extLst>
+          </p:cNvPr>
+          <p:cNvSpPr>
+            <a:spLocks noGrp="1"/>
+          </p:cNvSpPr>
+          <p:nvPr>
+            <p:ph type="title"/>
+          </p:nvPr>
+        </p:nvSpPr>
+        <p:spPr>
+          <a:xfrm>
+            <a:off x="358752" y="360888"/>
+            <a:ext cx="11855517" cy="1325563"/>
+          </a:xfrm>
+        </p:spPr>
+        <p:txBody>
+          <a:bodyPr/>
+          <a:lstStyle/>
+          <a:p>
+            <a:r>
+              <a:rPr lang="en-US" dirty="0"/>
+              <a:t>1.Background – cloud in other organizations</a:t>
+            </a:r>
+          </a:p>
+        </p:txBody>
+      </p:sp>
+      <p:sp>
+        <p:nvSpPr>
+          <p:cNvPr id="3" name="Content Placeholder 2">
+            <a:extLst>
+              <a:ext uri="{FF2B5EF4-FFF2-40B4-BE49-F238E27FC236}">
+                <a16:creationId xmlns:a16="http://schemas.microsoft.com/office/drawing/2014/main" id="{75FE67F2-C177-752E-1FA2-340506D3C9F7}"/>
+              </a:ext>
+            </a:extLst>
+          </p:cNvPr>
+          <p:cNvSpPr>
+            <a:spLocks noGrp="1"/>
+          </p:cNvSpPr>
+          <p:nvPr>
+            <p:ph idx="1"/>
+          </p:nvPr>
+        </p:nvSpPr>
+        <p:spPr>
+          <a:xfrm>
+            <a:off x="777815" y="1498251"/>
+            <a:ext cx="5691996" cy="585066"/>
+          </a:xfrm>
+        </p:spPr>
+        <p:txBody>
+          <a:bodyPr/>
+          <a:lstStyle/>
+          <a:p>
+            <a:r>
+              <a:rPr lang="en-US" dirty="0"/>
+              <a:t>What is the problem and why</a:t>
+            </a:r>
+          </a:p>
+          <a:p>
+            <a:endParaRPr lang="en-US" dirty="0"/>
+          </a:p>
+        </p:txBody>
+      </p:sp>
+      <p:sp>
+        <p:nvSpPr>
+          <p:cNvPr id="11" name="TextBox 10">
+            <a:extLst>
+              <a:ext uri="{FF2B5EF4-FFF2-40B4-BE49-F238E27FC236}">
+                <a16:creationId xmlns:a16="http://schemas.microsoft.com/office/drawing/2014/main" id="{EF5FC91A-FA92-5907-9456-EA27FC61D67C}"/>
+              </a:ext>
+            </a:extLst>
+          </p:cNvPr>
+          <p:cNvSpPr txBox="1"/>
+          <p:nvPr/>
+        </p:nvSpPr>
+        <p:spPr>
+          <a:xfrm>
+            <a:off x="7542363" y="6492875"/>
+            <a:ext cx="4649637" cy="276999"/>
+          </a:xfrm>
+          <a:prstGeom prst="rect">
+            <a:avLst/>
+          </a:prstGeom>
+          <a:noFill/>
+        </p:spPr>
+        <p:txBody>
+          <a:bodyPr wrap="square" rtlCol="0">
+            <a:spAutoFit/>
+          </a:bodyPr>
+          <a:lstStyle/>
+          <a:p>
+            <a:r>
+              <a:rPr lang="en-US" sz="1200" dirty="0"/>
+              <a:t>2026, Women in Statistics and Data Science Conference, Cincinnati, OH</a:t>
+            </a:r>
+          </a:p>
+        </p:txBody>
+      </p:sp>
+      <p:pic>
+        <p:nvPicPr>
+          <p:cNvPr id="6" name="Picture 5">
+            <a:extLst>
+              <a:ext uri="{FF2B5EF4-FFF2-40B4-BE49-F238E27FC236}">
+                <a16:creationId xmlns:a16="http://schemas.microsoft.com/office/drawing/2014/main" id="{6340F641-F8E6-3057-3D70-DDCFE5551478}"/>
+              </a:ext>
+            </a:extLst>
+          </p:cNvPr>
+          <p:cNvPicPr>
+            <a:picLocks noChangeAspect="1"/>
+          </p:cNvPicPr>
+          <p:nvPr/>
+        </p:nvPicPr>
+        <p:blipFill>
+          <a:blip r:embed="rId2"/>
+          <a:stretch>
+            <a:fillRect/>
+          </a:stretch>
+        </p:blipFill>
+        <p:spPr>
+          <a:xfrm>
+            <a:off x="613969" y="3576330"/>
+            <a:ext cx="2007612" cy="2007612"/>
+          </a:xfrm>
+          <a:prstGeom prst="rect">
+            <a:avLst/>
+          </a:prstGeom>
+        </p:spPr>
+      </p:pic>
+      <p:pic>
+        <p:nvPicPr>
+          <p:cNvPr id="7" name="Picture 6">
+            <a:extLst>
+              <a:ext uri="{FF2B5EF4-FFF2-40B4-BE49-F238E27FC236}">
+                <a16:creationId xmlns:a16="http://schemas.microsoft.com/office/drawing/2014/main" id="{3F6480D7-26D2-3482-A7ED-592B9035E641}"/>
+              </a:ext>
+            </a:extLst>
+          </p:cNvPr>
+          <p:cNvPicPr>
+            <a:picLocks noChangeAspect="1"/>
+          </p:cNvPicPr>
+          <p:nvPr/>
+        </p:nvPicPr>
+        <p:blipFill>
+          <a:blip r:embed="rId3"/>
+          <a:stretch>
+            <a:fillRect/>
+          </a:stretch>
+        </p:blipFill>
+        <p:spPr>
+          <a:xfrm>
+            <a:off x="1009291" y="2508702"/>
+            <a:ext cx="1257396" cy="1257396"/>
+          </a:xfrm>
+          <a:prstGeom prst="rect">
+            <a:avLst/>
+          </a:prstGeom>
+        </p:spPr>
+      </p:pic>
+      <p:pic>
+        <p:nvPicPr>
+          <p:cNvPr id="8" name="Picture 7">
+            <a:extLst>
+              <a:ext uri="{FF2B5EF4-FFF2-40B4-BE49-F238E27FC236}">
+                <a16:creationId xmlns:a16="http://schemas.microsoft.com/office/drawing/2014/main" id="{E83B4DBD-0145-6AEA-FF24-821FDDB1F475}"/>
+              </a:ext>
+            </a:extLst>
+          </p:cNvPr>
+          <p:cNvPicPr>
+            <a:picLocks noChangeAspect="1"/>
+          </p:cNvPicPr>
+          <p:nvPr/>
+        </p:nvPicPr>
+        <p:blipFill>
+          <a:blip r:embed="rId4"/>
+          <a:stretch>
+            <a:fillRect/>
+          </a:stretch>
+        </p:blipFill>
+        <p:spPr>
+          <a:xfrm>
+            <a:off x="2660894" y="2572732"/>
+            <a:ext cx="1887113" cy="1049745"/>
+          </a:xfrm>
+          <a:prstGeom prst="rect">
+            <a:avLst/>
+          </a:prstGeom>
+        </p:spPr>
+      </p:pic>
+      <p:pic>
+        <p:nvPicPr>
+          <p:cNvPr id="9" name="Picture 8">
+            <a:extLst>
+              <a:ext uri="{FF2B5EF4-FFF2-40B4-BE49-F238E27FC236}">
+                <a16:creationId xmlns:a16="http://schemas.microsoft.com/office/drawing/2014/main" id="{B279E0B5-B727-D5A9-055D-3DC0F311CEBE}"/>
+              </a:ext>
+            </a:extLst>
+          </p:cNvPr>
+          <p:cNvPicPr>
+            <a:picLocks noChangeAspect="1"/>
+          </p:cNvPicPr>
+          <p:nvPr/>
+        </p:nvPicPr>
+        <p:blipFill>
+          <a:blip r:embed="rId5"/>
+          <a:stretch>
+            <a:fillRect/>
+          </a:stretch>
+        </p:blipFill>
+        <p:spPr>
+          <a:xfrm>
+            <a:off x="786415" y="5508119"/>
+            <a:ext cx="2174759" cy="1205012"/>
+          </a:xfrm>
+          <a:prstGeom prst="rect">
+            <a:avLst/>
+          </a:prstGeom>
+        </p:spPr>
+      </p:pic>
+      <p:pic>
+        <p:nvPicPr>
+          <p:cNvPr id="10" name="Picture 9">
+            <a:extLst>
+              <a:ext uri="{FF2B5EF4-FFF2-40B4-BE49-F238E27FC236}">
+                <a16:creationId xmlns:a16="http://schemas.microsoft.com/office/drawing/2014/main" id="{6CE0E9E8-3561-D27F-FB1C-BD3FE6C2A053}"/>
+              </a:ext>
+            </a:extLst>
+          </p:cNvPr>
+          <p:cNvPicPr>
+            <a:picLocks noChangeAspect="1"/>
+          </p:cNvPicPr>
+          <p:nvPr/>
+        </p:nvPicPr>
+        <p:blipFill>
+          <a:blip r:embed="rId6"/>
+          <a:stretch>
+            <a:fillRect/>
+          </a:stretch>
+        </p:blipFill>
+        <p:spPr>
+          <a:xfrm>
+            <a:off x="3192751" y="4015106"/>
+            <a:ext cx="1699245" cy="1130060"/>
+          </a:xfrm>
+          <a:prstGeom prst="rect">
+            <a:avLst/>
+          </a:prstGeom>
+        </p:spPr>
+      </p:pic>
+      <p:pic>
+        <p:nvPicPr>
+          <p:cNvPr id="4" name="Picture 3">
+            <a:extLst>
+              <a:ext uri="{FF2B5EF4-FFF2-40B4-BE49-F238E27FC236}">
+                <a16:creationId xmlns:a16="http://schemas.microsoft.com/office/drawing/2014/main" id="{664EBAE1-AC87-5FC3-440B-94B9F0AD8656}"/>
+              </a:ext>
+            </a:extLst>
+          </p:cNvPr>
+          <p:cNvPicPr>
+            <a:picLocks noChangeAspect="1"/>
+          </p:cNvPicPr>
+          <p:nvPr/>
+        </p:nvPicPr>
+        <p:blipFill>
+          <a:blip r:embed="rId7"/>
+          <a:stretch>
+            <a:fillRect/>
+          </a:stretch>
+        </p:blipFill>
+        <p:spPr>
+          <a:xfrm>
+            <a:off x="7797339" y="2824063"/>
+            <a:ext cx="2244365" cy="626673"/>
+          </a:xfrm>
+          <a:prstGeom prst="rect">
+            <a:avLst/>
+          </a:prstGeom>
+        </p:spPr>
+      </p:pic>
+      <p:pic>
+        <p:nvPicPr>
+          <p:cNvPr id="5" name="Picture 4">
+            <a:extLst>
+              <a:ext uri="{FF2B5EF4-FFF2-40B4-BE49-F238E27FC236}">
+                <a16:creationId xmlns:a16="http://schemas.microsoft.com/office/drawing/2014/main" id="{F29F4ED9-5067-B79E-010F-3149E4123E4E}"/>
+              </a:ext>
+            </a:extLst>
+          </p:cNvPr>
+          <p:cNvPicPr>
+            <a:picLocks noChangeAspect="1"/>
+          </p:cNvPicPr>
+          <p:nvPr/>
+        </p:nvPicPr>
+        <p:blipFill>
+          <a:blip r:embed="rId8"/>
+          <a:stretch>
+            <a:fillRect/>
+          </a:stretch>
+        </p:blipFill>
+        <p:spPr>
+          <a:xfrm>
+            <a:off x="5111295" y="3879436"/>
+            <a:ext cx="2350433" cy="1322118"/>
+          </a:xfrm>
+          <a:prstGeom prst="rect">
+            <a:avLst/>
+          </a:prstGeom>
+        </p:spPr>
+      </p:pic>
+      <p:pic>
+        <p:nvPicPr>
+          <p:cNvPr id="12" name="Picture 11">
+            <a:extLst>
+              <a:ext uri="{FF2B5EF4-FFF2-40B4-BE49-F238E27FC236}">
+                <a16:creationId xmlns:a16="http://schemas.microsoft.com/office/drawing/2014/main" id="{ECC5BCCF-B960-1C48-CEDA-C71C3CDE5A6A}"/>
+              </a:ext>
+            </a:extLst>
+          </p:cNvPr>
+          <p:cNvPicPr>
+            <a:picLocks noChangeAspect="1"/>
+          </p:cNvPicPr>
+          <p:nvPr/>
+        </p:nvPicPr>
+        <p:blipFill>
+          <a:blip r:embed="rId9"/>
+          <a:stretch>
+            <a:fillRect/>
+          </a:stretch>
+        </p:blipFill>
+        <p:spPr>
+          <a:xfrm>
+            <a:off x="3314766" y="5619747"/>
+            <a:ext cx="1455214" cy="873128"/>
+          </a:xfrm>
+          <a:prstGeom prst="rect">
+            <a:avLst/>
+          </a:prstGeom>
+        </p:spPr>
+      </p:pic>
+      <p:pic>
+        <p:nvPicPr>
+          <p:cNvPr id="14" name="Picture 13">
+            <a:extLst>
+              <a:ext uri="{FF2B5EF4-FFF2-40B4-BE49-F238E27FC236}">
+                <a16:creationId xmlns:a16="http://schemas.microsoft.com/office/drawing/2014/main" id="{B4693828-9283-DE27-DB38-5E94EE281928}"/>
+              </a:ext>
+            </a:extLst>
+          </p:cNvPr>
+          <p:cNvPicPr>
+            <a:picLocks noChangeAspect="1"/>
+          </p:cNvPicPr>
+          <p:nvPr/>
+        </p:nvPicPr>
+        <p:blipFill>
+          <a:blip r:embed="rId10"/>
+          <a:stretch>
+            <a:fillRect/>
+          </a:stretch>
+        </p:blipFill>
+        <p:spPr>
+          <a:xfrm>
+            <a:off x="4767306" y="2290094"/>
+            <a:ext cx="2647611" cy="1589342"/>
+          </a:xfrm>
+          <a:prstGeom prst="rect">
+            <a:avLst/>
+          </a:prstGeom>
+        </p:spPr>
+      </p:pic>
+    </p:spTree>
+    <p:extLst>
+      <p:ext uri="{BB962C8B-B14F-4D97-AF65-F5344CB8AC3E}">
+        <p14:creationId xmlns:p14="http://schemas.microsoft.com/office/powerpoint/2010/main" val="1635633002"/>
       </p:ext>
     </p:extLst>
   </p:cSld>

--- a/2026 WSDS - Wujian Xue.pptx
+++ b/2026 WSDS - Wujian Xue.pptx
@@ -1638,14 +1638,14 @@
       </dgm:t>
     </dgm:pt>
     <dgm:pt modelId="{602F0427-6797-43C7-9CFF-39FE5CFA72D9}">
-      <dgm:prSet phldrT="[Text]" phldr="0"/>
+      <dgm:prSet phldrT="[Text]" phldr="0" custT="1"/>
       <dgm:spPr/>
       <dgm:t>
         <a:bodyPr/>
         <a:lstStyle/>
         <a:p>
           <a:r>
-            <a:rPr lang="en-US" dirty="0"/>
+            <a:rPr lang="en-US" sz="1200" dirty="0"/>
             <a:t>Cloud migration</a:t>
           </a:r>
         </a:p>
@@ -1658,7 +1658,7 @@
         <a:bodyPr/>
         <a:lstStyle/>
         <a:p>
-          <a:endParaRPr lang="en-US"/>
+          <a:endParaRPr lang="en-US" sz="1200"/>
         </a:p>
       </dgm:t>
     </dgm:pt>
@@ -1669,12 +1669,12 @@
         <a:bodyPr/>
         <a:lstStyle/>
         <a:p>
-          <a:endParaRPr lang="en-US"/>
+          <a:endParaRPr lang="en-US" sz="1200"/>
         </a:p>
       </dgm:t>
     </dgm:pt>
     <dgm:pt modelId="{BE175FE2-498E-448A-B4A7-2283839D76F4}">
-      <dgm:prSet phldrT="[Text]" phldr="0"/>
+      <dgm:prSet phldrT="[Text]" phldr="0" custT="1"/>
       <dgm:spPr>
         <a:solidFill>
           <a:schemeClr val="accent2"/>
@@ -1685,7 +1685,7 @@
         <a:lstStyle/>
         <a:p>
           <a:r>
-            <a:rPr lang="en-US" dirty="0"/>
+            <a:rPr lang="en-US" sz="1200" dirty="0"/>
             <a:t>Time to customer value</a:t>
           </a:r>
         </a:p>
@@ -1698,7 +1698,7 @@
         <a:bodyPr/>
         <a:lstStyle/>
         <a:p>
-          <a:endParaRPr lang="en-US"/>
+          <a:endParaRPr lang="en-US" sz="1200"/>
         </a:p>
       </dgm:t>
     </dgm:pt>
@@ -1709,12 +1709,12 @@
         <a:bodyPr/>
         <a:lstStyle/>
         <a:p>
-          <a:endParaRPr lang="en-US"/>
+          <a:endParaRPr lang="en-US" sz="1200"/>
         </a:p>
       </dgm:t>
     </dgm:pt>
     <dgm:pt modelId="{1563DCD7-CC83-4FCC-986E-EF0D88F8C8C9}">
-      <dgm:prSet phldrT="[Text]" phldr="0"/>
+      <dgm:prSet phldrT="[Text]" phldr="0" custT="1"/>
       <dgm:spPr>
         <a:solidFill>
           <a:schemeClr val="accent3"/>
@@ -1725,7 +1725,7 @@
         <a:lstStyle/>
         <a:p>
           <a:r>
-            <a:rPr lang="en-US" dirty="0"/>
+            <a:rPr lang="en-US" sz="1200" dirty="0"/>
             <a:t>Organize for effectiveness</a:t>
           </a:r>
         </a:p>
@@ -1738,7 +1738,7 @@
         <a:bodyPr/>
         <a:lstStyle/>
         <a:p>
-          <a:endParaRPr lang="en-US"/>
+          <a:endParaRPr lang="en-US" sz="1200"/>
         </a:p>
       </dgm:t>
     </dgm:pt>
@@ -1749,12 +1749,12 @@
         <a:bodyPr/>
         <a:lstStyle/>
         <a:p>
-          <a:endParaRPr lang="en-US"/>
+          <a:endParaRPr lang="en-US" sz="1200"/>
         </a:p>
       </dgm:t>
     </dgm:pt>
     <dgm:pt modelId="{E9121F76-5EF8-4413-AF26-8697B1A9AA5A}">
-      <dgm:prSet phldrT="[Text]" phldr="0"/>
+      <dgm:prSet phldrT="[Text]" phldr="0" custT="1"/>
       <dgm:spPr>
         <a:solidFill>
           <a:srgbClr val="92D050"/>
@@ -1765,7 +1765,7 @@
         <a:lstStyle/>
         <a:p>
           <a:r>
-            <a:rPr lang="en-US" dirty="0"/>
+            <a:rPr lang="en-US" sz="1200" dirty="0"/>
             <a:t>Digital stability</a:t>
           </a:r>
         </a:p>
@@ -1778,7 +1778,7 @@
         <a:bodyPr/>
         <a:lstStyle/>
         <a:p>
-          <a:endParaRPr lang="en-US"/>
+          <a:endParaRPr lang="en-US" sz="1200"/>
         </a:p>
       </dgm:t>
     </dgm:pt>
@@ -1789,12 +1789,12 @@
         <a:bodyPr/>
         <a:lstStyle/>
         <a:p>
-          <a:endParaRPr lang="en-US"/>
+          <a:endParaRPr lang="en-US" sz="1200"/>
         </a:p>
       </dgm:t>
     </dgm:pt>
     <dgm:pt modelId="{D06E1645-DE76-4E65-BB3C-46F3BAC5AF75}">
-      <dgm:prSet phldrT="[Text]"/>
+      <dgm:prSet phldrT="[Text]" custT="1"/>
       <dgm:spPr>
         <a:solidFill>
           <a:srgbClr val="00B0F0"/>
@@ -1805,10 +1805,10 @@
         <a:lstStyle/>
         <a:p>
           <a:r>
-            <a:rPr lang="en-US" altLang="zh-CN" dirty="0"/>
+            <a:rPr lang="en-US" altLang="zh-CN" sz="1200" dirty="0"/>
             <a:t>Business Innovation at speed</a:t>
           </a:r>
-          <a:endParaRPr lang="en-US" dirty="0"/>
+          <a:endParaRPr lang="en-US" sz="1200" dirty="0"/>
         </a:p>
       </dgm:t>
     </dgm:pt>
@@ -1819,7 +1819,7 @@
         <a:bodyPr/>
         <a:lstStyle/>
         <a:p>
-          <a:endParaRPr lang="en-US"/>
+          <a:endParaRPr lang="en-US" sz="1200"/>
         </a:p>
       </dgm:t>
     </dgm:pt>
@@ -1830,12 +1830,12 @@
         <a:bodyPr/>
         <a:lstStyle/>
         <a:p>
-          <a:endParaRPr lang="en-US"/>
+          <a:endParaRPr lang="en-US" sz="1200"/>
         </a:p>
       </dgm:t>
     </dgm:pt>
     <dgm:pt modelId="{BB981C33-12A1-4F6C-8D00-12C6EC1236A6}">
-      <dgm:prSet phldrT="[Text]" phldr="0"/>
+      <dgm:prSet phldrT="[Text]" phldr="0" custT="1"/>
       <dgm:spPr>
         <a:solidFill>
           <a:srgbClr val="002060"/>
@@ -1846,7 +1846,7 @@
         <a:lstStyle/>
         <a:p>
           <a:r>
-            <a:rPr lang="en-US" dirty="0"/>
+            <a:rPr lang="en-US" sz="1200" dirty="0"/>
             <a:t>Enable transformation</a:t>
           </a:r>
         </a:p>
@@ -1859,7 +1859,7 @@
         <a:bodyPr/>
         <a:lstStyle/>
         <a:p>
-          <a:endParaRPr lang="en-US"/>
+          <a:endParaRPr lang="en-US" sz="1200"/>
         </a:p>
       </dgm:t>
     </dgm:pt>
@@ -1870,12 +1870,12 @@
         <a:bodyPr/>
         <a:lstStyle/>
         <a:p>
-          <a:endParaRPr lang="en-US"/>
+          <a:endParaRPr lang="en-US" sz="1200"/>
         </a:p>
       </dgm:t>
     </dgm:pt>
     <dgm:pt modelId="{E6B28B6F-C093-4492-834A-5B67CB2968D9}">
-      <dgm:prSet phldrT="[Text]" phldr="0"/>
+      <dgm:prSet phldrT="[Text]" phldr="0" custT="1"/>
       <dgm:spPr>
         <a:solidFill>
           <a:srgbClr val="FF0000"/>
@@ -1886,14 +1886,14 @@
         <a:lstStyle/>
         <a:p>
           <a:r>
-            <a:rPr lang="en-US" dirty="0"/>
+            <a:rPr lang="en-US" sz="1200" dirty="0"/>
             <a:t>Intelligent </a:t>
           </a:r>
           <a:r>
-            <a:rPr lang="en-US" altLang="zh-CN" dirty="0"/>
+            <a:rPr lang="en-US" altLang="zh-CN" sz="1200" dirty="0"/>
             <a:t>automation</a:t>
           </a:r>
-          <a:endParaRPr lang="en-US" dirty="0"/>
+          <a:endParaRPr lang="en-US" sz="1200" dirty="0"/>
         </a:p>
       </dgm:t>
     </dgm:pt>
@@ -1904,7 +1904,7 @@
         <a:bodyPr/>
         <a:lstStyle/>
         <a:p>
-          <a:endParaRPr lang="en-US"/>
+          <a:endParaRPr lang="en-US" sz="1200"/>
         </a:p>
       </dgm:t>
     </dgm:pt>
@@ -1915,7 +1915,7 @@
         <a:bodyPr/>
         <a:lstStyle/>
         <a:p>
-          <a:endParaRPr lang="en-US"/>
+          <a:endParaRPr lang="en-US" sz="1200"/>
         </a:p>
       </dgm:t>
     </dgm:pt>
@@ -2089,7 +2089,7 @@
   <dgm:whole/>
   <dgm:extLst>
     <a:ext uri="http://schemas.microsoft.com/office/drawing/2008/diagram">
-      <dsp:dataModelExt xmlns:dsp="http://schemas.microsoft.com/office/drawing/2008/diagram" relId="rId8" minVer="http://schemas.openxmlformats.org/drawingml/2006/diagram"/>
+      <dsp:dataModelExt xmlns:dsp="http://schemas.microsoft.com/office/drawing/2008/diagram" relId="rId7" minVer="http://schemas.openxmlformats.org/drawingml/2006/diagram"/>
     </a:ext>
   </dgm:extLst>
 </dgm:dataModel>
@@ -2361,8 +2361,8 @@
       </dsp:nvSpPr>
       <dsp:spPr>
         <a:xfrm>
-          <a:off x="2057166" y="1404169"/>
-          <a:ext cx="1784760" cy="1543890"/>
+          <a:off x="2157913" y="1476707"/>
+          <a:ext cx="1876959" cy="1623646"/>
         </a:xfrm>
         <a:prstGeom prst="hexagon">
           <a:avLst>
@@ -2431,8 +2431,8 @@
         </a:p>
       </dsp:txBody>
       <dsp:txXfrm>
-        <a:off x="2352926" y="1660013"/>
-        <a:ext cx="1193240" cy="1032202"/>
+        <a:off x="2468951" y="1745768"/>
+        <a:ext cx="1254883" cy="1085524"/>
       </dsp:txXfrm>
     </dsp:sp>
     <dsp:sp modelId="{16108406-D824-48AA-986F-F20B13B82A81}">
@@ -2442,8 +2442,8 @@
       </dsp:nvSpPr>
       <dsp:spPr>
         <a:xfrm>
-          <a:off x="3174769" y="665522"/>
-          <a:ext cx="673384" cy="580210"/>
+          <a:off x="3333251" y="699902"/>
+          <a:ext cx="708171" cy="610183"/>
         </a:xfrm>
         <a:prstGeom prst="hexagon">
           <a:avLst>
@@ -2485,8 +2485,8 @@
       </dsp:nvSpPr>
       <dsp:spPr>
         <a:xfrm>
-          <a:off x="2221568" y="0"/>
-          <a:ext cx="1462598" cy="1265319"/>
+          <a:off x="2330808" y="0"/>
+          <a:ext cx="1538155" cy="1330685"/>
         </a:xfrm>
         <a:prstGeom prst="hexagon">
           <a:avLst>
@@ -2550,8 +2550,8 @@
         </a:p>
       </dsp:txBody>
       <dsp:txXfrm>
-        <a:off x="2463952" y="209690"/>
-        <a:ext cx="977830" cy="845939"/>
+        <a:off x="2585713" y="220523"/>
+        <a:ext cx="1028345" cy="889639"/>
       </dsp:txXfrm>
     </dsp:sp>
     <dsp:sp modelId="{322F9847-0308-445A-A02E-9697140899BE}">
@@ -2561,8 +2561,8 @@
       </dsp:nvSpPr>
       <dsp:spPr>
         <a:xfrm>
-          <a:off x="3960662" y="1750206"/>
-          <a:ext cx="673384" cy="580210"/>
+          <a:off x="4159742" y="1840620"/>
+          <a:ext cx="708171" cy="610183"/>
         </a:xfrm>
         <a:prstGeom prst="hexagon">
           <a:avLst>
@@ -2604,8 +2604,8 @@
       </dsp:nvSpPr>
       <dsp:spPr>
         <a:xfrm>
-          <a:off x="3562941" y="778256"/>
-          <a:ext cx="1462598" cy="1265319"/>
+          <a:off x="3741475" y="818460"/>
+          <a:ext cx="1538155" cy="1330685"/>
         </a:xfrm>
         <a:prstGeom prst="hexagon">
           <a:avLst>
@@ -2669,8 +2669,8 @@
         </a:p>
       </dsp:txBody>
       <dsp:txXfrm>
-        <a:off x="3805325" y="987946"/>
-        <a:ext cx="977830" cy="845939"/>
+        <a:off x="3996380" y="1038983"/>
+        <a:ext cx="1028345" cy="889639"/>
       </dsp:txXfrm>
     </dsp:sp>
     <dsp:sp modelId="{76DF7524-118F-4A3C-8039-C7730AC993D2}">
@@ -2680,8 +2680,8 @@
       </dsp:nvSpPr>
       <dsp:spPr>
         <a:xfrm>
-          <a:off x="3414730" y="2974611"/>
-          <a:ext cx="673384" cy="580210"/>
+          <a:off x="3585608" y="3128277"/>
+          <a:ext cx="708171" cy="610183"/>
         </a:xfrm>
         <a:prstGeom prst="hexagon">
           <a:avLst>
@@ -2723,8 +2723,8 @@
       </dsp:nvSpPr>
       <dsp:spPr>
         <a:xfrm>
-          <a:off x="3562941" y="2308218"/>
-          <a:ext cx="1462598" cy="1265319"/>
+          <a:off x="3741475" y="2427458"/>
+          <a:ext cx="1538155" cy="1330685"/>
         </a:xfrm>
         <a:prstGeom prst="hexagon">
           <a:avLst>
@@ -2788,8 +2788,8 @@
         </a:p>
       </dsp:txBody>
       <dsp:txXfrm>
-        <a:off x="3805325" y="2517908"/>
-        <a:ext cx="977830" cy="845939"/>
+        <a:off x="3996380" y="2647981"/>
+        <a:ext cx="1028345" cy="889639"/>
       </dsp:txXfrm>
     </dsp:sp>
     <dsp:sp modelId="{6A5105C0-DF27-4B27-8885-6430EAC6309F}">
@@ -2799,8 +2799,8 @@
       </dsp:nvSpPr>
       <dsp:spPr>
         <a:xfrm>
-          <a:off x="2060487" y="3101709"/>
-          <a:ext cx="673384" cy="580210"/>
+          <a:off x="2161406" y="3261940"/>
+          <a:ext cx="708171" cy="610183"/>
         </a:xfrm>
         <a:prstGeom prst="hexagon">
           <a:avLst>
@@ -2842,8 +2842,8 @@
       </dsp:nvSpPr>
       <dsp:spPr>
         <a:xfrm>
-          <a:off x="2221568" y="3087345"/>
-          <a:ext cx="1462598" cy="1265319"/>
+          <a:off x="2330808" y="3246834"/>
+          <a:ext cx="1538155" cy="1330685"/>
         </a:xfrm>
         <a:prstGeom prst="hexagon">
           <a:avLst>
@@ -2908,8 +2908,8 @@
         </a:p>
       </dsp:txBody>
       <dsp:txXfrm>
-        <a:off x="2463952" y="3297035"/>
-        <a:ext cx="977830" cy="845939"/>
+        <a:off x="2585713" y="3467357"/>
+        <a:ext cx="1028345" cy="889639"/>
       </dsp:txXfrm>
     </dsp:sp>
     <dsp:sp modelId="{49B31C55-29E4-4F65-B048-7407A37441AB}">
@@ -2919,8 +2919,8 @@
       </dsp:nvSpPr>
       <dsp:spPr>
         <a:xfrm>
-          <a:off x="1261725" y="2017460"/>
-          <a:ext cx="673384" cy="580210"/>
+          <a:off x="1321380" y="2121680"/>
+          <a:ext cx="708171" cy="610183"/>
         </a:xfrm>
         <a:prstGeom prst="hexagon">
           <a:avLst>
@@ -2962,8 +2962,8 @@
       </dsp:nvSpPr>
       <dsp:spPr>
         <a:xfrm>
-          <a:off x="873968" y="2309088"/>
-          <a:ext cx="1462598" cy="1265319"/>
+          <a:off x="913592" y="2428374"/>
+          <a:ext cx="1538155" cy="1330685"/>
         </a:xfrm>
         <a:prstGeom prst="hexagon">
           <a:avLst>
@@ -3027,8 +3027,8 @@
         </a:p>
       </dsp:txBody>
       <dsp:txXfrm>
-        <a:off x="1116352" y="2518778"/>
-        <a:ext cx="977830" cy="845939"/>
+        <a:off x="1168497" y="2648897"/>
+        <a:ext cx="1028345" cy="889639"/>
       </dsp:txXfrm>
     </dsp:sp>
     <dsp:sp modelId="{C5A425D9-4151-4A77-AD71-BFDEBC1E8358}">
@@ -3038,8 +3038,8 @@
       </dsp:nvSpPr>
       <dsp:spPr>
         <a:xfrm>
-          <a:off x="873968" y="776515"/>
-          <a:ext cx="1462598" cy="1265319"/>
+          <a:off x="913592" y="816629"/>
+          <a:ext cx="1538155" cy="1330685"/>
         </a:xfrm>
         <a:prstGeom prst="hexagon">
           <a:avLst>
@@ -3108,8 +3108,8 @@
         </a:p>
       </dsp:txBody>
       <dsp:txXfrm>
-        <a:off x="1116352" y="986205"/>
-        <a:ext cx="977830" cy="845939"/>
+        <a:off x="1168497" y="1037152"/>
+        <a:ext cx="1028345" cy="889639"/>
       </dsp:txXfrm>
     </dsp:sp>
   </dsp:spTree>
@@ -6849,7 +6849,7 @@
           <a:p>
             <a:fld id="{9DFF5FDE-556D-4288-960F-3880543CC0D0}" type="datetimeFigureOut">
               <a:rPr lang="en-US" smtClean="0"/>
-              <a:t>10/15/2026</a:t>
+              <a:t>10/16/2026</a:t>
             </a:fld>
             <a:endParaRPr lang="en-US"/>
           </a:p>
@@ -7047,7 +7047,7 @@
           <a:p>
             <a:fld id="{9DFF5FDE-556D-4288-960F-3880543CC0D0}" type="datetimeFigureOut">
               <a:rPr lang="en-US" smtClean="0"/>
-              <a:t>10/15/2026</a:t>
+              <a:t>10/16/2026</a:t>
             </a:fld>
             <a:endParaRPr lang="en-US"/>
           </a:p>
@@ -7255,7 +7255,7 @@
           <a:p>
             <a:fld id="{9DFF5FDE-556D-4288-960F-3880543CC0D0}" type="datetimeFigureOut">
               <a:rPr lang="en-US" smtClean="0"/>
-              <a:t>10/15/2026</a:t>
+              <a:t>10/16/2026</a:t>
             </a:fld>
             <a:endParaRPr lang="en-US"/>
           </a:p>
@@ -7453,7 +7453,7 @@
           <a:p>
             <a:fld id="{9DFF5FDE-556D-4288-960F-3880543CC0D0}" type="datetimeFigureOut">
               <a:rPr lang="en-US" smtClean="0"/>
-              <a:t>10/15/2026</a:t>
+              <a:t>10/16/2026</a:t>
             </a:fld>
             <a:endParaRPr lang="en-US"/>
           </a:p>
@@ -7728,7 +7728,7 @@
           <a:p>
             <a:fld id="{9DFF5FDE-556D-4288-960F-3880543CC0D0}" type="datetimeFigureOut">
               <a:rPr lang="en-US" smtClean="0"/>
-              <a:t>10/15/2026</a:t>
+              <a:t>10/16/2026</a:t>
             </a:fld>
             <a:endParaRPr lang="en-US"/>
           </a:p>
@@ -7993,7 +7993,7 @@
           <a:p>
             <a:fld id="{9DFF5FDE-556D-4288-960F-3880543CC0D0}" type="datetimeFigureOut">
               <a:rPr lang="en-US" smtClean="0"/>
-              <a:t>10/15/2026</a:t>
+              <a:t>10/16/2026</a:t>
             </a:fld>
             <a:endParaRPr lang="en-US"/>
           </a:p>
@@ -8405,7 +8405,7 @@
           <a:p>
             <a:fld id="{9DFF5FDE-556D-4288-960F-3880543CC0D0}" type="datetimeFigureOut">
               <a:rPr lang="en-US" smtClean="0"/>
-              <a:t>10/15/2026</a:t>
+              <a:t>10/16/2026</a:t>
             </a:fld>
             <a:endParaRPr lang="en-US"/>
           </a:p>
@@ -8546,7 +8546,7 @@
           <a:p>
             <a:fld id="{9DFF5FDE-556D-4288-960F-3880543CC0D0}" type="datetimeFigureOut">
               <a:rPr lang="en-US" smtClean="0"/>
-              <a:t>10/15/2026</a:t>
+              <a:t>10/16/2026</a:t>
             </a:fld>
             <a:endParaRPr lang="en-US"/>
           </a:p>
@@ -8659,7 +8659,7 @@
           <a:p>
             <a:fld id="{9DFF5FDE-556D-4288-960F-3880543CC0D0}" type="datetimeFigureOut">
               <a:rPr lang="en-US" smtClean="0"/>
-              <a:t>10/15/2026</a:t>
+              <a:t>10/16/2026</a:t>
             </a:fld>
             <a:endParaRPr lang="en-US"/>
           </a:p>
@@ -8970,7 +8970,7 @@
           <a:p>
             <a:fld id="{9DFF5FDE-556D-4288-960F-3880543CC0D0}" type="datetimeFigureOut">
               <a:rPr lang="en-US" smtClean="0"/>
-              <a:t>10/15/2026</a:t>
+              <a:t>10/16/2026</a:t>
             </a:fld>
             <a:endParaRPr lang="en-US"/>
           </a:p>
@@ -9258,7 +9258,7 @@
           <a:p>
             <a:fld id="{9DFF5FDE-556D-4288-960F-3880543CC0D0}" type="datetimeFigureOut">
               <a:rPr lang="en-US" smtClean="0"/>
-              <a:t>10/15/2026</a:t>
+              <a:t>10/16/2026</a:t>
             </a:fld>
             <a:endParaRPr lang="en-US"/>
           </a:p>
@@ -9499,7 +9499,7 @@
           <a:p>
             <a:fld id="{9DFF5FDE-556D-4288-960F-3880543CC0D0}" type="datetimeFigureOut">
               <a:rPr lang="en-US" smtClean="0"/>
-              <a:t>10/15/2026</a:t>
+              <a:t>10/16/2026</a:t>
             </a:fld>
             <a:endParaRPr lang="en-US"/>
           </a:p>
@@ -11231,6 +11231,42 @@
           </a:p>
         </p:txBody>
       </p:sp>
+      <p:pic>
+        <p:nvPicPr>
+          <p:cNvPr id="13" name="Picture 12">
+            <a:extLst>
+              <a:ext uri="{FF2B5EF4-FFF2-40B4-BE49-F238E27FC236}">
+                <a16:creationId xmlns:a16="http://schemas.microsoft.com/office/drawing/2014/main" id="{2DF3816E-67F8-3536-C248-C26EC415F2AF}"/>
+              </a:ext>
+            </a:extLst>
+          </p:cNvPr>
+          <p:cNvPicPr>
+            <a:picLocks noChangeAspect="1"/>
+          </p:cNvPicPr>
+          <p:nvPr/>
+        </p:nvPicPr>
+        <p:blipFill>
+          <a:blip r:embed="rId2">
+            <a:extLst>
+              <a:ext uri="{28A0092B-C50C-407E-A947-70E740481C1C}">
+                <a14:useLocalDpi xmlns:a14="http://schemas.microsoft.com/office/drawing/2010/main" val="0"/>
+              </a:ext>
+            </a:extLst>
+          </a:blip>
+          <a:stretch>
+            <a:fillRect/>
+          </a:stretch>
+        </p:blipFill>
+        <p:spPr>
+          <a:xfrm>
+            <a:off x="4502832" y="5242539"/>
+            <a:ext cx="4156942" cy="1464377"/>
+          </a:xfrm>
+          <a:prstGeom prst="rect">
+            <a:avLst/>
+          </a:prstGeom>
+        </p:spPr>
+      </p:pic>
     </p:spTree>
     <p:extLst>
       <p:ext uri="{BB962C8B-B14F-4D97-AF65-F5344CB8AC3E}">
@@ -11947,27 +11983,27 @@
         </p:nvSpPr>
         <p:spPr>
           <a:xfrm>
-            <a:off x="777815" y="1498251"/>
-            <a:ext cx="7063596" cy="824536"/>
+            <a:off x="3950547" y="6329758"/>
+            <a:ext cx="2364503" cy="455650"/>
           </a:xfrm>
         </p:spPr>
         <p:txBody>
           <a:bodyPr>
-            <a:normAutofit fontScale="92500" lnSpcReduction="20000"/>
+            <a:normAutofit fontScale="70000" lnSpcReduction="20000"/>
           </a:bodyPr>
           <a:lstStyle/>
           <a:p>
             <a:r>
-              <a:rPr lang="en-US" dirty="0"/>
+              <a:rPr lang="en-US" sz="1500" dirty="0"/>
               <a:t>What is the problem and why</a:t>
             </a:r>
           </a:p>
           <a:p>
             <a:r>
-              <a:rPr lang="en-US" altLang="zh-CN" dirty="0"/>
+              <a:rPr lang="en-US" altLang="zh-CN" sz="1500" dirty="0"/>
               <a:t>Women in the migration</a:t>
             </a:r>
-            <a:endParaRPr lang="en-US" dirty="0"/>
+            <a:endParaRPr lang="en-US" sz="1500" dirty="0"/>
           </a:p>
           <a:p>
             <a:endParaRPr lang="en-US" dirty="0"/>
@@ -11996,8 +12032,8 @@
         </p:blipFill>
         <p:spPr>
           <a:xfrm>
-            <a:off x="590144" y="2379680"/>
-            <a:ext cx="2301815" cy="1208151"/>
+            <a:off x="1801207" y="1397420"/>
+            <a:ext cx="2269375" cy="1191124"/>
           </a:xfrm>
           <a:prstGeom prst="rect">
             <a:avLst/>
@@ -12039,42 +12075,6 @@
           </a:p>
         </p:txBody>
       </p:sp>
-      <p:pic>
-        <p:nvPicPr>
-          <p:cNvPr id="13" name="Picture 12">
-            <a:extLst>
-              <a:ext uri="{FF2B5EF4-FFF2-40B4-BE49-F238E27FC236}">
-                <a16:creationId xmlns:a16="http://schemas.microsoft.com/office/drawing/2014/main" id="{2DF3816E-67F8-3536-C248-C26EC415F2AF}"/>
-              </a:ext>
-            </a:extLst>
-          </p:cNvPr>
-          <p:cNvPicPr>
-            <a:picLocks noChangeAspect="1"/>
-          </p:cNvPicPr>
-          <p:nvPr/>
-        </p:nvPicPr>
-        <p:blipFill>
-          <a:blip r:embed="rId3">
-            <a:extLst>
-              <a:ext uri="{28A0092B-C50C-407E-A947-70E740481C1C}">
-                <a14:useLocalDpi xmlns:a14="http://schemas.microsoft.com/office/drawing/2010/main" val="0"/>
-              </a:ext>
-            </a:extLst>
-          </a:blip>
-          <a:stretch>
-            <a:fillRect/>
-          </a:stretch>
-        </p:blipFill>
-        <p:spPr>
-          <a:xfrm>
-            <a:off x="177925" y="4317361"/>
-            <a:ext cx="5918075" cy="2084776"/>
-          </a:xfrm>
-          <a:prstGeom prst="rect">
-            <a:avLst/>
-          </a:prstGeom>
-        </p:spPr>
-      </p:pic>
       <p:graphicFrame>
         <p:nvGraphicFramePr>
           <p:cNvPr id="5" name="Diagram 4">
@@ -12088,21 +12088,267 @@
           <p:nvPr>
             <p:extLst>
               <p:ext uri="{D42A27DB-BD31-4B8C-83A1-F6EECF244321}">
-                <p14:modId xmlns:p14="http://schemas.microsoft.com/office/powerpoint/2010/main" val="85743466"/>
+                <p14:modId xmlns:p14="http://schemas.microsoft.com/office/powerpoint/2010/main" val="3012375990"/>
               </p:ext>
             </p:extLst>
           </p:nvPr>
         </p:nvGraphicFramePr>
         <p:xfrm>
-          <a:off x="6292491" y="2083317"/>
-          <a:ext cx="5899509" cy="4352665"/>
+          <a:off x="6770569" y="1821369"/>
+          <a:ext cx="6193224" cy="4577520"/>
         </p:xfrm>
         <a:graphic>
           <a:graphicData uri="http://schemas.openxmlformats.org/drawingml/2006/diagram">
-            <dgm:relIds xmlns:dgm="http://schemas.openxmlformats.org/drawingml/2006/diagram" xmlns:r="http://schemas.openxmlformats.org/officeDocument/2006/relationships" r:dm="rId4" r:lo="rId5" r:qs="rId6" r:cs="rId7"/>
+            <dgm:relIds xmlns:dgm="http://schemas.openxmlformats.org/drawingml/2006/diagram" xmlns:r="http://schemas.openxmlformats.org/officeDocument/2006/relationships" r:dm="rId3" r:lo="rId4" r:qs="rId5" r:cs="rId6"/>
           </a:graphicData>
         </a:graphic>
       </p:graphicFrame>
+      <p:sp>
+        <p:nvSpPr>
+          <p:cNvPr id="16" name="Content Placeholder 2">
+            <a:extLst>
+              <a:ext uri="{FF2B5EF4-FFF2-40B4-BE49-F238E27FC236}">
+                <a16:creationId xmlns:a16="http://schemas.microsoft.com/office/drawing/2014/main" id="{2F379E69-1A2C-A431-2445-45C07F7232B2}"/>
+              </a:ext>
+            </a:extLst>
+          </p:cNvPr>
+          <p:cNvSpPr txBox="1">
+            <a:spLocks/>
+          </p:cNvSpPr>
+          <p:nvPr/>
+        </p:nvSpPr>
+        <p:spPr>
+          <a:xfrm>
+            <a:off x="323439" y="2588543"/>
+            <a:ext cx="6797027" cy="3670941"/>
+          </a:xfrm>
+          <a:prstGeom prst="rect">
+            <a:avLst/>
+          </a:prstGeom>
+        </p:spPr>
+        <p:txBody>
+          <a:bodyPr vert="horz" lIns="91440" tIns="45720" rIns="91440" bIns="45720" rtlCol="0">
+            <a:normAutofit/>
+          </a:bodyPr>
+          <a:lstStyle>
+            <a:lvl1pPr marL="228600" indent="-228600" algn="l" defTabSz="914400" rtl="0" eaLnBrk="1" latinLnBrk="0" hangingPunct="1">
+              <a:lnSpc>
+                <a:spcPct val="90000"/>
+              </a:lnSpc>
+              <a:spcBef>
+                <a:spcPts val="1000"/>
+              </a:spcBef>
+              <a:buFont typeface="Arial" panose="020B0604020202020204" pitchFamily="34" charset="0"/>
+              <a:buChar char="•"/>
+              <a:defRPr sz="2800" kern="1200">
+                <a:solidFill>
+                  <a:schemeClr val="tx1"/>
+                </a:solidFill>
+                <a:latin typeface="+mn-lt"/>
+                <a:ea typeface="+mn-ea"/>
+                <a:cs typeface="+mn-cs"/>
+              </a:defRPr>
+            </a:lvl1pPr>
+            <a:lvl2pPr marL="685800" indent="-228600" algn="l" defTabSz="914400" rtl="0" eaLnBrk="1" latinLnBrk="0" hangingPunct="1">
+              <a:lnSpc>
+                <a:spcPct val="90000"/>
+              </a:lnSpc>
+              <a:spcBef>
+                <a:spcPts val="500"/>
+              </a:spcBef>
+              <a:buFont typeface="Arial" panose="020B0604020202020204" pitchFamily="34" charset="0"/>
+              <a:buChar char="•"/>
+              <a:defRPr sz="2400" kern="1200">
+                <a:solidFill>
+                  <a:schemeClr val="tx1"/>
+                </a:solidFill>
+                <a:latin typeface="+mn-lt"/>
+                <a:ea typeface="+mn-ea"/>
+                <a:cs typeface="+mn-cs"/>
+              </a:defRPr>
+            </a:lvl2pPr>
+            <a:lvl3pPr marL="1143000" indent="-228600" algn="l" defTabSz="914400" rtl="0" eaLnBrk="1" latinLnBrk="0" hangingPunct="1">
+              <a:lnSpc>
+                <a:spcPct val="90000"/>
+              </a:lnSpc>
+              <a:spcBef>
+                <a:spcPts val="500"/>
+              </a:spcBef>
+              <a:buFont typeface="Arial" panose="020B0604020202020204" pitchFamily="34" charset="0"/>
+              <a:buChar char="•"/>
+              <a:defRPr sz="2000" kern="1200">
+                <a:solidFill>
+                  <a:schemeClr val="tx1"/>
+                </a:solidFill>
+                <a:latin typeface="+mn-lt"/>
+                <a:ea typeface="+mn-ea"/>
+                <a:cs typeface="+mn-cs"/>
+              </a:defRPr>
+            </a:lvl3pPr>
+            <a:lvl4pPr marL="1600200" indent="-228600" algn="l" defTabSz="914400" rtl="0" eaLnBrk="1" latinLnBrk="0" hangingPunct="1">
+              <a:lnSpc>
+                <a:spcPct val="90000"/>
+              </a:lnSpc>
+              <a:spcBef>
+                <a:spcPts val="500"/>
+              </a:spcBef>
+              <a:buFont typeface="Arial" panose="020B0604020202020204" pitchFamily="34" charset="0"/>
+              <a:buChar char="•"/>
+              <a:defRPr sz="1800" kern="1200">
+                <a:solidFill>
+                  <a:schemeClr val="tx1"/>
+                </a:solidFill>
+                <a:latin typeface="+mn-lt"/>
+                <a:ea typeface="+mn-ea"/>
+                <a:cs typeface="+mn-cs"/>
+              </a:defRPr>
+            </a:lvl4pPr>
+            <a:lvl5pPr marL="2057400" indent="-228600" algn="l" defTabSz="914400" rtl="0" eaLnBrk="1" latinLnBrk="0" hangingPunct="1">
+              <a:lnSpc>
+                <a:spcPct val="90000"/>
+              </a:lnSpc>
+              <a:spcBef>
+                <a:spcPts val="500"/>
+              </a:spcBef>
+              <a:buFont typeface="Arial" panose="020B0604020202020204" pitchFamily="34" charset="0"/>
+              <a:buChar char="•"/>
+              <a:defRPr sz="1800" kern="1200">
+                <a:solidFill>
+                  <a:schemeClr val="tx1"/>
+                </a:solidFill>
+                <a:latin typeface="+mn-lt"/>
+                <a:ea typeface="+mn-ea"/>
+                <a:cs typeface="+mn-cs"/>
+              </a:defRPr>
+            </a:lvl5pPr>
+            <a:lvl6pPr marL="2514600" indent="-228600" algn="l" defTabSz="914400" rtl="0" eaLnBrk="1" latinLnBrk="0" hangingPunct="1">
+              <a:lnSpc>
+                <a:spcPct val="90000"/>
+              </a:lnSpc>
+              <a:spcBef>
+                <a:spcPts val="500"/>
+              </a:spcBef>
+              <a:buFont typeface="Arial" panose="020B0604020202020204" pitchFamily="34" charset="0"/>
+              <a:buChar char="•"/>
+              <a:defRPr sz="1800" kern="1200">
+                <a:solidFill>
+                  <a:schemeClr val="tx1"/>
+                </a:solidFill>
+                <a:latin typeface="+mn-lt"/>
+                <a:ea typeface="+mn-ea"/>
+                <a:cs typeface="+mn-cs"/>
+              </a:defRPr>
+            </a:lvl6pPr>
+            <a:lvl7pPr marL="2971800" indent="-228600" algn="l" defTabSz="914400" rtl="0" eaLnBrk="1" latinLnBrk="0" hangingPunct="1">
+              <a:lnSpc>
+                <a:spcPct val="90000"/>
+              </a:lnSpc>
+              <a:spcBef>
+                <a:spcPts val="500"/>
+              </a:spcBef>
+              <a:buFont typeface="Arial" panose="020B0604020202020204" pitchFamily="34" charset="0"/>
+              <a:buChar char="•"/>
+              <a:defRPr sz="1800" kern="1200">
+                <a:solidFill>
+                  <a:schemeClr val="tx1"/>
+                </a:solidFill>
+                <a:latin typeface="+mn-lt"/>
+                <a:ea typeface="+mn-ea"/>
+                <a:cs typeface="+mn-cs"/>
+              </a:defRPr>
+            </a:lvl7pPr>
+            <a:lvl8pPr marL="3429000" indent="-228600" algn="l" defTabSz="914400" rtl="0" eaLnBrk="1" latinLnBrk="0" hangingPunct="1">
+              <a:lnSpc>
+                <a:spcPct val="90000"/>
+              </a:lnSpc>
+              <a:spcBef>
+                <a:spcPts val="500"/>
+              </a:spcBef>
+              <a:buFont typeface="Arial" panose="020B0604020202020204" pitchFamily="34" charset="0"/>
+              <a:buChar char="•"/>
+              <a:defRPr sz="1800" kern="1200">
+                <a:solidFill>
+                  <a:schemeClr val="tx1"/>
+                </a:solidFill>
+                <a:latin typeface="+mn-lt"/>
+                <a:ea typeface="+mn-ea"/>
+                <a:cs typeface="+mn-cs"/>
+              </a:defRPr>
+            </a:lvl8pPr>
+            <a:lvl9pPr marL="3886200" indent="-228600" algn="l" defTabSz="914400" rtl="0" eaLnBrk="1" latinLnBrk="0" hangingPunct="1">
+              <a:lnSpc>
+                <a:spcPct val="90000"/>
+              </a:lnSpc>
+              <a:spcBef>
+                <a:spcPts val="500"/>
+              </a:spcBef>
+              <a:buFont typeface="Arial" panose="020B0604020202020204" pitchFamily="34" charset="0"/>
+              <a:buChar char="•"/>
+              <a:defRPr sz="1800" kern="1200">
+                <a:solidFill>
+                  <a:schemeClr val="tx1"/>
+                </a:solidFill>
+                <a:latin typeface="+mn-lt"/>
+                <a:ea typeface="+mn-ea"/>
+                <a:cs typeface="+mn-cs"/>
+              </a:defRPr>
+            </a:lvl9pPr>
+          </a:lstStyle>
+          <a:p>
+            <a:r>
+              <a:rPr lang="en-US" sz="2000" dirty="0"/>
+              <a:t>Business: </a:t>
+            </a:r>
+          </a:p>
+          <a:p>
+            <a:pPr lvl="1"/>
+            <a:r>
+              <a:rPr lang="en-US" sz="1600" dirty="0"/>
+              <a:t>Buy mortgage from lenders across the U.S., give lenders cash to make more home loans.</a:t>
+            </a:r>
+          </a:p>
+          <a:p>
+            <a:pPr lvl="1"/>
+            <a:r>
+              <a:rPr lang="en-US" sz="1600" dirty="0"/>
+              <a:t>Pool most of the loans into mortgage-backed securities(MBS) and guarantees investors timely payment of principal and interest.</a:t>
+            </a:r>
+          </a:p>
+          <a:p>
+            <a:pPr lvl="1"/>
+            <a:r>
+              <a:rPr lang="en-US" sz="1600" dirty="0"/>
+              <a:t>Earns guarantee fees on the security and interest income on the loan</a:t>
+            </a:r>
+          </a:p>
+          <a:p>
+            <a:endParaRPr lang="en-US" sz="2000" dirty="0"/>
+          </a:p>
+          <a:p>
+            <a:r>
+              <a:rPr lang="en-US" sz="2000" dirty="0"/>
+              <a:t>Numbers: </a:t>
+            </a:r>
+          </a:p>
+          <a:p>
+            <a:pPr lvl="1"/>
+            <a:r>
+              <a:rPr lang="en-US" sz="1600" dirty="0"/>
+              <a:t>Chartered by the Congress in 1938, under federal conservatorship in 2008. </a:t>
+            </a:r>
+          </a:p>
+          <a:p>
+            <a:pPr lvl="1"/>
+            <a:r>
+              <a:rPr lang="en-US" sz="1600" dirty="0"/>
+              <a:t>Hold $43. trillion assets, 25%  homes in the U.S. are financed by Fannie Mae</a:t>
+            </a:r>
+          </a:p>
+          <a:p>
+            <a:endParaRPr lang="en-US" dirty="0"/>
+          </a:p>
+        </p:txBody>
+      </p:sp>
     </p:spTree>
     <p:extLst>
       <p:ext uri="{BB962C8B-B14F-4D97-AF65-F5344CB8AC3E}">
@@ -12155,7 +12401,12 @@
             <p:ph type="title"/>
           </p:nvPr>
         </p:nvSpPr>
-        <p:spPr/>
+        <p:spPr>
+          <a:xfrm>
+            <a:off x="728133" y="11441"/>
+            <a:ext cx="10515600" cy="1325563"/>
+          </a:xfrm>
+        </p:spPr>
         <p:txBody>
           <a:bodyPr/>
           <a:lstStyle/>
@@ -12185,7 +12436,7 @@
         </p:nvSpPr>
         <p:spPr>
           <a:xfrm>
-            <a:off x="631166" y="1611893"/>
+            <a:off x="728133" y="1204849"/>
             <a:ext cx="8228162" cy="512133"/>
           </a:xfrm>
         </p:spPr>
@@ -12257,7 +12508,7 @@
         </p:blipFill>
         <p:spPr>
           <a:xfrm>
-            <a:off x="7893169" y="2902760"/>
+            <a:off x="129347" y="3018213"/>
             <a:ext cx="4140679" cy="3428999"/>
           </a:xfrm>
           <a:prstGeom prst="rect">
@@ -12279,7 +12530,7 @@
         </p:nvSpPr>
         <p:spPr>
           <a:xfrm>
-            <a:off x="8403045" y="2268204"/>
+            <a:off x="938618" y="2541058"/>
             <a:ext cx="2950755" cy="369332"/>
           </a:xfrm>
           <a:prstGeom prst="rect">
@@ -12300,6 +12551,216 @@
           </a:p>
         </p:txBody>
       </p:sp>
+      <p:pic>
+        <p:nvPicPr>
+          <p:cNvPr id="6" name="Picture 5">
+            <a:extLst>
+              <a:ext uri="{FF2B5EF4-FFF2-40B4-BE49-F238E27FC236}">
+                <a16:creationId xmlns:a16="http://schemas.microsoft.com/office/drawing/2014/main" id="{CA263698-66A8-108C-94D6-43284B120516}"/>
+              </a:ext>
+            </a:extLst>
+          </p:cNvPr>
+          <p:cNvPicPr>
+            <a:picLocks noChangeAspect="1"/>
+          </p:cNvPicPr>
+          <p:nvPr/>
+        </p:nvPicPr>
+        <p:blipFill>
+          <a:blip r:embed="rId3"/>
+          <a:stretch>
+            <a:fillRect/>
+          </a:stretch>
+        </p:blipFill>
+        <p:spPr>
+          <a:xfrm>
+            <a:off x="8382367" y="2398611"/>
+            <a:ext cx="1290890" cy="861801"/>
+          </a:xfrm>
+          <a:prstGeom prst="rect">
+            <a:avLst/>
+          </a:prstGeom>
+        </p:spPr>
+      </p:pic>
+      <p:pic>
+        <p:nvPicPr>
+          <p:cNvPr id="7" name="Picture 6">
+            <a:extLst>
+              <a:ext uri="{FF2B5EF4-FFF2-40B4-BE49-F238E27FC236}">
+                <a16:creationId xmlns:a16="http://schemas.microsoft.com/office/drawing/2014/main" id="{0DA602E8-F311-D5EB-0349-5E5FF992C5B8}"/>
+              </a:ext>
+            </a:extLst>
+          </p:cNvPr>
+          <p:cNvPicPr>
+            <a:picLocks noChangeAspect="1"/>
+          </p:cNvPicPr>
+          <p:nvPr/>
+        </p:nvPicPr>
+        <p:blipFill>
+          <a:blip r:embed="rId4"/>
+          <a:stretch>
+            <a:fillRect/>
+          </a:stretch>
+        </p:blipFill>
+        <p:spPr>
+          <a:xfrm>
+            <a:off x="7183943" y="3691313"/>
+            <a:ext cx="1388533" cy="1041400"/>
+          </a:xfrm>
+          <a:prstGeom prst="rect">
+            <a:avLst/>
+          </a:prstGeom>
+        </p:spPr>
+      </p:pic>
+      <p:pic>
+        <p:nvPicPr>
+          <p:cNvPr id="9" name="Picture 8">
+            <a:extLst>
+              <a:ext uri="{FF2B5EF4-FFF2-40B4-BE49-F238E27FC236}">
+                <a16:creationId xmlns:a16="http://schemas.microsoft.com/office/drawing/2014/main" id="{F807BABC-73FF-17A8-86F9-905F442F4239}"/>
+              </a:ext>
+            </a:extLst>
+          </p:cNvPr>
+          <p:cNvPicPr>
+            <a:picLocks noChangeAspect="1"/>
+          </p:cNvPicPr>
+          <p:nvPr/>
+        </p:nvPicPr>
+        <p:blipFill>
+          <a:blip r:embed="rId5"/>
+          <a:stretch>
+            <a:fillRect/>
+          </a:stretch>
+        </p:blipFill>
+        <p:spPr>
+          <a:xfrm>
+            <a:off x="10479765" y="3759799"/>
+            <a:ext cx="1253067" cy="939800"/>
+          </a:xfrm>
+          <a:prstGeom prst="rect">
+            <a:avLst/>
+          </a:prstGeom>
+        </p:spPr>
+      </p:pic>
+      <p:pic>
+        <p:nvPicPr>
+          <p:cNvPr id="10" name="Picture 9">
+            <a:extLst>
+              <a:ext uri="{FF2B5EF4-FFF2-40B4-BE49-F238E27FC236}">
+                <a16:creationId xmlns:a16="http://schemas.microsoft.com/office/drawing/2014/main" id="{FD47517D-7D0A-30F0-A5C2-3BF87FF002A0}"/>
+              </a:ext>
+            </a:extLst>
+          </p:cNvPr>
+          <p:cNvPicPr>
+            <a:picLocks noChangeAspect="1"/>
+          </p:cNvPicPr>
+          <p:nvPr/>
+        </p:nvPicPr>
+        <p:blipFill>
+          <a:blip r:embed="rId6"/>
+          <a:stretch>
+            <a:fillRect/>
+          </a:stretch>
+        </p:blipFill>
+        <p:spPr>
+          <a:xfrm>
+            <a:off x="8767547" y="5037177"/>
+            <a:ext cx="1580274" cy="939801"/>
+          </a:xfrm>
+          <a:prstGeom prst="rect">
+            <a:avLst/>
+          </a:prstGeom>
+        </p:spPr>
+      </p:pic>
+      <p:pic>
+        <p:nvPicPr>
+          <p:cNvPr id="5" name="Picture 4">
+            <a:extLst>
+              <a:ext uri="{FF2B5EF4-FFF2-40B4-BE49-F238E27FC236}">
+                <a16:creationId xmlns:a16="http://schemas.microsoft.com/office/drawing/2014/main" id="{2EDBA27B-B3D6-2D04-E029-B9D7635617A7}"/>
+              </a:ext>
+            </a:extLst>
+          </p:cNvPr>
+          <p:cNvPicPr>
+            <a:picLocks noChangeAspect="1"/>
+          </p:cNvPicPr>
+          <p:nvPr/>
+        </p:nvPicPr>
+        <p:blipFill>
+          <a:blip r:embed="rId7"/>
+          <a:stretch>
+            <a:fillRect/>
+          </a:stretch>
+        </p:blipFill>
+        <p:spPr>
+          <a:xfrm>
+            <a:off x="8816007" y="3759799"/>
+            <a:ext cx="1531814" cy="708939"/>
+          </a:xfrm>
+          <a:prstGeom prst="rect">
+            <a:avLst/>
+          </a:prstGeom>
+        </p:spPr>
+      </p:pic>
+      <p:pic>
+        <p:nvPicPr>
+          <p:cNvPr id="14" name="Picture 13">
+            <a:extLst>
+              <a:ext uri="{FF2B5EF4-FFF2-40B4-BE49-F238E27FC236}">
+                <a16:creationId xmlns:a16="http://schemas.microsoft.com/office/drawing/2014/main" id="{D49811D6-30DE-53EC-DF81-C0AC4D13C540}"/>
+              </a:ext>
+            </a:extLst>
+          </p:cNvPr>
+          <p:cNvPicPr>
+            <a:picLocks noChangeAspect="1"/>
+          </p:cNvPicPr>
+          <p:nvPr/>
+        </p:nvPicPr>
+        <p:blipFill>
+          <a:blip r:embed="rId8"/>
+          <a:stretch>
+            <a:fillRect/>
+          </a:stretch>
+        </p:blipFill>
+        <p:spPr>
+          <a:xfrm>
+            <a:off x="7096970" y="5125343"/>
+            <a:ext cx="1514018" cy="851635"/>
+          </a:xfrm>
+          <a:prstGeom prst="rect">
+            <a:avLst/>
+          </a:prstGeom>
+        </p:spPr>
+      </p:pic>
+      <p:pic>
+        <p:nvPicPr>
+          <p:cNvPr id="15" name="Picture 14">
+            <a:extLst>
+              <a:ext uri="{FF2B5EF4-FFF2-40B4-BE49-F238E27FC236}">
+                <a16:creationId xmlns:a16="http://schemas.microsoft.com/office/drawing/2014/main" id="{F67EF65C-5FE5-2B72-10BD-5E19F6412F85}"/>
+              </a:ext>
+            </a:extLst>
+          </p:cNvPr>
+          <p:cNvPicPr>
+            <a:picLocks noChangeAspect="1"/>
+          </p:cNvPicPr>
+          <p:nvPr/>
+        </p:nvPicPr>
+        <p:blipFill>
+          <a:blip r:embed="rId9"/>
+          <a:stretch>
+            <a:fillRect/>
+          </a:stretch>
+        </p:blipFill>
+        <p:spPr>
+          <a:xfrm>
+            <a:off x="10565138" y="5037177"/>
+            <a:ext cx="1577323" cy="1003751"/>
+          </a:xfrm>
+          <a:prstGeom prst="rect">
+            <a:avLst/>
+          </a:prstGeom>
+        </p:spPr>
+      </p:pic>
     </p:spTree>
     <p:extLst>
       <p:ext uri="{BB962C8B-B14F-4D97-AF65-F5344CB8AC3E}">

--- a/2026 WSDS - Wujian Xue.pptx
+++ b/2026 WSDS - Wujian Xue.pptx
@@ -14960,6 +14960,126 @@
           </a:p>
         </p:txBody>
       </p:sp>
+      <p:pic>
+        <p:nvPicPr>
+          <p:cNvPr id="10" name="Picture 9">
+            <a:extLst>
+              <a:ext uri="{FF2B5EF4-FFF2-40B4-BE49-F238E27FC236}">
+                <a16:creationId xmlns:a16="http://schemas.microsoft.com/office/drawing/2014/main" id="{1FECFF5F-7E6B-3A14-B2C2-D35D2321BE5F}"/>
+              </a:ext>
+            </a:extLst>
+          </p:cNvPr>
+          <p:cNvPicPr>
+            <a:picLocks noChangeAspect="1"/>
+          </p:cNvPicPr>
+          <p:nvPr/>
+        </p:nvPicPr>
+        <p:blipFill>
+          <a:blip r:embed="rId5"/>
+          <a:stretch>
+            <a:fillRect/>
+          </a:stretch>
+        </p:blipFill>
+        <p:spPr>
+          <a:xfrm>
+            <a:off x="7797339" y="3203765"/>
+            <a:ext cx="1344300" cy="1551115"/>
+          </a:xfrm>
+          <a:prstGeom prst="rect">
+            <a:avLst/>
+          </a:prstGeom>
+        </p:spPr>
+      </p:pic>
+      <p:pic>
+        <p:nvPicPr>
+          <p:cNvPr id="11" name="Picture 10">
+            <a:extLst>
+              <a:ext uri="{FF2B5EF4-FFF2-40B4-BE49-F238E27FC236}">
+                <a16:creationId xmlns:a16="http://schemas.microsoft.com/office/drawing/2014/main" id="{87F3DE97-2BF3-6370-2910-9EC6BFBDBA75}"/>
+              </a:ext>
+            </a:extLst>
+          </p:cNvPr>
+          <p:cNvPicPr>
+            <a:picLocks noChangeAspect="1"/>
+          </p:cNvPicPr>
+          <p:nvPr/>
+        </p:nvPicPr>
+        <p:blipFill>
+          <a:blip r:embed="rId6"/>
+          <a:stretch>
+            <a:fillRect/>
+          </a:stretch>
+        </p:blipFill>
+        <p:spPr>
+          <a:xfrm>
+            <a:off x="7797339" y="5017860"/>
+            <a:ext cx="1278135" cy="1475015"/>
+          </a:xfrm>
+          <a:prstGeom prst="rect">
+            <a:avLst/>
+          </a:prstGeom>
+        </p:spPr>
+      </p:pic>
+      <p:pic>
+        <p:nvPicPr>
+          <p:cNvPr id="12" name="Picture 11">
+            <a:extLst>
+              <a:ext uri="{FF2B5EF4-FFF2-40B4-BE49-F238E27FC236}">
+                <a16:creationId xmlns:a16="http://schemas.microsoft.com/office/drawing/2014/main" id="{AEFA7DAA-39B8-55AE-62E8-E2134140CD88}"/>
+              </a:ext>
+            </a:extLst>
+          </p:cNvPr>
+          <p:cNvPicPr>
+            <a:picLocks noChangeAspect="1"/>
+          </p:cNvPicPr>
+          <p:nvPr/>
+        </p:nvPicPr>
+        <p:blipFill>
+          <a:blip r:embed="rId7"/>
+          <a:stretch>
+            <a:fillRect/>
+          </a:stretch>
+        </p:blipFill>
+        <p:spPr>
+          <a:xfrm>
+            <a:off x="9746368" y="3105267"/>
+            <a:ext cx="1343926" cy="1551115"/>
+          </a:xfrm>
+          <a:prstGeom prst="rect">
+            <a:avLst/>
+          </a:prstGeom>
+        </p:spPr>
+      </p:pic>
+      <p:pic>
+        <p:nvPicPr>
+          <p:cNvPr id="13" name="Picture 12">
+            <a:extLst>
+              <a:ext uri="{FF2B5EF4-FFF2-40B4-BE49-F238E27FC236}">
+                <a16:creationId xmlns:a16="http://schemas.microsoft.com/office/drawing/2014/main" id="{D61C17C3-0277-13D6-6733-E29B4F8BFC41}"/>
+              </a:ext>
+            </a:extLst>
+          </p:cNvPr>
+          <p:cNvPicPr>
+            <a:picLocks noChangeAspect="1"/>
+          </p:cNvPicPr>
+          <p:nvPr/>
+        </p:nvPicPr>
+        <p:blipFill>
+          <a:blip r:embed="rId8"/>
+          <a:stretch>
+            <a:fillRect/>
+          </a:stretch>
+        </p:blipFill>
+        <p:spPr>
+          <a:xfrm>
+            <a:off x="9746368" y="5376938"/>
+            <a:ext cx="1244595" cy="754459"/>
+          </a:xfrm>
+          <a:prstGeom prst="rect">
+            <a:avLst/>
+          </a:prstGeom>
+        </p:spPr>
+      </p:pic>
     </p:spTree>
     <p:extLst>
       <p:ext uri="{BB962C8B-B14F-4D97-AF65-F5344CB8AC3E}">

--- a/2026 WSDS - Wujian Xue.pptx
+++ b/2026 WSDS - Wujian Xue.pptx
@@ -18,11 +18,12 @@
     <p:sldId id="269" r:id="rId12"/>
     <p:sldId id="266" r:id="rId13"/>
     <p:sldId id="265" r:id="rId14"/>
-    <p:sldId id="267" r:id="rId15"/>
-    <p:sldId id="260" r:id="rId16"/>
-    <p:sldId id="261" r:id="rId17"/>
-    <p:sldId id="263" r:id="rId18"/>
-    <p:sldId id="262" r:id="rId19"/>
+    <p:sldId id="275" r:id="rId15"/>
+    <p:sldId id="267" r:id="rId16"/>
+    <p:sldId id="260" r:id="rId17"/>
+    <p:sldId id="261" r:id="rId18"/>
+    <p:sldId id="263" r:id="rId19"/>
+    <p:sldId id="262" r:id="rId20"/>
   </p:sldIdLst>
   <p:sldSz cx="12192000" cy="6858000"/>
   <p:notesSz cx="6858000" cy="9144000"/>
@@ -11079,7 +11080,13 @@
   <p:cSld>
     <p:spTree>
       <p:nvGrpSpPr>
-        <p:cNvPr id="1" name=""/>
+        <p:cNvPr id="1" name="">
+          <a:extLst>
+            <a:ext uri="{FF2B5EF4-FFF2-40B4-BE49-F238E27FC236}">
+              <a16:creationId xmlns:a16="http://schemas.microsoft.com/office/drawing/2014/main" id="{8DE9E41E-F049-D077-48A8-B5103E71CECF}"/>
+            </a:ext>
+          </a:extLst>
+        </p:cNvPr>
         <p:cNvGrpSpPr/>
         <p:nvPr/>
       </p:nvGrpSpPr>
@@ -11096,7 +11103,7 @@
           <p:cNvPr id="2" name="Title 1">
             <a:extLst>
               <a:ext uri="{FF2B5EF4-FFF2-40B4-BE49-F238E27FC236}">
-                <a16:creationId xmlns:a16="http://schemas.microsoft.com/office/drawing/2014/main" id="{1E601B93-71FC-ED4E-DAD1-2DC88351F539}"/>
+                <a16:creationId xmlns:a16="http://schemas.microsoft.com/office/drawing/2014/main" id="{68816F7C-9245-9A2E-BF93-EE4A29AC6876}"/>
               </a:ext>
             </a:extLst>
           </p:cNvPr>
@@ -11114,7 +11121,7 @@
           <a:p>
             <a:r>
               <a:rPr lang="en-US" altLang="zh-CN" dirty="0"/>
-              <a:t>Merge Tables</a:t>
+              <a:t>SAS vs R</a:t>
             </a:r>
             <a:endParaRPr lang="en-US" dirty="0"/>
           </a:p>
@@ -11125,7 +11132,7 @@
           <p:cNvPr id="3" name="Content Placeholder 2">
             <a:extLst>
               <a:ext uri="{FF2B5EF4-FFF2-40B4-BE49-F238E27FC236}">
-                <a16:creationId xmlns:a16="http://schemas.microsoft.com/office/drawing/2014/main" id="{BD0A8754-420C-E67C-1B6E-990DE726033A}"/>
+                <a16:creationId xmlns:a16="http://schemas.microsoft.com/office/drawing/2014/main" id="{A45B8210-9BEF-F85B-9305-889B95E75A47}"/>
               </a:ext>
             </a:extLst>
           </p:cNvPr>
@@ -11148,10 +11155,270 @@
           </a:p>
         </p:txBody>
       </p:sp>
+      <p:graphicFrame>
+        <p:nvGraphicFramePr>
+          <p:cNvPr id="5" name="Table 4">
+            <a:extLst>
+              <a:ext uri="{FF2B5EF4-FFF2-40B4-BE49-F238E27FC236}">
+                <a16:creationId xmlns:a16="http://schemas.microsoft.com/office/drawing/2014/main" id="{7B63BF11-78B9-1FF3-9DD3-77DC3D00F8D8}"/>
+              </a:ext>
+            </a:extLst>
+          </p:cNvPr>
+          <p:cNvGraphicFramePr>
+            <a:graphicFrameLocks noGrp="1"/>
+          </p:cNvGraphicFramePr>
+          <p:nvPr>
+            <p:extLst>
+              <p:ext uri="{D42A27DB-BD31-4B8C-83A1-F6EECF244321}">
+                <p14:modId xmlns:p14="http://schemas.microsoft.com/office/powerpoint/2010/main" val="1720086417"/>
+              </p:ext>
+            </p:extLst>
+          </p:nvPr>
+        </p:nvGraphicFramePr>
+        <p:xfrm>
+          <a:off x="1091721" y="3429000"/>
+          <a:ext cx="8127999" cy="1854200"/>
+        </p:xfrm>
+        <a:graphic>
+          <a:graphicData uri="http://schemas.openxmlformats.org/drawingml/2006/table">
+            <a:tbl>
+              <a:tblPr firstRow="1" bandRow="1">
+                <a:tableStyleId>{5C22544A-7EE6-4342-B048-85BDC9FD1C3A}</a:tableStyleId>
+              </a:tblPr>
+              <a:tblGrid>
+                <a:gridCol w="2709333">
+                  <a:extLst>
+                    <a:ext uri="{9D8B030D-6E8A-4147-A177-3AD203B41FA5}">
+                      <a16:colId xmlns:a16="http://schemas.microsoft.com/office/drawing/2014/main" val="250362842"/>
+                    </a:ext>
+                  </a:extLst>
+                </a:gridCol>
+                <a:gridCol w="2709333">
+                  <a:extLst>
+                    <a:ext uri="{9D8B030D-6E8A-4147-A177-3AD203B41FA5}">
+                      <a16:colId xmlns:a16="http://schemas.microsoft.com/office/drawing/2014/main" val="3023920072"/>
+                    </a:ext>
+                  </a:extLst>
+                </a:gridCol>
+                <a:gridCol w="2709333">
+                  <a:extLst>
+                    <a:ext uri="{9D8B030D-6E8A-4147-A177-3AD203B41FA5}">
+                      <a16:colId xmlns:a16="http://schemas.microsoft.com/office/drawing/2014/main" val="3919897668"/>
+                    </a:ext>
+                  </a:extLst>
+                </a:gridCol>
+              </a:tblGrid>
+              <a:tr h="370840">
+                <a:tc>
+                  <a:txBody>
+                    <a:bodyPr/>
+                    <a:lstStyle/>
+                    <a:p>
+                      <a:endParaRPr lang="en-US" dirty="0"/>
+                    </a:p>
+                  </a:txBody>
+                  <a:tcPr/>
+                </a:tc>
+                <a:tc>
+                  <a:txBody>
+                    <a:bodyPr/>
+                    <a:lstStyle/>
+                    <a:p>
+                      <a:r>
+                        <a:rPr lang="en-US" dirty="0"/>
+                        <a:t>SAS</a:t>
+                      </a:r>
+                    </a:p>
+                  </a:txBody>
+                  <a:tcPr/>
+                </a:tc>
+                <a:tc>
+                  <a:txBody>
+                    <a:bodyPr/>
+                    <a:lstStyle/>
+                    <a:p>
+                      <a:r>
+                        <a:rPr lang="en-US" dirty="0"/>
+                        <a:t>R</a:t>
+                      </a:r>
+                    </a:p>
+                  </a:txBody>
+                  <a:tcPr/>
+                </a:tc>
+                <a:extLst>
+                  <a:ext uri="{0D108BD9-81ED-4DB2-BD59-A6C34878D82A}">
+                    <a16:rowId xmlns:a16="http://schemas.microsoft.com/office/drawing/2014/main" val="3881391704"/>
+                  </a:ext>
+                </a:extLst>
+              </a:tr>
+              <a:tr h="370840">
+                <a:tc>
+                  <a:txBody>
+                    <a:bodyPr/>
+                    <a:lstStyle/>
+                    <a:p>
+                      <a:r>
+                        <a:rPr lang="en-US" dirty="0"/>
+                        <a:t>Advantage</a:t>
+                      </a:r>
+                    </a:p>
+                  </a:txBody>
+                  <a:tcPr/>
+                </a:tc>
+                <a:tc>
+                  <a:txBody>
+                    <a:bodyPr/>
+                    <a:lstStyle/>
+                    <a:p>
+                      <a:endParaRPr lang="en-US" dirty="0"/>
+                    </a:p>
+                  </a:txBody>
+                  <a:tcPr/>
+                </a:tc>
+                <a:tc>
+                  <a:txBody>
+                    <a:bodyPr/>
+                    <a:lstStyle/>
+                    <a:p>
+                      <a:endParaRPr lang="en-US" dirty="0"/>
+                    </a:p>
+                  </a:txBody>
+                  <a:tcPr/>
+                </a:tc>
+                <a:extLst>
+                  <a:ext uri="{0D108BD9-81ED-4DB2-BD59-A6C34878D82A}">
+                    <a16:rowId xmlns:a16="http://schemas.microsoft.com/office/drawing/2014/main" val="4273194675"/>
+                  </a:ext>
+                </a:extLst>
+              </a:tr>
+              <a:tr h="370840">
+                <a:tc>
+                  <a:txBody>
+                    <a:bodyPr/>
+                    <a:lstStyle/>
+                    <a:p>
+                      <a:endParaRPr lang="en-US" dirty="0"/>
+                    </a:p>
+                  </a:txBody>
+                  <a:tcPr/>
+                </a:tc>
+                <a:tc>
+                  <a:txBody>
+                    <a:bodyPr/>
+                    <a:lstStyle/>
+                    <a:p>
+                      <a:endParaRPr lang="en-US"/>
+                    </a:p>
+                  </a:txBody>
+                  <a:tcPr/>
+                </a:tc>
+                <a:tc>
+                  <a:txBody>
+                    <a:bodyPr/>
+                    <a:lstStyle/>
+                    <a:p>
+                      <a:endParaRPr lang="en-US"/>
+                    </a:p>
+                  </a:txBody>
+                  <a:tcPr/>
+                </a:tc>
+                <a:extLst>
+                  <a:ext uri="{0D108BD9-81ED-4DB2-BD59-A6C34878D82A}">
+                    <a16:rowId xmlns:a16="http://schemas.microsoft.com/office/drawing/2014/main" val="1334143660"/>
+                  </a:ext>
+                </a:extLst>
+              </a:tr>
+              <a:tr h="370840">
+                <a:tc>
+                  <a:txBody>
+                    <a:bodyPr/>
+                    <a:lstStyle/>
+                    <a:p>
+                      <a:r>
+                        <a:rPr lang="en-US" dirty="0"/>
+                        <a:t>Disadvantage</a:t>
+                      </a:r>
+                    </a:p>
+                  </a:txBody>
+                  <a:tcPr/>
+                </a:tc>
+                <a:tc>
+                  <a:txBody>
+                    <a:bodyPr/>
+                    <a:lstStyle/>
+                    <a:p>
+                      <a:r>
+                        <a:rPr lang="en-US" dirty="0"/>
+                        <a:t>expensive</a:t>
+                      </a:r>
+                    </a:p>
+                  </a:txBody>
+                  <a:tcPr/>
+                </a:tc>
+                <a:tc>
+                  <a:txBody>
+                    <a:bodyPr/>
+                    <a:lstStyle/>
+                    <a:p>
+                      <a:r>
+                        <a:rPr lang="en-US"/>
+                        <a:t>Free</a:t>
+                      </a:r>
+                    </a:p>
+                  </a:txBody>
+                  <a:tcPr/>
+                </a:tc>
+                <a:extLst>
+                  <a:ext uri="{0D108BD9-81ED-4DB2-BD59-A6C34878D82A}">
+                    <a16:rowId xmlns:a16="http://schemas.microsoft.com/office/drawing/2014/main" val="3008192464"/>
+                  </a:ext>
+                </a:extLst>
+              </a:tr>
+              <a:tr h="370840">
+                <a:tc>
+                  <a:txBody>
+                    <a:bodyPr/>
+                    <a:lstStyle/>
+                    <a:p>
+                      <a:endParaRPr lang="en-US"/>
+                    </a:p>
+                  </a:txBody>
+                  <a:tcPr/>
+                </a:tc>
+                <a:tc>
+                  <a:txBody>
+                    <a:bodyPr/>
+                    <a:lstStyle/>
+                    <a:p>
+                      <a:endParaRPr lang="en-US"/>
+                    </a:p>
+                  </a:txBody>
+                  <a:tcPr/>
+                </a:tc>
+                <a:tc>
+                  <a:txBody>
+                    <a:bodyPr/>
+                    <a:lstStyle/>
+                    <a:p>
+                      <a:endParaRPr lang="en-US" dirty="0"/>
+                    </a:p>
+                  </a:txBody>
+                  <a:tcPr/>
+                </a:tc>
+                <a:extLst>
+                  <a:ext uri="{0D108BD9-81ED-4DB2-BD59-A6C34878D82A}">
+                    <a16:rowId xmlns:a16="http://schemas.microsoft.com/office/drawing/2014/main" val="845283644"/>
+                  </a:ext>
+                </a:extLst>
+              </a:tr>
+            </a:tbl>
+          </a:graphicData>
+        </a:graphic>
+      </p:graphicFrame>
     </p:spTree>
     <p:extLst>
       <p:ext uri="{BB962C8B-B14F-4D97-AF65-F5344CB8AC3E}">
-        <p14:creationId xmlns:p14="http://schemas.microsoft.com/office/powerpoint/2010/main" val="2510015937"/>
+        <p14:creationId xmlns:p14="http://schemas.microsoft.com/office/powerpoint/2010/main" val="2675887434"/>
       </p:ext>
     </p:extLst>
   </p:cSld>
@@ -11183,7 +11450,7 @@
           <p:cNvPr id="2" name="Title 1">
             <a:extLst>
               <a:ext uri="{FF2B5EF4-FFF2-40B4-BE49-F238E27FC236}">
-                <a16:creationId xmlns:a16="http://schemas.microsoft.com/office/drawing/2014/main" id="{B43C6558-4EC7-F455-AEE9-D12FD0A89C62}"/>
+                <a16:creationId xmlns:a16="http://schemas.microsoft.com/office/drawing/2014/main" id="{1E601B93-71FC-ED4E-DAD1-2DC88351F539}"/>
               </a:ext>
             </a:extLst>
           </p:cNvPr>
@@ -11199,7 +11466,11 @@
           <a:bodyPr/>
           <a:lstStyle/>
           <a:p>
-            <a:endParaRPr lang="en-US"/>
+            <a:r>
+              <a:rPr lang="en-US" altLang="zh-CN" dirty="0"/>
+              <a:t>Merge Tables</a:t>
+            </a:r>
+            <a:endParaRPr lang="en-US" dirty="0"/>
           </a:p>
         </p:txBody>
       </p:sp>
@@ -11208,7 +11479,7 @@
           <p:cNvPr id="3" name="Content Placeholder 2">
             <a:extLst>
               <a:ext uri="{FF2B5EF4-FFF2-40B4-BE49-F238E27FC236}">
-                <a16:creationId xmlns:a16="http://schemas.microsoft.com/office/drawing/2014/main" id="{5655E68B-3CB9-4EB7-342D-A9E2A3772252}"/>
+                <a16:creationId xmlns:a16="http://schemas.microsoft.com/office/drawing/2014/main" id="{BD0A8754-420C-E67C-1B6E-990DE726033A}"/>
               </a:ext>
             </a:extLst>
           </p:cNvPr>
@@ -11226,51 +11497,15 @@
           <a:p>
             <a:r>
               <a:rPr lang="en-US" dirty="0"/>
-              <a:t>What additional value does my approach provide?</a:t>
+              <a:t>concatenation</a:t>
             </a:r>
           </a:p>
         </p:txBody>
       </p:sp>
-      <p:pic>
-        <p:nvPicPr>
-          <p:cNvPr id="13" name="Picture 12">
-            <a:extLst>
-              <a:ext uri="{FF2B5EF4-FFF2-40B4-BE49-F238E27FC236}">
-                <a16:creationId xmlns:a16="http://schemas.microsoft.com/office/drawing/2014/main" id="{2DF3816E-67F8-3536-C248-C26EC415F2AF}"/>
-              </a:ext>
-            </a:extLst>
-          </p:cNvPr>
-          <p:cNvPicPr>
-            <a:picLocks noChangeAspect="1"/>
-          </p:cNvPicPr>
-          <p:nvPr/>
-        </p:nvPicPr>
-        <p:blipFill>
-          <a:blip r:embed="rId2">
-            <a:extLst>
-              <a:ext uri="{28A0092B-C50C-407E-A947-70E740481C1C}">
-                <a14:useLocalDpi xmlns:a14="http://schemas.microsoft.com/office/drawing/2010/main" val="0"/>
-              </a:ext>
-            </a:extLst>
-          </a:blip>
-          <a:stretch>
-            <a:fillRect/>
-          </a:stretch>
-        </p:blipFill>
-        <p:spPr>
-          <a:xfrm>
-            <a:off x="4502832" y="5242539"/>
-            <a:ext cx="4156942" cy="1464377"/>
-          </a:xfrm>
-          <a:prstGeom prst="rect">
-            <a:avLst/>
-          </a:prstGeom>
-        </p:spPr>
-      </p:pic>
     </p:spTree>
     <p:extLst>
       <p:ext uri="{BB962C8B-B14F-4D97-AF65-F5344CB8AC3E}">
-        <p14:creationId xmlns:p14="http://schemas.microsoft.com/office/powerpoint/2010/main" val="331261954"/>
+        <p14:creationId xmlns:p14="http://schemas.microsoft.com/office/powerpoint/2010/main" val="2510015937"/>
       </p:ext>
     </p:extLst>
   </p:cSld>
@@ -11302,7 +11537,7 @@
           <p:cNvPr id="2" name="Title 1">
             <a:extLst>
               <a:ext uri="{FF2B5EF4-FFF2-40B4-BE49-F238E27FC236}">
-                <a16:creationId xmlns:a16="http://schemas.microsoft.com/office/drawing/2014/main" id="{9E681912-C0D5-AF85-91B0-7D9532929F7F}"/>
+                <a16:creationId xmlns:a16="http://schemas.microsoft.com/office/drawing/2014/main" id="{B43C6558-4EC7-F455-AEE9-D12FD0A89C62}"/>
               </a:ext>
             </a:extLst>
           </p:cNvPr>
@@ -11318,7 +11553,7 @@
           <a:bodyPr/>
           <a:lstStyle/>
           <a:p>
-            <a:endParaRPr lang="en-US" dirty="0"/>
+            <a:endParaRPr lang="en-US"/>
           </a:p>
         </p:txBody>
       </p:sp>
@@ -11327,7 +11562,7 @@
           <p:cNvPr id="3" name="Content Placeholder 2">
             <a:extLst>
               <a:ext uri="{FF2B5EF4-FFF2-40B4-BE49-F238E27FC236}">
-                <a16:creationId xmlns:a16="http://schemas.microsoft.com/office/drawing/2014/main" id="{E48A637E-A23A-F19C-2EC6-9A9B52F8A2BA}"/>
+                <a16:creationId xmlns:a16="http://schemas.microsoft.com/office/drawing/2014/main" id="{5655E68B-3CB9-4EB7-342D-A9E2A3772252}"/>
               </a:ext>
             </a:extLst>
           </p:cNvPr>
@@ -11345,23 +11580,17 @@
           <a:p>
             <a:r>
               <a:rPr lang="en-US" dirty="0"/>
-              <a:t>Where do we go from there?</a:t>
-            </a:r>
-          </a:p>
-          <a:p>
-            <a:r>
-              <a:rPr lang="en-US" dirty="0"/>
-              <a:t>Tech in 2020 seems pretty old at 2026. So how will we see in 2030?</a:t>
+              <a:t>What additional value does my approach provide?</a:t>
             </a:r>
           </a:p>
         </p:txBody>
       </p:sp>
       <p:pic>
         <p:nvPicPr>
-          <p:cNvPr id="5" name="Picture 4">
-            <a:extLst>
-              <a:ext uri="{FF2B5EF4-FFF2-40B4-BE49-F238E27FC236}">
-                <a16:creationId xmlns:a16="http://schemas.microsoft.com/office/drawing/2014/main" id="{3C881C29-D8CF-F939-8E3B-1003A5511D4B}"/>
+          <p:cNvPr id="13" name="Picture 12">
+            <a:extLst>
+              <a:ext uri="{FF2B5EF4-FFF2-40B4-BE49-F238E27FC236}">
+                <a16:creationId xmlns:a16="http://schemas.microsoft.com/office/drawing/2014/main" id="{2DF3816E-67F8-3536-C248-C26EC415F2AF}"/>
               </a:ext>
             </a:extLst>
           </p:cNvPr>
@@ -11371,15 +11600,21 @@
           <p:nvPr/>
         </p:nvPicPr>
         <p:blipFill>
-          <a:blip r:embed="rId2"/>
+          <a:blip r:embed="rId2">
+            <a:extLst>
+              <a:ext uri="{28A0092B-C50C-407E-A947-70E740481C1C}">
+                <a14:useLocalDpi xmlns:a14="http://schemas.microsoft.com/office/drawing/2010/main" val="0"/>
+              </a:ext>
+            </a:extLst>
+          </a:blip>
           <a:stretch>
             <a:fillRect/>
           </a:stretch>
         </p:blipFill>
         <p:spPr>
           <a:xfrm>
-            <a:off x="5193102" y="2949940"/>
-            <a:ext cx="6998898" cy="3713476"/>
+            <a:off x="1364397" y="3122763"/>
+            <a:ext cx="8313294" cy="2928546"/>
           </a:xfrm>
           <a:prstGeom prst="rect">
             <a:avLst/>
@@ -11389,7 +11624,7 @@
     </p:spTree>
     <p:extLst>
       <p:ext uri="{BB962C8B-B14F-4D97-AF65-F5344CB8AC3E}">
-        <p14:creationId xmlns:p14="http://schemas.microsoft.com/office/powerpoint/2010/main" val="1238321945"/>
+        <p14:creationId xmlns:p14="http://schemas.microsoft.com/office/powerpoint/2010/main" val="331261954"/>
       </p:ext>
     </p:extLst>
   </p:cSld>
@@ -11421,6 +11656,125 @@
           <p:cNvPr id="2" name="Title 1">
             <a:extLst>
               <a:ext uri="{FF2B5EF4-FFF2-40B4-BE49-F238E27FC236}">
+                <a16:creationId xmlns:a16="http://schemas.microsoft.com/office/drawing/2014/main" id="{9E681912-C0D5-AF85-91B0-7D9532929F7F}"/>
+              </a:ext>
+            </a:extLst>
+          </p:cNvPr>
+          <p:cNvSpPr>
+            <a:spLocks noGrp="1"/>
+          </p:cNvSpPr>
+          <p:nvPr>
+            <p:ph type="title"/>
+          </p:nvPr>
+        </p:nvSpPr>
+        <p:spPr/>
+        <p:txBody>
+          <a:bodyPr/>
+          <a:lstStyle/>
+          <a:p>
+            <a:endParaRPr lang="en-US" dirty="0"/>
+          </a:p>
+        </p:txBody>
+      </p:sp>
+      <p:sp>
+        <p:nvSpPr>
+          <p:cNvPr id="3" name="Content Placeholder 2">
+            <a:extLst>
+              <a:ext uri="{FF2B5EF4-FFF2-40B4-BE49-F238E27FC236}">
+                <a16:creationId xmlns:a16="http://schemas.microsoft.com/office/drawing/2014/main" id="{E48A637E-A23A-F19C-2EC6-9A9B52F8A2BA}"/>
+              </a:ext>
+            </a:extLst>
+          </p:cNvPr>
+          <p:cNvSpPr>
+            <a:spLocks noGrp="1"/>
+          </p:cNvSpPr>
+          <p:nvPr>
+            <p:ph idx="1"/>
+          </p:nvPr>
+        </p:nvSpPr>
+        <p:spPr/>
+        <p:txBody>
+          <a:bodyPr/>
+          <a:lstStyle/>
+          <a:p>
+            <a:r>
+              <a:rPr lang="en-US" dirty="0"/>
+              <a:t>Where do we go from there?</a:t>
+            </a:r>
+          </a:p>
+          <a:p>
+            <a:r>
+              <a:rPr lang="en-US" dirty="0"/>
+              <a:t>Tech in 2020 seems pretty old at 2026. So how will we see in 2030?</a:t>
+            </a:r>
+          </a:p>
+        </p:txBody>
+      </p:sp>
+      <p:pic>
+        <p:nvPicPr>
+          <p:cNvPr id="5" name="Picture 4">
+            <a:extLst>
+              <a:ext uri="{FF2B5EF4-FFF2-40B4-BE49-F238E27FC236}">
+                <a16:creationId xmlns:a16="http://schemas.microsoft.com/office/drawing/2014/main" id="{3C881C29-D8CF-F939-8E3B-1003A5511D4B}"/>
+              </a:ext>
+            </a:extLst>
+          </p:cNvPr>
+          <p:cNvPicPr>
+            <a:picLocks noChangeAspect="1"/>
+          </p:cNvPicPr>
+          <p:nvPr/>
+        </p:nvPicPr>
+        <p:blipFill>
+          <a:blip r:embed="rId2"/>
+          <a:stretch>
+            <a:fillRect/>
+          </a:stretch>
+        </p:blipFill>
+        <p:spPr>
+          <a:xfrm>
+            <a:off x="3062378" y="2941313"/>
+            <a:ext cx="6998898" cy="3713476"/>
+          </a:xfrm>
+          <a:prstGeom prst="rect">
+            <a:avLst/>
+          </a:prstGeom>
+        </p:spPr>
+      </p:pic>
+    </p:spTree>
+    <p:extLst>
+      <p:ext uri="{BB962C8B-B14F-4D97-AF65-F5344CB8AC3E}">
+        <p14:creationId xmlns:p14="http://schemas.microsoft.com/office/powerpoint/2010/main" val="1238321945"/>
+      </p:ext>
+    </p:extLst>
+  </p:cSld>
+  <p:clrMapOvr>
+    <a:masterClrMapping/>
+  </p:clrMapOvr>
+</p:sld>
+</file>
+
+<file path=ppt/slides/slide18.xml><?xml version="1.0" encoding="utf-8"?>
+<p:sld xmlns:a="http://schemas.openxmlformats.org/drawingml/2006/main" xmlns:r="http://schemas.openxmlformats.org/officeDocument/2006/relationships" xmlns:p="http://schemas.openxmlformats.org/presentationml/2006/main">
+  <p:cSld>
+    <p:spTree>
+      <p:nvGrpSpPr>
+        <p:cNvPr id="1" name=""/>
+        <p:cNvGrpSpPr/>
+        <p:nvPr/>
+      </p:nvGrpSpPr>
+      <p:grpSpPr>
+        <a:xfrm>
+          <a:off x="0" y="0"/>
+          <a:ext cx="0" cy="0"/>
+          <a:chOff x="0" y="0"/>
+          <a:chExt cx="0" cy="0"/>
+        </a:xfrm>
+      </p:grpSpPr>
+      <p:sp>
+        <p:nvSpPr>
+          <p:cNvPr id="2" name="Title 1">
+            <a:extLst>
+              <a:ext uri="{FF2B5EF4-FFF2-40B4-BE49-F238E27FC236}">
                 <a16:creationId xmlns:a16="http://schemas.microsoft.com/office/drawing/2014/main" id="{79765071-DC72-93E5-9B2F-5F473699886E}"/>
               </a:ext>
             </a:extLst>
@@ -11613,7 +11967,7 @@
 </p:sld>
 </file>
 
-<file path=ppt/slides/slide18.xml><?xml version="1.0" encoding="utf-8"?>
+<file path=ppt/slides/slide19.xml><?xml version="1.0" encoding="utf-8"?>
 <p:sld xmlns:a="http://schemas.openxmlformats.org/drawingml/2006/main" xmlns:r="http://schemas.openxmlformats.org/officeDocument/2006/relationships" xmlns:p="http://schemas.openxmlformats.org/presentationml/2006/main">
   <p:cSld>
     <p:spTree>
@@ -12119,8 +12473,8 @@
         </p:nvSpPr>
         <p:spPr>
           <a:xfrm>
-            <a:off x="323439" y="2588543"/>
-            <a:ext cx="6797027" cy="3670941"/>
+            <a:off x="323439" y="2588544"/>
+            <a:ext cx="7138410" cy="3251540"/>
           </a:xfrm>
           <a:prstGeom prst="rect">
             <a:avLst/>
@@ -12341,7 +12695,7 @@
             <a:pPr lvl="1"/>
             <a:r>
               <a:rPr lang="en-US" sz="1600" dirty="0"/>
-              <a:t>Hold $43. trillion assets, 25%  homes in the U.S. are financed by Fannie Mae</a:t>
+              <a:t>Hold $4.3 trillion assets,  financed 25%  homes in the U.S. </a:t>
             </a:r>
           </a:p>
           <a:p>
@@ -12508,7 +12862,7 @@
         </p:blipFill>
         <p:spPr>
           <a:xfrm>
-            <a:off x="129347" y="3018213"/>
+            <a:off x="1354114" y="3063876"/>
             <a:ext cx="4140679" cy="3428999"/>
           </a:xfrm>
           <a:prstGeom prst="rect">
@@ -12530,7 +12884,7 @@
         </p:nvSpPr>
         <p:spPr>
           <a:xfrm>
-            <a:off x="938618" y="2541058"/>
+            <a:off x="2334256" y="2426848"/>
             <a:ext cx="2950755" cy="369332"/>
           </a:xfrm>
           <a:prstGeom prst="rect">
@@ -12849,16 +13203,18 @@
         <p:spPr>
           <a:xfrm>
             <a:off x="777815" y="1498251"/>
-            <a:ext cx="5691996" cy="585066"/>
+            <a:ext cx="10263996" cy="756038"/>
           </a:xfrm>
         </p:spPr>
         <p:txBody>
-          <a:bodyPr/>
+          <a:bodyPr>
+            <a:normAutofit fontScale="92500" lnSpcReduction="10000"/>
+          </a:bodyPr>
           <a:lstStyle/>
           <a:p>
             <a:r>
               <a:rPr lang="en-US" dirty="0"/>
-              <a:t>What is the problem and why</a:t>
+              <a:t>Financial regulators, banks, Asset management companies, payment companies and exchanges also have cloud migration. </a:t>
             </a:r>
           </a:p>
           <a:p>
@@ -13013,7 +13369,7 @@
         </p:blipFill>
         <p:spPr>
           <a:xfrm>
-            <a:off x="786415" y="5508119"/>
+            <a:off x="8058482" y="3937989"/>
             <a:ext cx="2174759" cy="1205012"/>
           </a:xfrm>
           <a:prstGeom prst="rect">
@@ -13133,7 +13489,7 @@
         </p:blipFill>
         <p:spPr>
           <a:xfrm>
-            <a:off x="3314766" y="5619747"/>
+            <a:off x="910382" y="5619747"/>
             <a:ext cx="1455214" cy="873128"/>
           </a:xfrm>
           <a:prstGeom prst="rect">
@@ -13630,6 +13986,188 @@
           </a:p>
         </p:txBody>
       </p:sp>
+      <p:pic>
+        <p:nvPicPr>
+          <p:cNvPr id="5" name="Picture 4">
+            <a:extLst>
+              <a:ext uri="{FF2B5EF4-FFF2-40B4-BE49-F238E27FC236}">
+                <a16:creationId xmlns:a16="http://schemas.microsoft.com/office/drawing/2014/main" id="{C1E6D23D-7673-2041-07A0-521239F2CE6F}"/>
+              </a:ext>
+            </a:extLst>
+          </p:cNvPr>
+          <p:cNvPicPr>
+            <a:picLocks noChangeAspect="1"/>
+          </p:cNvPicPr>
+          <p:nvPr/>
+        </p:nvPicPr>
+        <p:blipFill>
+          <a:blip r:embed="rId2"/>
+          <a:stretch>
+            <a:fillRect/>
+          </a:stretch>
+        </p:blipFill>
+        <p:spPr>
+          <a:xfrm>
+            <a:off x="1052304" y="4538754"/>
+            <a:ext cx="1877291" cy="769689"/>
+          </a:xfrm>
+          <a:prstGeom prst="rect">
+            <a:avLst/>
+          </a:prstGeom>
+        </p:spPr>
+      </p:pic>
+      <p:pic>
+        <p:nvPicPr>
+          <p:cNvPr id="6" name="Picture 5">
+            <a:extLst>
+              <a:ext uri="{FF2B5EF4-FFF2-40B4-BE49-F238E27FC236}">
+                <a16:creationId xmlns:a16="http://schemas.microsoft.com/office/drawing/2014/main" id="{416EACAE-1004-E9DC-CA1A-FB10E4475072}"/>
+              </a:ext>
+            </a:extLst>
+          </p:cNvPr>
+          <p:cNvPicPr>
+            <a:picLocks noChangeAspect="1"/>
+          </p:cNvPicPr>
+          <p:nvPr/>
+        </p:nvPicPr>
+        <p:blipFill>
+          <a:blip r:embed="rId3"/>
+          <a:stretch>
+            <a:fillRect/>
+          </a:stretch>
+        </p:blipFill>
+        <p:spPr>
+          <a:xfrm>
+            <a:off x="4941649" y="3429000"/>
+            <a:ext cx="2143471" cy="803156"/>
+          </a:xfrm>
+          <a:prstGeom prst="rect">
+            <a:avLst/>
+          </a:prstGeom>
+        </p:spPr>
+      </p:pic>
+      <p:pic>
+        <p:nvPicPr>
+          <p:cNvPr id="7" name="Picture 6">
+            <a:extLst>
+              <a:ext uri="{FF2B5EF4-FFF2-40B4-BE49-F238E27FC236}">
+                <a16:creationId xmlns:a16="http://schemas.microsoft.com/office/drawing/2014/main" id="{FA821571-6C47-35FD-E238-C0832FA8AF30}"/>
+              </a:ext>
+            </a:extLst>
+          </p:cNvPr>
+          <p:cNvPicPr>
+            <a:picLocks noChangeAspect="1"/>
+          </p:cNvPicPr>
+          <p:nvPr/>
+        </p:nvPicPr>
+        <p:blipFill>
+          <a:blip r:embed="rId4"/>
+          <a:stretch>
+            <a:fillRect/>
+          </a:stretch>
+        </p:blipFill>
+        <p:spPr>
+          <a:xfrm>
+            <a:off x="4941649" y="5699186"/>
+            <a:ext cx="2862262" cy="966787"/>
+          </a:xfrm>
+          <a:prstGeom prst="rect">
+            <a:avLst/>
+          </a:prstGeom>
+        </p:spPr>
+      </p:pic>
+      <p:cxnSp>
+        <p:nvCxnSpPr>
+          <p:cNvPr id="9" name="Straight Arrow Connector 8">
+            <a:extLst>
+              <a:ext uri="{FF2B5EF4-FFF2-40B4-BE49-F238E27FC236}">
+                <a16:creationId xmlns:a16="http://schemas.microsoft.com/office/drawing/2014/main" id="{6FCA9D42-51EA-5474-F2EF-B8477B8995EC}"/>
+              </a:ext>
+            </a:extLst>
+          </p:cNvPr>
+          <p:cNvCxnSpPr>
+            <a:cxnSpLocks/>
+            <a:stCxn id="5" idx="3"/>
+            <a:endCxn id="6" idx="1"/>
+          </p:cNvCxnSpPr>
+          <p:nvPr/>
+        </p:nvCxnSpPr>
+        <p:spPr>
+          <a:xfrm flipV="1">
+            <a:off x="2929595" y="3830578"/>
+            <a:ext cx="2012054" cy="1093021"/>
+          </a:xfrm>
+          <a:prstGeom prst="straightConnector1">
+            <a:avLst/>
+          </a:prstGeom>
+          <a:ln>
+            <a:solidFill>
+              <a:srgbClr val="FF0000"/>
+            </a:solidFill>
+            <a:tailEnd type="triangle"/>
+          </a:ln>
+        </p:spPr>
+        <p:style>
+          <a:lnRef idx="1">
+            <a:schemeClr val="accent1"/>
+          </a:lnRef>
+          <a:fillRef idx="0">
+            <a:schemeClr val="accent1"/>
+          </a:fillRef>
+          <a:effectRef idx="0">
+            <a:schemeClr val="accent1"/>
+          </a:effectRef>
+          <a:fontRef idx="minor">
+            <a:schemeClr val="tx1"/>
+          </a:fontRef>
+        </p:style>
+      </p:cxnSp>
+      <p:cxnSp>
+        <p:nvCxnSpPr>
+          <p:cNvPr id="11" name="Straight Arrow Connector 10">
+            <a:extLst>
+              <a:ext uri="{FF2B5EF4-FFF2-40B4-BE49-F238E27FC236}">
+                <a16:creationId xmlns:a16="http://schemas.microsoft.com/office/drawing/2014/main" id="{CE98FCAB-E404-5D5F-C627-AA2F47C5D15B}"/>
+              </a:ext>
+            </a:extLst>
+          </p:cNvPr>
+          <p:cNvCxnSpPr>
+            <a:cxnSpLocks/>
+            <a:stCxn id="5" idx="3"/>
+            <a:endCxn id="7" idx="1"/>
+          </p:cNvCxnSpPr>
+          <p:nvPr/>
+        </p:nvCxnSpPr>
+        <p:spPr>
+          <a:xfrm>
+            <a:off x="2929595" y="4923599"/>
+            <a:ext cx="2012054" cy="1258981"/>
+          </a:xfrm>
+          <a:prstGeom prst="straightConnector1">
+            <a:avLst/>
+          </a:prstGeom>
+          <a:ln>
+            <a:solidFill>
+              <a:srgbClr val="FF0000"/>
+            </a:solidFill>
+            <a:tailEnd type="triangle"/>
+          </a:ln>
+        </p:spPr>
+        <p:style>
+          <a:lnRef idx="1">
+            <a:schemeClr val="accent1"/>
+          </a:lnRef>
+          <a:fillRef idx="0">
+            <a:schemeClr val="accent1"/>
+          </a:fillRef>
+          <a:effectRef idx="0">
+            <a:schemeClr val="accent1"/>
+          </a:effectRef>
+          <a:fontRef idx="minor">
+            <a:schemeClr val="tx1"/>
+          </a:fontRef>
+        </p:style>
+      </p:cxnSp>
     </p:spTree>
     <p:extLst>
       <p:ext uri="{BB962C8B-B14F-4D97-AF65-F5344CB8AC3E}">
@@ -14667,8 +15205,8 @@
         </p:nvSpPr>
         <p:spPr>
           <a:xfrm>
-            <a:off x="4574363" y="2735206"/>
-            <a:ext cx="2233762" cy="3413145"/>
+            <a:off x="4394662" y="2735207"/>
+            <a:ext cx="2233762" cy="2019674"/>
           </a:xfrm>
           <a:prstGeom prst="rect">
             <a:avLst/>
@@ -14844,35 +15382,32 @@
           </a:lstStyle>
           <a:p>
             <a:r>
-              <a:rPr lang="en-US" altLang="zh-CN" dirty="0" err="1"/>
+              <a:rPr lang="en-US" altLang="zh-CN" sz="1400" dirty="0" err="1"/>
               <a:t>tidyverse</a:t>
             </a:r>
             <a:r>
-              <a:rPr lang="en-US" altLang="zh-CN" dirty="0"/>
+              <a:rPr lang="en-US" altLang="zh-CN" sz="1400" dirty="0"/>
               <a:t>, </a:t>
             </a:r>
           </a:p>
           <a:p>
             <a:r>
-              <a:rPr lang="en-US" altLang="zh-CN" dirty="0"/>
+              <a:rPr lang="en-US" altLang="zh-CN" sz="1400" dirty="0"/>
               <a:t>arsenal,</a:t>
             </a:r>
           </a:p>
           <a:p>
             <a:r>
-              <a:rPr lang="en-US" altLang="zh-CN" dirty="0"/>
+              <a:rPr lang="en-US" altLang="zh-CN" sz="1400" dirty="0"/>
               <a:t>Haven</a:t>
             </a:r>
           </a:p>
           <a:p>
             <a:r>
-              <a:rPr lang="en-US" altLang="zh-CN" dirty="0" err="1"/>
+              <a:rPr lang="en-US" altLang="zh-CN" sz="1400" dirty="0" err="1"/>
               <a:t>aod</a:t>
             </a:r>
-            <a:endParaRPr lang="en-US" altLang="zh-CN" dirty="0"/>
-          </a:p>
-          <a:p>
-            <a:endParaRPr lang="en-US" altLang="zh-CN" dirty="0"/>
+            <a:endParaRPr lang="en-US" altLang="zh-CN" sz="1400" dirty="0"/>
           </a:p>
         </p:txBody>
       </p:sp>
@@ -14982,8 +15517,8 @@
         </p:blipFill>
         <p:spPr>
           <a:xfrm>
-            <a:off x="7797339" y="3203765"/>
-            <a:ext cx="1344300" cy="1551115"/>
+            <a:off x="3542608" y="4484475"/>
+            <a:ext cx="992039" cy="1144660"/>
           </a:xfrm>
           <a:prstGeom prst="rect">
             <a:avLst/>
@@ -15012,8 +15547,8 @@
         </p:blipFill>
         <p:spPr>
           <a:xfrm>
-            <a:off x="7797339" y="5017860"/>
-            <a:ext cx="1278135" cy="1475015"/>
+            <a:off x="5496401" y="4484287"/>
+            <a:ext cx="992038" cy="1144848"/>
           </a:xfrm>
           <a:prstGeom prst="rect">
             <a:avLst/>
@@ -15042,8 +15577,8 @@
         </p:blipFill>
         <p:spPr>
           <a:xfrm>
-            <a:off x="9746368" y="3105267"/>
-            <a:ext cx="1343926" cy="1551115"/>
+            <a:off x="4519504" y="4484156"/>
+            <a:ext cx="992039" cy="1144979"/>
           </a:xfrm>
           <a:prstGeom prst="rect">
             <a:avLst/>
@@ -15072,7 +15607,7 @@
         </p:blipFill>
         <p:spPr>
           <a:xfrm>
-            <a:off x="9746368" y="5376938"/>
+            <a:off x="4394662" y="5799400"/>
             <a:ext cx="1244595" cy="754459"/>
           </a:xfrm>
           <a:prstGeom prst="rect">

--- a/2026 WSDS - Wujian Xue.pptx
+++ b/2026 WSDS - Wujian Xue.pptx
@@ -6850,7 +6850,7 @@
           <a:p>
             <a:fld id="{9DFF5FDE-556D-4288-960F-3880543CC0D0}" type="datetimeFigureOut">
               <a:rPr lang="en-US" smtClean="0"/>
-              <a:t>10/16/2026</a:t>
+              <a:t>10/21/2026</a:t>
             </a:fld>
             <a:endParaRPr lang="en-US"/>
           </a:p>
@@ -7048,7 +7048,7 @@
           <a:p>
             <a:fld id="{9DFF5FDE-556D-4288-960F-3880543CC0D0}" type="datetimeFigureOut">
               <a:rPr lang="en-US" smtClean="0"/>
-              <a:t>10/16/2026</a:t>
+              <a:t>10/21/2026</a:t>
             </a:fld>
             <a:endParaRPr lang="en-US"/>
           </a:p>
@@ -7256,7 +7256,7 @@
           <a:p>
             <a:fld id="{9DFF5FDE-556D-4288-960F-3880543CC0D0}" type="datetimeFigureOut">
               <a:rPr lang="en-US" smtClean="0"/>
-              <a:t>10/16/2026</a:t>
+              <a:t>10/21/2026</a:t>
             </a:fld>
             <a:endParaRPr lang="en-US"/>
           </a:p>
@@ -7454,7 +7454,7 @@
           <a:p>
             <a:fld id="{9DFF5FDE-556D-4288-960F-3880543CC0D0}" type="datetimeFigureOut">
               <a:rPr lang="en-US" smtClean="0"/>
-              <a:t>10/16/2026</a:t>
+              <a:t>10/21/2026</a:t>
             </a:fld>
             <a:endParaRPr lang="en-US"/>
           </a:p>
@@ -7729,7 +7729,7 @@
           <a:p>
             <a:fld id="{9DFF5FDE-556D-4288-960F-3880543CC0D0}" type="datetimeFigureOut">
               <a:rPr lang="en-US" smtClean="0"/>
-              <a:t>10/16/2026</a:t>
+              <a:t>10/21/2026</a:t>
             </a:fld>
             <a:endParaRPr lang="en-US"/>
           </a:p>
@@ -7994,7 +7994,7 @@
           <a:p>
             <a:fld id="{9DFF5FDE-556D-4288-960F-3880543CC0D0}" type="datetimeFigureOut">
               <a:rPr lang="en-US" smtClean="0"/>
-              <a:t>10/16/2026</a:t>
+              <a:t>10/21/2026</a:t>
             </a:fld>
             <a:endParaRPr lang="en-US"/>
           </a:p>
@@ -8406,7 +8406,7 @@
           <a:p>
             <a:fld id="{9DFF5FDE-556D-4288-960F-3880543CC0D0}" type="datetimeFigureOut">
               <a:rPr lang="en-US" smtClean="0"/>
-              <a:t>10/16/2026</a:t>
+              <a:t>10/21/2026</a:t>
             </a:fld>
             <a:endParaRPr lang="en-US"/>
           </a:p>
@@ -8547,7 +8547,7 @@
           <a:p>
             <a:fld id="{9DFF5FDE-556D-4288-960F-3880543CC0D0}" type="datetimeFigureOut">
               <a:rPr lang="en-US" smtClean="0"/>
-              <a:t>10/16/2026</a:t>
+              <a:t>10/21/2026</a:t>
             </a:fld>
             <a:endParaRPr lang="en-US"/>
           </a:p>
@@ -8660,7 +8660,7 @@
           <a:p>
             <a:fld id="{9DFF5FDE-556D-4288-960F-3880543CC0D0}" type="datetimeFigureOut">
               <a:rPr lang="en-US" smtClean="0"/>
-              <a:t>10/16/2026</a:t>
+              <a:t>10/21/2026</a:t>
             </a:fld>
             <a:endParaRPr lang="en-US"/>
           </a:p>
@@ -8971,7 +8971,7 @@
           <a:p>
             <a:fld id="{9DFF5FDE-556D-4288-960F-3880543CC0D0}" type="datetimeFigureOut">
               <a:rPr lang="en-US" smtClean="0"/>
-              <a:t>10/16/2026</a:t>
+              <a:t>10/21/2026</a:t>
             </a:fld>
             <a:endParaRPr lang="en-US"/>
           </a:p>
@@ -9259,7 +9259,7 @@
           <a:p>
             <a:fld id="{9DFF5FDE-556D-4288-960F-3880543CC0D0}" type="datetimeFigureOut">
               <a:rPr lang="en-US" smtClean="0"/>
-              <a:t>10/16/2026</a:t>
+              <a:t>10/21/2026</a:t>
             </a:fld>
             <a:endParaRPr lang="en-US"/>
           </a:p>
@@ -9500,7 +9500,7 @@
           <a:p>
             <a:fld id="{9DFF5FDE-556D-4288-960F-3880543CC0D0}" type="datetimeFigureOut">
               <a:rPr lang="en-US" smtClean="0"/>
-              <a:t>10/16/2026</a:t>
+              <a:t>10/21/2026</a:t>
             </a:fld>
             <a:endParaRPr lang="en-US"/>
           </a:p>
@@ -12927,7 +12927,7 @@
         </p:blipFill>
         <p:spPr>
           <a:xfrm>
-            <a:off x="8382367" y="2398611"/>
+            <a:off x="8356488" y="2398611"/>
             <a:ext cx="1290890" cy="861801"/>
           </a:xfrm>
           <a:prstGeom prst="rect">
@@ -12957,7 +12957,7 @@
         </p:blipFill>
         <p:spPr>
           <a:xfrm>
-            <a:off x="7183943" y="3691313"/>
+            <a:off x="7158064" y="3691313"/>
             <a:ext cx="1388533" cy="1041400"/>
           </a:xfrm>
           <a:prstGeom prst="rect">
@@ -12987,7 +12987,7 @@
         </p:blipFill>
         <p:spPr>
           <a:xfrm>
-            <a:off x="10479765" y="3759799"/>
+            <a:off x="10453886" y="3759799"/>
             <a:ext cx="1253067" cy="939800"/>
           </a:xfrm>
           <a:prstGeom prst="rect">
@@ -13017,7 +13017,7 @@
         </p:blipFill>
         <p:spPr>
           <a:xfrm>
-            <a:off x="8767547" y="5037177"/>
+            <a:off x="8741668" y="5037177"/>
             <a:ext cx="1580274" cy="939801"/>
           </a:xfrm>
           <a:prstGeom prst="rect">
@@ -13047,7 +13047,7 @@
         </p:blipFill>
         <p:spPr>
           <a:xfrm>
-            <a:off x="8816007" y="3759799"/>
+            <a:off x="8790128" y="3759799"/>
             <a:ext cx="1531814" cy="708939"/>
           </a:xfrm>
           <a:prstGeom prst="rect">
@@ -13107,7 +13107,7 @@
         </p:blipFill>
         <p:spPr>
           <a:xfrm>
-            <a:off x="10565138" y="5037177"/>
+            <a:off x="10539259" y="5037177"/>
             <a:ext cx="1577323" cy="1003751"/>
           </a:xfrm>
           <a:prstGeom prst="rect">
@@ -13279,7 +13279,7 @@
         </p:blipFill>
         <p:spPr>
           <a:xfrm>
-            <a:off x="613969" y="3576330"/>
+            <a:off x="720483" y="3576330"/>
             <a:ext cx="2007612" cy="2007612"/>
           </a:xfrm>
           <a:prstGeom prst="rect">
@@ -13309,7 +13309,7 @@
         </p:blipFill>
         <p:spPr>
           <a:xfrm>
-            <a:off x="1009291" y="2508702"/>
+            <a:off x="1115805" y="2508702"/>
             <a:ext cx="1257396" cy="1257396"/>
           </a:xfrm>
           <a:prstGeom prst="rect">
@@ -13339,7 +13339,7 @@
         </p:blipFill>
         <p:spPr>
           <a:xfrm>
-            <a:off x="2660894" y="2572732"/>
+            <a:off x="2767408" y="2572732"/>
             <a:ext cx="1887113" cy="1049745"/>
           </a:xfrm>
           <a:prstGeom prst="rect">
@@ -13399,7 +13399,7 @@
         </p:blipFill>
         <p:spPr>
           <a:xfrm>
-            <a:off x="3192751" y="4015106"/>
+            <a:off x="3299265" y="4015106"/>
             <a:ext cx="1699245" cy="1130060"/>
           </a:xfrm>
           <a:prstGeom prst="rect">
@@ -13429,7 +13429,7 @@
         </p:blipFill>
         <p:spPr>
           <a:xfrm>
-            <a:off x="7797339" y="2824063"/>
+            <a:off x="7903853" y="2824063"/>
             <a:ext cx="2244365" cy="626673"/>
           </a:xfrm>
           <a:prstGeom prst="rect">
@@ -13459,7 +13459,7 @@
         </p:blipFill>
         <p:spPr>
           <a:xfrm>
-            <a:off x="5111295" y="3879436"/>
+            <a:off x="5191930" y="3879436"/>
             <a:ext cx="2350433" cy="1322118"/>
           </a:xfrm>
           <a:prstGeom prst="rect">
@@ -13519,7 +13519,7 @@
         </p:blipFill>
         <p:spPr>
           <a:xfrm>
-            <a:off x="4767306" y="2290094"/>
+            <a:off x="4873820" y="2290094"/>
             <a:ext cx="2647611" cy="1589342"/>
           </a:xfrm>
           <a:prstGeom prst="rect">

--- a/2026 WSDS - Wujian Xue.pptx
+++ b/2026 WSDS - Wujian Xue.pptx
@@ -6850,7 +6850,7 @@
           <a:p>
             <a:fld id="{9DFF5FDE-556D-4288-960F-3880543CC0D0}" type="datetimeFigureOut">
               <a:rPr lang="en-US" smtClean="0"/>
-              <a:t>10/21/2026</a:t>
+              <a:t>10/22/2026</a:t>
             </a:fld>
             <a:endParaRPr lang="en-US"/>
           </a:p>
@@ -7048,7 +7048,7 @@
           <a:p>
             <a:fld id="{9DFF5FDE-556D-4288-960F-3880543CC0D0}" type="datetimeFigureOut">
               <a:rPr lang="en-US" smtClean="0"/>
-              <a:t>10/21/2026</a:t>
+              <a:t>10/22/2026</a:t>
             </a:fld>
             <a:endParaRPr lang="en-US"/>
           </a:p>
@@ -7256,7 +7256,7 @@
           <a:p>
             <a:fld id="{9DFF5FDE-556D-4288-960F-3880543CC0D0}" type="datetimeFigureOut">
               <a:rPr lang="en-US" smtClean="0"/>
-              <a:t>10/21/2026</a:t>
+              <a:t>10/22/2026</a:t>
             </a:fld>
             <a:endParaRPr lang="en-US"/>
           </a:p>
@@ -7454,7 +7454,7 @@
           <a:p>
             <a:fld id="{9DFF5FDE-556D-4288-960F-3880543CC0D0}" type="datetimeFigureOut">
               <a:rPr lang="en-US" smtClean="0"/>
-              <a:t>10/21/2026</a:t>
+              <a:t>10/22/2026</a:t>
             </a:fld>
             <a:endParaRPr lang="en-US"/>
           </a:p>
@@ -7729,7 +7729,7 @@
           <a:p>
             <a:fld id="{9DFF5FDE-556D-4288-960F-3880543CC0D0}" type="datetimeFigureOut">
               <a:rPr lang="en-US" smtClean="0"/>
-              <a:t>10/21/2026</a:t>
+              <a:t>10/22/2026</a:t>
             </a:fld>
             <a:endParaRPr lang="en-US"/>
           </a:p>
@@ -7994,7 +7994,7 @@
           <a:p>
             <a:fld id="{9DFF5FDE-556D-4288-960F-3880543CC0D0}" type="datetimeFigureOut">
               <a:rPr lang="en-US" smtClean="0"/>
-              <a:t>10/21/2026</a:t>
+              <a:t>10/22/2026</a:t>
             </a:fld>
             <a:endParaRPr lang="en-US"/>
           </a:p>
@@ -8406,7 +8406,7 @@
           <a:p>
             <a:fld id="{9DFF5FDE-556D-4288-960F-3880543CC0D0}" type="datetimeFigureOut">
               <a:rPr lang="en-US" smtClean="0"/>
-              <a:t>10/21/2026</a:t>
+              <a:t>10/22/2026</a:t>
             </a:fld>
             <a:endParaRPr lang="en-US"/>
           </a:p>
@@ -8547,7 +8547,7 @@
           <a:p>
             <a:fld id="{9DFF5FDE-556D-4288-960F-3880543CC0D0}" type="datetimeFigureOut">
               <a:rPr lang="en-US" smtClean="0"/>
-              <a:t>10/21/2026</a:t>
+              <a:t>10/22/2026</a:t>
             </a:fld>
             <a:endParaRPr lang="en-US"/>
           </a:p>
@@ -8660,7 +8660,7 @@
           <a:p>
             <a:fld id="{9DFF5FDE-556D-4288-960F-3880543CC0D0}" type="datetimeFigureOut">
               <a:rPr lang="en-US" smtClean="0"/>
-              <a:t>10/21/2026</a:t>
+              <a:t>10/22/2026</a:t>
             </a:fld>
             <a:endParaRPr lang="en-US"/>
           </a:p>
@@ -8971,7 +8971,7 @@
           <a:p>
             <a:fld id="{9DFF5FDE-556D-4288-960F-3880543CC0D0}" type="datetimeFigureOut">
               <a:rPr lang="en-US" smtClean="0"/>
-              <a:t>10/21/2026</a:t>
+              <a:t>10/22/2026</a:t>
             </a:fld>
             <a:endParaRPr lang="en-US"/>
           </a:p>
@@ -9259,7 +9259,7 @@
           <a:p>
             <a:fld id="{9DFF5FDE-556D-4288-960F-3880543CC0D0}" type="datetimeFigureOut">
               <a:rPr lang="en-US" smtClean="0"/>
-              <a:t>10/21/2026</a:t>
+              <a:t>10/22/2026</a:t>
             </a:fld>
             <a:endParaRPr lang="en-US"/>
           </a:p>
@@ -9500,7 +9500,7 @@
           <a:p>
             <a:fld id="{9DFF5FDE-556D-4288-960F-3880543CC0D0}" type="datetimeFigureOut">
               <a:rPr lang="en-US" smtClean="0"/>
-              <a:t>10/21/2026</a:t>
+              <a:t>10/22/2026</a:t>
             </a:fld>
             <a:endParaRPr lang="en-US"/>
           </a:p>
@@ -12251,7 +12251,7 @@
           <a:p>
             <a:r>
               <a:rPr lang="en-US" sz="1200" dirty="0"/>
-              <a:t>2026, Women in Statistics and Data Science Conference, Cincinnati, OH</a:t>
+              <a:t>2026 Women in Statistics and Data Science Conference, Cincinnati, OH</a:t>
             </a:r>
           </a:p>
         </p:txBody>
@@ -13921,7 +13921,12 @@
             <p:ph idx="1"/>
           </p:nvPr>
         </p:nvSpPr>
-        <p:spPr/>
+        <p:spPr>
+          <a:xfrm>
+            <a:off x="838200" y="1825625"/>
+            <a:ext cx="10298502" cy="1620109"/>
+          </a:xfrm>
+        </p:spPr>
         <p:txBody>
           <a:bodyPr/>
           <a:lstStyle/>
@@ -13940,7 +13945,7 @@
           <a:p>
             <a:r>
               <a:rPr lang="en-US" dirty="0"/>
-              <a:t>Loss severity = dollar loss / unpaid principle balance(UPB)</a:t>
+              <a:t>Loss severity = Dollar loss / unpaid principal balance(UPB)</a:t>
             </a:r>
           </a:p>
           <a:p>

--- a/2026 WSDS - Wujian Xue.pptx
+++ b/2026 WSDS - Wujian Xue.pptx
@@ -2226,10 +2226,9 @@
         <a:lstStyle/>
         <a:p>
           <a:r>
-            <a:rPr lang="en-US"/>
+            <a:rPr lang="en-US" dirty="0"/>
             <a:t>Data Prep</a:t>
           </a:r>
-          <a:endParaRPr lang="en-US" dirty="0"/>
         </a:p>
       </dgm:t>
     </dgm:pt>
@@ -3311,10 +3310,9 @@
             <a:buNone/>
           </a:pPr>
           <a:r>
-            <a:rPr lang="en-US" sz="2800" kern="1200"/>
+            <a:rPr lang="en-US" sz="2800" kern="1200" dirty="0"/>
             <a:t>Data Prep</a:t>
           </a:r>
-          <a:endParaRPr lang="en-US" sz="2800" kern="1200" dirty="0"/>
         </a:p>
       </dsp:txBody>
       <dsp:txXfrm>
@@ -6850,7 +6848,7 @@
           <a:p>
             <a:fld id="{9DFF5FDE-556D-4288-960F-3880543CC0D0}" type="datetimeFigureOut">
               <a:rPr lang="en-US" smtClean="0"/>
-              <a:t>10/22/2026</a:t>
+              <a:t>10/23/2026</a:t>
             </a:fld>
             <a:endParaRPr lang="en-US"/>
           </a:p>
@@ -7048,7 +7046,7 @@
           <a:p>
             <a:fld id="{9DFF5FDE-556D-4288-960F-3880543CC0D0}" type="datetimeFigureOut">
               <a:rPr lang="en-US" smtClean="0"/>
-              <a:t>10/22/2026</a:t>
+              <a:t>10/23/2026</a:t>
             </a:fld>
             <a:endParaRPr lang="en-US"/>
           </a:p>
@@ -7256,7 +7254,7 @@
           <a:p>
             <a:fld id="{9DFF5FDE-556D-4288-960F-3880543CC0D0}" type="datetimeFigureOut">
               <a:rPr lang="en-US" smtClean="0"/>
-              <a:t>10/22/2026</a:t>
+              <a:t>10/23/2026</a:t>
             </a:fld>
             <a:endParaRPr lang="en-US"/>
           </a:p>
@@ -7454,7 +7452,7 @@
           <a:p>
             <a:fld id="{9DFF5FDE-556D-4288-960F-3880543CC0D0}" type="datetimeFigureOut">
               <a:rPr lang="en-US" smtClean="0"/>
-              <a:t>10/22/2026</a:t>
+              <a:t>10/23/2026</a:t>
             </a:fld>
             <a:endParaRPr lang="en-US"/>
           </a:p>
@@ -7729,7 +7727,7 @@
           <a:p>
             <a:fld id="{9DFF5FDE-556D-4288-960F-3880543CC0D0}" type="datetimeFigureOut">
               <a:rPr lang="en-US" smtClean="0"/>
-              <a:t>10/22/2026</a:t>
+              <a:t>10/23/2026</a:t>
             </a:fld>
             <a:endParaRPr lang="en-US"/>
           </a:p>
@@ -7994,7 +7992,7 @@
           <a:p>
             <a:fld id="{9DFF5FDE-556D-4288-960F-3880543CC0D0}" type="datetimeFigureOut">
               <a:rPr lang="en-US" smtClean="0"/>
-              <a:t>10/22/2026</a:t>
+              <a:t>10/23/2026</a:t>
             </a:fld>
             <a:endParaRPr lang="en-US"/>
           </a:p>
@@ -8406,7 +8404,7 @@
           <a:p>
             <a:fld id="{9DFF5FDE-556D-4288-960F-3880543CC0D0}" type="datetimeFigureOut">
               <a:rPr lang="en-US" smtClean="0"/>
-              <a:t>10/22/2026</a:t>
+              <a:t>10/23/2026</a:t>
             </a:fld>
             <a:endParaRPr lang="en-US"/>
           </a:p>
@@ -8547,7 +8545,7 @@
           <a:p>
             <a:fld id="{9DFF5FDE-556D-4288-960F-3880543CC0D0}" type="datetimeFigureOut">
               <a:rPr lang="en-US" smtClean="0"/>
-              <a:t>10/22/2026</a:t>
+              <a:t>10/23/2026</a:t>
             </a:fld>
             <a:endParaRPr lang="en-US"/>
           </a:p>
@@ -8660,7 +8658,7 @@
           <a:p>
             <a:fld id="{9DFF5FDE-556D-4288-960F-3880543CC0D0}" type="datetimeFigureOut">
               <a:rPr lang="en-US" smtClean="0"/>
-              <a:t>10/22/2026</a:t>
+              <a:t>10/23/2026</a:t>
             </a:fld>
             <a:endParaRPr lang="en-US"/>
           </a:p>
@@ -8971,7 +8969,7 @@
           <a:p>
             <a:fld id="{9DFF5FDE-556D-4288-960F-3880543CC0D0}" type="datetimeFigureOut">
               <a:rPr lang="en-US" smtClean="0"/>
-              <a:t>10/22/2026</a:t>
+              <a:t>10/23/2026</a:t>
             </a:fld>
             <a:endParaRPr lang="en-US"/>
           </a:p>
@@ -9259,7 +9257,7 @@
           <a:p>
             <a:fld id="{9DFF5FDE-556D-4288-960F-3880543CC0D0}" type="datetimeFigureOut">
               <a:rPr lang="en-US" smtClean="0"/>
-              <a:t>10/22/2026</a:t>
+              <a:t>10/23/2026</a:t>
             </a:fld>
             <a:endParaRPr lang="en-US"/>
           </a:p>
@@ -9500,7 +9498,7 @@
           <a:p>
             <a:fld id="{9DFF5FDE-556D-4288-960F-3880543CC0D0}" type="datetimeFigureOut">
               <a:rPr lang="en-US" smtClean="0"/>
-              <a:t>10/22/2026</a:t>
+              <a:t>10/23/2026</a:t>
             </a:fld>
             <a:endParaRPr lang="en-US"/>
           </a:p>
@@ -12030,7 +12028,7 @@
         </p:nvSpPr>
         <p:spPr>
           <a:xfrm>
-            <a:off x="5029200" y="5414009"/>
+            <a:off x="8117457" y="5275987"/>
             <a:ext cx="1173480" cy="332423"/>
           </a:xfrm>
         </p:spPr>
@@ -12077,7 +12075,7 @@
         </p:blipFill>
         <p:spPr>
           <a:xfrm>
-            <a:off x="4366260" y="2468880"/>
+            <a:off x="7152592" y="2468880"/>
             <a:ext cx="2499360" cy="2499360"/>
           </a:xfrm>
           <a:prstGeom prst="rect">
@@ -12085,6 +12083,239 @@
           </a:prstGeom>
         </p:spPr>
       </p:pic>
+      <p:pic>
+        <p:nvPicPr>
+          <p:cNvPr id="6" name="Picture 5">
+            <a:extLst>
+              <a:ext uri="{FF2B5EF4-FFF2-40B4-BE49-F238E27FC236}">
+                <a16:creationId xmlns:a16="http://schemas.microsoft.com/office/drawing/2014/main" id="{BA71E686-A93C-9DA4-DA8D-FD7AA5F5B8DF}"/>
+              </a:ext>
+            </a:extLst>
+          </p:cNvPr>
+          <p:cNvPicPr>
+            <a:picLocks noChangeAspect="1"/>
+          </p:cNvPicPr>
+          <p:nvPr/>
+        </p:nvPicPr>
+        <p:blipFill>
+          <a:blip r:embed="rId3"/>
+          <a:stretch>
+            <a:fillRect/>
+          </a:stretch>
+        </p:blipFill>
+        <p:spPr>
+          <a:xfrm>
+            <a:off x="3064678" y="2500145"/>
+            <a:ext cx="2415264" cy="2436829"/>
+          </a:xfrm>
+          <a:prstGeom prst="rect">
+            <a:avLst/>
+          </a:prstGeom>
+        </p:spPr>
+      </p:pic>
+      <p:sp>
+        <p:nvSpPr>
+          <p:cNvPr id="7" name="Content Placeholder 2">
+            <a:extLst>
+              <a:ext uri="{FF2B5EF4-FFF2-40B4-BE49-F238E27FC236}">
+                <a16:creationId xmlns:a16="http://schemas.microsoft.com/office/drawing/2014/main" id="{891DA0FC-43EF-7ABC-7992-5B39D45AF52D}"/>
+              </a:ext>
+            </a:extLst>
+          </p:cNvPr>
+          <p:cNvSpPr txBox="1">
+            <a:spLocks/>
+          </p:cNvSpPr>
+          <p:nvPr/>
+        </p:nvSpPr>
+        <p:spPr>
+          <a:xfrm>
+            <a:off x="3431234" y="5275986"/>
+            <a:ext cx="1682151" cy="332423"/>
+          </a:xfrm>
+          <a:prstGeom prst="rect">
+            <a:avLst/>
+          </a:prstGeom>
+        </p:spPr>
+        <p:txBody>
+          <a:bodyPr vert="horz" lIns="91440" tIns="45720" rIns="91440" bIns="45720" rtlCol="0">
+            <a:normAutofit fontScale="70000" lnSpcReduction="20000"/>
+          </a:bodyPr>
+          <a:lstStyle>
+            <a:lvl1pPr marL="228600" indent="-228600" algn="l" defTabSz="914400" rtl="0" eaLnBrk="1" latinLnBrk="0" hangingPunct="1">
+              <a:lnSpc>
+                <a:spcPct val="90000"/>
+              </a:lnSpc>
+              <a:spcBef>
+                <a:spcPts val="1000"/>
+              </a:spcBef>
+              <a:buFont typeface="Arial" panose="020B0604020202020204" pitchFamily="34" charset="0"/>
+              <a:buChar char="•"/>
+              <a:defRPr sz="2800" kern="1200">
+                <a:solidFill>
+                  <a:schemeClr val="tx1"/>
+                </a:solidFill>
+                <a:latin typeface="+mn-lt"/>
+                <a:ea typeface="+mn-ea"/>
+                <a:cs typeface="+mn-cs"/>
+              </a:defRPr>
+            </a:lvl1pPr>
+            <a:lvl2pPr marL="685800" indent="-228600" algn="l" defTabSz="914400" rtl="0" eaLnBrk="1" latinLnBrk="0" hangingPunct="1">
+              <a:lnSpc>
+                <a:spcPct val="90000"/>
+              </a:lnSpc>
+              <a:spcBef>
+                <a:spcPts val="500"/>
+              </a:spcBef>
+              <a:buFont typeface="Arial" panose="020B0604020202020204" pitchFamily="34" charset="0"/>
+              <a:buChar char="•"/>
+              <a:defRPr sz="2400" kern="1200">
+                <a:solidFill>
+                  <a:schemeClr val="tx1"/>
+                </a:solidFill>
+                <a:latin typeface="+mn-lt"/>
+                <a:ea typeface="+mn-ea"/>
+                <a:cs typeface="+mn-cs"/>
+              </a:defRPr>
+            </a:lvl2pPr>
+            <a:lvl3pPr marL="1143000" indent="-228600" algn="l" defTabSz="914400" rtl="0" eaLnBrk="1" latinLnBrk="0" hangingPunct="1">
+              <a:lnSpc>
+                <a:spcPct val="90000"/>
+              </a:lnSpc>
+              <a:spcBef>
+                <a:spcPts val="500"/>
+              </a:spcBef>
+              <a:buFont typeface="Arial" panose="020B0604020202020204" pitchFamily="34" charset="0"/>
+              <a:buChar char="•"/>
+              <a:defRPr sz="2000" kern="1200">
+                <a:solidFill>
+                  <a:schemeClr val="tx1"/>
+                </a:solidFill>
+                <a:latin typeface="+mn-lt"/>
+                <a:ea typeface="+mn-ea"/>
+                <a:cs typeface="+mn-cs"/>
+              </a:defRPr>
+            </a:lvl3pPr>
+            <a:lvl4pPr marL="1600200" indent="-228600" algn="l" defTabSz="914400" rtl="0" eaLnBrk="1" latinLnBrk="0" hangingPunct="1">
+              <a:lnSpc>
+                <a:spcPct val="90000"/>
+              </a:lnSpc>
+              <a:spcBef>
+                <a:spcPts val="500"/>
+              </a:spcBef>
+              <a:buFont typeface="Arial" panose="020B0604020202020204" pitchFamily="34" charset="0"/>
+              <a:buChar char="•"/>
+              <a:defRPr sz="1800" kern="1200">
+                <a:solidFill>
+                  <a:schemeClr val="tx1"/>
+                </a:solidFill>
+                <a:latin typeface="+mn-lt"/>
+                <a:ea typeface="+mn-ea"/>
+                <a:cs typeface="+mn-cs"/>
+              </a:defRPr>
+            </a:lvl4pPr>
+            <a:lvl5pPr marL="2057400" indent="-228600" algn="l" defTabSz="914400" rtl="0" eaLnBrk="1" latinLnBrk="0" hangingPunct="1">
+              <a:lnSpc>
+                <a:spcPct val="90000"/>
+              </a:lnSpc>
+              <a:spcBef>
+                <a:spcPts val="500"/>
+              </a:spcBef>
+              <a:buFont typeface="Arial" panose="020B0604020202020204" pitchFamily="34" charset="0"/>
+              <a:buChar char="•"/>
+              <a:defRPr sz="1800" kern="1200">
+                <a:solidFill>
+                  <a:schemeClr val="tx1"/>
+                </a:solidFill>
+                <a:latin typeface="+mn-lt"/>
+                <a:ea typeface="+mn-ea"/>
+                <a:cs typeface="+mn-cs"/>
+              </a:defRPr>
+            </a:lvl5pPr>
+            <a:lvl6pPr marL="2514600" indent="-228600" algn="l" defTabSz="914400" rtl="0" eaLnBrk="1" latinLnBrk="0" hangingPunct="1">
+              <a:lnSpc>
+                <a:spcPct val="90000"/>
+              </a:lnSpc>
+              <a:spcBef>
+                <a:spcPts val="500"/>
+              </a:spcBef>
+              <a:buFont typeface="Arial" panose="020B0604020202020204" pitchFamily="34" charset="0"/>
+              <a:buChar char="•"/>
+              <a:defRPr sz="1800" kern="1200">
+                <a:solidFill>
+                  <a:schemeClr val="tx1"/>
+                </a:solidFill>
+                <a:latin typeface="+mn-lt"/>
+                <a:ea typeface="+mn-ea"/>
+                <a:cs typeface="+mn-cs"/>
+              </a:defRPr>
+            </a:lvl6pPr>
+            <a:lvl7pPr marL="2971800" indent="-228600" algn="l" defTabSz="914400" rtl="0" eaLnBrk="1" latinLnBrk="0" hangingPunct="1">
+              <a:lnSpc>
+                <a:spcPct val="90000"/>
+              </a:lnSpc>
+              <a:spcBef>
+                <a:spcPts val="500"/>
+              </a:spcBef>
+              <a:buFont typeface="Arial" panose="020B0604020202020204" pitchFamily="34" charset="0"/>
+              <a:buChar char="•"/>
+              <a:defRPr sz="1800" kern="1200">
+                <a:solidFill>
+                  <a:schemeClr val="tx1"/>
+                </a:solidFill>
+                <a:latin typeface="+mn-lt"/>
+                <a:ea typeface="+mn-ea"/>
+                <a:cs typeface="+mn-cs"/>
+              </a:defRPr>
+            </a:lvl7pPr>
+            <a:lvl8pPr marL="3429000" indent="-228600" algn="l" defTabSz="914400" rtl="0" eaLnBrk="1" latinLnBrk="0" hangingPunct="1">
+              <a:lnSpc>
+                <a:spcPct val="90000"/>
+              </a:lnSpc>
+              <a:spcBef>
+                <a:spcPts val="500"/>
+              </a:spcBef>
+              <a:buFont typeface="Arial" panose="020B0604020202020204" pitchFamily="34" charset="0"/>
+              <a:buChar char="•"/>
+              <a:defRPr sz="1800" kern="1200">
+                <a:solidFill>
+                  <a:schemeClr val="tx1"/>
+                </a:solidFill>
+                <a:latin typeface="+mn-lt"/>
+                <a:ea typeface="+mn-ea"/>
+                <a:cs typeface="+mn-cs"/>
+              </a:defRPr>
+            </a:lvl8pPr>
+            <a:lvl9pPr marL="3886200" indent="-228600" algn="l" defTabSz="914400" rtl="0" eaLnBrk="1" latinLnBrk="0" hangingPunct="1">
+              <a:lnSpc>
+                <a:spcPct val="90000"/>
+              </a:lnSpc>
+              <a:spcBef>
+                <a:spcPts val="500"/>
+              </a:spcBef>
+              <a:buFont typeface="Arial" panose="020B0604020202020204" pitchFamily="34" charset="0"/>
+              <a:buChar char="•"/>
+              <a:defRPr sz="1800" kern="1200">
+                <a:solidFill>
+                  <a:schemeClr val="tx1"/>
+                </a:solidFill>
+                <a:latin typeface="+mn-lt"/>
+                <a:ea typeface="+mn-ea"/>
+                <a:cs typeface="+mn-cs"/>
+              </a:defRPr>
+            </a:lvl9pPr>
+          </a:lstStyle>
+          <a:p>
+            <a:pPr marL="0" indent="0">
+              <a:buFont typeface="Arial" panose="020B0604020202020204" pitchFamily="34" charset="0"/>
+              <a:buNone/>
+            </a:pPr>
+            <a:r>
+              <a:rPr lang="en-US" dirty="0"/>
+              <a:t>My LinkedIn</a:t>
+            </a:r>
+          </a:p>
+        </p:txBody>
+      </p:sp>
     </p:spTree>
     <p:extLst>
       <p:ext uri="{BB962C8B-B14F-4D97-AF65-F5344CB8AC3E}">
@@ -14995,13 +15226,8 @@
           <a:p>
             <a:r>
               <a:rPr lang="en-US" dirty="0"/>
-              <a:t>Two </a:t>
-            </a:r>
-            <a:r>
-              <a:rPr lang="en-US"/>
-              <a:t>step regression</a:t>
-            </a:r>
-            <a:endParaRPr lang="en-US" dirty="0"/>
+              <a:t>Two step regression</a:t>
+            </a:r>
           </a:p>
         </p:txBody>
       </p:sp>
@@ -15435,12 +15661,12 @@
         <p:spPr>
           <a:xfrm>
             <a:off x="339016" y="2735206"/>
-            <a:ext cx="4012387" cy="468559"/>
+            <a:ext cx="4012387" cy="803156"/>
           </a:xfrm>
         </p:spPr>
         <p:txBody>
           <a:bodyPr>
-            <a:normAutofit fontScale="40000" lnSpcReduction="20000"/>
+            <a:normAutofit fontScale="47500" lnSpcReduction="20000"/>
           </a:bodyPr>
           <a:lstStyle/>
           <a:p>
@@ -15461,6 +15687,12 @@
             <a:r>
               <a:rPr lang="en-US" dirty="0"/>
               <a:t>PROC GENMOD</a:t>
+            </a:r>
+          </a:p>
+          <a:p>
+            <a:r>
+              <a:rPr lang="en-US" dirty="0"/>
+              <a:t>m</a:t>
             </a:r>
           </a:p>
         </p:txBody>
